--- a/slides/week-04-lecture-draft.pptx
+++ b/slides/week-04-lecture-draft.pptx
@@ -24,9 +24,12 @@
     <p:sldId id="272" r:id="rId18"/>
     <p:sldId id="273" r:id="rId19"/>
     <p:sldId id="274" r:id="rId20"/>
+    <p:sldId id="275" r:id="rId21"/>
+    <p:sldId id="276" r:id="rId22"/>
+    <p:sldId id="277" r:id="rId23"/>
   </p:sldIdLst>
   <p:notesMasterIdLst>
-    <p:notesMasterId r:id="rId21"/>
+    <p:notesMasterId r:id="rId24"/>
   </p:notesMasterIdLst>
   <p:sldSz cx="12191695" cy="6858000"/>
   <p:notesSz cx="6858000" cy="12191695"/>
@@ -1512,6 +1515,270 @@
             <a:fld id="{F7021451-1387-4CA6-816F-3879F97B5CBC}" type="slidenum">
               <a:rPr lang="en-US"/>
               <a:t>2</a:t>
+            </a:fld>
+            <a:endParaRPr lang="en-US"/>
+          </a:p>
+        </p:txBody>
+      </p:sp>
+    </p:spTree>
+    <p:extLst>
+      <p:ext uri="{BB962C8B-B14F-4D97-AF65-F5344CB8AC3E}">
+        <p14:creationId xmlns:p14="http://schemas.microsoft.com/office/powerpoint/2010/main" val="1024086991"/>
+      </p:ext>
+    </p:extLst>
+  </p:cSld>
+  <p:clrMapOvr>
+    <a:masterClrMapping/>
+  </p:clrMapOvr>
+</p:notes>
+</file>
+
+<file path=ppt/notesSlides/notesSlide20.xml><?xml version="1.0" encoding="utf-8"?>
+<p:notes xmlns:a="http://schemas.openxmlformats.org/drawingml/2006/main" xmlns:r="http://schemas.openxmlformats.org/officeDocument/2006/relationships" xmlns:p="http://schemas.openxmlformats.org/presentationml/2006/main">
+  <p:cSld>
+    <p:spTree>
+      <p:nvGrpSpPr>
+        <p:cNvPr id="1" name=""/>
+        <p:cNvGrpSpPr/>
+        <p:nvPr/>
+      </p:nvGrpSpPr>
+      <p:grpSpPr>
+        <a:xfrm>
+          <a:off x="0" y="0"/>
+          <a:ext cx="0" cy="0"/>
+          <a:chOff x="0" y="0"/>
+          <a:chExt cx="0" cy="0"/>
+        </a:xfrm>
+      </p:grpSpPr>
+      <p:sp>
+        <p:nvSpPr>
+          <p:cNvPr id="2" name="Slide Image Placeholder 1"/>
+          <p:cNvSpPr>
+            <a:spLocks noGrp="1" noRot="1" noChangeAspect="1"/>
+          </p:cNvSpPr>
+          <p:nvPr>
+            <p:ph type="sldImg"/>
+          </p:nvPr>
+        </p:nvSpPr>
+        <p:spPr/>
+      </p:sp>
+      <p:sp>
+        <p:nvSpPr>
+          <p:cNvPr id="3" name="Notes Placeholder 2"/>
+          <p:cNvSpPr>
+            <a:spLocks noGrp="1"/>
+          </p:cNvSpPr>
+          <p:nvPr>
+            <p:ph type="body" idx="1"/>
+          </p:nvPr>
+        </p:nvSpPr>
+        <p:spPr/>
+        <p:txBody>
+          <a:bodyPr/>
+          <a:lstStyle/>
+          <a:p>
+            <a:r>
+              <a:rPr lang="en-US" dirty="0"/>
+              <a:t/>
+            </a:r>
+            <a:endParaRPr lang="en-US" dirty="0"/>
+          </a:p>
+        </p:txBody>
+      </p:sp>
+      <p:sp>
+        <p:nvSpPr>
+          <p:cNvPr id="4" name="Slide Number Placeholder 3"/>
+          <p:cNvSpPr>
+            <a:spLocks noGrp="1"/>
+          </p:cNvSpPr>
+          <p:nvPr>
+            <p:ph type="sldNum" sz="quarter" idx="10"/>
+          </p:nvPr>
+        </p:nvSpPr>
+        <p:spPr/>
+        <p:txBody>
+          <a:bodyPr/>
+          <a:lstStyle/>
+          <a:p>
+            <a:fld id="{F7021451-1387-4CA6-816F-3879F97B5CBC}" type="slidenum">
+              <a:rPr lang="en-US"/>
+              <a:t>20</a:t>
+            </a:fld>
+            <a:endParaRPr lang="en-US"/>
+          </a:p>
+        </p:txBody>
+      </p:sp>
+    </p:spTree>
+    <p:extLst>
+      <p:ext uri="{BB962C8B-B14F-4D97-AF65-F5344CB8AC3E}">
+        <p14:creationId xmlns:p14="http://schemas.microsoft.com/office/powerpoint/2010/main" val="1024086991"/>
+      </p:ext>
+    </p:extLst>
+  </p:cSld>
+  <p:clrMapOvr>
+    <a:masterClrMapping/>
+  </p:clrMapOvr>
+</p:notes>
+</file>
+
+<file path=ppt/notesSlides/notesSlide21.xml><?xml version="1.0" encoding="utf-8"?>
+<p:notes xmlns:a="http://schemas.openxmlformats.org/drawingml/2006/main" xmlns:r="http://schemas.openxmlformats.org/officeDocument/2006/relationships" xmlns:p="http://schemas.openxmlformats.org/presentationml/2006/main">
+  <p:cSld>
+    <p:spTree>
+      <p:nvGrpSpPr>
+        <p:cNvPr id="1" name=""/>
+        <p:cNvGrpSpPr/>
+        <p:nvPr/>
+      </p:nvGrpSpPr>
+      <p:grpSpPr>
+        <a:xfrm>
+          <a:off x="0" y="0"/>
+          <a:ext cx="0" cy="0"/>
+          <a:chOff x="0" y="0"/>
+          <a:chExt cx="0" cy="0"/>
+        </a:xfrm>
+      </p:grpSpPr>
+      <p:sp>
+        <p:nvSpPr>
+          <p:cNvPr id="2" name="Slide Image Placeholder 1"/>
+          <p:cNvSpPr>
+            <a:spLocks noGrp="1" noRot="1" noChangeAspect="1"/>
+          </p:cNvSpPr>
+          <p:nvPr>
+            <p:ph type="sldImg"/>
+          </p:nvPr>
+        </p:nvSpPr>
+        <p:spPr/>
+      </p:sp>
+      <p:sp>
+        <p:nvSpPr>
+          <p:cNvPr id="3" name="Notes Placeholder 2"/>
+          <p:cNvSpPr>
+            <a:spLocks noGrp="1"/>
+          </p:cNvSpPr>
+          <p:nvPr>
+            <p:ph type="body" idx="1"/>
+          </p:nvPr>
+        </p:nvSpPr>
+        <p:spPr/>
+        <p:txBody>
+          <a:bodyPr/>
+          <a:lstStyle/>
+          <a:p>
+            <a:r>
+              <a:rPr lang="en-US" dirty="0"/>
+              <a:t/>
+            </a:r>
+            <a:endParaRPr lang="en-US" dirty="0"/>
+          </a:p>
+        </p:txBody>
+      </p:sp>
+      <p:sp>
+        <p:nvSpPr>
+          <p:cNvPr id="4" name="Slide Number Placeholder 3"/>
+          <p:cNvSpPr>
+            <a:spLocks noGrp="1"/>
+          </p:cNvSpPr>
+          <p:nvPr>
+            <p:ph type="sldNum" sz="quarter" idx="10"/>
+          </p:nvPr>
+        </p:nvSpPr>
+        <p:spPr/>
+        <p:txBody>
+          <a:bodyPr/>
+          <a:lstStyle/>
+          <a:p>
+            <a:fld id="{F7021451-1387-4CA6-816F-3879F97B5CBC}" type="slidenum">
+              <a:rPr lang="en-US"/>
+              <a:t>21</a:t>
+            </a:fld>
+            <a:endParaRPr lang="en-US"/>
+          </a:p>
+        </p:txBody>
+      </p:sp>
+    </p:spTree>
+    <p:extLst>
+      <p:ext uri="{BB962C8B-B14F-4D97-AF65-F5344CB8AC3E}">
+        <p14:creationId xmlns:p14="http://schemas.microsoft.com/office/powerpoint/2010/main" val="1024086991"/>
+      </p:ext>
+    </p:extLst>
+  </p:cSld>
+  <p:clrMapOvr>
+    <a:masterClrMapping/>
+  </p:clrMapOvr>
+</p:notes>
+</file>
+
+<file path=ppt/notesSlides/notesSlide22.xml><?xml version="1.0" encoding="utf-8"?>
+<p:notes xmlns:a="http://schemas.openxmlformats.org/drawingml/2006/main" xmlns:r="http://schemas.openxmlformats.org/officeDocument/2006/relationships" xmlns:p="http://schemas.openxmlformats.org/presentationml/2006/main">
+  <p:cSld>
+    <p:spTree>
+      <p:nvGrpSpPr>
+        <p:cNvPr id="1" name=""/>
+        <p:cNvGrpSpPr/>
+        <p:nvPr/>
+      </p:nvGrpSpPr>
+      <p:grpSpPr>
+        <a:xfrm>
+          <a:off x="0" y="0"/>
+          <a:ext cx="0" cy="0"/>
+          <a:chOff x="0" y="0"/>
+          <a:chExt cx="0" cy="0"/>
+        </a:xfrm>
+      </p:grpSpPr>
+      <p:sp>
+        <p:nvSpPr>
+          <p:cNvPr id="2" name="Slide Image Placeholder 1"/>
+          <p:cNvSpPr>
+            <a:spLocks noGrp="1" noRot="1" noChangeAspect="1"/>
+          </p:cNvSpPr>
+          <p:nvPr>
+            <p:ph type="sldImg"/>
+          </p:nvPr>
+        </p:nvSpPr>
+        <p:spPr/>
+      </p:sp>
+      <p:sp>
+        <p:nvSpPr>
+          <p:cNvPr id="3" name="Notes Placeholder 2"/>
+          <p:cNvSpPr>
+            <a:spLocks noGrp="1"/>
+          </p:cNvSpPr>
+          <p:nvPr>
+            <p:ph type="body" idx="1"/>
+          </p:nvPr>
+        </p:nvSpPr>
+        <p:spPr/>
+        <p:txBody>
+          <a:bodyPr/>
+          <a:lstStyle/>
+          <a:p>
+            <a:r>
+              <a:rPr lang="en-US" dirty="0"/>
+              <a:t/>
+            </a:r>
+            <a:endParaRPr lang="en-US" dirty="0"/>
+          </a:p>
+        </p:txBody>
+      </p:sp>
+      <p:sp>
+        <p:nvSpPr>
+          <p:cNvPr id="4" name="Slide Number Placeholder 3"/>
+          <p:cNvSpPr>
+            <a:spLocks noGrp="1"/>
+          </p:cNvSpPr>
+          <p:nvPr>
+            <p:ph type="sldNum" sz="quarter" idx="10"/>
+          </p:nvPr>
+        </p:nvSpPr>
+        <p:spPr/>
+        <p:txBody>
+          <a:bodyPr/>
+          <a:lstStyle/>
+          <a:p>
+            <a:fld id="{F7021451-1387-4CA6-816F-3879F97B5CBC}" type="slidenum">
+              <a:rPr lang="en-US"/>
+              <a:t>22</a:t>
             </a:fld>
             <a:endParaRPr lang="en-US"/>
           </a:p>
@@ -2775,13 +3042,13 @@
             <a:r>
               <a:rPr lang="en-US" sz="1300" b="1" spc="300" kern="0" dirty="0">
                 <a:solidFill>
-                  <a:srgbClr val="7A3B2E"/>
+                  <a:srgbClr val="B9852F"/>
                 </a:solidFill>
                 <a:latin typeface="Calibri" pitchFamily="34" charset="0"/>
                 <a:ea typeface="Calibri" pitchFamily="34" charset="-122"/>
                 <a:cs typeface="Calibri" pitchFamily="34" charset="-120"/>
               </a:rPr>
-              <a:t>IDEA TWO</a:t>
+              <a:t>HOW IT LEARNS</a:t>
             </a:r>
             <a:endParaRPr lang="en-US" sz="1300" dirty="0"/>
           </a:p>
@@ -2820,7 +3087,7 @@
                 <a:ea typeface="Cambria" pitchFamily="34" charset="-122"/>
                 <a:cs typeface="Cambria" pitchFamily="34" charset="-120"/>
               </a:rPr>
-              <a:t>Where the numbers come from</a:t>
+              <a:t>Rolling downhill in fog</a:t>
             </a:r>
             <a:endParaRPr lang="en-US" sz="3400" dirty="0"/>
           </a:p>
@@ -2828,7 +3095,7 @@
       </p:sp>
       <p:pic>
         <p:nvPicPr>
-          <p:cNvPr id="4" name="Image 0" descr="/tmp/figs/w4_skipgram.png">    </p:cNvPr>
+          <p:cNvPr id="4" name="Image 0" descr="/tmp/figs/w4_gradient.png">    </p:cNvPr>
           <p:cNvPicPr>
             <a:picLocks noChangeAspect="1"/>
           </p:cNvPicPr>
@@ -2841,8 +3108,8 @@
         </p:blipFill>
         <p:spPr>
           <a:xfrm>
-            <a:off x="640080" y="2011680"/>
-            <a:ext cx="6583680" cy="3383280"/>
+            <a:off x="2194560" y="1737360"/>
+            <a:ext cx="7772400" cy="4114800"/>
           </a:xfrm>
           <a:prstGeom prst="rect">
             <a:avLst/>
@@ -2857,137 +3124,34 @@
         </p:nvSpPr>
         <p:spPr>
           <a:xfrm>
-            <a:off x="7406640" y="2011680"/>
-            <a:ext cx="4114800" cy="4023360"/>
-          </a:xfrm>
-          <a:prstGeom prst="rect">
-            <a:avLst/>
-          </a:prstGeom>
-          <a:noFill/>
-          <a:ln/>
-        </p:spPr>
-        <p:txBody>
-          <a:bodyPr wrap="square" rtlCol="0" anchor="t"/>
-          <a:lstStyle/>
-          <a:p>
-            <a:pPr marL="152400" indent="-152400">
-              <a:lnSpc>
-                <a:spcPct val="115000"/>
-              </a:lnSpc>
-              <a:spcAft>
-                <a:spcPts val="1000"/>
-              </a:spcAft>
-              <a:buSzPct val="100000"/>
-              <a:buChar char="•"/>
-            </a:pPr>
-            <a:r>
-              <a:rPr lang="en-US" sz="1400" dirty="0">
+            <a:off x="640080" y="5897880"/>
+            <a:ext cx="10881360" cy="411480"/>
+          </a:xfrm>
+          <a:prstGeom prst="rect">
+            <a:avLst/>
+          </a:prstGeom>
+          <a:noFill/>
+          <a:ln/>
+        </p:spPr>
+        <p:txBody>
+          <a:bodyPr wrap="square" rtlCol="0" anchor="ctr"/>
+          <a:lstStyle/>
+          <a:p>
+            <a:pPr indent="0" marL="0">
+              <a:buNone/>
+            </a:pPr>
+            <a:r>
+              <a:rPr lang="en-US" sz="1600" i="1" dirty="0">
                 <a:solidFill>
                   <a:srgbClr val="1A1A1A"/>
                 </a:solidFill>
-                <a:latin typeface="Calibri" pitchFamily="34" charset="0"/>
-                <a:ea typeface="Calibri" pitchFamily="34" charset="-122"/>
-                <a:cs typeface="Calibri" pitchFamily="34" charset="-120"/>
-              </a:rPr>
-              <a:t>A word is known by the company it keeps.</a:t>
-            </a:r>
-            <a:endParaRPr lang="en-US" sz="1400" dirty="0"/>
-          </a:p>
-          <a:p>
-            <a:pPr marL="152400" indent="-152400">
-              <a:lnSpc>
-                <a:spcPct val="115000"/>
-              </a:lnSpc>
-              <a:spcAft>
-                <a:spcPts val="1000"/>
-              </a:spcAft>
-              <a:buSzPct val="100000"/>
-              <a:buChar char="•"/>
-            </a:pPr>
-            <a:r>
-              <a:rPr lang="en-US" sz="1400" dirty="0">
-                <a:solidFill>
-                  <a:srgbClr val="1A1A1A"/>
-                </a:solidFill>
-                <a:latin typeface="Calibri" pitchFamily="34" charset="0"/>
-                <a:ea typeface="Calibri" pitchFamily="34" charset="-122"/>
-                <a:cs typeface="Calibri" pitchFamily="34" charset="-120"/>
-              </a:rPr>
-              <a:t>So train a small network on a fake task: given a word, guess the words around it.</a:t>
-            </a:r>
-            <a:endParaRPr lang="en-US" sz="1400" dirty="0"/>
-          </a:p>
-          <a:p>
-            <a:pPr marL="152400" indent="-152400">
-              <a:lnSpc>
-                <a:spcPct val="115000"/>
-              </a:lnSpc>
-              <a:spcAft>
-                <a:spcPts val="1000"/>
-              </a:spcAft>
-              <a:buSzPct val="100000"/>
-              <a:buChar char="•"/>
-            </a:pPr>
-            <a:r>
-              <a:rPr lang="en-US" sz="1400" dirty="0">
-                <a:solidFill>
-                  <a:srgbClr val="1A1A1A"/>
-                </a:solidFill>
-                <a:latin typeface="Calibri" pitchFamily="34" charset="0"/>
-                <a:ea typeface="Calibri" pitchFamily="34" charset="-122"/>
-                <a:cs typeface="Calibri" pitchFamily="34" charset="-120"/>
-              </a:rPr>
-              <a:t>Slide that window over a billion words of text.</a:t>
-            </a:r>
-            <a:endParaRPr lang="en-US" sz="1400" dirty="0"/>
-          </a:p>
-          <a:p>
-            <a:pPr marL="152400" indent="-152400">
-              <a:lnSpc>
-                <a:spcPct val="115000"/>
-              </a:lnSpc>
-              <a:spcAft>
-                <a:spcPts val="1000"/>
-              </a:spcAft>
-              <a:buSzPct val="100000"/>
-              <a:buChar char="•"/>
-            </a:pPr>
-            <a:r>
-              <a:rPr lang="en-US" sz="1400" dirty="0">
-                <a:solidFill>
-                  <a:srgbClr val="1A1A1A"/>
-                </a:solidFill>
-                <a:latin typeface="Calibri" pitchFamily="34" charset="0"/>
-                <a:ea typeface="Calibri" pitchFamily="34" charset="-122"/>
-                <a:cs typeface="Calibri" pitchFamily="34" charset="-120"/>
-              </a:rPr>
-              <a:t>Throw the predictions away. Keep the hidden layer: one vector per word.</a:t>
-            </a:r>
-            <a:endParaRPr lang="en-US" sz="1400" dirty="0"/>
-          </a:p>
-          <a:p>
-            <a:pPr marL="152400" indent="-152400">
-              <a:lnSpc>
-                <a:spcPct val="115000"/>
-              </a:lnSpc>
-              <a:spcAft>
-                <a:spcPts val="1000"/>
-              </a:spcAft>
-              <a:buSzPct val="100000"/>
-              <a:buChar char="•"/>
-            </a:pPr>
-            <a:r>
-              <a:rPr lang="en-US" sz="1400" dirty="0">
-                <a:solidFill>
-                  <a:srgbClr val="1A1A1A"/>
-                </a:solidFill>
-                <a:latin typeface="Calibri" pitchFamily="34" charset="0"/>
-                <a:ea typeface="Calibri" pitchFamily="34" charset="-122"/>
-                <a:cs typeface="Calibri" pitchFamily="34" charset="-120"/>
-              </a:rPr>
-              <a:t>That is word2vec, and it is the machinery behind this morning's paper.</a:t>
-            </a:r>
-            <a:endParaRPr lang="en-US" sz="1400" dirty="0"/>
+                <a:latin typeface="Cambria" pitchFamily="34" charset="0"/>
+                <a:ea typeface="Cambria" pitchFamily="34" charset="-122"/>
+                <a:cs typeface="Cambria" pitchFamily="34" charset="-120"/>
+              </a:rPr>
+              <a:t>A loss says how wrong you are. Step downhill, repeat, thousands of weights at once. No calculus today.</a:t>
+            </a:r>
+            <a:endParaRPr lang="en-US" sz="1600" dirty="0"/>
           </a:p>
         </p:txBody>
       </p:sp>
@@ -3050,13 +3214,13 @@
             <a:r>
               <a:rPr lang="en-US" sz="1300" b="1" spc="300" kern="0" dirty="0">
                 <a:solidFill>
-                  <a:srgbClr val="3F6F5F"/>
+                  <a:srgbClr val="7A3B2E"/>
                 </a:solidFill>
                 <a:latin typeface="Calibri" pitchFamily="34" charset="0"/>
                 <a:ea typeface="Calibri" pitchFamily="34" charset="-122"/>
                 <a:cs typeface="Calibri" pitchFamily="34" charset="-120"/>
               </a:rPr>
-              <a:t>IT WORKS ON A SMALL CORPUS TOO</a:t>
+              <a:t>IDEA TWO</a:t>
             </a:r>
             <a:endParaRPr lang="en-US" sz="1300" dirty="0"/>
           </a:p>
@@ -3095,7 +3259,7 @@
                 <a:ea typeface="Cambria" pitchFamily="34" charset="-122"/>
                 <a:cs typeface="Cambria" pitchFamily="34" charset="-120"/>
               </a:rPr>
-              <a:t>Trained on two novels, an hour ago</a:t>
+              <a:t>What counting cannot do</a:t>
             </a:r>
             <a:endParaRPr lang="en-US" sz="3400" dirty="0"/>
           </a:p>
@@ -3103,7 +3267,7 @@
       </p:sp>
       <p:pic>
         <p:nvPicPr>
-          <p:cNvPr id="4" name="Image 0" descr="/tmp/figs/w4_neighbours.png">    </p:cNvPr>
+          <p:cNvPr id="4" name="Image 0" descr="/tmp/figs/w4_onehot_vs_dense.png">    </p:cNvPr>
           <p:cNvPicPr>
             <a:picLocks noChangeAspect="1"/>
           </p:cNvPicPr>
@@ -3116,8 +3280,8 @@
         </p:blipFill>
         <p:spPr>
           <a:xfrm>
-            <a:off x="640080" y="1920240"/>
-            <a:ext cx="6766560" cy="3931920"/>
+            <a:off x="1097280" y="1920240"/>
+            <a:ext cx="9966960" cy="3657600"/>
           </a:xfrm>
           <a:prstGeom prst="rect">
             <a:avLst/>
@@ -3132,113 +3296,34 @@
         </p:nvSpPr>
         <p:spPr>
           <a:xfrm>
-            <a:off x="7589520" y="2011680"/>
-            <a:ext cx="3931920" cy="4023360"/>
-          </a:xfrm>
-          <a:prstGeom prst="rect">
-            <a:avLst/>
-          </a:prstGeom>
-          <a:noFill/>
-          <a:ln/>
-        </p:spPr>
-        <p:txBody>
-          <a:bodyPr wrap="square" rtlCol="0" anchor="t"/>
-          <a:lstStyle/>
-          <a:p>
-            <a:pPr marL="152400" indent="-152400">
-              <a:lnSpc>
-                <a:spcPct val="115000"/>
-              </a:lnSpc>
-              <a:spcAft>
-                <a:spcPts val="1000"/>
-              </a:spcAft>
-              <a:buSzPct val="100000"/>
-              <a:buChar char="•"/>
-            </a:pPr>
-            <a:r>
-              <a:rPr lang="en-US" sz="1350" dirty="0">
+            <a:off x="640080" y="5897880"/>
+            <a:ext cx="10881360" cy="411480"/>
+          </a:xfrm>
+          <a:prstGeom prst="rect">
+            <a:avLst/>
+          </a:prstGeom>
+          <a:noFill/>
+          <a:ln/>
+        </p:spPr>
+        <p:txBody>
+          <a:bodyPr wrap="square" rtlCol="0" anchor="ctr"/>
+          <a:lstStyle/>
+          <a:p>
+            <a:pPr indent="0" marL="0">
+              <a:buNone/>
+            </a:pPr>
+            <a:r>
+              <a:rPr lang="en-US" sz="1600" i="1" dirty="0">
                 <a:solidFill>
                   <a:srgbClr val="1A1A1A"/>
                 </a:solidFill>
-                <a:latin typeface="Calibri" pitchFamily="34" charset="0"/>
-                <a:ea typeface="Calibri" pitchFamily="34" charset="-122"/>
-                <a:cs typeface="Calibri" pitchFamily="34" charset="-120"/>
-              </a:rPr>
-              <a:t>231,228 words of Frankenstein and Dracula, 4,000 word types.</a:t>
-            </a:r>
-            <a:endParaRPr lang="en-US" sz="1350" dirty="0"/>
-          </a:p>
-          <a:p>
-            <a:pPr marL="152400" indent="-152400">
-              <a:lnSpc>
-                <a:spcPct val="115000"/>
-              </a:lnSpc>
-              <a:spcAft>
-                <a:spcPts val="1000"/>
-              </a:spcAft>
-              <a:buSzPct val="100000"/>
-              <a:buChar char="•"/>
-            </a:pPr>
-            <a:r>
-              <a:rPr lang="en-US" sz="1350" dirty="0">
-                <a:solidFill>
-                  <a:srgbClr val="1A1A1A"/>
-                </a:solidFill>
-                <a:latin typeface="Calibri" pitchFamily="34" charset="0"/>
-                <a:ea typeface="Calibri" pitchFamily="34" charset="-122"/>
-                <a:cs typeface="Calibri" pitchFamily="34" charset="-120"/>
-              </a:rPr>
-              <a:t>No labels, no supervision, nobody told it what a door is.</a:t>
-            </a:r>
-            <a:endParaRPr lang="en-US" sz="1350" dirty="0"/>
-          </a:p>
-          <a:p>
-            <a:pPr marL="152400" indent="-152400">
-              <a:lnSpc>
-                <a:spcPct val="115000"/>
-              </a:lnSpc>
-              <a:spcAft>
-                <a:spcPts val="1000"/>
-              </a:spcAft>
-              <a:buSzPct val="100000"/>
-              <a:buChar char="•"/>
-            </a:pPr>
-            <a:r>
-              <a:rPr lang="en-US" sz="1350" dirty="0">
-                <a:solidFill>
-                  <a:srgbClr val="1A1A1A"/>
-                </a:solidFill>
-                <a:latin typeface="Calibri" pitchFamily="34" charset="0"/>
-                <a:ea typeface="Calibri" pitchFamily="34" charset="-122"/>
-                <a:cs typeface="Calibri" pitchFamily="34" charset="-120"/>
-              </a:rPr>
-              <a:t>Nearest neighbours in the space it learned - and they are the words you would have listed.</a:t>
-            </a:r>
-            <a:endParaRPr lang="en-US" sz="1350" dirty="0"/>
-          </a:p>
-          <a:p>
-            <a:pPr marL="152400" indent="-152400">
-              <a:lnSpc>
-                <a:spcPct val="115000"/>
-              </a:lnSpc>
-              <a:spcAft>
-                <a:spcPts val="1000"/>
-              </a:spcAft>
-              <a:buSzPct val="100000"/>
-              <a:buChar char="•"/>
-            </a:pPr>
-            <a:r>
-              <a:rPr lang="en-US" sz="1350" dirty="0">
-                <a:solidFill>
-                  <a:srgbClr val="1A1A1A"/>
-                </a:solidFill>
-                <a:latin typeface="Calibri" pitchFamily="34" charset="0"/>
-                <a:ea typeface="Calibri" pitchFamily="34" charset="-122"/>
-                <a:cs typeface="Calibri" pitchFamily="34" charset="-120"/>
-              </a:rPr>
-              <a:t>Small corpus, so the vectors are rough. The idea does not need a supercomputer to show itself.</a:t>
-            </a:r>
-            <a:endParaRPr lang="en-US" sz="1350" dirty="0"/>
+                <a:latin typeface="Cambria" pitchFamily="34" charset="0"/>
+                <a:ea typeface="Cambria" pitchFamily="34" charset="-122"/>
+                <a:cs typeface="Cambria" pitchFamily="34" charset="-120"/>
+              </a:rPr>
+              <a:t>Left: happy and joyful share nothing, and neither do Oakland and Berkeley. Right: a few dozen numbers instead.</a:t>
+            </a:r>
+            <a:endParaRPr lang="en-US" sz="1600" dirty="0"/>
           </a:p>
         </p:txBody>
       </p:sp>
@@ -3301,13 +3386,13 @@
             <a:r>
               <a:rPr lang="en-US" sz="1300" b="1" spc="300" kern="0" dirty="0">
                 <a:solidFill>
-                  <a:srgbClr val="2E5F8A"/>
+                  <a:srgbClr val="7A3B2E"/>
                 </a:solidFill>
                 <a:latin typeface="Calibri" pitchFamily="34" charset="0"/>
                 <a:ea typeface="Calibri" pitchFamily="34" charset="-122"/>
                 <a:cs typeface="Calibri" pitchFamily="34" charset="-120"/>
               </a:rPr>
-              <a:t>THE MAP</a:t>
+              <a:t>IDEA TWO</a:t>
             </a:r>
             <a:endParaRPr lang="en-US" sz="1300" dirty="0"/>
           </a:p>
@@ -3346,7 +3431,7 @@
                 <a:ea typeface="Cambria" pitchFamily="34" charset="-122"/>
                 <a:cs typeface="Cambria" pitchFamily="34" charset="-120"/>
               </a:rPr>
-              <a:t>Meaning becomes geometry</a:t>
+              <a:t>Where the numbers come from</a:t>
             </a:r>
             <a:endParaRPr lang="en-US" sz="3400" dirty="0"/>
           </a:p>
@@ -3354,7 +3439,7 @@
       </p:sp>
       <p:pic>
         <p:nvPicPr>
-          <p:cNvPr id="4" name="Image 0" descr="/tmp/figs/w4_map.png">    </p:cNvPr>
+          <p:cNvPr id="4" name="Image 0" descr="/tmp/figs/w4_skipgram.png">    </p:cNvPr>
           <p:cNvPicPr>
             <a:picLocks noChangeAspect="1"/>
           </p:cNvPicPr>
@@ -3367,8 +3452,8 @@
         </p:blipFill>
         <p:spPr>
           <a:xfrm>
-            <a:off x="640080" y="1828800"/>
-            <a:ext cx="6766560" cy="4206240"/>
+            <a:off x="1554480" y="1828800"/>
+            <a:ext cx="9052560" cy="3840480"/>
           </a:xfrm>
           <a:prstGeom prst="rect">
             <a:avLst/>
@@ -3383,152 +3468,34 @@
         </p:nvSpPr>
         <p:spPr>
           <a:xfrm>
-            <a:off x="7589520" y="2011680"/>
-            <a:ext cx="3931920" cy="4023360"/>
-          </a:xfrm>
-          <a:prstGeom prst="rect">
-            <a:avLst/>
-          </a:prstGeom>
-          <a:noFill/>
-          <a:ln/>
-        </p:spPr>
-        <p:txBody>
-          <a:bodyPr wrap="square" rtlCol="0" anchor="t"/>
-          <a:lstStyle/>
-          <a:p>
-            <a:pPr marL="152400" indent="-152400">
-              <a:lnSpc>
-                <a:spcPct val="115000"/>
-              </a:lnSpc>
-              <a:spcAft>
-                <a:spcPts val="1000"/>
-              </a:spcAft>
-              <a:buSzPct val="100000"/>
-              <a:buChar char="•"/>
-            </a:pPr>
-            <a:r>
-              <a:rPr lang="en-US" sz="1400" dirty="0">
+            <a:off x="640080" y="5897880"/>
+            <a:ext cx="10881360" cy="411480"/>
+          </a:xfrm>
+          <a:prstGeom prst="rect">
+            <a:avLst/>
+          </a:prstGeom>
+          <a:noFill/>
+          <a:ln/>
+        </p:spPr>
+        <p:txBody>
+          <a:bodyPr wrap="square" rtlCol="0" anchor="ctr"/>
+          <a:lstStyle/>
+          <a:p>
+            <a:pPr indent="0" marL="0">
+              <a:buNone/>
+            </a:pPr>
+            <a:r>
+              <a:rPr lang="en-US" sz="1600" i="1" dirty="0">
                 <a:solidFill>
                   <a:srgbClr val="1A1A1A"/>
                 </a:solidFill>
-                <a:latin typeface="Calibri" pitchFamily="34" charset="0"/>
-                <a:ea typeface="Calibri" pitchFamily="34" charset="-122"/>
-                <a:cs typeface="Calibri" pitchFamily="34" charset="-120"/>
-              </a:rPr>
-              <a:t>The same vectors, squashed to two dimensions so you can look at them.</a:t>
-            </a:r>
-            <a:endParaRPr lang="en-US" sz="1400" dirty="0"/>
-          </a:p>
-          <a:p>
-            <a:pPr marL="152400" indent="-152400">
-              <a:lnSpc>
-                <a:spcPct val="115000"/>
-              </a:lnSpc>
-              <a:spcAft>
-                <a:spcPts val="1000"/>
-              </a:spcAft>
-              <a:buSzPct val="100000"/>
-              <a:buChar char="•"/>
-            </a:pPr>
-            <a:r>
-              <a:rPr lang="en-US" sz="1400" dirty="0">
-                <a:solidFill>
-                  <a:srgbClr val="1A1A1A"/>
-                </a:solidFill>
-                <a:latin typeface="Calibri" pitchFamily="34" charset="0"/>
-                <a:ea typeface="Calibri" pitchFamily="34" charset="-122"/>
-                <a:cs typeface="Calibri" pitchFamily="34" charset="-120"/>
-              </a:rPr>
-              <a:t>Times of day cluster. Family words cluster. Ship, sea and ice sit together.</a:t>
-            </a:r>
-            <a:endParaRPr lang="en-US" sz="1400" dirty="0"/>
-          </a:p>
-          <a:p>
-            <a:pPr marL="152400" indent="-152400">
-              <a:lnSpc>
-                <a:spcPct val="115000"/>
-              </a:lnSpc>
-              <a:spcAft>
-                <a:spcPts val="1000"/>
-              </a:spcAft>
-              <a:buSzPct val="100000"/>
-              <a:buChar char="•"/>
-            </a:pPr>
-            <a:r>
-              <a:rPr lang="en-US" sz="1400" dirty="0">
-                <a:solidFill>
-                  <a:srgbClr val="1A1A1A"/>
-                </a:solidFill>
-                <a:latin typeface="Calibri" pitchFamily="34" charset="0"/>
-                <a:ea typeface="Calibri" pitchFamily="34" charset="-122"/>
-                <a:cs typeface="Calibri" pitchFamily="34" charset="-120"/>
-              </a:rPr>
-              <a:t>Nothing here was labelled. The clusters are what the text did.</a:t>
-            </a:r>
-            <a:endParaRPr lang="en-US" sz="1400" dirty="0"/>
-          </a:p>
-          <a:p>
-            <a:pPr marL="152400" indent="-152400">
-              <a:lnSpc>
-                <a:spcPct val="115000"/>
-              </a:lnSpc>
-              <a:spcAft>
-                <a:spcPts val="1000"/>
-              </a:spcAft>
-              <a:buSzPct val="100000"/>
-              <a:buChar char="•"/>
-            </a:pPr>
-            <a:r>
-              <a:rPr lang="en-US" sz="1400" dirty="0">
-                <a:solidFill>
-                  <a:srgbClr val="1A1A1A"/>
-                </a:solidFill>
-                <a:latin typeface="Calibri" pitchFamily="34" charset="0"/>
-                <a:ea typeface="Calibri" pitchFamily="34" charset="-122"/>
-                <a:cs typeface="Calibri" pitchFamily="34" charset="-120"/>
-              </a:rPr>
-              <a:t>Embedding Projector, live: search a word, spin the space, read the neighbours.</a:t>
-            </a:r>
-            <a:endParaRPr lang="en-US" sz="1400" dirty="0"/>
-          </a:p>
-        </p:txBody>
-      </p:sp>
-      <p:sp>
-        <p:nvSpPr>
-          <p:cNvPr id="6" name="Text 3"/>
-          <p:cNvSpPr/>
-          <p:nvPr/>
-        </p:nvSpPr>
-        <p:spPr>
-          <a:xfrm>
-            <a:off x="640080" y="6263640"/>
-            <a:ext cx="10881360" cy="365760"/>
-          </a:xfrm>
-          <a:prstGeom prst="rect">
-            <a:avLst/>
-          </a:prstGeom>
-          <a:noFill/>
-          <a:ln/>
-        </p:spPr>
-        <p:txBody>
-          <a:bodyPr wrap="square" rtlCol="0" anchor="ctr"/>
-          <a:lstStyle/>
-          <a:p>
-            <a:pPr indent="0" marL="0">
-              <a:buNone/>
-            </a:pPr>
-            <a:r>
-              <a:rPr lang="en-US" sz="1100" i="1" dirty="0">
-                <a:solidFill>
-                  <a:srgbClr val="6B6B63"/>
-                </a:solidFill>
-                <a:latin typeface="Calibri" pitchFamily="34" charset="0"/>
-                <a:ea typeface="Calibri" pitchFamily="34" charset="-122"/>
-                <a:cs typeface="Calibri" pitchFamily="34" charset="-120"/>
-              </a:rPr>
-              <a:t>Two dimensions of eighty. The picture always loses something - Week 5 makes that its own lesson.</a:t>
-            </a:r>
-            <a:endParaRPr lang="en-US" sz="1100" dirty="0"/>
+                <a:latin typeface="Cambria" pitchFamily="34" charset="0"/>
+                <a:ea typeface="Cambria" pitchFamily="34" charset="-122"/>
+                <a:cs typeface="Cambria" pitchFamily="34" charset="-120"/>
+              </a:rPr>
+              <a:t>Guess the neighbours, over a billion words. Throw the guesses away and keep the hidden layer: that is word2vec.</a:t>
+            </a:r>
+            <a:endParaRPr lang="en-US" sz="1600" dirty="0"/>
           </a:p>
         </p:txBody>
       </p:sp>
@@ -3591,13 +3558,13 @@
             <a:r>
               <a:rPr lang="en-US" sz="1300" b="1" spc="300" kern="0" dirty="0">
                 <a:solidFill>
-                  <a:srgbClr val="B9852F"/>
+                  <a:srgbClr val="3F6F5F"/>
                 </a:solidFill>
                 <a:latin typeface="Calibri" pitchFamily="34" charset="0"/>
                 <a:ea typeface="Calibri" pitchFamily="34" charset="-122"/>
                 <a:cs typeface="Calibri" pitchFamily="34" charset="-120"/>
               </a:rPr>
-              <a:t>THE FAMOUS TRICK</a:t>
+              <a:t>IT WORKS ON A SMALL CORPUS TOO</a:t>
             </a:r>
             <a:endParaRPr lang="en-US" sz="1300" dirty="0"/>
           </a:p>
@@ -3636,506 +3603,71 @@
                 <a:ea typeface="Cambria" pitchFamily="34" charset="-122"/>
                 <a:cs typeface="Cambria" pitchFamily="34" charset="-120"/>
               </a:rPr>
-              <a:t>king − man + woman ≈ queen</a:t>
+              <a:t>Trained on two novels, an hour ago</a:t>
             </a:r>
             <a:endParaRPr lang="en-US" sz="3400" dirty="0"/>
           </a:p>
         </p:txBody>
       </p:sp>
-      <p:sp>
-        <p:nvSpPr>
-          <p:cNvPr id="4" name="Shape 2"/>
-          <p:cNvSpPr/>
-          <p:nvPr/>
-        </p:nvSpPr>
-        <p:spPr>
-          <a:xfrm>
-            <a:off x="640080" y="1920240"/>
-            <a:ext cx="5394960" cy="1828800"/>
-          </a:xfrm>
-          <a:prstGeom prst="roundRect">
-            <a:avLst>
-              <a:gd name="adj" fmla="val 5000"/>
-            </a:avLst>
-          </a:prstGeom>
-          <a:solidFill>
-            <a:srgbClr val="F4EEE8"/>
-          </a:solidFill>
-          <a:ln/>
-        </p:spPr>
-      </p:sp>
-      <p:sp>
-        <p:nvSpPr>
-          <p:cNvPr id="5" name="Text 3"/>
-          <p:cNvSpPr/>
-          <p:nvPr/>
-        </p:nvSpPr>
-        <p:spPr>
-          <a:xfrm>
-            <a:off x="960120" y="2194560"/>
-            <a:ext cx="4846320" cy="1280160"/>
-          </a:xfrm>
-          <a:prstGeom prst="rect">
-            <a:avLst/>
-          </a:prstGeom>
-          <a:noFill/>
-          <a:ln/>
-        </p:spPr>
-        <p:txBody>
-          <a:bodyPr wrap="square" lIns="0" tIns="0" rIns="0" bIns="0" rtlCol="0" anchor="ctr"/>
-          <a:lstStyle/>
-          <a:p>
-            <a:pPr indent="0" marL="0">
-              <a:lnSpc>
-                <a:spcPct val="135000"/>
-              </a:lnSpc>
-              <a:buNone/>
-            </a:pPr>
-            <a:r>
-              <a:rPr lang="en-US" sz="1600" dirty="0">
-                <a:solidFill>
-                  <a:srgbClr val="7A3B2E"/>
-                </a:solidFill>
-                <a:latin typeface="Courier New" pitchFamily="34" charset="0"/>
-                <a:ea typeface="Courier New" pitchFamily="34" charset="-122"/>
-                <a:cs typeface="Courier New" pitchFamily="34" charset="-120"/>
-              </a:rPr>
-              <a:t>king − man + woman → queen</a:t>
-            </a:r>
-            <a:endParaRPr lang="en-US" sz="1600" dirty="0"/>
-          </a:p>
-          <a:p>
-            <a:pPr indent="0" marL="0">
-              <a:lnSpc>
-                <a:spcPct val="135000"/>
-              </a:lnSpc>
-              <a:buNone/>
-            </a:pPr>
-            <a:r>
-              <a:rPr lang="en-US" sz="1600" dirty="0">
-                <a:solidFill>
-                  <a:srgbClr val="7A3B2E"/>
-                </a:solidFill>
-                <a:latin typeface="Courier New" pitchFamily="34" charset="0"/>
-                <a:ea typeface="Courier New" pitchFamily="34" charset="-122"/>
-                <a:cs typeface="Courier New" pitchFamily="34" charset="-120"/>
-              </a:rPr>
-              <a:t>paris − france + japan → tokyo</a:t>
-            </a:r>
-            <a:endParaRPr lang="en-US" sz="1600" dirty="0"/>
-          </a:p>
-        </p:txBody>
-      </p:sp>
-      <p:sp>
-        <p:nvSpPr>
-          <p:cNvPr id="6" name="Text 4"/>
-          <p:cNvSpPr/>
-          <p:nvPr/>
-        </p:nvSpPr>
-        <p:spPr>
-          <a:xfrm>
-            <a:off x="640080" y="3931920"/>
-            <a:ext cx="5394960" cy="2286000"/>
-          </a:xfrm>
-          <a:prstGeom prst="rect">
-            <a:avLst/>
-          </a:prstGeom>
-          <a:noFill/>
-          <a:ln/>
-        </p:spPr>
-        <p:txBody>
-          <a:bodyPr wrap="square" rtlCol="0" anchor="t"/>
-          <a:lstStyle/>
-          <a:p>
-            <a:pPr marL="152400" indent="-152400">
-              <a:lnSpc>
-                <a:spcPct val="115000"/>
-              </a:lnSpc>
-              <a:spcAft>
-                <a:spcPts val="1000"/>
-              </a:spcAft>
-              <a:buSzPct val="100000"/>
-              <a:buChar char="•"/>
-            </a:pPr>
-            <a:r>
-              <a:rPr lang="en-US" sz="1400" dirty="0">
+      <p:pic>
+        <p:nvPicPr>
+          <p:cNvPr id="4" name="Image 0" descr="/tmp/figs/w4_neighbours.png">    </p:cNvPr>
+          <p:cNvPicPr>
+            <a:picLocks noChangeAspect="1"/>
+          </p:cNvPicPr>
+          <p:nvPr/>
+        </p:nvPicPr>
+        <p:blipFill>
+          <a:blip r:embed="rId1"/>
+          <a:srcRect l="0" r="0" t="0" b="0"/>
+          <a:stretch/>
+        </p:blipFill>
+        <p:spPr>
+          <a:xfrm>
+            <a:off x="1554480" y="1828800"/>
+            <a:ext cx="9052560" cy="3931920"/>
+          </a:xfrm>
+          <a:prstGeom prst="rect">
+            <a:avLst/>
+          </a:prstGeom>
+        </p:spPr>
+      </p:pic>
+      <p:sp>
+        <p:nvSpPr>
+          <p:cNvPr id="5" name="Text 2"/>
+          <p:cNvSpPr/>
+          <p:nvPr/>
+        </p:nvSpPr>
+        <p:spPr>
+          <a:xfrm>
+            <a:off x="640080" y="5897880"/>
+            <a:ext cx="10881360" cy="411480"/>
+          </a:xfrm>
+          <a:prstGeom prst="rect">
+            <a:avLst/>
+          </a:prstGeom>
+          <a:noFill/>
+          <a:ln/>
+        </p:spPr>
+        <p:txBody>
+          <a:bodyPr wrap="square" rtlCol="0" anchor="ctr"/>
+          <a:lstStyle/>
+          <a:p>
+            <a:pPr indent="0" marL="0">
+              <a:buNone/>
+            </a:pPr>
+            <a:r>
+              <a:rPr lang="en-US" sz="1600" i="1" dirty="0">
                 <a:solidFill>
                   <a:srgbClr val="1A1A1A"/>
-                </a:solidFill>
-                <a:latin typeface="Calibri" pitchFamily="34" charset="0"/>
-                <a:ea typeface="Calibri" pitchFamily="34" charset="-122"/>
-                <a:cs typeface="Calibri" pitchFamily="34" charset="-120"/>
-              </a:rPr>
-              <a:t>Directions in the space carry relationships nobody labelled.</a:t>
-            </a:r>
-            <a:endParaRPr lang="en-US" sz="1400" dirty="0"/>
-          </a:p>
-          <a:p>
-            <a:pPr marL="152400" indent="-152400">
-              <a:lnSpc>
-                <a:spcPct val="115000"/>
-              </a:lnSpc>
-              <a:spcAft>
-                <a:spcPts val="1000"/>
-              </a:spcAft>
-              <a:buSzPct val="100000"/>
-              <a:buChar char="•"/>
-            </a:pPr>
-            <a:r>
-              <a:rPr lang="en-US" sz="1400" dirty="0">
-                <a:solidFill>
-                  <a:srgbClr val="1A1A1A"/>
-                </a:solidFill>
-                <a:latin typeface="Calibri" pitchFamily="34" charset="0"/>
-                <a:ea typeface="Calibri" pitchFamily="34" charset="-122"/>
-                <a:cs typeface="Calibri" pitchFamily="34" charset="-120"/>
-              </a:rPr>
-              <a:t>The arithmetic is nudged: the query words are excluded from the answer, or king comes back as its own nearest neighbour.</a:t>
-            </a:r>
-            <a:endParaRPr lang="en-US" sz="1400" dirty="0"/>
-          </a:p>
-          <a:p>
-            <a:pPr marL="152400" indent="-152400">
-              <a:lnSpc>
-                <a:spcPct val="115000"/>
-              </a:lnSpc>
-              <a:spcAft>
-                <a:spcPts val="1000"/>
-              </a:spcAft>
-              <a:buSzPct val="100000"/>
-              <a:buChar char="•"/>
-            </a:pPr>
-            <a:r>
-              <a:rPr lang="en-US" sz="1400" dirty="0">
-                <a:solidFill>
-                  <a:srgbClr val="1A1A1A"/>
-                </a:solidFill>
-                <a:latin typeface="Calibri" pitchFamily="34" charset="0"/>
-                <a:ea typeface="Calibri" pitchFamily="34" charset="-122"/>
-                <a:cs typeface="Calibri" pitchFamily="34" charset="-120"/>
-              </a:rPr>
-              <a:t>Most analogies fail. The famous four are the ones that worked.</a:t>
-            </a:r>
-            <a:endParaRPr lang="en-US" sz="1400" dirty="0"/>
-          </a:p>
-          <a:p>
-            <a:pPr marL="152400" indent="-152400">
-              <a:lnSpc>
-                <a:spcPct val="115000"/>
-              </a:lnSpc>
-              <a:spcAft>
-                <a:spcPts val="1000"/>
-              </a:spcAft>
-              <a:buSzPct val="100000"/>
-              <a:buChar char="•"/>
-            </a:pPr>
-            <a:r>
-              <a:rPr lang="en-US" sz="1400" dirty="0">
-                <a:solidFill>
-                  <a:srgbClr val="1A1A1A"/>
-                </a:solidFill>
-                <a:latin typeface="Calibri" pitchFamily="34" charset="0"/>
-                <a:ea typeface="Calibri" pitchFamily="34" charset="-122"/>
-                <a:cs typeface="Calibri" pitchFamily="34" charset="-120"/>
-              </a:rPr>
-              <a:t>The same geometry gives doctor − man + woman → nurse (Bolukbasi 2016), which is this morning's paper arriving from the other direction.</a:t>
-            </a:r>
-            <a:endParaRPr lang="en-US" sz="1400" dirty="0"/>
-          </a:p>
-        </p:txBody>
-      </p:sp>
-      <p:sp>
-        <p:nvSpPr>
-          <p:cNvPr id="7" name="Shape 5"/>
-          <p:cNvSpPr/>
-          <p:nvPr/>
-        </p:nvSpPr>
-        <p:spPr>
-          <a:xfrm>
-            <a:off x="6309360" y="1920240"/>
-            <a:ext cx="5212080" cy="3931920"/>
-          </a:xfrm>
-          <a:prstGeom prst="roundRect">
-            <a:avLst>
-              <a:gd name="adj" fmla="val 2326"/>
-            </a:avLst>
-          </a:prstGeom>
-          <a:solidFill>
-            <a:srgbClr val="F4EEE8"/>
-          </a:solidFill>
-          <a:ln/>
-        </p:spPr>
-      </p:sp>
-      <p:sp>
-        <p:nvSpPr>
-          <p:cNvPr id="8" name="Text 6"/>
-          <p:cNvSpPr/>
-          <p:nvPr/>
-        </p:nvSpPr>
-        <p:spPr>
-          <a:xfrm>
-            <a:off x="6583680" y="2148840"/>
-            <a:ext cx="4663440" cy="320040"/>
-          </a:xfrm>
-          <a:prstGeom prst="rect">
-            <a:avLst/>
-          </a:prstGeom>
-          <a:noFill/>
-          <a:ln/>
-        </p:spPr>
-        <p:txBody>
-          <a:bodyPr wrap="square" rtlCol="0" anchor="ctr"/>
-          <a:lstStyle/>
-          <a:p>
-            <a:pPr indent="0" marL="0">
-              <a:buNone/>
-            </a:pPr>
-            <a:r>
-              <a:rPr lang="en-US" sz="1200" b="1" spc="200" kern="0" dirty="0">
-                <a:solidFill>
-                  <a:srgbClr val="6B6B63"/>
-                </a:solidFill>
-                <a:latin typeface="Calibri" pitchFamily="34" charset="0"/>
-                <a:ea typeface="Calibri" pitchFamily="34" charset="-122"/>
-                <a:cs typeface="Calibri" pitchFamily="34" charset="-120"/>
-              </a:rPr>
-              <a:t>three kinds of vector, in one breath</a:t>
-            </a:r>
-            <a:endParaRPr lang="en-US" sz="1200" dirty="0"/>
-          </a:p>
-        </p:txBody>
-      </p:sp>
-      <p:sp>
-        <p:nvSpPr>
-          <p:cNvPr id="9" name="Text 7"/>
-          <p:cNvSpPr/>
-          <p:nvPr/>
-        </p:nvSpPr>
-        <p:spPr>
-          <a:xfrm>
-            <a:off x="6583680" y="2606040"/>
-            <a:ext cx="4663440" cy="320040"/>
-          </a:xfrm>
-          <a:prstGeom prst="rect">
-            <a:avLst/>
-          </a:prstGeom>
-          <a:noFill/>
-          <a:ln/>
-        </p:spPr>
-        <p:txBody>
-          <a:bodyPr wrap="square" lIns="0" tIns="0" rIns="0" bIns="0" rtlCol="0" anchor="ctr"/>
-          <a:lstStyle/>
-          <a:p>
-            <a:pPr indent="0" marL="0">
-              <a:buNone/>
-            </a:pPr>
-            <a:r>
-              <a:rPr lang="en-US" sz="1600" b="1" dirty="0">
-                <a:solidFill>
-                  <a:srgbClr val="7A3B2E"/>
                 </a:solidFill>
                 <a:latin typeface="Cambria" pitchFamily="34" charset="0"/>
                 <a:ea typeface="Cambria" pitchFamily="34" charset="-122"/>
                 <a:cs typeface="Cambria" pitchFamily="34" charset="-120"/>
               </a:rPr>
-              <a:t>static</a:t>
+              <a:t>Trained this morning on 231,228 words of Frankenstein and Dracula. Nobody told it what a door is.</a:t>
             </a:r>
             <a:endParaRPr lang="en-US" sz="1600" dirty="0"/>
-          </a:p>
-        </p:txBody>
-      </p:sp>
-      <p:sp>
-        <p:nvSpPr>
-          <p:cNvPr id="10" name="Text 8"/>
-          <p:cNvSpPr/>
-          <p:nvPr/>
-        </p:nvSpPr>
-        <p:spPr>
-          <a:xfrm>
-            <a:off x="6583680" y="2953512"/>
-            <a:ext cx="4663440" cy="640080"/>
-          </a:xfrm>
-          <a:prstGeom prst="rect">
-            <a:avLst/>
-          </a:prstGeom>
-          <a:noFill/>
-          <a:ln/>
-        </p:spPr>
-        <p:txBody>
-          <a:bodyPr wrap="square" lIns="0" tIns="0" rIns="0" bIns="0" rtlCol="0" anchor="t"/>
-          <a:lstStyle/>
-          <a:p>
-            <a:pPr indent="0" marL="0">
-              <a:buNone/>
-            </a:pPr>
-            <a:r>
-              <a:rPr lang="en-US" sz="1300" dirty="0">
-                <a:solidFill>
-                  <a:srgbClr val="1A1A1A"/>
-                </a:solidFill>
-                <a:latin typeface="Calibri" pitchFamily="34" charset="0"/>
-                <a:ea typeface="Calibri" pitchFamily="34" charset="-122"/>
-                <a:cs typeface="Calibri" pitchFamily="34" charset="-120"/>
-              </a:rPr>
-              <a:t>one vector per word, forever. word2vec, GloVe.</a:t>
-            </a:r>
-            <a:endParaRPr lang="en-US" sz="1300" dirty="0"/>
-          </a:p>
-        </p:txBody>
-      </p:sp>
-      <p:sp>
-        <p:nvSpPr>
-          <p:cNvPr id="11" name="Text 9"/>
-          <p:cNvSpPr/>
-          <p:nvPr/>
-        </p:nvSpPr>
-        <p:spPr>
-          <a:xfrm>
-            <a:off x="6583680" y="3657600"/>
-            <a:ext cx="4663440" cy="320040"/>
-          </a:xfrm>
-          <a:prstGeom prst="rect">
-            <a:avLst/>
-          </a:prstGeom>
-          <a:noFill/>
-          <a:ln/>
-        </p:spPr>
-        <p:txBody>
-          <a:bodyPr wrap="square" lIns="0" tIns="0" rIns="0" bIns="0" rtlCol="0" anchor="ctr"/>
-          <a:lstStyle/>
-          <a:p>
-            <a:pPr indent="0" marL="0">
-              <a:buNone/>
-            </a:pPr>
-            <a:r>
-              <a:rPr lang="en-US" sz="1600" b="1" dirty="0">
-                <a:solidFill>
-                  <a:srgbClr val="2E5F8A"/>
-                </a:solidFill>
-                <a:latin typeface="Cambria" pitchFamily="34" charset="0"/>
-                <a:ea typeface="Cambria" pitchFamily="34" charset="-122"/>
-                <a:cs typeface="Cambria" pitchFamily="34" charset="-120"/>
-              </a:rPr>
-              <a:t>contextual</a:t>
-            </a:r>
-            <a:endParaRPr lang="en-US" sz="1600" dirty="0"/>
-          </a:p>
-        </p:txBody>
-      </p:sp>
-      <p:sp>
-        <p:nvSpPr>
-          <p:cNvPr id="12" name="Text 10"/>
-          <p:cNvSpPr/>
-          <p:nvPr/>
-        </p:nvSpPr>
-        <p:spPr>
-          <a:xfrm>
-            <a:off x="6583680" y="4005072"/>
-            <a:ext cx="4663440" cy="640080"/>
-          </a:xfrm>
-          <a:prstGeom prst="rect">
-            <a:avLst/>
-          </a:prstGeom>
-          <a:noFill/>
-          <a:ln/>
-        </p:spPr>
-        <p:txBody>
-          <a:bodyPr wrap="square" lIns="0" tIns="0" rIns="0" bIns="0" rtlCol="0" anchor="t"/>
-          <a:lstStyle/>
-          <a:p>
-            <a:pPr indent="0" marL="0">
-              <a:buNone/>
-            </a:pPr>
-            <a:r>
-              <a:rPr lang="en-US" sz="1300" dirty="0">
-                <a:solidFill>
-                  <a:srgbClr val="1A1A1A"/>
-                </a:solidFill>
-                <a:latin typeface="Calibri" pitchFamily="34" charset="0"/>
-                <a:ea typeface="Calibri" pitchFamily="34" charset="-122"/>
-                <a:cs typeface="Calibri" pitchFamily="34" charset="-120"/>
-              </a:rPr>
-              <a:t>one vector per occurrence: bank in two sentences, two vectors. BERT and after.</a:t>
-            </a:r>
-            <a:endParaRPr lang="en-US" sz="1300" dirty="0"/>
-          </a:p>
-        </p:txBody>
-      </p:sp>
-      <p:sp>
-        <p:nvSpPr>
-          <p:cNvPr id="13" name="Text 11"/>
-          <p:cNvSpPr/>
-          <p:nvPr/>
-        </p:nvSpPr>
-        <p:spPr>
-          <a:xfrm>
-            <a:off x="6583680" y="4709160"/>
-            <a:ext cx="4663440" cy="320040"/>
-          </a:xfrm>
-          <a:prstGeom prst="rect">
-            <a:avLst/>
-          </a:prstGeom>
-          <a:noFill/>
-          <a:ln/>
-        </p:spPr>
-        <p:txBody>
-          <a:bodyPr wrap="square" lIns="0" tIns="0" rIns="0" bIns="0" rtlCol="0" anchor="ctr"/>
-          <a:lstStyle/>
-          <a:p>
-            <a:pPr indent="0" marL="0">
-              <a:buNone/>
-            </a:pPr>
-            <a:r>
-              <a:rPr lang="en-US" sz="1600" b="1" dirty="0">
-                <a:solidFill>
-                  <a:srgbClr val="3F6F5F"/>
-                </a:solidFill>
-                <a:latin typeface="Cambria" pitchFamily="34" charset="0"/>
-                <a:ea typeface="Cambria" pitchFamily="34" charset="-122"/>
-                <a:cs typeface="Cambria" pitchFamily="34" charset="-120"/>
-              </a:rPr>
-              <a:t>sentence</a:t>
-            </a:r>
-            <a:endParaRPr lang="en-US" sz="1600" dirty="0"/>
-          </a:p>
-        </p:txBody>
-      </p:sp>
-      <p:sp>
-        <p:nvSpPr>
-          <p:cNvPr id="14" name="Text 12"/>
-          <p:cNvSpPr/>
-          <p:nvPr/>
-        </p:nvSpPr>
-        <p:spPr>
-          <a:xfrm>
-            <a:off x="6583680" y="5056632"/>
-            <a:ext cx="4663440" cy="640080"/>
-          </a:xfrm>
-          <a:prstGeom prst="rect">
-            <a:avLst/>
-          </a:prstGeom>
-          <a:noFill/>
-          <a:ln/>
-        </p:spPr>
-        <p:txBody>
-          <a:bodyPr wrap="square" lIns="0" tIns="0" rIns="0" bIns="0" rtlCol="0" anchor="t"/>
-          <a:lstStyle/>
-          <a:p>
-            <a:pPr indent="0" marL="0">
-              <a:buNone/>
-            </a:pPr>
-            <a:r>
-              <a:rPr lang="en-US" sz="1300" dirty="0">
-                <a:solidFill>
-                  <a:srgbClr val="1A1A1A"/>
-                </a:solidFill>
-                <a:latin typeface="Calibri" pitchFamily="34" charset="0"/>
-                <a:ea typeface="Calibri" pitchFamily="34" charset="-122"/>
-                <a:cs typeface="Calibri" pitchFamily="34" charset="-120"/>
-              </a:rPr>
-              <a:t>one vector per document, which is what Week 5 actually uses on your corpus.</a:t>
-            </a:r>
-            <a:endParaRPr lang="en-US" sz="1300" dirty="0"/>
           </a:p>
         </p:txBody>
       </p:sp>
@@ -4153,7 +3685,7 @@
     <p:bg>
       <p:bgPr>
         <a:solidFill>
-          <a:srgbClr val="4E261D"/>
+          <a:srgbClr val="FFFFFF"/>
         </a:solidFill>
       </p:bgPr>
     </p:bg>
@@ -4198,13 +3730,13 @@
             <a:r>
               <a:rPr lang="en-US" sz="1300" b="1" spc="300" kern="0" dirty="0">
                 <a:solidFill>
-                  <a:srgbClr val="B9852F"/>
+                  <a:srgbClr val="2E5F8A"/>
                 </a:solidFill>
                 <a:latin typeface="Calibri" pitchFamily="34" charset="0"/>
                 <a:ea typeface="Calibri" pitchFamily="34" charset="-122"/>
                 <a:cs typeface="Calibri" pitchFamily="34" charset="-120"/>
               </a:rPr>
-              <a:t>BREAK</a:t>
+              <a:t>THE MAP</a:t>
             </a:r>
             <a:endParaRPr lang="en-US" sz="1300" dirty="0"/>
           </a:p>
@@ -4218,47 +3750,70 @@
         </p:nvSpPr>
         <p:spPr>
           <a:xfrm>
-            <a:off x="640080" y="2377440"/>
-            <a:ext cx="10058400" cy="914400"/>
-          </a:xfrm>
-          <a:prstGeom prst="rect">
-            <a:avLst/>
-          </a:prstGeom>
-          <a:noFill/>
-          <a:ln/>
-        </p:spPr>
-        <p:txBody>
-          <a:bodyPr wrap="square" rtlCol="0" anchor="ctr"/>
-          <a:lstStyle/>
-          <a:p>
-            <a:pPr indent="0" marL="0">
-              <a:buNone/>
-            </a:pPr>
-            <a:r>
-              <a:rPr lang="en-US" sz="4000" b="1" dirty="0">
-                <a:solidFill>
-                  <a:srgbClr val="FFFFFF"/>
+            <a:off x="640080" y="868680"/>
+            <a:ext cx="10972800" cy="777240"/>
+          </a:xfrm>
+          <a:prstGeom prst="rect">
+            <a:avLst/>
+          </a:prstGeom>
+          <a:noFill/>
+          <a:ln/>
+        </p:spPr>
+        <p:txBody>
+          <a:bodyPr wrap="square" rtlCol="0" anchor="t"/>
+          <a:lstStyle/>
+          <a:p>
+            <a:pPr indent="0" marL="0">
+              <a:buNone/>
+            </a:pPr>
+            <a:r>
+              <a:rPr lang="en-US" sz="3400" b="1" dirty="0">
+                <a:solidFill>
+                  <a:srgbClr val="1A1A1A"/>
                 </a:solidFill>
                 <a:latin typeface="Cambria" pitchFamily="34" charset="0"/>
                 <a:ea typeface="Cambria" pitchFamily="34" charset="-122"/>
                 <a:cs typeface="Cambria" pitchFamily="34" charset="-120"/>
               </a:rPr>
-              <a:t>Ten minutes</a:t>
-            </a:r>
-            <a:endParaRPr lang="en-US" sz="4000" dirty="0"/>
-          </a:p>
-        </p:txBody>
-      </p:sp>
-      <p:sp>
-        <p:nvSpPr>
-          <p:cNvPr id="4" name="Text 2"/>
-          <p:cNvSpPr/>
-          <p:nvPr/>
-        </p:nvSpPr>
-        <p:spPr>
-          <a:xfrm>
-            <a:off x="640080" y="3383280"/>
-            <a:ext cx="10058400" cy="548640"/>
+              <a:t>Meaning becomes geometry</a:t>
+            </a:r>
+            <a:endParaRPr lang="en-US" sz="3400" dirty="0"/>
+          </a:p>
+        </p:txBody>
+      </p:sp>
+      <p:pic>
+        <p:nvPicPr>
+          <p:cNvPr id="4" name="Image 0" descr="/tmp/figs/w4_map.png">    </p:cNvPr>
+          <p:cNvPicPr>
+            <a:picLocks noChangeAspect="1"/>
+          </p:cNvPicPr>
+          <p:nvPr/>
+        </p:nvPicPr>
+        <p:blipFill>
+          <a:blip r:embed="rId1"/>
+          <a:srcRect l="0" r="0" t="0" b="0"/>
+          <a:stretch/>
+        </p:blipFill>
+        <p:spPr>
+          <a:xfrm>
+            <a:off x="2011680" y="1737360"/>
+            <a:ext cx="8138160" cy="4114800"/>
+          </a:xfrm>
+          <a:prstGeom prst="rect">
+            <a:avLst/>
+          </a:prstGeom>
+        </p:spPr>
+      </p:pic>
+      <p:sp>
+        <p:nvSpPr>
+          <p:cNvPr id="5" name="Text 2"/>
+          <p:cNvSpPr/>
+          <p:nvPr/>
+        </p:nvSpPr>
+        <p:spPr>
+          <a:xfrm>
+            <a:off x="640080" y="5897880"/>
+            <a:ext cx="10881360" cy="411480"/>
           </a:xfrm>
           <a:prstGeom prst="rect">
             <a:avLst/>
@@ -4274,17 +3829,56 @@
               <a:buNone/>
             </a:pPr>
             <a:r>
-              <a:rPr lang="en-US" sz="1800" i="1" dirty="0">
-                <a:solidFill>
-                  <a:srgbClr val="E8DCD6"/>
+              <a:rPr lang="en-US" sz="1600" i="1" dirty="0">
+                <a:solidFill>
+                  <a:srgbClr val="1A1A1A"/>
+                </a:solidFill>
+                <a:latin typeface="Cambria" pitchFamily="34" charset="0"/>
+                <a:ea typeface="Cambria" pitchFamily="34" charset="-122"/>
+                <a:cs typeface="Cambria" pitchFamily="34" charset="-120"/>
+              </a:rPr>
+              <a:t>Times of day together. Family words together. Ship, sea and ice together. Nothing was labelled.</a:t>
+            </a:r>
+            <a:endParaRPr lang="en-US" sz="1600" dirty="0"/>
+          </a:p>
+        </p:txBody>
+      </p:sp>
+      <p:sp>
+        <p:nvSpPr>
+          <p:cNvPr id="6" name="Text 3"/>
+          <p:cNvSpPr/>
+          <p:nvPr/>
+        </p:nvSpPr>
+        <p:spPr>
+          <a:xfrm>
+            <a:off x="640080" y="6355080"/>
+            <a:ext cx="10881360" cy="320040"/>
+          </a:xfrm>
+          <a:prstGeom prst="rect">
+            <a:avLst/>
+          </a:prstGeom>
+          <a:noFill/>
+          <a:ln/>
+        </p:spPr>
+        <p:txBody>
+          <a:bodyPr wrap="square" rtlCol="0" anchor="ctr"/>
+          <a:lstStyle/>
+          <a:p>
+            <a:pPr indent="0" marL="0">
+              <a:buNone/>
+            </a:pPr>
+            <a:r>
+              <a:rPr lang="en-US" sz="1000" dirty="0">
+                <a:solidFill>
+                  <a:srgbClr val="6B6B63"/>
                 </a:solidFill>
                 <a:latin typeface="Calibri" pitchFamily="34" charset="0"/>
                 <a:ea typeface="Calibri" pitchFamily="34" charset="-122"/>
                 <a:cs typeface="Calibri" pitchFamily="34" charset="-120"/>
               </a:rPr>
-              <a:t>Then: where your corpus actually comes from.</a:t>
-            </a:r>
-            <a:endParaRPr lang="en-US" sz="1800" dirty="0"/>
+              <a:t>Two dimensions of eighty; the picture always loses something. Next: the Embedding Projector, live.</a:t>
+            </a:r>
+            <a:endParaRPr lang="en-US" sz="1000" dirty="0"/>
           </a:p>
         </p:txBody>
       </p:sp>
@@ -4353,7 +3947,7 @@
                 <a:ea typeface="Calibri" pitchFamily="34" charset="-122"/>
                 <a:cs typeface="Calibri" pitchFamily="34" charset="-120"/>
               </a:rPr>
-              <a:t>GETTING THE DATA</a:t>
+              <a:t>THE SAME GEOMETRY, THE OTHER RESULT</a:t>
             </a:r>
             <a:endParaRPr lang="en-US" sz="1300" dirty="0"/>
           </a:p>
@@ -4392,64 +3986,45 @@
                 <a:ea typeface="Cambria" pitchFamily="34" charset="-122"/>
                 <a:cs typeface="Cambria" pitchFamily="34" charset="-120"/>
               </a:rPr>
-              <a:t>Three routes, in the order you should try them</a:t>
+              <a:t>Occupations closest to each group's words</a:t>
             </a:r>
             <a:endParaRPr lang="en-US" sz="3400" dirty="0"/>
           </a:p>
         </p:txBody>
       </p:sp>
-      <p:sp>
-        <p:nvSpPr>
-          <p:cNvPr id="4" name="Shape 2"/>
-          <p:cNvSpPr/>
-          <p:nvPr/>
-        </p:nvSpPr>
-        <p:spPr>
-          <a:xfrm>
-            <a:off x="640080" y="2011680"/>
-            <a:ext cx="10881360" cy="1143000"/>
-          </a:xfrm>
-          <a:prstGeom prst="roundRect">
-            <a:avLst>
-              <a:gd name="adj" fmla="val 8000"/>
-            </a:avLst>
-          </a:prstGeom>
-          <a:solidFill>
-            <a:srgbClr val="F4EEE8"/>
-          </a:solidFill>
-          <a:ln/>
-        </p:spPr>
-      </p:sp>
-      <p:sp>
-        <p:nvSpPr>
-          <p:cNvPr id="5" name="Shape 3"/>
-          <p:cNvSpPr/>
-          <p:nvPr/>
-        </p:nvSpPr>
-        <p:spPr>
-          <a:xfrm>
-            <a:off x="914400" y="2304288"/>
-            <a:ext cx="548640" cy="548640"/>
-          </a:xfrm>
-          <a:prstGeom prst="ellipse">
-            <a:avLst/>
-          </a:prstGeom>
-          <a:solidFill>
-            <a:srgbClr val="3F6F5F"/>
-          </a:solidFill>
-          <a:ln/>
-        </p:spPr>
-      </p:sp>
-      <p:sp>
-        <p:nvSpPr>
-          <p:cNvPr id="6" name="Text 4"/>
-          <p:cNvSpPr/>
-          <p:nvPr/>
-        </p:nvSpPr>
-        <p:spPr>
-          <a:xfrm>
-            <a:off x="914400" y="2304288"/>
-            <a:ext cx="548640" cy="548640"/>
+      <p:pic>
+        <p:nvPicPr>
+          <p:cNvPr id="4" name="Image 0" descr="/tmp/figs/w4_paper_ethnic.png">    </p:cNvPr>
+          <p:cNvPicPr>
+            <a:picLocks noChangeAspect="1"/>
+          </p:cNvPicPr>
+          <p:nvPr/>
+        </p:nvPicPr>
+        <p:blipFill>
+          <a:blip r:embed="rId1"/>
+          <a:srcRect l="0" r="0" t="0" b="0"/>
+          <a:stretch/>
+        </p:blipFill>
+        <p:spPr>
+          <a:xfrm>
+            <a:off x="3566160" y="1691640"/>
+            <a:ext cx="5120640" cy="4114800"/>
+          </a:xfrm>
+          <a:prstGeom prst="rect">
+            <a:avLst/>
+          </a:prstGeom>
+        </p:spPr>
+      </p:pic>
+      <p:sp>
+        <p:nvSpPr>
+          <p:cNvPr id="5" name="Text 2"/>
+          <p:cNvSpPr/>
+          <p:nvPr/>
+        </p:nvSpPr>
+        <p:spPr>
+          <a:xfrm>
+            <a:off x="640080" y="5897880"/>
+            <a:ext cx="10881360" cy="411480"/>
           </a:xfrm>
           <a:prstGeom prst="rect">
             <a:avLst/>
@@ -4461,456 +4036,60 @@
           <a:bodyPr wrap="square" rtlCol="0" anchor="ctr"/>
           <a:lstStyle/>
           <a:p>
-            <a:pPr algn="ctr" indent="0" marL="0">
-              <a:buNone/>
-            </a:pPr>
-            <a:r>
-              <a:rPr lang="en-US" sz="1900" b="1" dirty="0">
-                <a:solidFill>
-                  <a:srgbClr val="FFFFFF"/>
+            <a:pPr indent="0" marL="0">
+              <a:buNone/>
+            </a:pPr>
+            <a:r>
+              <a:rPr lang="en-US" sz="1600" i="1" dirty="0">
+                <a:solidFill>
+                  <a:srgbClr val="1A1A1A"/>
                 </a:solidFill>
                 <a:latin typeface="Cambria" pitchFamily="34" charset="0"/>
                 <a:ea typeface="Cambria" pitchFamily="34" charset="-122"/>
                 <a:cs typeface="Cambria" pitchFamily="34" charset="-120"/>
               </a:rPr>
-              <a:t>1</a:t>
-            </a:r>
-            <a:endParaRPr lang="en-US" sz="1900" dirty="0"/>
-          </a:p>
-        </p:txBody>
-      </p:sp>
-      <p:sp>
-        <p:nvSpPr>
-          <p:cNvPr id="7" name="Text 5"/>
-          <p:cNvSpPr/>
-          <p:nvPr/>
-        </p:nvSpPr>
-        <p:spPr>
-          <a:xfrm>
-            <a:off x="1645920" y="2176272"/>
-            <a:ext cx="2834640" cy="457200"/>
-          </a:xfrm>
-          <a:prstGeom prst="rect">
-            <a:avLst/>
-          </a:prstGeom>
-          <a:noFill/>
-          <a:ln/>
-        </p:spPr>
-        <p:txBody>
-          <a:bodyPr wrap="square" lIns="0" tIns="0" rIns="0" bIns="0" rtlCol="0" anchor="ctr"/>
-          <a:lstStyle/>
-          <a:p>
-            <a:pPr indent="0" marL="0">
-              <a:buNone/>
-            </a:pPr>
-            <a:r>
-              <a:rPr lang="en-US" sz="1800" b="1" dirty="0">
-                <a:solidFill>
-                  <a:srgbClr val="1A1A1A"/>
-                </a:solidFill>
-                <a:latin typeface="Cambria" pitchFamily="34" charset="0"/>
-                <a:ea typeface="Cambria" pitchFamily="34" charset="-122"/>
-                <a:cs typeface="Cambria" pitchFamily="34" charset="-120"/>
-              </a:rPr>
-              <a:t>A prepared file</a:t>
-            </a:r>
-            <a:endParaRPr lang="en-US" sz="1800" dirty="0"/>
-          </a:p>
-        </p:txBody>
-      </p:sp>
-      <p:sp>
-        <p:nvSpPr>
-          <p:cNvPr id="8" name="Text 6"/>
-          <p:cNvSpPr/>
-          <p:nvPr/>
-        </p:nvSpPr>
-        <p:spPr>
-          <a:xfrm>
-            <a:off x="4572000" y="2194560"/>
-            <a:ext cx="6675120" cy="822960"/>
-          </a:xfrm>
-          <a:prstGeom prst="rect">
-            <a:avLst/>
-          </a:prstGeom>
-          <a:noFill/>
-          <a:ln/>
-        </p:spPr>
-        <p:txBody>
-          <a:bodyPr wrap="square" lIns="0" tIns="0" rIns="0" bIns="0" rtlCol="0" anchor="t"/>
-          <a:lstStyle/>
-          <a:p>
-            <a:pPr indent="0" marL="0">
-              <a:buNone/>
-            </a:pPr>
-            <a:r>
-              <a:rPr lang="en-US" sz="1350" dirty="0">
-                <a:solidFill>
-                  <a:srgbClr val="1A1A1A"/>
+              <a:t>Nobody labelled any of this. It is what a century of printed English put near what.</a:t>
+            </a:r>
+            <a:endParaRPr lang="en-US" sz="1600" dirty="0"/>
+          </a:p>
+        </p:txBody>
+      </p:sp>
+      <p:sp>
+        <p:nvSpPr>
+          <p:cNvPr id="6" name="Text 3"/>
+          <p:cNvSpPr/>
+          <p:nvPr/>
+        </p:nvSpPr>
+        <p:spPr>
+          <a:xfrm>
+            <a:off x="640080" y="6355080"/>
+            <a:ext cx="10881360" cy="320040"/>
+          </a:xfrm>
+          <a:prstGeom prst="rect">
+            <a:avLst/>
+          </a:prstGeom>
+          <a:noFill/>
+          <a:ln/>
+        </p:spPr>
+        <p:txBody>
+          <a:bodyPr wrap="square" rtlCol="0" anchor="ctr"/>
+          <a:lstStyle/>
+          <a:p>
+            <a:pPr indent="0" marL="0">
+              <a:buNone/>
+            </a:pPr>
+            <a:r>
+              <a:rPr lang="en-US" sz="1000" dirty="0">
+                <a:solidFill>
+                  <a:srgbClr val="6B6B63"/>
                 </a:solidFill>
                 <a:latin typeface="Calibri" pitchFamily="34" charset="0"/>
                 <a:ea typeface="Calibri" pitchFamily="34" charset="-122"/>
                 <a:cs typeface="Calibri" pitchFamily="34" charset="-120"/>
               </a:rPr>
-              <a:t>pd.read_csv(url) · gdown · load_dataset() · unzip. Most corpora already exist. Most projects should stop here.</a:t>
-            </a:r>
-            <a:endParaRPr lang="en-US" sz="1350" dirty="0"/>
-          </a:p>
-        </p:txBody>
-      </p:sp>
-      <p:sp>
-        <p:nvSpPr>
-          <p:cNvPr id="9" name="Shape 7"/>
-          <p:cNvSpPr/>
-          <p:nvPr/>
-        </p:nvSpPr>
-        <p:spPr>
-          <a:xfrm>
-            <a:off x="640080" y="3337560"/>
-            <a:ext cx="10881360" cy="1143000"/>
-          </a:xfrm>
-          <a:prstGeom prst="roundRect">
-            <a:avLst>
-              <a:gd name="adj" fmla="val 8000"/>
-            </a:avLst>
-          </a:prstGeom>
-          <a:solidFill>
-            <a:srgbClr val="F4EEE8"/>
-          </a:solidFill>
-          <a:ln/>
-        </p:spPr>
-      </p:sp>
-      <p:sp>
-        <p:nvSpPr>
-          <p:cNvPr id="10" name="Shape 8"/>
-          <p:cNvSpPr/>
-          <p:nvPr/>
-        </p:nvSpPr>
-        <p:spPr>
-          <a:xfrm>
-            <a:off x="914400" y="3630168"/>
-            <a:ext cx="548640" cy="548640"/>
-          </a:xfrm>
-          <a:prstGeom prst="ellipse">
-            <a:avLst/>
-          </a:prstGeom>
-          <a:solidFill>
-            <a:srgbClr val="2E5F8A"/>
-          </a:solidFill>
-          <a:ln/>
-        </p:spPr>
-      </p:sp>
-      <p:sp>
-        <p:nvSpPr>
-          <p:cNvPr id="11" name="Text 9"/>
-          <p:cNvSpPr/>
-          <p:nvPr/>
-        </p:nvSpPr>
-        <p:spPr>
-          <a:xfrm>
-            <a:off x="914400" y="3630168"/>
-            <a:ext cx="548640" cy="548640"/>
-          </a:xfrm>
-          <a:prstGeom prst="rect">
-            <a:avLst/>
-          </a:prstGeom>
-          <a:noFill/>
-          <a:ln/>
-        </p:spPr>
-        <p:txBody>
-          <a:bodyPr wrap="square" rtlCol="0" anchor="ctr"/>
-          <a:lstStyle/>
-          <a:p>
-            <a:pPr algn="ctr" indent="0" marL="0">
-              <a:buNone/>
-            </a:pPr>
-            <a:r>
-              <a:rPr lang="en-US" sz="1900" b="1" dirty="0">
-                <a:solidFill>
-                  <a:srgbClr val="FFFFFF"/>
-                </a:solidFill>
-                <a:latin typeface="Cambria" pitchFamily="34" charset="0"/>
-                <a:ea typeface="Cambria" pitchFamily="34" charset="-122"/>
-                <a:cs typeface="Cambria" pitchFamily="34" charset="-120"/>
-              </a:rPr>
-              <a:t>2</a:t>
-            </a:r>
-            <a:endParaRPr lang="en-US" sz="1900" dirty="0"/>
-          </a:p>
-        </p:txBody>
-      </p:sp>
-      <p:sp>
-        <p:nvSpPr>
-          <p:cNvPr id="12" name="Text 10"/>
-          <p:cNvSpPr/>
-          <p:nvPr/>
-        </p:nvSpPr>
-        <p:spPr>
-          <a:xfrm>
-            <a:off x="1645920" y="3502152"/>
-            <a:ext cx="2834640" cy="457200"/>
-          </a:xfrm>
-          <a:prstGeom prst="rect">
-            <a:avLst/>
-          </a:prstGeom>
-          <a:noFill/>
-          <a:ln/>
-        </p:spPr>
-        <p:txBody>
-          <a:bodyPr wrap="square" lIns="0" tIns="0" rIns="0" bIns="0" rtlCol="0" anchor="ctr"/>
-          <a:lstStyle/>
-          <a:p>
-            <a:pPr indent="0" marL="0">
-              <a:buNone/>
-            </a:pPr>
-            <a:r>
-              <a:rPr lang="en-US" sz="1800" b="1" dirty="0">
-                <a:solidFill>
-                  <a:srgbClr val="1A1A1A"/>
-                </a:solidFill>
-                <a:latin typeface="Cambria" pitchFamily="34" charset="0"/>
-                <a:ea typeface="Cambria" pitchFamily="34" charset="-122"/>
-                <a:cs typeface="Cambria" pitchFamily="34" charset="-120"/>
-              </a:rPr>
-              <a:t>An API</a:t>
-            </a:r>
-            <a:endParaRPr lang="en-US" sz="1800" dirty="0"/>
-          </a:p>
-        </p:txBody>
-      </p:sp>
-      <p:sp>
-        <p:nvSpPr>
-          <p:cNvPr id="13" name="Text 11"/>
-          <p:cNvSpPr/>
-          <p:nvPr/>
-        </p:nvSpPr>
-        <p:spPr>
-          <a:xfrm>
-            <a:off x="4572000" y="3520440"/>
-            <a:ext cx="6675120" cy="822960"/>
-          </a:xfrm>
-          <a:prstGeom prst="rect">
-            <a:avLst/>
-          </a:prstGeom>
-          <a:noFill/>
-          <a:ln/>
-        </p:spPr>
-        <p:txBody>
-          <a:bodyPr wrap="square" lIns="0" tIns="0" rIns="0" bIns="0" rtlCol="0" anchor="t"/>
-          <a:lstStyle/>
-          <a:p>
-            <a:pPr indent="0" marL="0">
-              <a:buNone/>
-            </a:pPr>
-            <a:r>
-              <a:rPr lang="en-US" sz="1350" dirty="0">
-                <a:solidFill>
-                  <a:srgbClr val="1A1A1A"/>
-                </a:solidFill>
-                <a:latin typeface="Calibri" pitchFamily="34" charset="0"/>
-                <a:ea typeface="Calibri" pitchFamily="34" charset="-122"/>
-                <a:cs typeface="Calibri" pitchFamily="34" charset="-120"/>
-              </a:rPr>
-              <a:t>A documented URL that returns JSON. Endpoint, key, pagination, rate limit - four words you will meet in the next ten minutes.</a:t>
-            </a:r>
-            <a:endParaRPr lang="en-US" sz="1350" dirty="0"/>
-          </a:p>
-        </p:txBody>
-      </p:sp>
-      <p:sp>
-        <p:nvSpPr>
-          <p:cNvPr id="14" name="Shape 12"/>
-          <p:cNvSpPr/>
-          <p:nvPr/>
-        </p:nvSpPr>
-        <p:spPr>
-          <a:xfrm>
-            <a:off x="640080" y="4663440"/>
-            <a:ext cx="10881360" cy="1143000"/>
-          </a:xfrm>
-          <a:prstGeom prst="roundRect">
-            <a:avLst>
-              <a:gd name="adj" fmla="val 8000"/>
-            </a:avLst>
-          </a:prstGeom>
-          <a:solidFill>
-            <a:srgbClr val="F4EEE8"/>
-          </a:solidFill>
-          <a:ln/>
-        </p:spPr>
-      </p:sp>
-      <p:sp>
-        <p:nvSpPr>
-          <p:cNvPr id="15" name="Shape 13"/>
-          <p:cNvSpPr/>
-          <p:nvPr/>
-        </p:nvSpPr>
-        <p:spPr>
-          <a:xfrm>
-            <a:off x="914400" y="4956048"/>
-            <a:ext cx="548640" cy="548640"/>
-          </a:xfrm>
-          <a:prstGeom prst="ellipse">
-            <a:avLst/>
-          </a:prstGeom>
-          <a:solidFill>
-            <a:srgbClr val="7A3B2E"/>
-          </a:solidFill>
-          <a:ln/>
-        </p:spPr>
-      </p:sp>
-      <p:sp>
-        <p:nvSpPr>
-          <p:cNvPr id="16" name="Text 14"/>
-          <p:cNvSpPr/>
-          <p:nvPr/>
-        </p:nvSpPr>
-        <p:spPr>
-          <a:xfrm>
-            <a:off x="914400" y="4956048"/>
-            <a:ext cx="548640" cy="548640"/>
-          </a:xfrm>
-          <a:prstGeom prst="rect">
-            <a:avLst/>
-          </a:prstGeom>
-          <a:noFill/>
-          <a:ln/>
-        </p:spPr>
-        <p:txBody>
-          <a:bodyPr wrap="square" rtlCol="0" anchor="ctr"/>
-          <a:lstStyle/>
-          <a:p>
-            <a:pPr algn="ctr" indent="0" marL="0">
-              <a:buNone/>
-            </a:pPr>
-            <a:r>
-              <a:rPr lang="en-US" sz="1900" b="1" dirty="0">
-                <a:solidFill>
-                  <a:srgbClr val="FFFFFF"/>
-                </a:solidFill>
-                <a:latin typeface="Cambria" pitchFamily="34" charset="0"/>
-                <a:ea typeface="Cambria" pitchFamily="34" charset="-122"/>
-                <a:cs typeface="Cambria" pitchFamily="34" charset="-120"/>
-              </a:rPr>
-              <a:t>3</a:t>
-            </a:r>
-            <a:endParaRPr lang="en-US" sz="1900" dirty="0"/>
-          </a:p>
-        </p:txBody>
-      </p:sp>
-      <p:sp>
-        <p:nvSpPr>
-          <p:cNvPr id="17" name="Text 15"/>
-          <p:cNvSpPr/>
-          <p:nvPr/>
-        </p:nvSpPr>
-        <p:spPr>
-          <a:xfrm>
-            <a:off x="1645920" y="4828032"/>
-            <a:ext cx="2834640" cy="457200"/>
-          </a:xfrm>
-          <a:prstGeom prst="rect">
-            <a:avLst/>
-          </a:prstGeom>
-          <a:noFill/>
-          <a:ln/>
-        </p:spPr>
-        <p:txBody>
-          <a:bodyPr wrap="square" lIns="0" tIns="0" rIns="0" bIns="0" rtlCol="0" anchor="ctr"/>
-          <a:lstStyle/>
-          <a:p>
-            <a:pPr indent="0" marL="0">
-              <a:buNone/>
-            </a:pPr>
-            <a:r>
-              <a:rPr lang="en-US" sz="1800" b="1" dirty="0">
-                <a:solidFill>
-                  <a:srgbClr val="1A1A1A"/>
-                </a:solidFill>
-                <a:latin typeface="Cambria" pitchFamily="34" charset="0"/>
-                <a:ea typeface="Cambria" pitchFamily="34" charset="-122"/>
-                <a:cs typeface="Cambria" pitchFamily="34" charset="-120"/>
-              </a:rPr>
-              <a:t>A careful scrape</a:t>
-            </a:r>
-            <a:endParaRPr lang="en-US" sz="1800" dirty="0"/>
-          </a:p>
-        </p:txBody>
-      </p:sp>
-      <p:sp>
-        <p:nvSpPr>
-          <p:cNvPr id="18" name="Text 16"/>
-          <p:cNvSpPr/>
-          <p:nvPr/>
-        </p:nvSpPr>
-        <p:spPr>
-          <a:xfrm>
-            <a:off x="4572000" y="4846320"/>
-            <a:ext cx="6675120" cy="822960"/>
-          </a:xfrm>
-          <a:prstGeom prst="rect">
-            <a:avLst/>
-          </a:prstGeom>
-          <a:noFill/>
-          <a:ln/>
-        </p:spPr>
-        <p:txBody>
-          <a:bodyPr wrap="square" lIns="0" tIns="0" rIns="0" bIns="0" rtlCol="0" anchor="t"/>
-          <a:lstStyle/>
-          <a:p>
-            <a:pPr indent="0" marL="0">
-              <a:buNone/>
-            </a:pPr>
-            <a:r>
-              <a:rPr lang="en-US" sz="1350" dirty="0">
-                <a:solidFill>
-                  <a:srgbClr val="1A1A1A"/>
-                </a:solidFill>
-                <a:latin typeface="Calibri" pitchFamily="34" charset="0"/>
-                <a:ea typeface="Calibri" pitchFamily="34" charset="-122"/>
-                <a:cs typeface="Calibri" pitchFamily="34" charset="-120"/>
-              </a:rPr>
-              <a:t>Only when there is no file and no API. BeautifulSoup, slowly, and never republished.</a:t>
-            </a:r>
-            <a:endParaRPr lang="en-US" sz="1350" dirty="0"/>
-          </a:p>
-        </p:txBody>
-      </p:sp>
-      <p:sp>
-        <p:nvSpPr>
-          <p:cNvPr id="19" name="Text 17"/>
-          <p:cNvSpPr/>
-          <p:nvPr/>
-        </p:nvSpPr>
-        <p:spPr>
-          <a:xfrm>
-            <a:off x="640080" y="6263640"/>
-            <a:ext cx="10881360" cy="365760"/>
-          </a:xfrm>
-          <a:prstGeom prst="rect">
-            <a:avLst/>
-          </a:prstGeom>
-          <a:noFill/>
-          <a:ln/>
-        </p:spPr>
-        <p:txBody>
-          <a:bodyPr wrap="square" rtlCol="0" anchor="ctr"/>
-          <a:lstStyle/>
-          <a:p>
-            <a:pPr indent="0" marL="0">
-              <a:buNone/>
-            </a:pPr>
-            <a:r>
-              <a:rPr lang="en-US" sz="1100" i="1" dirty="0">
-                <a:solidFill>
-                  <a:srgbClr val="6B6B63"/>
-                </a:solidFill>
-                <a:latin typeface="Calibri" pitchFamily="34" charset="0"/>
-                <a:ea typeface="Calibri" pitchFamily="34" charset="-122"/>
-                <a:cs typeface="Calibri" pitchFamily="34" charset="-120"/>
-              </a:rPr>
-              <a:t>The licensing line decides which routes are even open to you. That is the next slide.</a:t>
-            </a:r>
-            <a:endParaRPr lang="en-US" sz="1100" dirty="0"/>
+              <a:t>Fig. 1c, Garg, Schiebinger, Jurafsky &amp; Zou, PNAS 2018 (arXiv:1711.08412) · shown for teaching</a:t>
+            </a:r>
+            <a:endParaRPr lang="en-US" sz="1000" dirty="0"/>
           </a:p>
         </p:txBody>
       </p:sp>
@@ -4973,13 +4152,13 @@
             <a:r>
               <a:rPr lang="en-US" sz="1300" b="1" spc="300" kern="0" dirty="0">
                 <a:solidFill>
-                  <a:srgbClr val="2E5F8A"/>
+                  <a:srgbClr val="B9852F"/>
                 </a:solidFill>
                 <a:latin typeface="Calibri" pitchFamily="34" charset="0"/>
                 <a:ea typeface="Calibri" pitchFamily="34" charset="-122"/>
                 <a:cs typeface="Calibri" pitchFamily="34" charset="-120"/>
               </a:rPr>
-              <a:t>ROUTE TWO, LIVE</a:t>
+              <a:t>THE FAMOUS TRICK</a:t>
             </a:r>
             <a:endParaRPr lang="en-US" sz="1300" dirty="0"/>
           </a:p>
@@ -5018,45 +4197,83 @@
                 <a:ea typeface="Cambria" pitchFamily="34" charset="-122"/>
                 <a:cs typeface="Cambria" pitchFamily="34" charset="-120"/>
               </a:rPr>
-              <a:t>A URL, some JSON, and then a table</a:t>
+              <a:t>king − man + woman ≈ queen</a:t>
             </a:r>
             <a:endParaRPr lang="en-US" sz="3400" dirty="0"/>
           </a:p>
         </p:txBody>
       </p:sp>
-      <p:pic>
-        <p:nvPicPr>
-          <p:cNvPr id="4" name="Image 0" descr="/tmp/figs/w4_api.png">    </p:cNvPr>
-          <p:cNvPicPr>
-            <a:picLocks noChangeAspect="1"/>
-          </p:cNvPicPr>
-          <p:nvPr/>
-        </p:nvPicPr>
-        <p:blipFill>
-          <a:blip r:embed="rId1"/>
-          <a:srcRect l="0" r="0" t="0" b="0"/>
-          <a:stretch/>
-        </p:blipFill>
+      <p:sp>
+        <p:nvSpPr>
+          <p:cNvPr id="4" name="Shape 2"/>
+          <p:cNvSpPr/>
+          <p:nvPr/>
+        </p:nvSpPr>
         <p:spPr>
           <a:xfrm>
             <a:off x="640080" y="1920240"/>
-            <a:ext cx="7863840" cy="3657600"/>
-          </a:xfrm>
-          <a:prstGeom prst="rect">
-            <a:avLst/>
-          </a:prstGeom>
-        </p:spPr>
-      </p:pic>
-      <p:sp>
-        <p:nvSpPr>
-          <p:cNvPr id="5" name="Text 2"/>
-          <p:cNvSpPr/>
-          <p:nvPr/>
-        </p:nvSpPr>
-        <p:spPr>
-          <a:xfrm>
-            <a:off x="8778240" y="2011680"/>
-            <a:ext cx="2834640" cy="4023360"/>
+            <a:ext cx="10881360" cy="1463040"/>
+          </a:xfrm>
+          <a:prstGeom prst="roundRect">
+            <a:avLst>
+              <a:gd name="adj" fmla="val 6250"/>
+            </a:avLst>
+          </a:prstGeom>
+          <a:solidFill>
+            <a:srgbClr val="F4EEE8"/>
+          </a:solidFill>
+          <a:ln/>
+        </p:spPr>
+      </p:sp>
+      <p:sp>
+        <p:nvSpPr>
+          <p:cNvPr id="5" name="Text 3"/>
+          <p:cNvSpPr/>
+          <p:nvPr/>
+        </p:nvSpPr>
+        <p:spPr>
+          <a:xfrm>
+            <a:off x="1005840" y="2148840"/>
+            <a:ext cx="10149840" cy="1005840"/>
+          </a:xfrm>
+          <a:prstGeom prst="rect">
+            <a:avLst/>
+          </a:prstGeom>
+          <a:noFill/>
+          <a:ln/>
+        </p:spPr>
+        <p:txBody>
+          <a:bodyPr wrap="square" lIns="0" tIns="0" rIns="0" bIns="0" rtlCol="0" anchor="ctr"/>
+          <a:lstStyle/>
+          <a:p>
+            <a:pPr indent="0" marL="0">
+              <a:buNone/>
+            </a:pPr>
+            <a:r>
+              <a:rPr lang="en-US" sz="1900" dirty="0">
+                <a:solidFill>
+                  <a:srgbClr val="7A3B2E"/>
+                </a:solidFill>
+                <a:latin typeface="Courier New" pitchFamily="34" charset="0"/>
+                <a:ea typeface="Courier New" pitchFamily="34" charset="-122"/>
+                <a:cs typeface="Courier New" pitchFamily="34" charset="-120"/>
+              </a:rPr>
+              <a:t>king − man + woman → queen        paris − france + japan → tokyo</a:t>
+            </a:r>
+            <a:endParaRPr lang="en-US" sz="1900" dirty="0"/>
+          </a:p>
+        </p:txBody>
+      </p:sp>
+      <p:sp>
+        <p:nvSpPr>
+          <p:cNvPr id="6" name="Text 4"/>
+          <p:cNvSpPr/>
+          <p:nvPr/>
+        </p:nvSpPr>
+        <p:spPr>
+          <a:xfrm>
+            <a:off x="640080" y="3657600"/>
+            <a:ext cx="5577840" cy="2194560"/>
           </a:xfrm>
           <a:prstGeom prst="rect">
             <a:avLst/>
@@ -5079,7 +4296,7 @@
               <a:buChar char="•"/>
             </a:pPr>
             <a:r>
-              <a:rPr lang="en-US" sz="1300" dirty="0">
+              <a:rPr lang="en-US" sz="1600" dirty="0">
                 <a:solidFill>
                   <a:srgbClr val="1A1A1A"/>
                 </a:solidFill>
@@ -5087,9 +4304,9 @@
                 <a:ea typeface="Calibri" pitchFamily="34" charset="-122"/>
                 <a:cs typeface="Calibri" pitchFamily="34" charset="-120"/>
               </a:rPr>
-              <a:t>An endpoint is just a URL that answers with data instead of a web page.</a:t>
-            </a:r>
-            <a:endParaRPr lang="en-US" sz="1300" dirty="0"/>
+              <a:t>Directions carry relationships nobody labelled.</a:t>
+            </a:r>
+            <a:endParaRPr lang="en-US" sz="1600" dirty="0"/>
           </a:p>
           <a:p>
             <a:pPr marL="152400" indent="-152400">
@@ -5103,7 +4320,7 @@
               <a:buChar char="•"/>
             </a:pPr>
             <a:r>
-              <a:rPr lang="en-US" sz="1300" dirty="0">
+              <a:rPr lang="en-US" sz="1600" dirty="0">
                 <a:solidFill>
                   <a:srgbClr val="1A1A1A"/>
                 </a:solidFill>
@@ -5111,9 +4328,9 @@
                 <a:ea typeface="Calibri" pitchFamily="34" charset="-122"/>
                 <a:cs typeface="Calibri" pitchFamily="34" charset="-120"/>
               </a:rPr>
-              <a:t>A key is a name badge. Some APIs want one; the museums here do not.</a:t>
-            </a:r>
-            <a:endParaRPr lang="en-US" sz="1300" dirty="0"/>
+              <a:t>The arithmetic is nudged, and most analogies fail. The famous four are the ones that worked.</a:t>
+            </a:r>
+            <a:endParaRPr lang="en-US" sz="1600" dirty="0"/>
           </a:p>
           <a:p>
             <a:pPr marL="152400" indent="-152400">
@@ -5127,7 +4344,7 @@
               <a:buChar char="•"/>
             </a:pPr>
             <a:r>
-              <a:rPr lang="en-US" sz="1300" dirty="0">
+              <a:rPr lang="en-US" sz="1600" dirty="0">
                 <a:solidFill>
                   <a:srgbClr val="1A1A1A"/>
                 </a:solidFill>
@@ -5135,23 +4352,99 @@
                 <a:ea typeface="Calibri" pitchFamily="34" charset="-122"/>
                 <a:cs typeface="Calibri" pitchFamily="34" charset="-120"/>
               </a:rPr>
-              <a:t>Pagination: it hands you a page at a time, and you ask for the next.</a:t>
-            </a:r>
-            <a:endParaRPr lang="en-US" sz="1300" dirty="0"/>
-          </a:p>
-          <a:p>
-            <a:pPr marL="152400" indent="-152400">
-              <a:lnSpc>
-                <a:spcPct val="115000"/>
-              </a:lnSpc>
-              <a:spcAft>
-                <a:spcPts val="1000"/>
-              </a:spcAft>
-              <a:buSzPct val="100000"/>
-              <a:buChar char="•"/>
-            </a:pPr>
-            <a:r>
-              <a:rPr lang="en-US" sz="1300" dirty="0">
+              <a:t>Same geometry, other result: doctor − man + woman → nurse.</a:t>
+            </a:r>
+            <a:endParaRPr lang="en-US" sz="1600" dirty="0"/>
+          </a:p>
+        </p:txBody>
+      </p:sp>
+      <p:sp>
+        <p:nvSpPr>
+          <p:cNvPr id="7" name="Shape 5"/>
+          <p:cNvSpPr/>
+          <p:nvPr/>
+        </p:nvSpPr>
+        <p:spPr>
+          <a:xfrm>
+            <a:off x="6492240" y="3657600"/>
+            <a:ext cx="5029200" cy="2194560"/>
+          </a:xfrm>
+          <a:prstGeom prst="roundRect">
+            <a:avLst>
+              <a:gd name="adj" fmla="val 4167"/>
+            </a:avLst>
+          </a:prstGeom>
+          <a:solidFill>
+            <a:srgbClr val="F4EEE8"/>
+          </a:solidFill>
+          <a:ln/>
+        </p:spPr>
+      </p:sp>
+      <p:sp>
+        <p:nvSpPr>
+          <p:cNvPr id="8" name="Text 6"/>
+          <p:cNvSpPr/>
+          <p:nvPr/>
+        </p:nvSpPr>
+        <p:spPr>
+          <a:xfrm>
+            <a:off x="6766560" y="3840480"/>
+            <a:ext cx="2011680" cy="457200"/>
+          </a:xfrm>
+          <a:prstGeom prst="rect">
+            <a:avLst/>
+          </a:prstGeom>
+          <a:noFill/>
+          <a:ln/>
+        </p:spPr>
+        <p:txBody>
+          <a:bodyPr wrap="square" lIns="0" tIns="0" rIns="0" bIns="0" rtlCol="0" anchor="ctr"/>
+          <a:lstStyle/>
+          <a:p>
+            <a:pPr indent="0" marL="0">
+              <a:buNone/>
+            </a:pPr>
+            <a:r>
+              <a:rPr lang="en-US" sz="1600" b="1" dirty="0">
+                <a:solidFill>
+                  <a:srgbClr val="7A3B2E"/>
+                </a:solidFill>
+                <a:latin typeface="Cambria" pitchFamily="34" charset="0"/>
+                <a:ea typeface="Cambria" pitchFamily="34" charset="-122"/>
+                <a:cs typeface="Cambria" pitchFamily="34" charset="-120"/>
+              </a:rPr>
+              <a:t>static</a:t>
+            </a:r>
+            <a:endParaRPr lang="en-US" sz="1600" dirty="0"/>
+          </a:p>
+        </p:txBody>
+      </p:sp>
+      <p:sp>
+        <p:nvSpPr>
+          <p:cNvPr id="9" name="Text 7"/>
+          <p:cNvSpPr/>
+          <p:nvPr/>
+        </p:nvSpPr>
+        <p:spPr>
+          <a:xfrm>
+            <a:off x="8686800" y="3840480"/>
+            <a:ext cx="2651760" cy="457200"/>
+          </a:xfrm>
+          <a:prstGeom prst="rect">
+            <a:avLst/>
+          </a:prstGeom>
+          <a:noFill/>
+          <a:ln/>
+        </p:spPr>
+        <p:txBody>
+          <a:bodyPr wrap="square" lIns="0" tIns="0" rIns="0" bIns="0" rtlCol="0" anchor="ctr"/>
+          <a:lstStyle/>
+          <a:p>
+            <a:pPr indent="0" marL="0">
+              <a:buNone/>
+            </a:pPr>
+            <a:r>
+              <a:rPr lang="en-US" sz="1350" dirty="0">
                 <a:solidFill>
                   <a:srgbClr val="1A1A1A"/>
                 </a:solidFill>
@@ -5159,48 +4452,165 @@
                 <a:ea typeface="Calibri" pitchFamily="34" charset="-122"/>
                 <a:cs typeface="Calibri" pitchFamily="34" charset="-120"/>
               </a:rPr>
-              <a:t>A rate limit is the host saying how fast you may knock. Respect it and you keep the door open.</a:t>
-            </a:r>
-            <a:endParaRPr lang="en-US" sz="1300" dirty="0"/>
-          </a:p>
-        </p:txBody>
-      </p:sp>
-      <p:sp>
-        <p:nvSpPr>
-          <p:cNvPr id="6" name="Text 3"/>
-          <p:cNvSpPr/>
-          <p:nvPr/>
-        </p:nvSpPr>
-        <p:spPr>
-          <a:xfrm>
-            <a:off x="640080" y="6263640"/>
-            <a:ext cx="10881360" cy="365760"/>
-          </a:xfrm>
-          <a:prstGeom prst="rect">
-            <a:avLst/>
-          </a:prstGeom>
-          <a:noFill/>
-          <a:ln/>
-        </p:spPr>
-        <p:txBody>
-          <a:bodyPr wrap="square" rtlCol="0" anchor="ctr"/>
-          <a:lstStyle/>
-          <a:p>
-            <a:pPr indent="0" marL="0">
-              <a:buNone/>
-            </a:pPr>
-            <a:r>
-              <a:rPr lang="en-US" sz="1100" i="1" dirty="0">
-                <a:solidFill>
-                  <a:srgbClr val="6B6B63"/>
+              <a:t>one vector per word</a:t>
+            </a:r>
+            <a:endParaRPr lang="en-US" sz="1350" dirty="0"/>
+          </a:p>
+        </p:txBody>
+      </p:sp>
+      <p:sp>
+        <p:nvSpPr>
+          <p:cNvPr id="10" name="Text 8"/>
+          <p:cNvSpPr/>
+          <p:nvPr/>
+        </p:nvSpPr>
+        <p:spPr>
+          <a:xfrm>
+            <a:off x="6766560" y="4498848"/>
+            <a:ext cx="2011680" cy="457200"/>
+          </a:xfrm>
+          <a:prstGeom prst="rect">
+            <a:avLst/>
+          </a:prstGeom>
+          <a:noFill/>
+          <a:ln/>
+        </p:spPr>
+        <p:txBody>
+          <a:bodyPr wrap="square" lIns="0" tIns="0" rIns="0" bIns="0" rtlCol="0" anchor="ctr"/>
+          <a:lstStyle/>
+          <a:p>
+            <a:pPr indent="0" marL="0">
+              <a:buNone/>
+            </a:pPr>
+            <a:r>
+              <a:rPr lang="en-US" sz="1600" b="1" dirty="0">
+                <a:solidFill>
+                  <a:srgbClr val="2E5F8A"/>
+                </a:solidFill>
+                <a:latin typeface="Cambria" pitchFamily="34" charset="0"/>
+                <a:ea typeface="Cambria" pitchFamily="34" charset="-122"/>
+                <a:cs typeface="Cambria" pitchFamily="34" charset="-120"/>
+              </a:rPr>
+              <a:t>contextual</a:t>
+            </a:r>
+            <a:endParaRPr lang="en-US" sz="1600" dirty="0"/>
+          </a:p>
+        </p:txBody>
+      </p:sp>
+      <p:sp>
+        <p:nvSpPr>
+          <p:cNvPr id="11" name="Text 9"/>
+          <p:cNvSpPr/>
+          <p:nvPr/>
+        </p:nvSpPr>
+        <p:spPr>
+          <a:xfrm>
+            <a:off x="8686800" y="4498848"/>
+            <a:ext cx="2651760" cy="457200"/>
+          </a:xfrm>
+          <a:prstGeom prst="rect">
+            <a:avLst/>
+          </a:prstGeom>
+          <a:noFill/>
+          <a:ln/>
+        </p:spPr>
+        <p:txBody>
+          <a:bodyPr wrap="square" lIns="0" tIns="0" rIns="0" bIns="0" rtlCol="0" anchor="ctr"/>
+          <a:lstStyle/>
+          <a:p>
+            <a:pPr indent="0" marL="0">
+              <a:buNone/>
+            </a:pPr>
+            <a:r>
+              <a:rPr lang="en-US" sz="1350" dirty="0">
+                <a:solidFill>
+                  <a:srgbClr val="1A1A1A"/>
                 </a:solidFill>
                 <a:latin typeface="Calibri" pitchFamily="34" charset="0"/>
                 <a:ea typeface="Calibri" pitchFamily="34" charset="-122"/>
                 <a:cs typeface="Calibri" pitchFamily="34" charset="-120"/>
               </a:rPr>
-              <a:t>The panel on the left is a real response, live from api.artic.edu. The AI writes the three lines that turn it into the table.</a:t>
-            </a:r>
-            <a:endParaRPr lang="en-US" sz="1100" dirty="0"/>
+              <a:t>one per occurrence</a:t>
+            </a:r>
+            <a:endParaRPr lang="en-US" sz="1350" dirty="0"/>
+          </a:p>
+        </p:txBody>
+      </p:sp>
+      <p:sp>
+        <p:nvSpPr>
+          <p:cNvPr id="12" name="Text 10"/>
+          <p:cNvSpPr/>
+          <p:nvPr/>
+        </p:nvSpPr>
+        <p:spPr>
+          <a:xfrm>
+            <a:off x="6766560" y="5157216"/>
+            <a:ext cx="2011680" cy="457200"/>
+          </a:xfrm>
+          <a:prstGeom prst="rect">
+            <a:avLst/>
+          </a:prstGeom>
+          <a:noFill/>
+          <a:ln/>
+        </p:spPr>
+        <p:txBody>
+          <a:bodyPr wrap="square" lIns="0" tIns="0" rIns="0" bIns="0" rtlCol="0" anchor="ctr"/>
+          <a:lstStyle/>
+          <a:p>
+            <a:pPr indent="0" marL="0">
+              <a:buNone/>
+            </a:pPr>
+            <a:r>
+              <a:rPr lang="en-US" sz="1600" b="1" dirty="0">
+                <a:solidFill>
+                  <a:srgbClr val="3F6F5F"/>
+                </a:solidFill>
+                <a:latin typeface="Cambria" pitchFamily="34" charset="0"/>
+                <a:ea typeface="Cambria" pitchFamily="34" charset="-122"/>
+                <a:cs typeface="Cambria" pitchFamily="34" charset="-120"/>
+              </a:rPr>
+              <a:t>sentence</a:t>
+            </a:r>
+            <a:endParaRPr lang="en-US" sz="1600" dirty="0"/>
+          </a:p>
+        </p:txBody>
+      </p:sp>
+      <p:sp>
+        <p:nvSpPr>
+          <p:cNvPr id="13" name="Text 11"/>
+          <p:cNvSpPr/>
+          <p:nvPr/>
+        </p:nvSpPr>
+        <p:spPr>
+          <a:xfrm>
+            <a:off x="8686800" y="5157216"/>
+            <a:ext cx="2651760" cy="457200"/>
+          </a:xfrm>
+          <a:prstGeom prst="rect">
+            <a:avLst/>
+          </a:prstGeom>
+          <a:noFill/>
+          <a:ln/>
+        </p:spPr>
+        <p:txBody>
+          <a:bodyPr wrap="square" lIns="0" tIns="0" rIns="0" bIns="0" rtlCol="0" anchor="ctr"/>
+          <a:lstStyle/>
+          <a:p>
+            <a:pPr indent="0" marL="0">
+              <a:buNone/>
+            </a:pPr>
+            <a:r>
+              <a:rPr lang="en-US" sz="1350" dirty="0">
+                <a:solidFill>
+                  <a:srgbClr val="1A1A1A"/>
+                </a:solidFill>
+                <a:latin typeface="Calibri" pitchFamily="34" charset="0"/>
+                <a:ea typeface="Calibri" pitchFamily="34" charset="-122"/>
+                <a:cs typeface="Calibri" pitchFamily="34" charset="-120"/>
+              </a:rPr>
+              <a:t>one per document — Week 5</a:t>
+            </a:r>
+            <a:endParaRPr lang="en-US" sz="1350" dirty="0"/>
           </a:p>
         </p:txBody>
       </p:sp>
@@ -5218,7 +4628,7 @@
     <p:bg>
       <p:bgPr>
         <a:solidFill>
-          <a:srgbClr val="FFFFFF"/>
+          <a:srgbClr val="4E261D"/>
         </a:solidFill>
       </p:bgPr>
     </p:bg>
@@ -5263,13 +4673,13 @@
             <a:r>
               <a:rPr lang="en-US" sz="1300" b="1" spc="300" kern="0" dirty="0">
                 <a:solidFill>
-                  <a:srgbClr val="7A3B2E"/>
+                  <a:srgbClr val="B9852F"/>
                 </a:solidFill>
                 <a:latin typeface="Calibri" pitchFamily="34" charset="0"/>
                 <a:ea typeface="Calibri" pitchFamily="34" charset="-122"/>
                 <a:cs typeface="Calibri" pitchFamily="34" charset="-120"/>
               </a:rPr>
-              <a:t>ROUTE THREE</a:t>
+              <a:t>BREAK</a:t>
             </a:r>
             <a:endParaRPr lang="en-US" sz="1300" dirty="0"/>
           </a:p>
@@ -5283,473 +4693,73 @@
         </p:nvSpPr>
         <p:spPr>
           <a:xfrm>
-            <a:off x="640080" y="868680"/>
-            <a:ext cx="10972800" cy="777240"/>
-          </a:xfrm>
-          <a:prstGeom prst="rect">
-            <a:avLst/>
-          </a:prstGeom>
-          <a:noFill/>
-          <a:ln/>
-        </p:spPr>
-        <p:txBody>
-          <a:bodyPr wrap="square" rtlCol="0" anchor="t"/>
-          <a:lstStyle/>
-          <a:p>
-            <a:pPr indent="0" marL="0">
-              <a:buNone/>
-            </a:pPr>
-            <a:r>
-              <a:rPr lang="en-US" sz="3400" b="1" dirty="0">
-                <a:solidFill>
-                  <a:srgbClr val="1A1A1A"/>
+            <a:off x="640080" y="2377440"/>
+            <a:ext cx="10058400" cy="914400"/>
+          </a:xfrm>
+          <a:prstGeom prst="rect">
+            <a:avLst/>
+          </a:prstGeom>
+          <a:noFill/>
+          <a:ln/>
+        </p:spPr>
+        <p:txBody>
+          <a:bodyPr wrap="square" rtlCol="0" anchor="ctr"/>
+          <a:lstStyle/>
+          <a:p>
+            <a:pPr indent="0" marL="0">
+              <a:buNone/>
+            </a:pPr>
+            <a:r>
+              <a:rPr lang="en-US" sz="4000" b="1" dirty="0">
+                <a:solidFill>
+                  <a:srgbClr val="FFFFFF"/>
                 </a:solidFill>
                 <a:latin typeface="Cambria" pitchFamily="34" charset="0"/>
                 <a:ea typeface="Cambria" pitchFamily="34" charset="-122"/>
                 <a:cs typeface="Cambria" pitchFamily="34" charset="-120"/>
               </a:rPr>
-              <a:t>Scraping, and the four things that come with it</a:t>
-            </a:r>
-            <a:endParaRPr lang="en-US" sz="3400" dirty="0"/>
-          </a:p>
-        </p:txBody>
-      </p:sp>
-      <p:sp>
-        <p:nvSpPr>
-          <p:cNvPr id="4" name="Shape 2"/>
-          <p:cNvSpPr/>
-          <p:nvPr/>
-        </p:nvSpPr>
-        <p:spPr>
-          <a:xfrm>
-            <a:off x="640080" y="2011680"/>
-            <a:ext cx="10881360" cy="914400"/>
-          </a:xfrm>
-          <a:prstGeom prst="roundRect">
-            <a:avLst>
-              <a:gd name="adj" fmla="val 10000"/>
-            </a:avLst>
-          </a:prstGeom>
-          <a:solidFill>
-            <a:srgbClr val="F4EEE8"/>
-          </a:solidFill>
-          <a:ln/>
-        </p:spPr>
-      </p:sp>
-      <p:sp>
-        <p:nvSpPr>
-          <p:cNvPr id="5" name="Text 3"/>
-          <p:cNvSpPr/>
-          <p:nvPr/>
-        </p:nvSpPr>
-        <p:spPr>
-          <a:xfrm>
-            <a:off x="960120" y="2103120"/>
-            <a:ext cx="4023360" cy="731520"/>
-          </a:xfrm>
-          <a:prstGeom prst="rect">
-            <a:avLst/>
-          </a:prstGeom>
-          <a:noFill/>
-          <a:ln/>
-        </p:spPr>
-        <p:txBody>
-          <a:bodyPr wrap="square" lIns="0" tIns="0" rIns="0" bIns="0" rtlCol="0" anchor="ctr"/>
-          <a:lstStyle/>
-          <a:p>
-            <a:pPr indent="0" marL="0">
-              <a:buNone/>
-            </a:pPr>
-            <a:r>
-              <a:rPr lang="en-US" sz="1700" b="1" dirty="0">
-                <a:solidFill>
-                  <a:srgbClr val="7A3B2E"/>
-                </a:solidFill>
-                <a:latin typeface="Cambria" pitchFamily="34" charset="0"/>
-                <a:ea typeface="Cambria" pitchFamily="34" charset="-122"/>
-                <a:cs typeface="Cambria" pitchFamily="34" charset="-120"/>
-              </a:rPr>
-              <a:t>Read robots.txt and the terms</a:t>
-            </a:r>
-            <a:endParaRPr lang="en-US" sz="1700" dirty="0"/>
-          </a:p>
-        </p:txBody>
-      </p:sp>
-      <p:sp>
-        <p:nvSpPr>
-          <p:cNvPr id="6" name="Text 4"/>
-          <p:cNvSpPr/>
-          <p:nvPr/>
-        </p:nvSpPr>
-        <p:spPr>
-          <a:xfrm>
-            <a:off x="5120640" y="2103120"/>
-            <a:ext cx="6126480" cy="731520"/>
-          </a:xfrm>
-          <a:prstGeom prst="rect">
-            <a:avLst/>
-          </a:prstGeom>
-          <a:noFill/>
-          <a:ln/>
-        </p:spPr>
-        <p:txBody>
-          <a:bodyPr wrap="square" lIns="0" tIns="0" rIns="0" bIns="0" rtlCol="0" anchor="ctr"/>
-          <a:lstStyle/>
-          <a:p>
-            <a:pPr indent="0" marL="0">
-              <a:buNone/>
-            </a:pPr>
-            <a:r>
-              <a:rPr lang="en-US" sz="1350" dirty="0">
-                <a:solidFill>
-                  <a:srgbClr val="1A1A1A"/>
+              <a:t>Ten minutes</a:t>
+            </a:r>
+            <a:endParaRPr lang="en-US" sz="4000" dirty="0"/>
+          </a:p>
+        </p:txBody>
+      </p:sp>
+      <p:sp>
+        <p:nvSpPr>
+          <p:cNvPr id="4" name="Text 2"/>
+          <p:cNvSpPr/>
+          <p:nvPr/>
+        </p:nvSpPr>
+        <p:spPr>
+          <a:xfrm>
+            <a:off x="640080" y="3383280"/>
+            <a:ext cx="10058400" cy="548640"/>
+          </a:xfrm>
+          <a:prstGeom prst="rect">
+            <a:avLst/>
+          </a:prstGeom>
+          <a:noFill/>
+          <a:ln/>
+        </p:spPr>
+        <p:txBody>
+          <a:bodyPr wrap="square" rtlCol="0" anchor="ctr"/>
+          <a:lstStyle/>
+          <a:p>
+            <a:pPr indent="0" marL="0">
+              <a:buNone/>
+            </a:pPr>
+            <a:r>
+              <a:rPr lang="en-US" sz="1800" i="1" dirty="0">
+                <a:solidFill>
+                  <a:srgbClr val="E8DCD6"/>
                 </a:solidFill>
                 <a:latin typeface="Calibri" pitchFamily="34" charset="0"/>
                 <a:ea typeface="Calibri" pitchFamily="34" charset="-122"/>
                 <a:cs typeface="Calibri" pitchFamily="34" charset="-120"/>
               </a:rPr>
-              <a:t>before the first request, not after the complaint.</a:t>
-            </a:r>
-            <a:endParaRPr lang="en-US" sz="1350" dirty="0"/>
-          </a:p>
-        </p:txBody>
-      </p:sp>
-      <p:sp>
-        <p:nvSpPr>
-          <p:cNvPr id="7" name="Shape 5"/>
-          <p:cNvSpPr/>
-          <p:nvPr/>
-        </p:nvSpPr>
-        <p:spPr>
-          <a:xfrm>
-            <a:off x="640080" y="3063240"/>
-            <a:ext cx="10881360" cy="914400"/>
-          </a:xfrm>
-          <a:prstGeom prst="roundRect">
-            <a:avLst>
-              <a:gd name="adj" fmla="val 10000"/>
-            </a:avLst>
-          </a:prstGeom>
-          <a:solidFill>
-            <a:srgbClr val="F4EEE8"/>
-          </a:solidFill>
-          <a:ln/>
-        </p:spPr>
-      </p:sp>
-      <p:sp>
-        <p:nvSpPr>
-          <p:cNvPr id="8" name="Text 6"/>
-          <p:cNvSpPr/>
-          <p:nvPr/>
-        </p:nvSpPr>
-        <p:spPr>
-          <a:xfrm>
-            <a:off x="960120" y="3154680"/>
-            <a:ext cx="4023360" cy="731520"/>
-          </a:xfrm>
-          <a:prstGeom prst="rect">
-            <a:avLst/>
-          </a:prstGeom>
-          <a:noFill/>
-          <a:ln/>
-        </p:spPr>
-        <p:txBody>
-          <a:bodyPr wrap="square" lIns="0" tIns="0" rIns="0" bIns="0" rtlCol="0" anchor="ctr"/>
-          <a:lstStyle/>
-          <a:p>
-            <a:pPr indent="0" marL="0">
-              <a:buNone/>
-            </a:pPr>
-            <a:r>
-              <a:rPr lang="en-US" sz="1700" b="1" dirty="0">
-                <a:solidFill>
-                  <a:srgbClr val="B9852F"/>
-                </a:solidFill>
-                <a:latin typeface="Cambria" pitchFamily="34" charset="0"/>
-                <a:ea typeface="Cambria" pitchFamily="34" charset="-122"/>
-                <a:cs typeface="Cambria" pitchFamily="34" charset="-120"/>
-              </a:rPr>
-              <a:t>Request slowly</a:t>
-            </a:r>
-            <a:endParaRPr lang="en-US" sz="1700" dirty="0"/>
-          </a:p>
-        </p:txBody>
-      </p:sp>
-      <p:sp>
-        <p:nvSpPr>
-          <p:cNvPr id="9" name="Text 7"/>
-          <p:cNvSpPr/>
-          <p:nvPr/>
-        </p:nvSpPr>
-        <p:spPr>
-          <a:xfrm>
-            <a:off x="5120640" y="3154680"/>
-            <a:ext cx="6126480" cy="731520"/>
-          </a:xfrm>
-          <a:prstGeom prst="rect">
-            <a:avLst/>
-          </a:prstGeom>
-          <a:noFill/>
-          <a:ln/>
-        </p:spPr>
-        <p:txBody>
-          <a:bodyPr wrap="square" lIns="0" tIns="0" rIns="0" bIns="0" rtlCol="0" anchor="ctr"/>
-          <a:lstStyle/>
-          <a:p>
-            <a:pPr indent="0" marL="0">
-              <a:buNone/>
-            </a:pPr>
-            <a:r>
-              <a:rPr lang="en-US" sz="1350" dirty="0">
-                <a:solidFill>
-                  <a:srgbClr val="1A1A1A"/>
-                </a:solidFill>
-                <a:latin typeface="Calibri" pitchFamily="34" charset="0"/>
-                <a:ea typeface="Calibri" pitchFamily="34" charset="-122"/>
-                <a:cs typeface="Calibri" pitchFamily="34" charset="-120"/>
-              </a:rPr>
-              <a:t>one page every couple of seconds. You are a guest on someone's server.</a:t>
-            </a:r>
-            <a:endParaRPr lang="en-US" sz="1350" dirty="0"/>
-          </a:p>
-        </p:txBody>
-      </p:sp>
-      <p:sp>
-        <p:nvSpPr>
-          <p:cNvPr id="10" name="Shape 8"/>
-          <p:cNvSpPr/>
-          <p:nvPr/>
-        </p:nvSpPr>
-        <p:spPr>
-          <a:xfrm>
-            <a:off x="640080" y="4114800"/>
-            <a:ext cx="10881360" cy="914400"/>
-          </a:xfrm>
-          <a:prstGeom prst="roundRect">
-            <a:avLst>
-              <a:gd name="adj" fmla="val 10000"/>
-            </a:avLst>
-          </a:prstGeom>
-          <a:solidFill>
-            <a:srgbClr val="F4EEE8"/>
-          </a:solidFill>
-          <a:ln/>
-        </p:spPr>
-      </p:sp>
-      <p:sp>
-        <p:nvSpPr>
-          <p:cNvPr id="11" name="Text 9"/>
-          <p:cNvSpPr/>
-          <p:nvPr/>
-        </p:nvSpPr>
-        <p:spPr>
-          <a:xfrm>
-            <a:off x="960120" y="4206240"/>
-            <a:ext cx="4023360" cy="731520"/>
-          </a:xfrm>
-          <a:prstGeom prst="rect">
-            <a:avLst/>
-          </a:prstGeom>
-          <a:noFill/>
-          <a:ln/>
-        </p:spPr>
-        <p:txBody>
-          <a:bodyPr wrap="square" lIns="0" tIns="0" rIns="0" bIns="0" rtlCol="0" anchor="ctr"/>
-          <a:lstStyle/>
-          <a:p>
-            <a:pPr indent="0" marL="0">
-              <a:buNone/>
-            </a:pPr>
-            <a:r>
-              <a:rPr lang="en-US" sz="1700" b="1" dirty="0">
-                <a:solidFill>
-                  <a:srgbClr val="3F6F5F"/>
-                </a:solidFill>
-                <a:latin typeface="Cambria" pitchFamily="34" charset="0"/>
-                <a:ea typeface="Cambria" pitchFamily="34" charset="-122"/>
-                <a:cs typeface="Cambria" pitchFamily="34" charset="-120"/>
-              </a:rPr>
-              <a:t>Take only what you need</a:t>
-            </a:r>
-            <a:endParaRPr lang="en-US" sz="1700" dirty="0"/>
-          </a:p>
-        </p:txBody>
-      </p:sp>
-      <p:sp>
-        <p:nvSpPr>
-          <p:cNvPr id="12" name="Text 10"/>
-          <p:cNvSpPr/>
-          <p:nvPr/>
-        </p:nvSpPr>
-        <p:spPr>
-          <a:xfrm>
-            <a:off x="5120640" y="4206240"/>
-            <a:ext cx="6126480" cy="731520"/>
-          </a:xfrm>
-          <a:prstGeom prst="rect">
-            <a:avLst/>
-          </a:prstGeom>
-          <a:noFill/>
-          <a:ln/>
-        </p:spPr>
-        <p:txBody>
-          <a:bodyPr wrap="square" lIns="0" tIns="0" rIns="0" bIns="0" rtlCol="0" anchor="ctr"/>
-          <a:lstStyle/>
-          <a:p>
-            <a:pPr indent="0" marL="0">
-              <a:buNone/>
-            </a:pPr>
-            <a:r>
-              <a:rPr lang="en-US" sz="1350" dirty="0">
-                <a:solidFill>
-                  <a:srgbClr val="1A1A1A"/>
-                </a:solidFill>
-                <a:latin typeface="Calibri" pitchFamily="34" charset="0"/>
-                <a:ea typeface="Calibri" pitchFamily="34" charset="-122"/>
-                <a:cs typeface="Calibri" pitchFamily="34" charset="-120"/>
-              </a:rPr>
-              <a:t>the fields your question uses, not the whole site.</a:t>
-            </a:r>
-            <a:endParaRPr lang="en-US" sz="1350" dirty="0"/>
-          </a:p>
-        </p:txBody>
-      </p:sp>
-      <p:sp>
-        <p:nvSpPr>
-          <p:cNvPr id="13" name="Shape 11"/>
-          <p:cNvSpPr/>
-          <p:nvPr/>
-        </p:nvSpPr>
-        <p:spPr>
-          <a:xfrm>
-            <a:off x="640080" y="5166360"/>
-            <a:ext cx="10881360" cy="914400"/>
-          </a:xfrm>
-          <a:prstGeom prst="roundRect">
-            <a:avLst>
-              <a:gd name="adj" fmla="val 10000"/>
-            </a:avLst>
-          </a:prstGeom>
-          <a:solidFill>
-            <a:srgbClr val="F4EEE8"/>
-          </a:solidFill>
-          <a:ln/>
-        </p:spPr>
-      </p:sp>
-      <p:sp>
-        <p:nvSpPr>
-          <p:cNvPr id="14" name="Text 12"/>
-          <p:cNvSpPr/>
-          <p:nvPr/>
-        </p:nvSpPr>
-        <p:spPr>
-          <a:xfrm>
-            <a:off x="960120" y="5257800"/>
-            <a:ext cx="4023360" cy="731520"/>
-          </a:xfrm>
-          <a:prstGeom prst="rect">
-            <a:avLst/>
-          </a:prstGeom>
-          <a:noFill/>
-          <a:ln/>
-        </p:spPr>
-        <p:txBody>
-          <a:bodyPr wrap="square" lIns="0" tIns="0" rIns="0" bIns="0" rtlCol="0" anchor="ctr"/>
-          <a:lstStyle/>
-          <a:p>
-            <a:pPr indent="0" marL="0">
-              <a:buNone/>
-            </a:pPr>
-            <a:r>
-              <a:rPr lang="en-US" sz="1700" b="1" dirty="0">
-                <a:solidFill>
-                  <a:srgbClr val="2E5F8A"/>
-                </a:solidFill>
-                <a:latin typeface="Cambria" pitchFamily="34" charset="0"/>
-                <a:ea typeface="Cambria" pitchFamily="34" charset="-122"/>
-                <a:cs typeface="Cambria" pitchFamily="34" charset="-120"/>
-              </a:rPr>
-              <a:t>Never republish the text</a:t>
-            </a:r>
-            <a:endParaRPr lang="en-US" sz="1700" dirty="0"/>
-          </a:p>
-        </p:txBody>
-      </p:sp>
-      <p:sp>
-        <p:nvSpPr>
-          <p:cNvPr id="15" name="Text 13"/>
-          <p:cNvSpPr/>
-          <p:nvPr/>
-        </p:nvSpPr>
-        <p:spPr>
-          <a:xfrm>
-            <a:off x="5120640" y="5257800"/>
-            <a:ext cx="6126480" cy="731520"/>
-          </a:xfrm>
-          <a:prstGeom prst="rect">
-            <a:avLst/>
-          </a:prstGeom>
-          <a:noFill/>
-          <a:ln/>
-        </p:spPr>
-        <p:txBody>
-          <a:bodyPr wrap="square" lIns="0" tIns="0" rIns="0" bIns="0" rtlCol="0" anchor="ctr"/>
-          <a:lstStyle/>
-          <a:p>
-            <a:pPr indent="0" marL="0">
-              <a:buNone/>
-            </a:pPr>
-            <a:r>
-              <a:rPr lang="en-US" sz="1350" dirty="0">
-                <a:solidFill>
-                  <a:srgbClr val="1A1A1A"/>
-                </a:solidFill>
-                <a:latin typeface="Calibri" pitchFamily="34" charset="0"/>
-                <a:ea typeface="Calibri" pitchFamily="34" charset="-122"/>
-                <a:cs typeface="Calibri" pitchFamily="34" charset="-120"/>
-              </a:rPr>
-              <a:t>analyse it, quote it, count it. Do not hand it on.</a:t>
-            </a:r>
-            <a:endParaRPr lang="en-US" sz="1350" dirty="0"/>
-          </a:p>
-        </p:txBody>
-      </p:sp>
-      <p:sp>
-        <p:nvSpPr>
-          <p:cNvPr id="16" name="Text 14"/>
-          <p:cNvSpPr/>
-          <p:nvPr/>
-        </p:nvSpPr>
-        <p:spPr>
-          <a:xfrm>
-            <a:off x="640080" y="6309360"/>
-            <a:ext cx="10881360" cy="365760"/>
-          </a:xfrm>
-          <a:prstGeom prst="rect">
-            <a:avLst/>
-          </a:prstGeom>
-          <a:noFill/>
-          <a:ln/>
-        </p:spPr>
-        <p:txBody>
-          <a:bodyPr wrap="square" rtlCol="0" anchor="ctr"/>
-          <a:lstStyle/>
-          <a:p>
-            <a:pPr indent="0" marL="0">
-              <a:buNone/>
-            </a:pPr>
-            <a:r>
-              <a:rPr lang="en-US" sz="1250" i="1" dirty="0">
-                <a:solidFill>
-                  <a:srgbClr val="6B6B63"/>
-                </a:solidFill>
-                <a:latin typeface="Calibri" pitchFamily="34" charset="0"/>
-                <a:ea typeface="Calibri" pitchFamily="34" charset="-122"/>
-                <a:cs typeface="Calibri" pitchFamily="34" charset="-120"/>
-              </a:rPr>
-              <a:t>CC0 and public domain: go anywhere.   Academic sets and community text: analyse, don't redistribute.   Shadow libraries: never.</a:t>
-            </a:r>
-            <a:endParaRPr lang="en-US" sz="1250" dirty="0"/>
+              <a:t>Then: where your corpus actually comes from.</a:t>
+            </a:r>
+            <a:endParaRPr lang="en-US" sz="1800" dirty="0"/>
           </a:p>
         </p:txBody>
       </p:sp>
@@ -5812,13 +4822,13 @@
             <a:r>
               <a:rPr lang="en-US" sz="1300" b="1" spc="300" kern="0" dirty="0">
                 <a:solidFill>
-                  <a:srgbClr val="3F6F5F"/>
+                  <a:srgbClr val="7A3B2E"/>
                 </a:solidFill>
                 <a:latin typeface="Calibri" pitchFamily="34" charset="0"/>
                 <a:ea typeface="Calibri" pitchFamily="34" charset="-122"/>
                 <a:cs typeface="Calibri" pitchFamily="34" charset="-120"/>
               </a:rPr>
-              <a:t>YOUR TURN · 20 MINUTES</a:t>
+              <a:t>GETTING THE DATA</a:t>
             </a:r>
             <a:endParaRPr lang="en-US" sz="1300" dirty="0"/>
           </a:p>
@@ -5857,7 +4867,7 @@
                 <a:ea typeface="Cambria" pitchFamily="34" charset="-122"/>
                 <a:cs typeface="Cambria" pitchFamily="34" charset="-120"/>
               </a:rPr>
-              <a:t>Collect it, save it, and start the repo</a:t>
+              <a:t>Three routes, in the order you should try them</a:t>
             </a:r>
             <a:endParaRPr lang="en-US" sz="3400" dirty="0"/>
           </a:p>
@@ -5865,37 +4875,150 @@
       </p:sp>
       <p:sp>
         <p:nvSpPr>
-          <p:cNvPr id="4" name="Text 2"/>
+          <p:cNvPr id="4" name="Shape 2"/>
           <p:cNvSpPr/>
           <p:nvPr/>
         </p:nvSpPr>
         <p:spPr>
           <a:xfrm>
             <a:off x="640080" y="2011680"/>
-            <a:ext cx="5852160" cy="4023360"/>
-          </a:xfrm>
-          <a:prstGeom prst="rect">
-            <a:avLst/>
-          </a:prstGeom>
-          <a:noFill/>
-          <a:ln/>
-        </p:spPr>
-        <p:txBody>
-          <a:bodyPr wrap="square" rtlCol="0" anchor="t"/>
-          <a:lstStyle/>
-          <a:p>
-            <a:pPr marL="152400" indent="-152400">
-              <a:lnSpc>
-                <a:spcPct val="115000"/>
-              </a:lnSpc>
-              <a:spcAft>
-                <a:spcPts val="1000"/>
-              </a:spcAft>
-              <a:buSzPct val="100000"/>
-              <a:buChar char="•"/>
-            </a:pPr>
-            <a:r>
-              <a:rPr lang="en-US" sz="1500" dirty="0">
+            <a:ext cx="10881360" cy="1143000"/>
+          </a:xfrm>
+          <a:prstGeom prst="roundRect">
+            <a:avLst>
+              <a:gd name="adj" fmla="val 8000"/>
+            </a:avLst>
+          </a:prstGeom>
+          <a:solidFill>
+            <a:srgbClr val="F4EEE8"/>
+          </a:solidFill>
+          <a:ln/>
+        </p:spPr>
+      </p:sp>
+      <p:sp>
+        <p:nvSpPr>
+          <p:cNvPr id="5" name="Shape 3"/>
+          <p:cNvSpPr/>
+          <p:nvPr/>
+        </p:nvSpPr>
+        <p:spPr>
+          <a:xfrm>
+            <a:off x="914400" y="2304288"/>
+            <a:ext cx="548640" cy="548640"/>
+          </a:xfrm>
+          <a:prstGeom prst="ellipse">
+            <a:avLst/>
+          </a:prstGeom>
+          <a:solidFill>
+            <a:srgbClr val="3F6F5F"/>
+          </a:solidFill>
+          <a:ln/>
+        </p:spPr>
+      </p:sp>
+      <p:sp>
+        <p:nvSpPr>
+          <p:cNvPr id="6" name="Text 4"/>
+          <p:cNvSpPr/>
+          <p:nvPr/>
+        </p:nvSpPr>
+        <p:spPr>
+          <a:xfrm>
+            <a:off x="914400" y="2304288"/>
+            <a:ext cx="548640" cy="548640"/>
+          </a:xfrm>
+          <a:prstGeom prst="rect">
+            <a:avLst/>
+          </a:prstGeom>
+          <a:noFill/>
+          <a:ln/>
+        </p:spPr>
+        <p:txBody>
+          <a:bodyPr wrap="square" rtlCol="0" anchor="ctr"/>
+          <a:lstStyle/>
+          <a:p>
+            <a:pPr algn="ctr" indent="0" marL="0">
+              <a:buNone/>
+            </a:pPr>
+            <a:r>
+              <a:rPr lang="en-US" sz="1900" b="1" dirty="0">
+                <a:solidFill>
+                  <a:srgbClr val="FFFFFF"/>
+                </a:solidFill>
+                <a:latin typeface="Cambria" pitchFamily="34" charset="0"/>
+                <a:ea typeface="Cambria" pitchFamily="34" charset="-122"/>
+                <a:cs typeface="Cambria" pitchFamily="34" charset="-120"/>
+              </a:rPr>
+              <a:t>1</a:t>
+            </a:r>
+            <a:endParaRPr lang="en-US" sz="1900" dirty="0"/>
+          </a:p>
+        </p:txBody>
+      </p:sp>
+      <p:sp>
+        <p:nvSpPr>
+          <p:cNvPr id="7" name="Text 5"/>
+          <p:cNvSpPr/>
+          <p:nvPr/>
+        </p:nvSpPr>
+        <p:spPr>
+          <a:xfrm>
+            <a:off x="1645920" y="2176272"/>
+            <a:ext cx="2834640" cy="457200"/>
+          </a:xfrm>
+          <a:prstGeom prst="rect">
+            <a:avLst/>
+          </a:prstGeom>
+          <a:noFill/>
+          <a:ln/>
+        </p:spPr>
+        <p:txBody>
+          <a:bodyPr wrap="square" lIns="0" tIns="0" rIns="0" bIns="0" rtlCol="0" anchor="ctr"/>
+          <a:lstStyle/>
+          <a:p>
+            <a:pPr indent="0" marL="0">
+              <a:buNone/>
+            </a:pPr>
+            <a:r>
+              <a:rPr lang="en-US" sz="1800" b="1" dirty="0">
+                <a:solidFill>
+                  <a:srgbClr val="1A1A1A"/>
+                </a:solidFill>
+                <a:latin typeface="Cambria" pitchFamily="34" charset="0"/>
+                <a:ea typeface="Cambria" pitchFamily="34" charset="-122"/>
+                <a:cs typeface="Cambria" pitchFamily="34" charset="-120"/>
+              </a:rPr>
+              <a:t>A prepared file</a:t>
+            </a:r>
+            <a:endParaRPr lang="en-US" sz="1800" dirty="0"/>
+          </a:p>
+        </p:txBody>
+      </p:sp>
+      <p:sp>
+        <p:nvSpPr>
+          <p:cNvPr id="8" name="Text 6"/>
+          <p:cNvSpPr/>
+          <p:nvPr/>
+        </p:nvSpPr>
+        <p:spPr>
+          <a:xfrm>
+            <a:off x="4572000" y="2194560"/>
+            <a:ext cx="6675120" cy="822960"/>
+          </a:xfrm>
+          <a:prstGeom prst="rect">
+            <a:avLst/>
+          </a:prstGeom>
+          <a:noFill/>
+          <a:ln/>
+        </p:spPr>
+        <p:txBody>
+          <a:bodyPr wrap="square" lIns="0" tIns="0" rIns="0" bIns="0" rtlCol="0" anchor="t"/>
+          <a:lstStyle/>
+          <a:p>
+            <a:pPr indent="0" marL="0">
+              <a:buNone/>
+            </a:pPr>
+            <a:r>
+              <a:rPr lang="en-US" sz="1350" dirty="0">
                 <a:solidFill>
                   <a:srgbClr val="1A1A1A"/>
                 </a:solidFill>
@@ -5903,23 +5026,158 @@
                 <a:ea typeface="Calibri" pitchFamily="34" charset="-122"/>
                 <a:cs typeface="Calibri" pitchFamily="34" charset="-120"/>
               </a:rPr>
-              <a:t>Point the cookbook notebook at your corpus. File, API or scrape, whichever your data needs.</a:t>
-            </a:r>
-            <a:endParaRPr lang="en-US" sz="1500" dirty="0"/>
-          </a:p>
-          <a:p>
-            <a:pPr marL="152400" indent="-152400">
-              <a:lnSpc>
-                <a:spcPct val="115000"/>
-              </a:lnSpc>
-              <a:spcAft>
-                <a:spcPts val="1000"/>
-              </a:spcAft>
-              <a:buSzPct val="100000"/>
-              <a:buChar char="•"/>
-            </a:pPr>
-            <a:r>
-              <a:rPr lang="en-US" sz="1500" dirty="0">
+              <a:t>pd.read_csv(url) · gdown · load_dataset(). Most projects should stop here.</a:t>
+            </a:r>
+            <a:endParaRPr lang="en-US" sz="1350" dirty="0"/>
+          </a:p>
+        </p:txBody>
+      </p:sp>
+      <p:sp>
+        <p:nvSpPr>
+          <p:cNvPr id="9" name="Shape 7"/>
+          <p:cNvSpPr/>
+          <p:nvPr/>
+        </p:nvSpPr>
+        <p:spPr>
+          <a:xfrm>
+            <a:off x="640080" y="3337560"/>
+            <a:ext cx="10881360" cy="1143000"/>
+          </a:xfrm>
+          <a:prstGeom prst="roundRect">
+            <a:avLst>
+              <a:gd name="adj" fmla="val 8000"/>
+            </a:avLst>
+          </a:prstGeom>
+          <a:solidFill>
+            <a:srgbClr val="F4EEE8"/>
+          </a:solidFill>
+          <a:ln/>
+        </p:spPr>
+      </p:sp>
+      <p:sp>
+        <p:nvSpPr>
+          <p:cNvPr id="10" name="Shape 8"/>
+          <p:cNvSpPr/>
+          <p:nvPr/>
+        </p:nvSpPr>
+        <p:spPr>
+          <a:xfrm>
+            <a:off x="914400" y="3630168"/>
+            <a:ext cx="548640" cy="548640"/>
+          </a:xfrm>
+          <a:prstGeom prst="ellipse">
+            <a:avLst/>
+          </a:prstGeom>
+          <a:solidFill>
+            <a:srgbClr val="2E5F8A"/>
+          </a:solidFill>
+          <a:ln/>
+        </p:spPr>
+      </p:sp>
+      <p:sp>
+        <p:nvSpPr>
+          <p:cNvPr id="11" name="Text 9"/>
+          <p:cNvSpPr/>
+          <p:nvPr/>
+        </p:nvSpPr>
+        <p:spPr>
+          <a:xfrm>
+            <a:off x="914400" y="3630168"/>
+            <a:ext cx="548640" cy="548640"/>
+          </a:xfrm>
+          <a:prstGeom prst="rect">
+            <a:avLst/>
+          </a:prstGeom>
+          <a:noFill/>
+          <a:ln/>
+        </p:spPr>
+        <p:txBody>
+          <a:bodyPr wrap="square" rtlCol="0" anchor="ctr"/>
+          <a:lstStyle/>
+          <a:p>
+            <a:pPr algn="ctr" indent="0" marL="0">
+              <a:buNone/>
+            </a:pPr>
+            <a:r>
+              <a:rPr lang="en-US" sz="1900" b="1" dirty="0">
+                <a:solidFill>
+                  <a:srgbClr val="FFFFFF"/>
+                </a:solidFill>
+                <a:latin typeface="Cambria" pitchFamily="34" charset="0"/>
+                <a:ea typeface="Cambria" pitchFamily="34" charset="-122"/>
+                <a:cs typeface="Cambria" pitchFamily="34" charset="-120"/>
+              </a:rPr>
+              <a:t>2</a:t>
+            </a:r>
+            <a:endParaRPr lang="en-US" sz="1900" dirty="0"/>
+          </a:p>
+        </p:txBody>
+      </p:sp>
+      <p:sp>
+        <p:nvSpPr>
+          <p:cNvPr id="12" name="Text 10"/>
+          <p:cNvSpPr/>
+          <p:nvPr/>
+        </p:nvSpPr>
+        <p:spPr>
+          <a:xfrm>
+            <a:off x="1645920" y="3502152"/>
+            <a:ext cx="2834640" cy="457200"/>
+          </a:xfrm>
+          <a:prstGeom prst="rect">
+            <a:avLst/>
+          </a:prstGeom>
+          <a:noFill/>
+          <a:ln/>
+        </p:spPr>
+        <p:txBody>
+          <a:bodyPr wrap="square" lIns="0" tIns="0" rIns="0" bIns="0" rtlCol="0" anchor="ctr"/>
+          <a:lstStyle/>
+          <a:p>
+            <a:pPr indent="0" marL="0">
+              <a:buNone/>
+            </a:pPr>
+            <a:r>
+              <a:rPr lang="en-US" sz="1800" b="1" dirty="0">
+                <a:solidFill>
+                  <a:srgbClr val="1A1A1A"/>
+                </a:solidFill>
+                <a:latin typeface="Cambria" pitchFamily="34" charset="0"/>
+                <a:ea typeface="Cambria" pitchFamily="34" charset="-122"/>
+                <a:cs typeface="Cambria" pitchFamily="34" charset="-120"/>
+              </a:rPr>
+              <a:t>An API</a:t>
+            </a:r>
+            <a:endParaRPr lang="en-US" sz="1800" dirty="0"/>
+          </a:p>
+        </p:txBody>
+      </p:sp>
+      <p:sp>
+        <p:nvSpPr>
+          <p:cNvPr id="13" name="Text 11"/>
+          <p:cNvSpPr/>
+          <p:nvPr/>
+        </p:nvSpPr>
+        <p:spPr>
+          <a:xfrm>
+            <a:off x="4572000" y="3520440"/>
+            <a:ext cx="6675120" cy="822960"/>
+          </a:xfrm>
+          <a:prstGeom prst="rect">
+            <a:avLst/>
+          </a:prstGeom>
+          <a:noFill/>
+          <a:ln/>
+        </p:spPr>
+        <p:txBody>
+          <a:bodyPr wrap="square" lIns="0" tIns="0" rIns="0" bIns="0" rtlCol="0" anchor="t"/>
+          <a:lstStyle/>
+          <a:p>
+            <a:pPr indent="0" marL="0">
+              <a:buNone/>
+            </a:pPr>
+            <a:r>
+              <a:rPr lang="en-US" sz="1350" dirty="0">
                 <a:solidFill>
                   <a:srgbClr val="1A1A1A"/>
                 </a:solidFill>
@@ -5927,23 +5185,158 @@
                 <a:ea typeface="Calibri" pitchFamily="34" charset="-122"/>
                 <a:cs typeface="Calibri" pitchFamily="34" charset="-120"/>
               </a:rPr>
-              <a:t>Reshape it with the AI until it is a table you would want to work with.</a:t>
-            </a:r>
-            <a:endParaRPr lang="en-US" sz="1500" dirty="0"/>
-          </a:p>
-          <a:p>
-            <a:pPr marL="152400" indent="-152400">
-              <a:lnSpc>
-                <a:spcPct val="115000"/>
-              </a:lnSpc>
-              <a:spcAft>
-                <a:spcPts val="1000"/>
-              </a:spcAft>
-              <a:buSzPct val="100000"/>
-              <a:buChar char="•"/>
-            </a:pPr>
-            <a:r>
-              <a:rPr lang="en-US" sz="1500" dirty="0">
+              <a:t>A documented URL that returns JSON. Four words: endpoint, key, pagination, rate limit.</a:t>
+            </a:r>
+            <a:endParaRPr lang="en-US" sz="1350" dirty="0"/>
+          </a:p>
+        </p:txBody>
+      </p:sp>
+      <p:sp>
+        <p:nvSpPr>
+          <p:cNvPr id="14" name="Shape 12"/>
+          <p:cNvSpPr/>
+          <p:nvPr/>
+        </p:nvSpPr>
+        <p:spPr>
+          <a:xfrm>
+            <a:off x="640080" y="4663440"/>
+            <a:ext cx="10881360" cy="1143000"/>
+          </a:xfrm>
+          <a:prstGeom prst="roundRect">
+            <a:avLst>
+              <a:gd name="adj" fmla="val 8000"/>
+            </a:avLst>
+          </a:prstGeom>
+          <a:solidFill>
+            <a:srgbClr val="F4EEE8"/>
+          </a:solidFill>
+          <a:ln/>
+        </p:spPr>
+      </p:sp>
+      <p:sp>
+        <p:nvSpPr>
+          <p:cNvPr id="15" name="Shape 13"/>
+          <p:cNvSpPr/>
+          <p:nvPr/>
+        </p:nvSpPr>
+        <p:spPr>
+          <a:xfrm>
+            <a:off x="914400" y="4956048"/>
+            <a:ext cx="548640" cy="548640"/>
+          </a:xfrm>
+          <a:prstGeom prst="ellipse">
+            <a:avLst/>
+          </a:prstGeom>
+          <a:solidFill>
+            <a:srgbClr val="7A3B2E"/>
+          </a:solidFill>
+          <a:ln/>
+        </p:spPr>
+      </p:sp>
+      <p:sp>
+        <p:nvSpPr>
+          <p:cNvPr id="16" name="Text 14"/>
+          <p:cNvSpPr/>
+          <p:nvPr/>
+        </p:nvSpPr>
+        <p:spPr>
+          <a:xfrm>
+            <a:off x="914400" y="4956048"/>
+            <a:ext cx="548640" cy="548640"/>
+          </a:xfrm>
+          <a:prstGeom prst="rect">
+            <a:avLst/>
+          </a:prstGeom>
+          <a:noFill/>
+          <a:ln/>
+        </p:spPr>
+        <p:txBody>
+          <a:bodyPr wrap="square" rtlCol="0" anchor="ctr"/>
+          <a:lstStyle/>
+          <a:p>
+            <a:pPr algn="ctr" indent="0" marL="0">
+              <a:buNone/>
+            </a:pPr>
+            <a:r>
+              <a:rPr lang="en-US" sz="1900" b="1" dirty="0">
+                <a:solidFill>
+                  <a:srgbClr val="FFFFFF"/>
+                </a:solidFill>
+                <a:latin typeface="Cambria" pitchFamily="34" charset="0"/>
+                <a:ea typeface="Cambria" pitchFamily="34" charset="-122"/>
+                <a:cs typeface="Cambria" pitchFamily="34" charset="-120"/>
+              </a:rPr>
+              <a:t>3</a:t>
+            </a:r>
+            <a:endParaRPr lang="en-US" sz="1900" dirty="0"/>
+          </a:p>
+        </p:txBody>
+      </p:sp>
+      <p:sp>
+        <p:nvSpPr>
+          <p:cNvPr id="17" name="Text 15"/>
+          <p:cNvSpPr/>
+          <p:nvPr/>
+        </p:nvSpPr>
+        <p:spPr>
+          <a:xfrm>
+            <a:off x="1645920" y="4828032"/>
+            <a:ext cx="2834640" cy="457200"/>
+          </a:xfrm>
+          <a:prstGeom prst="rect">
+            <a:avLst/>
+          </a:prstGeom>
+          <a:noFill/>
+          <a:ln/>
+        </p:spPr>
+        <p:txBody>
+          <a:bodyPr wrap="square" lIns="0" tIns="0" rIns="0" bIns="0" rtlCol="0" anchor="ctr"/>
+          <a:lstStyle/>
+          <a:p>
+            <a:pPr indent="0" marL="0">
+              <a:buNone/>
+            </a:pPr>
+            <a:r>
+              <a:rPr lang="en-US" sz="1800" b="1" dirty="0">
+                <a:solidFill>
+                  <a:srgbClr val="1A1A1A"/>
+                </a:solidFill>
+                <a:latin typeface="Cambria" pitchFamily="34" charset="0"/>
+                <a:ea typeface="Cambria" pitchFamily="34" charset="-122"/>
+                <a:cs typeface="Cambria" pitchFamily="34" charset="-120"/>
+              </a:rPr>
+              <a:t>A careful scrape</a:t>
+            </a:r>
+            <a:endParaRPr lang="en-US" sz="1800" dirty="0"/>
+          </a:p>
+        </p:txBody>
+      </p:sp>
+      <p:sp>
+        <p:nvSpPr>
+          <p:cNvPr id="18" name="Text 16"/>
+          <p:cNvSpPr/>
+          <p:nvPr/>
+        </p:nvSpPr>
+        <p:spPr>
+          <a:xfrm>
+            <a:off x="4572000" y="4846320"/>
+            <a:ext cx="6675120" cy="822960"/>
+          </a:xfrm>
+          <a:prstGeom prst="rect">
+            <a:avLst/>
+          </a:prstGeom>
+          <a:noFill/>
+          <a:ln/>
+        </p:spPr>
+        <p:txBody>
+          <a:bodyPr wrap="square" lIns="0" tIns="0" rIns="0" bIns="0" rtlCol="0" anchor="t"/>
+          <a:lstStyle/>
+          <a:p>
+            <a:pPr indent="0" marL="0">
+              <a:buNone/>
+            </a:pPr>
+            <a:r>
+              <a:rPr lang="en-US" sz="1350" dirty="0">
                 <a:solidFill>
                   <a:srgbClr val="1A1A1A"/>
                 </a:solidFill>
@@ -5951,310 +5344,48 @@
                 <a:ea typeface="Calibri" pitchFamily="34" charset="-122"/>
                 <a:cs typeface="Calibri" pitchFamily="34" charset="-120"/>
               </a:rPr>
-              <a:t>Save it to your Drive project folder. Week 5 starts from that file, and Colab forgets everything else.</a:t>
-            </a:r>
-            <a:endParaRPr lang="en-US" sz="1500" dirty="0"/>
-          </a:p>
-          <a:p>
-            <a:pPr marL="152400" indent="-152400">
-              <a:lnSpc>
-                <a:spcPct val="115000"/>
-              </a:lnSpc>
-              <a:spcAft>
-                <a:spcPts val="1000"/>
-              </a:spcAft>
-              <a:buSzPct val="100000"/>
-              <a:buChar char="•"/>
-            </a:pPr>
-            <a:r>
-              <a:rPr lang="en-US" sz="1500" dirty="0">
-                <a:solidFill>
-                  <a:srgbClr val="1A1A1A"/>
+              <a:t>Only when there is no file and no API. Slowly, and never republished.</a:t>
+            </a:r>
+            <a:endParaRPr lang="en-US" sz="1350" dirty="0"/>
+          </a:p>
+        </p:txBody>
+      </p:sp>
+      <p:sp>
+        <p:nvSpPr>
+          <p:cNvPr id="19" name="Text 17"/>
+          <p:cNvSpPr/>
+          <p:nvPr/>
+        </p:nvSpPr>
+        <p:spPr>
+          <a:xfrm>
+            <a:off x="640080" y="6263640"/>
+            <a:ext cx="10881360" cy="365760"/>
+          </a:xfrm>
+          <a:prstGeom prst="rect">
+            <a:avLst/>
+          </a:prstGeom>
+          <a:noFill/>
+          <a:ln/>
+        </p:spPr>
+        <p:txBody>
+          <a:bodyPr wrap="square" rtlCol="0" anchor="ctr"/>
+          <a:lstStyle/>
+          <a:p>
+            <a:pPr indent="0" marL="0">
+              <a:buNone/>
+            </a:pPr>
+            <a:r>
+              <a:rPr lang="en-US" sz="1100" i="1" dirty="0">
+                <a:solidFill>
+                  <a:srgbClr val="6B6B63"/>
                 </a:solidFill>
                 <a:latin typeface="Calibri" pitchFamily="34" charset="0"/>
                 <a:ea typeface="Calibri" pitchFamily="34" charset="-122"/>
                 <a:cs typeface="Calibri" pitchFamily="34" charset="-120"/>
               </a:rPr>
-              <a:t>Fork the publishing template and switch GitHub Pages on, so a live URL exists today rather than in Week 9 under deadline.</a:t>
-            </a:r>
-            <a:endParaRPr lang="en-US" sz="1500" dirty="0"/>
-          </a:p>
-        </p:txBody>
-      </p:sp>
-      <p:sp>
-        <p:nvSpPr>
-          <p:cNvPr id="5" name="Shape 3"/>
-          <p:cNvSpPr/>
-          <p:nvPr/>
-        </p:nvSpPr>
-        <p:spPr>
-          <a:xfrm>
-            <a:off x="6766560" y="2011680"/>
-            <a:ext cx="4754880" cy="3108960"/>
-          </a:xfrm>
-          <a:prstGeom prst="roundRect">
-            <a:avLst>
-              <a:gd name="adj" fmla="val 2941"/>
-            </a:avLst>
-          </a:prstGeom>
-          <a:solidFill>
-            <a:srgbClr val="F4EEE8"/>
-          </a:solidFill>
-          <a:ln/>
-        </p:spPr>
-      </p:sp>
-      <p:sp>
-        <p:nvSpPr>
-          <p:cNvPr id="6" name="Text 4"/>
-          <p:cNvSpPr/>
-          <p:nvPr/>
-        </p:nvSpPr>
-        <p:spPr>
-          <a:xfrm>
-            <a:off x="7040880" y="2240280"/>
-            <a:ext cx="4206240" cy="320040"/>
-          </a:xfrm>
-          <a:prstGeom prst="rect">
-            <a:avLst/>
-          </a:prstGeom>
-          <a:noFill/>
-          <a:ln/>
-        </p:spPr>
-        <p:txBody>
-          <a:bodyPr wrap="square" rtlCol="0" anchor="ctr"/>
-          <a:lstStyle/>
-          <a:p>
-            <a:pPr indent="0" marL="0">
-              <a:buNone/>
-            </a:pPr>
-            <a:r>
-              <a:rPr lang="en-US" sz="1200" b="1" spc="200" kern="0" dirty="0">
-                <a:solidFill>
-                  <a:srgbClr val="6B6B63"/>
-                </a:solidFill>
-                <a:latin typeface="Calibri" pitchFamily="34" charset="0"/>
-                <a:ea typeface="Calibri" pitchFamily="34" charset="-122"/>
-                <a:cs typeface="Calibri" pitchFamily="34" charset="-120"/>
-              </a:rPr>
-              <a:t>before you leave</a:t>
-            </a:r>
-            <a:endParaRPr lang="en-US" sz="1200" dirty="0"/>
-          </a:p>
-        </p:txBody>
-      </p:sp>
-      <p:sp>
-        <p:nvSpPr>
-          <p:cNvPr id="7" name="Shape 5"/>
-          <p:cNvSpPr/>
-          <p:nvPr/>
-        </p:nvSpPr>
-        <p:spPr>
-          <a:xfrm>
-            <a:off x="7040880" y="2788920"/>
-            <a:ext cx="201168" cy="201168"/>
-          </a:xfrm>
-          <a:prstGeom prst="ellipse">
-            <a:avLst/>
-          </a:prstGeom>
-          <a:solidFill>
-            <a:srgbClr val="3F6F5F"/>
-          </a:solidFill>
-          <a:ln/>
-        </p:spPr>
-      </p:sp>
-      <p:sp>
-        <p:nvSpPr>
-          <p:cNvPr id="8" name="Text 6"/>
-          <p:cNvSpPr/>
-          <p:nvPr/>
-        </p:nvSpPr>
-        <p:spPr>
-          <a:xfrm>
-            <a:off x="7406640" y="2670048"/>
-            <a:ext cx="3931920" cy="457200"/>
-          </a:xfrm>
-          <a:prstGeom prst="rect">
-            <a:avLst/>
-          </a:prstGeom>
-          <a:noFill/>
-          <a:ln/>
-        </p:spPr>
-        <p:txBody>
-          <a:bodyPr wrap="square" lIns="0" tIns="0" rIns="0" bIns="0" rtlCol="0" anchor="ctr"/>
-          <a:lstStyle/>
-          <a:p>
-            <a:pPr indent="0" marL="0">
-              <a:buNone/>
-            </a:pPr>
-            <a:r>
-              <a:rPr lang="en-US" sz="1450" dirty="0">
-                <a:solidFill>
-                  <a:srgbClr val="1A1A1A"/>
-                </a:solidFill>
-                <a:latin typeface="Calibri" pitchFamily="34" charset="0"/>
-                <a:ea typeface="Calibri" pitchFamily="34" charset="-122"/>
-                <a:cs typeface="Calibri" pitchFamily="34" charset="-120"/>
-              </a:rPr>
-              <a:t>a file in Drive</a:t>
-            </a:r>
-            <a:endParaRPr lang="en-US" sz="1450" dirty="0"/>
-          </a:p>
-        </p:txBody>
-      </p:sp>
-      <p:sp>
-        <p:nvSpPr>
-          <p:cNvPr id="9" name="Shape 7"/>
-          <p:cNvSpPr/>
-          <p:nvPr/>
-        </p:nvSpPr>
-        <p:spPr>
-          <a:xfrm>
-            <a:off x="7040880" y="3474720"/>
-            <a:ext cx="201168" cy="201168"/>
-          </a:xfrm>
-          <a:prstGeom prst="ellipse">
-            <a:avLst/>
-          </a:prstGeom>
-          <a:solidFill>
-            <a:srgbClr val="2E5F8A"/>
-          </a:solidFill>
-          <a:ln/>
-        </p:spPr>
-      </p:sp>
-      <p:sp>
-        <p:nvSpPr>
-          <p:cNvPr id="10" name="Text 8"/>
-          <p:cNvSpPr/>
-          <p:nvPr/>
-        </p:nvSpPr>
-        <p:spPr>
-          <a:xfrm>
-            <a:off x="7406640" y="3355848"/>
-            <a:ext cx="3931920" cy="457200"/>
-          </a:xfrm>
-          <a:prstGeom prst="rect">
-            <a:avLst/>
-          </a:prstGeom>
-          <a:noFill/>
-          <a:ln/>
-        </p:spPr>
-        <p:txBody>
-          <a:bodyPr wrap="square" lIns="0" tIns="0" rIns="0" bIns="0" rtlCol="0" anchor="ctr"/>
-          <a:lstStyle/>
-          <a:p>
-            <a:pPr indent="0" marL="0">
-              <a:buNone/>
-            </a:pPr>
-            <a:r>
-              <a:rPr lang="en-US" sz="1450" dirty="0">
-                <a:solidFill>
-                  <a:srgbClr val="1A1A1A"/>
-                </a:solidFill>
-                <a:latin typeface="Calibri" pitchFamily="34" charset="0"/>
-                <a:ea typeface="Calibri" pitchFamily="34" charset="-122"/>
-                <a:cs typeface="Calibri" pitchFamily="34" charset="-120"/>
-              </a:rPr>
-              <a:t>a repo with Pages on</a:t>
-            </a:r>
-            <a:endParaRPr lang="en-US" sz="1450" dirty="0"/>
-          </a:p>
-        </p:txBody>
-      </p:sp>
-      <p:sp>
-        <p:nvSpPr>
-          <p:cNvPr id="11" name="Shape 9"/>
-          <p:cNvSpPr/>
-          <p:nvPr/>
-        </p:nvSpPr>
-        <p:spPr>
-          <a:xfrm>
-            <a:off x="7040880" y="4160520"/>
-            <a:ext cx="201168" cy="201168"/>
-          </a:xfrm>
-          <a:prstGeom prst="ellipse">
-            <a:avLst/>
-          </a:prstGeom>
-          <a:solidFill>
-            <a:srgbClr val="7A3B2E"/>
-          </a:solidFill>
-          <a:ln/>
-        </p:spPr>
-      </p:sp>
-      <p:sp>
-        <p:nvSpPr>
-          <p:cNvPr id="12" name="Text 10"/>
-          <p:cNvSpPr/>
-          <p:nvPr/>
-        </p:nvSpPr>
-        <p:spPr>
-          <a:xfrm>
-            <a:off x="7406640" y="4041648"/>
-            <a:ext cx="3931920" cy="457200"/>
-          </a:xfrm>
-          <a:prstGeom prst="rect">
-            <a:avLst/>
-          </a:prstGeom>
-          <a:noFill/>
-          <a:ln/>
-        </p:spPr>
-        <p:txBody>
-          <a:bodyPr wrap="square" lIns="0" tIns="0" rIns="0" bIns="0" rtlCol="0" anchor="ctr"/>
-          <a:lstStyle/>
-          <a:p>
-            <a:pPr indent="0" marL="0">
-              <a:buNone/>
-            </a:pPr>
-            <a:r>
-              <a:rPr lang="en-US" sz="1450" dirty="0">
-                <a:solidFill>
-                  <a:srgbClr val="1A1A1A"/>
-                </a:solidFill>
-                <a:latin typeface="Calibri" pitchFamily="34" charset="0"/>
-                <a:ea typeface="Calibri" pitchFamily="34" charset="-122"/>
-                <a:cs typeface="Calibri" pitchFamily="34" charset="-120"/>
-              </a:rPr>
-              <a:t>two minutes of pitch, to a partner</a:t>
-            </a:r>
-            <a:endParaRPr lang="en-US" sz="1450" dirty="0"/>
-          </a:p>
-        </p:txBody>
-      </p:sp>
-      <p:sp>
-        <p:nvSpPr>
-          <p:cNvPr id="13" name="Text 11"/>
-          <p:cNvSpPr/>
-          <p:nvPr/>
-        </p:nvSpPr>
-        <p:spPr>
-          <a:xfrm>
-            <a:off x="7040880" y="4754880"/>
-            <a:ext cx="4206240" cy="822960"/>
-          </a:xfrm>
-          <a:prstGeom prst="rect">
-            <a:avLst/>
-          </a:prstGeom>
-          <a:noFill/>
-          <a:ln/>
-        </p:spPr>
-        <p:txBody>
-          <a:bodyPr wrap="square" rtlCol="0" anchor="t"/>
-          <a:lstStyle/>
-          <a:p>
-            <a:pPr indent="0" marL="0">
-              <a:buNone/>
-            </a:pPr>
-            <a:r>
-              <a:rPr lang="en-US" sz="1250" i="1" dirty="0">
-                <a:solidFill>
-                  <a:srgbClr val="6B6B63"/>
-                </a:solidFill>
-                <a:latin typeface="Calibri" pitchFamily="34" charset="0"/>
-                <a:ea typeface="Calibri" pitchFamily="34" charset="-122"/>
-                <a:cs typeface="Calibri" pitchFamily="34" charset="-120"/>
-              </a:rPr>
-              <a:t>A null result, honestly shown, is a complete project. The pivot kit is insurance, not a demotion.</a:t>
-            </a:r>
-            <a:endParaRPr lang="en-US" sz="1250" dirty="0"/>
+              <a:t>The licensing line decides which routes are even open to you. That is the next slide.</a:t>
+            </a:r>
+            <a:endParaRPr lang="en-US" sz="1100" dirty="0"/>
           </a:p>
         </p:txBody>
       </p:sp>
@@ -6272,7 +5403,7 @@
     <p:bg>
       <p:bgPr>
         <a:solidFill>
-          <a:srgbClr val="4E261D"/>
+          <a:srgbClr val="FFFFFF"/>
         </a:solidFill>
       </p:bgPr>
     </p:bg>
@@ -6317,13 +5448,13 @@
             <a:r>
               <a:rPr lang="en-US" sz="1300" b="1" spc="300" kern="0" dirty="0">
                 <a:solidFill>
-                  <a:srgbClr val="B9852F"/>
+                  <a:srgbClr val="2E5F8A"/>
                 </a:solidFill>
                 <a:latin typeface="Calibri" pitchFamily="34" charset="0"/>
                 <a:ea typeface="Calibri" pitchFamily="34" charset="-122"/>
                 <a:cs typeface="Calibri" pitchFamily="34" charset="-120"/>
               </a:rPr>
-              <a:t>BEFORE WEEK 5</a:t>
+              <a:t>ROUTE TWO, LIVE</a:t>
             </a:r>
             <a:endParaRPr lang="en-US" sz="1300" dirty="0"/>
           </a:p>
@@ -6337,17 +5468,17 @@
         </p:nvSpPr>
         <p:spPr>
           <a:xfrm>
-            <a:off x="640080" y="914400"/>
-            <a:ext cx="10058400" cy="731520"/>
-          </a:xfrm>
-          <a:prstGeom prst="rect">
-            <a:avLst/>
-          </a:prstGeom>
-          <a:noFill/>
-          <a:ln/>
-        </p:spPr>
-        <p:txBody>
-          <a:bodyPr wrap="square" rtlCol="0" anchor="ctr"/>
+            <a:off x="640080" y="868680"/>
+            <a:ext cx="10972800" cy="777240"/>
+          </a:xfrm>
+          <a:prstGeom prst="rect">
+            <a:avLst/>
+          </a:prstGeom>
+          <a:noFill/>
+          <a:ln/>
+        </p:spPr>
+        <p:txBody>
+          <a:bodyPr wrap="square" rtlCol="0" anchor="t"/>
           <a:lstStyle/>
           <a:p>
             <a:pPr indent="0" marL="0">
@@ -6356,348 +5487,116 @@
             <a:r>
               <a:rPr lang="en-US" sz="3400" b="1" dirty="0">
                 <a:solidFill>
-                  <a:srgbClr val="FFFFFF"/>
+                  <a:srgbClr val="1A1A1A"/>
                 </a:solidFill>
                 <a:latin typeface="Cambria" pitchFamily="34" charset="0"/>
                 <a:ea typeface="Cambria" pitchFamily="34" charset="-122"/>
                 <a:cs typeface="Cambria" pitchFamily="34" charset="-120"/>
               </a:rPr>
-              <a:t>Homework</a:t>
+              <a:t>A URL, some JSON, and then a table</a:t>
             </a:r>
             <a:endParaRPr lang="en-US" sz="3400" dirty="0"/>
           </a:p>
         </p:txBody>
       </p:sp>
-      <p:sp>
-        <p:nvSpPr>
-          <p:cNvPr id="4" name="Shape 2"/>
-          <p:cNvSpPr/>
-          <p:nvPr/>
-        </p:nvSpPr>
-        <p:spPr>
-          <a:xfrm>
-            <a:off x="640080" y="2057400"/>
-            <a:ext cx="219456" cy="219456"/>
-          </a:xfrm>
-          <a:prstGeom prst="ellipse">
-            <a:avLst/>
-          </a:prstGeom>
-          <a:solidFill>
-            <a:srgbClr val="B9852F"/>
-          </a:solidFill>
-          <a:ln/>
-        </p:spPr>
-      </p:sp>
-      <p:sp>
-        <p:nvSpPr>
-          <p:cNvPr id="5" name="Text 3"/>
-          <p:cNvSpPr/>
-          <p:nvPr/>
-        </p:nvSpPr>
-        <p:spPr>
-          <a:xfrm>
-            <a:off x="1051560" y="1920240"/>
-            <a:ext cx="10058400" cy="365760"/>
-          </a:xfrm>
-          <a:prstGeom prst="rect">
-            <a:avLst/>
-          </a:prstGeom>
-          <a:noFill/>
-          <a:ln/>
-        </p:spPr>
-        <p:txBody>
-          <a:bodyPr wrap="square" lIns="0" tIns="0" rIns="0" bIns="0" rtlCol="0" anchor="ctr"/>
-          <a:lstStyle/>
-          <a:p>
-            <a:pPr indent="0" marL="0">
-              <a:buNone/>
-            </a:pPr>
-            <a:r>
-              <a:rPr lang="en-US" sz="1500" b="1" dirty="0">
-                <a:solidFill>
-                  <a:srgbClr val="B9852F"/>
+      <p:pic>
+        <p:nvPicPr>
+          <p:cNvPr id="4" name="Image 0" descr="/tmp/figs/w4_api.png">    </p:cNvPr>
+          <p:cNvPicPr>
+            <a:picLocks noChangeAspect="1"/>
+          </p:cNvPicPr>
+          <p:nvPr/>
+        </p:nvPicPr>
+        <p:blipFill>
+          <a:blip r:embed="rId1"/>
+          <a:srcRect l="0" r="0" t="0" b="0"/>
+          <a:stretch/>
+        </p:blipFill>
+        <p:spPr>
+          <a:xfrm>
+            <a:off x="1097280" y="1920240"/>
+            <a:ext cx="9966960" cy="3749040"/>
+          </a:xfrm>
+          <a:prstGeom prst="rect">
+            <a:avLst/>
+          </a:prstGeom>
+        </p:spPr>
+      </p:pic>
+      <p:sp>
+        <p:nvSpPr>
+          <p:cNvPr id="5" name="Text 2"/>
+          <p:cNvSpPr/>
+          <p:nvPr/>
+        </p:nvSpPr>
+        <p:spPr>
+          <a:xfrm>
+            <a:off x="640080" y="5897880"/>
+            <a:ext cx="10881360" cy="411480"/>
+          </a:xfrm>
+          <a:prstGeom prst="rect">
+            <a:avLst/>
+          </a:prstGeom>
+          <a:noFill/>
+          <a:ln/>
+        </p:spPr>
+        <p:txBody>
+          <a:bodyPr wrap="square" rtlCol="0" anchor="ctr"/>
+          <a:lstStyle/>
+          <a:p>
+            <a:pPr indent="0" marL="0">
+              <a:buNone/>
+            </a:pPr>
+            <a:r>
+              <a:rPr lang="en-US" sz="1600" i="1" dirty="0">
+                <a:solidFill>
+                  <a:srgbClr val="1A1A1A"/>
+                </a:solidFill>
+                <a:latin typeface="Cambria" pitchFamily="34" charset="0"/>
+                <a:ea typeface="Cambria" pitchFamily="34" charset="-122"/>
+                <a:cs typeface="Cambria" pitchFamily="34" charset="-120"/>
+              </a:rPr>
+              <a:t>An endpoint is a URL that answers with data. A key is a name badge. Pagination hands you a page at a time.</a:t>
+            </a:r>
+            <a:endParaRPr lang="en-US" sz="1600" dirty="0"/>
+          </a:p>
+        </p:txBody>
+      </p:sp>
+      <p:sp>
+        <p:nvSpPr>
+          <p:cNvPr id="6" name="Text 3"/>
+          <p:cNvSpPr/>
+          <p:nvPr/>
+        </p:nvSpPr>
+        <p:spPr>
+          <a:xfrm>
+            <a:off x="640080" y="6355080"/>
+            <a:ext cx="10881360" cy="320040"/>
+          </a:xfrm>
+          <a:prstGeom prst="rect">
+            <a:avLst/>
+          </a:prstGeom>
+          <a:noFill/>
+          <a:ln/>
+        </p:spPr>
+        <p:txBody>
+          <a:bodyPr wrap="square" rtlCol="0" anchor="ctr"/>
+          <a:lstStyle/>
+          <a:p>
+            <a:pPr indent="0" marL="0">
+              <a:buNone/>
+            </a:pPr>
+            <a:r>
+              <a:rPr lang="en-US" sz="1000" dirty="0">
+                <a:solidFill>
+                  <a:srgbClr val="6B6B63"/>
                 </a:solidFill>
                 <a:latin typeface="Calibri" pitchFamily="34" charset="0"/>
                 <a:ea typeface="Calibri" pitchFamily="34" charset="-122"/>
                 <a:cs typeface="Calibri" pitchFamily="34" charset="-120"/>
               </a:rPr>
-              <a:t>Data Biography</a:t>
-            </a:r>
-            <a:endParaRPr lang="en-US" sz="1500" dirty="0"/>
-          </a:p>
-        </p:txBody>
-      </p:sp>
-      <p:sp>
-        <p:nvSpPr>
-          <p:cNvPr id="6" name="Text 4"/>
-          <p:cNvSpPr/>
-          <p:nvPr/>
-        </p:nvSpPr>
-        <p:spPr>
-          <a:xfrm>
-            <a:off x="1051560" y="2286000"/>
-            <a:ext cx="9875520" cy="868680"/>
-          </a:xfrm>
-          <a:prstGeom prst="rect">
-            <a:avLst/>
-          </a:prstGeom>
-          <a:noFill/>
-          <a:ln/>
-        </p:spPr>
-        <p:txBody>
-          <a:bodyPr wrap="square" lIns="0" tIns="0" rIns="0" bIns="0" rtlCol="0" anchor="t"/>
-          <a:lstStyle/>
-          <a:p>
-            <a:pPr indent="0" marL="0">
-              <a:buNone/>
-            </a:pPr>
-            <a:r>
-              <a:rPr lang="en-US" sz="1400" dirty="0">
-                <a:solidFill>
-                  <a:srgbClr val="E8DCD6"/>
-                </a:solidFill>
-                <a:latin typeface="Calibri" pitchFamily="34" charset="0"/>
-                <a:ea typeface="Calibri" pitchFamily="34" charset="-122"/>
-                <a:cs typeface="Calibri" pitchFamily="34" charset="-120"/>
-              </a:rPr>
-              <a:t>~400 words on your corpus: where it came from, who made it, who is in it, who is missing, and what it cannot tell you however cleverly you count.</a:t>
-            </a:r>
-            <a:endParaRPr lang="en-US" sz="1400" dirty="0"/>
-          </a:p>
-        </p:txBody>
-      </p:sp>
-      <p:sp>
-        <p:nvSpPr>
-          <p:cNvPr id="7" name="Shape 5"/>
-          <p:cNvSpPr/>
-          <p:nvPr/>
-        </p:nvSpPr>
-        <p:spPr>
-          <a:xfrm>
-            <a:off x="640080" y="3383280"/>
-            <a:ext cx="219456" cy="219456"/>
-          </a:xfrm>
-          <a:prstGeom prst="ellipse">
-            <a:avLst/>
-          </a:prstGeom>
-          <a:solidFill>
-            <a:srgbClr val="3F6F5F"/>
-          </a:solidFill>
-          <a:ln/>
-        </p:spPr>
-      </p:sp>
-      <p:sp>
-        <p:nvSpPr>
-          <p:cNvPr id="8" name="Text 6"/>
-          <p:cNvSpPr/>
-          <p:nvPr/>
-        </p:nvSpPr>
-        <p:spPr>
-          <a:xfrm>
-            <a:off x="1051560" y="3246120"/>
-            <a:ext cx="10058400" cy="365760"/>
-          </a:xfrm>
-          <a:prstGeom prst="rect">
-            <a:avLst/>
-          </a:prstGeom>
-          <a:noFill/>
-          <a:ln/>
-        </p:spPr>
-        <p:txBody>
-          <a:bodyPr wrap="square" lIns="0" tIns="0" rIns="0" bIns="0" rtlCol="0" anchor="ctr"/>
-          <a:lstStyle/>
-          <a:p>
-            <a:pPr indent="0" marL="0">
-              <a:buNone/>
-            </a:pPr>
-            <a:r>
-              <a:rPr lang="en-US" sz="1500" b="1" dirty="0">
-                <a:solidFill>
-                  <a:srgbClr val="3F6F5F"/>
-                </a:solidFill>
-                <a:latin typeface="Calibri" pitchFamily="34" charset="0"/>
-                <a:ea typeface="Calibri" pitchFamily="34" charset="-122"/>
-                <a:cs typeface="Calibri" pitchFamily="34" charset="-120"/>
-              </a:rPr>
-              <a:t>Collect it for real</a:t>
-            </a:r>
-            <a:endParaRPr lang="en-US" sz="1500" dirty="0"/>
-          </a:p>
-        </p:txBody>
-      </p:sp>
-      <p:sp>
-        <p:nvSpPr>
-          <p:cNvPr id="9" name="Text 7"/>
-          <p:cNvSpPr/>
-          <p:nvPr/>
-        </p:nvSpPr>
-        <p:spPr>
-          <a:xfrm>
-            <a:off x="1051560" y="3611880"/>
-            <a:ext cx="9875520" cy="868680"/>
-          </a:xfrm>
-          <a:prstGeom prst="rect">
-            <a:avLst/>
-          </a:prstGeom>
-          <a:noFill/>
-          <a:ln/>
-        </p:spPr>
-        <p:txBody>
-          <a:bodyPr wrap="square" lIns="0" tIns="0" rIns="0" bIns="0" rtlCol="0" anchor="t"/>
-          <a:lstStyle/>
-          <a:p>
-            <a:pPr indent="0" marL="0">
-              <a:buNone/>
-            </a:pPr>
-            <a:r>
-              <a:rPr lang="en-US" sz="1400" dirty="0">
-                <a:solidFill>
-                  <a:srgbClr val="E8DCD6"/>
-                </a:solidFill>
-                <a:latin typeface="Calibri" pitchFamily="34" charset="0"/>
-                <a:ea typeface="Calibri" pitchFamily="34" charset="-122"/>
-                <a:cs typeface="Calibri" pitchFamily="34" charset="-120"/>
-              </a:rPr>
-              <a:t>Use the cookbook notebook and leave the file in your Drive project folder. Week 5 begins there.</a:t>
-            </a:r>
-            <a:endParaRPr lang="en-US" sz="1400" dirty="0"/>
-          </a:p>
-        </p:txBody>
-      </p:sp>
-      <p:sp>
-        <p:nvSpPr>
-          <p:cNvPr id="10" name="Shape 8"/>
-          <p:cNvSpPr/>
-          <p:nvPr/>
-        </p:nvSpPr>
-        <p:spPr>
-          <a:xfrm>
-            <a:off x="640080" y="4709160"/>
-            <a:ext cx="219456" cy="219456"/>
-          </a:xfrm>
-          <a:prstGeom prst="ellipse">
-            <a:avLst/>
-          </a:prstGeom>
-          <a:solidFill>
-            <a:srgbClr val="E8DCD6"/>
-          </a:solidFill>
-          <a:ln/>
-        </p:spPr>
-      </p:sp>
-      <p:sp>
-        <p:nvSpPr>
-          <p:cNvPr id="11" name="Text 9"/>
-          <p:cNvSpPr/>
-          <p:nvPr/>
-        </p:nvSpPr>
-        <p:spPr>
-          <a:xfrm>
-            <a:off x="1051560" y="4572000"/>
-            <a:ext cx="10058400" cy="365760"/>
-          </a:xfrm>
-          <a:prstGeom prst="rect">
-            <a:avLst/>
-          </a:prstGeom>
-          <a:noFill/>
-          <a:ln/>
-        </p:spPr>
-        <p:txBody>
-          <a:bodyPr wrap="square" lIns="0" tIns="0" rIns="0" bIns="0" rtlCol="0" anchor="ctr"/>
-          <a:lstStyle/>
-          <a:p>
-            <a:pPr indent="0" marL="0">
-              <a:buNone/>
-            </a:pPr>
-            <a:r>
-              <a:rPr lang="en-US" sz="1500" b="1" dirty="0">
-                <a:solidFill>
-                  <a:srgbClr val="E8DCD6"/>
-                </a:solidFill>
-                <a:latin typeface="Calibri" pitchFamily="34" charset="0"/>
-                <a:ea typeface="Calibri" pitchFamily="34" charset="-122"/>
-                <a:cs typeface="Calibri" pitchFamily="34" charset="-120"/>
-              </a:rPr>
-              <a:t>Play with the map</a:t>
-            </a:r>
-            <a:endParaRPr lang="en-US" sz="1500" dirty="0"/>
-          </a:p>
-        </p:txBody>
-      </p:sp>
-      <p:sp>
-        <p:nvSpPr>
-          <p:cNvPr id="12" name="Text 10"/>
-          <p:cNvSpPr/>
-          <p:nvPr/>
-        </p:nvSpPr>
-        <p:spPr>
-          <a:xfrm>
-            <a:off x="1051560" y="4937760"/>
-            <a:ext cx="9875520" cy="868680"/>
-          </a:xfrm>
-          <a:prstGeom prst="rect">
-            <a:avLst/>
-          </a:prstGeom>
-          <a:noFill/>
-          <a:ln/>
-        </p:spPr>
-        <p:txBody>
-          <a:bodyPr wrap="square" lIns="0" tIns="0" rIns="0" bIns="0" rtlCol="0" anchor="t"/>
-          <a:lstStyle/>
-          <a:p>
-            <a:pPr indent="0" marL="0">
-              <a:buNone/>
-            </a:pPr>
-            <a:r>
-              <a:rPr lang="en-US" sz="1400" dirty="0">
-                <a:solidFill>
-                  <a:srgbClr val="E8DCD6"/>
-                </a:solidFill>
-                <a:latin typeface="Calibri" pitchFamily="34" charset="0"/>
-                <a:ea typeface="Calibri" pitchFamily="34" charset="-122"/>
-                <a:cs typeface="Calibri" pitchFamily="34" charset="-120"/>
-              </a:rPr>
-              <a:t>Open the Embedding Projector, search a word from your own corpus, and bring back one neighbour that makes sense and one that does not.</a:t>
-            </a:r>
-            <a:endParaRPr lang="en-US" sz="1400" dirty="0"/>
-          </a:p>
-        </p:txBody>
-      </p:sp>
-      <p:sp>
-        <p:nvSpPr>
-          <p:cNvPr id="13" name="Text 11"/>
-          <p:cNvSpPr/>
-          <p:nvPr/>
-        </p:nvSpPr>
-        <p:spPr>
-          <a:xfrm>
-            <a:off x="640080" y="6035040"/>
-            <a:ext cx="10881360" cy="457200"/>
-          </a:xfrm>
-          <a:prstGeom prst="rect">
-            <a:avLst/>
-          </a:prstGeom>
-          <a:noFill/>
-          <a:ln/>
-        </p:spPr>
-        <p:txBody>
-          <a:bodyPr wrap="square" rtlCol="0" anchor="ctr"/>
-          <a:lstStyle/>
-          <a:p>
-            <a:pPr indent="0" marL="0">
-              <a:buNone/>
-            </a:pPr>
-            <a:r>
-              <a:rPr lang="en-US" sz="1300" i="1" dirty="0">
-                <a:solidFill>
-                  <a:srgbClr val="B9852F"/>
-                </a:solidFill>
-                <a:latin typeface="Calibri" pitchFamily="34" charset="0"/>
-                <a:ea typeface="Calibri" pitchFamily="34" charset="-122"/>
-                <a:cs typeface="Calibri" pitchFamily="34" charset="-120"/>
-              </a:rPr>
-              <a:t>Next week: embeddings on YOUR corpus, all session. Bring the file.</a:t>
-            </a:r>
-            <a:endParaRPr lang="en-US" sz="1300" dirty="0"/>
+              <a:t>Left panel: a real response, live from api.artic.edu. The AI writes the three lines that make the table.</a:t>
+            </a:r>
+            <a:endParaRPr lang="en-US" sz="1000" dirty="0"/>
           </a:p>
         </p:txBody>
       </p:sp>
@@ -7773,6 +6672,1447 @@
 </p:sld>
 </file>
 
+<file path=ppt/slides/slide20.xml><?xml version="1.0" encoding="utf-8"?>
+<p:sld xmlns:a="http://schemas.openxmlformats.org/drawingml/2006/main" xmlns:r="http://schemas.openxmlformats.org/officeDocument/2006/relationships" xmlns:p="http://schemas.openxmlformats.org/presentationml/2006/main">
+  <p:cSld name="Slide 20">
+    <p:bg>
+      <p:bgPr>
+        <a:solidFill>
+          <a:srgbClr val="FFFFFF"/>
+        </a:solidFill>
+      </p:bgPr>
+    </p:bg>
+    <p:spTree>
+      <p:nvGrpSpPr>
+        <p:cNvPr id="1" name=""/>
+        <p:cNvGrpSpPr/>
+        <p:nvPr/>
+      </p:nvGrpSpPr>
+      <p:grpSpPr>
+        <a:xfrm>
+          <a:off x="0" y="0"/>
+          <a:ext cx="0" cy="0"/>
+          <a:chOff x="0" y="0"/>
+          <a:chExt cx="0" cy="0"/>
+        </a:xfrm>
+      </p:grpSpPr>
+      <p:sp>
+        <p:nvSpPr>
+          <p:cNvPr id="2" name="Text 0"/>
+          <p:cNvSpPr/>
+          <p:nvPr/>
+        </p:nvSpPr>
+        <p:spPr>
+          <a:xfrm>
+            <a:off x="640080" y="502920"/>
+            <a:ext cx="10515600" cy="320040"/>
+          </a:xfrm>
+          <a:prstGeom prst="rect">
+            <a:avLst/>
+          </a:prstGeom>
+          <a:noFill/>
+          <a:ln/>
+        </p:spPr>
+        <p:txBody>
+          <a:bodyPr wrap="square" rtlCol="0" anchor="ctr"/>
+          <a:lstStyle/>
+          <a:p>
+            <a:pPr indent="0" marL="0">
+              <a:buNone/>
+            </a:pPr>
+            <a:r>
+              <a:rPr lang="en-US" sz="1300" b="1" spc="300" kern="0" dirty="0">
+                <a:solidFill>
+                  <a:srgbClr val="7A3B2E"/>
+                </a:solidFill>
+                <a:latin typeface="Calibri" pitchFamily="34" charset="0"/>
+                <a:ea typeface="Calibri" pitchFamily="34" charset="-122"/>
+                <a:cs typeface="Calibri" pitchFamily="34" charset="-120"/>
+              </a:rPr>
+              <a:t>ROUTE THREE</a:t>
+            </a:r>
+            <a:endParaRPr lang="en-US" sz="1300" dirty="0"/>
+          </a:p>
+        </p:txBody>
+      </p:sp>
+      <p:sp>
+        <p:nvSpPr>
+          <p:cNvPr id="3" name="Text 1"/>
+          <p:cNvSpPr/>
+          <p:nvPr/>
+        </p:nvSpPr>
+        <p:spPr>
+          <a:xfrm>
+            <a:off x="640080" y="868680"/>
+            <a:ext cx="10972800" cy="777240"/>
+          </a:xfrm>
+          <a:prstGeom prst="rect">
+            <a:avLst/>
+          </a:prstGeom>
+          <a:noFill/>
+          <a:ln/>
+        </p:spPr>
+        <p:txBody>
+          <a:bodyPr wrap="square" rtlCol="0" anchor="t"/>
+          <a:lstStyle/>
+          <a:p>
+            <a:pPr indent="0" marL="0">
+              <a:buNone/>
+            </a:pPr>
+            <a:r>
+              <a:rPr lang="en-US" sz="3400" b="1" dirty="0">
+                <a:solidFill>
+                  <a:srgbClr val="1A1A1A"/>
+                </a:solidFill>
+                <a:latin typeface="Cambria" pitchFamily="34" charset="0"/>
+                <a:ea typeface="Cambria" pitchFamily="34" charset="-122"/>
+                <a:cs typeface="Cambria" pitchFamily="34" charset="-120"/>
+              </a:rPr>
+              <a:t>Scraping, and the four things that come with it</a:t>
+            </a:r>
+            <a:endParaRPr lang="en-US" sz="3400" dirty="0"/>
+          </a:p>
+        </p:txBody>
+      </p:sp>
+      <p:sp>
+        <p:nvSpPr>
+          <p:cNvPr id="4" name="Shape 2"/>
+          <p:cNvSpPr/>
+          <p:nvPr/>
+        </p:nvSpPr>
+        <p:spPr>
+          <a:xfrm>
+            <a:off x="640080" y="2011680"/>
+            <a:ext cx="10881360" cy="914400"/>
+          </a:xfrm>
+          <a:prstGeom prst="roundRect">
+            <a:avLst>
+              <a:gd name="adj" fmla="val 10000"/>
+            </a:avLst>
+          </a:prstGeom>
+          <a:solidFill>
+            <a:srgbClr val="F4EEE8"/>
+          </a:solidFill>
+          <a:ln/>
+        </p:spPr>
+      </p:sp>
+      <p:sp>
+        <p:nvSpPr>
+          <p:cNvPr id="5" name="Text 3"/>
+          <p:cNvSpPr/>
+          <p:nvPr/>
+        </p:nvSpPr>
+        <p:spPr>
+          <a:xfrm>
+            <a:off x="960120" y="2103120"/>
+            <a:ext cx="4023360" cy="731520"/>
+          </a:xfrm>
+          <a:prstGeom prst="rect">
+            <a:avLst/>
+          </a:prstGeom>
+          <a:noFill/>
+          <a:ln/>
+        </p:spPr>
+        <p:txBody>
+          <a:bodyPr wrap="square" lIns="0" tIns="0" rIns="0" bIns="0" rtlCol="0" anchor="ctr"/>
+          <a:lstStyle/>
+          <a:p>
+            <a:pPr indent="0" marL="0">
+              <a:buNone/>
+            </a:pPr>
+            <a:r>
+              <a:rPr lang="en-US" sz="1700" b="1" dirty="0">
+                <a:solidFill>
+                  <a:srgbClr val="7A3B2E"/>
+                </a:solidFill>
+                <a:latin typeface="Cambria" pitchFamily="34" charset="0"/>
+                <a:ea typeface="Cambria" pitchFamily="34" charset="-122"/>
+                <a:cs typeface="Cambria" pitchFamily="34" charset="-120"/>
+              </a:rPr>
+              <a:t>Read robots.txt and the terms</a:t>
+            </a:r>
+            <a:endParaRPr lang="en-US" sz="1700" dirty="0"/>
+          </a:p>
+        </p:txBody>
+      </p:sp>
+      <p:sp>
+        <p:nvSpPr>
+          <p:cNvPr id="6" name="Text 4"/>
+          <p:cNvSpPr/>
+          <p:nvPr/>
+        </p:nvSpPr>
+        <p:spPr>
+          <a:xfrm>
+            <a:off x="5120640" y="2103120"/>
+            <a:ext cx="6126480" cy="731520"/>
+          </a:xfrm>
+          <a:prstGeom prst="rect">
+            <a:avLst/>
+          </a:prstGeom>
+          <a:noFill/>
+          <a:ln/>
+        </p:spPr>
+        <p:txBody>
+          <a:bodyPr wrap="square" lIns="0" tIns="0" rIns="0" bIns="0" rtlCol="0" anchor="ctr"/>
+          <a:lstStyle/>
+          <a:p>
+            <a:pPr indent="0" marL="0">
+              <a:buNone/>
+            </a:pPr>
+            <a:r>
+              <a:rPr lang="en-US" sz="1350" dirty="0">
+                <a:solidFill>
+                  <a:srgbClr val="1A1A1A"/>
+                </a:solidFill>
+                <a:latin typeface="Calibri" pitchFamily="34" charset="0"/>
+                <a:ea typeface="Calibri" pitchFamily="34" charset="-122"/>
+                <a:cs typeface="Calibri" pitchFamily="34" charset="-120"/>
+              </a:rPr>
+              <a:t>before the first request, not after the complaint.</a:t>
+            </a:r>
+            <a:endParaRPr lang="en-US" sz="1350" dirty="0"/>
+          </a:p>
+        </p:txBody>
+      </p:sp>
+      <p:sp>
+        <p:nvSpPr>
+          <p:cNvPr id="7" name="Shape 5"/>
+          <p:cNvSpPr/>
+          <p:nvPr/>
+        </p:nvSpPr>
+        <p:spPr>
+          <a:xfrm>
+            <a:off x="640080" y="3063240"/>
+            <a:ext cx="10881360" cy="914400"/>
+          </a:xfrm>
+          <a:prstGeom prst="roundRect">
+            <a:avLst>
+              <a:gd name="adj" fmla="val 10000"/>
+            </a:avLst>
+          </a:prstGeom>
+          <a:solidFill>
+            <a:srgbClr val="F4EEE8"/>
+          </a:solidFill>
+          <a:ln/>
+        </p:spPr>
+      </p:sp>
+      <p:sp>
+        <p:nvSpPr>
+          <p:cNvPr id="8" name="Text 6"/>
+          <p:cNvSpPr/>
+          <p:nvPr/>
+        </p:nvSpPr>
+        <p:spPr>
+          <a:xfrm>
+            <a:off x="960120" y="3154680"/>
+            <a:ext cx="4023360" cy="731520"/>
+          </a:xfrm>
+          <a:prstGeom prst="rect">
+            <a:avLst/>
+          </a:prstGeom>
+          <a:noFill/>
+          <a:ln/>
+        </p:spPr>
+        <p:txBody>
+          <a:bodyPr wrap="square" lIns="0" tIns="0" rIns="0" bIns="0" rtlCol="0" anchor="ctr"/>
+          <a:lstStyle/>
+          <a:p>
+            <a:pPr indent="0" marL="0">
+              <a:buNone/>
+            </a:pPr>
+            <a:r>
+              <a:rPr lang="en-US" sz="1700" b="1" dirty="0">
+                <a:solidFill>
+                  <a:srgbClr val="B9852F"/>
+                </a:solidFill>
+                <a:latin typeface="Cambria" pitchFamily="34" charset="0"/>
+                <a:ea typeface="Cambria" pitchFamily="34" charset="-122"/>
+                <a:cs typeface="Cambria" pitchFamily="34" charset="-120"/>
+              </a:rPr>
+              <a:t>Request slowly</a:t>
+            </a:r>
+            <a:endParaRPr lang="en-US" sz="1700" dirty="0"/>
+          </a:p>
+        </p:txBody>
+      </p:sp>
+      <p:sp>
+        <p:nvSpPr>
+          <p:cNvPr id="9" name="Text 7"/>
+          <p:cNvSpPr/>
+          <p:nvPr/>
+        </p:nvSpPr>
+        <p:spPr>
+          <a:xfrm>
+            <a:off x="5120640" y="3154680"/>
+            <a:ext cx="6126480" cy="731520"/>
+          </a:xfrm>
+          <a:prstGeom prst="rect">
+            <a:avLst/>
+          </a:prstGeom>
+          <a:noFill/>
+          <a:ln/>
+        </p:spPr>
+        <p:txBody>
+          <a:bodyPr wrap="square" lIns="0" tIns="0" rIns="0" bIns="0" rtlCol="0" anchor="ctr"/>
+          <a:lstStyle/>
+          <a:p>
+            <a:pPr indent="0" marL="0">
+              <a:buNone/>
+            </a:pPr>
+            <a:r>
+              <a:rPr lang="en-US" sz="1350" dirty="0">
+                <a:solidFill>
+                  <a:srgbClr val="1A1A1A"/>
+                </a:solidFill>
+                <a:latin typeface="Calibri" pitchFamily="34" charset="0"/>
+                <a:ea typeface="Calibri" pitchFamily="34" charset="-122"/>
+                <a:cs typeface="Calibri" pitchFamily="34" charset="-120"/>
+              </a:rPr>
+              <a:t>one page every couple of seconds. You are a guest on someone's server.</a:t>
+            </a:r>
+            <a:endParaRPr lang="en-US" sz="1350" dirty="0"/>
+          </a:p>
+        </p:txBody>
+      </p:sp>
+      <p:sp>
+        <p:nvSpPr>
+          <p:cNvPr id="10" name="Shape 8"/>
+          <p:cNvSpPr/>
+          <p:nvPr/>
+        </p:nvSpPr>
+        <p:spPr>
+          <a:xfrm>
+            <a:off x="640080" y="4114800"/>
+            <a:ext cx="10881360" cy="914400"/>
+          </a:xfrm>
+          <a:prstGeom prst="roundRect">
+            <a:avLst>
+              <a:gd name="adj" fmla="val 10000"/>
+            </a:avLst>
+          </a:prstGeom>
+          <a:solidFill>
+            <a:srgbClr val="F4EEE8"/>
+          </a:solidFill>
+          <a:ln/>
+        </p:spPr>
+      </p:sp>
+      <p:sp>
+        <p:nvSpPr>
+          <p:cNvPr id="11" name="Text 9"/>
+          <p:cNvSpPr/>
+          <p:nvPr/>
+        </p:nvSpPr>
+        <p:spPr>
+          <a:xfrm>
+            <a:off x="960120" y="4206240"/>
+            <a:ext cx="4023360" cy="731520"/>
+          </a:xfrm>
+          <a:prstGeom prst="rect">
+            <a:avLst/>
+          </a:prstGeom>
+          <a:noFill/>
+          <a:ln/>
+        </p:spPr>
+        <p:txBody>
+          <a:bodyPr wrap="square" lIns="0" tIns="0" rIns="0" bIns="0" rtlCol="0" anchor="ctr"/>
+          <a:lstStyle/>
+          <a:p>
+            <a:pPr indent="0" marL="0">
+              <a:buNone/>
+            </a:pPr>
+            <a:r>
+              <a:rPr lang="en-US" sz="1700" b="1" dirty="0">
+                <a:solidFill>
+                  <a:srgbClr val="3F6F5F"/>
+                </a:solidFill>
+                <a:latin typeface="Cambria" pitchFamily="34" charset="0"/>
+                <a:ea typeface="Cambria" pitchFamily="34" charset="-122"/>
+                <a:cs typeface="Cambria" pitchFamily="34" charset="-120"/>
+              </a:rPr>
+              <a:t>Take only what you need</a:t>
+            </a:r>
+            <a:endParaRPr lang="en-US" sz="1700" dirty="0"/>
+          </a:p>
+        </p:txBody>
+      </p:sp>
+      <p:sp>
+        <p:nvSpPr>
+          <p:cNvPr id="12" name="Text 10"/>
+          <p:cNvSpPr/>
+          <p:nvPr/>
+        </p:nvSpPr>
+        <p:spPr>
+          <a:xfrm>
+            <a:off x="5120640" y="4206240"/>
+            <a:ext cx="6126480" cy="731520"/>
+          </a:xfrm>
+          <a:prstGeom prst="rect">
+            <a:avLst/>
+          </a:prstGeom>
+          <a:noFill/>
+          <a:ln/>
+        </p:spPr>
+        <p:txBody>
+          <a:bodyPr wrap="square" lIns="0" tIns="0" rIns="0" bIns="0" rtlCol="0" anchor="ctr"/>
+          <a:lstStyle/>
+          <a:p>
+            <a:pPr indent="0" marL="0">
+              <a:buNone/>
+            </a:pPr>
+            <a:r>
+              <a:rPr lang="en-US" sz="1350" dirty="0">
+                <a:solidFill>
+                  <a:srgbClr val="1A1A1A"/>
+                </a:solidFill>
+                <a:latin typeface="Calibri" pitchFamily="34" charset="0"/>
+                <a:ea typeface="Calibri" pitchFamily="34" charset="-122"/>
+                <a:cs typeface="Calibri" pitchFamily="34" charset="-120"/>
+              </a:rPr>
+              <a:t>the fields your question uses, not the whole site.</a:t>
+            </a:r>
+            <a:endParaRPr lang="en-US" sz="1350" dirty="0"/>
+          </a:p>
+        </p:txBody>
+      </p:sp>
+      <p:sp>
+        <p:nvSpPr>
+          <p:cNvPr id="13" name="Shape 11"/>
+          <p:cNvSpPr/>
+          <p:nvPr/>
+        </p:nvSpPr>
+        <p:spPr>
+          <a:xfrm>
+            <a:off x="640080" y="5166360"/>
+            <a:ext cx="10881360" cy="914400"/>
+          </a:xfrm>
+          <a:prstGeom prst="roundRect">
+            <a:avLst>
+              <a:gd name="adj" fmla="val 10000"/>
+            </a:avLst>
+          </a:prstGeom>
+          <a:solidFill>
+            <a:srgbClr val="F4EEE8"/>
+          </a:solidFill>
+          <a:ln/>
+        </p:spPr>
+      </p:sp>
+      <p:sp>
+        <p:nvSpPr>
+          <p:cNvPr id="14" name="Text 12"/>
+          <p:cNvSpPr/>
+          <p:nvPr/>
+        </p:nvSpPr>
+        <p:spPr>
+          <a:xfrm>
+            <a:off x="960120" y="5257800"/>
+            <a:ext cx="4023360" cy="731520"/>
+          </a:xfrm>
+          <a:prstGeom prst="rect">
+            <a:avLst/>
+          </a:prstGeom>
+          <a:noFill/>
+          <a:ln/>
+        </p:spPr>
+        <p:txBody>
+          <a:bodyPr wrap="square" lIns="0" tIns="0" rIns="0" bIns="0" rtlCol="0" anchor="ctr"/>
+          <a:lstStyle/>
+          <a:p>
+            <a:pPr indent="0" marL="0">
+              <a:buNone/>
+            </a:pPr>
+            <a:r>
+              <a:rPr lang="en-US" sz="1700" b="1" dirty="0">
+                <a:solidFill>
+                  <a:srgbClr val="2E5F8A"/>
+                </a:solidFill>
+                <a:latin typeface="Cambria" pitchFamily="34" charset="0"/>
+                <a:ea typeface="Cambria" pitchFamily="34" charset="-122"/>
+                <a:cs typeface="Cambria" pitchFamily="34" charset="-120"/>
+              </a:rPr>
+              <a:t>Never republish the text</a:t>
+            </a:r>
+            <a:endParaRPr lang="en-US" sz="1700" dirty="0"/>
+          </a:p>
+        </p:txBody>
+      </p:sp>
+      <p:sp>
+        <p:nvSpPr>
+          <p:cNvPr id="15" name="Text 13"/>
+          <p:cNvSpPr/>
+          <p:nvPr/>
+        </p:nvSpPr>
+        <p:spPr>
+          <a:xfrm>
+            <a:off x="5120640" y="5257800"/>
+            <a:ext cx="6126480" cy="731520"/>
+          </a:xfrm>
+          <a:prstGeom prst="rect">
+            <a:avLst/>
+          </a:prstGeom>
+          <a:noFill/>
+          <a:ln/>
+        </p:spPr>
+        <p:txBody>
+          <a:bodyPr wrap="square" lIns="0" tIns="0" rIns="0" bIns="0" rtlCol="0" anchor="ctr"/>
+          <a:lstStyle/>
+          <a:p>
+            <a:pPr indent="0" marL="0">
+              <a:buNone/>
+            </a:pPr>
+            <a:r>
+              <a:rPr lang="en-US" sz="1350" dirty="0">
+                <a:solidFill>
+                  <a:srgbClr val="1A1A1A"/>
+                </a:solidFill>
+                <a:latin typeface="Calibri" pitchFamily="34" charset="0"/>
+                <a:ea typeface="Calibri" pitchFamily="34" charset="-122"/>
+                <a:cs typeface="Calibri" pitchFamily="34" charset="-120"/>
+              </a:rPr>
+              <a:t>analyse it, quote it, count it. Do not hand it on.</a:t>
+            </a:r>
+            <a:endParaRPr lang="en-US" sz="1350" dirty="0"/>
+          </a:p>
+        </p:txBody>
+      </p:sp>
+      <p:sp>
+        <p:nvSpPr>
+          <p:cNvPr id="16" name="Text 14"/>
+          <p:cNvSpPr/>
+          <p:nvPr/>
+        </p:nvSpPr>
+        <p:spPr>
+          <a:xfrm>
+            <a:off x="640080" y="6309360"/>
+            <a:ext cx="10881360" cy="365760"/>
+          </a:xfrm>
+          <a:prstGeom prst="rect">
+            <a:avLst/>
+          </a:prstGeom>
+          <a:noFill/>
+          <a:ln/>
+        </p:spPr>
+        <p:txBody>
+          <a:bodyPr wrap="square" rtlCol="0" anchor="ctr"/>
+          <a:lstStyle/>
+          <a:p>
+            <a:pPr indent="0" marL="0">
+              <a:buNone/>
+            </a:pPr>
+            <a:r>
+              <a:rPr lang="en-US" sz="1250" i="1" dirty="0">
+                <a:solidFill>
+                  <a:srgbClr val="6B6B63"/>
+                </a:solidFill>
+                <a:latin typeface="Calibri" pitchFamily="34" charset="0"/>
+                <a:ea typeface="Calibri" pitchFamily="34" charset="-122"/>
+                <a:cs typeface="Calibri" pitchFamily="34" charset="-120"/>
+              </a:rPr>
+              <a:t>CC0 and public domain: go anywhere.   Academic sets and community text: analyse, don't redistribute.   Shadow libraries: never.</a:t>
+            </a:r>
+            <a:endParaRPr lang="en-US" sz="1250" dirty="0"/>
+          </a:p>
+        </p:txBody>
+      </p:sp>
+    </p:spTree>
+  </p:cSld>
+  <p:clrMapOvr>
+    <a:masterClrMapping/>
+  </p:clrMapOvr>
+</p:sld>
+</file>
+
+<file path=ppt/slides/slide21.xml><?xml version="1.0" encoding="utf-8"?>
+<p:sld xmlns:a="http://schemas.openxmlformats.org/drawingml/2006/main" xmlns:r="http://schemas.openxmlformats.org/officeDocument/2006/relationships" xmlns:p="http://schemas.openxmlformats.org/presentationml/2006/main">
+  <p:cSld name="Slide 21">
+    <p:bg>
+      <p:bgPr>
+        <a:solidFill>
+          <a:srgbClr val="FFFFFF"/>
+        </a:solidFill>
+      </p:bgPr>
+    </p:bg>
+    <p:spTree>
+      <p:nvGrpSpPr>
+        <p:cNvPr id="1" name=""/>
+        <p:cNvGrpSpPr/>
+        <p:nvPr/>
+      </p:nvGrpSpPr>
+      <p:grpSpPr>
+        <a:xfrm>
+          <a:off x="0" y="0"/>
+          <a:ext cx="0" cy="0"/>
+          <a:chOff x="0" y="0"/>
+          <a:chExt cx="0" cy="0"/>
+        </a:xfrm>
+      </p:grpSpPr>
+      <p:sp>
+        <p:nvSpPr>
+          <p:cNvPr id="2" name="Text 0"/>
+          <p:cNvSpPr/>
+          <p:nvPr/>
+        </p:nvSpPr>
+        <p:spPr>
+          <a:xfrm>
+            <a:off x="640080" y="502920"/>
+            <a:ext cx="10515600" cy="320040"/>
+          </a:xfrm>
+          <a:prstGeom prst="rect">
+            <a:avLst/>
+          </a:prstGeom>
+          <a:noFill/>
+          <a:ln/>
+        </p:spPr>
+        <p:txBody>
+          <a:bodyPr wrap="square" rtlCol="0" anchor="ctr"/>
+          <a:lstStyle/>
+          <a:p>
+            <a:pPr indent="0" marL="0">
+              <a:buNone/>
+            </a:pPr>
+            <a:r>
+              <a:rPr lang="en-US" sz="1300" b="1" spc="300" kern="0" dirty="0">
+                <a:solidFill>
+                  <a:srgbClr val="3F6F5F"/>
+                </a:solidFill>
+                <a:latin typeface="Calibri" pitchFamily="34" charset="0"/>
+                <a:ea typeface="Calibri" pitchFamily="34" charset="-122"/>
+                <a:cs typeface="Calibri" pitchFamily="34" charset="-120"/>
+              </a:rPr>
+              <a:t>YOUR TURN · 20 MINUTES</a:t>
+            </a:r>
+            <a:endParaRPr lang="en-US" sz="1300" dirty="0"/>
+          </a:p>
+        </p:txBody>
+      </p:sp>
+      <p:sp>
+        <p:nvSpPr>
+          <p:cNvPr id="3" name="Text 1"/>
+          <p:cNvSpPr/>
+          <p:nvPr/>
+        </p:nvSpPr>
+        <p:spPr>
+          <a:xfrm>
+            <a:off x="640080" y="868680"/>
+            <a:ext cx="10972800" cy="777240"/>
+          </a:xfrm>
+          <a:prstGeom prst="rect">
+            <a:avLst/>
+          </a:prstGeom>
+          <a:noFill/>
+          <a:ln/>
+        </p:spPr>
+        <p:txBody>
+          <a:bodyPr wrap="square" rtlCol="0" anchor="t"/>
+          <a:lstStyle/>
+          <a:p>
+            <a:pPr indent="0" marL="0">
+              <a:buNone/>
+            </a:pPr>
+            <a:r>
+              <a:rPr lang="en-US" sz="3400" b="1" dirty="0">
+                <a:solidFill>
+                  <a:srgbClr val="1A1A1A"/>
+                </a:solidFill>
+                <a:latin typeface="Cambria" pitchFamily="34" charset="0"/>
+                <a:ea typeface="Cambria" pitchFamily="34" charset="-122"/>
+                <a:cs typeface="Cambria" pitchFamily="34" charset="-120"/>
+              </a:rPr>
+              <a:t>Collect it, save it, start the repo</a:t>
+            </a:r>
+            <a:endParaRPr lang="en-US" sz="3400" dirty="0"/>
+          </a:p>
+        </p:txBody>
+      </p:sp>
+      <p:sp>
+        <p:nvSpPr>
+          <p:cNvPr id="4" name="Shape 2"/>
+          <p:cNvSpPr/>
+          <p:nvPr/>
+        </p:nvSpPr>
+        <p:spPr>
+          <a:xfrm>
+            <a:off x="640080" y="2103120"/>
+            <a:ext cx="10881360" cy="1097280"/>
+          </a:xfrm>
+          <a:prstGeom prst="roundRect">
+            <a:avLst>
+              <a:gd name="adj" fmla="val 8333"/>
+            </a:avLst>
+          </a:prstGeom>
+          <a:solidFill>
+            <a:srgbClr val="F4EEE8"/>
+          </a:solidFill>
+          <a:ln/>
+        </p:spPr>
+      </p:sp>
+      <p:sp>
+        <p:nvSpPr>
+          <p:cNvPr id="5" name="Text 3"/>
+          <p:cNvSpPr/>
+          <p:nvPr/>
+        </p:nvSpPr>
+        <p:spPr>
+          <a:xfrm>
+            <a:off x="1005840" y="2240280"/>
+            <a:ext cx="4206240" cy="822960"/>
+          </a:xfrm>
+          <a:prstGeom prst="rect">
+            <a:avLst/>
+          </a:prstGeom>
+          <a:noFill/>
+          <a:ln/>
+        </p:spPr>
+        <p:txBody>
+          <a:bodyPr wrap="square" lIns="0" tIns="0" rIns="0" bIns="0" rtlCol="0" anchor="ctr"/>
+          <a:lstStyle/>
+          <a:p>
+            <a:pPr indent="0" marL="0">
+              <a:buNone/>
+            </a:pPr>
+            <a:r>
+              <a:rPr lang="en-US" sz="1900" b="1" dirty="0">
+                <a:solidFill>
+                  <a:srgbClr val="3F6F5F"/>
+                </a:solidFill>
+                <a:latin typeface="Cambria" pitchFamily="34" charset="0"/>
+                <a:ea typeface="Cambria" pitchFamily="34" charset="-122"/>
+                <a:cs typeface="Cambria" pitchFamily="34" charset="-120"/>
+              </a:rPr>
+              <a:t>a file in your Drive folder</a:t>
+            </a:r>
+            <a:endParaRPr lang="en-US" sz="1900" dirty="0"/>
+          </a:p>
+        </p:txBody>
+      </p:sp>
+      <p:sp>
+        <p:nvSpPr>
+          <p:cNvPr id="6" name="Text 4"/>
+          <p:cNvSpPr/>
+          <p:nvPr/>
+        </p:nvSpPr>
+        <p:spPr>
+          <a:xfrm>
+            <a:off x="5394960" y="2240280"/>
+            <a:ext cx="5760720" cy="822960"/>
+          </a:xfrm>
+          <a:prstGeom prst="rect">
+            <a:avLst/>
+          </a:prstGeom>
+          <a:noFill/>
+          <a:ln/>
+        </p:spPr>
+        <p:txBody>
+          <a:bodyPr wrap="square" lIns="0" tIns="0" rIns="0" bIns="0" rtlCol="0" anchor="ctr"/>
+          <a:lstStyle/>
+          <a:p>
+            <a:pPr indent="0" marL="0">
+              <a:buNone/>
+            </a:pPr>
+            <a:r>
+              <a:rPr lang="en-US" sz="1400" dirty="0">
+                <a:solidFill>
+                  <a:srgbClr val="1A1A1A"/>
+                </a:solidFill>
+                <a:latin typeface="Calibri" pitchFamily="34" charset="0"/>
+                <a:ea typeface="Calibri" pitchFamily="34" charset="-122"/>
+                <a:cs typeface="Calibri" pitchFamily="34" charset="-120"/>
+              </a:rPr>
+              <a:t>Week 5 starts from it. Colab forgets everything else.</a:t>
+            </a:r>
+            <a:endParaRPr lang="en-US" sz="1400" dirty="0"/>
+          </a:p>
+        </p:txBody>
+      </p:sp>
+      <p:sp>
+        <p:nvSpPr>
+          <p:cNvPr id="7" name="Shape 5"/>
+          <p:cNvSpPr/>
+          <p:nvPr/>
+        </p:nvSpPr>
+        <p:spPr>
+          <a:xfrm>
+            <a:off x="640080" y="3383280"/>
+            <a:ext cx="10881360" cy="1097280"/>
+          </a:xfrm>
+          <a:prstGeom prst="roundRect">
+            <a:avLst>
+              <a:gd name="adj" fmla="val 8333"/>
+            </a:avLst>
+          </a:prstGeom>
+          <a:solidFill>
+            <a:srgbClr val="F4EEE8"/>
+          </a:solidFill>
+          <a:ln/>
+        </p:spPr>
+      </p:sp>
+      <p:sp>
+        <p:nvSpPr>
+          <p:cNvPr id="8" name="Text 6"/>
+          <p:cNvSpPr/>
+          <p:nvPr/>
+        </p:nvSpPr>
+        <p:spPr>
+          <a:xfrm>
+            <a:off x="1005840" y="3520440"/>
+            <a:ext cx="4206240" cy="822960"/>
+          </a:xfrm>
+          <a:prstGeom prst="rect">
+            <a:avLst/>
+          </a:prstGeom>
+          <a:noFill/>
+          <a:ln/>
+        </p:spPr>
+        <p:txBody>
+          <a:bodyPr wrap="square" lIns="0" tIns="0" rIns="0" bIns="0" rtlCol="0" anchor="ctr"/>
+          <a:lstStyle/>
+          <a:p>
+            <a:pPr indent="0" marL="0">
+              <a:buNone/>
+            </a:pPr>
+            <a:r>
+              <a:rPr lang="en-US" sz="1900" b="1" dirty="0">
+                <a:solidFill>
+                  <a:srgbClr val="2E5F8A"/>
+                </a:solidFill>
+                <a:latin typeface="Cambria" pitchFamily="34" charset="0"/>
+                <a:ea typeface="Cambria" pitchFamily="34" charset="-122"/>
+                <a:cs typeface="Cambria" pitchFamily="34" charset="-120"/>
+              </a:rPr>
+              <a:t>a repo with Pages switched on</a:t>
+            </a:r>
+            <a:endParaRPr lang="en-US" sz="1900" dirty="0"/>
+          </a:p>
+        </p:txBody>
+      </p:sp>
+      <p:sp>
+        <p:nvSpPr>
+          <p:cNvPr id="9" name="Text 7"/>
+          <p:cNvSpPr/>
+          <p:nvPr/>
+        </p:nvSpPr>
+        <p:spPr>
+          <a:xfrm>
+            <a:off x="5394960" y="3520440"/>
+            <a:ext cx="5760720" cy="822960"/>
+          </a:xfrm>
+          <a:prstGeom prst="rect">
+            <a:avLst/>
+          </a:prstGeom>
+          <a:noFill/>
+          <a:ln/>
+        </p:spPr>
+        <p:txBody>
+          <a:bodyPr wrap="square" lIns="0" tIns="0" rIns="0" bIns="0" rtlCol="0" anchor="ctr"/>
+          <a:lstStyle/>
+          <a:p>
+            <a:pPr indent="0" marL="0">
+              <a:buNone/>
+            </a:pPr>
+            <a:r>
+              <a:rPr lang="en-US" sz="1400" dirty="0">
+                <a:solidFill>
+                  <a:srgbClr val="1A1A1A"/>
+                </a:solidFill>
+                <a:latin typeface="Calibri" pitchFamily="34" charset="0"/>
+                <a:ea typeface="Calibri" pitchFamily="34" charset="-122"/>
+                <a:cs typeface="Calibri" pitchFamily="34" charset="-120"/>
+              </a:rPr>
+              <a:t>so a live URL exists today, not in Week 9 under deadline.</a:t>
+            </a:r>
+            <a:endParaRPr lang="en-US" sz="1400" dirty="0"/>
+          </a:p>
+        </p:txBody>
+      </p:sp>
+      <p:sp>
+        <p:nvSpPr>
+          <p:cNvPr id="10" name="Shape 8"/>
+          <p:cNvSpPr/>
+          <p:nvPr/>
+        </p:nvSpPr>
+        <p:spPr>
+          <a:xfrm>
+            <a:off x="640080" y="4663440"/>
+            <a:ext cx="10881360" cy="1097280"/>
+          </a:xfrm>
+          <a:prstGeom prst="roundRect">
+            <a:avLst>
+              <a:gd name="adj" fmla="val 8333"/>
+            </a:avLst>
+          </a:prstGeom>
+          <a:solidFill>
+            <a:srgbClr val="F4EEE8"/>
+          </a:solidFill>
+          <a:ln/>
+        </p:spPr>
+      </p:sp>
+      <p:sp>
+        <p:nvSpPr>
+          <p:cNvPr id="11" name="Text 9"/>
+          <p:cNvSpPr/>
+          <p:nvPr/>
+        </p:nvSpPr>
+        <p:spPr>
+          <a:xfrm>
+            <a:off x="1005840" y="4800600"/>
+            <a:ext cx="4206240" cy="822960"/>
+          </a:xfrm>
+          <a:prstGeom prst="rect">
+            <a:avLst/>
+          </a:prstGeom>
+          <a:noFill/>
+          <a:ln/>
+        </p:spPr>
+        <p:txBody>
+          <a:bodyPr wrap="square" lIns="0" tIns="0" rIns="0" bIns="0" rtlCol="0" anchor="ctr"/>
+          <a:lstStyle/>
+          <a:p>
+            <a:pPr indent="0" marL="0">
+              <a:buNone/>
+            </a:pPr>
+            <a:r>
+              <a:rPr lang="en-US" sz="1900" b="1" dirty="0">
+                <a:solidFill>
+                  <a:srgbClr val="7A3B2E"/>
+                </a:solidFill>
+                <a:latin typeface="Cambria" pitchFamily="34" charset="0"/>
+                <a:ea typeface="Cambria" pitchFamily="34" charset="-122"/>
+                <a:cs typeface="Cambria" pitchFamily="34" charset="-120"/>
+              </a:rPr>
+              <a:t>two minutes of pitch, to a partner</a:t>
+            </a:r>
+            <a:endParaRPr lang="en-US" sz="1900" dirty="0"/>
+          </a:p>
+        </p:txBody>
+      </p:sp>
+      <p:sp>
+        <p:nvSpPr>
+          <p:cNvPr id="12" name="Text 10"/>
+          <p:cNvSpPr/>
+          <p:nvPr/>
+        </p:nvSpPr>
+        <p:spPr>
+          <a:xfrm>
+            <a:off x="5394960" y="4800600"/>
+            <a:ext cx="5760720" cy="822960"/>
+          </a:xfrm>
+          <a:prstGeom prst="rect">
+            <a:avLst/>
+          </a:prstGeom>
+          <a:noFill/>
+          <a:ln/>
+        </p:spPr>
+        <p:txBody>
+          <a:bodyPr wrap="square" lIns="0" tIns="0" rIns="0" bIns="0" rtlCol="0" anchor="ctr"/>
+          <a:lstStyle/>
+          <a:p>
+            <a:pPr indent="0" marL="0">
+              <a:buNone/>
+            </a:pPr>
+            <a:r>
+              <a:rPr lang="en-US" sz="1400" dirty="0">
+                <a:solidFill>
+                  <a:srgbClr val="1A1A1A"/>
+                </a:solidFill>
+                <a:latin typeface="Calibri" pitchFamily="34" charset="0"/>
+                <a:ea typeface="Calibri" pitchFamily="34" charset="-122"/>
+                <a:cs typeface="Calibri" pitchFamily="34" charset="-120"/>
+              </a:rPr>
+              <a:t>corpus, two methods, what would count as a finding.</a:t>
+            </a:r>
+            <a:endParaRPr lang="en-US" sz="1400" dirty="0"/>
+          </a:p>
+        </p:txBody>
+      </p:sp>
+      <p:sp>
+        <p:nvSpPr>
+          <p:cNvPr id="13" name="Text 11"/>
+          <p:cNvSpPr/>
+          <p:nvPr/>
+        </p:nvSpPr>
+        <p:spPr>
+          <a:xfrm>
+            <a:off x="640080" y="6263640"/>
+            <a:ext cx="10881360" cy="365760"/>
+          </a:xfrm>
+          <a:prstGeom prst="rect">
+            <a:avLst/>
+          </a:prstGeom>
+          <a:noFill/>
+          <a:ln/>
+        </p:spPr>
+        <p:txBody>
+          <a:bodyPr wrap="square" rtlCol="0" anchor="ctr"/>
+          <a:lstStyle/>
+          <a:p>
+            <a:pPr indent="0" marL="0">
+              <a:buNone/>
+            </a:pPr>
+            <a:r>
+              <a:rPr lang="en-US" sz="1100" i="1" dirty="0">
+                <a:solidFill>
+                  <a:srgbClr val="6B6B63"/>
+                </a:solidFill>
+                <a:latin typeface="Calibri" pitchFamily="34" charset="0"/>
+                <a:ea typeface="Calibri" pitchFamily="34" charset="-122"/>
+                <a:cs typeface="Calibri" pitchFamily="34" charset="-120"/>
+              </a:rPr>
+              <a:t>A null result, honestly shown, is a complete project. The pivot kit is insurance, not a demotion.</a:t>
+            </a:r>
+            <a:endParaRPr lang="en-US" sz="1100" dirty="0"/>
+          </a:p>
+        </p:txBody>
+      </p:sp>
+    </p:spTree>
+  </p:cSld>
+  <p:clrMapOvr>
+    <a:masterClrMapping/>
+  </p:clrMapOvr>
+</p:sld>
+</file>
+
+<file path=ppt/slides/slide22.xml><?xml version="1.0" encoding="utf-8"?>
+<p:sld xmlns:a="http://schemas.openxmlformats.org/drawingml/2006/main" xmlns:r="http://schemas.openxmlformats.org/officeDocument/2006/relationships" xmlns:p="http://schemas.openxmlformats.org/presentationml/2006/main">
+  <p:cSld name="Slide 22">
+    <p:bg>
+      <p:bgPr>
+        <a:solidFill>
+          <a:srgbClr val="4E261D"/>
+        </a:solidFill>
+      </p:bgPr>
+    </p:bg>
+    <p:spTree>
+      <p:nvGrpSpPr>
+        <p:cNvPr id="1" name=""/>
+        <p:cNvGrpSpPr/>
+        <p:nvPr/>
+      </p:nvGrpSpPr>
+      <p:grpSpPr>
+        <a:xfrm>
+          <a:off x="0" y="0"/>
+          <a:ext cx="0" cy="0"/>
+          <a:chOff x="0" y="0"/>
+          <a:chExt cx="0" cy="0"/>
+        </a:xfrm>
+      </p:grpSpPr>
+      <p:sp>
+        <p:nvSpPr>
+          <p:cNvPr id="2" name="Text 0"/>
+          <p:cNvSpPr/>
+          <p:nvPr/>
+        </p:nvSpPr>
+        <p:spPr>
+          <a:xfrm>
+            <a:off x="640080" y="502920"/>
+            <a:ext cx="10515600" cy="320040"/>
+          </a:xfrm>
+          <a:prstGeom prst="rect">
+            <a:avLst/>
+          </a:prstGeom>
+          <a:noFill/>
+          <a:ln/>
+        </p:spPr>
+        <p:txBody>
+          <a:bodyPr wrap="square" rtlCol="0" anchor="ctr"/>
+          <a:lstStyle/>
+          <a:p>
+            <a:pPr indent="0" marL="0">
+              <a:buNone/>
+            </a:pPr>
+            <a:r>
+              <a:rPr lang="en-US" sz="1300" b="1" spc="300" kern="0" dirty="0">
+                <a:solidFill>
+                  <a:srgbClr val="B9852F"/>
+                </a:solidFill>
+                <a:latin typeface="Calibri" pitchFamily="34" charset="0"/>
+                <a:ea typeface="Calibri" pitchFamily="34" charset="-122"/>
+                <a:cs typeface="Calibri" pitchFamily="34" charset="-120"/>
+              </a:rPr>
+              <a:t>BEFORE WEEK 5</a:t>
+            </a:r>
+            <a:endParaRPr lang="en-US" sz="1300" dirty="0"/>
+          </a:p>
+        </p:txBody>
+      </p:sp>
+      <p:sp>
+        <p:nvSpPr>
+          <p:cNvPr id="3" name="Text 1"/>
+          <p:cNvSpPr/>
+          <p:nvPr/>
+        </p:nvSpPr>
+        <p:spPr>
+          <a:xfrm>
+            <a:off x="640080" y="914400"/>
+            <a:ext cx="10058400" cy="731520"/>
+          </a:xfrm>
+          <a:prstGeom prst="rect">
+            <a:avLst/>
+          </a:prstGeom>
+          <a:noFill/>
+          <a:ln/>
+        </p:spPr>
+        <p:txBody>
+          <a:bodyPr wrap="square" rtlCol="0" anchor="ctr"/>
+          <a:lstStyle/>
+          <a:p>
+            <a:pPr indent="0" marL="0">
+              <a:buNone/>
+            </a:pPr>
+            <a:r>
+              <a:rPr lang="en-US" sz="3400" b="1" dirty="0">
+                <a:solidFill>
+                  <a:srgbClr val="FFFFFF"/>
+                </a:solidFill>
+                <a:latin typeface="Cambria" pitchFamily="34" charset="0"/>
+                <a:ea typeface="Cambria" pitchFamily="34" charset="-122"/>
+                <a:cs typeface="Cambria" pitchFamily="34" charset="-120"/>
+              </a:rPr>
+              <a:t>Homework</a:t>
+            </a:r>
+            <a:endParaRPr lang="en-US" sz="3400" dirty="0"/>
+          </a:p>
+        </p:txBody>
+      </p:sp>
+      <p:sp>
+        <p:nvSpPr>
+          <p:cNvPr id="4" name="Shape 2"/>
+          <p:cNvSpPr/>
+          <p:nvPr/>
+        </p:nvSpPr>
+        <p:spPr>
+          <a:xfrm>
+            <a:off x="640080" y="2057400"/>
+            <a:ext cx="219456" cy="219456"/>
+          </a:xfrm>
+          <a:prstGeom prst="ellipse">
+            <a:avLst/>
+          </a:prstGeom>
+          <a:solidFill>
+            <a:srgbClr val="B9852F"/>
+          </a:solidFill>
+          <a:ln/>
+        </p:spPr>
+      </p:sp>
+      <p:sp>
+        <p:nvSpPr>
+          <p:cNvPr id="5" name="Text 3"/>
+          <p:cNvSpPr/>
+          <p:nvPr/>
+        </p:nvSpPr>
+        <p:spPr>
+          <a:xfrm>
+            <a:off x="1051560" y="1920240"/>
+            <a:ext cx="10058400" cy="365760"/>
+          </a:xfrm>
+          <a:prstGeom prst="rect">
+            <a:avLst/>
+          </a:prstGeom>
+          <a:noFill/>
+          <a:ln/>
+        </p:spPr>
+        <p:txBody>
+          <a:bodyPr wrap="square" lIns="0" tIns="0" rIns="0" bIns="0" rtlCol="0" anchor="ctr"/>
+          <a:lstStyle/>
+          <a:p>
+            <a:pPr indent="0" marL="0">
+              <a:buNone/>
+            </a:pPr>
+            <a:r>
+              <a:rPr lang="en-US" sz="1500" b="1" dirty="0">
+                <a:solidFill>
+                  <a:srgbClr val="B9852F"/>
+                </a:solidFill>
+                <a:latin typeface="Calibri" pitchFamily="34" charset="0"/>
+                <a:ea typeface="Calibri" pitchFamily="34" charset="-122"/>
+                <a:cs typeface="Calibri" pitchFamily="34" charset="-120"/>
+              </a:rPr>
+              <a:t>Data Biography</a:t>
+            </a:r>
+            <a:endParaRPr lang="en-US" sz="1500" dirty="0"/>
+          </a:p>
+        </p:txBody>
+      </p:sp>
+      <p:sp>
+        <p:nvSpPr>
+          <p:cNvPr id="6" name="Text 4"/>
+          <p:cNvSpPr/>
+          <p:nvPr/>
+        </p:nvSpPr>
+        <p:spPr>
+          <a:xfrm>
+            <a:off x="1051560" y="2286000"/>
+            <a:ext cx="9875520" cy="868680"/>
+          </a:xfrm>
+          <a:prstGeom prst="rect">
+            <a:avLst/>
+          </a:prstGeom>
+          <a:noFill/>
+          <a:ln/>
+        </p:spPr>
+        <p:txBody>
+          <a:bodyPr wrap="square" lIns="0" tIns="0" rIns="0" bIns="0" rtlCol="0" anchor="t"/>
+          <a:lstStyle/>
+          <a:p>
+            <a:pPr indent="0" marL="0">
+              <a:buNone/>
+            </a:pPr>
+            <a:r>
+              <a:rPr lang="en-US" sz="1400" dirty="0">
+                <a:solidFill>
+                  <a:srgbClr val="E8DCD6"/>
+                </a:solidFill>
+                <a:latin typeface="Calibri" pitchFamily="34" charset="0"/>
+                <a:ea typeface="Calibri" pitchFamily="34" charset="-122"/>
+                <a:cs typeface="Calibri" pitchFamily="34" charset="-120"/>
+              </a:rPr>
+              <a:t>~400 words: where it came from, who is in it, who is missing, what it cannot tell you.</a:t>
+            </a:r>
+            <a:endParaRPr lang="en-US" sz="1400" dirty="0"/>
+          </a:p>
+        </p:txBody>
+      </p:sp>
+      <p:sp>
+        <p:nvSpPr>
+          <p:cNvPr id="7" name="Shape 5"/>
+          <p:cNvSpPr/>
+          <p:nvPr/>
+        </p:nvSpPr>
+        <p:spPr>
+          <a:xfrm>
+            <a:off x="640080" y="3383280"/>
+            <a:ext cx="219456" cy="219456"/>
+          </a:xfrm>
+          <a:prstGeom prst="ellipse">
+            <a:avLst/>
+          </a:prstGeom>
+          <a:solidFill>
+            <a:srgbClr val="3F6F5F"/>
+          </a:solidFill>
+          <a:ln/>
+        </p:spPr>
+      </p:sp>
+      <p:sp>
+        <p:nvSpPr>
+          <p:cNvPr id="8" name="Text 6"/>
+          <p:cNvSpPr/>
+          <p:nvPr/>
+        </p:nvSpPr>
+        <p:spPr>
+          <a:xfrm>
+            <a:off x="1051560" y="3246120"/>
+            <a:ext cx="10058400" cy="365760"/>
+          </a:xfrm>
+          <a:prstGeom prst="rect">
+            <a:avLst/>
+          </a:prstGeom>
+          <a:noFill/>
+          <a:ln/>
+        </p:spPr>
+        <p:txBody>
+          <a:bodyPr wrap="square" lIns="0" tIns="0" rIns="0" bIns="0" rtlCol="0" anchor="ctr"/>
+          <a:lstStyle/>
+          <a:p>
+            <a:pPr indent="0" marL="0">
+              <a:buNone/>
+            </a:pPr>
+            <a:r>
+              <a:rPr lang="en-US" sz="1500" b="1" dirty="0">
+                <a:solidFill>
+                  <a:srgbClr val="3F6F5F"/>
+                </a:solidFill>
+                <a:latin typeface="Calibri" pitchFamily="34" charset="0"/>
+                <a:ea typeface="Calibri" pitchFamily="34" charset="-122"/>
+                <a:cs typeface="Calibri" pitchFamily="34" charset="-120"/>
+              </a:rPr>
+              <a:t>Collect it for real</a:t>
+            </a:r>
+            <a:endParaRPr lang="en-US" sz="1500" dirty="0"/>
+          </a:p>
+        </p:txBody>
+      </p:sp>
+      <p:sp>
+        <p:nvSpPr>
+          <p:cNvPr id="9" name="Text 7"/>
+          <p:cNvSpPr/>
+          <p:nvPr/>
+        </p:nvSpPr>
+        <p:spPr>
+          <a:xfrm>
+            <a:off x="1051560" y="3611880"/>
+            <a:ext cx="9875520" cy="868680"/>
+          </a:xfrm>
+          <a:prstGeom prst="rect">
+            <a:avLst/>
+          </a:prstGeom>
+          <a:noFill/>
+          <a:ln/>
+        </p:spPr>
+        <p:txBody>
+          <a:bodyPr wrap="square" lIns="0" tIns="0" rIns="0" bIns="0" rtlCol="0" anchor="t"/>
+          <a:lstStyle/>
+          <a:p>
+            <a:pPr indent="0" marL="0">
+              <a:buNone/>
+            </a:pPr>
+            <a:r>
+              <a:rPr lang="en-US" sz="1400" dirty="0">
+                <a:solidFill>
+                  <a:srgbClr val="E8DCD6"/>
+                </a:solidFill>
+                <a:latin typeface="Calibri" pitchFamily="34" charset="0"/>
+                <a:ea typeface="Calibri" pitchFamily="34" charset="-122"/>
+                <a:cs typeface="Calibri" pitchFamily="34" charset="-120"/>
+              </a:rPr>
+              <a:t>The cookbook notebook, and leave the file in Drive. Week 5 begins there.</a:t>
+            </a:r>
+            <a:endParaRPr lang="en-US" sz="1400" dirty="0"/>
+          </a:p>
+        </p:txBody>
+      </p:sp>
+      <p:sp>
+        <p:nvSpPr>
+          <p:cNvPr id="10" name="Shape 8"/>
+          <p:cNvSpPr/>
+          <p:nvPr/>
+        </p:nvSpPr>
+        <p:spPr>
+          <a:xfrm>
+            <a:off x="640080" y="4709160"/>
+            <a:ext cx="219456" cy="219456"/>
+          </a:xfrm>
+          <a:prstGeom prst="ellipse">
+            <a:avLst/>
+          </a:prstGeom>
+          <a:solidFill>
+            <a:srgbClr val="E8DCD6"/>
+          </a:solidFill>
+          <a:ln/>
+        </p:spPr>
+      </p:sp>
+      <p:sp>
+        <p:nvSpPr>
+          <p:cNvPr id="11" name="Text 9"/>
+          <p:cNvSpPr/>
+          <p:nvPr/>
+        </p:nvSpPr>
+        <p:spPr>
+          <a:xfrm>
+            <a:off x="1051560" y="4572000"/>
+            <a:ext cx="10058400" cy="365760"/>
+          </a:xfrm>
+          <a:prstGeom prst="rect">
+            <a:avLst/>
+          </a:prstGeom>
+          <a:noFill/>
+          <a:ln/>
+        </p:spPr>
+        <p:txBody>
+          <a:bodyPr wrap="square" lIns="0" tIns="0" rIns="0" bIns="0" rtlCol="0" anchor="ctr"/>
+          <a:lstStyle/>
+          <a:p>
+            <a:pPr indent="0" marL="0">
+              <a:buNone/>
+            </a:pPr>
+            <a:r>
+              <a:rPr lang="en-US" sz="1500" b="1" dirty="0">
+                <a:solidFill>
+                  <a:srgbClr val="E8DCD6"/>
+                </a:solidFill>
+                <a:latin typeface="Calibri" pitchFamily="34" charset="0"/>
+                <a:ea typeface="Calibri" pitchFamily="34" charset="-122"/>
+                <a:cs typeface="Calibri" pitchFamily="34" charset="-120"/>
+              </a:rPr>
+              <a:t>Play with the map</a:t>
+            </a:r>
+            <a:endParaRPr lang="en-US" sz="1500" dirty="0"/>
+          </a:p>
+        </p:txBody>
+      </p:sp>
+      <p:sp>
+        <p:nvSpPr>
+          <p:cNvPr id="12" name="Text 10"/>
+          <p:cNvSpPr/>
+          <p:nvPr/>
+        </p:nvSpPr>
+        <p:spPr>
+          <a:xfrm>
+            <a:off x="1051560" y="4937760"/>
+            <a:ext cx="9875520" cy="868680"/>
+          </a:xfrm>
+          <a:prstGeom prst="rect">
+            <a:avLst/>
+          </a:prstGeom>
+          <a:noFill/>
+          <a:ln/>
+        </p:spPr>
+        <p:txBody>
+          <a:bodyPr wrap="square" lIns="0" tIns="0" rIns="0" bIns="0" rtlCol="0" anchor="t"/>
+          <a:lstStyle/>
+          <a:p>
+            <a:pPr indent="0" marL="0">
+              <a:buNone/>
+            </a:pPr>
+            <a:r>
+              <a:rPr lang="en-US" sz="1400" dirty="0">
+                <a:solidFill>
+                  <a:srgbClr val="E8DCD6"/>
+                </a:solidFill>
+                <a:latin typeface="Calibri" pitchFamily="34" charset="0"/>
+                <a:ea typeface="Calibri" pitchFamily="34" charset="-122"/>
+                <a:cs typeface="Calibri" pitchFamily="34" charset="-120"/>
+              </a:rPr>
+              <a:t>Embedding Projector: a word from your corpus, one neighbour that makes sense and one that does not.</a:t>
+            </a:r>
+            <a:endParaRPr lang="en-US" sz="1400" dirty="0"/>
+          </a:p>
+        </p:txBody>
+      </p:sp>
+      <p:sp>
+        <p:nvSpPr>
+          <p:cNvPr id="13" name="Text 11"/>
+          <p:cNvSpPr/>
+          <p:nvPr/>
+        </p:nvSpPr>
+        <p:spPr>
+          <a:xfrm>
+            <a:off x="640080" y="6035040"/>
+            <a:ext cx="10881360" cy="457200"/>
+          </a:xfrm>
+          <a:prstGeom prst="rect">
+            <a:avLst/>
+          </a:prstGeom>
+          <a:noFill/>
+          <a:ln/>
+        </p:spPr>
+        <p:txBody>
+          <a:bodyPr wrap="square" rtlCol="0" anchor="ctr"/>
+          <a:lstStyle/>
+          <a:p>
+            <a:pPr indent="0" marL="0">
+              <a:buNone/>
+            </a:pPr>
+            <a:r>
+              <a:rPr lang="en-US" sz="1300" i="1" dirty="0">
+                <a:solidFill>
+                  <a:srgbClr val="B9852F"/>
+                </a:solidFill>
+                <a:latin typeface="Calibri" pitchFamily="34" charset="0"/>
+                <a:ea typeface="Calibri" pitchFamily="34" charset="-122"/>
+                <a:cs typeface="Calibri" pitchFamily="34" charset="-120"/>
+              </a:rPr>
+              <a:t>Next week: embeddings on YOUR corpus, all session. Bring the file.</a:t>
+            </a:r>
+            <a:endParaRPr lang="en-US" sz="1300" dirty="0"/>
+          </a:p>
+        </p:txBody>
+      </p:sp>
+    </p:spTree>
+  </p:cSld>
+  <p:clrMapOvr>
+    <a:masterClrMapping/>
+  </p:clrMapOvr>
+</p:sld>
+</file>
+
 <file path=ppt/slides/slide3.xml><?xml version="1.0" encoding="utf-8"?>
 <p:sld xmlns:a="http://schemas.openxmlformats.org/drawingml/2006/main" xmlns:r="http://schemas.openxmlformats.org/officeDocument/2006/relationships" xmlns:p="http://schemas.openxmlformats.org/presentationml/2006/main">
   <p:cSld name="Slide 3">
@@ -7830,7 +8170,7 @@
                 <a:ea typeface="Calibri" pitchFamily="34" charset="-122"/>
                 <a:cs typeface="Calibri" pitchFamily="34" charset="-120"/>
               </a:rPr>
-              <a:t>LOOK AT THIS</a:t>
+              <a:t>LOOK AT THIS · THIS WEEK'S READING</a:t>
             </a:r>
             <a:endParaRPr lang="en-US" sz="1300" dirty="0"/>
           </a:p>
@@ -7869,351 +8209,110 @@
                 <a:ea typeface="Cambria" pitchFamily="34" charset="-122"/>
                 <a:cs typeface="Cambria" pitchFamily="34" charset="-120"/>
               </a:rPr>
-              <a:t>A century of stereotypes, measured as distance</a:t>
+              <a:t>A century, measured as distance</a:t>
             </a:r>
             <a:endParaRPr lang="en-US" sz="3400" dirty="0"/>
           </a:p>
         </p:txBody>
       </p:sp>
-      <p:sp>
-        <p:nvSpPr>
-          <p:cNvPr id="4" name="Text 2"/>
-          <p:cNvSpPr/>
-          <p:nvPr/>
-        </p:nvSpPr>
-        <p:spPr>
-          <a:xfrm>
-            <a:off x="640080" y="2011680"/>
-            <a:ext cx="5303520" cy="4023360"/>
-          </a:xfrm>
-          <a:prstGeom prst="rect">
-            <a:avLst/>
-          </a:prstGeom>
-          <a:noFill/>
-          <a:ln/>
-        </p:spPr>
-        <p:txBody>
-          <a:bodyPr wrap="square" rtlCol="0" anchor="t"/>
-          <a:lstStyle/>
-          <a:p>
-            <a:pPr marL="152400" indent="-152400">
-              <a:lnSpc>
-                <a:spcPct val="115000"/>
-              </a:lnSpc>
-              <a:spcAft>
-                <a:spcPts val="1000"/>
-              </a:spcAft>
-              <a:buSzPct val="100000"/>
-              <a:buChar char="•"/>
-            </a:pPr>
-            <a:r>
-              <a:rPr lang="en-US" sz="1500" dirty="0">
+      <p:pic>
+        <p:nvPicPr>
+          <p:cNvPr id="4" name="Image 0" descr="/tmp/figs/w4_paper_time.png">    </p:cNvPr>
+          <p:cNvPicPr>
+            <a:picLocks noChangeAspect="1"/>
+          </p:cNvPicPr>
+          <p:nvPr/>
+        </p:nvPicPr>
+        <p:blipFill>
+          <a:blip r:embed="rId1"/>
+          <a:srcRect l="0" r="0" t="0" b="0"/>
+          <a:stretch/>
+        </p:blipFill>
+        <p:spPr>
+          <a:xfrm>
+            <a:off x="1737360" y="1737360"/>
+            <a:ext cx="8778240" cy="4023360"/>
+          </a:xfrm>
+          <a:prstGeom prst="rect">
+            <a:avLst/>
+          </a:prstGeom>
+        </p:spPr>
+      </p:pic>
+      <p:sp>
+        <p:nvSpPr>
+          <p:cNvPr id="5" name="Text 2"/>
+          <p:cNvSpPr/>
+          <p:nvPr/>
+        </p:nvSpPr>
+        <p:spPr>
+          <a:xfrm>
+            <a:off x="640080" y="5897880"/>
+            <a:ext cx="10881360" cy="411480"/>
+          </a:xfrm>
+          <a:prstGeom prst="rect">
+            <a:avLst/>
+          </a:prstGeom>
+          <a:noFill/>
+          <a:ln/>
+        </p:spPr>
+        <p:txBody>
+          <a:bodyPr wrap="square" rtlCol="0" anchor="ctr"/>
+          <a:lstStyle/>
+          <a:p>
+            <a:pPr indent="0" marL="0">
+              <a:buNone/>
+            </a:pPr>
+            <a:r>
+              <a:rPr lang="en-US" sz="1600" i="1" dirty="0">
                 <a:solidFill>
                   <a:srgbClr val="1A1A1A"/>
+                </a:solidFill>
+                <a:latin typeface="Cambria" pitchFamily="34" charset="0"/>
+                <a:ea typeface="Cambria" pitchFamily="34" charset="-122"/>
+                <a:cs typeface="Cambria" pitchFamily="34" charset="-120"/>
+              </a:rPr>
+              <a:t>Blue: how far occupation words sit from she-words versus he-words, decade by decade. Green: the share of women actually in those jobs.</a:t>
+            </a:r>
+            <a:endParaRPr lang="en-US" sz="1600" dirty="0"/>
+          </a:p>
+        </p:txBody>
+      </p:sp>
+      <p:sp>
+        <p:nvSpPr>
+          <p:cNvPr id="6" name="Text 3"/>
+          <p:cNvSpPr/>
+          <p:nvPr/>
+        </p:nvSpPr>
+        <p:spPr>
+          <a:xfrm>
+            <a:off x="640080" y="6355080"/>
+            <a:ext cx="10881360" cy="320040"/>
+          </a:xfrm>
+          <a:prstGeom prst="rect">
+            <a:avLst/>
+          </a:prstGeom>
+          <a:noFill/>
+          <a:ln/>
+        </p:spPr>
+        <p:txBody>
+          <a:bodyPr wrap="square" rtlCol="0" anchor="ctr"/>
+          <a:lstStyle/>
+          <a:p>
+            <a:pPr indent="0" marL="0">
+              <a:buNone/>
+            </a:pPr>
+            <a:r>
+              <a:rPr lang="en-US" sz="1000" dirty="0">
+                <a:solidFill>
+                  <a:srgbClr val="6B6B63"/>
                 </a:solidFill>
                 <a:latin typeface="Calibri" pitchFamily="34" charset="0"/>
                 <a:ea typeface="Calibri" pitchFamily="34" charset="-122"/>
                 <a:cs typeface="Calibri" pitchFamily="34" charset="-120"/>
               </a:rPr>
-              <a:t>Garg, Schiebinger, Jurafsky and Zou (PNAS 2018): train word vectors on each decade of American text from 1910 on.</a:t>
-            </a:r>
-            <a:endParaRPr lang="en-US" sz="1500" dirty="0"/>
-          </a:p>
-          <a:p>
-            <a:pPr marL="152400" indent="-152400">
-              <a:lnSpc>
-                <a:spcPct val="115000"/>
-              </a:lnSpc>
-              <a:spcAft>
-                <a:spcPts val="1000"/>
-              </a:spcAft>
-              <a:buSzPct val="100000"/>
-              <a:buChar char="•"/>
-            </a:pPr>
-            <a:r>
-              <a:rPr lang="en-US" sz="1500" dirty="0">
-                <a:solidFill>
-                  <a:srgbClr val="1A1A1A"/>
-                </a:solidFill>
-                <a:latin typeface="Calibri" pitchFamily="34" charset="0"/>
-                <a:ea typeface="Calibri" pitchFamily="34" charset="-122"/>
-                <a:cs typeface="Calibri" pitchFamily="34" charset="-120"/>
-              </a:rPr>
-              <a:t>The measure: how far do occupation words sit from woman-words versus man-words, decade by decade?</a:t>
-            </a:r>
-            <a:endParaRPr lang="en-US" sz="1500" dirty="0"/>
-          </a:p>
-          <a:p>
-            <a:pPr marL="152400" indent="-152400">
-              <a:lnSpc>
-                <a:spcPct val="115000"/>
-              </a:lnSpc>
-              <a:spcAft>
-                <a:spcPts val="1000"/>
-              </a:spcAft>
-              <a:buSzPct val="100000"/>
-              <a:buChar char="•"/>
-            </a:pPr>
-            <a:r>
-              <a:rPr lang="en-US" sz="1500" dirty="0">
-                <a:solidFill>
-                  <a:srgbClr val="1A1A1A"/>
-                </a:solidFill>
-                <a:latin typeface="Calibri" pitchFamily="34" charset="0"/>
-                <a:ea typeface="Calibri" pitchFamily="34" charset="-122"/>
-                <a:cs typeface="Calibri" pitchFamily="34" charset="-120"/>
-              </a:rPr>
-              <a:t>The curve tracks the century - and lines up with census and survey data, which is what makes it evidence rather than a demo.</a:t>
-            </a:r>
-            <a:endParaRPr lang="en-US" sz="1500" dirty="0"/>
-          </a:p>
-          <a:p>
-            <a:pPr marL="152400" indent="-152400">
-              <a:lnSpc>
-                <a:spcPct val="115000"/>
-              </a:lnSpc>
-              <a:spcAft>
-                <a:spcPts val="1000"/>
-              </a:spcAft>
-              <a:buSzPct val="100000"/>
-              <a:buChar char="•"/>
-            </a:pPr>
-            <a:r>
-              <a:rPr lang="en-US" sz="1500" dirty="0">
-                <a:solidFill>
-                  <a:srgbClr val="1A1A1A"/>
-                </a:solidFill>
-                <a:latin typeface="Calibri" pitchFamily="34" charset="0"/>
-                <a:ea typeface="Calibri" pitchFamily="34" charset="-122"/>
-                <a:cs typeface="Calibri" pitchFamily="34" charset="-120"/>
-              </a:rPr>
-              <a:t>By the end of today you will know exactly what machinery produced that number.</a:t>
-            </a:r>
-            <a:endParaRPr lang="en-US" sz="1500" dirty="0"/>
-          </a:p>
-        </p:txBody>
-      </p:sp>
-      <p:sp>
-        <p:nvSpPr>
-          <p:cNvPr id="5" name="Shape 3"/>
-          <p:cNvSpPr/>
-          <p:nvPr/>
-        </p:nvSpPr>
-        <p:spPr>
-          <a:xfrm>
-            <a:off x="6217920" y="2011680"/>
-            <a:ext cx="5303520" cy="3566160"/>
-          </a:xfrm>
-          <a:prstGeom prst="roundRect">
-            <a:avLst>
-              <a:gd name="adj" fmla="val 2564"/>
-            </a:avLst>
-          </a:prstGeom>
-          <a:solidFill>
-            <a:srgbClr val="F4EEE8"/>
-          </a:solidFill>
-          <a:ln/>
-        </p:spPr>
-      </p:sp>
-      <p:sp>
-        <p:nvSpPr>
-          <p:cNvPr id="6" name="Text 4"/>
-          <p:cNvSpPr/>
-          <p:nvPr/>
-        </p:nvSpPr>
-        <p:spPr>
-          <a:xfrm>
-            <a:off x="6492240" y="2240280"/>
-            <a:ext cx="4754880" cy="320040"/>
-          </a:xfrm>
-          <a:prstGeom prst="rect">
-            <a:avLst/>
-          </a:prstGeom>
-          <a:noFill/>
-          <a:ln/>
-        </p:spPr>
-        <p:txBody>
-          <a:bodyPr wrap="square" rtlCol="0" anchor="ctr"/>
-          <a:lstStyle/>
-          <a:p>
-            <a:pPr indent="0" marL="0">
-              <a:buNone/>
-            </a:pPr>
-            <a:r>
-              <a:rPr lang="en-US" sz="1200" b="1" spc="200" kern="0" dirty="0">
-                <a:solidFill>
-                  <a:srgbClr val="6B6B63"/>
-                </a:solidFill>
-                <a:latin typeface="Calibri" pitchFamily="34" charset="0"/>
-                <a:ea typeface="Calibri" pitchFamily="34" charset="-122"/>
-                <a:cs typeface="Calibri" pitchFamily="34" charset="-120"/>
-              </a:rPr>
-              <a:t>the move, in one line</a:t>
-            </a:r>
-            <a:endParaRPr lang="en-US" sz="1200" dirty="0"/>
-          </a:p>
-        </p:txBody>
-      </p:sp>
-      <p:sp>
-        <p:nvSpPr>
-          <p:cNvPr id="7" name="Text 5"/>
-          <p:cNvSpPr/>
-          <p:nvPr/>
-        </p:nvSpPr>
-        <p:spPr>
-          <a:xfrm>
-            <a:off x="6492240" y="2697480"/>
-            <a:ext cx="4754880" cy="1188720"/>
-          </a:xfrm>
-          <a:prstGeom prst="rect">
-            <a:avLst/>
-          </a:prstGeom>
-          <a:noFill/>
-          <a:ln/>
-        </p:spPr>
-        <p:txBody>
-          <a:bodyPr wrap="square" lIns="0" tIns="0" rIns="0" bIns="0" rtlCol="0" anchor="ctr"/>
-          <a:lstStyle/>
-          <a:p>
-            <a:pPr indent="0" marL="0">
-              <a:lnSpc>
-                <a:spcPct val="120000"/>
-              </a:lnSpc>
-              <a:buNone/>
-            </a:pPr>
-            <a:r>
-              <a:rPr lang="en-US" sz="1400" dirty="0">
-                <a:solidFill>
-                  <a:srgbClr val="1A1A1A"/>
-                </a:solidFill>
-                <a:latin typeface="Courier New" pitchFamily="34" charset="0"/>
-                <a:ea typeface="Courier New" pitchFamily="34" charset="-122"/>
-                <a:cs typeface="Courier New" pitchFamily="34" charset="-120"/>
-              </a:rPr>
-              <a:t>distance( occupation , she-words )</a:t>
-            </a:r>
-            <a:endParaRPr lang="en-US" sz="1400" dirty="0"/>
-          </a:p>
-          <a:p>
-            <a:pPr indent="0" marL="0">
-              <a:lnSpc>
-                <a:spcPct val="120000"/>
-              </a:lnSpc>
-              <a:buNone/>
-            </a:pPr>
-            <a:r>
-              <a:rPr lang="en-US" sz="1400" dirty="0">
-                <a:solidFill>
-                  <a:srgbClr val="1A1A1A"/>
-                </a:solidFill>
-                <a:latin typeface="Courier New" pitchFamily="34" charset="0"/>
-                <a:ea typeface="Courier New" pitchFamily="34" charset="-122"/>
-                <a:cs typeface="Courier New" pitchFamily="34" charset="-120"/>
-              </a:rPr>
-              <a:t>      vs</a:t>
-            </a:r>
-            <a:endParaRPr lang="en-US" sz="1400" dirty="0"/>
-          </a:p>
-          <a:p>
-            <a:pPr indent="0" marL="0">
-              <a:lnSpc>
-                <a:spcPct val="120000"/>
-              </a:lnSpc>
-              <a:buNone/>
-            </a:pPr>
-            <a:r>
-              <a:rPr lang="en-US" sz="1400" dirty="0">
-                <a:solidFill>
-                  <a:srgbClr val="1A1A1A"/>
-                </a:solidFill>
-                <a:latin typeface="Courier New" pitchFamily="34" charset="0"/>
-                <a:ea typeface="Courier New" pitchFamily="34" charset="-122"/>
-                <a:cs typeface="Courier New" pitchFamily="34" charset="-120"/>
-              </a:rPr>
-              <a:t>distance( occupation , he-words )</a:t>
-            </a:r>
-            <a:endParaRPr lang="en-US" sz="1400" dirty="0"/>
-          </a:p>
-        </p:txBody>
-      </p:sp>
-      <p:sp>
-        <p:nvSpPr>
-          <p:cNvPr id="8" name="Text 6"/>
-          <p:cNvSpPr/>
-          <p:nvPr/>
-        </p:nvSpPr>
-        <p:spPr>
-          <a:xfrm>
-            <a:off x="6492240" y="4023360"/>
-            <a:ext cx="4754880" cy="1371600"/>
-          </a:xfrm>
-          <a:prstGeom prst="rect">
-            <a:avLst/>
-          </a:prstGeom>
-          <a:noFill/>
-          <a:ln/>
-        </p:spPr>
-        <p:txBody>
-          <a:bodyPr wrap="square" lIns="0" tIns="0" rIns="0" bIns="0" rtlCol="0" anchor="t"/>
-          <a:lstStyle/>
-          <a:p>
-            <a:pPr indent="0" marL="0">
-              <a:lnSpc>
-                <a:spcPct val="115000"/>
-              </a:lnSpc>
-              <a:buNone/>
-            </a:pPr>
-            <a:r>
-              <a:rPr lang="en-US" sz="1350" dirty="0">
-                <a:solidFill>
-                  <a:srgbClr val="1A1A1A"/>
-                </a:solidFill>
-                <a:latin typeface="Calibri" pitchFamily="34" charset="0"/>
-                <a:ea typeface="Calibri" pitchFamily="34" charset="-122"/>
-                <a:cs typeface="Calibri" pitchFamily="34" charset="-120"/>
-              </a:rPr>
-              <a:t>Nobody labelled anything. The geometry was already there, in a century of printed text, waiting to be measured.</a:t>
-            </a:r>
-            <a:endParaRPr lang="en-US" sz="1350" dirty="0"/>
-          </a:p>
-        </p:txBody>
-      </p:sp>
-      <p:sp>
-        <p:nvSpPr>
-          <p:cNvPr id="9" name="Text 7"/>
-          <p:cNvSpPr/>
-          <p:nvPr/>
-        </p:nvSpPr>
-        <p:spPr>
-          <a:xfrm>
-            <a:off x="640080" y="6263640"/>
-            <a:ext cx="10881360" cy="365760"/>
-          </a:xfrm>
-          <a:prstGeom prst="rect">
-            <a:avLst/>
-          </a:prstGeom>
-          <a:noFill/>
-          <a:ln/>
-        </p:spPr>
-        <p:txBody>
-          <a:bodyPr wrap="square" rtlCol="0" anchor="ctr"/>
-          <a:lstStyle/>
-          <a:p>
-            <a:pPr indent="0" marL="0">
-              <a:buNone/>
-            </a:pPr>
-            <a:r>
-              <a:rPr lang="en-US" sz="1100" i="1" dirty="0">
-                <a:solidFill>
-                  <a:srgbClr val="6B6B63"/>
-                </a:solidFill>
-                <a:latin typeface="Calibri" pitchFamily="34" charset="0"/>
-                <a:ea typeface="Calibri" pitchFamily="34" charset="-122"/>
-                <a:cs typeface="Calibri" pitchFamily="34" charset="-120"/>
-              </a:rPr>
-              <a:t>Read before class: abstract, significance statement, figures. Methods skimmed.</a:t>
-            </a:r>
-            <a:endParaRPr lang="en-US" sz="1100" dirty="0"/>
+              <a:t>Fig. 1b, Garg, Schiebinger, Jurafsky &amp; Zou, PNAS 2018 (arXiv:1711.08412) · shown for teaching</a:t>
+            </a:r>
+            <a:endParaRPr lang="en-US" sz="1000" dirty="0"/>
           </a:p>
         </p:txBody>
       </p:sp>
@@ -8282,7 +8381,7 @@
                 <a:ea typeface="Calibri" pitchFamily="34" charset="-122"/>
                 <a:cs typeface="Calibri" pitchFamily="34" charset="-120"/>
               </a:rPr>
-              <a:t>QUESTION IT</a:t>
+              <a:t>WHY IT IS EVIDENCE AND NOT A DEMO</a:t>
             </a:r>
             <a:endParaRPr lang="en-US" sz="1300" dirty="0"/>
           </a:p>
@@ -8321,80 +8420,61 @@
                 <a:ea typeface="Cambria" pitchFamily="34" charset="-122"/>
                 <a:cs typeface="Cambria" pitchFamily="34" charset="-120"/>
               </a:rPr>
-              <a:t>Before you believe the curve</a:t>
+              <a:t>The vectors agree with the census</a:t>
             </a:r>
             <a:endParaRPr lang="en-US" sz="3400" dirty="0"/>
           </a:p>
         </p:txBody>
       </p:sp>
-      <p:sp>
-        <p:nvSpPr>
-          <p:cNvPr id="4" name="Shape 2"/>
-          <p:cNvSpPr/>
-          <p:nvPr/>
-        </p:nvSpPr>
-        <p:spPr>
-          <a:xfrm>
-            <a:off x="640080" y="1920240"/>
-            <a:ext cx="10881360" cy="987552"/>
-          </a:xfrm>
-          <a:prstGeom prst="roundRect">
-            <a:avLst>
-              <a:gd name="adj" fmla="val 9259"/>
-            </a:avLst>
-          </a:prstGeom>
-          <a:solidFill>
-            <a:srgbClr val="F4EEE8"/>
-          </a:solidFill>
-          <a:ln/>
-        </p:spPr>
-      </p:sp>
-      <p:sp>
-        <p:nvSpPr>
-          <p:cNvPr id="5" name="Shape 3"/>
-          <p:cNvSpPr/>
-          <p:nvPr/>
-        </p:nvSpPr>
-        <p:spPr>
-          <a:xfrm>
-            <a:off x="914400" y="2194560"/>
-            <a:ext cx="320040" cy="320040"/>
-          </a:xfrm>
-          <a:prstGeom prst="ellipse">
-            <a:avLst/>
-          </a:prstGeom>
-          <a:solidFill>
-            <a:srgbClr val="7A3B2E"/>
-          </a:solidFill>
-          <a:ln/>
-        </p:spPr>
-      </p:sp>
-      <p:sp>
-        <p:nvSpPr>
-          <p:cNvPr id="6" name="Text 4"/>
-          <p:cNvSpPr/>
-          <p:nvPr/>
-        </p:nvSpPr>
-        <p:spPr>
-          <a:xfrm>
-            <a:off x="1463040" y="2011680"/>
-            <a:ext cx="9784080" cy="850392"/>
-          </a:xfrm>
-          <a:prstGeom prst="rect">
-            <a:avLst/>
-          </a:prstGeom>
-          <a:noFill/>
-          <a:ln/>
-        </p:spPr>
-        <p:txBody>
-          <a:bodyPr wrap="square" lIns="0" tIns="0" rIns="0" bIns="0" rtlCol="0" anchor="ctr"/>
-          <a:lstStyle/>
-          <a:p>
-            <a:pPr indent="0" marL="0">
-              <a:buNone/>
-            </a:pPr>
-            <a:r>
-              <a:rPr lang="en-US" sz="1350" i="1" dirty="0">
+      <p:pic>
+        <p:nvPicPr>
+          <p:cNvPr id="4" name="Image 0" descr="/tmp/figs/w4_paper_validation.png">    </p:cNvPr>
+          <p:cNvPicPr>
+            <a:picLocks noChangeAspect="1"/>
+          </p:cNvPicPr>
+          <p:nvPr/>
+        </p:nvPicPr>
+        <p:blipFill>
+          <a:blip r:embed="rId1"/>
+          <a:srcRect l="0" r="0" t="0" b="0"/>
+          <a:stretch/>
+        </p:blipFill>
+        <p:spPr>
+          <a:xfrm>
+            <a:off x="1920240" y="1737360"/>
+            <a:ext cx="8412480" cy="4023360"/>
+          </a:xfrm>
+          <a:prstGeom prst="rect">
+            <a:avLst/>
+          </a:prstGeom>
+        </p:spPr>
+      </p:pic>
+      <p:sp>
+        <p:nvSpPr>
+          <p:cNvPr id="5" name="Text 2"/>
+          <p:cNvSpPr/>
+          <p:nvPr/>
+        </p:nvSpPr>
+        <p:spPr>
+          <a:xfrm>
+            <a:off x="640080" y="5897880"/>
+            <a:ext cx="10881360" cy="411480"/>
+          </a:xfrm>
+          <a:prstGeom prst="rect">
+            <a:avLst/>
+          </a:prstGeom>
+          <a:noFill/>
+          <a:ln/>
+        </p:spPr>
+        <p:txBody>
+          <a:bodyPr wrap="square" rtlCol="0" anchor="ctr"/>
+          <a:lstStyle/>
+          <a:p>
+            <a:pPr indent="0" marL="0">
+              <a:buNone/>
+            </a:pPr>
+            <a:r>
+              <a:rPr lang="en-US" sz="1600" i="1" dirty="0">
                 <a:solidFill>
                   <a:srgbClr val="1A1A1A"/>
                 </a:solidFill>
@@ -8402,252 +8482,48 @@
                 <a:ea typeface="Cambria" pitchFamily="34" charset="-122"/>
                 <a:cs typeface="Cambria" pitchFamily="34" charset="-120"/>
               </a:rPr>
-              <a:t>Whose century is it? Google Books and COHA are what got printed and digitised. Is the shift in the country, or in publishing?</a:t>
-            </a:r>
-            <a:endParaRPr lang="en-US" sz="1350" dirty="0"/>
-          </a:p>
-        </p:txBody>
-      </p:sp>
-      <p:sp>
-        <p:nvSpPr>
-          <p:cNvPr id="7" name="Shape 5"/>
-          <p:cNvSpPr/>
-          <p:nvPr/>
-        </p:nvSpPr>
-        <p:spPr>
-          <a:xfrm>
-            <a:off x="640080" y="3090672"/>
-            <a:ext cx="10881360" cy="987552"/>
-          </a:xfrm>
-          <a:prstGeom prst="roundRect">
-            <a:avLst>
-              <a:gd name="adj" fmla="val 9259"/>
-            </a:avLst>
-          </a:prstGeom>
-          <a:solidFill>
-            <a:srgbClr val="F4EEE8"/>
-          </a:solidFill>
-          <a:ln/>
-        </p:spPr>
-      </p:sp>
-      <p:sp>
-        <p:nvSpPr>
-          <p:cNvPr id="8" name="Shape 6"/>
-          <p:cNvSpPr/>
-          <p:nvPr/>
-        </p:nvSpPr>
-        <p:spPr>
-          <a:xfrm>
-            <a:off x="914400" y="3364992"/>
-            <a:ext cx="320040" cy="320040"/>
-          </a:xfrm>
-          <a:prstGeom prst="ellipse">
-            <a:avLst/>
-          </a:prstGeom>
-          <a:solidFill>
-            <a:srgbClr val="B9852F"/>
-          </a:solidFill>
-          <a:ln/>
-        </p:spPr>
-      </p:sp>
-      <p:sp>
-        <p:nvSpPr>
-          <p:cNvPr id="9" name="Text 7"/>
-          <p:cNvSpPr/>
-          <p:nvPr/>
-        </p:nvSpPr>
-        <p:spPr>
-          <a:xfrm>
-            <a:off x="1463040" y="3182112"/>
-            <a:ext cx="9784080" cy="850392"/>
-          </a:xfrm>
-          <a:prstGeom prst="rect">
-            <a:avLst/>
-          </a:prstGeom>
-          <a:noFill/>
-          <a:ln/>
-        </p:spPr>
-        <p:txBody>
-          <a:bodyPr wrap="square" lIns="0" tIns="0" rIns="0" bIns="0" rtlCol="0" anchor="ctr"/>
-          <a:lstStyle/>
-          <a:p>
-            <a:pPr indent="0" marL="0">
-              <a:buNone/>
-            </a:pPr>
-            <a:r>
-              <a:rPr lang="en-US" sz="1350" i="1" dirty="0">
-                <a:solidFill>
-                  <a:srgbClr val="1A1A1A"/>
-                </a:solidFill>
-                <a:latin typeface="Cambria" pitchFamily="34" charset="0"/>
-                <a:ea typeface="Cambria" pitchFamily="34" charset="-122"/>
-                <a:cs typeface="Cambria" pitchFamily="34" charset="-120"/>
-              </a:rPr>
-              <a:t>Who chose the words? Someone decided which words count as female and which jobs count as occupations. Where in the paper is that list?</a:t>
-            </a:r>
-            <a:endParaRPr lang="en-US" sz="1350" dirty="0"/>
-          </a:p>
-        </p:txBody>
-      </p:sp>
-      <p:sp>
-        <p:nvSpPr>
-          <p:cNvPr id="10" name="Shape 8"/>
-          <p:cNvSpPr/>
-          <p:nvPr/>
-        </p:nvSpPr>
-        <p:spPr>
-          <a:xfrm>
-            <a:off x="640080" y="4261104"/>
-            <a:ext cx="10881360" cy="987552"/>
-          </a:xfrm>
-          <a:prstGeom prst="roundRect">
-            <a:avLst>
-              <a:gd name="adj" fmla="val 9259"/>
-            </a:avLst>
-          </a:prstGeom>
-          <a:solidFill>
-            <a:srgbClr val="F4EEE8"/>
-          </a:solidFill>
-          <a:ln/>
-        </p:spPr>
-      </p:sp>
-      <p:sp>
-        <p:nvSpPr>
-          <p:cNvPr id="11" name="Shape 9"/>
-          <p:cNvSpPr/>
-          <p:nvPr/>
-        </p:nvSpPr>
-        <p:spPr>
-          <a:xfrm>
-            <a:off x="914400" y="4535424"/>
-            <a:ext cx="320040" cy="320040"/>
-          </a:xfrm>
-          <a:prstGeom prst="ellipse">
-            <a:avLst/>
-          </a:prstGeom>
-          <a:solidFill>
-            <a:srgbClr val="3F6F5F"/>
-          </a:solidFill>
-          <a:ln/>
-        </p:spPr>
-      </p:sp>
-      <p:sp>
-        <p:nvSpPr>
-          <p:cNvPr id="12" name="Text 10"/>
-          <p:cNvSpPr/>
-          <p:nvPr/>
-        </p:nvSpPr>
-        <p:spPr>
-          <a:xfrm>
-            <a:off x="1463040" y="4352544"/>
-            <a:ext cx="9784080" cy="850392"/>
-          </a:xfrm>
-          <a:prstGeom prst="rect">
-            <a:avLst/>
-          </a:prstGeom>
-          <a:noFill/>
-          <a:ln/>
-        </p:spPr>
-        <p:txBody>
-          <a:bodyPr wrap="square" lIns="0" tIns="0" rIns="0" bIns="0" rtlCol="0" anchor="ctr"/>
-          <a:lstStyle/>
-          <a:p>
-            <a:pPr indent="0" marL="0">
-              <a:buNone/>
-            </a:pPr>
-            <a:r>
-              <a:rPr lang="en-US" sz="1350" i="1" dirty="0">
-                <a:solidFill>
-                  <a:srgbClr val="1A1A1A"/>
-                </a:solidFill>
-                <a:latin typeface="Cambria" pitchFamily="34" charset="0"/>
-                <a:ea typeface="Cambria" pitchFamily="34" charset="-122"/>
-                <a:cs typeface="Cambria" pitchFamily="34" charset="-120"/>
-              </a:rPr>
-              <a:t>The bias it detects is the bias in the text - the same geometry that makes king - man + woman work. Can you keep one and refuse the other?</a:t>
-            </a:r>
-            <a:endParaRPr lang="en-US" sz="1350" dirty="0"/>
-          </a:p>
-        </p:txBody>
-      </p:sp>
-      <p:sp>
-        <p:nvSpPr>
-          <p:cNvPr id="13" name="Shape 11"/>
-          <p:cNvSpPr/>
-          <p:nvPr/>
-        </p:nvSpPr>
-        <p:spPr>
-          <a:xfrm>
-            <a:off x="640080" y="5431536"/>
-            <a:ext cx="10881360" cy="987552"/>
-          </a:xfrm>
-          <a:prstGeom prst="roundRect">
-            <a:avLst>
-              <a:gd name="adj" fmla="val 9259"/>
-            </a:avLst>
-          </a:prstGeom>
-          <a:solidFill>
-            <a:srgbClr val="F4EEE8"/>
-          </a:solidFill>
-          <a:ln/>
-        </p:spPr>
-      </p:sp>
-      <p:sp>
-        <p:nvSpPr>
-          <p:cNvPr id="14" name="Shape 12"/>
-          <p:cNvSpPr/>
-          <p:nvPr/>
-        </p:nvSpPr>
-        <p:spPr>
-          <a:xfrm>
-            <a:off x="914400" y="5705856"/>
-            <a:ext cx="320040" cy="320040"/>
-          </a:xfrm>
-          <a:prstGeom prst="ellipse">
-            <a:avLst/>
-          </a:prstGeom>
-          <a:solidFill>
-            <a:srgbClr val="2E5F8A"/>
-          </a:solidFill>
-          <a:ln/>
-        </p:spPr>
-      </p:sp>
-      <p:sp>
-        <p:nvSpPr>
-          <p:cNvPr id="15" name="Text 13"/>
-          <p:cNvSpPr/>
-          <p:nvPr/>
-        </p:nvSpPr>
-        <p:spPr>
-          <a:xfrm>
-            <a:off x="1463040" y="5522976"/>
-            <a:ext cx="9784080" cy="850392"/>
-          </a:xfrm>
-          <a:prstGeom prst="rect">
-            <a:avLst/>
-          </a:prstGeom>
-          <a:noFill/>
-          <a:ln/>
-        </p:spPr>
-        <p:txBody>
-          <a:bodyPr wrap="square" lIns="0" tIns="0" rIns="0" bIns="0" rtlCol="0" anchor="ctr"/>
-          <a:lstStyle/>
-          <a:p>
-            <a:pPr indent="0" marL="0">
-              <a:buNone/>
-            </a:pPr>
-            <a:r>
-              <a:rPr lang="en-US" sz="1350" i="1" dirty="0">
-                <a:solidFill>
-                  <a:srgbClr val="1A1A1A"/>
-                </a:solidFill>
-                <a:latin typeface="Cambria" pitchFamily="34" charset="0"/>
-                <a:ea typeface="Cambria" pitchFamily="34" charset="-122"/>
-                <a:cs typeface="Cambria" pitchFamily="34" charset="-120"/>
-              </a:rPr>
-              <a:t>What would convince you? Name the check you would want run before repeating this finding out loud.</a:t>
-            </a:r>
-            <a:endParaRPr lang="en-US" sz="1350" dirty="0"/>
+              <a:t>One dot per occupation. Right on the x-axis: the word sits closer to she-words. Up on the y-axis: more women in the job.</a:t>
+            </a:r>
+            <a:endParaRPr lang="en-US" sz="1600" dirty="0"/>
+          </a:p>
+        </p:txBody>
+      </p:sp>
+      <p:sp>
+        <p:nvSpPr>
+          <p:cNvPr id="6" name="Text 3"/>
+          <p:cNvSpPr/>
+          <p:nvPr/>
+        </p:nvSpPr>
+        <p:spPr>
+          <a:xfrm>
+            <a:off x="640080" y="6355080"/>
+            <a:ext cx="10881360" cy="320040"/>
+          </a:xfrm>
+          <a:prstGeom prst="rect">
+            <a:avLst/>
+          </a:prstGeom>
+          <a:noFill/>
+          <a:ln/>
+        </p:spPr>
+        <p:txBody>
+          <a:bodyPr wrap="square" rtlCol="0" anchor="ctr"/>
+          <a:lstStyle/>
+          <a:p>
+            <a:pPr indent="0" marL="0">
+              <a:buNone/>
+            </a:pPr>
+            <a:r>
+              <a:rPr lang="en-US" sz="1000" dirty="0">
+                <a:solidFill>
+                  <a:srgbClr val="6B6B63"/>
+                </a:solidFill>
+                <a:latin typeface="Calibri" pitchFamily="34" charset="0"/>
+                <a:ea typeface="Calibri" pitchFamily="34" charset="-122"/>
+                <a:cs typeface="Calibri" pitchFamily="34" charset="-120"/>
+              </a:rPr>
+              <a:t>Fig. 1a, Garg, Schiebinger, Jurafsky &amp; Zou, PNAS 2018 (arXiv:1711.08412) · shown for teaching</a:t>
+            </a:r>
+            <a:endParaRPr lang="en-US" sz="1000" dirty="0"/>
           </a:p>
         </p:txBody>
       </p:sp>
@@ -8710,13 +8586,13 @@
             <a:r>
               <a:rPr lang="en-US" sz="1300" b="1" spc="300" kern="0" dirty="0">
                 <a:solidFill>
-                  <a:srgbClr val="3F6F5F"/>
+                  <a:srgbClr val="B9852F"/>
                 </a:solidFill>
                 <a:latin typeface="Calibri" pitchFamily="34" charset="0"/>
                 <a:ea typeface="Calibri" pitchFamily="34" charset="-122"/>
                 <a:cs typeface="Calibri" pitchFamily="34" charset="-120"/>
               </a:rPr>
-              <a:t>IDEA ONE</a:t>
+              <a:t>THE SAME METHOD, POINTED AT ADJECTIVES</a:t>
             </a:r>
             <a:endParaRPr lang="en-US" sz="1300" dirty="0"/>
           </a:p>
@@ -8755,7 +8631,7 @@
                 <a:ea typeface="Cambria" pitchFamily="34" charset="-122"/>
                 <a:cs typeface="Cambria" pitchFamily="34" charset="-120"/>
               </a:rPr>
-              <a:t>You already built a neuron</a:t>
+              <a:t>Top words associated with women, by decade</a:t>
             </a:r>
             <a:endParaRPr lang="en-US" sz="3400" dirty="0"/>
           </a:p>
@@ -8763,7 +8639,7 @@
       </p:sp>
       <p:pic>
         <p:nvPicPr>
-          <p:cNvPr id="4" name="Image 0" descr="/tmp/figs/w4_neuron.png">    </p:cNvPr>
+          <p:cNvPr id="4" name="Image 0" descr="/tmp/figs/w4_paper_adjectives.png">    </p:cNvPr>
           <p:cNvPicPr>
             <a:picLocks noChangeAspect="1"/>
           </p:cNvPicPr>
@@ -8776,8 +8652,8 @@
         </p:blipFill>
         <p:spPr>
           <a:xfrm>
-            <a:off x="640080" y="1920240"/>
-            <a:ext cx="6400800" cy="4023360"/>
+            <a:off x="3291840" y="1691640"/>
+            <a:ext cx="5577840" cy="4114800"/>
           </a:xfrm>
           <a:prstGeom prst="rect">
             <a:avLst/>
@@ -8792,113 +8668,73 @@
         </p:nvSpPr>
         <p:spPr>
           <a:xfrm>
-            <a:off x="7223760" y="2011680"/>
-            <a:ext cx="4297680" cy="4023360"/>
-          </a:xfrm>
-          <a:prstGeom prst="rect">
-            <a:avLst/>
-          </a:prstGeom>
-          <a:noFill/>
-          <a:ln/>
-        </p:spPr>
-        <p:txBody>
-          <a:bodyPr wrap="square" rtlCol="0" anchor="t"/>
-          <a:lstStyle/>
-          <a:p>
-            <a:pPr marL="152400" indent="-152400">
-              <a:lnSpc>
-                <a:spcPct val="115000"/>
-              </a:lnSpc>
-              <a:spcAft>
-                <a:spcPts val="1000"/>
-              </a:spcAft>
-              <a:buSzPct val="100000"/>
-              <a:buChar char="•"/>
-            </a:pPr>
-            <a:r>
-              <a:rPr lang="en-US" sz="1400" dirty="0">
+            <a:off x="640080" y="5897880"/>
+            <a:ext cx="10881360" cy="411480"/>
+          </a:xfrm>
+          <a:prstGeom prst="rect">
+            <a:avLst/>
+          </a:prstGeom>
+          <a:noFill/>
+          <a:ln/>
+        </p:spPr>
+        <p:txBody>
+          <a:bodyPr wrap="square" rtlCol="0" anchor="ctr"/>
+          <a:lstStyle/>
+          <a:p>
+            <a:pPr indent="0" marL="0">
+              <a:buNone/>
+            </a:pPr>
+            <a:r>
+              <a:rPr lang="en-US" sz="1600" i="1" dirty="0">
                 <a:solidFill>
                   <a:srgbClr val="1A1A1A"/>
+                </a:solidFill>
+                <a:latin typeface="Cambria" pitchFamily="34" charset="0"/>
+                <a:ea typeface="Cambria" pitchFamily="34" charset="-122"/>
+                <a:cs typeface="Cambria" pitchFamily="34" charset="-120"/>
+              </a:rPr>
+              <a:t>1910 to 1990, from the same embeddings. Read the columns down, then argue about the last one.</a:t>
+            </a:r>
+            <a:endParaRPr lang="en-US" sz="1600" dirty="0"/>
+          </a:p>
+        </p:txBody>
+      </p:sp>
+      <p:sp>
+        <p:nvSpPr>
+          <p:cNvPr id="6" name="Text 3"/>
+          <p:cNvSpPr/>
+          <p:nvPr/>
+        </p:nvSpPr>
+        <p:spPr>
+          <a:xfrm>
+            <a:off x="640080" y="6355080"/>
+            <a:ext cx="10881360" cy="320040"/>
+          </a:xfrm>
+          <a:prstGeom prst="rect">
+            <a:avLst/>
+          </a:prstGeom>
+          <a:noFill/>
+          <a:ln/>
+        </p:spPr>
+        <p:txBody>
+          <a:bodyPr wrap="square" rtlCol="0" anchor="ctr"/>
+          <a:lstStyle/>
+          <a:p>
+            <a:pPr indent="0" marL="0">
+              <a:buNone/>
+            </a:pPr>
+            <a:r>
+              <a:rPr lang="en-US" sz="1000" dirty="0">
+                <a:solidFill>
+                  <a:srgbClr val="6B6B63"/>
                 </a:solidFill>
                 <a:latin typeface="Calibri" pitchFamily="34" charset="0"/>
                 <a:ea typeface="Calibri" pitchFamily="34" charset="-122"/>
                 <a:cs typeface="Calibri" pitchFamily="34" charset="-120"/>
               </a:rPr>
-              <a:t>Counts in, one weight each, add them up, squash the total into a probability.</a:t>
-            </a:r>
-            <a:endParaRPr lang="en-US" sz="1400" dirty="0"/>
-          </a:p>
-          <a:p>
-            <a:pPr marL="152400" indent="-152400">
-              <a:lnSpc>
-                <a:spcPct val="115000"/>
-              </a:lnSpc>
-              <a:spcAft>
-                <a:spcPts val="1000"/>
-              </a:spcAft>
-              <a:buSzPct val="100000"/>
-              <a:buChar char="•"/>
-            </a:pPr>
-            <a:r>
-              <a:rPr lang="en-US" sz="1400" dirty="0">
-                <a:solidFill>
-                  <a:srgbClr val="1A1A1A"/>
-                </a:solidFill>
-                <a:latin typeface="Calibri" pitchFamily="34" charset="0"/>
-                <a:ea typeface="Calibri" pitchFamily="34" charset="-122"/>
-                <a:cs typeface="Calibri" pitchFamily="34" charset="-120"/>
-              </a:rPr>
-              <a:t>That is Week 3's logistic regression, drawn as a picture.</a:t>
-            </a:r>
-            <a:endParaRPr lang="en-US" sz="1400" dirty="0"/>
-          </a:p>
-          <a:p>
-            <a:pPr marL="152400" indent="-152400">
-              <a:lnSpc>
-                <a:spcPct val="115000"/>
-              </a:lnSpc>
-              <a:spcAft>
-                <a:spcPts val="1000"/>
-              </a:spcAft>
-              <a:buSzPct val="100000"/>
-              <a:buChar char="•"/>
-            </a:pPr>
-            <a:r>
-              <a:rPr lang="en-US" sz="1400" dirty="0">
-                <a:solidFill>
-                  <a:srgbClr val="1A1A1A"/>
-                </a:solidFill>
-                <a:latin typeface="Calibri" pitchFamily="34" charset="0"/>
-                <a:ea typeface="Calibri" pitchFamily="34" charset="-122"/>
-                <a:cs typeface="Calibri" pitchFamily="34" charset="-120"/>
-              </a:rPr>
-              <a:t>It is also, exactly, one artificial neuron. Nothing has been added.</a:t>
-            </a:r>
-            <a:endParaRPr lang="en-US" sz="1400" dirty="0"/>
-          </a:p>
-          <a:p>
-            <a:pPr marL="152400" indent="-152400">
-              <a:lnSpc>
-                <a:spcPct val="115000"/>
-              </a:lnSpc>
-              <a:spcAft>
-                <a:spcPts val="1000"/>
-              </a:spcAft>
-              <a:buSzPct val="100000"/>
-              <a:buChar char="•"/>
-            </a:pPr>
-            <a:r>
-              <a:rPr lang="en-US" sz="1400" dirty="0">
-                <a:solidFill>
-                  <a:srgbClr val="1A1A1A"/>
-                </a:solidFill>
-                <a:latin typeface="Calibri" pitchFamily="34" charset="0"/>
-                <a:ea typeface="Calibri" pitchFamily="34" charset="-122"/>
-                <a:cs typeface="Calibri" pitchFamily="34" charset="-120"/>
-              </a:rPr>
-              <a:t>The thickness of each line is the size of the weight. You read those yourself last week.</a:t>
-            </a:r>
-            <a:endParaRPr lang="en-US" sz="1400" dirty="0"/>
+              <a:t>Fig. 2a, Garg, Schiebinger, Jurafsky &amp; Zou, PNAS 2018 (arXiv:1711.08412) · shown for teaching</a:t>
+            </a:r>
+            <a:endParaRPr lang="en-US" sz="1000" dirty="0"/>
           </a:p>
         </p:txBody>
       </p:sp>
@@ -8967,7 +8803,7 @@
                 <a:ea typeface="Calibri" pitchFamily="34" charset="-122"/>
                 <a:cs typeface="Calibri" pitchFamily="34" charset="-120"/>
               </a:rPr>
-              <a:t>IDEA ONE</a:t>
+              <a:t>QUESTION IT</a:t>
             </a:r>
             <a:endParaRPr lang="en-US" sz="1300" dirty="0"/>
           </a:p>
@@ -9006,150 +8842,333 @@
                 <a:ea typeface="Cambria" pitchFamily="34" charset="-122"/>
                 <a:cs typeface="Cambria" pitchFamily="34" charset="-120"/>
               </a:rPr>
-              <a:t>Stack them and something changes</a:t>
+              <a:t>Before you believe the curve</a:t>
             </a:r>
             <a:endParaRPr lang="en-US" sz="3400" dirty="0"/>
           </a:p>
         </p:txBody>
       </p:sp>
-      <p:pic>
-        <p:nvPicPr>
-          <p:cNvPr id="4" name="Image 0" descr="/tmp/figs/w4_network.png">    </p:cNvPr>
-          <p:cNvPicPr>
-            <a:picLocks noChangeAspect="1"/>
-          </p:cNvPicPr>
-          <p:nvPr/>
-        </p:nvPicPr>
-        <p:blipFill>
-          <a:blip r:embed="rId1"/>
-          <a:srcRect l="0" r="0" t="0" b="0"/>
-          <a:stretch/>
-        </p:blipFill>
+      <p:sp>
+        <p:nvSpPr>
+          <p:cNvPr id="4" name="Shape 2"/>
+          <p:cNvSpPr/>
+          <p:nvPr/>
+        </p:nvSpPr>
         <p:spPr>
           <a:xfrm>
             <a:off x="640080" y="1920240"/>
-            <a:ext cx="6400800" cy="4023360"/>
-          </a:xfrm>
-          <a:prstGeom prst="rect">
-            <a:avLst/>
-          </a:prstGeom>
-        </p:spPr>
-      </p:pic>
-      <p:sp>
-        <p:nvSpPr>
-          <p:cNvPr id="5" name="Text 2"/>
-          <p:cNvSpPr/>
-          <p:nvPr/>
-        </p:nvSpPr>
-        <p:spPr>
-          <a:xfrm>
-            <a:off x="7223760" y="2011680"/>
-            <a:ext cx="4297680" cy="4023360"/>
-          </a:xfrm>
-          <a:prstGeom prst="rect">
-            <a:avLst/>
-          </a:prstGeom>
-          <a:noFill/>
-          <a:ln/>
-        </p:spPr>
-        <p:txBody>
-          <a:bodyPr wrap="square" rtlCol="0" anchor="t"/>
-          <a:lstStyle/>
-          <a:p>
-            <a:pPr marL="152400" indent="-152400">
-              <a:lnSpc>
-                <a:spcPct val="115000"/>
-              </a:lnSpc>
-              <a:spcAft>
-                <a:spcPts val="1000"/>
-              </a:spcAft>
-              <a:buSzPct val="100000"/>
-              <a:buChar char="•"/>
-            </a:pPr>
-            <a:r>
-              <a:rPr lang="en-US" sz="1400" dirty="0">
+            <a:ext cx="10881360" cy="987552"/>
+          </a:xfrm>
+          <a:prstGeom prst="roundRect">
+            <a:avLst>
+              <a:gd name="adj" fmla="val 9259"/>
+            </a:avLst>
+          </a:prstGeom>
+          <a:solidFill>
+            <a:srgbClr val="F4EEE8"/>
+          </a:solidFill>
+          <a:ln/>
+        </p:spPr>
+      </p:sp>
+      <p:sp>
+        <p:nvSpPr>
+          <p:cNvPr id="5" name="Shape 3"/>
+          <p:cNvSpPr/>
+          <p:nvPr/>
+        </p:nvSpPr>
+        <p:spPr>
+          <a:xfrm>
+            <a:off x="914400" y="2194560"/>
+            <a:ext cx="320040" cy="320040"/>
+          </a:xfrm>
+          <a:prstGeom prst="ellipse">
+            <a:avLst/>
+          </a:prstGeom>
+          <a:solidFill>
+            <a:srgbClr val="7A3B2E"/>
+          </a:solidFill>
+          <a:ln/>
+        </p:spPr>
+      </p:sp>
+      <p:sp>
+        <p:nvSpPr>
+          <p:cNvPr id="6" name="Text 4"/>
+          <p:cNvSpPr/>
+          <p:nvPr/>
+        </p:nvSpPr>
+        <p:spPr>
+          <a:xfrm>
+            <a:off x="1463040" y="2011680"/>
+            <a:ext cx="9784080" cy="850392"/>
+          </a:xfrm>
+          <a:prstGeom prst="rect">
+            <a:avLst/>
+          </a:prstGeom>
+          <a:noFill/>
+          <a:ln/>
+        </p:spPr>
+        <p:txBody>
+          <a:bodyPr wrap="square" lIns="0" tIns="0" rIns="0" bIns="0" rtlCol="0" anchor="ctr"/>
+          <a:lstStyle/>
+          <a:p>
+            <a:pPr indent="0" marL="0">
+              <a:buNone/>
+            </a:pPr>
+            <a:r>
+              <a:rPr lang="en-US" sz="1350" i="1" dirty="0">
                 <a:solidFill>
                   <a:srgbClr val="1A1A1A"/>
                 </a:solidFill>
-                <a:latin typeface="Calibri" pitchFamily="34" charset="0"/>
-                <a:ea typeface="Calibri" pitchFamily="34" charset="-122"/>
-                <a:cs typeface="Calibri" pitchFamily="34" charset="-120"/>
-              </a:rPr>
-              <a:t>Put a layer of neurons between the words and the answer.</a:t>
-            </a:r>
-            <a:endParaRPr lang="en-US" sz="1400" dirty="0"/>
-          </a:p>
-          <a:p>
-            <a:pPr marL="152400" indent="-152400">
-              <a:lnSpc>
-                <a:spcPct val="115000"/>
-              </a:lnSpc>
-              <a:spcAft>
-                <a:spcPts val="1000"/>
-              </a:spcAft>
-              <a:buSzPct val="100000"/>
-              <a:buChar char="•"/>
-            </a:pPr>
-            <a:r>
-              <a:rPr lang="en-US" sz="1400" dirty="0">
+                <a:latin typeface="Cambria" pitchFamily="34" charset="0"/>
+                <a:ea typeface="Cambria" pitchFamily="34" charset="-122"/>
+                <a:cs typeface="Cambria" pitchFamily="34" charset="-120"/>
+              </a:rPr>
+              <a:t>Whose century is it? Google Books and COHA are what got printed and digitised. Is the shift in the country, or in publishing?</a:t>
+            </a:r>
+            <a:endParaRPr lang="en-US" sz="1350" dirty="0"/>
+          </a:p>
+        </p:txBody>
+      </p:sp>
+      <p:sp>
+        <p:nvSpPr>
+          <p:cNvPr id="7" name="Shape 5"/>
+          <p:cNvSpPr/>
+          <p:nvPr/>
+        </p:nvSpPr>
+        <p:spPr>
+          <a:xfrm>
+            <a:off x="640080" y="3090672"/>
+            <a:ext cx="10881360" cy="987552"/>
+          </a:xfrm>
+          <a:prstGeom prst="roundRect">
+            <a:avLst>
+              <a:gd name="adj" fmla="val 9259"/>
+            </a:avLst>
+          </a:prstGeom>
+          <a:solidFill>
+            <a:srgbClr val="F4EEE8"/>
+          </a:solidFill>
+          <a:ln/>
+        </p:spPr>
+      </p:sp>
+      <p:sp>
+        <p:nvSpPr>
+          <p:cNvPr id="8" name="Shape 6"/>
+          <p:cNvSpPr/>
+          <p:nvPr/>
+        </p:nvSpPr>
+        <p:spPr>
+          <a:xfrm>
+            <a:off x="914400" y="3364992"/>
+            <a:ext cx="320040" cy="320040"/>
+          </a:xfrm>
+          <a:prstGeom prst="ellipse">
+            <a:avLst/>
+          </a:prstGeom>
+          <a:solidFill>
+            <a:srgbClr val="B9852F"/>
+          </a:solidFill>
+          <a:ln/>
+        </p:spPr>
+      </p:sp>
+      <p:sp>
+        <p:nvSpPr>
+          <p:cNvPr id="9" name="Text 7"/>
+          <p:cNvSpPr/>
+          <p:nvPr/>
+        </p:nvSpPr>
+        <p:spPr>
+          <a:xfrm>
+            <a:off x="1463040" y="3182112"/>
+            <a:ext cx="9784080" cy="850392"/>
+          </a:xfrm>
+          <a:prstGeom prst="rect">
+            <a:avLst/>
+          </a:prstGeom>
+          <a:noFill/>
+          <a:ln/>
+        </p:spPr>
+        <p:txBody>
+          <a:bodyPr wrap="square" lIns="0" tIns="0" rIns="0" bIns="0" rtlCol="0" anchor="ctr"/>
+          <a:lstStyle/>
+          <a:p>
+            <a:pPr indent="0" marL="0">
+              <a:buNone/>
+            </a:pPr>
+            <a:r>
+              <a:rPr lang="en-US" sz="1350" i="1" dirty="0">
                 <a:solidFill>
                   <a:srgbClr val="1A1A1A"/>
                 </a:solidFill>
-                <a:latin typeface="Calibri" pitchFamily="34" charset="0"/>
-                <a:ea typeface="Calibri" pitchFamily="34" charset="-122"/>
-                <a:cs typeface="Calibri" pitchFamily="34" charset="-120"/>
-              </a:rPr>
-              <a:t>Each hidden unit learns to fire on some combination of words. Nobody specifies which.</a:t>
-            </a:r>
-            <a:endParaRPr lang="en-US" sz="1400" dirty="0"/>
-          </a:p>
-          <a:p>
-            <a:pPr marL="152400" indent="-152400">
-              <a:lnSpc>
-                <a:spcPct val="115000"/>
-              </a:lnSpc>
-              <a:spcAft>
-                <a:spcPts val="1000"/>
-              </a:spcAft>
-              <a:buSzPct val="100000"/>
-              <a:buChar char="•"/>
-            </a:pPr>
-            <a:r>
-              <a:rPr lang="en-US" sz="1400" dirty="0">
+                <a:latin typeface="Cambria" pitchFamily="34" charset="0"/>
+                <a:ea typeface="Cambria" pitchFamily="34" charset="-122"/>
+                <a:cs typeface="Cambria" pitchFamily="34" charset="-120"/>
+              </a:rPr>
+              <a:t>Who chose the words? Someone decided which words count as female and which jobs count as occupations. Where in the paper is that list?</a:t>
+            </a:r>
+            <a:endParaRPr lang="en-US" sz="1350" dirty="0"/>
+          </a:p>
+        </p:txBody>
+      </p:sp>
+      <p:sp>
+        <p:nvSpPr>
+          <p:cNvPr id="10" name="Shape 8"/>
+          <p:cNvSpPr/>
+          <p:nvPr/>
+        </p:nvSpPr>
+        <p:spPr>
+          <a:xfrm>
+            <a:off x="640080" y="4261104"/>
+            <a:ext cx="10881360" cy="987552"/>
+          </a:xfrm>
+          <a:prstGeom prst="roundRect">
+            <a:avLst>
+              <a:gd name="adj" fmla="val 9259"/>
+            </a:avLst>
+          </a:prstGeom>
+          <a:solidFill>
+            <a:srgbClr val="F4EEE8"/>
+          </a:solidFill>
+          <a:ln/>
+        </p:spPr>
+      </p:sp>
+      <p:sp>
+        <p:nvSpPr>
+          <p:cNvPr id="11" name="Shape 9"/>
+          <p:cNvSpPr/>
+          <p:nvPr/>
+        </p:nvSpPr>
+        <p:spPr>
+          <a:xfrm>
+            <a:off x="914400" y="4535424"/>
+            <a:ext cx="320040" cy="320040"/>
+          </a:xfrm>
+          <a:prstGeom prst="ellipse">
+            <a:avLst/>
+          </a:prstGeom>
+          <a:solidFill>
+            <a:srgbClr val="3F6F5F"/>
+          </a:solidFill>
+          <a:ln/>
+        </p:spPr>
+      </p:sp>
+      <p:sp>
+        <p:nvSpPr>
+          <p:cNvPr id="12" name="Text 10"/>
+          <p:cNvSpPr/>
+          <p:nvPr/>
+        </p:nvSpPr>
+        <p:spPr>
+          <a:xfrm>
+            <a:off x="1463040" y="4352544"/>
+            <a:ext cx="9784080" cy="850392"/>
+          </a:xfrm>
+          <a:prstGeom prst="rect">
+            <a:avLst/>
+          </a:prstGeom>
+          <a:noFill/>
+          <a:ln/>
+        </p:spPr>
+        <p:txBody>
+          <a:bodyPr wrap="square" lIns="0" tIns="0" rIns="0" bIns="0" rtlCol="0" anchor="ctr"/>
+          <a:lstStyle/>
+          <a:p>
+            <a:pPr indent="0" marL="0">
+              <a:buNone/>
+            </a:pPr>
+            <a:r>
+              <a:rPr lang="en-US" sz="1350" i="1" dirty="0">
                 <a:solidFill>
                   <a:srgbClr val="1A1A1A"/>
                 </a:solidFill>
-                <a:latin typeface="Calibri" pitchFamily="34" charset="0"/>
-                <a:ea typeface="Calibri" pitchFamily="34" charset="-122"/>
-                <a:cs typeface="Calibri" pitchFamily="34" charset="-120"/>
-              </a:rPr>
-              <a:t>That is the whole trick: features you did not hand-write.</a:t>
-            </a:r>
-            <a:endParaRPr lang="en-US" sz="1400" dirty="0"/>
-          </a:p>
-          <a:p>
-            <a:pPr marL="152400" indent="-152400">
-              <a:lnSpc>
-                <a:spcPct val="115000"/>
-              </a:lnSpc>
-              <a:spcAft>
-                <a:spcPts val="1000"/>
-              </a:spcAft>
-              <a:buSzPct val="100000"/>
-              <a:buChar char="•"/>
-            </a:pPr>
-            <a:r>
-              <a:rPr lang="en-US" sz="1400" dirty="0">
+                <a:latin typeface="Cambria" pitchFamily="34" charset="0"/>
+                <a:ea typeface="Cambria" pitchFamily="34" charset="-122"/>
+                <a:cs typeface="Cambria" pitchFamily="34" charset="-120"/>
+              </a:rPr>
+              <a:t>The bias it detects is the bias in the text - the same geometry that makes king - man + woman work. Can you keep one and refuse the other?</a:t>
+            </a:r>
+            <a:endParaRPr lang="en-US" sz="1350" dirty="0"/>
+          </a:p>
+        </p:txBody>
+      </p:sp>
+      <p:sp>
+        <p:nvSpPr>
+          <p:cNvPr id="13" name="Shape 11"/>
+          <p:cNvSpPr/>
+          <p:nvPr/>
+        </p:nvSpPr>
+        <p:spPr>
+          <a:xfrm>
+            <a:off x="640080" y="5431536"/>
+            <a:ext cx="10881360" cy="987552"/>
+          </a:xfrm>
+          <a:prstGeom prst="roundRect">
+            <a:avLst>
+              <a:gd name="adj" fmla="val 9259"/>
+            </a:avLst>
+          </a:prstGeom>
+          <a:solidFill>
+            <a:srgbClr val="F4EEE8"/>
+          </a:solidFill>
+          <a:ln/>
+        </p:spPr>
+      </p:sp>
+      <p:sp>
+        <p:nvSpPr>
+          <p:cNvPr id="14" name="Shape 12"/>
+          <p:cNvSpPr/>
+          <p:nvPr/>
+        </p:nvSpPr>
+        <p:spPr>
+          <a:xfrm>
+            <a:off x="914400" y="5705856"/>
+            <a:ext cx="320040" cy="320040"/>
+          </a:xfrm>
+          <a:prstGeom prst="ellipse">
+            <a:avLst/>
+          </a:prstGeom>
+          <a:solidFill>
+            <a:srgbClr val="2E5F8A"/>
+          </a:solidFill>
+          <a:ln/>
+        </p:spPr>
+      </p:sp>
+      <p:sp>
+        <p:nvSpPr>
+          <p:cNvPr id="15" name="Text 13"/>
+          <p:cNvSpPr/>
+          <p:nvPr/>
+        </p:nvSpPr>
+        <p:spPr>
+          <a:xfrm>
+            <a:off x="1463040" y="5522976"/>
+            <a:ext cx="9784080" cy="850392"/>
+          </a:xfrm>
+          <a:prstGeom prst="rect">
+            <a:avLst/>
+          </a:prstGeom>
+          <a:noFill/>
+          <a:ln/>
+        </p:spPr>
+        <p:txBody>
+          <a:bodyPr wrap="square" lIns="0" tIns="0" rIns="0" bIns="0" rtlCol="0" anchor="ctr"/>
+          <a:lstStyle/>
+          <a:p>
+            <a:pPr indent="0" marL="0">
+              <a:buNone/>
+            </a:pPr>
+            <a:r>
+              <a:rPr lang="en-US" sz="1350" i="1" dirty="0">
                 <a:solidFill>
                   <a:srgbClr val="1A1A1A"/>
                 </a:solidFill>
-                <a:latin typeface="Calibri" pitchFamily="34" charset="0"/>
-                <a:ea typeface="Calibri" pitchFamily="34" charset="-122"/>
-                <a:cs typeface="Calibri" pitchFamily="34" charset="-120"/>
-              </a:rPr>
-              <a:t>The cost arrives immediately: there is no longer one weight per word to read. Week 7 asks you to accept that knowingly.</a:t>
-            </a:r>
-            <a:endParaRPr lang="en-US" sz="1400" dirty="0"/>
+                <a:latin typeface="Cambria" pitchFamily="34" charset="0"/>
+                <a:ea typeface="Cambria" pitchFamily="34" charset="-122"/>
+                <a:cs typeface="Cambria" pitchFamily="34" charset="-120"/>
+              </a:rPr>
+              <a:t>What would convince you? Name the check you would want run before repeating this finding out loud.</a:t>
+            </a:r>
+            <a:endParaRPr lang="en-US" sz="1350" dirty="0"/>
           </a:p>
         </p:txBody>
       </p:sp>
@@ -9212,13 +9231,13 @@
             <a:r>
               <a:rPr lang="en-US" sz="1300" b="1" spc="300" kern="0" dirty="0">
                 <a:solidFill>
-                  <a:srgbClr val="2E5F8A"/>
+                  <a:srgbClr val="3F6F5F"/>
                 </a:solidFill>
                 <a:latin typeface="Calibri" pitchFamily="34" charset="0"/>
                 <a:ea typeface="Calibri" pitchFamily="34" charset="-122"/>
                 <a:cs typeface="Calibri" pitchFamily="34" charset="-120"/>
               </a:rPr>
-              <a:t>WHY IT MATTERS</a:t>
+              <a:t>IDEA ONE</a:t>
             </a:r>
             <a:endParaRPr lang="en-US" sz="1300" dirty="0"/>
           </a:p>
@@ -9257,7 +9276,7 @@
                 <a:ea typeface="Cambria" pitchFamily="34" charset="-122"/>
                 <a:cs typeface="Cambria" pitchFamily="34" charset="-120"/>
               </a:rPr>
-              <a:t>Some questions a straight line cannot answer</a:t>
+              <a:t>You already built a neuron</a:t>
             </a:r>
             <a:endParaRPr lang="en-US" sz="3400" dirty="0"/>
           </a:p>
@@ -9265,7 +9284,7 @@
       </p:sp>
       <p:pic>
         <p:nvPicPr>
-          <p:cNvPr id="4" name="Image 0" descr="/tmp/figs/w4_spiral.png">    </p:cNvPr>
+          <p:cNvPr id="4" name="Image 0" descr="/tmp/figs/w4_neuron.png">    </p:cNvPr>
           <p:cNvPicPr>
             <a:picLocks noChangeAspect="1"/>
           </p:cNvPicPr>
@@ -9278,8 +9297,8 @@
         </p:blipFill>
         <p:spPr>
           <a:xfrm>
-            <a:off x="640080" y="1828800"/>
-            <a:ext cx="7680960" cy="4206240"/>
+            <a:off x="1463040" y="1737360"/>
+            <a:ext cx="9235440" cy="4114800"/>
           </a:xfrm>
           <a:prstGeom prst="rect">
             <a:avLst/>
@@ -9294,152 +9313,34 @@
         </p:nvSpPr>
         <p:spPr>
           <a:xfrm>
-            <a:off x="8595360" y="2011680"/>
-            <a:ext cx="3017520" cy="4023360"/>
-          </a:xfrm>
-          <a:prstGeom prst="rect">
-            <a:avLst/>
-          </a:prstGeom>
-          <a:noFill/>
-          <a:ln/>
-        </p:spPr>
-        <p:txBody>
-          <a:bodyPr wrap="square" rtlCol="0" anchor="t"/>
-          <a:lstStyle/>
-          <a:p>
-            <a:pPr marL="152400" indent="-152400">
-              <a:lnSpc>
-                <a:spcPct val="115000"/>
-              </a:lnSpc>
-              <a:spcAft>
-                <a:spcPts val="1000"/>
-              </a:spcAft>
-              <a:buSzPct val="100000"/>
-              <a:buChar char="•"/>
-            </a:pPr>
-            <a:r>
-              <a:rPr lang="en-US" sz="1350" dirty="0">
+            <a:off x="640080" y="5897880"/>
+            <a:ext cx="10881360" cy="411480"/>
+          </a:xfrm>
+          <a:prstGeom prst="rect">
+            <a:avLst/>
+          </a:prstGeom>
+          <a:noFill/>
+          <a:ln/>
+        </p:spPr>
+        <p:txBody>
+          <a:bodyPr wrap="square" rtlCol="0" anchor="ctr"/>
+          <a:lstStyle/>
+          <a:p>
+            <a:pPr indent="0" marL="0">
+              <a:buNone/>
+            </a:pPr>
+            <a:r>
+              <a:rPr lang="en-US" sz="1600" i="1" dirty="0">
                 <a:solidFill>
                   <a:srgbClr val="1A1A1A"/>
                 </a:solidFill>
-                <a:latin typeface="Calibri" pitchFamily="34" charset="0"/>
-                <a:ea typeface="Calibri" pitchFamily="34" charset="-122"/>
-                <a:cs typeface="Calibri" pitchFamily="34" charset="-120"/>
-              </a:rPr>
-              <a:t>One neuron: 70% right. It can only draw a straight line.</a:t>
-            </a:r>
-            <a:endParaRPr lang="en-US" sz="1350" dirty="0"/>
-          </a:p>
-          <a:p>
-            <a:pPr marL="152400" indent="-152400">
-              <a:lnSpc>
-                <a:spcPct val="115000"/>
-              </a:lnSpc>
-              <a:spcAft>
-                <a:spcPts val="1000"/>
-              </a:spcAft>
-              <a:buSzPct val="100000"/>
-              <a:buChar char="•"/>
-            </a:pPr>
-            <a:r>
-              <a:rPr lang="en-US" sz="1350" dirty="0">
-                <a:solidFill>
-                  <a:srgbClr val="1A1A1A"/>
-                </a:solidFill>
-                <a:latin typeface="Calibri" pitchFamily="34" charset="0"/>
-                <a:ea typeface="Calibri" pitchFamily="34" charset="-122"/>
-                <a:cs typeface="Calibri" pitchFamily="34" charset="-120"/>
-              </a:rPr>
-              <a:t>A network with two hidden layers: 99%.</a:t>
-            </a:r>
-            <a:endParaRPr lang="en-US" sz="1350" dirty="0"/>
-          </a:p>
-          <a:p>
-            <a:pPr marL="152400" indent="-152400">
-              <a:lnSpc>
-                <a:spcPct val="115000"/>
-              </a:lnSpc>
-              <a:spcAft>
-                <a:spcPts val="1000"/>
-              </a:spcAft>
-              <a:buSzPct val="100000"/>
-              <a:buChar char="•"/>
-            </a:pPr>
-            <a:r>
-              <a:rPr lang="en-US" sz="1350" dirty="0">
-                <a:solidFill>
-                  <a:srgbClr val="1A1A1A"/>
-                </a:solidFill>
-                <a:latin typeface="Calibri" pitchFamily="34" charset="0"/>
-                <a:ea typeface="Calibri" pitchFamily="34" charset="-122"/>
-                <a:cs typeface="Calibri" pitchFamily="34" charset="-120"/>
-              </a:rPr>
-              <a:t>Same data, same training, more shape available.</a:t>
-            </a:r>
-            <a:endParaRPr lang="en-US" sz="1350" dirty="0"/>
-          </a:p>
-          <a:p>
-            <a:pPr marL="152400" indent="-152400">
-              <a:lnSpc>
-                <a:spcPct val="115000"/>
-              </a:lnSpc>
-              <a:spcAft>
-                <a:spcPts val="1000"/>
-              </a:spcAft>
-              <a:buSzPct val="100000"/>
-              <a:buChar char="•"/>
-            </a:pPr>
-            <a:r>
-              <a:rPr lang="en-US" sz="1350" dirty="0">
-                <a:solidFill>
-                  <a:srgbClr val="1A1A1A"/>
-                </a:solidFill>
-                <a:latin typeface="Calibri" pitchFamily="34" charset="0"/>
-                <a:ea typeface="Calibri" pitchFamily="34" charset="-122"/>
-                <a:cs typeface="Calibri" pitchFamily="34" charset="-120"/>
-              </a:rPr>
-              <a:t>TensorFlow Playground, live: watch the hidden units carve the space while it trains.</a:t>
-            </a:r>
-            <a:endParaRPr lang="en-US" sz="1350" dirty="0"/>
-          </a:p>
-        </p:txBody>
-      </p:sp>
-      <p:sp>
-        <p:nvSpPr>
-          <p:cNvPr id="6" name="Text 3"/>
-          <p:cNvSpPr/>
-          <p:nvPr/>
-        </p:nvSpPr>
-        <p:spPr>
-          <a:xfrm>
-            <a:off x="640080" y="6263640"/>
-            <a:ext cx="10881360" cy="365760"/>
-          </a:xfrm>
-          <a:prstGeom prst="rect">
-            <a:avLst/>
-          </a:prstGeom>
-          <a:noFill/>
-          <a:ln/>
-        </p:spPr>
-        <p:txBody>
-          <a:bodyPr wrap="square" rtlCol="0" anchor="ctr"/>
-          <a:lstStyle/>
-          <a:p>
-            <a:pPr indent="0" marL="0">
-              <a:buNone/>
-            </a:pPr>
-            <a:r>
-              <a:rPr lang="en-US" sz="1100" i="1" dirty="0">
-                <a:solidFill>
-                  <a:srgbClr val="6B6B63"/>
-                </a:solidFill>
-                <a:latin typeface="Calibri" pitchFamily="34" charset="0"/>
-                <a:ea typeface="Calibri" pitchFamily="34" charset="-122"/>
-                <a:cs typeface="Calibri" pitchFamily="34" charset="-120"/>
-              </a:rPr>
-              <a:t>Both models fitted here, on the same points. Nothing drawn by hand.</a:t>
-            </a:r>
-            <a:endParaRPr lang="en-US" sz="1100" dirty="0"/>
+                <a:latin typeface="Cambria" pitchFamily="34" charset="0"/>
+                <a:ea typeface="Cambria" pitchFamily="34" charset="-122"/>
+                <a:cs typeface="Cambria" pitchFamily="34" charset="-120"/>
+              </a:rPr>
+              <a:t>Counts in, one weight each, add them up, squash. Week 3's classifier is one neuron.</a:t>
+            </a:r>
+            <a:endParaRPr lang="en-US" sz="1600" dirty="0"/>
           </a:p>
         </p:txBody>
       </p:sp>
@@ -9502,13 +9403,13 @@
             <a:r>
               <a:rPr lang="en-US" sz="1300" b="1" spc="300" kern="0" dirty="0">
                 <a:solidFill>
-                  <a:srgbClr val="B9852F"/>
+                  <a:srgbClr val="3F6F5F"/>
                 </a:solidFill>
                 <a:latin typeface="Calibri" pitchFamily="34" charset="0"/>
                 <a:ea typeface="Calibri" pitchFamily="34" charset="-122"/>
                 <a:cs typeface="Calibri" pitchFamily="34" charset="-120"/>
               </a:rPr>
-              <a:t>HOW IT LEARNS</a:t>
+              <a:t>IDEA ONE</a:t>
             </a:r>
             <a:endParaRPr lang="en-US" sz="1300" dirty="0"/>
           </a:p>
@@ -9547,7 +9448,7 @@
                 <a:ea typeface="Cambria" pitchFamily="34" charset="-122"/>
                 <a:cs typeface="Cambria" pitchFamily="34" charset="-120"/>
               </a:rPr>
-              <a:t>Rolling downhill in fog</a:t>
+              <a:t>Stack them and something changes</a:t>
             </a:r>
             <a:endParaRPr lang="en-US" sz="3400" dirty="0"/>
           </a:p>
@@ -9555,7 +9456,7 @@
       </p:sp>
       <p:pic>
         <p:nvPicPr>
-          <p:cNvPr id="4" name="Image 0" descr="/tmp/figs/w4_gradient.png">    </p:cNvPr>
+          <p:cNvPr id="4" name="Image 0" descr="/tmp/figs/w4_network.png">    </p:cNvPr>
           <p:cNvPicPr>
             <a:picLocks noChangeAspect="1"/>
           </p:cNvPicPr>
@@ -9568,8 +9469,8 @@
         </p:blipFill>
         <p:spPr>
           <a:xfrm>
-            <a:off x="640080" y="1920240"/>
-            <a:ext cx="6035040" cy="4023360"/>
+            <a:off x="1463040" y="1737360"/>
+            <a:ext cx="9235440" cy="4114800"/>
           </a:xfrm>
           <a:prstGeom prst="rect">
             <a:avLst/>
@@ -9584,137 +9485,34 @@
         </p:nvSpPr>
         <p:spPr>
           <a:xfrm>
-            <a:off x="6949440" y="2011680"/>
-            <a:ext cx="4572000" cy="4023360"/>
-          </a:xfrm>
-          <a:prstGeom prst="rect">
-            <a:avLst/>
-          </a:prstGeom>
-          <a:noFill/>
-          <a:ln/>
-        </p:spPr>
-        <p:txBody>
-          <a:bodyPr wrap="square" rtlCol="0" anchor="t"/>
-          <a:lstStyle/>
-          <a:p>
-            <a:pPr marL="152400" indent="-152400">
-              <a:lnSpc>
-                <a:spcPct val="115000"/>
-              </a:lnSpc>
-              <a:spcAft>
-                <a:spcPts val="1000"/>
-              </a:spcAft>
-              <a:buSzPct val="100000"/>
-              <a:buChar char="•"/>
-            </a:pPr>
-            <a:r>
-              <a:rPr lang="en-US" sz="1400" dirty="0">
+            <a:off x="640080" y="5897880"/>
+            <a:ext cx="10881360" cy="411480"/>
+          </a:xfrm>
+          <a:prstGeom prst="rect">
+            <a:avLst/>
+          </a:prstGeom>
+          <a:noFill/>
+          <a:ln/>
+        </p:spPr>
+        <p:txBody>
+          <a:bodyPr wrap="square" rtlCol="0" anchor="ctr"/>
+          <a:lstStyle/>
+          <a:p>
+            <a:pPr indent="0" marL="0">
+              <a:buNone/>
+            </a:pPr>
+            <a:r>
+              <a:rPr lang="en-US" sz="1600" i="1" dirty="0">
                 <a:solidFill>
                   <a:srgbClr val="1A1A1A"/>
                 </a:solidFill>
-                <a:latin typeface="Calibri" pitchFamily="34" charset="0"/>
-                <a:ea typeface="Calibri" pitchFamily="34" charset="-122"/>
-                <a:cs typeface="Calibri" pitchFamily="34" charset="-120"/>
-              </a:rPr>
-              <a:t>A loss is one number: how wrong the model is right now.</a:t>
-            </a:r>
-            <a:endParaRPr lang="en-US" sz="1400" dirty="0"/>
-          </a:p>
-          <a:p>
-            <a:pPr marL="152400" indent="-152400">
-              <a:lnSpc>
-                <a:spcPct val="115000"/>
-              </a:lnSpc>
-              <a:spcAft>
-                <a:spcPts val="1000"/>
-              </a:spcAft>
-              <a:buSzPct val="100000"/>
-              <a:buChar char="•"/>
-            </a:pPr>
-            <a:r>
-              <a:rPr lang="en-US" sz="1400" dirty="0">
-                <a:solidFill>
-                  <a:srgbClr val="1A1A1A"/>
-                </a:solidFill>
-                <a:latin typeface="Calibri" pitchFamily="34" charset="0"/>
-                <a:ea typeface="Calibri" pitchFamily="34" charset="-122"/>
-                <a:cs typeface="Calibri" pitchFamily="34" charset="-120"/>
-              </a:rPr>
-              <a:t>Ask which direction lowers it, take a small step, repeat. That is gradient descent.</a:t>
-            </a:r>
-            <a:endParaRPr lang="en-US" sz="1400" dirty="0"/>
-          </a:p>
-          <a:p>
-            <a:pPr marL="152400" indent="-152400">
-              <a:lnSpc>
-                <a:spcPct val="115000"/>
-              </a:lnSpc>
-              <a:spcAft>
-                <a:spcPts val="1000"/>
-              </a:spcAft>
-              <a:buSzPct val="100000"/>
-              <a:buChar char="•"/>
-            </a:pPr>
-            <a:r>
-              <a:rPr lang="en-US" sz="1400" dirty="0">
-                <a:solidFill>
-                  <a:srgbClr val="1A1A1A"/>
-                </a:solidFill>
-                <a:latin typeface="Calibri" pitchFamily="34" charset="0"/>
-                <a:ea typeface="Calibri" pitchFamily="34" charset="-122"/>
-                <a:cs typeface="Calibri" pitchFamily="34" charset="-120"/>
-              </a:rPr>
-              <a:t>Thousands of weights, all nudged at once, millions of times.</a:t>
-            </a:r>
-            <a:endParaRPr lang="en-US" sz="1400" dirty="0"/>
-          </a:p>
-          <a:p>
-            <a:pPr marL="152400" indent="-152400">
-              <a:lnSpc>
-                <a:spcPct val="115000"/>
-              </a:lnSpc>
-              <a:spcAft>
-                <a:spcPts val="1000"/>
-              </a:spcAft>
-              <a:buSzPct val="100000"/>
-              <a:buChar char="•"/>
-            </a:pPr>
-            <a:r>
-              <a:rPr lang="en-US" sz="1400" dirty="0">
-                <a:solidFill>
-                  <a:srgbClr val="1A1A1A"/>
-                </a:solidFill>
-                <a:latin typeface="Calibri" pitchFamily="34" charset="0"/>
-                <a:ea typeface="Calibri" pitchFamily="34" charset="-122"/>
-                <a:cs typeface="Calibri" pitchFamily="34" charset="-120"/>
-              </a:rPr>
-              <a:t>No calculus today. The picture is the idea: you cannot see the whole landscape, only the slope under your feet.</a:t>
-            </a:r>
-            <a:endParaRPr lang="en-US" sz="1400" dirty="0"/>
-          </a:p>
-          <a:p>
-            <a:pPr marL="152400" indent="-152400">
-              <a:lnSpc>
-                <a:spcPct val="115000"/>
-              </a:lnSpc>
-              <a:spcAft>
-                <a:spcPts val="1000"/>
-              </a:spcAft>
-              <a:buSzPct val="100000"/>
-              <a:buChar char="•"/>
-            </a:pPr>
-            <a:r>
-              <a:rPr lang="en-US" sz="1400" dirty="0">
-                <a:solidFill>
-                  <a:srgbClr val="1A1A1A"/>
-                </a:solidFill>
-                <a:latin typeface="Calibri" pitchFamily="34" charset="0"/>
-                <a:ea typeface="Calibri" pitchFamily="34" charset="-122"/>
-                <a:cs typeface="Calibri" pitchFamily="34" charset="-120"/>
-              </a:rPr>
-              <a:t>This is also why training is slow, and why it can settle somewhere that is not the bottom.</a:t>
-            </a:r>
-            <a:endParaRPr lang="en-US" sz="1400" dirty="0"/>
+                <a:latin typeface="Cambria" pitchFamily="34" charset="0"/>
+                <a:ea typeface="Cambria" pitchFamily="34" charset="-122"/>
+                <a:cs typeface="Cambria" pitchFamily="34" charset="-120"/>
+              </a:rPr>
+              <a:t>A layer in between, learning combinations nobody wrote down. The price: no more readable weights.</a:t>
+            </a:r>
+            <a:endParaRPr lang="en-US" sz="1600" dirty="0"/>
           </a:p>
         </p:txBody>
       </p:sp>
@@ -9777,13 +9575,13 @@
             <a:r>
               <a:rPr lang="en-US" sz="1300" b="1" spc="300" kern="0" dirty="0">
                 <a:solidFill>
-                  <a:srgbClr val="7A3B2E"/>
+                  <a:srgbClr val="2E5F8A"/>
                 </a:solidFill>
                 <a:latin typeface="Calibri" pitchFamily="34" charset="0"/>
                 <a:ea typeface="Calibri" pitchFamily="34" charset="-122"/>
                 <a:cs typeface="Calibri" pitchFamily="34" charset="-120"/>
               </a:rPr>
-              <a:t>IDEA TWO</a:t>
+              <a:t>WHY IT MATTERS</a:t>
             </a:r>
             <a:endParaRPr lang="en-US" sz="1300" dirty="0"/>
           </a:p>
@@ -9822,7 +9620,7 @@
                 <a:ea typeface="Cambria" pitchFamily="34" charset="-122"/>
                 <a:cs typeface="Cambria" pitchFamily="34" charset="-120"/>
               </a:rPr>
-              <a:t>What counting cannot do</a:t>
+              <a:t>Some questions a straight line cannot answer</a:t>
             </a:r>
             <a:endParaRPr lang="en-US" sz="3400" dirty="0"/>
           </a:p>
@@ -9830,7 +9628,7 @@
       </p:sp>
       <p:pic>
         <p:nvPicPr>
-          <p:cNvPr id="4" name="Image 0" descr="/tmp/figs/w4_onehot_vs_dense.png">    </p:cNvPr>
+          <p:cNvPr id="4" name="Image 0" descr="/tmp/figs/w4_spiral.png">    </p:cNvPr>
           <p:cNvPicPr>
             <a:picLocks noChangeAspect="1"/>
           </p:cNvPicPr>
@@ -9843,8 +9641,8 @@
         </p:blipFill>
         <p:spPr>
           <a:xfrm>
-            <a:off x="640080" y="2011680"/>
-            <a:ext cx="7680960" cy="3566160"/>
+            <a:off x="1097280" y="1737360"/>
+            <a:ext cx="9966960" cy="4114800"/>
           </a:xfrm>
           <a:prstGeom prst="rect">
             <a:avLst/>
@@ -9859,113 +9657,73 @@
         </p:nvSpPr>
         <p:spPr>
           <a:xfrm>
-            <a:off x="8595360" y="2011680"/>
-            <a:ext cx="3017520" cy="4023360"/>
-          </a:xfrm>
-          <a:prstGeom prst="rect">
-            <a:avLst/>
-          </a:prstGeom>
-          <a:noFill/>
-          <a:ln/>
-        </p:spPr>
-        <p:txBody>
-          <a:bodyPr wrap="square" rtlCol="0" anchor="t"/>
-          <a:lstStyle/>
-          <a:p>
-            <a:pPr marL="152400" indent="-152400">
-              <a:lnSpc>
-                <a:spcPct val="115000"/>
-              </a:lnSpc>
-              <a:spcAft>
-                <a:spcPts val="1000"/>
-              </a:spcAft>
-              <a:buSzPct val="100000"/>
-              <a:buChar char="•"/>
-            </a:pPr>
-            <a:r>
-              <a:rPr lang="en-US" sz="1350" dirty="0">
+            <a:off x="640080" y="5897880"/>
+            <a:ext cx="10881360" cy="411480"/>
+          </a:xfrm>
+          <a:prstGeom prst="rect">
+            <a:avLst/>
+          </a:prstGeom>
+          <a:noFill/>
+          <a:ln/>
+        </p:spPr>
+        <p:txBody>
+          <a:bodyPr wrap="square" rtlCol="0" anchor="ctr"/>
+          <a:lstStyle/>
+          <a:p>
+            <a:pPr indent="0" marL="0">
+              <a:buNone/>
+            </a:pPr>
+            <a:r>
+              <a:rPr lang="en-US" sz="1600" i="1" dirty="0">
                 <a:solidFill>
                   <a:srgbClr val="1A1A1A"/>
+                </a:solidFill>
+                <a:latin typeface="Cambria" pitchFamily="34" charset="0"/>
+                <a:ea typeface="Cambria" pitchFamily="34" charset="-122"/>
+                <a:cs typeface="Cambria" pitchFamily="34" charset="-120"/>
+              </a:rPr>
+              <a:t>Same points, same training. One neuron: 70%. Two hidden layers: 99%.</a:t>
+            </a:r>
+            <a:endParaRPr lang="en-US" sz="1600" dirty="0"/>
+          </a:p>
+        </p:txBody>
+      </p:sp>
+      <p:sp>
+        <p:nvSpPr>
+          <p:cNvPr id="6" name="Text 3"/>
+          <p:cNvSpPr/>
+          <p:nvPr/>
+        </p:nvSpPr>
+        <p:spPr>
+          <a:xfrm>
+            <a:off x="640080" y="6355080"/>
+            <a:ext cx="10881360" cy="320040"/>
+          </a:xfrm>
+          <a:prstGeom prst="rect">
+            <a:avLst/>
+          </a:prstGeom>
+          <a:noFill/>
+          <a:ln/>
+        </p:spPr>
+        <p:txBody>
+          <a:bodyPr wrap="square" rtlCol="0" anchor="ctr"/>
+          <a:lstStyle/>
+          <a:p>
+            <a:pPr indent="0" marL="0">
+              <a:buNone/>
+            </a:pPr>
+            <a:r>
+              <a:rPr lang="en-US" sz="1000" dirty="0">
+                <a:solidFill>
+                  <a:srgbClr val="6B6B63"/>
                 </a:solidFill>
                 <a:latin typeface="Calibri" pitchFamily="34" charset="0"/>
                 <a:ea typeface="Calibri" pitchFamily="34" charset="-122"/>
                 <a:cs typeface="Calibri" pitchFamily="34" charset="-120"/>
               </a:rPr>
-              <a:t>In a bag of words, happy and joyful share nothing at all. Neither do Oakland and Berkeley.</a:t>
-            </a:r>
-            <a:endParaRPr lang="en-US" sz="1350" dirty="0"/>
-          </a:p>
-          <a:p>
-            <a:pPr marL="152400" indent="-152400">
-              <a:lnSpc>
-                <a:spcPct val="115000"/>
-              </a:lnSpc>
-              <a:spcAft>
-                <a:spcPts val="1000"/>
-              </a:spcAft>
-              <a:buSzPct val="100000"/>
-              <a:buChar char="•"/>
-            </a:pPr>
-            <a:r>
-              <a:rPr lang="en-US" sz="1350" dirty="0">
-                <a:solidFill>
-                  <a:srgbClr val="1A1A1A"/>
-                </a:solidFill>
-                <a:latin typeface="Calibri" pitchFamily="34" charset="0"/>
-                <a:ea typeface="Calibri" pitchFamily="34" charset="-122"/>
-                <a:cs typeface="Calibri" pitchFamily="34" charset="-120"/>
-              </a:rPr>
-              <a:t>Every word is its own column, and every pair is equally unrelated.</a:t>
-            </a:r>
-            <a:endParaRPr lang="en-US" sz="1350" dirty="0"/>
-          </a:p>
-          <a:p>
-            <a:pPr marL="152400" indent="-152400">
-              <a:lnSpc>
-                <a:spcPct val="115000"/>
-              </a:lnSpc>
-              <a:spcAft>
-                <a:spcPts val="1000"/>
-              </a:spcAft>
-              <a:buSzPct val="100000"/>
-              <a:buChar char="•"/>
-            </a:pPr>
-            <a:r>
-              <a:rPr lang="en-US" sz="1350" dirty="0">
-                <a:solidFill>
-                  <a:srgbClr val="1A1A1A"/>
-                </a:solidFill>
-                <a:latin typeface="Calibri" pitchFamily="34" charset="0"/>
-                <a:ea typeface="Calibri" pitchFamily="34" charset="-122"/>
-                <a:cs typeface="Calibri" pitchFamily="34" charset="-120"/>
-              </a:rPr>
-              <a:t>You have lived with this since Week 2. It is counting's honest floor.</a:t>
-            </a:r>
-            <a:endParaRPr lang="en-US" sz="1350" dirty="0"/>
-          </a:p>
-          <a:p>
-            <a:pPr marL="152400" indent="-152400">
-              <a:lnSpc>
-                <a:spcPct val="115000"/>
-              </a:lnSpc>
-              <a:spcAft>
-                <a:spcPts val="1000"/>
-              </a:spcAft>
-              <a:buSzPct val="100000"/>
-              <a:buChar char="•"/>
-            </a:pPr>
-            <a:r>
-              <a:rPr lang="en-US" sz="1350" dirty="0">
-                <a:solidFill>
-                  <a:srgbClr val="1A1A1A"/>
-                </a:solidFill>
-                <a:latin typeface="Calibri" pitchFamily="34" charset="0"/>
-                <a:ea typeface="Calibri" pitchFamily="34" charset="-122"/>
-                <a:cs typeface="Calibri" pitchFamily="34" charset="-120"/>
-              </a:rPr>
-              <a:t>The fix: a few dozen numbers per word instead, chosen so that similar words land near each other.</a:t>
-            </a:r>
-            <a:endParaRPr lang="en-US" sz="1350" dirty="0"/>
+              <a:t>Both models fitted for this slide. Next: the same thing live in TensorFlow Playground.</a:t>
+            </a:r>
+            <a:endParaRPr lang="en-US" sz="1000" dirty="0"/>
           </a:p>
         </p:txBody>
       </p:sp>

--- a/slides/week-04-lecture-draft.pptx
+++ b/slides/week-04-lecture-draft.pptx
@@ -27,9 +27,15 @@
     <p:sldId id="275" r:id="rId21"/>
     <p:sldId id="276" r:id="rId22"/>
     <p:sldId id="277" r:id="rId23"/>
+    <p:sldId id="278" r:id="rId24"/>
+    <p:sldId id="279" r:id="rId25"/>
+    <p:sldId id="280" r:id="rId26"/>
+    <p:sldId id="281" r:id="rId27"/>
+    <p:sldId id="282" r:id="rId28"/>
+    <p:sldId id="283" r:id="rId29"/>
   </p:sldIdLst>
   <p:notesMasterIdLst>
-    <p:notesMasterId r:id="rId24"/>
+    <p:notesMasterId r:id="rId30"/>
   </p:notesMasterIdLst>
   <p:sldSz cx="12191695" cy="6858000"/>
   <p:notesSz cx="6858000" cy="12191695"/>
@@ -1779,6 +1785,534 @@
             <a:fld id="{F7021451-1387-4CA6-816F-3879F97B5CBC}" type="slidenum">
               <a:rPr lang="en-US"/>
               <a:t>22</a:t>
+            </a:fld>
+            <a:endParaRPr lang="en-US"/>
+          </a:p>
+        </p:txBody>
+      </p:sp>
+    </p:spTree>
+    <p:extLst>
+      <p:ext uri="{BB962C8B-B14F-4D97-AF65-F5344CB8AC3E}">
+        <p14:creationId xmlns:p14="http://schemas.microsoft.com/office/powerpoint/2010/main" val="1024086991"/>
+      </p:ext>
+    </p:extLst>
+  </p:cSld>
+  <p:clrMapOvr>
+    <a:masterClrMapping/>
+  </p:clrMapOvr>
+</p:notes>
+</file>
+
+<file path=ppt/notesSlides/notesSlide23.xml><?xml version="1.0" encoding="utf-8"?>
+<p:notes xmlns:a="http://schemas.openxmlformats.org/drawingml/2006/main" xmlns:r="http://schemas.openxmlformats.org/officeDocument/2006/relationships" xmlns:p="http://schemas.openxmlformats.org/presentationml/2006/main">
+  <p:cSld>
+    <p:spTree>
+      <p:nvGrpSpPr>
+        <p:cNvPr id="1" name=""/>
+        <p:cNvGrpSpPr/>
+        <p:nvPr/>
+      </p:nvGrpSpPr>
+      <p:grpSpPr>
+        <a:xfrm>
+          <a:off x="0" y="0"/>
+          <a:ext cx="0" cy="0"/>
+          <a:chOff x="0" y="0"/>
+          <a:chExt cx="0" cy="0"/>
+        </a:xfrm>
+      </p:grpSpPr>
+      <p:sp>
+        <p:nvSpPr>
+          <p:cNvPr id="2" name="Slide Image Placeholder 1"/>
+          <p:cNvSpPr>
+            <a:spLocks noGrp="1" noRot="1" noChangeAspect="1"/>
+          </p:cNvSpPr>
+          <p:nvPr>
+            <p:ph type="sldImg"/>
+          </p:nvPr>
+        </p:nvSpPr>
+        <p:spPr/>
+      </p:sp>
+      <p:sp>
+        <p:nvSpPr>
+          <p:cNvPr id="3" name="Notes Placeholder 2"/>
+          <p:cNvSpPr>
+            <a:spLocks noGrp="1"/>
+          </p:cNvSpPr>
+          <p:nvPr>
+            <p:ph type="body" idx="1"/>
+          </p:nvPr>
+        </p:nvSpPr>
+        <p:spPr/>
+        <p:txBody>
+          <a:bodyPr/>
+          <a:lstStyle/>
+          <a:p>
+            <a:r>
+              <a:rPr lang="en-US" dirty="0"/>
+              <a:t/>
+            </a:r>
+            <a:endParaRPr lang="en-US" dirty="0"/>
+          </a:p>
+        </p:txBody>
+      </p:sp>
+      <p:sp>
+        <p:nvSpPr>
+          <p:cNvPr id="4" name="Slide Number Placeholder 3"/>
+          <p:cNvSpPr>
+            <a:spLocks noGrp="1"/>
+          </p:cNvSpPr>
+          <p:nvPr>
+            <p:ph type="sldNum" sz="quarter" idx="10"/>
+          </p:nvPr>
+        </p:nvSpPr>
+        <p:spPr/>
+        <p:txBody>
+          <a:bodyPr/>
+          <a:lstStyle/>
+          <a:p>
+            <a:fld id="{F7021451-1387-4CA6-816F-3879F97B5CBC}" type="slidenum">
+              <a:rPr lang="en-US"/>
+              <a:t>23</a:t>
+            </a:fld>
+            <a:endParaRPr lang="en-US"/>
+          </a:p>
+        </p:txBody>
+      </p:sp>
+    </p:spTree>
+    <p:extLst>
+      <p:ext uri="{BB962C8B-B14F-4D97-AF65-F5344CB8AC3E}">
+        <p14:creationId xmlns:p14="http://schemas.microsoft.com/office/powerpoint/2010/main" val="1024086991"/>
+      </p:ext>
+    </p:extLst>
+  </p:cSld>
+  <p:clrMapOvr>
+    <a:masterClrMapping/>
+  </p:clrMapOvr>
+</p:notes>
+</file>
+
+<file path=ppt/notesSlides/notesSlide24.xml><?xml version="1.0" encoding="utf-8"?>
+<p:notes xmlns:a="http://schemas.openxmlformats.org/drawingml/2006/main" xmlns:r="http://schemas.openxmlformats.org/officeDocument/2006/relationships" xmlns:p="http://schemas.openxmlformats.org/presentationml/2006/main">
+  <p:cSld>
+    <p:spTree>
+      <p:nvGrpSpPr>
+        <p:cNvPr id="1" name=""/>
+        <p:cNvGrpSpPr/>
+        <p:nvPr/>
+      </p:nvGrpSpPr>
+      <p:grpSpPr>
+        <a:xfrm>
+          <a:off x="0" y="0"/>
+          <a:ext cx="0" cy="0"/>
+          <a:chOff x="0" y="0"/>
+          <a:chExt cx="0" cy="0"/>
+        </a:xfrm>
+      </p:grpSpPr>
+      <p:sp>
+        <p:nvSpPr>
+          <p:cNvPr id="2" name="Slide Image Placeholder 1"/>
+          <p:cNvSpPr>
+            <a:spLocks noGrp="1" noRot="1" noChangeAspect="1"/>
+          </p:cNvSpPr>
+          <p:nvPr>
+            <p:ph type="sldImg"/>
+          </p:nvPr>
+        </p:nvSpPr>
+        <p:spPr/>
+      </p:sp>
+      <p:sp>
+        <p:nvSpPr>
+          <p:cNvPr id="3" name="Notes Placeholder 2"/>
+          <p:cNvSpPr>
+            <a:spLocks noGrp="1"/>
+          </p:cNvSpPr>
+          <p:nvPr>
+            <p:ph type="body" idx="1"/>
+          </p:nvPr>
+        </p:nvSpPr>
+        <p:spPr/>
+        <p:txBody>
+          <a:bodyPr/>
+          <a:lstStyle/>
+          <a:p>
+            <a:r>
+              <a:rPr lang="en-US" dirty="0"/>
+              <a:t/>
+            </a:r>
+            <a:endParaRPr lang="en-US" dirty="0"/>
+          </a:p>
+        </p:txBody>
+      </p:sp>
+      <p:sp>
+        <p:nvSpPr>
+          <p:cNvPr id="4" name="Slide Number Placeholder 3"/>
+          <p:cNvSpPr>
+            <a:spLocks noGrp="1"/>
+          </p:cNvSpPr>
+          <p:nvPr>
+            <p:ph type="sldNum" sz="quarter" idx="10"/>
+          </p:nvPr>
+        </p:nvSpPr>
+        <p:spPr/>
+        <p:txBody>
+          <a:bodyPr/>
+          <a:lstStyle/>
+          <a:p>
+            <a:fld id="{F7021451-1387-4CA6-816F-3879F97B5CBC}" type="slidenum">
+              <a:rPr lang="en-US"/>
+              <a:t>24</a:t>
+            </a:fld>
+            <a:endParaRPr lang="en-US"/>
+          </a:p>
+        </p:txBody>
+      </p:sp>
+    </p:spTree>
+    <p:extLst>
+      <p:ext uri="{BB962C8B-B14F-4D97-AF65-F5344CB8AC3E}">
+        <p14:creationId xmlns:p14="http://schemas.microsoft.com/office/powerpoint/2010/main" val="1024086991"/>
+      </p:ext>
+    </p:extLst>
+  </p:cSld>
+  <p:clrMapOvr>
+    <a:masterClrMapping/>
+  </p:clrMapOvr>
+</p:notes>
+</file>
+
+<file path=ppt/notesSlides/notesSlide25.xml><?xml version="1.0" encoding="utf-8"?>
+<p:notes xmlns:a="http://schemas.openxmlformats.org/drawingml/2006/main" xmlns:r="http://schemas.openxmlformats.org/officeDocument/2006/relationships" xmlns:p="http://schemas.openxmlformats.org/presentationml/2006/main">
+  <p:cSld>
+    <p:spTree>
+      <p:nvGrpSpPr>
+        <p:cNvPr id="1" name=""/>
+        <p:cNvGrpSpPr/>
+        <p:nvPr/>
+      </p:nvGrpSpPr>
+      <p:grpSpPr>
+        <a:xfrm>
+          <a:off x="0" y="0"/>
+          <a:ext cx="0" cy="0"/>
+          <a:chOff x="0" y="0"/>
+          <a:chExt cx="0" cy="0"/>
+        </a:xfrm>
+      </p:grpSpPr>
+      <p:sp>
+        <p:nvSpPr>
+          <p:cNvPr id="2" name="Slide Image Placeholder 1"/>
+          <p:cNvSpPr>
+            <a:spLocks noGrp="1" noRot="1" noChangeAspect="1"/>
+          </p:cNvSpPr>
+          <p:nvPr>
+            <p:ph type="sldImg"/>
+          </p:nvPr>
+        </p:nvSpPr>
+        <p:spPr/>
+      </p:sp>
+      <p:sp>
+        <p:nvSpPr>
+          <p:cNvPr id="3" name="Notes Placeholder 2"/>
+          <p:cNvSpPr>
+            <a:spLocks noGrp="1"/>
+          </p:cNvSpPr>
+          <p:nvPr>
+            <p:ph type="body" idx="1"/>
+          </p:nvPr>
+        </p:nvSpPr>
+        <p:spPr/>
+        <p:txBody>
+          <a:bodyPr/>
+          <a:lstStyle/>
+          <a:p>
+            <a:r>
+              <a:rPr lang="en-US" dirty="0"/>
+              <a:t/>
+            </a:r>
+            <a:endParaRPr lang="en-US" dirty="0"/>
+          </a:p>
+        </p:txBody>
+      </p:sp>
+      <p:sp>
+        <p:nvSpPr>
+          <p:cNvPr id="4" name="Slide Number Placeholder 3"/>
+          <p:cNvSpPr>
+            <a:spLocks noGrp="1"/>
+          </p:cNvSpPr>
+          <p:nvPr>
+            <p:ph type="sldNum" sz="quarter" idx="10"/>
+          </p:nvPr>
+        </p:nvSpPr>
+        <p:spPr/>
+        <p:txBody>
+          <a:bodyPr/>
+          <a:lstStyle/>
+          <a:p>
+            <a:fld id="{F7021451-1387-4CA6-816F-3879F97B5CBC}" type="slidenum">
+              <a:rPr lang="en-US"/>
+              <a:t>25</a:t>
+            </a:fld>
+            <a:endParaRPr lang="en-US"/>
+          </a:p>
+        </p:txBody>
+      </p:sp>
+    </p:spTree>
+    <p:extLst>
+      <p:ext uri="{BB962C8B-B14F-4D97-AF65-F5344CB8AC3E}">
+        <p14:creationId xmlns:p14="http://schemas.microsoft.com/office/powerpoint/2010/main" val="1024086991"/>
+      </p:ext>
+    </p:extLst>
+  </p:cSld>
+  <p:clrMapOvr>
+    <a:masterClrMapping/>
+  </p:clrMapOvr>
+</p:notes>
+</file>
+
+<file path=ppt/notesSlides/notesSlide26.xml><?xml version="1.0" encoding="utf-8"?>
+<p:notes xmlns:a="http://schemas.openxmlformats.org/drawingml/2006/main" xmlns:r="http://schemas.openxmlformats.org/officeDocument/2006/relationships" xmlns:p="http://schemas.openxmlformats.org/presentationml/2006/main">
+  <p:cSld>
+    <p:spTree>
+      <p:nvGrpSpPr>
+        <p:cNvPr id="1" name=""/>
+        <p:cNvGrpSpPr/>
+        <p:nvPr/>
+      </p:nvGrpSpPr>
+      <p:grpSpPr>
+        <a:xfrm>
+          <a:off x="0" y="0"/>
+          <a:ext cx="0" cy="0"/>
+          <a:chOff x="0" y="0"/>
+          <a:chExt cx="0" cy="0"/>
+        </a:xfrm>
+      </p:grpSpPr>
+      <p:sp>
+        <p:nvSpPr>
+          <p:cNvPr id="2" name="Slide Image Placeholder 1"/>
+          <p:cNvSpPr>
+            <a:spLocks noGrp="1" noRot="1" noChangeAspect="1"/>
+          </p:cNvSpPr>
+          <p:nvPr>
+            <p:ph type="sldImg"/>
+          </p:nvPr>
+        </p:nvSpPr>
+        <p:spPr/>
+      </p:sp>
+      <p:sp>
+        <p:nvSpPr>
+          <p:cNvPr id="3" name="Notes Placeholder 2"/>
+          <p:cNvSpPr>
+            <a:spLocks noGrp="1"/>
+          </p:cNvSpPr>
+          <p:nvPr>
+            <p:ph type="body" idx="1"/>
+          </p:nvPr>
+        </p:nvSpPr>
+        <p:spPr/>
+        <p:txBody>
+          <a:bodyPr/>
+          <a:lstStyle/>
+          <a:p>
+            <a:r>
+              <a:rPr lang="en-US" dirty="0"/>
+              <a:t/>
+            </a:r>
+            <a:endParaRPr lang="en-US" dirty="0"/>
+          </a:p>
+        </p:txBody>
+      </p:sp>
+      <p:sp>
+        <p:nvSpPr>
+          <p:cNvPr id="4" name="Slide Number Placeholder 3"/>
+          <p:cNvSpPr>
+            <a:spLocks noGrp="1"/>
+          </p:cNvSpPr>
+          <p:nvPr>
+            <p:ph type="sldNum" sz="quarter" idx="10"/>
+          </p:nvPr>
+        </p:nvSpPr>
+        <p:spPr/>
+        <p:txBody>
+          <a:bodyPr/>
+          <a:lstStyle/>
+          <a:p>
+            <a:fld id="{F7021451-1387-4CA6-816F-3879F97B5CBC}" type="slidenum">
+              <a:rPr lang="en-US"/>
+              <a:t>26</a:t>
+            </a:fld>
+            <a:endParaRPr lang="en-US"/>
+          </a:p>
+        </p:txBody>
+      </p:sp>
+    </p:spTree>
+    <p:extLst>
+      <p:ext uri="{BB962C8B-B14F-4D97-AF65-F5344CB8AC3E}">
+        <p14:creationId xmlns:p14="http://schemas.microsoft.com/office/powerpoint/2010/main" val="1024086991"/>
+      </p:ext>
+    </p:extLst>
+  </p:cSld>
+  <p:clrMapOvr>
+    <a:masterClrMapping/>
+  </p:clrMapOvr>
+</p:notes>
+</file>
+
+<file path=ppt/notesSlides/notesSlide27.xml><?xml version="1.0" encoding="utf-8"?>
+<p:notes xmlns:a="http://schemas.openxmlformats.org/drawingml/2006/main" xmlns:r="http://schemas.openxmlformats.org/officeDocument/2006/relationships" xmlns:p="http://schemas.openxmlformats.org/presentationml/2006/main">
+  <p:cSld>
+    <p:spTree>
+      <p:nvGrpSpPr>
+        <p:cNvPr id="1" name=""/>
+        <p:cNvGrpSpPr/>
+        <p:nvPr/>
+      </p:nvGrpSpPr>
+      <p:grpSpPr>
+        <a:xfrm>
+          <a:off x="0" y="0"/>
+          <a:ext cx="0" cy="0"/>
+          <a:chOff x="0" y="0"/>
+          <a:chExt cx="0" cy="0"/>
+        </a:xfrm>
+      </p:grpSpPr>
+      <p:sp>
+        <p:nvSpPr>
+          <p:cNvPr id="2" name="Slide Image Placeholder 1"/>
+          <p:cNvSpPr>
+            <a:spLocks noGrp="1" noRot="1" noChangeAspect="1"/>
+          </p:cNvSpPr>
+          <p:nvPr>
+            <p:ph type="sldImg"/>
+          </p:nvPr>
+        </p:nvSpPr>
+        <p:spPr/>
+      </p:sp>
+      <p:sp>
+        <p:nvSpPr>
+          <p:cNvPr id="3" name="Notes Placeholder 2"/>
+          <p:cNvSpPr>
+            <a:spLocks noGrp="1"/>
+          </p:cNvSpPr>
+          <p:nvPr>
+            <p:ph type="body" idx="1"/>
+          </p:nvPr>
+        </p:nvSpPr>
+        <p:spPr/>
+        <p:txBody>
+          <a:bodyPr/>
+          <a:lstStyle/>
+          <a:p>
+            <a:r>
+              <a:rPr lang="en-US" dirty="0"/>
+              <a:t/>
+            </a:r>
+            <a:endParaRPr lang="en-US" dirty="0"/>
+          </a:p>
+        </p:txBody>
+      </p:sp>
+      <p:sp>
+        <p:nvSpPr>
+          <p:cNvPr id="4" name="Slide Number Placeholder 3"/>
+          <p:cNvSpPr>
+            <a:spLocks noGrp="1"/>
+          </p:cNvSpPr>
+          <p:nvPr>
+            <p:ph type="sldNum" sz="quarter" idx="10"/>
+          </p:nvPr>
+        </p:nvSpPr>
+        <p:spPr/>
+        <p:txBody>
+          <a:bodyPr/>
+          <a:lstStyle/>
+          <a:p>
+            <a:fld id="{F7021451-1387-4CA6-816F-3879F97B5CBC}" type="slidenum">
+              <a:rPr lang="en-US"/>
+              <a:t>27</a:t>
+            </a:fld>
+            <a:endParaRPr lang="en-US"/>
+          </a:p>
+        </p:txBody>
+      </p:sp>
+    </p:spTree>
+    <p:extLst>
+      <p:ext uri="{BB962C8B-B14F-4D97-AF65-F5344CB8AC3E}">
+        <p14:creationId xmlns:p14="http://schemas.microsoft.com/office/powerpoint/2010/main" val="1024086991"/>
+      </p:ext>
+    </p:extLst>
+  </p:cSld>
+  <p:clrMapOvr>
+    <a:masterClrMapping/>
+  </p:clrMapOvr>
+</p:notes>
+</file>
+
+<file path=ppt/notesSlides/notesSlide28.xml><?xml version="1.0" encoding="utf-8"?>
+<p:notes xmlns:a="http://schemas.openxmlformats.org/drawingml/2006/main" xmlns:r="http://schemas.openxmlformats.org/officeDocument/2006/relationships" xmlns:p="http://schemas.openxmlformats.org/presentationml/2006/main">
+  <p:cSld>
+    <p:spTree>
+      <p:nvGrpSpPr>
+        <p:cNvPr id="1" name=""/>
+        <p:cNvGrpSpPr/>
+        <p:nvPr/>
+      </p:nvGrpSpPr>
+      <p:grpSpPr>
+        <a:xfrm>
+          <a:off x="0" y="0"/>
+          <a:ext cx="0" cy="0"/>
+          <a:chOff x="0" y="0"/>
+          <a:chExt cx="0" cy="0"/>
+        </a:xfrm>
+      </p:grpSpPr>
+      <p:sp>
+        <p:nvSpPr>
+          <p:cNvPr id="2" name="Slide Image Placeholder 1"/>
+          <p:cNvSpPr>
+            <a:spLocks noGrp="1" noRot="1" noChangeAspect="1"/>
+          </p:cNvSpPr>
+          <p:nvPr>
+            <p:ph type="sldImg"/>
+          </p:nvPr>
+        </p:nvSpPr>
+        <p:spPr/>
+      </p:sp>
+      <p:sp>
+        <p:nvSpPr>
+          <p:cNvPr id="3" name="Notes Placeholder 2"/>
+          <p:cNvSpPr>
+            <a:spLocks noGrp="1"/>
+          </p:cNvSpPr>
+          <p:nvPr>
+            <p:ph type="body" idx="1"/>
+          </p:nvPr>
+        </p:nvSpPr>
+        <p:spPr/>
+        <p:txBody>
+          <a:bodyPr/>
+          <a:lstStyle/>
+          <a:p>
+            <a:r>
+              <a:rPr lang="en-US" dirty="0"/>
+              <a:t/>
+            </a:r>
+            <a:endParaRPr lang="en-US" dirty="0"/>
+          </a:p>
+        </p:txBody>
+      </p:sp>
+      <p:sp>
+        <p:nvSpPr>
+          <p:cNvPr id="4" name="Slide Number Placeholder 3"/>
+          <p:cNvSpPr>
+            <a:spLocks noGrp="1"/>
+          </p:cNvSpPr>
+          <p:nvPr>
+            <p:ph type="sldNum" sz="quarter" idx="10"/>
+          </p:nvPr>
+        </p:nvSpPr>
+        <p:spPr/>
+        <p:txBody>
+          <a:bodyPr/>
+          <a:lstStyle/>
+          <a:p>
+            <a:fld id="{F7021451-1387-4CA6-816F-3879F97B5CBC}" type="slidenum">
+              <a:rPr lang="en-US"/>
+              <a:t>28</a:t>
             </a:fld>
             <a:endParaRPr lang="en-US"/>
           </a:p>
@@ -3042,13 +3576,13 @@
             <a:r>
               <a:rPr lang="en-US" sz="1300" b="1" spc="300" kern="0" dirty="0">
                 <a:solidFill>
-                  <a:srgbClr val="B9852F"/>
+                  <a:srgbClr val="2E5F8A"/>
                 </a:solidFill>
                 <a:latin typeface="Calibri" pitchFamily="34" charset="0"/>
                 <a:ea typeface="Calibri" pitchFamily="34" charset="-122"/>
                 <a:cs typeface="Calibri" pitchFamily="34" charset="-120"/>
               </a:rPr>
-              <a:t>HOW IT LEARNS</a:t>
+              <a:t>WHY IT MATTERS</a:t>
             </a:r>
             <a:endParaRPr lang="en-US" sz="1300" dirty="0"/>
           </a:p>
@@ -3087,7 +3621,7 @@
                 <a:ea typeface="Cambria" pitchFamily="34" charset="-122"/>
                 <a:cs typeface="Cambria" pitchFamily="34" charset="-120"/>
               </a:rPr>
-              <a:t>Rolling downhill in fog</a:t>
+              <a:t>Some questions a straight line cannot answer</a:t>
             </a:r>
             <a:endParaRPr lang="en-US" sz="3400" dirty="0"/>
           </a:p>
@@ -3095,7 +3629,7 @@
       </p:sp>
       <p:pic>
         <p:nvPicPr>
-          <p:cNvPr id="4" name="Image 0" descr="/tmp/figs/w4_gradient.png">    </p:cNvPr>
+          <p:cNvPr id="4" name="Image 0" descr="/tmp/figs/w4_spiral.png">    </p:cNvPr>
           <p:cNvPicPr>
             <a:picLocks noChangeAspect="1"/>
           </p:cNvPicPr>
@@ -3108,8 +3642,8 @@
         </p:blipFill>
         <p:spPr>
           <a:xfrm>
-            <a:off x="2194560" y="1737360"/>
-            <a:ext cx="7772400" cy="4114800"/>
+            <a:off x="1097280" y="1737360"/>
+            <a:ext cx="9966960" cy="4114800"/>
           </a:xfrm>
           <a:prstGeom prst="rect">
             <a:avLst/>
@@ -3149,9 +3683,48 @@
                 <a:ea typeface="Cambria" pitchFamily="34" charset="-122"/>
                 <a:cs typeface="Cambria" pitchFamily="34" charset="-120"/>
               </a:rPr>
-              <a:t>A loss says how wrong you are. Step downhill, repeat, thousands of weights at once. No calculus today.</a:t>
+              <a:t>Same points, same training. One neuron: 70%. Two hidden layers: 99%.</a:t>
             </a:r>
             <a:endParaRPr lang="en-US" sz="1600" dirty="0"/>
+          </a:p>
+        </p:txBody>
+      </p:sp>
+      <p:sp>
+        <p:nvSpPr>
+          <p:cNvPr id="6" name="Text 3"/>
+          <p:cNvSpPr/>
+          <p:nvPr/>
+        </p:nvSpPr>
+        <p:spPr>
+          <a:xfrm>
+            <a:off x="640080" y="6355080"/>
+            <a:ext cx="10881360" cy="320040"/>
+          </a:xfrm>
+          <a:prstGeom prst="rect">
+            <a:avLst/>
+          </a:prstGeom>
+          <a:noFill/>
+          <a:ln/>
+        </p:spPr>
+        <p:txBody>
+          <a:bodyPr wrap="square" rtlCol="0" anchor="ctr"/>
+          <a:lstStyle/>
+          <a:p>
+            <a:pPr indent="0" marL="0">
+              <a:buNone/>
+            </a:pPr>
+            <a:r>
+              <a:rPr lang="en-US" sz="1000" dirty="0">
+                <a:solidFill>
+                  <a:srgbClr val="6B6B63"/>
+                </a:solidFill>
+                <a:latin typeface="Calibri" pitchFamily="34" charset="0"/>
+                <a:ea typeface="Calibri" pitchFamily="34" charset="-122"/>
+                <a:cs typeface="Calibri" pitchFamily="34" charset="-120"/>
+              </a:rPr>
+              <a:t>Both models fitted for this slide. Next: the same thing live in TensorFlow Playground.</a:t>
+            </a:r>
+            <a:endParaRPr lang="en-US" sz="1000" dirty="0"/>
           </a:p>
         </p:txBody>
       </p:sp>
@@ -3214,13 +3787,13 @@
             <a:r>
               <a:rPr lang="en-US" sz="1300" b="1" spc="300" kern="0" dirty="0">
                 <a:solidFill>
-                  <a:srgbClr val="7A3B2E"/>
+                  <a:srgbClr val="B9852F"/>
                 </a:solidFill>
                 <a:latin typeface="Calibri" pitchFamily="34" charset="0"/>
                 <a:ea typeface="Calibri" pitchFamily="34" charset="-122"/>
                 <a:cs typeface="Calibri" pitchFamily="34" charset="-120"/>
               </a:rPr>
-              <a:t>IDEA TWO</a:t>
+              <a:t>HOW IT LEARNS</a:t>
             </a:r>
             <a:endParaRPr lang="en-US" sz="1300" dirty="0"/>
           </a:p>
@@ -3259,7 +3832,7 @@
                 <a:ea typeface="Cambria" pitchFamily="34" charset="-122"/>
                 <a:cs typeface="Cambria" pitchFamily="34" charset="-120"/>
               </a:rPr>
-              <a:t>What counting cannot do</a:t>
+              <a:t>Rolling downhill in fog</a:t>
             </a:r>
             <a:endParaRPr lang="en-US" sz="3400" dirty="0"/>
           </a:p>
@@ -3267,7 +3840,7 @@
       </p:sp>
       <p:pic>
         <p:nvPicPr>
-          <p:cNvPr id="4" name="Image 0" descr="/tmp/figs/w4_onehot_vs_dense.png">    </p:cNvPr>
+          <p:cNvPr id="4" name="Image 0" descr="/tmp/figs/w4_gradient.png">    </p:cNvPr>
           <p:cNvPicPr>
             <a:picLocks noChangeAspect="1"/>
           </p:cNvPicPr>
@@ -3280,8 +3853,8 @@
         </p:blipFill>
         <p:spPr>
           <a:xfrm>
-            <a:off x="1097280" y="1920240"/>
-            <a:ext cx="9966960" cy="3657600"/>
+            <a:off x="2194560" y="1737360"/>
+            <a:ext cx="7772400" cy="4114800"/>
           </a:xfrm>
           <a:prstGeom prst="rect">
             <a:avLst/>
@@ -3321,7 +3894,7 @@
                 <a:ea typeface="Cambria" pitchFamily="34" charset="-122"/>
                 <a:cs typeface="Cambria" pitchFamily="34" charset="-120"/>
               </a:rPr>
-              <a:t>Left: happy and joyful share nothing, and neither do Oakland and Berkeley. Right: a few dozen numbers instead.</a:t>
+              <a:t>A loss says how wrong you are. Step downhill, repeat, thousands of weights at once. No calculus today.</a:t>
             </a:r>
             <a:endParaRPr lang="en-US" sz="1600" dirty="0"/>
           </a:p>
@@ -3431,7 +4004,7 @@
                 <a:ea typeface="Cambria" pitchFamily="34" charset="-122"/>
                 <a:cs typeface="Cambria" pitchFamily="34" charset="-120"/>
               </a:rPr>
-              <a:t>Where the numbers come from</a:t>
+              <a:t>What counting cannot do</a:t>
             </a:r>
             <a:endParaRPr lang="en-US" sz="3400" dirty="0"/>
           </a:p>
@@ -3439,7 +4012,7 @@
       </p:sp>
       <p:pic>
         <p:nvPicPr>
-          <p:cNvPr id="4" name="Image 0" descr="/tmp/figs/w4_skipgram.png">    </p:cNvPr>
+          <p:cNvPr id="4" name="Image 0" descr="/tmp/figs/w4_onehot_vs_dense.png">    </p:cNvPr>
           <p:cNvPicPr>
             <a:picLocks noChangeAspect="1"/>
           </p:cNvPicPr>
@@ -3452,8 +4025,8 @@
         </p:blipFill>
         <p:spPr>
           <a:xfrm>
-            <a:off x="1554480" y="1828800"/>
-            <a:ext cx="9052560" cy="3840480"/>
+            <a:off x="1097280" y="1920240"/>
+            <a:ext cx="9966960" cy="3657600"/>
           </a:xfrm>
           <a:prstGeom prst="rect">
             <a:avLst/>
@@ -3493,7 +4066,7 @@
                 <a:ea typeface="Cambria" pitchFamily="34" charset="-122"/>
                 <a:cs typeface="Cambria" pitchFamily="34" charset="-120"/>
               </a:rPr>
-              <a:t>Guess the neighbours, over a billion words. Throw the guesses away and keep the hidden layer: that is word2vec.</a:t>
+              <a:t>Counting says night and morning have nothing in common. The trained vectors put them at 0.32, against 0.08 for night and ship.</a:t>
             </a:r>
             <a:endParaRPr lang="en-US" sz="1600" dirty="0"/>
           </a:p>
@@ -3558,13 +4131,13 @@
             <a:r>
               <a:rPr lang="en-US" sz="1300" b="1" spc="300" kern="0" dirty="0">
                 <a:solidFill>
-                  <a:srgbClr val="3F6F5F"/>
+                  <a:srgbClr val="7A3B2E"/>
                 </a:solidFill>
                 <a:latin typeface="Calibri" pitchFamily="34" charset="0"/>
                 <a:ea typeface="Calibri" pitchFamily="34" charset="-122"/>
                 <a:cs typeface="Calibri" pitchFamily="34" charset="-120"/>
               </a:rPr>
-              <a:t>IT WORKS ON A SMALL CORPUS TOO</a:t>
+              <a:t>IDEA TWO</a:t>
             </a:r>
             <a:endParaRPr lang="en-US" sz="1300" dirty="0"/>
           </a:p>
@@ -3603,7 +4176,7 @@
                 <a:ea typeface="Cambria" pitchFamily="34" charset="-122"/>
                 <a:cs typeface="Cambria" pitchFamily="34" charset="-120"/>
               </a:rPr>
-              <a:t>Trained on two novels, an hour ago</a:t>
+              <a:t>Pull the neighbours together, push the strangers apart</a:t>
             </a:r>
             <a:endParaRPr lang="en-US" sz="3400" dirty="0"/>
           </a:p>
@@ -3611,7 +4184,7 @@
       </p:sp>
       <p:pic>
         <p:nvPicPr>
-          <p:cNvPr id="4" name="Image 0" descr="/tmp/figs/w4_neighbours.png">    </p:cNvPr>
+          <p:cNvPr id="4" name="Image 0" descr="/tmp/figs/w4_contrastive_idea.png">    </p:cNvPr>
           <p:cNvPicPr>
             <a:picLocks noChangeAspect="1"/>
           </p:cNvPicPr>
@@ -3624,8 +4197,8 @@
         </p:blipFill>
         <p:spPr>
           <a:xfrm>
-            <a:off x="1554480" y="1828800"/>
-            <a:ext cx="9052560" cy="3931920"/>
+            <a:off x="1737360" y="1737360"/>
+            <a:ext cx="8778240" cy="4023360"/>
           </a:xfrm>
           <a:prstGeom prst="rect">
             <a:avLst/>
@@ -3665,9 +4238,48 @@
                 <a:ea typeface="Cambria" pitchFamily="34" charset="-122"/>
                 <a:cs typeface="Cambria" pitchFamily="34" charset="-120"/>
               </a:rPr>
-              <a:t>Trained this morning on 231,228 words of Frankenstein and Dracula. Nobody told it what a door is.</a:t>
+              <a:t>That is the whole training rule. It has a name — contrastive learning — and it is how most modern embeddings are made.</a:t>
             </a:r>
             <a:endParaRPr lang="en-US" sz="1600" dirty="0"/>
+          </a:p>
+        </p:txBody>
+      </p:sp>
+      <p:sp>
+        <p:nvSpPr>
+          <p:cNvPr id="6" name="Text 3"/>
+          <p:cNvSpPr/>
+          <p:nvPr/>
+        </p:nvSpPr>
+        <p:spPr>
+          <a:xfrm>
+            <a:off x="640080" y="6355080"/>
+            <a:ext cx="10881360" cy="320040"/>
+          </a:xfrm>
+          <a:prstGeom prst="rect">
+            <a:avLst/>
+          </a:prstGeom>
+          <a:noFill/>
+          <a:ln/>
+        </p:spPr>
+        <p:txBody>
+          <a:bodyPr wrap="square" rtlCol="0" anchor="ctr"/>
+          <a:lstStyle/>
+          <a:p>
+            <a:pPr indent="0" marL="0">
+              <a:buNone/>
+            </a:pPr>
+            <a:r>
+              <a:rPr lang="en-US" sz="1000" dirty="0">
+                <a:solidFill>
+                  <a:srgbClr val="6B6B63"/>
+                </a:solidFill>
+                <a:latin typeface="Calibri" pitchFamily="34" charset="0"/>
+                <a:ea typeface="Calibri" pitchFamily="34" charset="-122"/>
+                <a:cs typeface="Calibri" pitchFamily="34" charset="-120"/>
+              </a:rPr>
+              <a:t>Anchor, neighbour and the three random words all taken from this week's corpus. 849,738 pairs in one pass.</a:t>
+            </a:r>
+            <a:endParaRPr lang="en-US" sz="1000" dirty="0"/>
           </a:p>
         </p:txBody>
       </p:sp>
@@ -3730,13 +4342,13 @@
             <a:r>
               <a:rPr lang="en-US" sz="1300" b="1" spc="300" kern="0" dirty="0">
                 <a:solidFill>
-                  <a:srgbClr val="2E5F8A"/>
+                  <a:srgbClr val="B9852F"/>
                 </a:solidFill>
                 <a:latin typeface="Calibri" pitchFamily="34" charset="0"/>
                 <a:ea typeface="Calibri" pitchFamily="34" charset="-122"/>
                 <a:cs typeface="Calibri" pitchFamily="34" charset="-120"/>
               </a:rPr>
-              <a:t>THE MAP</a:t>
+              <a:t>THE SAME VECTORS, BEFORE AND AFTER</a:t>
             </a:r>
             <a:endParaRPr lang="en-US" sz="1300" dirty="0"/>
           </a:p>
@@ -3775,7 +4387,7 @@
                 <a:ea typeface="Cambria" pitchFamily="34" charset="-122"/>
                 <a:cs typeface="Cambria" pitchFamily="34" charset="-120"/>
               </a:rPr>
-              <a:t>Meaning becomes geometry</a:t>
+              <a:t>Nobody labelled the blocks</a:t>
             </a:r>
             <a:endParaRPr lang="en-US" sz="3400" dirty="0"/>
           </a:p>
@@ -3783,7 +4395,7 @@
       </p:sp>
       <p:pic>
         <p:nvPicPr>
-          <p:cNvPr id="4" name="Image 0" descr="/tmp/figs/w4_map.png">    </p:cNvPr>
+          <p:cNvPr id="4" name="Image 0" descr="/tmp/figs/w4_contrastive_result.png">    </p:cNvPr>
           <p:cNvPicPr>
             <a:picLocks noChangeAspect="1"/>
           </p:cNvPicPr>
@@ -3796,8 +4408,8 @@
         </p:blipFill>
         <p:spPr>
           <a:xfrm>
-            <a:off x="2011680" y="1737360"/>
-            <a:ext cx="8138160" cy="4114800"/>
+            <a:off x="1371600" y="1737360"/>
+            <a:ext cx="9418320" cy="4023360"/>
           </a:xfrm>
           <a:prstGeom prst="rect">
             <a:avLst/>
@@ -3837,48 +4449,9 @@
                 <a:ea typeface="Cambria" pitchFamily="34" charset="-122"/>
                 <a:cs typeface="Cambria" pitchFamily="34" charset="-120"/>
               </a:rPr>
-              <a:t>Times of day together. Family words together. Ship, sea and ice together. Nothing was labelled.</a:t>
+              <a:t>Twelve words, every pair compared. On the left they start as noise; on the right, times of day, family and rooms have found each other.</a:t>
             </a:r>
             <a:endParaRPr lang="en-US" sz="1600" dirty="0"/>
-          </a:p>
-        </p:txBody>
-      </p:sp>
-      <p:sp>
-        <p:nvSpPr>
-          <p:cNvPr id="6" name="Text 3"/>
-          <p:cNvSpPr/>
-          <p:nvPr/>
-        </p:nvSpPr>
-        <p:spPr>
-          <a:xfrm>
-            <a:off x="640080" y="6355080"/>
-            <a:ext cx="10881360" cy="320040"/>
-          </a:xfrm>
-          <a:prstGeom prst="rect">
-            <a:avLst/>
-          </a:prstGeom>
-          <a:noFill/>
-          <a:ln/>
-        </p:spPr>
-        <p:txBody>
-          <a:bodyPr wrap="square" rtlCol="0" anchor="ctr"/>
-          <a:lstStyle/>
-          <a:p>
-            <a:pPr indent="0" marL="0">
-              <a:buNone/>
-            </a:pPr>
-            <a:r>
-              <a:rPr lang="en-US" sz="1000" dirty="0">
-                <a:solidFill>
-                  <a:srgbClr val="6B6B63"/>
-                </a:solidFill>
-                <a:latin typeface="Calibri" pitchFamily="34" charset="0"/>
-                <a:ea typeface="Calibri" pitchFamily="34" charset="-122"/>
-                <a:cs typeface="Calibri" pitchFamily="34" charset="-120"/>
-              </a:rPr>
-              <a:t>Two dimensions of eighty; the picture always loses something. Next: the Embedding Projector, live.</a:t>
-            </a:r>
-            <a:endParaRPr lang="en-US" sz="1000" dirty="0"/>
           </a:p>
         </p:txBody>
       </p:sp>
@@ -3941,13 +4514,13 @@
             <a:r>
               <a:rPr lang="en-US" sz="1300" b="1" spc="300" kern="0" dirty="0">
                 <a:solidFill>
-                  <a:srgbClr val="7A3B2E"/>
+                  <a:srgbClr val="3F6F5F"/>
                 </a:solidFill>
                 <a:latin typeface="Calibri" pitchFamily="34" charset="0"/>
                 <a:ea typeface="Calibri" pitchFamily="34" charset="-122"/>
                 <a:cs typeface="Calibri" pitchFamily="34" charset="-120"/>
               </a:rPr>
-              <a:t>THE SAME GEOMETRY, THE OTHER RESULT</a:t>
+              <a:t>IT WORKS ON A SMALL CORPUS TOO</a:t>
             </a:r>
             <a:endParaRPr lang="en-US" sz="1300" dirty="0"/>
           </a:p>
@@ -3986,7 +4559,7 @@
                 <a:ea typeface="Cambria" pitchFamily="34" charset="-122"/>
                 <a:cs typeface="Cambria" pitchFamily="34" charset="-120"/>
               </a:rPr>
-              <a:t>Occupations closest to each group's words</a:t>
+              <a:t>Trained on two novels, an hour ago</a:t>
             </a:r>
             <a:endParaRPr lang="en-US" sz="3400" dirty="0"/>
           </a:p>
@@ -3994,7 +4567,7 @@
       </p:sp>
       <p:pic>
         <p:nvPicPr>
-          <p:cNvPr id="4" name="Image 0" descr="/tmp/figs/w4_paper_ethnic.png">    </p:cNvPr>
+          <p:cNvPr id="4" name="Image 0" descr="/tmp/figs/w4_neighbours.png">    </p:cNvPr>
           <p:cNvPicPr>
             <a:picLocks noChangeAspect="1"/>
           </p:cNvPicPr>
@@ -4007,8 +4580,8 @@
         </p:blipFill>
         <p:spPr>
           <a:xfrm>
-            <a:off x="3566160" y="1691640"/>
-            <a:ext cx="5120640" cy="4114800"/>
+            <a:off x="1554480" y="1828800"/>
+            <a:ext cx="9052560" cy="3931920"/>
           </a:xfrm>
           <a:prstGeom prst="rect">
             <a:avLst/>
@@ -4048,48 +4621,9 @@
                 <a:ea typeface="Cambria" pitchFamily="34" charset="-122"/>
                 <a:cs typeface="Cambria" pitchFamily="34" charset="-120"/>
               </a:rPr>
-              <a:t>Nobody labelled any of this. It is what a century of printed English put near what.</a:t>
+              <a:t>225,355 words of Frankenstein and Dracula, and no labels anywhere. Nobody told it what a door is.</a:t>
             </a:r>
             <a:endParaRPr lang="en-US" sz="1600" dirty="0"/>
-          </a:p>
-        </p:txBody>
-      </p:sp>
-      <p:sp>
-        <p:nvSpPr>
-          <p:cNvPr id="6" name="Text 3"/>
-          <p:cNvSpPr/>
-          <p:nvPr/>
-        </p:nvSpPr>
-        <p:spPr>
-          <a:xfrm>
-            <a:off x="640080" y="6355080"/>
-            <a:ext cx="10881360" cy="320040"/>
-          </a:xfrm>
-          <a:prstGeom prst="rect">
-            <a:avLst/>
-          </a:prstGeom>
-          <a:noFill/>
-          <a:ln/>
-        </p:spPr>
-        <p:txBody>
-          <a:bodyPr wrap="square" rtlCol="0" anchor="ctr"/>
-          <a:lstStyle/>
-          <a:p>
-            <a:pPr indent="0" marL="0">
-              <a:buNone/>
-            </a:pPr>
-            <a:r>
-              <a:rPr lang="en-US" sz="1000" dirty="0">
-                <a:solidFill>
-                  <a:srgbClr val="6B6B63"/>
-                </a:solidFill>
-                <a:latin typeface="Calibri" pitchFamily="34" charset="0"/>
-                <a:ea typeface="Calibri" pitchFamily="34" charset="-122"/>
-                <a:cs typeface="Calibri" pitchFamily="34" charset="-120"/>
-              </a:rPr>
-              <a:t>Fig. 1c, Garg, Schiebinger, Jurafsky &amp; Zou, PNAS 2018 (arXiv:1711.08412) · shown for teaching</a:t>
-            </a:r>
-            <a:endParaRPr lang="en-US" sz="1000" dirty="0"/>
           </a:p>
         </p:txBody>
       </p:sp>
@@ -4152,13 +4686,13 @@
             <a:r>
               <a:rPr lang="en-US" sz="1300" b="1" spc="300" kern="0" dirty="0">
                 <a:solidFill>
-                  <a:srgbClr val="B9852F"/>
+                  <a:srgbClr val="2E5F8A"/>
                 </a:solidFill>
                 <a:latin typeface="Calibri" pitchFamily="34" charset="0"/>
                 <a:ea typeface="Calibri" pitchFamily="34" charset="-122"/>
                 <a:cs typeface="Calibri" pitchFamily="34" charset="-120"/>
               </a:rPr>
-              <a:t>THE FAMOUS TRICK</a:t>
+              <a:t>THE MAP</a:t>
             </a:r>
             <a:endParaRPr lang="en-US" sz="1300" dirty="0"/>
           </a:p>
@@ -4197,420 +4731,110 @@
                 <a:ea typeface="Cambria" pitchFamily="34" charset="-122"/>
                 <a:cs typeface="Cambria" pitchFamily="34" charset="-120"/>
               </a:rPr>
-              <a:t>king − man + woman ≈ queen</a:t>
+              <a:t>Meaning becomes geometry</a:t>
             </a:r>
             <a:endParaRPr lang="en-US" sz="3400" dirty="0"/>
           </a:p>
         </p:txBody>
       </p:sp>
-      <p:sp>
-        <p:nvSpPr>
-          <p:cNvPr id="4" name="Shape 2"/>
-          <p:cNvSpPr/>
-          <p:nvPr/>
-        </p:nvSpPr>
-        <p:spPr>
-          <a:xfrm>
-            <a:off x="640080" y="1920240"/>
-            <a:ext cx="10881360" cy="1463040"/>
-          </a:xfrm>
-          <a:prstGeom prst="roundRect">
-            <a:avLst>
-              <a:gd name="adj" fmla="val 6250"/>
-            </a:avLst>
-          </a:prstGeom>
-          <a:solidFill>
-            <a:srgbClr val="F4EEE8"/>
-          </a:solidFill>
-          <a:ln/>
-        </p:spPr>
-      </p:sp>
-      <p:sp>
-        <p:nvSpPr>
-          <p:cNvPr id="5" name="Text 3"/>
-          <p:cNvSpPr/>
-          <p:nvPr/>
-        </p:nvSpPr>
-        <p:spPr>
-          <a:xfrm>
-            <a:off x="1005840" y="2148840"/>
-            <a:ext cx="10149840" cy="1005840"/>
-          </a:xfrm>
-          <a:prstGeom prst="rect">
-            <a:avLst/>
-          </a:prstGeom>
-          <a:noFill/>
-          <a:ln/>
-        </p:spPr>
-        <p:txBody>
-          <a:bodyPr wrap="square" lIns="0" tIns="0" rIns="0" bIns="0" rtlCol="0" anchor="ctr"/>
-          <a:lstStyle/>
-          <a:p>
-            <a:pPr indent="0" marL="0">
-              <a:buNone/>
-            </a:pPr>
-            <a:r>
-              <a:rPr lang="en-US" sz="1900" dirty="0">
-                <a:solidFill>
-                  <a:srgbClr val="7A3B2E"/>
-                </a:solidFill>
-                <a:latin typeface="Courier New" pitchFamily="34" charset="0"/>
-                <a:ea typeface="Courier New" pitchFamily="34" charset="-122"/>
-                <a:cs typeface="Courier New" pitchFamily="34" charset="-120"/>
-              </a:rPr>
-              <a:t>king − man + woman → queen        paris − france + japan → tokyo</a:t>
-            </a:r>
-            <a:endParaRPr lang="en-US" sz="1900" dirty="0"/>
-          </a:p>
-        </p:txBody>
-      </p:sp>
-      <p:sp>
-        <p:nvSpPr>
-          <p:cNvPr id="6" name="Text 4"/>
-          <p:cNvSpPr/>
-          <p:nvPr/>
-        </p:nvSpPr>
-        <p:spPr>
-          <a:xfrm>
-            <a:off x="640080" y="3657600"/>
-            <a:ext cx="5577840" cy="2194560"/>
-          </a:xfrm>
-          <a:prstGeom prst="rect">
-            <a:avLst/>
-          </a:prstGeom>
-          <a:noFill/>
-          <a:ln/>
-        </p:spPr>
-        <p:txBody>
-          <a:bodyPr wrap="square" rtlCol="0" anchor="t"/>
-          <a:lstStyle/>
-          <a:p>
-            <a:pPr marL="152400" indent="-152400">
-              <a:lnSpc>
-                <a:spcPct val="115000"/>
-              </a:lnSpc>
-              <a:spcAft>
-                <a:spcPts val="1000"/>
-              </a:spcAft>
-              <a:buSzPct val="100000"/>
-              <a:buChar char="•"/>
-            </a:pPr>
-            <a:r>
-              <a:rPr lang="en-US" sz="1600" dirty="0">
+      <p:pic>
+        <p:nvPicPr>
+          <p:cNvPr id="4" name="Image 0" descr="/tmp/figs/w4_map.png">    </p:cNvPr>
+          <p:cNvPicPr>
+            <a:picLocks noChangeAspect="1"/>
+          </p:cNvPicPr>
+          <p:nvPr/>
+        </p:nvPicPr>
+        <p:blipFill>
+          <a:blip r:embed="rId1"/>
+          <a:srcRect l="0" r="0" t="0" b="0"/>
+          <a:stretch/>
+        </p:blipFill>
+        <p:spPr>
+          <a:xfrm>
+            <a:off x="2011680" y="1737360"/>
+            <a:ext cx="8138160" cy="4114800"/>
+          </a:xfrm>
+          <a:prstGeom prst="rect">
+            <a:avLst/>
+          </a:prstGeom>
+        </p:spPr>
+      </p:pic>
+      <p:sp>
+        <p:nvSpPr>
+          <p:cNvPr id="5" name="Text 2"/>
+          <p:cNvSpPr/>
+          <p:nvPr/>
+        </p:nvSpPr>
+        <p:spPr>
+          <a:xfrm>
+            <a:off x="640080" y="5897880"/>
+            <a:ext cx="10881360" cy="411480"/>
+          </a:xfrm>
+          <a:prstGeom prst="rect">
+            <a:avLst/>
+          </a:prstGeom>
+          <a:noFill/>
+          <a:ln/>
+        </p:spPr>
+        <p:txBody>
+          <a:bodyPr wrap="square" rtlCol="0" anchor="ctr"/>
+          <a:lstStyle/>
+          <a:p>
+            <a:pPr indent="0" marL="0">
+              <a:buNone/>
+            </a:pPr>
+            <a:r>
+              <a:rPr lang="en-US" sz="1600" i="1" dirty="0">
                 <a:solidFill>
                   <a:srgbClr val="1A1A1A"/>
+                </a:solidFill>
+                <a:latin typeface="Cambria" pitchFamily="34" charset="0"/>
+                <a:ea typeface="Cambria" pitchFamily="34" charset="-122"/>
+                <a:cs typeface="Cambria" pitchFamily="34" charset="-120"/>
+              </a:rPr>
+              <a:t>Family words on one side. Door, room and window on the other. Night and morning at the bottom. Nothing was labelled.</a:t>
+            </a:r>
+            <a:endParaRPr lang="en-US" sz="1600" dirty="0"/>
+          </a:p>
+        </p:txBody>
+      </p:sp>
+      <p:sp>
+        <p:nvSpPr>
+          <p:cNvPr id="6" name="Text 3"/>
+          <p:cNvSpPr/>
+          <p:nvPr/>
+        </p:nvSpPr>
+        <p:spPr>
+          <a:xfrm>
+            <a:off x="640080" y="6355080"/>
+            <a:ext cx="10881360" cy="320040"/>
+          </a:xfrm>
+          <a:prstGeom prst="rect">
+            <a:avLst/>
+          </a:prstGeom>
+          <a:noFill/>
+          <a:ln/>
+        </p:spPr>
+        <p:txBody>
+          <a:bodyPr wrap="square" rtlCol="0" anchor="ctr"/>
+          <a:lstStyle/>
+          <a:p>
+            <a:pPr indent="0" marL="0">
+              <a:buNone/>
+            </a:pPr>
+            <a:r>
+              <a:rPr lang="en-US" sz="1000" dirty="0">
+                <a:solidFill>
+                  <a:srgbClr val="6B6B63"/>
                 </a:solidFill>
                 <a:latin typeface="Calibri" pitchFamily="34" charset="0"/>
                 <a:ea typeface="Calibri" pitchFamily="34" charset="-122"/>
                 <a:cs typeface="Calibri" pitchFamily="34" charset="-120"/>
               </a:rPr>
-              <a:t>Directions carry relationships nobody labelled.</a:t>
-            </a:r>
-            <a:endParaRPr lang="en-US" sz="1600" dirty="0"/>
-          </a:p>
-          <a:p>
-            <a:pPr marL="152400" indent="-152400">
-              <a:lnSpc>
-                <a:spcPct val="115000"/>
-              </a:lnSpc>
-              <a:spcAft>
-                <a:spcPts val="1000"/>
-              </a:spcAft>
-              <a:buSzPct val="100000"/>
-              <a:buChar char="•"/>
-            </a:pPr>
-            <a:r>
-              <a:rPr lang="en-US" sz="1600" dirty="0">
-                <a:solidFill>
-                  <a:srgbClr val="1A1A1A"/>
-                </a:solidFill>
-                <a:latin typeface="Calibri" pitchFamily="34" charset="0"/>
-                <a:ea typeface="Calibri" pitchFamily="34" charset="-122"/>
-                <a:cs typeface="Calibri" pitchFamily="34" charset="-120"/>
-              </a:rPr>
-              <a:t>The arithmetic is nudged, and most analogies fail. The famous four are the ones that worked.</a:t>
-            </a:r>
-            <a:endParaRPr lang="en-US" sz="1600" dirty="0"/>
-          </a:p>
-          <a:p>
-            <a:pPr marL="152400" indent="-152400">
-              <a:lnSpc>
-                <a:spcPct val="115000"/>
-              </a:lnSpc>
-              <a:spcAft>
-                <a:spcPts val="1000"/>
-              </a:spcAft>
-              <a:buSzPct val="100000"/>
-              <a:buChar char="•"/>
-            </a:pPr>
-            <a:r>
-              <a:rPr lang="en-US" sz="1600" dirty="0">
-                <a:solidFill>
-                  <a:srgbClr val="1A1A1A"/>
-                </a:solidFill>
-                <a:latin typeface="Calibri" pitchFamily="34" charset="0"/>
-                <a:ea typeface="Calibri" pitchFamily="34" charset="-122"/>
-                <a:cs typeface="Calibri" pitchFamily="34" charset="-120"/>
-              </a:rPr>
-              <a:t>Same geometry, other result: doctor − man + woman → nurse.</a:t>
-            </a:r>
-            <a:endParaRPr lang="en-US" sz="1600" dirty="0"/>
-          </a:p>
-        </p:txBody>
-      </p:sp>
-      <p:sp>
-        <p:nvSpPr>
-          <p:cNvPr id="7" name="Shape 5"/>
-          <p:cNvSpPr/>
-          <p:nvPr/>
-        </p:nvSpPr>
-        <p:spPr>
-          <a:xfrm>
-            <a:off x="6492240" y="3657600"/>
-            <a:ext cx="5029200" cy="2194560"/>
-          </a:xfrm>
-          <a:prstGeom prst="roundRect">
-            <a:avLst>
-              <a:gd name="adj" fmla="val 4167"/>
-            </a:avLst>
-          </a:prstGeom>
-          <a:solidFill>
-            <a:srgbClr val="F4EEE8"/>
-          </a:solidFill>
-          <a:ln/>
-        </p:spPr>
-      </p:sp>
-      <p:sp>
-        <p:nvSpPr>
-          <p:cNvPr id="8" name="Text 6"/>
-          <p:cNvSpPr/>
-          <p:nvPr/>
-        </p:nvSpPr>
-        <p:spPr>
-          <a:xfrm>
-            <a:off x="6766560" y="3840480"/>
-            <a:ext cx="2011680" cy="457200"/>
-          </a:xfrm>
-          <a:prstGeom prst="rect">
-            <a:avLst/>
-          </a:prstGeom>
-          <a:noFill/>
-          <a:ln/>
-        </p:spPr>
-        <p:txBody>
-          <a:bodyPr wrap="square" lIns="0" tIns="0" rIns="0" bIns="0" rtlCol="0" anchor="ctr"/>
-          <a:lstStyle/>
-          <a:p>
-            <a:pPr indent="0" marL="0">
-              <a:buNone/>
-            </a:pPr>
-            <a:r>
-              <a:rPr lang="en-US" sz="1600" b="1" dirty="0">
-                <a:solidFill>
-                  <a:srgbClr val="7A3B2E"/>
-                </a:solidFill>
-                <a:latin typeface="Cambria" pitchFamily="34" charset="0"/>
-                <a:ea typeface="Cambria" pitchFamily="34" charset="-122"/>
-                <a:cs typeface="Cambria" pitchFamily="34" charset="-120"/>
-              </a:rPr>
-              <a:t>static</a:t>
-            </a:r>
-            <a:endParaRPr lang="en-US" sz="1600" dirty="0"/>
-          </a:p>
-        </p:txBody>
-      </p:sp>
-      <p:sp>
-        <p:nvSpPr>
-          <p:cNvPr id="9" name="Text 7"/>
-          <p:cNvSpPr/>
-          <p:nvPr/>
-        </p:nvSpPr>
-        <p:spPr>
-          <a:xfrm>
-            <a:off x="8686800" y="3840480"/>
-            <a:ext cx="2651760" cy="457200"/>
-          </a:xfrm>
-          <a:prstGeom prst="rect">
-            <a:avLst/>
-          </a:prstGeom>
-          <a:noFill/>
-          <a:ln/>
-        </p:spPr>
-        <p:txBody>
-          <a:bodyPr wrap="square" lIns="0" tIns="0" rIns="0" bIns="0" rtlCol="0" anchor="ctr"/>
-          <a:lstStyle/>
-          <a:p>
-            <a:pPr indent="0" marL="0">
-              <a:buNone/>
-            </a:pPr>
-            <a:r>
-              <a:rPr lang="en-US" sz="1350" dirty="0">
-                <a:solidFill>
-                  <a:srgbClr val="1A1A1A"/>
-                </a:solidFill>
-                <a:latin typeface="Calibri" pitchFamily="34" charset="0"/>
-                <a:ea typeface="Calibri" pitchFamily="34" charset="-122"/>
-                <a:cs typeface="Calibri" pitchFamily="34" charset="-120"/>
-              </a:rPr>
-              <a:t>one vector per word</a:t>
-            </a:r>
-            <a:endParaRPr lang="en-US" sz="1350" dirty="0"/>
-          </a:p>
-        </p:txBody>
-      </p:sp>
-      <p:sp>
-        <p:nvSpPr>
-          <p:cNvPr id="10" name="Text 8"/>
-          <p:cNvSpPr/>
-          <p:nvPr/>
-        </p:nvSpPr>
-        <p:spPr>
-          <a:xfrm>
-            <a:off x="6766560" y="4498848"/>
-            <a:ext cx="2011680" cy="457200"/>
-          </a:xfrm>
-          <a:prstGeom prst="rect">
-            <a:avLst/>
-          </a:prstGeom>
-          <a:noFill/>
-          <a:ln/>
-        </p:spPr>
-        <p:txBody>
-          <a:bodyPr wrap="square" lIns="0" tIns="0" rIns="0" bIns="0" rtlCol="0" anchor="ctr"/>
-          <a:lstStyle/>
-          <a:p>
-            <a:pPr indent="0" marL="0">
-              <a:buNone/>
-            </a:pPr>
-            <a:r>
-              <a:rPr lang="en-US" sz="1600" b="1" dirty="0">
-                <a:solidFill>
-                  <a:srgbClr val="2E5F8A"/>
-                </a:solidFill>
-                <a:latin typeface="Cambria" pitchFamily="34" charset="0"/>
-                <a:ea typeface="Cambria" pitchFamily="34" charset="-122"/>
-                <a:cs typeface="Cambria" pitchFamily="34" charset="-120"/>
-              </a:rPr>
-              <a:t>contextual</a:t>
-            </a:r>
-            <a:endParaRPr lang="en-US" sz="1600" dirty="0"/>
-          </a:p>
-        </p:txBody>
-      </p:sp>
-      <p:sp>
-        <p:nvSpPr>
-          <p:cNvPr id="11" name="Text 9"/>
-          <p:cNvSpPr/>
-          <p:nvPr/>
-        </p:nvSpPr>
-        <p:spPr>
-          <a:xfrm>
-            <a:off x="8686800" y="4498848"/>
-            <a:ext cx="2651760" cy="457200"/>
-          </a:xfrm>
-          <a:prstGeom prst="rect">
-            <a:avLst/>
-          </a:prstGeom>
-          <a:noFill/>
-          <a:ln/>
-        </p:spPr>
-        <p:txBody>
-          <a:bodyPr wrap="square" lIns="0" tIns="0" rIns="0" bIns="0" rtlCol="0" anchor="ctr"/>
-          <a:lstStyle/>
-          <a:p>
-            <a:pPr indent="0" marL="0">
-              <a:buNone/>
-            </a:pPr>
-            <a:r>
-              <a:rPr lang="en-US" sz="1350" dirty="0">
-                <a:solidFill>
-                  <a:srgbClr val="1A1A1A"/>
-                </a:solidFill>
-                <a:latin typeface="Calibri" pitchFamily="34" charset="0"/>
-                <a:ea typeface="Calibri" pitchFamily="34" charset="-122"/>
-                <a:cs typeface="Calibri" pitchFamily="34" charset="-120"/>
-              </a:rPr>
-              <a:t>one per occurrence</a:t>
-            </a:r>
-            <a:endParaRPr lang="en-US" sz="1350" dirty="0"/>
-          </a:p>
-        </p:txBody>
-      </p:sp>
-      <p:sp>
-        <p:nvSpPr>
-          <p:cNvPr id="12" name="Text 10"/>
-          <p:cNvSpPr/>
-          <p:nvPr/>
-        </p:nvSpPr>
-        <p:spPr>
-          <a:xfrm>
-            <a:off x="6766560" y="5157216"/>
-            <a:ext cx="2011680" cy="457200"/>
-          </a:xfrm>
-          <a:prstGeom prst="rect">
-            <a:avLst/>
-          </a:prstGeom>
-          <a:noFill/>
-          <a:ln/>
-        </p:spPr>
-        <p:txBody>
-          <a:bodyPr wrap="square" lIns="0" tIns="0" rIns="0" bIns="0" rtlCol="0" anchor="ctr"/>
-          <a:lstStyle/>
-          <a:p>
-            <a:pPr indent="0" marL="0">
-              <a:buNone/>
-            </a:pPr>
-            <a:r>
-              <a:rPr lang="en-US" sz="1600" b="1" dirty="0">
-                <a:solidFill>
-                  <a:srgbClr val="3F6F5F"/>
-                </a:solidFill>
-                <a:latin typeface="Cambria" pitchFamily="34" charset="0"/>
-                <a:ea typeface="Cambria" pitchFamily="34" charset="-122"/>
-                <a:cs typeface="Cambria" pitchFamily="34" charset="-120"/>
-              </a:rPr>
-              <a:t>sentence</a:t>
-            </a:r>
-            <a:endParaRPr lang="en-US" sz="1600" dirty="0"/>
-          </a:p>
-        </p:txBody>
-      </p:sp>
-      <p:sp>
-        <p:nvSpPr>
-          <p:cNvPr id="13" name="Text 11"/>
-          <p:cNvSpPr/>
-          <p:nvPr/>
-        </p:nvSpPr>
-        <p:spPr>
-          <a:xfrm>
-            <a:off x="8686800" y="5157216"/>
-            <a:ext cx="2651760" cy="457200"/>
-          </a:xfrm>
-          <a:prstGeom prst="rect">
-            <a:avLst/>
-          </a:prstGeom>
-          <a:noFill/>
-          <a:ln/>
-        </p:spPr>
-        <p:txBody>
-          <a:bodyPr wrap="square" lIns="0" tIns="0" rIns="0" bIns="0" rtlCol="0" anchor="ctr"/>
-          <a:lstStyle/>
-          <a:p>
-            <a:pPr indent="0" marL="0">
-              <a:buNone/>
-            </a:pPr>
-            <a:r>
-              <a:rPr lang="en-US" sz="1350" dirty="0">
-                <a:solidFill>
-                  <a:srgbClr val="1A1A1A"/>
-                </a:solidFill>
-                <a:latin typeface="Calibri" pitchFamily="34" charset="0"/>
-                <a:ea typeface="Calibri" pitchFamily="34" charset="-122"/>
-                <a:cs typeface="Calibri" pitchFamily="34" charset="-120"/>
-              </a:rPr>
-              <a:t>one per document — Week 5</a:t>
-            </a:r>
-            <a:endParaRPr lang="en-US" sz="1350" dirty="0"/>
+              <a:t>Two dimensions of sixty; the picture always loses something. Next: the Embedding Projector, live.</a:t>
+            </a:r>
+            <a:endParaRPr lang="en-US" sz="1000" dirty="0"/>
           </a:p>
         </p:txBody>
       </p:sp>
@@ -4628,7 +4852,7 @@
     <p:bg>
       <p:bgPr>
         <a:solidFill>
-          <a:srgbClr val="4E261D"/>
+          <a:srgbClr val="FFFFFF"/>
         </a:solidFill>
       </p:bgPr>
     </p:bg>
@@ -4673,13 +4897,13 @@
             <a:r>
               <a:rPr lang="en-US" sz="1300" b="1" spc="300" kern="0" dirty="0">
                 <a:solidFill>
-                  <a:srgbClr val="B9852F"/>
+                  <a:srgbClr val="7A3B2E"/>
                 </a:solidFill>
                 <a:latin typeface="Calibri" pitchFamily="34" charset="0"/>
                 <a:ea typeface="Calibri" pitchFamily="34" charset="-122"/>
                 <a:cs typeface="Calibri" pitchFamily="34" charset="-120"/>
               </a:rPr>
-              <a:t>BREAK</a:t>
+              <a:t>THE SAME GEOMETRY, THE OTHER RESULT</a:t>
             </a:r>
             <a:endParaRPr lang="en-US" sz="1300" dirty="0"/>
           </a:p>
@@ -4693,47 +4917,70 @@
         </p:nvSpPr>
         <p:spPr>
           <a:xfrm>
-            <a:off x="640080" y="2377440"/>
-            <a:ext cx="10058400" cy="914400"/>
-          </a:xfrm>
-          <a:prstGeom prst="rect">
-            <a:avLst/>
-          </a:prstGeom>
-          <a:noFill/>
-          <a:ln/>
-        </p:spPr>
-        <p:txBody>
-          <a:bodyPr wrap="square" rtlCol="0" anchor="ctr"/>
-          <a:lstStyle/>
-          <a:p>
-            <a:pPr indent="0" marL="0">
-              <a:buNone/>
-            </a:pPr>
-            <a:r>
-              <a:rPr lang="en-US" sz="4000" b="1" dirty="0">
-                <a:solidFill>
-                  <a:srgbClr val="FFFFFF"/>
+            <a:off x="640080" y="868680"/>
+            <a:ext cx="10972800" cy="777240"/>
+          </a:xfrm>
+          <a:prstGeom prst="rect">
+            <a:avLst/>
+          </a:prstGeom>
+          <a:noFill/>
+          <a:ln/>
+        </p:spPr>
+        <p:txBody>
+          <a:bodyPr wrap="square" rtlCol="0" anchor="t"/>
+          <a:lstStyle/>
+          <a:p>
+            <a:pPr indent="0" marL="0">
+              <a:buNone/>
+            </a:pPr>
+            <a:r>
+              <a:rPr lang="en-US" sz="3400" b="1" dirty="0">
+                <a:solidFill>
+                  <a:srgbClr val="1A1A1A"/>
                 </a:solidFill>
                 <a:latin typeface="Cambria" pitchFamily="34" charset="0"/>
                 <a:ea typeface="Cambria" pitchFamily="34" charset="-122"/>
                 <a:cs typeface="Cambria" pitchFamily="34" charset="-120"/>
               </a:rPr>
-              <a:t>Ten minutes</a:t>
-            </a:r>
-            <a:endParaRPr lang="en-US" sz="4000" dirty="0"/>
-          </a:p>
-        </p:txBody>
-      </p:sp>
-      <p:sp>
-        <p:nvSpPr>
-          <p:cNvPr id="4" name="Text 2"/>
-          <p:cNvSpPr/>
-          <p:nvPr/>
-        </p:nvSpPr>
-        <p:spPr>
-          <a:xfrm>
-            <a:off x="640080" y="3383280"/>
-            <a:ext cx="10058400" cy="548640"/>
+              <a:t>Occupations closest to each group's words</a:t>
+            </a:r>
+            <a:endParaRPr lang="en-US" sz="3400" dirty="0"/>
+          </a:p>
+        </p:txBody>
+      </p:sp>
+      <p:pic>
+        <p:nvPicPr>
+          <p:cNvPr id="4" name="Image 0" descr="/tmp/figs/w4_paper_ethnic.png">    </p:cNvPr>
+          <p:cNvPicPr>
+            <a:picLocks noChangeAspect="1"/>
+          </p:cNvPicPr>
+          <p:nvPr/>
+        </p:nvPicPr>
+        <p:blipFill>
+          <a:blip r:embed="rId1"/>
+          <a:srcRect l="0" r="0" t="0" b="0"/>
+          <a:stretch/>
+        </p:blipFill>
+        <p:spPr>
+          <a:xfrm>
+            <a:off x="3566160" y="1691640"/>
+            <a:ext cx="5120640" cy="4114800"/>
+          </a:xfrm>
+          <a:prstGeom prst="rect">
+            <a:avLst/>
+          </a:prstGeom>
+        </p:spPr>
+      </p:pic>
+      <p:sp>
+        <p:nvSpPr>
+          <p:cNvPr id="5" name="Text 2"/>
+          <p:cNvSpPr/>
+          <p:nvPr/>
+        </p:nvSpPr>
+        <p:spPr>
+          <a:xfrm>
+            <a:off x="640080" y="5897880"/>
+            <a:ext cx="10881360" cy="411480"/>
           </a:xfrm>
           <a:prstGeom prst="rect">
             <a:avLst/>
@@ -4749,17 +4996,56 @@
               <a:buNone/>
             </a:pPr>
             <a:r>
-              <a:rPr lang="en-US" sz="1800" i="1" dirty="0">
-                <a:solidFill>
-                  <a:srgbClr val="E8DCD6"/>
+              <a:rPr lang="en-US" sz="1600" i="1" dirty="0">
+                <a:solidFill>
+                  <a:srgbClr val="1A1A1A"/>
+                </a:solidFill>
+                <a:latin typeface="Cambria" pitchFamily="34" charset="0"/>
+                <a:ea typeface="Cambria" pitchFamily="34" charset="-122"/>
+                <a:cs typeface="Cambria" pitchFamily="34" charset="-120"/>
+              </a:rPr>
+              <a:t>Nobody labelled any of this. It is what a century of printed English put near what.</a:t>
+            </a:r>
+            <a:endParaRPr lang="en-US" sz="1600" dirty="0"/>
+          </a:p>
+        </p:txBody>
+      </p:sp>
+      <p:sp>
+        <p:nvSpPr>
+          <p:cNvPr id="6" name="Text 3"/>
+          <p:cNvSpPr/>
+          <p:nvPr/>
+        </p:nvSpPr>
+        <p:spPr>
+          <a:xfrm>
+            <a:off x="640080" y="6355080"/>
+            <a:ext cx="10881360" cy="320040"/>
+          </a:xfrm>
+          <a:prstGeom prst="rect">
+            <a:avLst/>
+          </a:prstGeom>
+          <a:noFill/>
+          <a:ln/>
+        </p:spPr>
+        <p:txBody>
+          <a:bodyPr wrap="square" rtlCol="0" anchor="ctr"/>
+          <a:lstStyle/>
+          <a:p>
+            <a:pPr indent="0" marL="0">
+              <a:buNone/>
+            </a:pPr>
+            <a:r>
+              <a:rPr lang="en-US" sz="1000" dirty="0">
+                <a:solidFill>
+                  <a:srgbClr val="6B6B63"/>
                 </a:solidFill>
                 <a:latin typeface="Calibri" pitchFamily="34" charset="0"/>
                 <a:ea typeface="Calibri" pitchFamily="34" charset="-122"/>
                 <a:cs typeface="Calibri" pitchFamily="34" charset="-120"/>
               </a:rPr>
-              <a:t>Then: where your corpus actually comes from.</a:t>
-            </a:r>
-            <a:endParaRPr lang="en-US" sz="1800" dirty="0"/>
+              <a:t>Fig. 1c, Garg, Schiebinger, Jurafsky &amp; Zou, PNAS 2018 (arXiv:1711.08412) · shown for teaching</a:t>
+            </a:r>
+            <a:endParaRPr lang="en-US" sz="1000" dirty="0"/>
           </a:p>
         </p:txBody>
       </p:sp>
@@ -4822,13 +5108,13 @@
             <a:r>
               <a:rPr lang="en-US" sz="1300" b="1" spc="300" kern="0" dirty="0">
                 <a:solidFill>
-                  <a:srgbClr val="7A3B2E"/>
+                  <a:srgbClr val="B9852F"/>
                 </a:solidFill>
                 <a:latin typeface="Calibri" pitchFamily="34" charset="0"/>
                 <a:ea typeface="Calibri" pitchFamily="34" charset="-122"/>
                 <a:cs typeface="Calibri" pitchFamily="34" charset="-120"/>
               </a:rPr>
-              <a:t>GETTING THE DATA</a:t>
+              <a:t>THE FAMOUS TRICK</a:t>
             </a:r>
             <a:endParaRPr lang="en-US" sz="1300" dirty="0"/>
           </a:p>
@@ -4867,7 +5153,7 @@
                 <a:ea typeface="Cambria" pitchFamily="34" charset="-122"/>
                 <a:cs typeface="Cambria" pitchFamily="34" charset="-120"/>
               </a:rPr>
-              <a:t>Three routes, in the order you should try them</a:t>
+              <a:t>king − man + woman ≈ queen</a:t>
             </a:r>
             <a:endParaRPr lang="en-US" sz="3400" dirty="0"/>
           </a:p>
@@ -4881,12 +5167,12 @@
         </p:nvSpPr>
         <p:spPr>
           <a:xfrm>
-            <a:off x="640080" y="2011680"/>
-            <a:ext cx="10881360" cy="1143000"/>
+            <a:off x="640080" y="1920240"/>
+            <a:ext cx="10881360" cy="1463040"/>
           </a:xfrm>
           <a:prstGeom prst="roundRect">
             <a:avLst>
-              <a:gd name="adj" fmla="val 8000"/>
+              <a:gd name="adj" fmla="val 6250"/>
             </a:avLst>
           </a:prstGeom>
           <a:solidFill>
@@ -4897,73 +5183,208 @@
       </p:sp>
       <p:sp>
         <p:nvSpPr>
-          <p:cNvPr id="5" name="Shape 3"/>
-          <p:cNvSpPr/>
-          <p:nvPr/>
-        </p:nvSpPr>
-        <p:spPr>
-          <a:xfrm>
-            <a:off x="914400" y="2304288"/>
-            <a:ext cx="548640" cy="548640"/>
-          </a:xfrm>
-          <a:prstGeom prst="ellipse">
-            <a:avLst/>
+          <p:cNvPr id="5" name="Text 3"/>
+          <p:cNvSpPr/>
+          <p:nvPr/>
+        </p:nvSpPr>
+        <p:spPr>
+          <a:xfrm>
+            <a:off x="1005840" y="2148840"/>
+            <a:ext cx="10149840" cy="1005840"/>
+          </a:xfrm>
+          <a:prstGeom prst="rect">
+            <a:avLst/>
+          </a:prstGeom>
+          <a:noFill/>
+          <a:ln/>
+        </p:spPr>
+        <p:txBody>
+          <a:bodyPr wrap="square" lIns="0" tIns="0" rIns="0" bIns="0" rtlCol="0" anchor="ctr"/>
+          <a:lstStyle/>
+          <a:p>
+            <a:pPr indent="0" marL="0">
+              <a:buNone/>
+            </a:pPr>
+            <a:r>
+              <a:rPr lang="en-US" sz="1900" dirty="0">
+                <a:solidFill>
+                  <a:srgbClr val="7A3B2E"/>
+                </a:solidFill>
+                <a:latin typeface="Courier New" pitchFamily="34" charset="0"/>
+                <a:ea typeface="Courier New" pitchFamily="34" charset="-122"/>
+                <a:cs typeface="Courier New" pitchFamily="34" charset="-120"/>
+              </a:rPr>
+              <a:t>king − man + woman → queen        paris − france + japan → tokyo</a:t>
+            </a:r>
+            <a:endParaRPr lang="en-US" sz="1900" dirty="0"/>
+          </a:p>
+        </p:txBody>
+      </p:sp>
+      <p:sp>
+        <p:nvSpPr>
+          <p:cNvPr id="6" name="Text 4"/>
+          <p:cNvSpPr/>
+          <p:nvPr/>
+        </p:nvSpPr>
+        <p:spPr>
+          <a:xfrm>
+            <a:off x="640080" y="3657600"/>
+            <a:ext cx="5577840" cy="2194560"/>
+          </a:xfrm>
+          <a:prstGeom prst="rect">
+            <a:avLst/>
+          </a:prstGeom>
+          <a:noFill/>
+          <a:ln/>
+        </p:spPr>
+        <p:txBody>
+          <a:bodyPr wrap="square" rtlCol="0" anchor="t"/>
+          <a:lstStyle/>
+          <a:p>
+            <a:pPr marL="152400" indent="-152400">
+              <a:lnSpc>
+                <a:spcPct val="115000"/>
+              </a:lnSpc>
+              <a:spcAft>
+                <a:spcPts val="1000"/>
+              </a:spcAft>
+              <a:buSzPct val="100000"/>
+              <a:buChar char="•"/>
+            </a:pPr>
+            <a:r>
+              <a:rPr lang="en-US" sz="1600" dirty="0">
+                <a:solidFill>
+                  <a:srgbClr val="1A1A1A"/>
+                </a:solidFill>
+                <a:latin typeface="Calibri" pitchFamily="34" charset="0"/>
+                <a:ea typeface="Calibri" pitchFamily="34" charset="-122"/>
+                <a:cs typeface="Calibri" pitchFamily="34" charset="-120"/>
+              </a:rPr>
+              <a:t>Directions carry relationships nobody labelled.</a:t>
+            </a:r>
+            <a:endParaRPr lang="en-US" sz="1600" dirty="0"/>
+          </a:p>
+          <a:p>
+            <a:pPr marL="152400" indent="-152400">
+              <a:lnSpc>
+                <a:spcPct val="115000"/>
+              </a:lnSpc>
+              <a:spcAft>
+                <a:spcPts val="1000"/>
+              </a:spcAft>
+              <a:buSzPct val="100000"/>
+              <a:buChar char="•"/>
+            </a:pPr>
+            <a:r>
+              <a:rPr lang="en-US" sz="1600" dirty="0">
+                <a:solidFill>
+                  <a:srgbClr val="1A1A1A"/>
+                </a:solidFill>
+                <a:latin typeface="Calibri" pitchFamily="34" charset="0"/>
+                <a:ea typeface="Calibri" pitchFamily="34" charset="-122"/>
+                <a:cs typeface="Calibri" pitchFamily="34" charset="-120"/>
+              </a:rPr>
+              <a:t>The arithmetic is nudged, and most analogies fail. The famous four are the ones that worked.</a:t>
+            </a:r>
+            <a:endParaRPr lang="en-US" sz="1600" dirty="0"/>
+          </a:p>
+          <a:p>
+            <a:pPr marL="152400" indent="-152400">
+              <a:lnSpc>
+                <a:spcPct val="115000"/>
+              </a:lnSpc>
+              <a:spcAft>
+                <a:spcPts val="1000"/>
+              </a:spcAft>
+              <a:buSzPct val="100000"/>
+              <a:buChar char="•"/>
+            </a:pPr>
+            <a:r>
+              <a:rPr lang="en-US" sz="1600" dirty="0">
+                <a:solidFill>
+                  <a:srgbClr val="1A1A1A"/>
+                </a:solidFill>
+                <a:latin typeface="Calibri" pitchFamily="34" charset="0"/>
+                <a:ea typeface="Calibri" pitchFamily="34" charset="-122"/>
+                <a:cs typeface="Calibri" pitchFamily="34" charset="-120"/>
+              </a:rPr>
+              <a:t>Same geometry, other result: doctor − man + woman → nurse.</a:t>
+            </a:r>
+            <a:endParaRPr lang="en-US" sz="1600" dirty="0"/>
+          </a:p>
+        </p:txBody>
+      </p:sp>
+      <p:sp>
+        <p:nvSpPr>
+          <p:cNvPr id="7" name="Shape 5"/>
+          <p:cNvSpPr/>
+          <p:nvPr/>
+        </p:nvSpPr>
+        <p:spPr>
+          <a:xfrm>
+            <a:off x="6492240" y="3657600"/>
+            <a:ext cx="5029200" cy="2194560"/>
+          </a:xfrm>
+          <a:prstGeom prst="roundRect">
+            <a:avLst>
+              <a:gd name="adj" fmla="val 4167"/>
+            </a:avLst>
           </a:prstGeom>
           <a:solidFill>
-            <a:srgbClr val="3F6F5F"/>
+            <a:srgbClr val="F4EEE8"/>
           </a:solidFill>
           <a:ln/>
         </p:spPr>
       </p:sp>
       <p:sp>
         <p:nvSpPr>
-          <p:cNvPr id="6" name="Text 4"/>
-          <p:cNvSpPr/>
-          <p:nvPr/>
-        </p:nvSpPr>
-        <p:spPr>
-          <a:xfrm>
-            <a:off x="914400" y="2304288"/>
-            <a:ext cx="548640" cy="548640"/>
-          </a:xfrm>
-          <a:prstGeom prst="rect">
-            <a:avLst/>
-          </a:prstGeom>
-          <a:noFill/>
-          <a:ln/>
-        </p:spPr>
-        <p:txBody>
-          <a:bodyPr wrap="square" rtlCol="0" anchor="ctr"/>
-          <a:lstStyle/>
-          <a:p>
-            <a:pPr algn="ctr" indent="0" marL="0">
-              <a:buNone/>
-            </a:pPr>
-            <a:r>
-              <a:rPr lang="en-US" sz="1900" b="1" dirty="0">
-                <a:solidFill>
-                  <a:srgbClr val="FFFFFF"/>
+          <p:cNvPr id="8" name="Text 6"/>
+          <p:cNvSpPr/>
+          <p:nvPr/>
+        </p:nvSpPr>
+        <p:spPr>
+          <a:xfrm>
+            <a:off x="6766560" y="3840480"/>
+            <a:ext cx="2011680" cy="457200"/>
+          </a:xfrm>
+          <a:prstGeom prst="rect">
+            <a:avLst/>
+          </a:prstGeom>
+          <a:noFill/>
+          <a:ln/>
+        </p:spPr>
+        <p:txBody>
+          <a:bodyPr wrap="square" lIns="0" tIns="0" rIns="0" bIns="0" rtlCol="0" anchor="ctr"/>
+          <a:lstStyle/>
+          <a:p>
+            <a:pPr indent="0" marL="0">
+              <a:buNone/>
+            </a:pPr>
+            <a:r>
+              <a:rPr lang="en-US" sz="1600" b="1" dirty="0">
+                <a:solidFill>
+                  <a:srgbClr val="7A3B2E"/>
                 </a:solidFill>
                 <a:latin typeface="Cambria" pitchFamily="34" charset="0"/>
                 <a:ea typeface="Cambria" pitchFamily="34" charset="-122"/>
                 <a:cs typeface="Cambria" pitchFamily="34" charset="-120"/>
               </a:rPr>
-              <a:t>1</a:t>
-            </a:r>
-            <a:endParaRPr lang="en-US" sz="1900" dirty="0"/>
-          </a:p>
-        </p:txBody>
-      </p:sp>
-      <p:sp>
-        <p:nvSpPr>
-          <p:cNvPr id="7" name="Text 5"/>
-          <p:cNvSpPr/>
-          <p:nvPr/>
-        </p:nvSpPr>
-        <p:spPr>
-          <a:xfrm>
-            <a:off x="1645920" y="2176272"/>
-            <a:ext cx="2834640" cy="457200"/>
+              <a:t>static</a:t>
+            </a:r>
+            <a:endParaRPr lang="en-US" sz="1600" dirty="0"/>
+          </a:p>
+        </p:txBody>
+      </p:sp>
+      <p:sp>
+        <p:nvSpPr>
+          <p:cNvPr id="9" name="Text 7"/>
+          <p:cNvSpPr/>
+          <p:nvPr/>
+        </p:nvSpPr>
+        <p:spPr>
+          <a:xfrm>
+            <a:off x="8686800" y="3840480"/>
+            <a:ext cx="2651760" cy="457200"/>
           </a:xfrm>
           <a:prstGeom prst="rect">
             <a:avLst/>
@@ -4979,39 +5400,78 @@
               <a:buNone/>
             </a:pPr>
             <a:r>
-              <a:rPr lang="en-US" sz="1800" b="1" dirty="0">
+              <a:rPr lang="en-US" sz="1350" dirty="0">
                 <a:solidFill>
                   <a:srgbClr val="1A1A1A"/>
+                </a:solidFill>
+                <a:latin typeface="Calibri" pitchFamily="34" charset="0"/>
+                <a:ea typeface="Calibri" pitchFamily="34" charset="-122"/>
+                <a:cs typeface="Calibri" pitchFamily="34" charset="-120"/>
+              </a:rPr>
+              <a:t>one vector per word</a:t>
+            </a:r>
+            <a:endParaRPr lang="en-US" sz="1350" dirty="0"/>
+          </a:p>
+        </p:txBody>
+      </p:sp>
+      <p:sp>
+        <p:nvSpPr>
+          <p:cNvPr id="10" name="Text 8"/>
+          <p:cNvSpPr/>
+          <p:nvPr/>
+        </p:nvSpPr>
+        <p:spPr>
+          <a:xfrm>
+            <a:off x="6766560" y="4498848"/>
+            <a:ext cx="2011680" cy="457200"/>
+          </a:xfrm>
+          <a:prstGeom prst="rect">
+            <a:avLst/>
+          </a:prstGeom>
+          <a:noFill/>
+          <a:ln/>
+        </p:spPr>
+        <p:txBody>
+          <a:bodyPr wrap="square" lIns="0" tIns="0" rIns="0" bIns="0" rtlCol="0" anchor="ctr"/>
+          <a:lstStyle/>
+          <a:p>
+            <a:pPr indent="0" marL="0">
+              <a:buNone/>
+            </a:pPr>
+            <a:r>
+              <a:rPr lang="en-US" sz="1600" b="1" dirty="0">
+                <a:solidFill>
+                  <a:srgbClr val="2E5F8A"/>
                 </a:solidFill>
                 <a:latin typeface="Cambria" pitchFamily="34" charset="0"/>
                 <a:ea typeface="Cambria" pitchFamily="34" charset="-122"/>
                 <a:cs typeface="Cambria" pitchFamily="34" charset="-120"/>
               </a:rPr>
-              <a:t>A prepared file</a:t>
-            </a:r>
-            <a:endParaRPr lang="en-US" sz="1800" dirty="0"/>
-          </a:p>
-        </p:txBody>
-      </p:sp>
-      <p:sp>
-        <p:nvSpPr>
-          <p:cNvPr id="8" name="Text 6"/>
-          <p:cNvSpPr/>
-          <p:nvPr/>
-        </p:nvSpPr>
-        <p:spPr>
-          <a:xfrm>
-            <a:off x="4572000" y="2194560"/>
-            <a:ext cx="6675120" cy="822960"/>
-          </a:xfrm>
-          <a:prstGeom prst="rect">
-            <a:avLst/>
-          </a:prstGeom>
-          <a:noFill/>
-          <a:ln/>
-        </p:spPr>
-        <p:txBody>
-          <a:bodyPr wrap="square" lIns="0" tIns="0" rIns="0" bIns="0" rtlCol="0" anchor="t"/>
+              <a:t>contextual</a:t>
+            </a:r>
+            <a:endParaRPr lang="en-US" sz="1600" dirty="0"/>
+          </a:p>
+        </p:txBody>
+      </p:sp>
+      <p:sp>
+        <p:nvSpPr>
+          <p:cNvPr id="11" name="Text 9"/>
+          <p:cNvSpPr/>
+          <p:nvPr/>
+        </p:nvSpPr>
+        <p:spPr>
+          <a:xfrm>
+            <a:off x="8686800" y="4498848"/>
+            <a:ext cx="2651760" cy="457200"/>
+          </a:xfrm>
+          <a:prstGeom prst="rect">
+            <a:avLst/>
+          </a:prstGeom>
+          <a:noFill/>
+          <a:ln/>
+        </p:spPr>
+        <p:txBody>
+          <a:bodyPr wrap="square" lIns="0" tIns="0" rIns="0" bIns="0" rtlCol="0" anchor="ctr"/>
           <a:lstStyle/>
           <a:p>
             <a:pPr indent="0" marL="0">
@@ -5026,7 +5486,7 @@
                 <a:ea typeface="Calibri" pitchFamily="34" charset="-122"/>
                 <a:cs typeface="Calibri" pitchFamily="34" charset="-120"/>
               </a:rPr>
-              <a:t>pd.read_csv(url) · gdown · load_dataset(). Most projects should stop here.</a:t>
+              <a:t>one per occurrence</a:t>
             </a:r>
             <a:endParaRPr lang="en-US" sz="1350" dirty="0"/>
           </a:p>
@@ -5034,95 +5494,53 @@
       </p:sp>
       <p:sp>
         <p:nvSpPr>
-          <p:cNvPr id="9" name="Shape 7"/>
-          <p:cNvSpPr/>
-          <p:nvPr/>
-        </p:nvSpPr>
-        <p:spPr>
-          <a:xfrm>
-            <a:off x="640080" y="3337560"/>
-            <a:ext cx="10881360" cy="1143000"/>
-          </a:xfrm>
-          <a:prstGeom prst="roundRect">
-            <a:avLst>
-              <a:gd name="adj" fmla="val 8000"/>
-            </a:avLst>
-          </a:prstGeom>
-          <a:solidFill>
-            <a:srgbClr val="F4EEE8"/>
-          </a:solidFill>
-          <a:ln/>
-        </p:spPr>
-      </p:sp>
-      <p:sp>
-        <p:nvSpPr>
-          <p:cNvPr id="10" name="Shape 8"/>
-          <p:cNvSpPr/>
-          <p:nvPr/>
-        </p:nvSpPr>
-        <p:spPr>
-          <a:xfrm>
-            <a:off x="914400" y="3630168"/>
-            <a:ext cx="548640" cy="548640"/>
-          </a:xfrm>
-          <a:prstGeom prst="ellipse">
-            <a:avLst/>
-          </a:prstGeom>
-          <a:solidFill>
-            <a:srgbClr val="2E5F8A"/>
-          </a:solidFill>
-          <a:ln/>
-        </p:spPr>
-      </p:sp>
-      <p:sp>
-        <p:nvSpPr>
-          <p:cNvPr id="11" name="Text 9"/>
-          <p:cNvSpPr/>
-          <p:nvPr/>
-        </p:nvSpPr>
-        <p:spPr>
-          <a:xfrm>
-            <a:off x="914400" y="3630168"/>
-            <a:ext cx="548640" cy="548640"/>
-          </a:xfrm>
-          <a:prstGeom prst="rect">
-            <a:avLst/>
-          </a:prstGeom>
-          <a:noFill/>
-          <a:ln/>
-        </p:spPr>
-        <p:txBody>
-          <a:bodyPr wrap="square" rtlCol="0" anchor="ctr"/>
-          <a:lstStyle/>
-          <a:p>
-            <a:pPr algn="ctr" indent="0" marL="0">
-              <a:buNone/>
-            </a:pPr>
-            <a:r>
-              <a:rPr lang="en-US" sz="1900" b="1" dirty="0">
-                <a:solidFill>
-                  <a:srgbClr val="FFFFFF"/>
+          <p:cNvPr id="12" name="Text 10"/>
+          <p:cNvSpPr/>
+          <p:nvPr/>
+        </p:nvSpPr>
+        <p:spPr>
+          <a:xfrm>
+            <a:off x="6766560" y="5157216"/>
+            <a:ext cx="2011680" cy="457200"/>
+          </a:xfrm>
+          <a:prstGeom prst="rect">
+            <a:avLst/>
+          </a:prstGeom>
+          <a:noFill/>
+          <a:ln/>
+        </p:spPr>
+        <p:txBody>
+          <a:bodyPr wrap="square" lIns="0" tIns="0" rIns="0" bIns="0" rtlCol="0" anchor="ctr"/>
+          <a:lstStyle/>
+          <a:p>
+            <a:pPr indent="0" marL="0">
+              <a:buNone/>
+            </a:pPr>
+            <a:r>
+              <a:rPr lang="en-US" sz="1600" b="1" dirty="0">
+                <a:solidFill>
+                  <a:srgbClr val="3F6F5F"/>
                 </a:solidFill>
                 <a:latin typeface="Cambria" pitchFamily="34" charset="0"/>
                 <a:ea typeface="Cambria" pitchFamily="34" charset="-122"/>
                 <a:cs typeface="Cambria" pitchFamily="34" charset="-120"/>
               </a:rPr>
-              <a:t>2</a:t>
-            </a:r>
-            <a:endParaRPr lang="en-US" sz="1900" dirty="0"/>
-          </a:p>
-        </p:txBody>
-      </p:sp>
-      <p:sp>
-        <p:nvSpPr>
-          <p:cNvPr id="12" name="Text 10"/>
-          <p:cNvSpPr/>
-          <p:nvPr/>
-        </p:nvSpPr>
-        <p:spPr>
-          <a:xfrm>
-            <a:off x="1645920" y="3502152"/>
-            <a:ext cx="2834640" cy="457200"/>
+              <a:t>sentence</a:t>
+            </a:r>
+            <a:endParaRPr lang="en-US" sz="1600" dirty="0"/>
+          </a:p>
+        </p:txBody>
+      </p:sp>
+      <p:sp>
+        <p:nvSpPr>
+          <p:cNvPr id="13" name="Text 11"/>
+          <p:cNvSpPr/>
+          <p:nvPr/>
+        </p:nvSpPr>
+        <p:spPr>
+          <a:xfrm>
+            <a:off x="8686800" y="5157216"/>
+            <a:ext cx="2651760" cy="457200"/>
           </a:xfrm>
           <a:prstGeom prst="rect">
             <a:avLst/>
@@ -5132,45 +5550,6 @@
         </p:spPr>
         <p:txBody>
           <a:bodyPr wrap="square" lIns="0" tIns="0" rIns="0" bIns="0" rtlCol="0" anchor="ctr"/>
-          <a:lstStyle/>
-          <a:p>
-            <a:pPr indent="0" marL="0">
-              <a:buNone/>
-            </a:pPr>
-            <a:r>
-              <a:rPr lang="en-US" sz="1800" b="1" dirty="0">
-                <a:solidFill>
-                  <a:srgbClr val="1A1A1A"/>
-                </a:solidFill>
-                <a:latin typeface="Cambria" pitchFamily="34" charset="0"/>
-                <a:ea typeface="Cambria" pitchFamily="34" charset="-122"/>
-                <a:cs typeface="Cambria" pitchFamily="34" charset="-120"/>
-              </a:rPr>
-              <a:t>An API</a:t>
-            </a:r>
-            <a:endParaRPr lang="en-US" sz="1800" dirty="0"/>
-          </a:p>
-        </p:txBody>
-      </p:sp>
-      <p:sp>
-        <p:nvSpPr>
-          <p:cNvPr id="13" name="Text 11"/>
-          <p:cNvSpPr/>
-          <p:nvPr/>
-        </p:nvSpPr>
-        <p:spPr>
-          <a:xfrm>
-            <a:off x="4572000" y="3520440"/>
-            <a:ext cx="6675120" cy="822960"/>
-          </a:xfrm>
-          <a:prstGeom prst="rect">
-            <a:avLst/>
-          </a:prstGeom>
-          <a:noFill/>
-          <a:ln/>
-        </p:spPr>
-        <p:txBody>
-          <a:bodyPr wrap="square" lIns="0" tIns="0" rIns="0" bIns="0" rtlCol="0" anchor="t"/>
           <a:lstStyle/>
           <a:p>
             <a:pPr indent="0" marL="0">
@@ -5185,207 +5564,9 @@
                 <a:ea typeface="Calibri" pitchFamily="34" charset="-122"/>
                 <a:cs typeface="Calibri" pitchFamily="34" charset="-120"/>
               </a:rPr>
-              <a:t>A documented URL that returns JSON. Four words: endpoint, key, pagination, rate limit.</a:t>
+              <a:t>one per document — Week 5</a:t>
             </a:r>
             <a:endParaRPr lang="en-US" sz="1350" dirty="0"/>
-          </a:p>
-        </p:txBody>
-      </p:sp>
-      <p:sp>
-        <p:nvSpPr>
-          <p:cNvPr id="14" name="Shape 12"/>
-          <p:cNvSpPr/>
-          <p:nvPr/>
-        </p:nvSpPr>
-        <p:spPr>
-          <a:xfrm>
-            <a:off x="640080" y="4663440"/>
-            <a:ext cx="10881360" cy="1143000"/>
-          </a:xfrm>
-          <a:prstGeom prst="roundRect">
-            <a:avLst>
-              <a:gd name="adj" fmla="val 8000"/>
-            </a:avLst>
-          </a:prstGeom>
-          <a:solidFill>
-            <a:srgbClr val="F4EEE8"/>
-          </a:solidFill>
-          <a:ln/>
-        </p:spPr>
-      </p:sp>
-      <p:sp>
-        <p:nvSpPr>
-          <p:cNvPr id="15" name="Shape 13"/>
-          <p:cNvSpPr/>
-          <p:nvPr/>
-        </p:nvSpPr>
-        <p:spPr>
-          <a:xfrm>
-            <a:off x="914400" y="4956048"/>
-            <a:ext cx="548640" cy="548640"/>
-          </a:xfrm>
-          <a:prstGeom prst="ellipse">
-            <a:avLst/>
-          </a:prstGeom>
-          <a:solidFill>
-            <a:srgbClr val="7A3B2E"/>
-          </a:solidFill>
-          <a:ln/>
-        </p:spPr>
-      </p:sp>
-      <p:sp>
-        <p:nvSpPr>
-          <p:cNvPr id="16" name="Text 14"/>
-          <p:cNvSpPr/>
-          <p:nvPr/>
-        </p:nvSpPr>
-        <p:spPr>
-          <a:xfrm>
-            <a:off x="914400" y="4956048"/>
-            <a:ext cx="548640" cy="548640"/>
-          </a:xfrm>
-          <a:prstGeom prst="rect">
-            <a:avLst/>
-          </a:prstGeom>
-          <a:noFill/>
-          <a:ln/>
-        </p:spPr>
-        <p:txBody>
-          <a:bodyPr wrap="square" rtlCol="0" anchor="ctr"/>
-          <a:lstStyle/>
-          <a:p>
-            <a:pPr algn="ctr" indent="0" marL="0">
-              <a:buNone/>
-            </a:pPr>
-            <a:r>
-              <a:rPr lang="en-US" sz="1900" b="1" dirty="0">
-                <a:solidFill>
-                  <a:srgbClr val="FFFFFF"/>
-                </a:solidFill>
-                <a:latin typeface="Cambria" pitchFamily="34" charset="0"/>
-                <a:ea typeface="Cambria" pitchFamily="34" charset="-122"/>
-                <a:cs typeface="Cambria" pitchFamily="34" charset="-120"/>
-              </a:rPr>
-              <a:t>3</a:t>
-            </a:r>
-            <a:endParaRPr lang="en-US" sz="1900" dirty="0"/>
-          </a:p>
-        </p:txBody>
-      </p:sp>
-      <p:sp>
-        <p:nvSpPr>
-          <p:cNvPr id="17" name="Text 15"/>
-          <p:cNvSpPr/>
-          <p:nvPr/>
-        </p:nvSpPr>
-        <p:spPr>
-          <a:xfrm>
-            <a:off x="1645920" y="4828032"/>
-            <a:ext cx="2834640" cy="457200"/>
-          </a:xfrm>
-          <a:prstGeom prst="rect">
-            <a:avLst/>
-          </a:prstGeom>
-          <a:noFill/>
-          <a:ln/>
-        </p:spPr>
-        <p:txBody>
-          <a:bodyPr wrap="square" lIns="0" tIns="0" rIns="0" bIns="0" rtlCol="0" anchor="ctr"/>
-          <a:lstStyle/>
-          <a:p>
-            <a:pPr indent="0" marL="0">
-              <a:buNone/>
-            </a:pPr>
-            <a:r>
-              <a:rPr lang="en-US" sz="1800" b="1" dirty="0">
-                <a:solidFill>
-                  <a:srgbClr val="1A1A1A"/>
-                </a:solidFill>
-                <a:latin typeface="Cambria" pitchFamily="34" charset="0"/>
-                <a:ea typeface="Cambria" pitchFamily="34" charset="-122"/>
-                <a:cs typeface="Cambria" pitchFamily="34" charset="-120"/>
-              </a:rPr>
-              <a:t>A careful scrape</a:t>
-            </a:r>
-            <a:endParaRPr lang="en-US" sz="1800" dirty="0"/>
-          </a:p>
-        </p:txBody>
-      </p:sp>
-      <p:sp>
-        <p:nvSpPr>
-          <p:cNvPr id="18" name="Text 16"/>
-          <p:cNvSpPr/>
-          <p:nvPr/>
-        </p:nvSpPr>
-        <p:spPr>
-          <a:xfrm>
-            <a:off x="4572000" y="4846320"/>
-            <a:ext cx="6675120" cy="822960"/>
-          </a:xfrm>
-          <a:prstGeom prst="rect">
-            <a:avLst/>
-          </a:prstGeom>
-          <a:noFill/>
-          <a:ln/>
-        </p:spPr>
-        <p:txBody>
-          <a:bodyPr wrap="square" lIns="0" tIns="0" rIns="0" bIns="0" rtlCol="0" anchor="t"/>
-          <a:lstStyle/>
-          <a:p>
-            <a:pPr indent="0" marL="0">
-              <a:buNone/>
-            </a:pPr>
-            <a:r>
-              <a:rPr lang="en-US" sz="1350" dirty="0">
-                <a:solidFill>
-                  <a:srgbClr val="1A1A1A"/>
-                </a:solidFill>
-                <a:latin typeface="Calibri" pitchFamily="34" charset="0"/>
-                <a:ea typeface="Calibri" pitchFamily="34" charset="-122"/>
-                <a:cs typeface="Calibri" pitchFamily="34" charset="-120"/>
-              </a:rPr>
-              <a:t>Only when there is no file and no API. Slowly, and never republished.</a:t>
-            </a:r>
-            <a:endParaRPr lang="en-US" sz="1350" dirty="0"/>
-          </a:p>
-        </p:txBody>
-      </p:sp>
-      <p:sp>
-        <p:nvSpPr>
-          <p:cNvPr id="19" name="Text 17"/>
-          <p:cNvSpPr/>
-          <p:nvPr/>
-        </p:nvSpPr>
-        <p:spPr>
-          <a:xfrm>
-            <a:off x="640080" y="6263640"/>
-            <a:ext cx="10881360" cy="365760"/>
-          </a:xfrm>
-          <a:prstGeom prst="rect">
-            <a:avLst/>
-          </a:prstGeom>
-          <a:noFill/>
-          <a:ln/>
-        </p:spPr>
-        <p:txBody>
-          <a:bodyPr wrap="square" rtlCol="0" anchor="ctr"/>
-          <a:lstStyle/>
-          <a:p>
-            <a:pPr indent="0" marL="0">
-              <a:buNone/>
-            </a:pPr>
-            <a:r>
-              <a:rPr lang="en-US" sz="1100" i="1" dirty="0">
-                <a:solidFill>
-                  <a:srgbClr val="6B6B63"/>
-                </a:solidFill>
-                <a:latin typeface="Calibri" pitchFamily="34" charset="0"/>
-                <a:ea typeface="Calibri" pitchFamily="34" charset="-122"/>
-                <a:cs typeface="Calibri" pitchFamily="34" charset="-120"/>
-              </a:rPr>
-              <a:t>The licensing line decides which routes are even open to you. That is the next slide.</a:t>
-            </a:r>
-            <a:endParaRPr lang="en-US" sz="1100" dirty="0"/>
           </a:p>
         </p:txBody>
       </p:sp>
@@ -5454,7 +5635,7 @@
                 <a:ea typeface="Calibri" pitchFamily="34" charset="-122"/>
                 <a:cs typeface="Calibri" pitchFamily="34" charset="-120"/>
               </a:rPr>
-              <a:t>ROUTE TWO, LIVE</a:t>
+              <a:t>THE SAME TRICK, ON PIXELS</a:t>
             </a:r>
             <a:endParaRPr lang="en-US" sz="1300" dirty="0"/>
           </a:p>
@@ -5493,7 +5674,7 @@
                 <a:ea typeface="Cambria" pitchFamily="34" charset="-122"/>
                 <a:cs typeface="Cambria" pitchFamily="34" charset="-120"/>
               </a:rPr>
-              <a:t>A URL, some JSON, and then a table</a:t>
+              <a:t>A convolution, all of it</a:t>
             </a:r>
             <a:endParaRPr lang="en-US" sz="3400" dirty="0"/>
           </a:p>
@@ -5501,7 +5682,7 @@
       </p:sp>
       <p:pic>
         <p:nvPicPr>
-          <p:cNvPr id="4" name="Image 0" descr="/tmp/figs/w4_api.png">    </p:cNvPr>
+          <p:cNvPr id="4" name="Image 0" descr="/tmp/figs/w4_conv_arith.png">    </p:cNvPr>
           <p:cNvPicPr>
             <a:picLocks noChangeAspect="1"/>
           </p:cNvPicPr>
@@ -5514,8 +5695,8 @@
         </p:blipFill>
         <p:spPr>
           <a:xfrm>
-            <a:off x="1097280" y="1920240"/>
-            <a:ext cx="9966960" cy="3749040"/>
+            <a:off x="548640" y="1965960"/>
+            <a:ext cx="11064240" cy="3291840"/>
           </a:xfrm>
           <a:prstGeom prst="rect">
             <a:avLst/>
@@ -5555,7 +5736,7 @@
                 <a:ea typeface="Cambria" pitchFamily="34" charset="-122"/>
                 <a:cs typeface="Cambria" pitchFamily="34" charset="-120"/>
               </a:rPr>
-              <a:t>An endpoint is a URL that answers with data. A key is a name badge. Pagination hands you a page at a time.</a:t>
+              <a:t>A picture is a grid of numbers. Take nine of them, multiply by nine other numbers, add: -162. Slide one step and do it again.</a:t>
             </a:r>
             <a:endParaRPr lang="en-US" sz="1600" dirty="0"/>
           </a:p>
@@ -5594,7 +5775,7 @@
                 <a:ea typeface="Calibri" pitchFamily="34" charset="-122"/>
                 <a:cs typeface="Calibri" pitchFamily="34" charset="-120"/>
               </a:rPr>
-              <a:t>Left panel: a real response, live from api.artic.edu. The AI writes the three lines that make the table.</a:t>
+              <a:t>Numbers read off a Met painting from the Week 1 data. Nothing else happens in a convolution.</a:t>
             </a:r>
             <a:endParaRPr lang="en-US" sz="1000" dirty="0"/>
           </a:p>
@@ -6723,13 +6904,13 @@
             <a:r>
               <a:rPr lang="en-US" sz="1300" b="1" spc="300" kern="0" dirty="0">
                 <a:solidFill>
-                  <a:srgbClr val="7A3B2E"/>
+                  <a:srgbClr val="2E5F8A"/>
                 </a:solidFill>
                 <a:latin typeface="Calibri" pitchFamily="34" charset="0"/>
                 <a:ea typeface="Calibri" pitchFamily="34" charset="-122"/>
                 <a:cs typeface="Calibri" pitchFamily="34" charset="-120"/>
               </a:rPr>
-              <a:t>ROUTE THREE</a:t>
+              <a:t>WHAT THE NINE NUMBERS DO</a:t>
             </a:r>
             <a:endParaRPr lang="en-US" sz="1300" dirty="0"/>
           </a:p>
@@ -6768,448 +6949,110 @@
                 <a:ea typeface="Cambria" pitchFamily="34" charset="-122"/>
                 <a:cs typeface="Cambria" pitchFamily="34" charset="-120"/>
               </a:rPr>
-              <a:t>Scraping, and the four things that come with it</a:t>
+              <a:t>Change the filter, ask a different question</a:t>
             </a:r>
             <a:endParaRPr lang="en-US" sz="3400" dirty="0"/>
           </a:p>
         </p:txBody>
       </p:sp>
-      <p:sp>
-        <p:nvSpPr>
-          <p:cNvPr id="4" name="Shape 2"/>
-          <p:cNvSpPr/>
-          <p:nvPr/>
-        </p:nvSpPr>
-        <p:spPr>
-          <a:xfrm>
-            <a:off x="640080" y="2011680"/>
-            <a:ext cx="10881360" cy="914400"/>
-          </a:xfrm>
-          <a:prstGeom prst="roundRect">
-            <a:avLst>
-              <a:gd name="adj" fmla="val 10000"/>
-            </a:avLst>
-          </a:prstGeom>
-          <a:solidFill>
-            <a:srgbClr val="F4EEE8"/>
-          </a:solidFill>
-          <a:ln/>
-        </p:spPr>
-      </p:sp>
-      <p:sp>
-        <p:nvSpPr>
-          <p:cNvPr id="5" name="Text 3"/>
-          <p:cNvSpPr/>
-          <p:nvPr/>
-        </p:nvSpPr>
-        <p:spPr>
-          <a:xfrm>
-            <a:off x="960120" y="2103120"/>
-            <a:ext cx="4023360" cy="731520"/>
-          </a:xfrm>
-          <a:prstGeom prst="rect">
-            <a:avLst/>
-          </a:prstGeom>
-          <a:noFill/>
-          <a:ln/>
-        </p:spPr>
-        <p:txBody>
-          <a:bodyPr wrap="square" lIns="0" tIns="0" rIns="0" bIns="0" rtlCol="0" anchor="ctr"/>
-          <a:lstStyle/>
-          <a:p>
-            <a:pPr indent="0" marL="0">
-              <a:buNone/>
-            </a:pPr>
-            <a:r>
-              <a:rPr lang="en-US" sz="1700" b="1" dirty="0">
-                <a:solidFill>
-                  <a:srgbClr val="7A3B2E"/>
+      <p:pic>
+        <p:nvPicPr>
+          <p:cNvPr id="4" name="Image 0" descr="/tmp/figs/w4_convolution.png">    </p:cNvPr>
+          <p:cNvPicPr>
+            <a:picLocks noChangeAspect="1"/>
+          </p:cNvPicPr>
+          <p:nvPr/>
+        </p:nvPicPr>
+        <p:blipFill>
+          <a:blip r:embed="rId1"/>
+          <a:srcRect l="0" r="0" t="0" b="0"/>
+          <a:stretch/>
+        </p:blipFill>
+        <p:spPr>
+          <a:xfrm>
+            <a:off x="822960" y="2011680"/>
+            <a:ext cx="10515600" cy="3200400"/>
+          </a:xfrm>
+          <a:prstGeom prst="rect">
+            <a:avLst/>
+          </a:prstGeom>
+        </p:spPr>
+      </p:pic>
+      <p:sp>
+        <p:nvSpPr>
+          <p:cNvPr id="5" name="Text 2"/>
+          <p:cNvSpPr/>
+          <p:nvPr/>
+        </p:nvSpPr>
+        <p:spPr>
+          <a:xfrm>
+            <a:off x="640080" y="5897880"/>
+            <a:ext cx="10881360" cy="411480"/>
+          </a:xfrm>
+          <a:prstGeom prst="rect">
+            <a:avLst/>
+          </a:prstGeom>
+          <a:noFill/>
+          <a:ln/>
+        </p:spPr>
+        <p:txBody>
+          <a:bodyPr wrap="square" rtlCol="0" anchor="ctr"/>
+          <a:lstStyle/>
+          <a:p>
+            <a:pPr indent="0" marL="0">
+              <a:buNone/>
+            </a:pPr>
+            <a:r>
+              <a:rPr lang="en-US" sz="1600" i="1" dirty="0">
+                <a:solidFill>
+                  <a:srgbClr val="1A1A1A"/>
                 </a:solidFill>
                 <a:latin typeface="Cambria" pitchFamily="34" charset="0"/>
                 <a:ea typeface="Cambria" pitchFamily="34" charset="-122"/>
                 <a:cs typeface="Cambria" pitchFamily="34" charset="-120"/>
               </a:rPr>
-              <a:t>Read robots.txt and the terms</a:t>
-            </a:r>
-            <a:endParaRPr lang="en-US" sz="1700" dirty="0"/>
-          </a:p>
-        </p:txBody>
-      </p:sp>
-      <p:sp>
-        <p:nvSpPr>
-          <p:cNvPr id="6" name="Text 4"/>
-          <p:cNvSpPr/>
-          <p:nvPr/>
-        </p:nvSpPr>
-        <p:spPr>
-          <a:xfrm>
-            <a:off x="5120640" y="2103120"/>
-            <a:ext cx="6126480" cy="731520"/>
-          </a:xfrm>
-          <a:prstGeom prst="rect">
-            <a:avLst/>
-          </a:prstGeom>
-          <a:noFill/>
-          <a:ln/>
-        </p:spPr>
-        <p:txBody>
-          <a:bodyPr wrap="square" lIns="0" tIns="0" rIns="0" bIns="0" rtlCol="0" anchor="ctr"/>
-          <a:lstStyle/>
-          <a:p>
-            <a:pPr indent="0" marL="0">
-              <a:buNone/>
-            </a:pPr>
-            <a:r>
-              <a:rPr lang="en-US" sz="1350" dirty="0">
-                <a:solidFill>
-                  <a:srgbClr val="1A1A1A"/>
+              <a:t>Each panel is the same painting under a different 3x3 grid. One finds vertical edges, one horizontal, one blurs.</a:t>
+            </a:r>
+            <a:endParaRPr lang="en-US" sz="1600" dirty="0"/>
+          </a:p>
+        </p:txBody>
+      </p:sp>
+      <p:sp>
+        <p:nvSpPr>
+          <p:cNvPr id="6" name="Text 3"/>
+          <p:cNvSpPr/>
+          <p:nvPr/>
+        </p:nvSpPr>
+        <p:spPr>
+          <a:xfrm>
+            <a:off x="640080" y="6355080"/>
+            <a:ext cx="10881360" cy="320040"/>
+          </a:xfrm>
+          <a:prstGeom prst="rect">
+            <a:avLst/>
+          </a:prstGeom>
+          <a:noFill/>
+          <a:ln/>
+        </p:spPr>
+        <p:txBody>
+          <a:bodyPr wrap="square" rtlCol="0" anchor="ctr"/>
+          <a:lstStyle/>
+          <a:p>
+            <a:pPr indent="0" marL="0">
+              <a:buNone/>
+            </a:pPr>
+            <a:r>
+              <a:rPr lang="en-US" sz="1000" dirty="0">
+                <a:solidFill>
+                  <a:srgbClr val="6B6B63"/>
                 </a:solidFill>
                 <a:latin typeface="Calibri" pitchFamily="34" charset="0"/>
                 <a:ea typeface="Calibri" pitchFamily="34" charset="-122"/>
                 <a:cs typeface="Calibri" pitchFamily="34" charset="-120"/>
               </a:rPr>
-              <a:t>before the first request, not after the complaint.</a:t>
-            </a:r>
-            <a:endParaRPr lang="en-US" sz="1350" dirty="0"/>
-          </a:p>
-        </p:txBody>
-      </p:sp>
-      <p:sp>
-        <p:nvSpPr>
-          <p:cNvPr id="7" name="Shape 5"/>
-          <p:cNvSpPr/>
-          <p:nvPr/>
-        </p:nvSpPr>
-        <p:spPr>
-          <a:xfrm>
-            <a:off x="640080" y="3063240"/>
-            <a:ext cx="10881360" cy="914400"/>
-          </a:xfrm>
-          <a:prstGeom prst="roundRect">
-            <a:avLst>
-              <a:gd name="adj" fmla="val 10000"/>
-            </a:avLst>
-          </a:prstGeom>
-          <a:solidFill>
-            <a:srgbClr val="F4EEE8"/>
-          </a:solidFill>
-          <a:ln/>
-        </p:spPr>
-      </p:sp>
-      <p:sp>
-        <p:nvSpPr>
-          <p:cNvPr id="8" name="Text 6"/>
-          <p:cNvSpPr/>
-          <p:nvPr/>
-        </p:nvSpPr>
-        <p:spPr>
-          <a:xfrm>
-            <a:off x="960120" y="3154680"/>
-            <a:ext cx="4023360" cy="731520"/>
-          </a:xfrm>
-          <a:prstGeom prst="rect">
-            <a:avLst/>
-          </a:prstGeom>
-          <a:noFill/>
-          <a:ln/>
-        </p:spPr>
-        <p:txBody>
-          <a:bodyPr wrap="square" lIns="0" tIns="0" rIns="0" bIns="0" rtlCol="0" anchor="ctr"/>
-          <a:lstStyle/>
-          <a:p>
-            <a:pPr indent="0" marL="0">
-              <a:buNone/>
-            </a:pPr>
-            <a:r>
-              <a:rPr lang="en-US" sz="1700" b="1" dirty="0">
-                <a:solidFill>
-                  <a:srgbClr val="B9852F"/>
-                </a:solidFill>
-                <a:latin typeface="Cambria" pitchFamily="34" charset="0"/>
-                <a:ea typeface="Cambria" pitchFamily="34" charset="-122"/>
-                <a:cs typeface="Cambria" pitchFamily="34" charset="-120"/>
-              </a:rPr>
-              <a:t>Request slowly</a:t>
-            </a:r>
-            <a:endParaRPr lang="en-US" sz="1700" dirty="0"/>
-          </a:p>
-        </p:txBody>
-      </p:sp>
-      <p:sp>
-        <p:nvSpPr>
-          <p:cNvPr id="9" name="Text 7"/>
-          <p:cNvSpPr/>
-          <p:nvPr/>
-        </p:nvSpPr>
-        <p:spPr>
-          <a:xfrm>
-            <a:off x="5120640" y="3154680"/>
-            <a:ext cx="6126480" cy="731520"/>
-          </a:xfrm>
-          <a:prstGeom prst="rect">
-            <a:avLst/>
-          </a:prstGeom>
-          <a:noFill/>
-          <a:ln/>
-        </p:spPr>
-        <p:txBody>
-          <a:bodyPr wrap="square" lIns="0" tIns="0" rIns="0" bIns="0" rtlCol="0" anchor="ctr"/>
-          <a:lstStyle/>
-          <a:p>
-            <a:pPr indent="0" marL="0">
-              <a:buNone/>
-            </a:pPr>
-            <a:r>
-              <a:rPr lang="en-US" sz="1350" dirty="0">
-                <a:solidFill>
-                  <a:srgbClr val="1A1A1A"/>
-                </a:solidFill>
-                <a:latin typeface="Calibri" pitchFamily="34" charset="0"/>
-                <a:ea typeface="Calibri" pitchFamily="34" charset="-122"/>
-                <a:cs typeface="Calibri" pitchFamily="34" charset="-120"/>
-              </a:rPr>
-              <a:t>one page every couple of seconds. You are a guest on someone's server.</a:t>
-            </a:r>
-            <a:endParaRPr lang="en-US" sz="1350" dirty="0"/>
-          </a:p>
-        </p:txBody>
-      </p:sp>
-      <p:sp>
-        <p:nvSpPr>
-          <p:cNvPr id="10" name="Shape 8"/>
-          <p:cNvSpPr/>
-          <p:nvPr/>
-        </p:nvSpPr>
-        <p:spPr>
-          <a:xfrm>
-            <a:off x="640080" y="4114800"/>
-            <a:ext cx="10881360" cy="914400"/>
-          </a:xfrm>
-          <a:prstGeom prst="roundRect">
-            <a:avLst>
-              <a:gd name="adj" fmla="val 10000"/>
-            </a:avLst>
-          </a:prstGeom>
-          <a:solidFill>
-            <a:srgbClr val="F4EEE8"/>
-          </a:solidFill>
-          <a:ln/>
-        </p:spPr>
-      </p:sp>
-      <p:sp>
-        <p:nvSpPr>
-          <p:cNvPr id="11" name="Text 9"/>
-          <p:cNvSpPr/>
-          <p:nvPr/>
-        </p:nvSpPr>
-        <p:spPr>
-          <a:xfrm>
-            <a:off x="960120" y="4206240"/>
-            <a:ext cx="4023360" cy="731520"/>
-          </a:xfrm>
-          <a:prstGeom prst="rect">
-            <a:avLst/>
-          </a:prstGeom>
-          <a:noFill/>
-          <a:ln/>
-        </p:spPr>
-        <p:txBody>
-          <a:bodyPr wrap="square" lIns="0" tIns="0" rIns="0" bIns="0" rtlCol="0" anchor="ctr"/>
-          <a:lstStyle/>
-          <a:p>
-            <a:pPr indent="0" marL="0">
-              <a:buNone/>
-            </a:pPr>
-            <a:r>
-              <a:rPr lang="en-US" sz="1700" b="1" dirty="0">
-                <a:solidFill>
-                  <a:srgbClr val="3F6F5F"/>
-                </a:solidFill>
-                <a:latin typeface="Cambria" pitchFamily="34" charset="0"/>
-                <a:ea typeface="Cambria" pitchFamily="34" charset="-122"/>
-                <a:cs typeface="Cambria" pitchFamily="34" charset="-120"/>
-              </a:rPr>
-              <a:t>Take only what you need</a:t>
-            </a:r>
-            <a:endParaRPr lang="en-US" sz="1700" dirty="0"/>
-          </a:p>
-        </p:txBody>
-      </p:sp>
-      <p:sp>
-        <p:nvSpPr>
-          <p:cNvPr id="12" name="Text 10"/>
-          <p:cNvSpPr/>
-          <p:nvPr/>
-        </p:nvSpPr>
-        <p:spPr>
-          <a:xfrm>
-            <a:off x="5120640" y="4206240"/>
-            <a:ext cx="6126480" cy="731520"/>
-          </a:xfrm>
-          <a:prstGeom prst="rect">
-            <a:avLst/>
-          </a:prstGeom>
-          <a:noFill/>
-          <a:ln/>
-        </p:spPr>
-        <p:txBody>
-          <a:bodyPr wrap="square" lIns="0" tIns="0" rIns="0" bIns="0" rtlCol="0" anchor="ctr"/>
-          <a:lstStyle/>
-          <a:p>
-            <a:pPr indent="0" marL="0">
-              <a:buNone/>
-            </a:pPr>
-            <a:r>
-              <a:rPr lang="en-US" sz="1350" dirty="0">
-                <a:solidFill>
-                  <a:srgbClr val="1A1A1A"/>
-                </a:solidFill>
-                <a:latin typeface="Calibri" pitchFamily="34" charset="0"/>
-                <a:ea typeface="Calibri" pitchFamily="34" charset="-122"/>
-                <a:cs typeface="Calibri" pitchFamily="34" charset="-120"/>
-              </a:rPr>
-              <a:t>the fields your question uses, not the whole site.</a:t>
-            </a:r>
-            <a:endParaRPr lang="en-US" sz="1350" dirty="0"/>
-          </a:p>
-        </p:txBody>
-      </p:sp>
-      <p:sp>
-        <p:nvSpPr>
-          <p:cNvPr id="13" name="Shape 11"/>
-          <p:cNvSpPr/>
-          <p:nvPr/>
-        </p:nvSpPr>
-        <p:spPr>
-          <a:xfrm>
-            <a:off x="640080" y="5166360"/>
-            <a:ext cx="10881360" cy="914400"/>
-          </a:xfrm>
-          <a:prstGeom prst="roundRect">
-            <a:avLst>
-              <a:gd name="adj" fmla="val 10000"/>
-            </a:avLst>
-          </a:prstGeom>
-          <a:solidFill>
-            <a:srgbClr val="F4EEE8"/>
-          </a:solidFill>
-          <a:ln/>
-        </p:spPr>
-      </p:sp>
-      <p:sp>
-        <p:nvSpPr>
-          <p:cNvPr id="14" name="Text 12"/>
-          <p:cNvSpPr/>
-          <p:nvPr/>
-        </p:nvSpPr>
-        <p:spPr>
-          <a:xfrm>
-            <a:off x="960120" y="5257800"/>
-            <a:ext cx="4023360" cy="731520"/>
-          </a:xfrm>
-          <a:prstGeom prst="rect">
-            <a:avLst/>
-          </a:prstGeom>
-          <a:noFill/>
-          <a:ln/>
-        </p:spPr>
-        <p:txBody>
-          <a:bodyPr wrap="square" lIns="0" tIns="0" rIns="0" bIns="0" rtlCol="0" anchor="ctr"/>
-          <a:lstStyle/>
-          <a:p>
-            <a:pPr indent="0" marL="0">
-              <a:buNone/>
-            </a:pPr>
-            <a:r>
-              <a:rPr lang="en-US" sz="1700" b="1" dirty="0">
-                <a:solidFill>
-                  <a:srgbClr val="2E5F8A"/>
-                </a:solidFill>
-                <a:latin typeface="Cambria" pitchFamily="34" charset="0"/>
-                <a:ea typeface="Cambria" pitchFamily="34" charset="-122"/>
-                <a:cs typeface="Cambria" pitchFamily="34" charset="-120"/>
-              </a:rPr>
-              <a:t>Never republish the text</a:t>
-            </a:r>
-            <a:endParaRPr lang="en-US" sz="1700" dirty="0"/>
-          </a:p>
-        </p:txBody>
-      </p:sp>
-      <p:sp>
-        <p:nvSpPr>
-          <p:cNvPr id="15" name="Text 13"/>
-          <p:cNvSpPr/>
-          <p:nvPr/>
-        </p:nvSpPr>
-        <p:spPr>
-          <a:xfrm>
-            <a:off x="5120640" y="5257800"/>
-            <a:ext cx="6126480" cy="731520"/>
-          </a:xfrm>
-          <a:prstGeom prst="rect">
-            <a:avLst/>
-          </a:prstGeom>
-          <a:noFill/>
-          <a:ln/>
-        </p:spPr>
-        <p:txBody>
-          <a:bodyPr wrap="square" lIns="0" tIns="0" rIns="0" bIns="0" rtlCol="0" anchor="ctr"/>
-          <a:lstStyle/>
-          <a:p>
-            <a:pPr indent="0" marL="0">
-              <a:buNone/>
-            </a:pPr>
-            <a:r>
-              <a:rPr lang="en-US" sz="1350" dirty="0">
-                <a:solidFill>
-                  <a:srgbClr val="1A1A1A"/>
-                </a:solidFill>
-                <a:latin typeface="Calibri" pitchFamily="34" charset="0"/>
-                <a:ea typeface="Calibri" pitchFamily="34" charset="-122"/>
-                <a:cs typeface="Calibri" pitchFamily="34" charset="-120"/>
-              </a:rPr>
-              <a:t>analyse it, quote it, count it. Do not hand it on.</a:t>
-            </a:r>
-            <a:endParaRPr lang="en-US" sz="1350" dirty="0"/>
-          </a:p>
-        </p:txBody>
-      </p:sp>
-      <p:sp>
-        <p:nvSpPr>
-          <p:cNvPr id="16" name="Text 14"/>
-          <p:cNvSpPr/>
-          <p:nvPr/>
-        </p:nvSpPr>
-        <p:spPr>
-          <a:xfrm>
-            <a:off x="640080" y="6309360"/>
-            <a:ext cx="10881360" cy="365760"/>
-          </a:xfrm>
-          <a:prstGeom prst="rect">
-            <a:avLst/>
-          </a:prstGeom>
-          <a:noFill/>
-          <a:ln/>
-        </p:spPr>
-        <p:txBody>
-          <a:bodyPr wrap="square" rtlCol="0" anchor="ctr"/>
-          <a:lstStyle/>
-          <a:p>
-            <a:pPr indent="0" marL="0">
-              <a:buNone/>
-            </a:pPr>
-            <a:r>
-              <a:rPr lang="en-US" sz="1250" i="1" dirty="0">
-                <a:solidFill>
-                  <a:srgbClr val="6B6B63"/>
-                </a:solidFill>
-                <a:latin typeface="Calibri" pitchFamily="34" charset="0"/>
-                <a:ea typeface="Calibri" pitchFamily="34" charset="-122"/>
-                <a:cs typeface="Calibri" pitchFamily="34" charset="-120"/>
-              </a:rPr>
-              <a:t>CC0 and public domain: go anywhere.   Academic sets and community text: analyse, don't redistribute.   Shadow libraries: never.</a:t>
-            </a:r>
-            <a:endParaRPr lang="en-US" sz="1250" dirty="0"/>
+              <a:t>A CNN is not given these. It starts with random grids and learns which ones are worth having — same downhill roll as before.</a:t>
+            </a:r>
+            <a:endParaRPr lang="en-US" sz="1000" dirty="0"/>
           </a:p>
         </p:txBody>
       </p:sp>
@@ -7272,13 +7115,13 @@
             <a:r>
               <a:rPr lang="en-US" sz="1300" b="1" spc="300" kern="0" dirty="0">
                 <a:solidFill>
-                  <a:srgbClr val="3F6F5F"/>
+                  <a:srgbClr val="2E5F8A"/>
                 </a:solidFill>
                 <a:latin typeface="Calibri" pitchFamily="34" charset="0"/>
                 <a:ea typeface="Calibri" pitchFamily="34" charset="-122"/>
                 <a:cs typeface="Calibri" pitchFamily="34" charset="-120"/>
               </a:rPr>
-              <a:t>YOUR TURN · 20 MINUTES</a:t>
+              <a:t>WHY A CNN IS DEEP</a:t>
             </a:r>
             <a:endParaRPr lang="en-US" sz="1300" dirty="0"/>
           </a:p>
@@ -7317,348 +7160,110 @@
                 <a:ea typeface="Cambria" pitchFamily="34" charset="-122"/>
                 <a:cs typeface="Cambria" pitchFamily="34" charset="-120"/>
               </a:rPr>
-              <a:t>Collect it, save it, start the repo</a:t>
+              <a:t>Filters on top of filters</a:t>
             </a:r>
             <a:endParaRPr lang="en-US" sz="3400" dirty="0"/>
           </a:p>
         </p:txBody>
       </p:sp>
-      <p:sp>
-        <p:nvSpPr>
-          <p:cNvPr id="4" name="Shape 2"/>
-          <p:cNvSpPr/>
-          <p:nvPr/>
-        </p:nvSpPr>
-        <p:spPr>
-          <a:xfrm>
-            <a:off x="640080" y="2103120"/>
-            <a:ext cx="10881360" cy="1097280"/>
-          </a:xfrm>
-          <a:prstGeom prst="roundRect">
-            <a:avLst>
-              <a:gd name="adj" fmla="val 8333"/>
-            </a:avLst>
-          </a:prstGeom>
-          <a:solidFill>
-            <a:srgbClr val="F4EEE8"/>
-          </a:solidFill>
-          <a:ln/>
-        </p:spPr>
-      </p:sp>
-      <p:sp>
-        <p:nvSpPr>
-          <p:cNvPr id="5" name="Text 3"/>
-          <p:cNvSpPr/>
-          <p:nvPr/>
-        </p:nvSpPr>
-        <p:spPr>
-          <a:xfrm>
-            <a:off x="1005840" y="2240280"/>
-            <a:ext cx="4206240" cy="822960"/>
-          </a:xfrm>
-          <a:prstGeom prst="rect">
-            <a:avLst/>
-          </a:prstGeom>
-          <a:noFill/>
-          <a:ln/>
-        </p:spPr>
-        <p:txBody>
-          <a:bodyPr wrap="square" lIns="0" tIns="0" rIns="0" bIns="0" rtlCol="0" anchor="ctr"/>
-          <a:lstStyle/>
-          <a:p>
-            <a:pPr indent="0" marL="0">
-              <a:buNone/>
-            </a:pPr>
-            <a:r>
-              <a:rPr lang="en-US" sz="1900" b="1" dirty="0">
-                <a:solidFill>
-                  <a:srgbClr val="3F6F5F"/>
+      <p:pic>
+        <p:nvPicPr>
+          <p:cNvPr id="4" name="Image 0" descr="/tmp/figs/w4_conv_stack.png">    </p:cNvPr>
+          <p:cNvPicPr>
+            <a:picLocks noChangeAspect="1"/>
+          </p:cNvPicPr>
+          <p:nvPr/>
+        </p:nvPicPr>
+        <p:blipFill>
+          <a:blip r:embed="rId1"/>
+          <a:srcRect l="0" r="0" t="0" b="0"/>
+          <a:stretch/>
+        </p:blipFill>
+        <p:spPr>
+          <a:xfrm>
+            <a:off x="822960" y="2011680"/>
+            <a:ext cx="10515600" cy="3200400"/>
+          </a:xfrm>
+          <a:prstGeom prst="rect">
+            <a:avLst/>
+          </a:prstGeom>
+        </p:spPr>
+      </p:pic>
+      <p:sp>
+        <p:nvSpPr>
+          <p:cNvPr id="5" name="Text 2"/>
+          <p:cNvSpPr/>
+          <p:nvPr/>
+        </p:nvSpPr>
+        <p:spPr>
+          <a:xfrm>
+            <a:off x="640080" y="5897880"/>
+            <a:ext cx="10881360" cy="411480"/>
+          </a:xfrm>
+          <a:prstGeom prst="rect">
+            <a:avLst/>
+          </a:prstGeom>
+          <a:noFill/>
+          <a:ln/>
+        </p:spPr>
+        <p:txBody>
+          <a:bodyPr wrap="square" rtlCol="0" anchor="ctr"/>
+          <a:lstStyle/>
+          <a:p>
+            <a:pPr indent="0" marL="0">
+              <a:buNone/>
+            </a:pPr>
+            <a:r>
+              <a:rPr lang="en-US" sz="1600" i="1" dirty="0">
+                <a:solidFill>
+                  <a:srgbClr val="1A1A1A"/>
                 </a:solidFill>
                 <a:latin typeface="Cambria" pitchFamily="34" charset="0"/>
                 <a:ea typeface="Cambria" pitchFamily="34" charset="-122"/>
                 <a:cs typeface="Cambria" pitchFamily="34" charset="-120"/>
               </a:rPr>
-              <a:t>a file in your Drive folder</a:t>
-            </a:r>
-            <a:endParaRPr lang="en-US" sz="1900" dirty="0"/>
-          </a:p>
-        </p:txBody>
-      </p:sp>
-      <p:sp>
-        <p:nvSpPr>
-          <p:cNvPr id="6" name="Text 4"/>
-          <p:cNvSpPr/>
-          <p:nvPr/>
-        </p:nvSpPr>
-        <p:spPr>
-          <a:xfrm>
-            <a:off x="5394960" y="2240280"/>
-            <a:ext cx="5760720" cy="822960"/>
-          </a:xfrm>
-          <a:prstGeom prst="rect">
-            <a:avLst/>
-          </a:prstGeom>
-          <a:noFill/>
-          <a:ln/>
-        </p:spPr>
-        <p:txBody>
-          <a:bodyPr wrap="square" lIns="0" tIns="0" rIns="0" bIns="0" rtlCol="0" anchor="ctr"/>
-          <a:lstStyle/>
-          <a:p>
-            <a:pPr indent="0" marL="0">
-              <a:buNone/>
-            </a:pPr>
-            <a:r>
-              <a:rPr lang="en-US" sz="1400" dirty="0">
-                <a:solidFill>
-                  <a:srgbClr val="1A1A1A"/>
+              <a:t>Run a filter on the answers of the last filter, and shrink. Edges become corners; corners become regions; regions become faces.</a:t>
+            </a:r>
+            <a:endParaRPr lang="en-US" sz="1600" dirty="0"/>
+          </a:p>
+        </p:txBody>
+      </p:sp>
+      <p:sp>
+        <p:nvSpPr>
+          <p:cNvPr id="6" name="Text 3"/>
+          <p:cNvSpPr/>
+          <p:nvPr/>
+        </p:nvSpPr>
+        <p:spPr>
+          <a:xfrm>
+            <a:off x="640080" y="6355080"/>
+            <a:ext cx="10881360" cy="320040"/>
+          </a:xfrm>
+          <a:prstGeom prst="rect">
+            <a:avLst/>
+          </a:prstGeom>
+          <a:noFill/>
+          <a:ln/>
+        </p:spPr>
+        <p:txBody>
+          <a:bodyPr wrap="square" rtlCol="0" anchor="ctr"/>
+          <a:lstStyle/>
+          <a:p>
+            <a:pPr indent="0" marL="0">
+              <a:buNone/>
+            </a:pPr>
+            <a:r>
+              <a:rPr lang="en-US" sz="1000" dirty="0">
+                <a:solidFill>
+                  <a:srgbClr val="6B6B63"/>
                 </a:solidFill>
                 <a:latin typeface="Calibri" pitchFamily="34" charset="0"/>
                 <a:ea typeface="Calibri" pitchFamily="34" charset="-122"/>
                 <a:cs typeface="Calibri" pitchFamily="34" charset="-120"/>
               </a:rPr>
-              <a:t>Week 5 starts from it. Colab forgets everything else.</a:t>
-            </a:r>
-            <a:endParaRPr lang="en-US" sz="1400" dirty="0"/>
-          </a:p>
-        </p:txBody>
-      </p:sp>
-      <p:sp>
-        <p:nvSpPr>
-          <p:cNvPr id="7" name="Shape 5"/>
-          <p:cNvSpPr/>
-          <p:nvPr/>
-        </p:nvSpPr>
-        <p:spPr>
-          <a:xfrm>
-            <a:off x="640080" y="3383280"/>
-            <a:ext cx="10881360" cy="1097280"/>
-          </a:xfrm>
-          <a:prstGeom prst="roundRect">
-            <a:avLst>
-              <a:gd name="adj" fmla="val 8333"/>
-            </a:avLst>
-          </a:prstGeom>
-          <a:solidFill>
-            <a:srgbClr val="F4EEE8"/>
-          </a:solidFill>
-          <a:ln/>
-        </p:spPr>
-      </p:sp>
-      <p:sp>
-        <p:nvSpPr>
-          <p:cNvPr id="8" name="Text 6"/>
-          <p:cNvSpPr/>
-          <p:nvPr/>
-        </p:nvSpPr>
-        <p:spPr>
-          <a:xfrm>
-            <a:off x="1005840" y="3520440"/>
-            <a:ext cx="4206240" cy="822960"/>
-          </a:xfrm>
-          <a:prstGeom prst="rect">
-            <a:avLst/>
-          </a:prstGeom>
-          <a:noFill/>
-          <a:ln/>
-        </p:spPr>
-        <p:txBody>
-          <a:bodyPr wrap="square" lIns="0" tIns="0" rIns="0" bIns="0" rtlCol="0" anchor="ctr"/>
-          <a:lstStyle/>
-          <a:p>
-            <a:pPr indent="0" marL="0">
-              <a:buNone/>
-            </a:pPr>
-            <a:r>
-              <a:rPr lang="en-US" sz="1900" b="1" dirty="0">
-                <a:solidFill>
-                  <a:srgbClr val="2E5F8A"/>
-                </a:solidFill>
-                <a:latin typeface="Cambria" pitchFamily="34" charset="0"/>
-                <a:ea typeface="Cambria" pitchFamily="34" charset="-122"/>
-                <a:cs typeface="Cambria" pitchFamily="34" charset="-120"/>
-              </a:rPr>
-              <a:t>a repo with Pages switched on</a:t>
-            </a:r>
-            <a:endParaRPr lang="en-US" sz="1900" dirty="0"/>
-          </a:p>
-        </p:txBody>
-      </p:sp>
-      <p:sp>
-        <p:nvSpPr>
-          <p:cNvPr id="9" name="Text 7"/>
-          <p:cNvSpPr/>
-          <p:nvPr/>
-        </p:nvSpPr>
-        <p:spPr>
-          <a:xfrm>
-            <a:off x="5394960" y="3520440"/>
-            <a:ext cx="5760720" cy="822960"/>
-          </a:xfrm>
-          <a:prstGeom prst="rect">
-            <a:avLst/>
-          </a:prstGeom>
-          <a:noFill/>
-          <a:ln/>
-        </p:spPr>
-        <p:txBody>
-          <a:bodyPr wrap="square" lIns="0" tIns="0" rIns="0" bIns="0" rtlCol="0" anchor="ctr"/>
-          <a:lstStyle/>
-          <a:p>
-            <a:pPr indent="0" marL="0">
-              <a:buNone/>
-            </a:pPr>
-            <a:r>
-              <a:rPr lang="en-US" sz="1400" dirty="0">
-                <a:solidFill>
-                  <a:srgbClr val="1A1A1A"/>
-                </a:solidFill>
-                <a:latin typeface="Calibri" pitchFamily="34" charset="0"/>
-                <a:ea typeface="Calibri" pitchFamily="34" charset="-122"/>
-                <a:cs typeface="Calibri" pitchFamily="34" charset="-120"/>
-              </a:rPr>
-              <a:t>so a live URL exists today, not in Week 9 under deadline.</a:t>
-            </a:r>
-            <a:endParaRPr lang="en-US" sz="1400" dirty="0"/>
-          </a:p>
-        </p:txBody>
-      </p:sp>
-      <p:sp>
-        <p:nvSpPr>
-          <p:cNvPr id="10" name="Shape 8"/>
-          <p:cNvSpPr/>
-          <p:nvPr/>
-        </p:nvSpPr>
-        <p:spPr>
-          <a:xfrm>
-            <a:off x="640080" y="4663440"/>
-            <a:ext cx="10881360" cy="1097280"/>
-          </a:xfrm>
-          <a:prstGeom prst="roundRect">
-            <a:avLst>
-              <a:gd name="adj" fmla="val 8333"/>
-            </a:avLst>
-          </a:prstGeom>
-          <a:solidFill>
-            <a:srgbClr val="F4EEE8"/>
-          </a:solidFill>
-          <a:ln/>
-        </p:spPr>
-      </p:sp>
-      <p:sp>
-        <p:nvSpPr>
-          <p:cNvPr id="11" name="Text 9"/>
-          <p:cNvSpPr/>
-          <p:nvPr/>
-        </p:nvSpPr>
-        <p:spPr>
-          <a:xfrm>
-            <a:off x="1005840" y="4800600"/>
-            <a:ext cx="4206240" cy="822960"/>
-          </a:xfrm>
-          <a:prstGeom prst="rect">
-            <a:avLst/>
-          </a:prstGeom>
-          <a:noFill/>
-          <a:ln/>
-        </p:spPr>
-        <p:txBody>
-          <a:bodyPr wrap="square" lIns="0" tIns="0" rIns="0" bIns="0" rtlCol="0" anchor="ctr"/>
-          <a:lstStyle/>
-          <a:p>
-            <a:pPr indent="0" marL="0">
-              <a:buNone/>
-            </a:pPr>
-            <a:r>
-              <a:rPr lang="en-US" sz="1900" b="1" dirty="0">
-                <a:solidFill>
-                  <a:srgbClr val="7A3B2E"/>
-                </a:solidFill>
-                <a:latin typeface="Cambria" pitchFamily="34" charset="0"/>
-                <a:ea typeface="Cambria" pitchFamily="34" charset="-122"/>
-                <a:cs typeface="Cambria" pitchFamily="34" charset="-120"/>
-              </a:rPr>
-              <a:t>two minutes of pitch, to a partner</a:t>
-            </a:r>
-            <a:endParaRPr lang="en-US" sz="1900" dirty="0"/>
-          </a:p>
-        </p:txBody>
-      </p:sp>
-      <p:sp>
-        <p:nvSpPr>
-          <p:cNvPr id="12" name="Text 10"/>
-          <p:cNvSpPr/>
-          <p:nvPr/>
-        </p:nvSpPr>
-        <p:spPr>
-          <a:xfrm>
-            <a:off x="5394960" y="4800600"/>
-            <a:ext cx="5760720" cy="822960"/>
-          </a:xfrm>
-          <a:prstGeom prst="rect">
-            <a:avLst/>
-          </a:prstGeom>
-          <a:noFill/>
-          <a:ln/>
-        </p:spPr>
-        <p:txBody>
-          <a:bodyPr wrap="square" lIns="0" tIns="0" rIns="0" bIns="0" rtlCol="0" anchor="ctr"/>
-          <a:lstStyle/>
-          <a:p>
-            <a:pPr indent="0" marL="0">
-              <a:buNone/>
-            </a:pPr>
-            <a:r>
-              <a:rPr lang="en-US" sz="1400" dirty="0">
-                <a:solidFill>
-                  <a:srgbClr val="1A1A1A"/>
-                </a:solidFill>
-                <a:latin typeface="Calibri" pitchFamily="34" charset="0"/>
-                <a:ea typeface="Calibri" pitchFamily="34" charset="-122"/>
-                <a:cs typeface="Calibri" pitchFamily="34" charset="-120"/>
-              </a:rPr>
-              <a:t>corpus, two methods, what would count as a finding.</a:t>
-            </a:r>
-            <a:endParaRPr lang="en-US" sz="1400" dirty="0"/>
-          </a:p>
-        </p:txBody>
-      </p:sp>
-      <p:sp>
-        <p:nvSpPr>
-          <p:cNvPr id="13" name="Text 11"/>
-          <p:cNvSpPr/>
-          <p:nvPr/>
-        </p:nvSpPr>
-        <p:spPr>
-          <a:xfrm>
-            <a:off x="640080" y="6263640"/>
-            <a:ext cx="10881360" cy="365760"/>
-          </a:xfrm>
-          <a:prstGeom prst="rect">
-            <a:avLst/>
-          </a:prstGeom>
-          <a:noFill/>
-          <a:ln/>
-        </p:spPr>
-        <p:txBody>
-          <a:bodyPr wrap="square" rtlCol="0" anchor="ctr"/>
-          <a:lstStyle/>
-          <a:p>
-            <a:pPr indent="0" marL="0">
-              <a:buNone/>
-            </a:pPr>
-            <a:r>
-              <a:rPr lang="en-US" sz="1100" i="1" dirty="0">
-                <a:solidFill>
-                  <a:srgbClr val="6B6B63"/>
-                </a:solidFill>
-                <a:latin typeface="Calibri" pitchFamily="34" charset="0"/>
-                <a:ea typeface="Calibri" pitchFamily="34" charset="-122"/>
-                <a:cs typeface="Calibri" pitchFamily="34" charset="-120"/>
-              </a:rPr>
-              <a:t>A null result, honestly shown, is a complete project. The pivot kit is insurance, not a demotion.</a:t>
-            </a:r>
-            <a:endParaRPr lang="en-US" sz="1100" dirty="0"/>
+              <a:t>Every panel here is real arithmetic on the painting to its left. That stack is the whole architecture.</a:t>
+            </a:r>
+            <a:endParaRPr lang="en-US" sz="1000" dirty="0"/>
           </a:p>
         </p:txBody>
       </p:sp>
@@ -7673,6 +7278,2201 @@
 <file path=ppt/slides/slide22.xml><?xml version="1.0" encoding="utf-8"?>
 <p:sld xmlns:a="http://schemas.openxmlformats.org/drawingml/2006/main" xmlns:r="http://schemas.openxmlformats.org/officeDocument/2006/relationships" xmlns:p="http://schemas.openxmlformats.org/presentationml/2006/main">
   <p:cSld name="Slide 22">
+    <p:bg>
+      <p:bgPr>
+        <a:solidFill>
+          <a:srgbClr val="FFFFFF"/>
+        </a:solidFill>
+      </p:bgPr>
+    </p:bg>
+    <p:spTree>
+      <p:nvGrpSpPr>
+        <p:cNvPr id="1" name=""/>
+        <p:cNvGrpSpPr/>
+        <p:nvPr/>
+      </p:nvGrpSpPr>
+      <p:grpSpPr>
+        <a:xfrm>
+          <a:off x="0" y="0"/>
+          <a:ext cx="0" cy="0"/>
+          <a:chOff x="0" y="0"/>
+          <a:chExt cx="0" cy="0"/>
+        </a:xfrm>
+      </p:grpSpPr>
+      <p:sp>
+        <p:nvSpPr>
+          <p:cNvPr id="2" name="Text 0"/>
+          <p:cNvSpPr/>
+          <p:nvPr/>
+        </p:nvSpPr>
+        <p:spPr>
+          <a:xfrm>
+            <a:off x="640080" y="502920"/>
+            <a:ext cx="10515600" cy="320040"/>
+          </a:xfrm>
+          <a:prstGeom prst="rect">
+            <a:avLst/>
+          </a:prstGeom>
+          <a:noFill/>
+          <a:ln/>
+        </p:spPr>
+        <p:txBody>
+          <a:bodyPr wrap="square" rtlCol="0" anchor="ctr"/>
+          <a:lstStyle/>
+          <a:p>
+            <a:pPr indent="0" marL="0">
+              <a:buNone/>
+            </a:pPr>
+            <a:r>
+              <a:rPr lang="en-US" sz="1300" b="1" spc="300" kern="0" dirty="0">
+                <a:solidFill>
+                  <a:srgbClr val="B9852F"/>
+                </a:solidFill>
+                <a:latin typeface="Calibri" pitchFamily="34" charset="0"/>
+                <a:ea typeface="Calibri" pitchFamily="34" charset="-122"/>
+                <a:cs typeface="Calibri" pitchFamily="34" charset="-120"/>
+              </a:rPr>
+              <a:t>BOTH IDEAS AT ONCE</a:t>
+            </a:r>
+            <a:endParaRPr lang="en-US" sz="1300" dirty="0"/>
+          </a:p>
+        </p:txBody>
+      </p:sp>
+      <p:sp>
+        <p:nvSpPr>
+          <p:cNvPr id="3" name="Text 1"/>
+          <p:cNvSpPr/>
+          <p:nvPr/>
+        </p:nvSpPr>
+        <p:spPr>
+          <a:xfrm>
+            <a:off x="640080" y="868680"/>
+            <a:ext cx="10972800" cy="777240"/>
+          </a:xfrm>
+          <a:prstGeom prst="rect">
+            <a:avLst/>
+          </a:prstGeom>
+          <a:noFill/>
+          <a:ln/>
+        </p:spPr>
+        <p:txBody>
+          <a:bodyPr wrap="square" rtlCol="0" anchor="t"/>
+          <a:lstStyle/>
+          <a:p>
+            <a:pPr indent="0" marL="0">
+              <a:buNone/>
+            </a:pPr>
+            <a:r>
+              <a:rPr lang="en-US" sz="3400" b="1" dirty="0">
+                <a:solidFill>
+                  <a:srgbClr val="1A1A1A"/>
+                </a:solidFill>
+                <a:latin typeface="Cambria" pitchFamily="34" charset="0"/>
+                <a:ea typeface="Cambria" pitchFamily="34" charset="-122"/>
+                <a:cs typeface="Cambria" pitchFamily="34" charset="-120"/>
+              </a:rPr>
+              <a:t>CLIP: the same pull and push, on pictures</a:t>
+            </a:r>
+            <a:endParaRPr lang="en-US" sz="3400" dirty="0"/>
+          </a:p>
+        </p:txBody>
+      </p:sp>
+      <p:pic>
+        <p:nvPicPr>
+          <p:cNvPr id="4" name="Image 0" descr="/tmp/figs/w4_clip.png">    </p:cNvPr>
+          <p:cNvPicPr>
+            <a:picLocks noChangeAspect="1"/>
+          </p:cNvPicPr>
+          <p:nvPr/>
+        </p:nvPicPr>
+        <p:blipFill>
+          <a:blip r:embed="rId1"/>
+          <a:srcRect l="0" r="0" t="0" b="0"/>
+          <a:stretch/>
+        </p:blipFill>
+        <p:spPr>
+          <a:xfrm>
+            <a:off x="1097280" y="1783080"/>
+            <a:ext cx="9966960" cy="3840480"/>
+          </a:xfrm>
+          <a:prstGeom prst="rect">
+            <a:avLst/>
+          </a:prstGeom>
+        </p:spPr>
+      </p:pic>
+      <p:sp>
+        <p:nvSpPr>
+          <p:cNvPr id="5" name="Text 2"/>
+          <p:cNvSpPr/>
+          <p:nvPr/>
+        </p:nvSpPr>
+        <p:spPr>
+          <a:xfrm>
+            <a:off x="640080" y="5897880"/>
+            <a:ext cx="10881360" cy="411480"/>
+          </a:xfrm>
+          <a:prstGeom prst="rect">
+            <a:avLst/>
+          </a:prstGeom>
+          <a:noFill/>
+          <a:ln/>
+        </p:spPr>
+        <p:txBody>
+          <a:bodyPr wrap="square" rtlCol="0" anchor="ctr"/>
+          <a:lstStyle/>
+          <a:p>
+            <a:pPr indent="0" marL="0">
+              <a:buNone/>
+            </a:pPr>
+            <a:r>
+              <a:rPr lang="en-US" sz="1600" i="1" dirty="0">
+                <a:solidFill>
+                  <a:srgbClr val="1A1A1A"/>
+                </a:solidFill>
+                <a:latin typeface="Cambria" pitchFamily="34" charset="0"/>
+                <a:ea typeface="Cambria" pitchFamily="34" charset="-122"/>
+                <a:cs typeface="Cambria" pitchFamily="34" charset="-120"/>
+              </a:rPr>
+              <a:t>A CNN reads the picture, a language model reads the caption, and the training rule is the one from the word vectors.</a:t>
+            </a:r>
+            <a:endParaRPr lang="en-US" sz="1600" dirty="0"/>
+          </a:p>
+        </p:txBody>
+      </p:sp>
+      <p:sp>
+        <p:nvSpPr>
+          <p:cNvPr id="6" name="Text 3"/>
+          <p:cNvSpPr/>
+          <p:nvPr/>
+        </p:nvSpPr>
+        <p:spPr>
+          <a:xfrm>
+            <a:off x="640080" y="6355080"/>
+            <a:ext cx="10881360" cy="320040"/>
+          </a:xfrm>
+          <a:prstGeom prst="rect">
+            <a:avLst/>
+          </a:prstGeom>
+          <a:noFill/>
+          <a:ln/>
+        </p:spPr>
+        <p:txBody>
+          <a:bodyPr wrap="square" rtlCol="0" anchor="ctr"/>
+          <a:lstStyle/>
+          <a:p>
+            <a:pPr indent="0" marL="0">
+              <a:buNone/>
+            </a:pPr>
+            <a:r>
+              <a:rPr lang="en-US" sz="1000" dirty="0">
+                <a:solidFill>
+                  <a:srgbClr val="6B6B63"/>
+                </a:solidFill>
+                <a:latin typeface="Calibri" pitchFamily="34" charset="0"/>
+                <a:ea typeface="Calibri" pitchFamily="34" charset="-122"/>
+                <a:cs typeface="Calibri" pitchFamily="34" charset="-120"/>
+              </a:rPr>
+              <a:t>Which is why "a painting of a woman in a red hat" can search a museum with no tags in it at all.</a:t>
+            </a:r>
+            <a:endParaRPr lang="en-US" sz="1000" dirty="0"/>
+          </a:p>
+        </p:txBody>
+      </p:sp>
+    </p:spTree>
+  </p:cSld>
+  <p:clrMapOvr>
+    <a:masterClrMapping/>
+  </p:clrMapOvr>
+</p:sld>
+</file>
+
+<file path=ppt/slides/slide23.xml><?xml version="1.0" encoding="utf-8"?>
+<p:sld xmlns:a="http://schemas.openxmlformats.org/drawingml/2006/main" xmlns:r="http://schemas.openxmlformats.org/officeDocument/2006/relationships" xmlns:p="http://schemas.openxmlformats.org/presentationml/2006/main">
+  <p:cSld name="Slide 23">
+    <p:bg>
+      <p:bgPr>
+        <a:solidFill>
+          <a:srgbClr val="4E261D"/>
+        </a:solidFill>
+      </p:bgPr>
+    </p:bg>
+    <p:spTree>
+      <p:nvGrpSpPr>
+        <p:cNvPr id="1" name=""/>
+        <p:cNvGrpSpPr/>
+        <p:nvPr/>
+      </p:nvGrpSpPr>
+      <p:grpSpPr>
+        <a:xfrm>
+          <a:off x="0" y="0"/>
+          <a:ext cx="0" cy="0"/>
+          <a:chOff x="0" y="0"/>
+          <a:chExt cx="0" cy="0"/>
+        </a:xfrm>
+      </p:grpSpPr>
+      <p:sp>
+        <p:nvSpPr>
+          <p:cNvPr id="2" name="Text 0"/>
+          <p:cNvSpPr/>
+          <p:nvPr/>
+        </p:nvSpPr>
+        <p:spPr>
+          <a:xfrm>
+            <a:off x="640080" y="502920"/>
+            <a:ext cx="10515600" cy="320040"/>
+          </a:xfrm>
+          <a:prstGeom prst="rect">
+            <a:avLst/>
+          </a:prstGeom>
+          <a:noFill/>
+          <a:ln/>
+        </p:spPr>
+        <p:txBody>
+          <a:bodyPr wrap="square" rtlCol="0" anchor="ctr"/>
+          <a:lstStyle/>
+          <a:p>
+            <a:pPr indent="0" marL="0">
+              <a:buNone/>
+            </a:pPr>
+            <a:r>
+              <a:rPr lang="en-US" sz="1300" b="1" spc="300" kern="0" dirty="0">
+                <a:solidFill>
+                  <a:srgbClr val="B9852F"/>
+                </a:solidFill>
+                <a:latin typeface="Calibri" pitchFamily="34" charset="0"/>
+                <a:ea typeface="Calibri" pitchFamily="34" charset="-122"/>
+                <a:cs typeface="Calibri" pitchFamily="34" charset="-120"/>
+              </a:rPr>
+              <a:t>BREAK</a:t>
+            </a:r>
+            <a:endParaRPr lang="en-US" sz="1300" dirty="0"/>
+          </a:p>
+        </p:txBody>
+      </p:sp>
+      <p:sp>
+        <p:nvSpPr>
+          <p:cNvPr id="3" name="Text 1"/>
+          <p:cNvSpPr/>
+          <p:nvPr/>
+        </p:nvSpPr>
+        <p:spPr>
+          <a:xfrm>
+            <a:off x="640080" y="2377440"/>
+            <a:ext cx="10058400" cy="914400"/>
+          </a:xfrm>
+          <a:prstGeom prst="rect">
+            <a:avLst/>
+          </a:prstGeom>
+          <a:noFill/>
+          <a:ln/>
+        </p:spPr>
+        <p:txBody>
+          <a:bodyPr wrap="square" rtlCol="0" anchor="ctr"/>
+          <a:lstStyle/>
+          <a:p>
+            <a:pPr indent="0" marL="0">
+              <a:buNone/>
+            </a:pPr>
+            <a:r>
+              <a:rPr lang="en-US" sz="4000" b="1" dirty="0">
+                <a:solidFill>
+                  <a:srgbClr val="FFFFFF"/>
+                </a:solidFill>
+                <a:latin typeface="Cambria" pitchFamily="34" charset="0"/>
+                <a:ea typeface="Cambria" pitchFamily="34" charset="-122"/>
+                <a:cs typeface="Cambria" pitchFamily="34" charset="-120"/>
+              </a:rPr>
+              <a:t>Ten minutes</a:t>
+            </a:r>
+            <a:endParaRPr lang="en-US" sz="4000" dirty="0"/>
+          </a:p>
+        </p:txBody>
+      </p:sp>
+      <p:sp>
+        <p:nvSpPr>
+          <p:cNvPr id="4" name="Text 2"/>
+          <p:cNvSpPr/>
+          <p:nvPr/>
+        </p:nvSpPr>
+        <p:spPr>
+          <a:xfrm>
+            <a:off x="640080" y="3383280"/>
+            <a:ext cx="10058400" cy="548640"/>
+          </a:xfrm>
+          <a:prstGeom prst="rect">
+            <a:avLst/>
+          </a:prstGeom>
+          <a:noFill/>
+          <a:ln/>
+        </p:spPr>
+        <p:txBody>
+          <a:bodyPr wrap="square" rtlCol="0" anchor="ctr"/>
+          <a:lstStyle/>
+          <a:p>
+            <a:pPr indent="0" marL="0">
+              <a:buNone/>
+            </a:pPr>
+            <a:r>
+              <a:rPr lang="en-US" sz="1800" i="1" dirty="0">
+                <a:solidFill>
+                  <a:srgbClr val="E8DCD6"/>
+                </a:solidFill>
+                <a:latin typeface="Calibri" pitchFamily="34" charset="0"/>
+                <a:ea typeface="Calibri" pitchFamily="34" charset="-122"/>
+                <a:cs typeface="Calibri" pitchFamily="34" charset="-120"/>
+              </a:rPr>
+              <a:t>Then: where your corpus actually comes from.</a:t>
+            </a:r>
+            <a:endParaRPr lang="en-US" sz="1800" dirty="0"/>
+          </a:p>
+        </p:txBody>
+      </p:sp>
+    </p:spTree>
+  </p:cSld>
+  <p:clrMapOvr>
+    <a:masterClrMapping/>
+  </p:clrMapOvr>
+</p:sld>
+</file>
+
+<file path=ppt/slides/slide24.xml><?xml version="1.0" encoding="utf-8"?>
+<p:sld xmlns:a="http://schemas.openxmlformats.org/drawingml/2006/main" xmlns:r="http://schemas.openxmlformats.org/officeDocument/2006/relationships" xmlns:p="http://schemas.openxmlformats.org/presentationml/2006/main">
+  <p:cSld name="Slide 24">
+    <p:bg>
+      <p:bgPr>
+        <a:solidFill>
+          <a:srgbClr val="FFFFFF"/>
+        </a:solidFill>
+      </p:bgPr>
+    </p:bg>
+    <p:spTree>
+      <p:nvGrpSpPr>
+        <p:cNvPr id="1" name=""/>
+        <p:cNvGrpSpPr/>
+        <p:nvPr/>
+      </p:nvGrpSpPr>
+      <p:grpSpPr>
+        <a:xfrm>
+          <a:off x="0" y="0"/>
+          <a:ext cx="0" cy="0"/>
+          <a:chOff x="0" y="0"/>
+          <a:chExt cx="0" cy="0"/>
+        </a:xfrm>
+      </p:grpSpPr>
+      <p:sp>
+        <p:nvSpPr>
+          <p:cNvPr id="2" name="Text 0"/>
+          <p:cNvSpPr/>
+          <p:nvPr/>
+        </p:nvSpPr>
+        <p:spPr>
+          <a:xfrm>
+            <a:off x="640080" y="502920"/>
+            <a:ext cx="10515600" cy="320040"/>
+          </a:xfrm>
+          <a:prstGeom prst="rect">
+            <a:avLst/>
+          </a:prstGeom>
+          <a:noFill/>
+          <a:ln/>
+        </p:spPr>
+        <p:txBody>
+          <a:bodyPr wrap="square" rtlCol="0" anchor="ctr"/>
+          <a:lstStyle/>
+          <a:p>
+            <a:pPr indent="0" marL="0">
+              <a:buNone/>
+            </a:pPr>
+            <a:r>
+              <a:rPr lang="en-US" sz="1300" b="1" spc="300" kern="0" dirty="0">
+                <a:solidFill>
+                  <a:srgbClr val="7A3B2E"/>
+                </a:solidFill>
+                <a:latin typeface="Calibri" pitchFamily="34" charset="0"/>
+                <a:ea typeface="Calibri" pitchFamily="34" charset="-122"/>
+                <a:cs typeface="Calibri" pitchFamily="34" charset="-120"/>
+              </a:rPr>
+              <a:t>GETTING THE DATA</a:t>
+            </a:r>
+            <a:endParaRPr lang="en-US" sz="1300" dirty="0"/>
+          </a:p>
+        </p:txBody>
+      </p:sp>
+      <p:sp>
+        <p:nvSpPr>
+          <p:cNvPr id="3" name="Text 1"/>
+          <p:cNvSpPr/>
+          <p:nvPr/>
+        </p:nvSpPr>
+        <p:spPr>
+          <a:xfrm>
+            <a:off x="640080" y="868680"/>
+            <a:ext cx="10972800" cy="777240"/>
+          </a:xfrm>
+          <a:prstGeom prst="rect">
+            <a:avLst/>
+          </a:prstGeom>
+          <a:noFill/>
+          <a:ln/>
+        </p:spPr>
+        <p:txBody>
+          <a:bodyPr wrap="square" rtlCol="0" anchor="t"/>
+          <a:lstStyle/>
+          <a:p>
+            <a:pPr indent="0" marL="0">
+              <a:buNone/>
+            </a:pPr>
+            <a:r>
+              <a:rPr lang="en-US" sz="3400" b="1" dirty="0">
+                <a:solidFill>
+                  <a:srgbClr val="1A1A1A"/>
+                </a:solidFill>
+                <a:latin typeface="Cambria" pitchFamily="34" charset="0"/>
+                <a:ea typeface="Cambria" pitchFamily="34" charset="-122"/>
+                <a:cs typeface="Cambria" pitchFamily="34" charset="-120"/>
+              </a:rPr>
+              <a:t>Three routes, in the order you should try them</a:t>
+            </a:r>
+            <a:endParaRPr lang="en-US" sz="3400" dirty="0"/>
+          </a:p>
+        </p:txBody>
+      </p:sp>
+      <p:sp>
+        <p:nvSpPr>
+          <p:cNvPr id="4" name="Shape 2"/>
+          <p:cNvSpPr/>
+          <p:nvPr/>
+        </p:nvSpPr>
+        <p:spPr>
+          <a:xfrm>
+            <a:off x="640080" y="2011680"/>
+            <a:ext cx="10881360" cy="1143000"/>
+          </a:xfrm>
+          <a:prstGeom prst="roundRect">
+            <a:avLst>
+              <a:gd name="adj" fmla="val 8000"/>
+            </a:avLst>
+          </a:prstGeom>
+          <a:solidFill>
+            <a:srgbClr val="F4EEE8"/>
+          </a:solidFill>
+          <a:ln/>
+        </p:spPr>
+      </p:sp>
+      <p:sp>
+        <p:nvSpPr>
+          <p:cNvPr id="5" name="Shape 3"/>
+          <p:cNvSpPr/>
+          <p:nvPr/>
+        </p:nvSpPr>
+        <p:spPr>
+          <a:xfrm>
+            <a:off x="914400" y="2304288"/>
+            <a:ext cx="548640" cy="548640"/>
+          </a:xfrm>
+          <a:prstGeom prst="ellipse">
+            <a:avLst/>
+          </a:prstGeom>
+          <a:solidFill>
+            <a:srgbClr val="3F6F5F"/>
+          </a:solidFill>
+          <a:ln/>
+        </p:spPr>
+      </p:sp>
+      <p:sp>
+        <p:nvSpPr>
+          <p:cNvPr id="6" name="Text 4"/>
+          <p:cNvSpPr/>
+          <p:nvPr/>
+        </p:nvSpPr>
+        <p:spPr>
+          <a:xfrm>
+            <a:off x="914400" y="2304288"/>
+            <a:ext cx="548640" cy="548640"/>
+          </a:xfrm>
+          <a:prstGeom prst="rect">
+            <a:avLst/>
+          </a:prstGeom>
+          <a:noFill/>
+          <a:ln/>
+        </p:spPr>
+        <p:txBody>
+          <a:bodyPr wrap="square" rtlCol="0" anchor="ctr"/>
+          <a:lstStyle/>
+          <a:p>
+            <a:pPr algn="ctr" indent="0" marL="0">
+              <a:buNone/>
+            </a:pPr>
+            <a:r>
+              <a:rPr lang="en-US" sz="1900" b="1" dirty="0">
+                <a:solidFill>
+                  <a:srgbClr val="FFFFFF"/>
+                </a:solidFill>
+                <a:latin typeface="Cambria" pitchFamily="34" charset="0"/>
+                <a:ea typeface="Cambria" pitchFamily="34" charset="-122"/>
+                <a:cs typeface="Cambria" pitchFamily="34" charset="-120"/>
+              </a:rPr>
+              <a:t>1</a:t>
+            </a:r>
+            <a:endParaRPr lang="en-US" sz="1900" dirty="0"/>
+          </a:p>
+        </p:txBody>
+      </p:sp>
+      <p:sp>
+        <p:nvSpPr>
+          <p:cNvPr id="7" name="Text 5"/>
+          <p:cNvSpPr/>
+          <p:nvPr/>
+        </p:nvSpPr>
+        <p:spPr>
+          <a:xfrm>
+            <a:off x="1645920" y="2176272"/>
+            <a:ext cx="2834640" cy="457200"/>
+          </a:xfrm>
+          <a:prstGeom prst="rect">
+            <a:avLst/>
+          </a:prstGeom>
+          <a:noFill/>
+          <a:ln/>
+        </p:spPr>
+        <p:txBody>
+          <a:bodyPr wrap="square" lIns="0" tIns="0" rIns="0" bIns="0" rtlCol="0" anchor="ctr"/>
+          <a:lstStyle/>
+          <a:p>
+            <a:pPr indent="0" marL="0">
+              <a:buNone/>
+            </a:pPr>
+            <a:r>
+              <a:rPr lang="en-US" sz="1800" b="1" dirty="0">
+                <a:solidFill>
+                  <a:srgbClr val="1A1A1A"/>
+                </a:solidFill>
+                <a:latin typeface="Cambria" pitchFamily="34" charset="0"/>
+                <a:ea typeface="Cambria" pitchFamily="34" charset="-122"/>
+                <a:cs typeface="Cambria" pitchFamily="34" charset="-120"/>
+              </a:rPr>
+              <a:t>A prepared file</a:t>
+            </a:r>
+            <a:endParaRPr lang="en-US" sz="1800" dirty="0"/>
+          </a:p>
+        </p:txBody>
+      </p:sp>
+      <p:sp>
+        <p:nvSpPr>
+          <p:cNvPr id="8" name="Text 6"/>
+          <p:cNvSpPr/>
+          <p:nvPr/>
+        </p:nvSpPr>
+        <p:spPr>
+          <a:xfrm>
+            <a:off x="4572000" y="2194560"/>
+            <a:ext cx="6675120" cy="822960"/>
+          </a:xfrm>
+          <a:prstGeom prst="rect">
+            <a:avLst/>
+          </a:prstGeom>
+          <a:noFill/>
+          <a:ln/>
+        </p:spPr>
+        <p:txBody>
+          <a:bodyPr wrap="square" lIns="0" tIns="0" rIns="0" bIns="0" rtlCol="0" anchor="t"/>
+          <a:lstStyle/>
+          <a:p>
+            <a:pPr indent="0" marL="0">
+              <a:buNone/>
+            </a:pPr>
+            <a:r>
+              <a:rPr lang="en-US" sz="1350" dirty="0">
+                <a:solidFill>
+                  <a:srgbClr val="1A1A1A"/>
+                </a:solidFill>
+                <a:latin typeface="Calibri" pitchFamily="34" charset="0"/>
+                <a:ea typeface="Calibri" pitchFamily="34" charset="-122"/>
+                <a:cs typeface="Calibri" pitchFamily="34" charset="-120"/>
+              </a:rPr>
+              <a:t>pd.read_csv(url) · gdown · load_dataset(). Most projects should stop here.</a:t>
+            </a:r>
+            <a:endParaRPr lang="en-US" sz="1350" dirty="0"/>
+          </a:p>
+        </p:txBody>
+      </p:sp>
+      <p:sp>
+        <p:nvSpPr>
+          <p:cNvPr id="9" name="Shape 7"/>
+          <p:cNvSpPr/>
+          <p:nvPr/>
+        </p:nvSpPr>
+        <p:spPr>
+          <a:xfrm>
+            <a:off x="640080" y="3337560"/>
+            <a:ext cx="10881360" cy="1143000"/>
+          </a:xfrm>
+          <a:prstGeom prst="roundRect">
+            <a:avLst>
+              <a:gd name="adj" fmla="val 8000"/>
+            </a:avLst>
+          </a:prstGeom>
+          <a:solidFill>
+            <a:srgbClr val="F4EEE8"/>
+          </a:solidFill>
+          <a:ln/>
+        </p:spPr>
+      </p:sp>
+      <p:sp>
+        <p:nvSpPr>
+          <p:cNvPr id="10" name="Shape 8"/>
+          <p:cNvSpPr/>
+          <p:nvPr/>
+        </p:nvSpPr>
+        <p:spPr>
+          <a:xfrm>
+            <a:off x="914400" y="3630168"/>
+            <a:ext cx="548640" cy="548640"/>
+          </a:xfrm>
+          <a:prstGeom prst="ellipse">
+            <a:avLst/>
+          </a:prstGeom>
+          <a:solidFill>
+            <a:srgbClr val="2E5F8A"/>
+          </a:solidFill>
+          <a:ln/>
+        </p:spPr>
+      </p:sp>
+      <p:sp>
+        <p:nvSpPr>
+          <p:cNvPr id="11" name="Text 9"/>
+          <p:cNvSpPr/>
+          <p:nvPr/>
+        </p:nvSpPr>
+        <p:spPr>
+          <a:xfrm>
+            <a:off x="914400" y="3630168"/>
+            <a:ext cx="548640" cy="548640"/>
+          </a:xfrm>
+          <a:prstGeom prst="rect">
+            <a:avLst/>
+          </a:prstGeom>
+          <a:noFill/>
+          <a:ln/>
+        </p:spPr>
+        <p:txBody>
+          <a:bodyPr wrap="square" rtlCol="0" anchor="ctr"/>
+          <a:lstStyle/>
+          <a:p>
+            <a:pPr algn="ctr" indent="0" marL="0">
+              <a:buNone/>
+            </a:pPr>
+            <a:r>
+              <a:rPr lang="en-US" sz="1900" b="1" dirty="0">
+                <a:solidFill>
+                  <a:srgbClr val="FFFFFF"/>
+                </a:solidFill>
+                <a:latin typeface="Cambria" pitchFamily="34" charset="0"/>
+                <a:ea typeface="Cambria" pitchFamily="34" charset="-122"/>
+                <a:cs typeface="Cambria" pitchFamily="34" charset="-120"/>
+              </a:rPr>
+              <a:t>2</a:t>
+            </a:r>
+            <a:endParaRPr lang="en-US" sz="1900" dirty="0"/>
+          </a:p>
+        </p:txBody>
+      </p:sp>
+      <p:sp>
+        <p:nvSpPr>
+          <p:cNvPr id="12" name="Text 10"/>
+          <p:cNvSpPr/>
+          <p:nvPr/>
+        </p:nvSpPr>
+        <p:spPr>
+          <a:xfrm>
+            <a:off x="1645920" y="3502152"/>
+            <a:ext cx="2834640" cy="457200"/>
+          </a:xfrm>
+          <a:prstGeom prst="rect">
+            <a:avLst/>
+          </a:prstGeom>
+          <a:noFill/>
+          <a:ln/>
+        </p:spPr>
+        <p:txBody>
+          <a:bodyPr wrap="square" lIns="0" tIns="0" rIns="0" bIns="0" rtlCol="0" anchor="ctr"/>
+          <a:lstStyle/>
+          <a:p>
+            <a:pPr indent="0" marL="0">
+              <a:buNone/>
+            </a:pPr>
+            <a:r>
+              <a:rPr lang="en-US" sz="1800" b="1" dirty="0">
+                <a:solidFill>
+                  <a:srgbClr val="1A1A1A"/>
+                </a:solidFill>
+                <a:latin typeface="Cambria" pitchFamily="34" charset="0"/>
+                <a:ea typeface="Cambria" pitchFamily="34" charset="-122"/>
+                <a:cs typeface="Cambria" pitchFamily="34" charset="-120"/>
+              </a:rPr>
+              <a:t>An API</a:t>
+            </a:r>
+            <a:endParaRPr lang="en-US" sz="1800" dirty="0"/>
+          </a:p>
+        </p:txBody>
+      </p:sp>
+      <p:sp>
+        <p:nvSpPr>
+          <p:cNvPr id="13" name="Text 11"/>
+          <p:cNvSpPr/>
+          <p:nvPr/>
+        </p:nvSpPr>
+        <p:spPr>
+          <a:xfrm>
+            <a:off x="4572000" y="3520440"/>
+            <a:ext cx="6675120" cy="822960"/>
+          </a:xfrm>
+          <a:prstGeom prst="rect">
+            <a:avLst/>
+          </a:prstGeom>
+          <a:noFill/>
+          <a:ln/>
+        </p:spPr>
+        <p:txBody>
+          <a:bodyPr wrap="square" lIns="0" tIns="0" rIns="0" bIns="0" rtlCol="0" anchor="t"/>
+          <a:lstStyle/>
+          <a:p>
+            <a:pPr indent="0" marL="0">
+              <a:buNone/>
+            </a:pPr>
+            <a:r>
+              <a:rPr lang="en-US" sz="1350" dirty="0">
+                <a:solidFill>
+                  <a:srgbClr val="1A1A1A"/>
+                </a:solidFill>
+                <a:latin typeface="Calibri" pitchFamily="34" charset="0"/>
+                <a:ea typeface="Calibri" pitchFamily="34" charset="-122"/>
+                <a:cs typeface="Calibri" pitchFamily="34" charset="-120"/>
+              </a:rPr>
+              <a:t>A documented URL that returns JSON. Four words: endpoint, key, pagination, rate limit.</a:t>
+            </a:r>
+            <a:endParaRPr lang="en-US" sz="1350" dirty="0"/>
+          </a:p>
+        </p:txBody>
+      </p:sp>
+      <p:sp>
+        <p:nvSpPr>
+          <p:cNvPr id="14" name="Shape 12"/>
+          <p:cNvSpPr/>
+          <p:nvPr/>
+        </p:nvSpPr>
+        <p:spPr>
+          <a:xfrm>
+            <a:off x="640080" y="4663440"/>
+            <a:ext cx="10881360" cy="1143000"/>
+          </a:xfrm>
+          <a:prstGeom prst="roundRect">
+            <a:avLst>
+              <a:gd name="adj" fmla="val 8000"/>
+            </a:avLst>
+          </a:prstGeom>
+          <a:solidFill>
+            <a:srgbClr val="F4EEE8"/>
+          </a:solidFill>
+          <a:ln/>
+        </p:spPr>
+      </p:sp>
+      <p:sp>
+        <p:nvSpPr>
+          <p:cNvPr id="15" name="Shape 13"/>
+          <p:cNvSpPr/>
+          <p:nvPr/>
+        </p:nvSpPr>
+        <p:spPr>
+          <a:xfrm>
+            <a:off x="914400" y="4956048"/>
+            <a:ext cx="548640" cy="548640"/>
+          </a:xfrm>
+          <a:prstGeom prst="ellipse">
+            <a:avLst/>
+          </a:prstGeom>
+          <a:solidFill>
+            <a:srgbClr val="7A3B2E"/>
+          </a:solidFill>
+          <a:ln/>
+        </p:spPr>
+      </p:sp>
+      <p:sp>
+        <p:nvSpPr>
+          <p:cNvPr id="16" name="Text 14"/>
+          <p:cNvSpPr/>
+          <p:nvPr/>
+        </p:nvSpPr>
+        <p:spPr>
+          <a:xfrm>
+            <a:off x="914400" y="4956048"/>
+            <a:ext cx="548640" cy="548640"/>
+          </a:xfrm>
+          <a:prstGeom prst="rect">
+            <a:avLst/>
+          </a:prstGeom>
+          <a:noFill/>
+          <a:ln/>
+        </p:spPr>
+        <p:txBody>
+          <a:bodyPr wrap="square" rtlCol="0" anchor="ctr"/>
+          <a:lstStyle/>
+          <a:p>
+            <a:pPr algn="ctr" indent="0" marL="0">
+              <a:buNone/>
+            </a:pPr>
+            <a:r>
+              <a:rPr lang="en-US" sz="1900" b="1" dirty="0">
+                <a:solidFill>
+                  <a:srgbClr val="FFFFFF"/>
+                </a:solidFill>
+                <a:latin typeface="Cambria" pitchFamily="34" charset="0"/>
+                <a:ea typeface="Cambria" pitchFamily="34" charset="-122"/>
+                <a:cs typeface="Cambria" pitchFamily="34" charset="-120"/>
+              </a:rPr>
+              <a:t>3</a:t>
+            </a:r>
+            <a:endParaRPr lang="en-US" sz="1900" dirty="0"/>
+          </a:p>
+        </p:txBody>
+      </p:sp>
+      <p:sp>
+        <p:nvSpPr>
+          <p:cNvPr id="17" name="Text 15"/>
+          <p:cNvSpPr/>
+          <p:nvPr/>
+        </p:nvSpPr>
+        <p:spPr>
+          <a:xfrm>
+            <a:off x="1645920" y="4828032"/>
+            <a:ext cx="2834640" cy="457200"/>
+          </a:xfrm>
+          <a:prstGeom prst="rect">
+            <a:avLst/>
+          </a:prstGeom>
+          <a:noFill/>
+          <a:ln/>
+        </p:spPr>
+        <p:txBody>
+          <a:bodyPr wrap="square" lIns="0" tIns="0" rIns="0" bIns="0" rtlCol="0" anchor="ctr"/>
+          <a:lstStyle/>
+          <a:p>
+            <a:pPr indent="0" marL="0">
+              <a:buNone/>
+            </a:pPr>
+            <a:r>
+              <a:rPr lang="en-US" sz="1800" b="1" dirty="0">
+                <a:solidFill>
+                  <a:srgbClr val="1A1A1A"/>
+                </a:solidFill>
+                <a:latin typeface="Cambria" pitchFamily="34" charset="0"/>
+                <a:ea typeface="Cambria" pitchFamily="34" charset="-122"/>
+                <a:cs typeface="Cambria" pitchFamily="34" charset="-120"/>
+              </a:rPr>
+              <a:t>A careful scrape</a:t>
+            </a:r>
+            <a:endParaRPr lang="en-US" sz="1800" dirty="0"/>
+          </a:p>
+        </p:txBody>
+      </p:sp>
+      <p:sp>
+        <p:nvSpPr>
+          <p:cNvPr id="18" name="Text 16"/>
+          <p:cNvSpPr/>
+          <p:nvPr/>
+        </p:nvSpPr>
+        <p:spPr>
+          <a:xfrm>
+            <a:off x="4572000" y="4846320"/>
+            <a:ext cx="6675120" cy="822960"/>
+          </a:xfrm>
+          <a:prstGeom prst="rect">
+            <a:avLst/>
+          </a:prstGeom>
+          <a:noFill/>
+          <a:ln/>
+        </p:spPr>
+        <p:txBody>
+          <a:bodyPr wrap="square" lIns="0" tIns="0" rIns="0" bIns="0" rtlCol="0" anchor="t"/>
+          <a:lstStyle/>
+          <a:p>
+            <a:pPr indent="0" marL="0">
+              <a:buNone/>
+            </a:pPr>
+            <a:r>
+              <a:rPr lang="en-US" sz="1350" dirty="0">
+                <a:solidFill>
+                  <a:srgbClr val="1A1A1A"/>
+                </a:solidFill>
+                <a:latin typeface="Calibri" pitchFamily="34" charset="0"/>
+                <a:ea typeface="Calibri" pitchFamily="34" charset="-122"/>
+                <a:cs typeface="Calibri" pitchFamily="34" charset="-120"/>
+              </a:rPr>
+              <a:t>Only when there is no file and no API. Slowly, and never republished.</a:t>
+            </a:r>
+            <a:endParaRPr lang="en-US" sz="1350" dirty="0"/>
+          </a:p>
+        </p:txBody>
+      </p:sp>
+      <p:sp>
+        <p:nvSpPr>
+          <p:cNvPr id="19" name="Text 17"/>
+          <p:cNvSpPr/>
+          <p:nvPr/>
+        </p:nvSpPr>
+        <p:spPr>
+          <a:xfrm>
+            <a:off x="640080" y="6263640"/>
+            <a:ext cx="10881360" cy="365760"/>
+          </a:xfrm>
+          <a:prstGeom prst="rect">
+            <a:avLst/>
+          </a:prstGeom>
+          <a:noFill/>
+          <a:ln/>
+        </p:spPr>
+        <p:txBody>
+          <a:bodyPr wrap="square" rtlCol="0" anchor="ctr"/>
+          <a:lstStyle/>
+          <a:p>
+            <a:pPr indent="0" marL="0">
+              <a:buNone/>
+            </a:pPr>
+            <a:r>
+              <a:rPr lang="en-US" sz="1100" i="1" dirty="0">
+                <a:solidFill>
+                  <a:srgbClr val="6B6B63"/>
+                </a:solidFill>
+                <a:latin typeface="Calibri" pitchFamily="34" charset="0"/>
+                <a:ea typeface="Calibri" pitchFamily="34" charset="-122"/>
+                <a:cs typeface="Calibri" pitchFamily="34" charset="-120"/>
+              </a:rPr>
+              <a:t>The licensing line decides which routes are even open to you. That is the next slide.</a:t>
+            </a:r>
+            <a:endParaRPr lang="en-US" sz="1100" dirty="0"/>
+          </a:p>
+        </p:txBody>
+      </p:sp>
+    </p:spTree>
+  </p:cSld>
+  <p:clrMapOvr>
+    <a:masterClrMapping/>
+  </p:clrMapOvr>
+</p:sld>
+</file>
+
+<file path=ppt/slides/slide25.xml><?xml version="1.0" encoding="utf-8"?>
+<p:sld xmlns:a="http://schemas.openxmlformats.org/drawingml/2006/main" xmlns:r="http://schemas.openxmlformats.org/officeDocument/2006/relationships" xmlns:p="http://schemas.openxmlformats.org/presentationml/2006/main">
+  <p:cSld name="Slide 25">
+    <p:bg>
+      <p:bgPr>
+        <a:solidFill>
+          <a:srgbClr val="FFFFFF"/>
+        </a:solidFill>
+      </p:bgPr>
+    </p:bg>
+    <p:spTree>
+      <p:nvGrpSpPr>
+        <p:cNvPr id="1" name=""/>
+        <p:cNvGrpSpPr/>
+        <p:nvPr/>
+      </p:nvGrpSpPr>
+      <p:grpSpPr>
+        <a:xfrm>
+          <a:off x="0" y="0"/>
+          <a:ext cx="0" cy="0"/>
+          <a:chOff x="0" y="0"/>
+          <a:chExt cx="0" cy="0"/>
+        </a:xfrm>
+      </p:grpSpPr>
+      <p:sp>
+        <p:nvSpPr>
+          <p:cNvPr id="2" name="Text 0"/>
+          <p:cNvSpPr/>
+          <p:nvPr/>
+        </p:nvSpPr>
+        <p:spPr>
+          <a:xfrm>
+            <a:off x="640080" y="502920"/>
+            <a:ext cx="10515600" cy="320040"/>
+          </a:xfrm>
+          <a:prstGeom prst="rect">
+            <a:avLst/>
+          </a:prstGeom>
+          <a:noFill/>
+          <a:ln/>
+        </p:spPr>
+        <p:txBody>
+          <a:bodyPr wrap="square" rtlCol="0" anchor="ctr"/>
+          <a:lstStyle/>
+          <a:p>
+            <a:pPr indent="0" marL="0">
+              <a:buNone/>
+            </a:pPr>
+            <a:r>
+              <a:rPr lang="en-US" sz="1300" b="1" spc="300" kern="0" dirty="0">
+                <a:solidFill>
+                  <a:srgbClr val="2E5F8A"/>
+                </a:solidFill>
+                <a:latin typeface="Calibri" pitchFamily="34" charset="0"/>
+                <a:ea typeface="Calibri" pitchFamily="34" charset="-122"/>
+                <a:cs typeface="Calibri" pitchFamily="34" charset="-120"/>
+              </a:rPr>
+              <a:t>ROUTE TWO, LIVE</a:t>
+            </a:r>
+            <a:endParaRPr lang="en-US" sz="1300" dirty="0"/>
+          </a:p>
+        </p:txBody>
+      </p:sp>
+      <p:sp>
+        <p:nvSpPr>
+          <p:cNvPr id="3" name="Text 1"/>
+          <p:cNvSpPr/>
+          <p:nvPr/>
+        </p:nvSpPr>
+        <p:spPr>
+          <a:xfrm>
+            <a:off x="640080" y="868680"/>
+            <a:ext cx="10972800" cy="777240"/>
+          </a:xfrm>
+          <a:prstGeom prst="rect">
+            <a:avLst/>
+          </a:prstGeom>
+          <a:noFill/>
+          <a:ln/>
+        </p:spPr>
+        <p:txBody>
+          <a:bodyPr wrap="square" rtlCol="0" anchor="t"/>
+          <a:lstStyle/>
+          <a:p>
+            <a:pPr indent="0" marL="0">
+              <a:buNone/>
+            </a:pPr>
+            <a:r>
+              <a:rPr lang="en-US" sz="3400" b="1" dirty="0">
+                <a:solidFill>
+                  <a:srgbClr val="1A1A1A"/>
+                </a:solidFill>
+                <a:latin typeface="Cambria" pitchFamily="34" charset="0"/>
+                <a:ea typeface="Cambria" pitchFamily="34" charset="-122"/>
+                <a:cs typeface="Cambria" pitchFamily="34" charset="-120"/>
+              </a:rPr>
+              <a:t>A URL, some JSON, and then a table</a:t>
+            </a:r>
+            <a:endParaRPr lang="en-US" sz="3400" dirty="0"/>
+          </a:p>
+        </p:txBody>
+      </p:sp>
+      <p:pic>
+        <p:nvPicPr>
+          <p:cNvPr id="4" name="Image 0" descr="/tmp/figs/w4_api.png">    </p:cNvPr>
+          <p:cNvPicPr>
+            <a:picLocks noChangeAspect="1"/>
+          </p:cNvPicPr>
+          <p:nvPr/>
+        </p:nvPicPr>
+        <p:blipFill>
+          <a:blip r:embed="rId1"/>
+          <a:srcRect l="0" r="0" t="0" b="0"/>
+          <a:stretch/>
+        </p:blipFill>
+        <p:spPr>
+          <a:xfrm>
+            <a:off x="1097280" y="1920240"/>
+            <a:ext cx="9966960" cy="3749040"/>
+          </a:xfrm>
+          <a:prstGeom prst="rect">
+            <a:avLst/>
+          </a:prstGeom>
+        </p:spPr>
+      </p:pic>
+      <p:sp>
+        <p:nvSpPr>
+          <p:cNvPr id="5" name="Text 2"/>
+          <p:cNvSpPr/>
+          <p:nvPr/>
+        </p:nvSpPr>
+        <p:spPr>
+          <a:xfrm>
+            <a:off x="640080" y="5897880"/>
+            <a:ext cx="10881360" cy="411480"/>
+          </a:xfrm>
+          <a:prstGeom prst="rect">
+            <a:avLst/>
+          </a:prstGeom>
+          <a:noFill/>
+          <a:ln/>
+        </p:spPr>
+        <p:txBody>
+          <a:bodyPr wrap="square" rtlCol="0" anchor="ctr"/>
+          <a:lstStyle/>
+          <a:p>
+            <a:pPr indent="0" marL="0">
+              <a:buNone/>
+            </a:pPr>
+            <a:r>
+              <a:rPr lang="en-US" sz="1600" i="1" dirty="0">
+                <a:solidFill>
+                  <a:srgbClr val="1A1A1A"/>
+                </a:solidFill>
+                <a:latin typeface="Cambria" pitchFamily="34" charset="0"/>
+                <a:ea typeface="Cambria" pitchFamily="34" charset="-122"/>
+                <a:cs typeface="Cambria" pitchFamily="34" charset="-120"/>
+              </a:rPr>
+              <a:t>An endpoint is a URL that answers with data. A key is a name badge. Pagination hands you a page at a time.</a:t>
+            </a:r>
+            <a:endParaRPr lang="en-US" sz="1600" dirty="0"/>
+          </a:p>
+        </p:txBody>
+      </p:sp>
+      <p:sp>
+        <p:nvSpPr>
+          <p:cNvPr id="6" name="Text 3"/>
+          <p:cNvSpPr/>
+          <p:nvPr/>
+        </p:nvSpPr>
+        <p:spPr>
+          <a:xfrm>
+            <a:off x="640080" y="6355080"/>
+            <a:ext cx="10881360" cy="320040"/>
+          </a:xfrm>
+          <a:prstGeom prst="rect">
+            <a:avLst/>
+          </a:prstGeom>
+          <a:noFill/>
+          <a:ln/>
+        </p:spPr>
+        <p:txBody>
+          <a:bodyPr wrap="square" rtlCol="0" anchor="ctr"/>
+          <a:lstStyle/>
+          <a:p>
+            <a:pPr indent="0" marL="0">
+              <a:buNone/>
+            </a:pPr>
+            <a:r>
+              <a:rPr lang="en-US" sz="1000" dirty="0">
+                <a:solidFill>
+                  <a:srgbClr val="6B6B63"/>
+                </a:solidFill>
+                <a:latin typeface="Calibri" pitchFamily="34" charset="0"/>
+                <a:ea typeface="Calibri" pitchFamily="34" charset="-122"/>
+                <a:cs typeface="Calibri" pitchFamily="34" charset="-120"/>
+              </a:rPr>
+              <a:t>Left panel: a real response, live from api.artic.edu. The AI writes the three lines that make the table.</a:t>
+            </a:r>
+            <a:endParaRPr lang="en-US" sz="1000" dirty="0"/>
+          </a:p>
+        </p:txBody>
+      </p:sp>
+    </p:spTree>
+  </p:cSld>
+  <p:clrMapOvr>
+    <a:masterClrMapping/>
+  </p:clrMapOvr>
+</p:sld>
+</file>
+
+<file path=ppt/slides/slide26.xml><?xml version="1.0" encoding="utf-8"?>
+<p:sld xmlns:a="http://schemas.openxmlformats.org/drawingml/2006/main" xmlns:r="http://schemas.openxmlformats.org/officeDocument/2006/relationships" xmlns:p="http://schemas.openxmlformats.org/presentationml/2006/main">
+  <p:cSld name="Slide 26">
+    <p:bg>
+      <p:bgPr>
+        <a:solidFill>
+          <a:srgbClr val="FFFFFF"/>
+        </a:solidFill>
+      </p:bgPr>
+    </p:bg>
+    <p:spTree>
+      <p:nvGrpSpPr>
+        <p:cNvPr id="1" name=""/>
+        <p:cNvGrpSpPr/>
+        <p:nvPr/>
+      </p:nvGrpSpPr>
+      <p:grpSpPr>
+        <a:xfrm>
+          <a:off x="0" y="0"/>
+          <a:ext cx="0" cy="0"/>
+          <a:chOff x="0" y="0"/>
+          <a:chExt cx="0" cy="0"/>
+        </a:xfrm>
+      </p:grpSpPr>
+      <p:sp>
+        <p:nvSpPr>
+          <p:cNvPr id="2" name="Text 0"/>
+          <p:cNvSpPr/>
+          <p:nvPr/>
+        </p:nvSpPr>
+        <p:spPr>
+          <a:xfrm>
+            <a:off x="640080" y="502920"/>
+            <a:ext cx="10515600" cy="320040"/>
+          </a:xfrm>
+          <a:prstGeom prst="rect">
+            <a:avLst/>
+          </a:prstGeom>
+          <a:noFill/>
+          <a:ln/>
+        </p:spPr>
+        <p:txBody>
+          <a:bodyPr wrap="square" rtlCol="0" anchor="ctr"/>
+          <a:lstStyle/>
+          <a:p>
+            <a:pPr indent="0" marL="0">
+              <a:buNone/>
+            </a:pPr>
+            <a:r>
+              <a:rPr lang="en-US" sz="1300" b="1" spc="300" kern="0" dirty="0">
+                <a:solidFill>
+                  <a:srgbClr val="7A3B2E"/>
+                </a:solidFill>
+                <a:latin typeface="Calibri" pitchFamily="34" charset="0"/>
+                <a:ea typeface="Calibri" pitchFamily="34" charset="-122"/>
+                <a:cs typeface="Calibri" pitchFamily="34" charset="-120"/>
+              </a:rPr>
+              <a:t>ROUTE THREE</a:t>
+            </a:r>
+            <a:endParaRPr lang="en-US" sz="1300" dirty="0"/>
+          </a:p>
+        </p:txBody>
+      </p:sp>
+      <p:sp>
+        <p:nvSpPr>
+          <p:cNvPr id="3" name="Text 1"/>
+          <p:cNvSpPr/>
+          <p:nvPr/>
+        </p:nvSpPr>
+        <p:spPr>
+          <a:xfrm>
+            <a:off x="640080" y="868680"/>
+            <a:ext cx="10972800" cy="777240"/>
+          </a:xfrm>
+          <a:prstGeom prst="rect">
+            <a:avLst/>
+          </a:prstGeom>
+          <a:noFill/>
+          <a:ln/>
+        </p:spPr>
+        <p:txBody>
+          <a:bodyPr wrap="square" rtlCol="0" anchor="t"/>
+          <a:lstStyle/>
+          <a:p>
+            <a:pPr indent="0" marL="0">
+              <a:buNone/>
+            </a:pPr>
+            <a:r>
+              <a:rPr lang="en-US" sz="3400" b="1" dirty="0">
+                <a:solidFill>
+                  <a:srgbClr val="1A1A1A"/>
+                </a:solidFill>
+                <a:latin typeface="Cambria" pitchFamily="34" charset="0"/>
+                <a:ea typeface="Cambria" pitchFamily="34" charset="-122"/>
+                <a:cs typeface="Cambria" pitchFamily="34" charset="-120"/>
+              </a:rPr>
+              <a:t>Scraping, and the four things that come with it</a:t>
+            </a:r>
+            <a:endParaRPr lang="en-US" sz="3400" dirty="0"/>
+          </a:p>
+        </p:txBody>
+      </p:sp>
+      <p:sp>
+        <p:nvSpPr>
+          <p:cNvPr id="4" name="Shape 2"/>
+          <p:cNvSpPr/>
+          <p:nvPr/>
+        </p:nvSpPr>
+        <p:spPr>
+          <a:xfrm>
+            <a:off x="640080" y="2011680"/>
+            <a:ext cx="10881360" cy="914400"/>
+          </a:xfrm>
+          <a:prstGeom prst="roundRect">
+            <a:avLst>
+              <a:gd name="adj" fmla="val 10000"/>
+            </a:avLst>
+          </a:prstGeom>
+          <a:solidFill>
+            <a:srgbClr val="F4EEE8"/>
+          </a:solidFill>
+          <a:ln/>
+        </p:spPr>
+      </p:sp>
+      <p:sp>
+        <p:nvSpPr>
+          <p:cNvPr id="5" name="Text 3"/>
+          <p:cNvSpPr/>
+          <p:nvPr/>
+        </p:nvSpPr>
+        <p:spPr>
+          <a:xfrm>
+            <a:off x="960120" y="2103120"/>
+            <a:ext cx="4023360" cy="731520"/>
+          </a:xfrm>
+          <a:prstGeom prst="rect">
+            <a:avLst/>
+          </a:prstGeom>
+          <a:noFill/>
+          <a:ln/>
+        </p:spPr>
+        <p:txBody>
+          <a:bodyPr wrap="square" lIns="0" tIns="0" rIns="0" bIns="0" rtlCol="0" anchor="ctr"/>
+          <a:lstStyle/>
+          <a:p>
+            <a:pPr indent="0" marL="0">
+              <a:buNone/>
+            </a:pPr>
+            <a:r>
+              <a:rPr lang="en-US" sz="1700" b="1" dirty="0">
+                <a:solidFill>
+                  <a:srgbClr val="7A3B2E"/>
+                </a:solidFill>
+                <a:latin typeface="Cambria" pitchFamily="34" charset="0"/>
+                <a:ea typeface="Cambria" pitchFamily="34" charset="-122"/>
+                <a:cs typeface="Cambria" pitchFamily="34" charset="-120"/>
+              </a:rPr>
+              <a:t>Read robots.txt and the terms</a:t>
+            </a:r>
+            <a:endParaRPr lang="en-US" sz="1700" dirty="0"/>
+          </a:p>
+        </p:txBody>
+      </p:sp>
+      <p:sp>
+        <p:nvSpPr>
+          <p:cNvPr id="6" name="Text 4"/>
+          <p:cNvSpPr/>
+          <p:nvPr/>
+        </p:nvSpPr>
+        <p:spPr>
+          <a:xfrm>
+            <a:off x="5120640" y="2103120"/>
+            <a:ext cx="6126480" cy="731520"/>
+          </a:xfrm>
+          <a:prstGeom prst="rect">
+            <a:avLst/>
+          </a:prstGeom>
+          <a:noFill/>
+          <a:ln/>
+        </p:spPr>
+        <p:txBody>
+          <a:bodyPr wrap="square" lIns="0" tIns="0" rIns="0" bIns="0" rtlCol="0" anchor="ctr"/>
+          <a:lstStyle/>
+          <a:p>
+            <a:pPr indent="0" marL="0">
+              <a:buNone/>
+            </a:pPr>
+            <a:r>
+              <a:rPr lang="en-US" sz="1350" dirty="0">
+                <a:solidFill>
+                  <a:srgbClr val="1A1A1A"/>
+                </a:solidFill>
+                <a:latin typeface="Calibri" pitchFamily="34" charset="0"/>
+                <a:ea typeface="Calibri" pitchFamily="34" charset="-122"/>
+                <a:cs typeface="Calibri" pitchFamily="34" charset="-120"/>
+              </a:rPr>
+              <a:t>before the first request, not after the complaint.</a:t>
+            </a:r>
+            <a:endParaRPr lang="en-US" sz="1350" dirty="0"/>
+          </a:p>
+        </p:txBody>
+      </p:sp>
+      <p:sp>
+        <p:nvSpPr>
+          <p:cNvPr id="7" name="Shape 5"/>
+          <p:cNvSpPr/>
+          <p:nvPr/>
+        </p:nvSpPr>
+        <p:spPr>
+          <a:xfrm>
+            <a:off x="640080" y="3063240"/>
+            <a:ext cx="10881360" cy="914400"/>
+          </a:xfrm>
+          <a:prstGeom prst="roundRect">
+            <a:avLst>
+              <a:gd name="adj" fmla="val 10000"/>
+            </a:avLst>
+          </a:prstGeom>
+          <a:solidFill>
+            <a:srgbClr val="F4EEE8"/>
+          </a:solidFill>
+          <a:ln/>
+        </p:spPr>
+      </p:sp>
+      <p:sp>
+        <p:nvSpPr>
+          <p:cNvPr id="8" name="Text 6"/>
+          <p:cNvSpPr/>
+          <p:nvPr/>
+        </p:nvSpPr>
+        <p:spPr>
+          <a:xfrm>
+            <a:off x="960120" y="3154680"/>
+            <a:ext cx="4023360" cy="731520"/>
+          </a:xfrm>
+          <a:prstGeom prst="rect">
+            <a:avLst/>
+          </a:prstGeom>
+          <a:noFill/>
+          <a:ln/>
+        </p:spPr>
+        <p:txBody>
+          <a:bodyPr wrap="square" lIns="0" tIns="0" rIns="0" bIns="0" rtlCol="0" anchor="ctr"/>
+          <a:lstStyle/>
+          <a:p>
+            <a:pPr indent="0" marL="0">
+              <a:buNone/>
+            </a:pPr>
+            <a:r>
+              <a:rPr lang="en-US" sz="1700" b="1" dirty="0">
+                <a:solidFill>
+                  <a:srgbClr val="B9852F"/>
+                </a:solidFill>
+                <a:latin typeface="Cambria" pitchFamily="34" charset="0"/>
+                <a:ea typeface="Cambria" pitchFamily="34" charset="-122"/>
+                <a:cs typeface="Cambria" pitchFamily="34" charset="-120"/>
+              </a:rPr>
+              <a:t>Request slowly</a:t>
+            </a:r>
+            <a:endParaRPr lang="en-US" sz="1700" dirty="0"/>
+          </a:p>
+        </p:txBody>
+      </p:sp>
+      <p:sp>
+        <p:nvSpPr>
+          <p:cNvPr id="9" name="Text 7"/>
+          <p:cNvSpPr/>
+          <p:nvPr/>
+        </p:nvSpPr>
+        <p:spPr>
+          <a:xfrm>
+            <a:off x="5120640" y="3154680"/>
+            <a:ext cx="6126480" cy="731520"/>
+          </a:xfrm>
+          <a:prstGeom prst="rect">
+            <a:avLst/>
+          </a:prstGeom>
+          <a:noFill/>
+          <a:ln/>
+        </p:spPr>
+        <p:txBody>
+          <a:bodyPr wrap="square" lIns="0" tIns="0" rIns="0" bIns="0" rtlCol="0" anchor="ctr"/>
+          <a:lstStyle/>
+          <a:p>
+            <a:pPr indent="0" marL="0">
+              <a:buNone/>
+            </a:pPr>
+            <a:r>
+              <a:rPr lang="en-US" sz="1350" dirty="0">
+                <a:solidFill>
+                  <a:srgbClr val="1A1A1A"/>
+                </a:solidFill>
+                <a:latin typeface="Calibri" pitchFamily="34" charset="0"/>
+                <a:ea typeface="Calibri" pitchFamily="34" charset="-122"/>
+                <a:cs typeface="Calibri" pitchFamily="34" charset="-120"/>
+              </a:rPr>
+              <a:t>one page every couple of seconds. You are a guest on someone's server.</a:t>
+            </a:r>
+            <a:endParaRPr lang="en-US" sz="1350" dirty="0"/>
+          </a:p>
+        </p:txBody>
+      </p:sp>
+      <p:sp>
+        <p:nvSpPr>
+          <p:cNvPr id="10" name="Shape 8"/>
+          <p:cNvSpPr/>
+          <p:nvPr/>
+        </p:nvSpPr>
+        <p:spPr>
+          <a:xfrm>
+            <a:off x="640080" y="4114800"/>
+            <a:ext cx="10881360" cy="914400"/>
+          </a:xfrm>
+          <a:prstGeom prst="roundRect">
+            <a:avLst>
+              <a:gd name="adj" fmla="val 10000"/>
+            </a:avLst>
+          </a:prstGeom>
+          <a:solidFill>
+            <a:srgbClr val="F4EEE8"/>
+          </a:solidFill>
+          <a:ln/>
+        </p:spPr>
+      </p:sp>
+      <p:sp>
+        <p:nvSpPr>
+          <p:cNvPr id="11" name="Text 9"/>
+          <p:cNvSpPr/>
+          <p:nvPr/>
+        </p:nvSpPr>
+        <p:spPr>
+          <a:xfrm>
+            <a:off x="960120" y="4206240"/>
+            <a:ext cx="4023360" cy="731520"/>
+          </a:xfrm>
+          <a:prstGeom prst="rect">
+            <a:avLst/>
+          </a:prstGeom>
+          <a:noFill/>
+          <a:ln/>
+        </p:spPr>
+        <p:txBody>
+          <a:bodyPr wrap="square" lIns="0" tIns="0" rIns="0" bIns="0" rtlCol="0" anchor="ctr"/>
+          <a:lstStyle/>
+          <a:p>
+            <a:pPr indent="0" marL="0">
+              <a:buNone/>
+            </a:pPr>
+            <a:r>
+              <a:rPr lang="en-US" sz="1700" b="1" dirty="0">
+                <a:solidFill>
+                  <a:srgbClr val="3F6F5F"/>
+                </a:solidFill>
+                <a:latin typeface="Cambria" pitchFamily="34" charset="0"/>
+                <a:ea typeface="Cambria" pitchFamily="34" charset="-122"/>
+                <a:cs typeface="Cambria" pitchFamily="34" charset="-120"/>
+              </a:rPr>
+              <a:t>Take only what you need</a:t>
+            </a:r>
+            <a:endParaRPr lang="en-US" sz="1700" dirty="0"/>
+          </a:p>
+        </p:txBody>
+      </p:sp>
+      <p:sp>
+        <p:nvSpPr>
+          <p:cNvPr id="12" name="Text 10"/>
+          <p:cNvSpPr/>
+          <p:nvPr/>
+        </p:nvSpPr>
+        <p:spPr>
+          <a:xfrm>
+            <a:off x="5120640" y="4206240"/>
+            <a:ext cx="6126480" cy="731520"/>
+          </a:xfrm>
+          <a:prstGeom prst="rect">
+            <a:avLst/>
+          </a:prstGeom>
+          <a:noFill/>
+          <a:ln/>
+        </p:spPr>
+        <p:txBody>
+          <a:bodyPr wrap="square" lIns="0" tIns="0" rIns="0" bIns="0" rtlCol="0" anchor="ctr"/>
+          <a:lstStyle/>
+          <a:p>
+            <a:pPr indent="0" marL="0">
+              <a:buNone/>
+            </a:pPr>
+            <a:r>
+              <a:rPr lang="en-US" sz="1350" dirty="0">
+                <a:solidFill>
+                  <a:srgbClr val="1A1A1A"/>
+                </a:solidFill>
+                <a:latin typeface="Calibri" pitchFamily="34" charset="0"/>
+                <a:ea typeface="Calibri" pitchFamily="34" charset="-122"/>
+                <a:cs typeface="Calibri" pitchFamily="34" charset="-120"/>
+              </a:rPr>
+              <a:t>the fields your question uses, not the whole site.</a:t>
+            </a:r>
+            <a:endParaRPr lang="en-US" sz="1350" dirty="0"/>
+          </a:p>
+        </p:txBody>
+      </p:sp>
+      <p:sp>
+        <p:nvSpPr>
+          <p:cNvPr id="13" name="Shape 11"/>
+          <p:cNvSpPr/>
+          <p:nvPr/>
+        </p:nvSpPr>
+        <p:spPr>
+          <a:xfrm>
+            <a:off x="640080" y="5166360"/>
+            <a:ext cx="10881360" cy="914400"/>
+          </a:xfrm>
+          <a:prstGeom prst="roundRect">
+            <a:avLst>
+              <a:gd name="adj" fmla="val 10000"/>
+            </a:avLst>
+          </a:prstGeom>
+          <a:solidFill>
+            <a:srgbClr val="F4EEE8"/>
+          </a:solidFill>
+          <a:ln/>
+        </p:spPr>
+      </p:sp>
+      <p:sp>
+        <p:nvSpPr>
+          <p:cNvPr id="14" name="Text 12"/>
+          <p:cNvSpPr/>
+          <p:nvPr/>
+        </p:nvSpPr>
+        <p:spPr>
+          <a:xfrm>
+            <a:off x="960120" y="5257800"/>
+            <a:ext cx="4023360" cy="731520"/>
+          </a:xfrm>
+          <a:prstGeom prst="rect">
+            <a:avLst/>
+          </a:prstGeom>
+          <a:noFill/>
+          <a:ln/>
+        </p:spPr>
+        <p:txBody>
+          <a:bodyPr wrap="square" lIns="0" tIns="0" rIns="0" bIns="0" rtlCol="0" anchor="ctr"/>
+          <a:lstStyle/>
+          <a:p>
+            <a:pPr indent="0" marL="0">
+              <a:buNone/>
+            </a:pPr>
+            <a:r>
+              <a:rPr lang="en-US" sz="1700" b="1" dirty="0">
+                <a:solidFill>
+                  <a:srgbClr val="2E5F8A"/>
+                </a:solidFill>
+                <a:latin typeface="Cambria" pitchFamily="34" charset="0"/>
+                <a:ea typeface="Cambria" pitchFamily="34" charset="-122"/>
+                <a:cs typeface="Cambria" pitchFamily="34" charset="-120"/>
+              </a:rPr>
+              <a:t>Never republish the text</a:t>
+            </a:r>
+            <a:endParaRPr lang="en-US" sz="1700" dirty="0"/>
+          </a:p>
+        </p:txBody>
+      </p:sp>
+      <p:sp>
+        <p:nvSpPr>
+          <p:cNvPr id="15" name="Text 13"/>
+          <p:cNvSpPr/>
+          <p:nvPr/>
+        </p:nvSpPr>
+        <p:spPr>
+          <a:xfrm>
+            <a:off x="5120640" y="5257800"/>
+            <a:ext cx="6126480" cy="731520"/>
+          </a:xfrm>
+          <a:prstGeom prst="rect">
+            <a:avLst/>
+          </a:prstGeom>
+          <a:noFill/>
+          <a:ln/>
+        </p:spPr>
+        <p:txBody>
+          <a:bodyPr wrap="square" lIns="0" tIns="0" rIns="0" bIns="0" rtlCol="0" anchor="ctr"/>
+          <a:lstStyle/>
+          <a:p>
+            <a:pPr indent="0" marL="0">
+              <a:buNone/>
+            </a:pPr>
+            <a:r>
+              <a:rPr lang="en-US" sz="1350" dirty="0">
+                <a:solidFill>
+                  <a:srgbClr val="1A1A1A"/>
+                </a:solidFill>
+                <a:latin typeface="Calibri" pitchFamily="34" charset="0"/>
+                <a:ea typeface="Calibri" pitchFamily="34" charset="-122"/>
+                <a:cs typeface="Calibri" pitchFamily="34" charset="-120"/>
+              </a:rPr>
+              <a:t>analyse it, quote it, count it. Do not hand it on.</a:t>
+            </a:r>
+            <a:endParaRPr lang="en-US" sz="1350" dirty="0"/>
+          </a:p>
+        </p:txBody>
+      </p:sp>
+      <p:sp>
+        <p:nvSpPr>
+          <p:cNvPr id="16" name="Text 14"/>
+          <p:cNvSpPr/>
+          <p:nvPr/>
+        </p:nvSpPr>
+        <p:spPr>
+          <a:xfrm>
+            <a:off x="640080" y="6309360"/>
+            <a:ext cx="10881360" cy="365760"/>
+          </a:xfrm>
+          <a:prstGeom prst="rect">
+            <a:avLst/>
+          </a:prstGeom>
+          <a:noFill/>
+          <a:ln/>
+        </p:spPr>
+        <p:txBody>
+          <a:bodyPr wrap="square" rtlCol="0" anchor="ctr"/>
+          <a:lstStyle/>
+          <a:p>
+            <a:pPr indent="0" marL="0">
+              <a:buNone/>
+            </a:pPr>
+            <a:r>
+              <a:rPr lang="en-US" sz="1250" i="1" dirty="0">
+                <a:solidFill>
+                  <a:srgbClr val="6B6B63"/>
+                </a:solidFill>
+                <a:latin typeface="Calibri" pitchFamily="34" charset="0"/>
+                <a:ea typeface="Calibri" pitchFamily="34" charset="-122"/>
+                <a:cs typeface="Calibri" pitchFamily="34" charset="-120"/>
+              </a:rPr>
+              <a:t>CC0 and public domain: go anywhere.   Academic sets and community text: analyse, don't redistribute.   Shadow libraries: never.</a:t>
+            </a:r>
+            <a:endParaRPr lang="en-US" sz="1250" dirty="0"/>
+          </a:p>
+        </p:txBody>
+      </p:sp>
+    </p:spTree>
+  </p:cSld>
+  <p:clrMapOvr>
+    <a:masterClrMapping/>
+  </p:clrMapOvr>
+</p:sld>
+</file>
+
+<file path=ppt/slides/slide27.xml><?xml version="1.0" encoding="utf-8"?>
+<p:sld xmlns:a="http://schemas.openxmlformats.org/drawingml/2006/main" xmlns:r="http://schemas.openxmlformats.org/officeDocument/2006/relationships" xmlns:p="http://schemas.openxmlformats.org/presentationml/2006/main">
+  <p:cSld name="Slide 27">
+    <p:bg>
+      <p:bgPr>
+        <a:solidFill>
+          <a:srgbClr val="FFFFFF"/>
+        </a:solidFill>
+      </p:bgPr>
+    </p:bg>
+    <p:spTree>
+      <p:nvGrpSpPr>
+        <p:cNvPr id="1" name=""/>
+        <p:cNvGrpSpPr/>
+        <p:nvPr/>
+      </p:nvGrpSpPr>
+      <p:grpSpPr>
+        <a:xfrm>
+          <a:off x="0" y="0"/>
+          <a:ext cx="0" cy="0"/>
+          <a:chOff x="0" y="0"/>
+          <a:chExt cx="0" cy="0"/>
+        </a:xfrm>
+      </p:grpSpPr>
+      <p:sp>
+        <p:nvSpPr>
+          <p:cNvPr id="2" name="Text 0"/>
+          <p:cNvSpPr/>
+          <p:nvPr/>
+        </p:nvSpPr>
+        <p:spPr>
+          <a:xfrm>
+            <a:off x="640080" y="502920"/>
+            <a:ext cx="10515600" cy="320040"/>
+          </a:xfrm>
+          <a:prstGeom prst="rect">
+            <a:avLst/>
+          </a:prstGeom>
+          <a:noFill/>
+          <a:ln/>
+        </p:spPr>
+        <p:txBody>
+          <a:bodyPr wrap="square" rtlCol="0" anchor="ctr"/>
+          <a:lstStyle/>
+          <a:p>
+            <a:pPr indent="0" marL="0">
+              <a:buNone/>
+            </a:pPr>
+            <a:r>
+              <a:rPr lang="en-US" sz="1300" b="1" spc="300" kern="0" dirty="0">
+                <a:solidFill>
+                  <a:srgbClr val="3F6F5F"/>
+                </a:solidFill>
+                <a:latin typeface="Calibri" pitchFamily="34" charset="0"/>
+                <a:ea typeface="Calibri" pitchFamily="34" charset="-122"/>
+                <a:cs typeface="Calibri" pitchFamily="34" charset="-120"/>
+              </a:rPr>
+              <a:t>YOUR TURN · 20 MINUTES</a:t>
+            </a:r>
+            <a:endParaRPr lang="en-US" sz="1300" dirty="0"/>
+          </a:p>
+        </p:txBody>
+      </p:sp>
+      <p:sp>
+        <p:nvSpPr>
+          <p:cNvPr id="3" name="Text 1"/>
+          <p:cNvSpPr/>
+          <p:nvPr/>
+        </p:nvSpPr>
+        <p:spPr>
+          <a:xfrm>
+            <a:off x="640080" y="868680"/>
+            <a:ext cx="10972800" cy="777240"/>
+          </a:xfrm>
+          <a:prstGeom prst="rect">
+            <a:avLst/>
+          </a:prstGeom>
+          <a:noFill/>
+          <a:ln/>
+        </p:spPr>
+        <p:txBody>
+          <a:bodyPr wrap="square" rtlCol="0" anchor="t"/>
+          <a:lstStyle/>
+          <a:p>
+            <a:pPr indent="0" marL="0">
+              <a:buNone/>
+            </a:pPr>
+            <a:r>
+              <a:rPr lang="en-US" sz="3400" b="1" dirty="0">
+                <a:solidFill>
+                  <a:srgbClr val="1A1A1A"/>
+                </a:solidFill>
+                <a:latin typeface="Cambria" pitchFamily="34" charset="0"/>
+                <a:ea typeface="Cambria" pitchFamily="34" charset="-122"/>
+                <a:cs typeface="Cambria" pitchFamily="34" charset="-120"/>
+              </a:rPr>
+              <a:t>Collect it, save it, start the repo</a:t>
+            </a:r>
+            <a:endParaRPr lang="en-US" sz="3400" dirty="0"/>
+          </a:p>
+        </p:txBody>
+      </p:sp>
+      <p:sp>
+        <p:nvSpPr>
+          <p:cNvPr id="4" name="Shape 2"/>
+          <p:cNvSpPr/>
+          <p:nvPr/>
+        </p:nvSpPr>
+        <p:spPr>
+          <a:xfrm>
+            <a:off x="640080" y="2103120"/>
+            <a:ext cx="10881360" cy="1097280"/>
+          </a:xfrm>
+          <a:prstGeom prst="roundRect">
+            <a:avLst>
+              <a:gd name="adj" fmla="val 8333"/>
+            </a:avLst>
+          </a:prstGeom>
+          <a:solidFill>
+            <a:srgbClr val="F4EEE8"/>
+          </a:solidFill>
+          <a:ln/>
+        </p:spPr>
+      </p:sp>
+      <p:sp>
+        <p:nvSpPr>
+          <p:cNvPr id="5" name="Text 3"/>
+          <p:cNvSpPr/>
+          <p:nvPr/>
+        </p:nvSpPr>
+        <p:spPr>
+          <a:xfrm>
+            <a:off x="1005840" y="2240280"/>
+            <a:ext cx="4206240" cy="822960"/>
+          </a:xfrm>
+          <a:prstGeom prst="rect">
+            <a:avLst/>
+          </a:prstGeom>
+          <a:noFill/>
+          <a:ln/>
+        </p:spPr>
+        <p:txBody>
+          <a:bodyPr wrap="square" lIns="0" tIns="0" rIns="0" bIns="0" rtlCol="0" anchor="ctr"/>
+          <a:lstStyle/>
+          <a:p>
+            <a:pPr indent="0" marL="0">
+              <a:buNone/>
+            </a:pPr>
+            <a:r>
+              <a:rPr lang="en-US" sz="1900" b="1" dirty="0">
+                <a:solidFill>
+                  <a:srgbClr val="3F6F5F"/>
+                </a:solidFill>
+                <a:latin typeface="Cambria" pitchFamily="34" charset="0"/>
+                <a:ea typeface="Cambria" pitchFamily="34" charset="-122"/>
+                <a:cs typeface="Cambria" pitchFamily="34" charset="-120"/>
+              </a:rPr>
+              <a:t>a file in your Drive folder</a:t>
+            </a:r>
+            <a:endParaRPr lang="en-US" sz="1900" dirty="0"/>
+          </a:p>
+        </p:txBody>
+      </p:sp>
+      <p:sp>
+        <p:nvSpPr>
+          <p:cNvPr id="6" name="Text 4"/>
+          <p:cNvSpPr/>
+          <p:nvPr/>
+        </p:nvSpPr>
+        <p:spPr>
+          <a:xfrm>
+            <a:off x="5394960" y="2240280"/>
+            <a:ext cx="5760720" cy="822960"/>
+          </a:xfrm>
+          <a:prstGeom prst="rect">
+            <a:avLst/>
+          </a:prstGeom>
+          <a:noFill/>
+          <a:ln/>
+        </p:spPr>
+        <p:txBody>
+          <a:bodyPr wrap="square" lIns="0" tIns="0" rIns="0" bIns="0" rtlCol="0" anchor="ctr"/>
+          <a:lstStyle/>
+          <a:p>
+            <a:pPr indent="0" marL="0">
+              <a:buNone/>
+            </a:pPr>
+            <a:r>
+              <a:rPr lang="en-US" sz="1400" dirty="0">
+                <a:solidFill>
+                  <a:srgbClr val="1A1A1A"/>
+                </a:solidFill>
+                <a:latin typeface="Calibri" pitchFamily="34" charset="0"/>
+                <a:ea typeface="Calibri" pitchFamily="34" charset="-122"/>
+                <a:cs typeface="Calibri" pitchFamily="34" charset="-120"/>
+              </a:rPr>
+              <a:t>Week 5 starts from it. Colab forgets everything else.</a:t>
+            </a:r>
+            <a:endParaRPr lang="en-US" sz="1400" dirty="0"/>
+          </a:p>
+        </p:txBody>
+      </p:sp>
+      <p:sp>
+        <p:nvSpPr>
+          <p:cNvPr id="7" name="Shape 5"/>
+          <p:cNvSpPr/>
+          <p:nvPr/>
+        </p:nvSpPr>
+        <p:spPr>
+          <a:xfrm>
+            <a:off x="640080" y="3383280"/>
+            <a:ext cx="10881360" cy="1097280"/>
+          </a:xfrm>
+          <a:prstGeom prst="roundRect">
+            <a:avLst>
+              <a:gd name="adj" fmla="val 8333"/>
+            </a:avLst>
+          </a:prstGeom>
+          <a:solidFill>
+            <a:srgbClr val="F4EEE8"/>
+          </a:solidFill>
+          <a:ln/>
+        </p:spPr>
+      </p:sp>
+      <p:sp>
+        <p:nvSpPr>
+          <p:cNvPr id="8" name="Text 6"/>
+          <p:cNvSpPr/>
+          <p:nvPr/>
+        </p:nvSpPr>
+        <p:spPr>
+          <a:xfrm>
+            <a:off x="1005840" y="3520440"/>
+            <a:ext cx="4206240" cy="822960"/>
+          </a:xfrm>
+          <a:prstGeom prst="rect">
+            <a:avLst/>
+          </a:prstGeom>
+          <a:noFill/>
+          <a:ln/>
+        </p:spPr>
+        <p:txBody>
+          <a:bodyPr wrap="square" lIns="0" tIns="0" rIns="0" bIns="0" rtlCol="0" anchor="ctr"/>
+          <a:lstStyle/>
+          <a:p>
+            <a:pPr indent="0" marL="0">
+              <a:buNone/>
+            </a:pPr>
+            <a:r>
+              <a:rPr lang="en-US" sz="1900" b="1" dirty="0">
+                <a:solidFill>
+                  <a:srgbClr val="2E5F8A"/>
+                </a:solidFill>
+                <a:latin typeface="Cambria" pitchFamily="34" charset="0"/>
+                <a:ea typeface="Cambria" pitchFamily="34" charset="-122"/>
+                <a:cs typeface="Cambria" pitchFamily="34" charset="-120"/>
+              </a:rPr>
+              <a:t>a repo with Pages switched on</a:t>
+            </a:r>
+            <a:endParaRPr lang="en-US" sz="1900" dirty="0"/>
+          </a:p>
+        </p:txBody>
+      </p:sp>
+      <p:sp>
+        <p:nvSpPr>
+          <p:cNvPr id="9" name="Text 7"/>
+          <p:cNvSpPr/>
+          <p:nvPr/>
+        </p:nvSpPr>
+        <p:spPr>
+          <a:xfrm>
+            <a:off x="5394960" y="3520440"/>
+            <a:ext cx="5760720" cy="822960"/>
+          </a:xfrm>
+          <a:prstGeom prst="rect">
+            <a:avLst/>
+          </a:prstGeom>
+          <a:noFill/>
+          <a:ln/>
+        </p:spPr>
+        <p:txBody>
+          <a:bodyPr wrap="square" lIns="0" tIns="0" rIns="0" bIns="0" rtlCol="0" anchor="ctr"/>
+          <a:lstStyle/>
+          <a:p>
+            <a:pPr indent="0" marL="0">
+              <a:buNone/>
+            </a:pPr>
+            <a:r>
+              <a:rPr lang="en-US" sz="1400" dirty="0">
+                <a:solidFill>
+                  <a:srgbClr val="1A1A1A"/>
+                </a:solidFill>
+                <a:latin typeface="Calibri" pitchFamily="34" charset="0"/>
+                <a:ea typeface="Calibri" pitchFamily="34" charset="-122"/>
+                <a:cs typeface="Calibri" pitchFamily="34" charset="-120"/>
+              </a:rPr>
+              <a:t>so a live URL exists today, not in Week 9 under deadline.</a:t>
+            </a:r>
+            <a:endParaRPr lang="en-US" sz="1400" dirty="0"/>
+          </a:p>
+        </p:txBody>
+      </p:sp>
+      <p:sp>
+        <p:nvSpPr>
+          <p:cNvPr id="10" name="Shape 8"/>
+          <p:cNvSpPr/>
+          <p:nvPr/>
+        </p:nvSpPr>
+        <p:spPr>
+          <a:xfrm>
+            <a:off x="640080" y="4663440"/>
+            <a:ext cx="10881360" cy="1097280"/>
+          </a:xfrm>
+          <a:prstGeom prst="roundRect">
+            <a:avLst>
+              <a:gd name="adj" fmla="val 8333"/>
+            </a:avLst>
+          </a:prstGeom>
+          <a:solidFill>
+            <a:srgbClr val="F4EEE8"/>
+          </a:solidFill>
+          <a:ln/>
+        </p:spPr>
+      </p:sp>
+      <p:sp>
+        <p:nvSpPr>
+          <p:cNvPr id="11" name="Text 9"/>
+          <p:cNvSpPr/>
+          <p:nvPr/>
+        </p:nvSpPr>
+        <p:spPr>
+          <a:xfrm>
+            <a:off x="1005840" y="4800600"/>
+            <a:ext cx="4206240" cy="822960"/>
+          </a:xfrm>
+          <a:prstGeom prst="rect">
+            <a:avLst/>
+          </a:prstGeom>
+          <a:noFill/>
+          <a:ln/>
+        </p:spPr>
+        <p:txBody>
+          <a:bodyPr wrap="square" lIns="0" tIns="0" rIns="0" bIns="0" rtlCol="0" anchor="ctr"/>
+          <a:lstStyle/>
+          <a:p>
+            <a:pPr indent="0" marL="0">
+              <a:buNone/>
+            </a:pPr>
+            <a:r>
+              <a:rPr lang="en-US" sz="1900" b="1" dirty="0">
+                <a:solidFill>
+                  <a:srgbClr val="7A3B2E"/>
+                </a:solidFill>
+                <a:latin typeface="Cambria" pitchFamily="34" charset="0"/>
+                <a:ea typeface="Cambria" pitchFamily="34" charset="-122"/>
+                <a:cs typeface="Cambria" pitchFamily="34" charset="-120"/>
+              </a:rPr>
+              <a:t>two minutes of pitch, to a partner</a:t>
+            </a:r>
+            <a:endParaRPr lang="en-US" sz="1900" dirty="0"/>
+          </a:p>
+        </p:txBody>
+      </p:sp>
+      <p:sp>
+        <p:nvSpPr>
+          <p:cNvPr id="12" name="Text 10"/>
+          <p:cNvSpPr/>
+          <p:nvPr/>
+        </p:nvSpPr>
+        <p:spPr>
+          <a:xfrm>
+            <a:off x="5394960" y="4800600"/>
+            <a:ext cx="5760720" cy="822960"/>
+          </a:xfrm>
+          <a:prstGeom prst="rect">
+            <a:avLst/>
+          </a:prstGeom>
+          <a:noFill/>
+          <a:ln/>
+        </p:spPr>
+        <p:txBody>
+          <a:bodyPr wrap="square" lIns="0" tIns="0" rIns="0" bIns="0" rtlCol="0" anchor="ctr"/>
+          <a:lstStyle/>
+          <a:p>
+            <a:pPr indent="0" marL="0">
+              <a:buNone/>
+            </a:pPr>
+            <a:r>
+              <a:rPr lang="en-US" sz="1400" dirty="0">
+                <a:solidFill>
+                  <a:srgbClr val="1A1A1A"/>
+                </a:solidFill>
+                <a:latin typeface="Calibri" pitchFamily="34" charset="0"/>
+                <a:ea typeface="Calibri" pitchFamily="34" charset="-122"/>
+                <a:cs typeface="Calibri" pitchFamily="34" charset="-120"/>
+              </a:rPr>
+              <a:t>corpus, two methods, what would count as a finding.</a:t>
+            </a:r>
+            <a:endParaRPr lang="en-US" sz="1400" dirty="0"/>
+          </a:p>
+        </p:txBody>
+      </p:sp>
+      <p:sp>
+        <p:nvSpPr>
+          <p:cNvPr id="13" name="Text 11"/>
+          <p:cNvSpPr/>
+          <p:nvPr/>
+        </p:nvSpPr>
+        <p:spPr>
+          <a:xfrm>
+            <a:off x="640080" y="6263640"/>
+            <a:ext cx="10881360" cy="365760"/>
+          </a:xfrm>
+          <a:prstGeom prst="rect">
+            <a:avLst/>
+          </a:prstGeom>
+          <a:noFill/>
+          <a:ln/>
+        </p:spPr>
+        <p:txBody>
+          <a:bodyPr wrap="square" rtlCol="0" anchor="ctr"/>
+          <a:lstStyle/>
+          <a:p>
+            <a:pPr indent="0" marL="0">
+              <a:buNone/>
+            </a:pPr>
+            <a:r>
+              <a:rPr lang="en-US" sz="1100" i="1" dirty="0">
+                <a:solidFill>
+                  <a:srgbClr val="6B6B63"/>
+                </a:solidFill>
+                <a:latin typeface="Calibri" pitchFamily="34" charset="0"/>
+                <a:ea typeface="Calibri" pitchFamily="34" charset="-122"/>
+                <a:cs typeface="Calibri" pitchFamily="34" charset="-120"/>
+              </a:rPr>
+              <a:t>A null result, honestly shown, is a complete project. The pivot kit is insurance, not a demotion.</a:t>
+            </a:r>
+            <a:endParaRPr lang="en-US" sz="1100" dirty="0"/>
+          </a:p>
+        </p:txBody>
+      </p:sp>
+    </p:spTree>
+  </p:cSld>
+  <p:clrMapOvr>
+    <a:masterClrMapping/>
+  </p:clrMapOvr>
+</p:sld>
+</file>
+
+<file path=ppt/slides/slide28.xml><?xml version="1.0" encoding="utf-8"?>
+<p:sld xmlns:a="http://schemas.openxmlformats.org/drawingml/2006/main" xmlns:r="http://schemas.openxmlformats.org/officeDocument/2006/relationships" xmlns:p="http://schemas.openxmlformats.org/presentationml/2006/main">
+  <p:cSld name="Slide 28">
     <p:bg>
       <p:bgPr>
         <a:solidFill>
@@ -9510,7 +11310,7 @@
                 <a:ea typeface="Cambria" pitchFamily="34" charset="-122"/>
                 <a:cs typeface="Cambria" pitchFamily="34" charset="-120"/>
               </a:rPr>
-              <a:t>A layer in between, learning combinations nobody wrote down. The price: no more readable weights.</a:t>
+              <a:t>Four neurons in between, each adding up every word in its own way. Nobody wrote those combinations down.</a:t>
             </a:r>
             <a:endParaRPr lang="en-US" sz="1600" dirty="0"/>
           </a:p>
@@ -9575,13 +11375,13 @@
             <a:r>
               <a:rPr lang="en-US" sz="1300" b="1" spc="300" kern="0" dirty="0">
                 <a:solidFill>
-                  <a:srgbClr val="2E5F8A"/>
+                  <a:srgbClr val="7A3B2E"/>
                 </a:solidFill>
                 <a:latin typeface="Calibri" pitchFamily="34" charset="0"/>
                 <a:ea typeface="Calibri" pitchFamily="34" charset="-122"/>
                 <a:cs typeface="Calibri" pitchFamily="34" charset="-120"/>
               </a:rPr>
-              <a:t>WHY IT MATTERS</a:t>
+              <a:t>WHAT IT COSTS</a:t>
             </a:r>
             <a:endParaRPr lang="en-US" sz="1300" dirty="0"/>
           </a:p>
@@ -9620,7 +11420,7 @@
                 <a:ea typeface="Cambria" pitchFamily="34" charset="-122"/>
                 <a:cs typeface="Cambria" pitchFamily="34" charset="-120"/>
               </a:rPr>
-              <a:t>Some questions a straight line cannot answer</a:t>
+              <a:t>You stop being able to read it</a:t>
             </a:r>
             <a:endParaRPr lang="en-US" sz="3400" dirty="0"/>
           </a:p>
@@ -9628,7 +11428,7 @@
       </p:sp>
       <p:pic>
         <p:nvPicPr>
-          <p:cNvPr id="4" name="Image 0" descr="/tmp/figs/w4_spiral.png">    </p:cNvPr>
+          <p:cNvPr id="4" name="Image 0" descr="/tmp/figs/w4_readability.png">    </p:cNvPr>
           <p:cNvPicPr>
             <a:picLocks noChangeAspect="1"/>
           </p:cNvPicPr>
@@ -9641,8 +11441,8 @@
         </p:blipFill>
         <p:spPr>
           <a:xfrm>
-            <a:off x="1097280" y="1737360"/>
-            <a:ext cx="9966960" cy="4114800"/>
+            <a:off x="1280160" y="1783080"/>
+            <a:ext cx="9601200" cy="3931920"/>
           </a:xfrm>
           <a:prstGeom prst="rect">
             <a:avLst/>
@@ -9682,7 +11482,7 @@
                 <a:ea typeface="Cambria" pitchFamily="34" charset="-122"/>
                 <a:cs typeface="Cambria" pitchFamily="34" charset="-120"/>
               </a:rPr>
-              <a:t>Same points, same training. One neuron: 70%. Two hidden layers: 99%.</a:t>
+              <a:t>Same passages, same job: 100% against 99%. The left panel is an explanation. The right one is not.</a:t>
             </a:r>
             <a:endParaRPr lang="en-US" sz="1600" dirty="0"/>
           </a:p>
@@ -9721,7 +11521,7 @@
                 <a:ea typeface="Calibri" pitchFamily="34" charset="-122"/>
                 <a:cs typeface="Calibri" pitchFamily="34" charset="-120"/>
               </a:rPr>
-              <a:t>Both models fitted for this slide. Next: the same thing live in TensorFlow Playground.</a:t>
+              <a:t>Both fitted for this slide on 563 passages of Frankenstein and Dracula.</a:t>
             </a:r>
             <a:endParaRPr lang="en-US" sz="1000" dirty="0"/>
           </a:p>

--- a/slides/week-04-lecture-draft.pptx
+++ b/slides/week-04-lecture-draft.pptx
@@ -4176,7 +4176,7 @@
                 <a:ea typeface="Cambria" pitchFamily="34" charset="-122"/>
                 <a:cs typeface="Cambria" pitchFamily="34" charset="-120"/>
               </a:rPr>
-              <a:t>Pull the neighbours together, push the strangers apart</a:t>
+              <a:t>Same context, pull together. Different, push apart</a:t>
             </a:r>
             <a:endParaRPr lang="en-US" sz="3400" dirty="0"/>
           </a:p>
@@ -4238,7 +4238,7 @@
                 <a:ea typeface="Cambria" pitchFamily="34" charset="-122"/>
                 <a:cs typeface="Cambria" pitchFamily="34" charset="-120"/>
               </a:rPr>
-              <a:t>That is the whole training rule. It has a name — contrastive learning — and it is how most modern embeddings are made.</a:t>
+              <a:t>For a word, a context is a few words of text. That is the whole rule, it is called contrastive learning, and it is how most modern embeddings are made.</a:t>
             </a:r>
             <a:endParaRPr lang="en-US" sz="1600" dirty="0"/>
           </a:p>
@@ -7371,7 +7371,7 @@
                 <a:ea typeface="Cambria" pitchFamily="34" charset="-122"/>
                 <a:cs typeface="Cambria" pitchFamily="34" charset="-120"/>
               </a:rPr>
-              <a:t>CLIP: the same pull and push, on pictures</a:t>
+              <a:t>The same rule, where a context is a picture</a:t>
             </a:r>
             <a:endParaRPr lang="en-US" sz="3400" dirty="0"/>
           </a:p>
@@ -7433,7 +7433,7 @@
                 <a:ea typeface="Cambria" pitchFamily="34" charset="-122"/>
                 <a:cs typeface="Cambria" pitchFamily="34" charset="-120"/>
               </a:rPr>
-              <a:t>A CNN reads the picture, a language model reads the caption, and the training rule is the one from the word vectors.</a:t>
+              <a:t>Same context: a painting and its own caption, pulled together. Different context: anyone else's caption, pushed away. Two kinds of thing, one space.</a:t>
             </a:r>
             <a:endParaRPr lang="en-US" sz="1600" dirty="0"/>
           </a:p>
@@ -7472,7 +7472,7 @@
                 <a:ea typeface="Calibri" pitchFamily="34" charset="-122"/>
                 <a:cs typeface="Calibri" pitchFamily="34" charset="-120"/>
               </a:rPr>
-              <a:t>Which is why "a painting of a woman in a red hat" can search a museum with no tags in it at all.</a:t>
+              <a:t>Which is why "a painting of a woman in a red hat" can search a museum with no tags in it at all. The notebook trains a small one on 18 paintings.</a:t>
             </a:r>
             <a:endParaRPr lang="en-US" sz="1000" dirty="0"/>
           </a:p>

--- a/slides/week-04-lecture-draft.pptx
+++ b/slides/week-04-lecture-draft.pptx
@@ -4238,7 +4238,7 @@
                 <a:ea typeface="Cambria" pitchFamily="34" charset="-122"/>
                 <a:cs typeface="Cambria" pitchFamily="34" charset="-120"/>
               </a:rPr>
-              <a:t>For a word, a context is a few words of text. That is the whole rule, it is called contrastive learning, and it is how most modern embeddings are made.</a:t>
+              <a:t>For a word, a context is a few words of text. That is the whole rule. It is called contrastive learning, and most modern embeddings are trained this way.</a:t>
             </a:r>
             <a:endParaRPr lang="en-US" sz="1600" dirty="0"/>
           </a:p>
@@ -4449,7 +4449,7 @@
                 <a:ea typeface="Cambria" pitchFamily="34" charset="-122"/>
                 <a:cs typeface="Cambria" pitchFamily="34" charset="-120"/>
               </a:rPr>
-              <a:t>Twelve words, every pair compared. On the left they start as noise; on the right, times of day, family and rooms have found each other.</a:t>
+              <a:t>Twelve words, every pair compared. On the left they start as noise. On the right, times of day, family and rooms have found each other.</a:t>
             </a:r>
             <a:endParaRPr lang="en-US" sz="1600" dirty="0"/>
           </a:p>
@@ -5736,7 +5736,7 @@
                 <a:ea typeface="Cambria" pitchFamily="34" charset="-122"/>
                 <a:cs typeface="Cambria" pitchFamily="34" charset="-120"/>
               </a:rPr>
-              <a:t>A picture is a grid of numbers. Take nine of them, multiply by nine other numbers, add: -162. Slide one step and do it again.</a:t>
+              <a:t>A picture is a grid of numbers. Take nine of them, multiply by nine other numbers, add them up: -162. Move one pixel across and repeat.</a:t>
             </a:r>
             <a:endParaRPr lang="en-US" sz="1600" dirty="0"/>
           </a:p>
@@ -7050,7 +7050,7 @@
                 <a:ea typeface="Calibri" pitchFamily="34" charset="-122"/>
                 <a:cs typeface="Calibri" pitchFamily="34" charset="-120"/>
               </a:rPr>
-              <a:t>A CNN is not given these. It starts with random grids and learns which ones are worth having — same downhill roll as before.</a:t>
+              <a:t>A CNN is not given these. It starts with random grids and learns which ones are worth having, by the same downhill roll as before.</a:t>
             </a:r>
             <a:endParaRPr lang="en-US" sz="1000" dirty="0"/>
           </a:p>
@@ -7222,7 +7222,7 @@
                 <a:ea typeface="Cambria" pitchFamily="34" charset="-122"/>
                 <a:cs typeface="Cambria" pitchFamily="34" charset="-120"/>
               </a:rPr>
-              <a:t>Run a filter on the answers of the last filter, and shrink. Edges become corners; corners become regions; regions become faces.</a:t>
+              <a:t>Run a filter over the output of the last filter, then shrink. Edges turn into corners, and corners into regions.</a:t>
             </a:r>
             <a:endParaRPr lang="en-US" sz="1600" dirty="0"/>
           </a:p>
@@ -7261,7 +7261,7 @@
                 <a:ea typeface="Calibri" pitchFamily="34" charset="-122"/>
                 <a:cs typeface="Calibri" pitchFamily="34" charset="-120"/>
               </a:rPr>
-              <a:t>Every panel here is real arithmetic on the painting to its left. That stack is the whole architecture.</a:t>
+              <a:t>Every panel is real arithmetic on the painting to its left. Stacking them is all a CNN is.</a:t>
             </a:r>
             <a:endParaRPr lang="en-US" sz="1000" dirty="0"/>
           </a:p>
@@ -7433,7 +7433,7 @@
                 <a:ea typeface="Cambria" pitchFamily="34" charset="-122"/>
                 <a:cs typeface="Cambria" pitchFamily="34" charset="-120"/>
               </a:rPr>
-              <a:t>Same context: a painting and its own caption, pulled together. Different context: anyone else's caption, pushed away. Two kinds of thing, one space.</a:t>
+              <a:t>Same context: a painting and its own caption, pulled together. Different context: anyone else's caption, pushed away. Two kinds of thing in one space.</a:t>
             </a:r>
             <a:endParaRPr lang="en-US" sz="1600" dirty="0"/>
           </a:p>
@@ -11310,7 +11310,7 @@
                 <a:ea typeface="Cambria" pitchFamily="34" charset="-122"/>
                 <a:cs typeface="Cambria" pitchFamily="34" charset="-120"/>
               </a:rPr>
-              <a:t>Four neurons in between, each adding up every word in its own way. Nobody wrote those combinations down.</a:t>
+              <a:t>Four neurons in between, each adding up every word in its own way. Nobody chose those combinations.</a:t>
             </a:r>
             <a:endParaRPr lang="en-US" sz="1600" dirty="0"/>
           </a:p>
@@ -11482,7 +11482,7 @@
                 <a:ea typeface="Cambria" pitchFamily="34" charset="-122"/>
                 <a:cs typeface="Cambria" pitchFamily="34" charset="-120"/>
               </a:rPr>
-              <a:t>Same passages, same job: 100% against 99%. The left panel is an explanation. The right one is not.</a:t>
+              <a:t>Same passages, same job: 100% against 99%. You can read the left panel and say why. You cannot do that with the right one.</a:t>
             </a:r>
             <a:endParaRPr lang="en-US" sz="1600" dirty="0"/>
           </a:p>

--- a/slides/week-04-lecture-draft.pptx
+++ b/slides/week-04-lecture-draft.pptx
@@ -4066,9 +4066,48 @@
                 <a:ea typeface="Cambria" pitchFamily="34" charset="-122"/>
                 <a:cs typeface="Cambria" pitchFamily="34" charset="-120"/>
               </a:rPr>
-              <a:t>Counting says night and morning have nothing in common. The trained vectors put them at 0.32, against 0.08 for night and ship.</a:t>
+              <a:t>Week 2 gave every word its own column, so night and morning have nothing in common. Nor do night and ship.</a:t>
             </a:r>
             <a:endParaRPr lang="en-US" sz="1600" dirty="0"/>
+          </a:p>
+        </p:txBody>
+      </p:sp>
+      <p:sp>
+        <p:nvSpPr>
+          <p:cNvPr id="6" name="Text 3"/>
+          <p:cNvSpPr/>
+          <p:nvPr/>
+        </p:nvSpPr>
+        <p:spPr>
+          <a:xfrm>
+            <a:off x="640080" y="6355080"/>
+            <a:ext cx="10881360" cy="320040"/>
+          </a:xfrm>
+          <a:prstGeom prst="rect">
+            <a:avLst/>
+          </a:prstGeom>
+          <a:noFill/>
+          <a:ln/>
+        </p:spPr>
+        <p:txBody>
+          <a:bodyPr wrap="square" rtlCol="0" anchor="ctr"/>
+          <a:lstStyle/>
+          <a:p>
+            <a:pPr indent="0" marL="0">
+              <a:buNone/>
+            </a:pPr>
+            <a:r>
+              <a:rPr lang="en-US" sz="1000" dirty="0">
+                <a:solidFill>
+                  <a:srgbClr val="6B6B63"/>
+                </a:solidFill>
+                <a:latin typeface="Calibri" pitchFamily="34" charset="0"/>
+                <a:ea typeface="Calibri" pitchFamily="34" charset="-122"/>
+                <a:cs typeface="Calibri" pitchFamily="34" charset="-120"/>
+              </a:rPr>
+              <a:t>And Week 3 puts one weight on each column, so what it learns about one word tells it nothing about the next. Trained vectors: night and morning 0.32, night and ship 0.08.</a:t>
+            </a:r>
+            <a:endParaRPr lang="en-US" sz="1000" dirty="0"/>
           </a:p>
         </p:txBody>
       </p:sp>
@@ -4277,7 +4316,7 @@
                 <a:ea typeface="Calibri" pitchFamily="34" charset="-122"/>
                 <a:cs typeface="Calibri" pitchFamily="34" charset="-120"/>
               </a:rPr>
-              <a:t>Anchor, neighbour and the three random words all taken from this week's corpus. 849,738 pairs in one pass.</a:t>
+              <a:t>Underneath it, Week 3's four moves: multiply, add, squash, nudge. The difference is that the prediction is thrown away and the weights are what you keep. 849,738 pairs in one pass.</a:t>
             </a:r>
             <a:endParaRPr lang="en-US" sz="1000" dirty="0"/>
           </a:p>

--- a/slides/week-04-lecture-draft.pptx
+++ b/slides/week-04-lecture-draft.pptx
@@ -33,9 +33,13 @@
     <p:sldId id="281" r:id="rId27"/>
     <p:sldId id="282" r:id="rId28"/>
     <p:sldId id="283" r:id="rId29"/>
+    <p:sldId id="284" r:id="rId30"/>
+    <p:sldId id="285" r:id="rId31"/>
+    <p:sldId id="286" r:id="rId32"/>
+    <p:sldId id="287" r:id="rId33"/>
   </p:sldIdLst>
   <p:notesMasterIdLst>
-    <p:notesMasterId r:id="rId30"/>
+    <p:notesMasterId r:id="rId34"/>
   </p:notesMasterIdLst>
   <p:sldSz cx="12191695" cy="6858000"/>
   <p:notesSz cx="6858000" cy="12191695"/>
@@ -2331,6 +2335,94 @@
 </p:notes>
 </file>
 
+<file path=ppt/notesSlides/notesSlide29.xml><?xml version="1.0" encoding="utf-8"?>
+<p:notes xmlns:a="http://schemas.openxmlformats.org/drawingml/2006/main" xmlns:r="http://schemas.openxmlformats.org/officeDocument/2006/relationships" xmlns:p="http://schemas.openxmlformats.org/presentationml/2006/main">
+  <p:cSld>
+    <p:spTree>
+      <p:nvGrpSpPr>
+        <p:cNvPr id="1" name=""/>
+        <p:cNvGrpSpPr/>
+        <p:nvPr/>
+      </p:nvGrpSpPr>
+      <p:grpSpPr>
+        <a:xfrm>
+          <a:off x="0" y="0"/>
+          <a:ext cx="0" cy="0"/>
+          <a:chOff x="0" y="0"/>
+          <a:chExt cx="0" cy="0"/>
+        </a:xfrm>
+      </p:grpSpPr>
+      <p:sp>
+        <p:nvSpPr>
+          <p:cNvPr id="2" name="Slide Image Placeholder 1"/>
+          <p:cNvSpPr>
+            <a:spLocks noGrp="1" noRot="1" noChangeAspect="1"/>
+          </p:cNvSpPr>
+          <p:nvPr>
+            <p:ph type="sldImg"/>
+          </p:nvPr>
+        </p:nvSpPr>
+        <p:spPr/>
+      </p:sp>
+      <p:sp>
+        <p:nvSpPr>
+          <p:cNvPr id="3" name="Notes Placeholder 2"/>
+          <p:cNvSpPr>
+            <a:spLocks noGrp="1"/>
+          </p:cNvSpPr>
+          <p:nvPr>
+            <p:ph type="body" idx="1"/>
+          </p:nvPr>
+        </p:nvSpPr>
+        <p:spPr/>
+        <p:txBody>
+          <a:bodyPr/>
+          <a:lstStyle/>
+          <a:p>
+            <a:r>
+              <a:rPr lang="en-US" dirty="0"/>
+              <a:t/>
+            </a:r>
+            <a:endParaRPr lang="en-US" dirty="0"/>
+          </a:p>
+        </p:txBody>
+      </p:sp>
+      <p:sp>
+        <p:nvSpPr>
+          <p:cNvPr id="4" name="Slide Number Placeholder 3"/>
+          <p:cNvSpPr>
+            <a:spLocks noGrp="1"/>
+          </p:cNvSpPr>
+          <p:nvPr>
+            <p:ph type="sldNum" sz="quarter" idx="10"/>
+          </p:nvPr>
+        </p:nvSpPr>
+        <p:spPr/>
+        <p:txBody>
+          <a:bodyPr/>
+          <a:lstStyle/>
+          <a:p>
+            <a:fld id="{F7021451-1387-4CA6-816F-3879F97B5CBC}" type="slidenum">
+              <a:rPr lang="en-US"/>
+              <a:t>29</a:t>
+            </a:fld>
+            <a:endParaRPr lang="en-US"/>
+          </a:p>
+        </p:txBody>
+      </p:sp>
+    </p:spTree>
+    <p:extLst>
+      <p:ext uri="{BB962C8B-B14F-4D97-AF65-F5344CB8AC3E}">
+        <p14:creationId xmlns:p14="http://schemas.microsoft.com/office/powerpoint/2010/main" val="1024086991"/>
+      </p:ext>
+    </p:extLst>
+  </p:cSld>
+  <p:clrMapOvr>
+    <a:masterClrMapping/>
+  </p:clrMapOvr>
+</p:notes>
+</file>
+
 <file path=ppt/notesSlides/notesSlide3.xml><?xml version="1.0" encoding="utf-8"?>
 <p:notes xmlns:a="http://schemas.openxmlformats.org/drawingml/2006/main" xmlns:r="http://schemas.openxmlformats.org/officeDocument/2006/relationships" xmlns:p="http://schemas.openxmlformats.org/presentationml/2006/main">
   <p:cSld>
@@ -2401,6 +2493,270 @@
             <a:fld id="{F7021451-1387-4CA6-816F-3879F97B5CBC}" type="slidenum">
               <a:rPr lang="en-US"/>
               <a:t>3</a:t>
+            </a:fld>
+            <a:endParaRPr lang="en-US"/>
+          </a:p>
+        </p:txBody>
+      </p:sp>
+    </p:spTree>
+    <p:extLst>
+      <p:ext uri="{BB962C8B-B14F-4D97-AF65-F5344CB8AC3E}">
+        <p14:creationId xmlns:p14="http://schemas.microsoft.com/office/powerpoint/2010/main" val="1024086991"/>
+      </p:ext>
+    </p:extLst>
+  </p:cSld>
+  <p:clrMapOvr>
+    <a:masterClrMapping/>
+  </p:clrMapOvr>
+</p:notes>
+</file>
+
+<file path=ppt/notesSlides/notesSlide30.xml><?xml version="1.0" encoding="utf-8"?>
+<p:notes xmlns:a="http://schemas.openxmlformats.org/drawingml/2006/main" xmlns:r="http://schemas.openxmlformats.org/officeDocument/2006/relationships" xmlns:p="http://schemas.openxmlformats.org/presentationml/2006/main">
+  <p:cSld>
+    <p:spTree>
+      <p:nvGrpSpPr>
+        <p:cNvPr id="1" name=""/>
+        <p:cNvGrpSpPr/>
+        <p:nvPr/>
+      </p:nvGrpSpPr>
+      <p:grpSpPr>
+        <a:xfrm>
+          <a:off x="0" y="0"/>
+          <a:ext cx="0" cy="0"/>
+          <a:chOff x="0" y="0"/>
+          <a:chExt cx="0" cy="0"/>
+        </a:xfrm>
+      </p:grpSpPr>
+      <p:sp>
+        <p:nvSpPr>
+          <p:cNvPr id="2" name="Slide Image Placeholder 1"/>
+          <p:cNvSpPr>
+            <a:spLocks noGrp="1" noRot="1" noChangeAspect="1"/>
+          </p:cNvSpPr>
+          <p:nvPr>
+            <p:ph type="sldImg"/>
+          </p:nvPr>
+        </p:nvSpPr>
+        <p:spPr/>
+      </p:sp>
+      <p:sp>
+        <p:nvSpPr>
+          <p:cNvPr id="3" name="Notes Placeholder 2"/>
+          <p:cNvSpPr>
+            <a:spLocks noGrp="1"/>
+          </p:cNvSpPr>
+          <p:nvPr>
+            <p:ph type="body" idx="1"/>
+          </p:nvPr>
+        </p:nvSpPr>
+        <p:spPr/>
+        <p:txBody>
+          <a:bodyPr/>
+          <a:lstStyle/>
+          <a:p>
+            <a:r>
+              <a:rPr lang="en-US" dirty="0"/>
+              <a:t/>
+            </a:r>
+            <a:endParaRPr lang="en-US" dirty="0"/>
+          </a:p>
+        </p:txBody>
+      </p:sp>
+      <p:sp>
+        <p:nvSpPr>
+          <p:cNvPr id="4" name="Slide Number Placeholder 3"/>
+          <p:cNvSpPr>
+            <a:spLocks noGrp="1"/>
+          </p:cNvSpPr>
+          <p:nvPr>
+            <p:ph type="sldNum" sz="quarter" idx="10"/>
+          </p:nvPr>
+        </p:nvSpPr>
+        <p:spPr/>
+        <p:txBody>
+          <a:bodyPr/>
+          <a:lstStyle/>
+          <a:p>
+            <a:fld id="{F7021451-1387-4CA6-816F-3879F97B5CBC}" type="slidenum">
+              <a:rPr lang="en-US"/>
+              <a:t>30</a:t>
+            </a:fld>
+            <a:endParaRPr lang="en-US"/>
+          </a:p>
+        </p:txBody>
+      </p:sp>
+    </p:spTree>
+    <p:extLst>
+      <p:ext uri="{BB962C8B-B14F-4D97-AF65-F5344CB8AC3E}">
+        <p14:creationId xmlns:p14="http://schemas.microsoft.com/office/powerpoint/2010/main" val="1024086991"/>
+      </p:ext>
+    </p:extLst>
+  </p:cSld>
+  <p:clrMapOvr>
+    <a:masterClrMapping/>
+  </p:clrMapOvr>
+</p:notes>
+</file>
+
+<file path=ppt/notesSlides/notesSlide31.xml><?xml version="1.0" encoding="utf-8"?>
+<p:notes xmlns:a="http://schemas.openxmlformats.org/drawingml/2006/main" xmlns:r="http://schemas.openxmlformats.org/officeDocument/2006/relationships" xmlns:p="http://schemas.openxmlformats.org/presentationml/2006/main">
+  <p:cSld>
+    <p:spTree>
+      <p:nvGrpSpPr>
+        <p:cNvPr id="1" name=""/>
+        <p:cNvGrpSpPr/>
+        <p:nvPr/>
+      </p:nvGrpSpPr>
+      <p:grpSpPr>
+        <a:xfrm>
+          <a:off x="0" y="0"/>
+          <a:ext cx="0" cy="0"/>
+          <a:chOff x="0" y="0"/>
+          <a:chExt cx="0" cy="0"/>
+        </a:xfrm>
+      </p:grpSpPr>
+      <p:sp>
+        <p:nvSpPr>
+          <p:cNvPr id="2" name="Slide Image Placeholder 1"/>
+          <p:cNvSpPr>
+            <a:spLocks noGrp="1" noRot="1" noChangeAspect="1"/>
+          </p:cNvSpPr>
+          <p:nvPr>
+            <p:ph type="sldImg"/>
+          </p:nvPr>
+        </p:nvSpPr>
+        <p:spPr/>
+      </p:sp>
+      <p:sp>
+        <p:nvSpPr>
+          <p:cNvPr id="3" name="Notes Placeholder 2"/>
+          <p:cNvSpPr>
+            <a:spLocks noGrp="1"/>
+          </p:cNvSpPr>
+          <p:nvPr>
+            <p:ph type="body" idx="1"/>
+          </p:nvPr>
+        </p:nvSpPr>
+        <p:spPr/>
+        <p:txBody>
+          <a:bodyPr/>
+          <a:lstStyle/>
+          <a:p>
+            <a:r>
+              <a:rPr lang="en-US" dirty="0"/>
+              <a:t/>
+            </a:r>
+            <a:endParaRPr lang="en-US" dirty="0"/>
+          </a:p>
+        </p:txBody>
+      </p:sp>
+      <p:sp>
+        <p:nvSpPr>
+          <p:cNvPr id="4" name="Slide Number Placeholder 3"/>
+          <p:cNvSpPr>
+            <a:spLocks noGrp="1"/>
+          </p:cNvSpPr>
+          <p:nvPr>
+            <p:ph type="sldNum" sz="quarter" idx="10"/>
+          </p:nvPr>
+        </p:nvSpPr>
+        <p:spPr/>
+        <p:txBody>
+          <a:bodyPr/>
+          <a:lstStyle/>
+          <a:p>
+            <a:fld id="{F7021451-1387-4CA6-816F-3879F97B5CBC}" type="slidenum">
+              <a:rPr lang="en-US"/>
+              <a:t>31</a:t>
+            </a:fld>
+            <a:endParaRPr lang="en-US"/>
+          </a:p>
+        </p:txBody>
+      </p:sp>
+    </p:spTree>
+    <p:extLst>
+      <p:ext uri="{BB962C8B-B14F-4D97-AF65-F5344CB8AC3E}">
+        <p14:creationId xmlns:p14="http://schemas.microsoft.com/office/powerpoint/2010/main" val="1024086991"/>
+      </p:ext>
+    </p:extLst>
+  </p:cSld>
+  <p:clrMapOvr>
+    <a:masterClrMapping/>
+  </p:clrMapOvr>
+</p:notes>
+</file>
+
+<file path=ppt/notesSlides/notesSlide32.xml><?xml version="1.0" encoding="utf-8"?>
+<p:notes xmlns:a="http://schemas.openxmlformats.org/drawingml/2006/main" xmlns:r="http://schemas.openxmlformats.org/officeDocument/2006/relationships" xmlns:p="http://schemas.openxmlformats.org/presentationml/2006/main">
+  <p:cSld>
+    <p:spTree>
+      <p:nvGrpSpPr>
+        <p:cNvPr id="1" name=""/>
+        <p:cNvGrpSpPr/>
+        <p:nvPr/>
+      </p:nvGrpSpPr>
+      <p:grpSpPr>
+        <a:xfrm>
+          <a:off x="0" y="0"/>
+          <a:ext cx="0" cy="0"/>
+          <a:chOff x="0" y="0"/>
+          <a:chExt cx="0" cy="0"/>
+        </a:xfrm>
+      </p:grpSpPr>
+      <p:sp>
+        <p:nvSpPr>
+          <p:cNvPr id="2" name="Slide Image Placeholder 1"/>
+          <p:cNvSpPr>
+            <a:spLocks noGrp="1" noRot="1" noChangeAspect="1"/>
+          </p:cNvSpPr>
+          <p:nvPr>
+            <p:ph type="sldImg"/>
+          </p:nvPr>
+        </p:nvSpPr>
+        <p:spPr/>
+      </p:sp>
+      <p:sp>
+        <p:nvSpPr>
+          <p:cNvPr id="3" name="Notes Placeholder 2"/>
+          <p:cNvSpPr>
+            <a:spLocks noGrp="1"/>
+          </p:cNvSpPr>
+          <p:nvPr>
+            <p:ph type="body" idx="1"/>
+          </p:nvPr>
+        </p:nvSpPr>
+        <p:spPr/>
+        <p:txBody>
+          <a:bodyPr/>
+          <a:lstStyle/>
+          <a:p>
+            <a:r>
+              <a:rPr lang="en-US" dirty="0"/>
+              <a:t/>
+            </a:r>
+            <a:endParaRPr lang="en-US" dirty="0"/>
+          </a:p>
+        </p:txBody>
+      </p:sp>
+      <p:sp>
+        <p:nvSpPr>
+          <p:cNvPr id="4" name="Slide Number Placeholder 3"/>
+          <p:cNvSpPr>
+            <a:spLocks noGrp="1"/>
+          </p:cNvSpPr>
+          <p:nvPr>
+            <p:ph type="sldNum" sz="quarter" idx="10"/>
+          </p:nvPr>
+        </p:nvSpPr>
+        <p:spPr/>
+        <p:txBody>
+          <a:bodyPr/>
+          <a:lstStyle/>
+          <a:p>
+            <a:fld id="{F7021451-1387-4CA6-816F-3879F97B5CBC}" type="slidenum">
+              <a:rPr lang="en-US"/>
+              <a:t>32</a:t>
             </a:fld>
             <a:endParaRPr lang="en-US"/>
           </a:p>
@@ -6285,7 +6641,7 @@
             <a:avLst/>
           </a:prstGeom>
           <a:solidFill>
-            <a:srgbClr val="2E5F8A"/>
+            <a:srgbClr val="B9852F"/>
           </a:solidFill>
           <a:ln/>
         </p:spPr>
@@ -6362,7 +6718,7 @@
                 <a:ea typeface="Calibri" pitchFamily="34" charset="-122"/>
                 <a:cs typeface="Calibri" pitchFamily="34" charset="-120"/>
               </a:rPr>
-              <a:t>Rolling downhill</a:t>
+              <a:t>Words as vectors</a:t>
             </a:r>
             <a:endParaRPr lang="en-US" sz="1600" dirty="0"/>
           </a:p>
@@ -6401,7 +6757,7 @@
                 <a:ea typeface="Calibri" pitchFamily="34" charset="-122"/>
                 <a:cs typeface="Calibri" pitchFamily="34" charset="-120"/>
               </a:rPr>
-              <a:t>What training actually is, without the calculus</a:t>
+              <a:t>Same context pull together, different context push apart</a:t>
             </a:r>
             <a:endParaRPr lang="en-US" sz="1250" dirty="0"/>
           </a:p>
@@ -6444,7 +6800,7 @@
             <a:avLst/>
           </a:prstGeom>
           <a:solidFill>
-            <a:srgbClr val="B9852F"/>
+            <a:srgbClr val="2E5F8A"/>
           </a:solidFill>
           <a:ln/>
         </p:spPr>
@@ -6521,7 +6877,7 @@
                 <a:ea typeface="Calibri" pitchFamily="34" charset="-122"/>
                 <a:cs typeface="Calibri" pitchFamily="34" charset="-120"/>
               </a:rPr>
-              <a:t>Words as vectors</a:t>
+              <a:t>The same rule on pixels</a:t>
             </a:r>
             <a:endParaRPr lang="en-US" sz="1600" dirty="0"/>
           </a:p>
@@ -6560,7 +6916,7 @@
                 <a:ea typeface="Calibri" pitchFamily="34" charset="-122"/>
                 <a:cs typeface="Calibri" pitchFamily="34" charset="-120"/>
               </a:rPr>
-              <a:t>Where they come from, and what the geometry can do</a:t>
+              <a:t>Convolutions, and how CLIP searches a museum by typing</a:t>
             </a:r>
             <a:endParaRPr lang="en-US" sz="1250" dirty="0"/>
           </a:p>
@@ -6680,7 +7036,7 @@
                 <a:ea typeface="Calibri" pitchFamily="34" charset="-122"/>
                 <a:cs typeface="Calibri" pitchFamily="34" charset="-120"/>
               </a:rPr>
-              <a:t>Where a corpus comes from</a:t>
+              <a:t>Reading an API</a:t>
             </a:r>
             <a:endParaRPr lang="en-US" sz="1600" dirty="0"/>
           </a:p>
@@ -6719,7 +7075,7 @@
                 <a:ea typeface="Calibri" pitchFamily="34" charset="-122"/>
                 <a:cs typeface="Calibri" pitchFamily="34" charset="-120"/>
               </a:rPr>
-              <a:t>A file, an API, or a careful scrape</a:t>
+              <a:t>What to look at before you write the loop</a:t>
             </a:r>
             <a:endParaRPr lang="en-US" sz="1250" dirty="0"/>
           </a:p>
@@ -6839,7 +7195,7 @@
                 <a:ea typeface="Calibri" pitchFamily="34" charset="-122"/>
                 <a:cs typeface="Calibri" pitchFamily="34" charset="-120"/>
               </a:rPr>
-              <a:t>Collect and commit</a:t>
+              <a:t>A careful scrape</a:t>
             </a:r>
             <a:endParaRPr lang="en-US" sz="1600" dirty="0"/>
           </a:p>
@@ -6878,7 +7234,7 @@
                 <a:ea typeface="Calibri" pitchFamily="34" charset="-122"/>
                 <a:cs typeface="Calibri" pitchFamily="34" charset="-120"/>
               </a:rPr>
-              <a:t>Your data in Drive, your repo born, your project pitched</a:t>
+              <a:t>Finding the data in a page, and the four rules attached</a:t>
             </a:r>
             <a:endParaRPr lang="en-US" sz="1250" dirty="0"/>
           </a:p>
@@ -8357,7 +8713,7 @@
                 <a:ea typeface="Calibri" pitchFamily="34" charset="-122"/>
                 <a:cs typeface="Calibri" pitchFamily="34" charset="-120"/>
               </a:rPr>
-              <a:t>ROUTE TWO, LIVE</a:t>
+              <a:t>ROUTE TWO</a:t>
             </a:r>
             <a:endParaRPr lang="en-US" sz="1300" dirty="0"/>
           </a:p>
@@ -8396,7 +8752,7 @@
                 <a:ea typeface="Cambria" pitchFamily="34" charset="-122"/>
                 <a:cs typeface="Cambria" pitchFamily="34" charset="-120"/>
               </a:rPr>
-              <a:t>A URL, some JSON, and then a table</a:t>
+              <a:t>Look at one reply before you write the loop</a:t>
             </a:r>
             <a:endParaRPr lang="en-US" sz="3400" dirty="0"/>
           </a:p>
@@ -8404,7 +8760,7 @@
       </p:sp>
       <p:pic>
         <p:nvPicPr>
-          <p:cNvPr id="4" name="Image 0" descr="/tmp/figs/w4_api.png">    </p:cNvPr>
+          <p:cNvPr id="4" name="Image 0" descr="/tmp/figs/w4_api_anatomy.png">    </p:cNvPr>
           <p:cNvPicPr>
             <a:picLocks noChangeAspect="1"/>
           </p:cNvPicPr>
@@ -8417,8 +8773,8 @@
         </p:blipFill>
         <p:spPr>
           <a:xfrm>
-            <a:off x="1097280" y="1920240"/>
-            <a:ext cx="9966960" cy="3749040"/>
+            <a:off x="640080" y="1874520"/>
+            <a:ext cx="10881360" cy="3566160"/>
           </a:xfrm>
           <a:prstGeom prst="rect">
             <a:avLst/>
@@ -8458,7 +8814,7 @@
                 <a:ea typeface="Cambria" pitchFamily="34" charset="-122"/>
                 <a:cs typeface="Cambria" pitchFamily="34" charset="-120"/>
               </a:rPr>
-              <a:t>An endpoint is a URL that answers with data. A key is a name badge. Pagination hands you a page at a time.</a:t>
+              <a:t>Ask for one item. The pagination block tells you how big the job is; the data block is your rows.</a:t>
             </a:r>
             <a:endParaRPr lang="en-US" sz="1600" dirty="0"/>
           </a:p>
@@ -8497,7 +8853,7 @@
                 <a:ea typeface="Calibri" pitchFamily="34" charset="-122"/>
                 <a:cs typeface="Calibri" pitchFamily="34" charset="-120"/>
               </a:rPr>
-              <a:t>Left panel: a real response, live from api.artic.edu. The AI writes the three lines that make the table.</a:t>
+              <a:t>A live call made while this deck was built: 132,681 works match "landscape", handed over two at a time.</a:t>
             </a:r>
             <a:endParaRPr lang="en-US" sz="1000" dirty="0"/>
           </a:p>
@@ -8562,13 +8918,13 @@
             <a:r>
               <a:rPr lang="en-US" sz="1300" b="1" spc="300" kern="0" dirty="0">
                 <a:solidFill>
-                  <a:srgbClr val="7A3B2E"/>
+                  <a:srgbClr val="2E5F8A"/>
                 </a:solidFill>
                 <a:latin typeface="Calibri" pitchFamily="34" charset="0"/>
                 <a:ea typeface="Calibri" pitchFamily="34" charset="-122"/>
                 <a:cs typeface="Calibri" pitchFamily="34" charset="-120"/>
               </a:rPr>
-              <a:t>ROUTE THREE</a:t>
+              <a:t>ROUTE TWO, LIVE</a:t>
             </a:r>
             <a:endParaRPr lang="en-US" sz="1300" dirty="0"/>
           </a:p>
@@ -8607,448 +8963,110 @@
                 <a:ea typeface="Cambria" pitchFamily="34" charset="-122"/>
                 <a:cs typeface="Cambria" pitchFamily="34" charset="-120"/>
               </a:rPr>
-              <a:t>Scraping, and the four things that come with it</a:t>
+              <a:t>A URL, some JSON, and then a table</a:t>
             </a:r>
             <a:endParaRPr lang="en-US" sz="3400" dirty="0"/>
           </a:p>
         </p:txBody>
       </p:sp>
-      <p:sp>
-        <p:nvSpPr>
-          <p:cNvPr id="4" name="Shape 2"/>
-          <p:cNvSpPr/>
-          <p:nvPr/>
-        </p:nvSpPr>
-        <p:spPr>
-          <a:xfrm>
-            <a:off x="640080" y="2011680"/>
-            <a:ext cx="10881360" cy="914400"/>
-          </a:xfrm>
-          <a:prstGeom prst="roundRect">
-            <a:avLst>
-              <a:gd name="adj" fmla="val 10000"/>
-            </a:avLst>
-          </a:prstGeom>
-          <a:solidFill>
-            <a:srgbClr val="F4EEE8"/>
-          </a:solidFill>
-          <a:ln/>
-        </p:spPr>
-      </p:sp>
-      <p:sp>
-        <p:nvSpPr>
-          <p:cNvPr id="5" name="Text 3"/>
-          <p:cNvSpPr/>
-          <p:nvPr/>
-        </p:nvSpPr>
-        <p:spPr>
-          <a:xfrm>
-            <a:off x="960120" y="2103120"/>
-            <a:ext cx="4023360" cy="731520"/>
-          </a:xfrm>
-          <a:prstGeom prst="rect">
-            <a:avLst/>
-          </a:prstGeom>
-          <a:noFill/>
-          <a:ln/>
-        </p:spPr>
-        <p:txBody>
-          <a:bodyPr wrap="square" lIns="0" tIns="0" rIns="0" bIns="0" rtlCol="0" anchor="ctr"/>
-          <a:lstStyle/>
-          <a:p>
-            <a:pPr indent="0" marL="0">
-              <a:buNone/>
-            </a:pPr>
-            <a:r>
-              <a:rPr lang="en-US" sz="1700" b="1" dirty="0">
-                <a:solidFill>
-                  <a:srgbClr val="7A3B2E"/>
+      <p:pic>
+        <p:nvPicPr>
+          <p:cNvPr id="4" name="Image 0" descr="/tmp/figs/w4_api.png">    </p:cNvPr>
+          <p:cNvPicPr>
+            <a:picLocks noChangeAspect="1"/>
+          </p:cNvPicPr>
+          <p:nvPr/>
+        </p:nvPicPr>
+        <p:blipFill>
+          <a:blip r:embed="rId1"/>
+          <a:srcRect l="0" r="0" t="0" b="0"/>
+          <a:stretch/>
+        </p:blipFill>
+        <p:spPr>
+          <a:xfrm>
+            <a:off x="1097280" y="1920240"/>
+            <a:ext cx="9966960" cy="3749040"/>
+          </a:xfrm>
+          <a:prstGeom prst="rect">
+            <a:avLst/>
+          </a:prstGeom>
+        </p:spPr>
+      </p:pic>
+      <p:sp>
+        <p:nvSpPr>
+          <p:cNvPr id="5" name="Text 2"/>
+          <p:cNvSpPr/>
+          <p:nvPr/>
+        </p:nvSpPr>
+        <p:spPr>
+          <a:xfrm>
+            <a:off x="640080" y="5897880"/>
+            <a:ext cx="10881360" cy="411480"/>
+          </a:xfrm>
+          <a:prstGeom prst="rect">
+            <a:avLst/>
+          </a:prstGeom>
+          <a:noFill/>
+          <a:ln/>
+        </p:spPr>
+        <p:txBody>
+          <a:bodyPr wrap="square" rtlCol="0" anchor="ctr"/>
+          <a:lstStyle/>
+          <a:p>
+            <a:pPr indent="0" marL="0">
+              <a:buNone/>
+            </a:pPr>
+            <a:r>
+              <a:rPr lang="en-US" sz="1600" i="1" dirty="0">
+                <a:solidFill>
+                  <a:srgbClr val="1A1A1A"/>
                 </a:solidFill>
                 <a:latin typeface="Cambria" pitchFamily="34" charset="0"/>
                 <a:ea typeface="Cambria" pitchFamily="34" charset="-122"/>
                 <a:cs typeface="Cambria" pitchFamily="34" charset="-120"/>
               </a:rPr>
-              <a:t>Read robots.txt and the terms</a:t>
-            </a:r>
-            <a:endParaRPr lang="en-US" sz="1700" dirty="0"/>
-          </a:p>
-        </p:txBody>
-      </p:sp>
-      <p:sp>
-        <p:nvSpPr>
-          <p:cNvPr id="6" name="Text 4"/>
-          <p:cNvSpPr/>
-          <p:nvPr/>
-        </p:nvSpPr>
-        <p:spPr>
-          <a:xfrm>
-            <a:off x="5120640" y="2103120"/>
-            <a:ext cx="6126480" cy="731520"/>
-          </a:xfrm>
-          <a:prstGeom prst="rect">
-            <a:avLst/>
-          </a:prstGeom>
-          <a:noFill/>
-          <a:ln/>
-        </p:spPr>
-        <p:txBody>
-          <a:bodyPr wrap="square" lIns="0" tIns="0" rIns="0" bIns="0" rtlCol="0" anchor="ctr"/>
-          <a:lstStyle/>
-          <a:p>
-            <a:pPr indent="0" marL="0">
-              <a:buNone/>
-            </a:pPr>
-            <a:r>
-              <a:rPr lang="en-US" sz="1350" dirty="0">
-                <a:solidFill>
-                  <a:srgbClr val="1A1A1A"/>
+              <a:t>An endpoint is a URL that answers with data. A key is a name badge. Pagination hands you a page at a time.</a:t>
+            </a:r>
+            <a:endParaRPr lang="en-US" sz="1600" dirty="0"/>
+          </a:p>
+        </p:txBody>
+      </p:sp>
+      <p:sp>
+        <p:nvSpPr>
+          <p:cNvPr id="6" name="Text 3"/>
+          <p:cNvSpPr/>
+          <p:nvPr/>
+        </p:nvSpPr>
+        <p:spPr>
+          <a:xfrm>
+            <a:off x="640080" y="6355080"/>
+            <a:ext cx="10881360" cy="320040"/>
+          </a:xfrm>
+          <a:prstGeom prst="rect">
+            <a:avLst/>
+          </a:prstGeom>
+          <a:noFill/>
+          <a:ln/>
+        </p:spPr>
+        <p:txBody>
+          <a:bodyPr wrap="square" rtlCol="0" anchor="ctr"/>
+          <a:lstStyle/>
+          <a:p>
+            <a:pPr indent="0" marL="0">
+              <a:buNone/>
+            </a:pPr>
+            <a:r>
+              <a:rPr lang="en-US" sz="1000" dirty="0">
+                <a:solidFill>
+                  <a:srgbClr val="6B6B63"/>
                 </a:solidFill>
                 <a:latin typeface="Calibri" pitchFamily="34" charset="0"/>
                 <a:ea typeface="Calibri" pitchFamily="34" charset="-122"/>
                 <a:cs typeface="Calibri" pitchFamily="34" charset="-120"/>
               </a:rPr>
-              <a:t>before the first request, not after the complaint.</a:t>
-            </a:r>
-            <a:endParaRPr lang="en-US" sz="1350" dirty="0"/>
-          </a:p>
-        </p:txBody>
-      </p:sp>
-      <p:sp>
-        <p:nvSpPr>
-          <p:cNvPr id="7" name="Shape 5"/>
-          <p:cNvSpPr/>
-          <p:nvPr/>
-        </p:nvSpPr>
-        <p:spPr>
-          <a:xfrm>
-            <a:off x="640080" y="3063240"/>
-            <a:ext cx="10881360" cy="914400"/>
-          </a:xfrm>
-          <a:prstGeom prst="roundRect">
-            <a:avLst>
-              <a:gd name="adj" fmla="val 10000"/>
-            </a:avLst>
-          </a:prstGeom>
-          <a:solidFill>
-            <a:srgbClr val="F4EEE8"/>
-          </a:solidFill>
-          <a:ln/>
-        </p:spPr>
-      </p:sp>
-      <p:sp>
-        <p:nvSpPr>
-          <p:cNvPr id="8" name="Text 6"/>
-          <p:cNvSpPr/>
-          <p:nvPr/>
-        </p:nvSpPr>
-        <p:spPr>
-          <a:xfrm>
-            <a:off x="960120" y="3154680"/>
-            <a:ext cx="4023360" cy="731520"/>
-          </a:xfrm>
-          <a:prstGeom prst="rect">
-            <a:avLst/>
-          </a:prstGeom>
-          <a:noFill/>
-          <a:ln/>
-        </p:spPr>
-        <p:txBody>
-          <a:bodyPr wrap="square" lIns="0" tIns="0" rIns="0" bIns="0" rtlCol="0" anchor="ctr"/>
-          <a:lstStyle/>
-          <a:p>
-            <a:pPr indent="0" marL="0">
-              <a:buNone/>
-            </a:pPr>
-            <a:r>
-              <a:rPr lang="en-US" sz="1700" b="1" dirty="0">
-                <a:solidFill>
-                  <a:srgbClr val="B9852F"/>
-                </a:solidFill>
-                <a:latin typeface="Cambria" pitchFamily="34" charset="0"/>
-                <a:ea typeface="Cambria" pitchFamily="34" charset="-122"/>
-                <a:cs typeface="Cambria" pitchFamily="34" charset="-120"/>
-              </a:rPr>
-              <a:t>Request slowly</a:t>
-            </a:r>
-            <a:endParaRPr lang="en-US" sz="1700" dirty="0"/>
-          </a:p>
-        </p:txBody>
-      </p:sp>
-      <p:sp>
-        <p:nvSpPr>
-          <p:cNvPr id="9" name="Text 7"/>
-          <p:cNvSpPr/>
-          <p:nvPr/>
-        </p:nvSpPr>
-        <p:spPr>
-          <a:xfrm>
-            <a:off x="5120640" y="3154680"/>
-            <a:ext cx="6126480" cy="731520"/>
-          </a:xfrm>
-          <a:prstGeom prst="rect">
-            <a:avLst/>
-          </a:prstGeom>
-          <a:noFill/>
-          <a:ln/>
-        </p:spPr>
-        <p:txBody>
-          <a:bodyPr wrap="square" lIns="0" tIns="0" rIns="0" bIns="0" rtlCol="0" anchor="ctr"/>
-          <a:lstStyle/>
-          <a:p>
-            <a:pPr indent="0" marL="0">
-              <a:buNone/>
-            </a:pPr>
-            <a:r>
-              <a:rPr lang="en-US" sz="1350" dirty="0">
-                <a:solidFill>
-                  <a:srgbClr val="1A1A1A"/>
-                </a:solidFill>
-                <a:latin typeface="Calibri" pitchFamily="34" charset="0"/>
-                <a:ea typeface="Calibri" pitchFamily="34" charset="-122"/>
-                <a:cs typeface="Calibri" pitchFamily="34" charset="-120"/>
-              </a:rPr>
-              <a:t>one page every couple of seconds. You are a guest on someone's server.</a:t>
-            </a:r>
-            <a:endParaRPr lang="en-US" sz="1350" dirty="0"/>
-          </a:p>
-        </p:txBody>
-      </p:sp>
-      <p:sp>
-        <p:nvSpPr>
-          <p:cNvPr id="10" name="Shape 8"/>
-          <p:cNvSpPr/>
-          <p:nvPr/>
-        </p:nvSpPr>
-        <p:spPr>
-          <a:xfrm>
-            <a:off x="640080" y="4114800"/>
-            <a:ext cx="10881360" cy="914400"/>
-          </a:xfrm>
-          <a:prstGeom prst="roundRect">
-            <a:avLst>
-              <a:gd name="adj" fmla="val 10000"/>
-            </a:avLst>
-          </a:prstGeom>
-          <a:solidFill>
-            <a:srgbClr val="F4EEE8"/>
-          </a:solidFill>
-          <a:ln/>
-        </p:spPr>
-      </p:sp>
-      <p:sp>
-        <p:nvSpPr>
-          <p:cNvPr id="11" name="Text 9"/>
-          <p:cNvSpPr/>
-          <p:nvPr/>
-        </p:nvSpPr>
-        <p:spPr>
-          <a:xfrm>
-            <a:off x="960120" y="4206240"/>
-            <a:ext cx="4023360" cy="731520"/>
-          </a:xfrm>
-          <a:prstGeom prst="rect">
-            <a:avLst/>
-          </a:prstGeom>
-          <a:noFill/>
-          <a:ln/>
-        </p:spPr>
-        <p:txBody>
-          <a:bodyPr wrap="square" lIns="0" tIns="0" rIns="0" bIns="0" rtlCol="0" anchor="ctr"/>
-          <a:lstStyle/>
-          <a:p>
-            <a:pPr indent="0" marL="0">
-              <a:buNone/>
-            </a:pPr>
-            <a:r>
-              <a:rPr lang="en-US" sz="1700" b="1" dirty="0">
-                <a:solidFill>
-                  <a:srgbClr val="3F6F5F"/>
-                </a:solidFill>
-                <a:latin typeface="Cambria" pitchFamily="34" charset="0"/>
-                <a:ea typeface="Cambria" pitchFamily="34" charset="-122"/>
-                <a:cs typeface="Cambria" pitchFamily="34" charset="-120"/>
-              </a:rPr>
-              <a:t>Take only what you need</a:t>
-            </a:r>
-            <a:endParaRPr lang="en-US" sz="1700" dirty="0"/>
-          </a:p>
-        </p:txBody>
-      </p:sp>
-      <p:sp>
-        <p:nvSpPr>
-          <p:cNvPr id="12" name="Text 10"/>
-          <p:cNvSpPr/>
-          <p:nvPr/>
-        </p:nvSpPr>
-        <p:spPr>
-          <a:xfrm>
-            <a:off x="5120640" y="4206240"/>
-            <a:ext cx="6126480" cy="731520"/>
-          </a:xfrm>
-          <a:prstGeom prst="rect">
-            <a:avLst/>
-          </a:prstGeom>
-          <a:noFill/>
-          <a:ln/>
-        </p:spPr>
-        <p:txBody>
-          <a:bodyPr wrap="square" lIns="0" tIns="0" rIns="0" bIns="0" rtlCol="0" anchor="ctr"/>
-          <a:lstStyle/>
-          <a:p>
-            <a:pPr indent="0" marL="0">
-              <a:buNone/>
-            </a:pPr>
-            <a:r>
-              <a:rPr lang="en-US" sz="1350" dirty="0">
-                <a:solidFill>
-                  <a:srgbClr val="1A1A1A"/>
-                </a:solidFill>
-                <a:latin typeface="Calibri" pitchFamily="34" charset="0"/>
-                <a:ea typeface="Calibri" pitchFamily="34" charset="-122"/>
-                <a:cs typeface="Calibri" pitchFamily="34" charset="-120"/>
-              </a:rPr>
-              <a:t>the fields your question uses, not the whole site.</a:t>
-            </a:r>
-            <a:endParaRPr lang="en-US" sz="1350" dirty="0"/>
-          </a:p>
-        </p:txBody>
-      </p:sp>
-      <p:sp>
-        <p:nvSpPr>
-          <p:cNvPr id="13" name="Shape 11"/>
-          <p:cNvSpPr/>
-          <p:nvPr/>
-        </p:nvSpPr>
-        <p:spPr>
-          <a:xfrm>
-            <a:off x="640080" y="5166360"/>
-            <a:ext cx="10881360" cy="914400"/>
-          </a:xfrm>
-          <a:prstGeom prst="roundRect">
-            <a:avLst>
-              <a:gd name="adj" fmla="val 10000"/>
-            </a:avLst>
-          </a:prstGeom>
-          <a:solidFill>
-            <a:srgbClr val="F4EEE8"/>
-          </a:solidFill>
-          <a:ln/>
-        </p:spPr>
-      </p:sp>
-      <p:sp>
-        <p:nvSpPr>
-          <p:cNvPr id="14" name="Text 12"/>
-          <p:cNvSpPr/>
-          <p:nvPr/>
-        </p:nvSpPr>
-        <p:spPr>
-          <a:xfrm>
-            <a:off x="960120" y="5257800"/>
-            <a:ext cx="4023360" cy="731520"/>
-          </a:xfrm>
-          <a:prstGeom prst="rect">
-            <a:avLst/>
-          </a:prstGeom>
-          <a:noFill/>
-          <a:ln/>
-        </p:spPr>
-        <p:txBody>
-          <a:bodyPr wrap="square" lIns="0" tIns="0" rIns="0" bIns="0" rtlCol="0" anchor="ctr"/>
-          <a:lstStyle/>
-          <a:p>
-            <a:pPr indent="0" marL="0">
-              <a:buNone/>
-            </a:pPr>
-            <a:r>
-              <a:rPr lang="en-US" sz="1700" b="1" dirty="0">
-                <a:solidFill>
-                  <a:srgbClr val="2E5F8A"/>
-                </a:solidFill>
-                <a:latin typeface="Cambria" pitchFamily="34" charset="0"/>
-                <a:ea typeface="Cambria" pitchFamily="34" charset="-122"/>
-                <a:cs typeface="Cambria" pitchFamily="34" charset="-120"/>
-              </a:rPr>
-              <a:t>Never republish the text</a:t>
-            </a:r>
-            <a:endParaRPr lang="en-US" sz="1700" dirty="0"/>
-          </a:p>
-        </p:txBody>
-      </p:sp>
-      <p:sp>
-        <p:nvSpPr>
-          <p:cNvPr id="15" name="Text 13"/>
-          <p:cNvSpPr/>
-          <p:nvPr/>
-        </p:nvSpPr>
-        <p:spPr>
-          <a:xfrm>
-            <a:off x="5120640" y="5257800"/>
-            <a:ext cx="6126480" cy="731520"/>
-          </a:xfrm>
-          <a:prstGeom prst="rect">
-            <a:avLst/>
-          </a:prstGeom>
-          <a:noFill/>
-          <a:ln/>
-        </p:spPr>
-        <p:txBody>
-          <a:bodyPr wrap="square" lIns="0" tIns="0" rIns="0" bIns="0" rtlCol="0" anchor="ctr"/>
-          <a:lstStyle/>
-          <a:p>
-            <a:pPr indent="0" marL="0">
-              <a:buNone/>
-            </a:pPr>
-            <a:r>
-              <a:rPr lang="en-US" sz="1350" dirty="0">
-                <a:solidFill>
-                  <a:srgbClr val="1A1A1A"/>
-                </a:solidFill>
-                <a:latin typeface="Calibri" pitchFamily="34" charset="0"/>
-                <a:ea typeface="Calibri" pitchFamily="34" charset="-122"/>
-                <a:cs typeface="Calibri" pitchFamily="34" charset="-120"/>
-              </a:rPr>
-              <a:t>analyse it, quote it, count it. Do not hand it on.</a:t>
-            </a:r>
-            <a:endParaRPr lang="en-US" sz="1350" dirty="0"/>
-          </a:p>
-        </p:txBody>
-      </p:sp>
-      <p:sp>
-        <p:nvSpPr>
-          <p:cNvPr id="16" name="Text 14"/>
-          <p:cNvSpPr/>
-          <p:nvPr/>
-        </p:nvSpPr>
-        <p:spPr>
-          <a:xfrm>
-            <a:off x="640080" y="6309360"/>
-            <a:ext cx="10881360" cy="365760"/>
-          </a:xfrm>
-          <a:prstGeom prst="rect">
-            <a:avLst/>
-          </a:prstGeom>
-          <a:noFill/>
-          <a:ln/>
-        </p:spPr>
-        <p:txBody>
-          <a:bodyPr wrap="square" rtlCol="0" anchor="ctr"/>
-          <a:lstStyle/>
-          <a:p>
-            <a:pPr indent="0" marL="0">
-              <a:buNone/>
-            </a:pPr>
-            <a:r>
-              <a:rPr lang="en-US" sz="1250" i="1" dirty="0">
-                <a:solidFill>
-                  <a:srgbClr val="6B6B63"/>
-                </a:solidFill>
-                <a:latin typeface="Calibri" pitchFamily="34" charset="0"/>
-                <a:ea typeface="Calibri" pitchFamily="34" charset="-122"/>
-                <a:cs typeface="Calibri" pitchFamily="34" charset="-120"/>
-              </a:rPr>
-              <a:t>CC0 and public domain: go anywhere.   Academic sets and community text: analyse, don't redistribute.   Shadow libraries: never.</a:t>
-            </a:r>
-            <a:endParaRPr lang="en-US" sz="1250" dirty="0"/>
+              <a:t>Left panel: a real response, live from api.artic.edu. The AI writes the three lines that make the table.</a:t>
+            </a:r>
+            <a:endParaRPr lang="en-US" sz="1000" dirty="0"/>
           </a:p>
         </p:txBody>
       </p:sp>
@@ -9111,13 +9129,13 @@
             <a:r>
               <a:rPr lang="en-US" sz="1300" b="1" spc="300" kern="0" dirty="0">
                 <a:solidFill>
-                  <a:srgbClr val="3F6F5F"/>
+                  <a:srgbClr val="B9852F"/>
                 </a:solidFill>
                 <a:latin typeface="Calibri" pitchFamily="34" charset="0"/>
                 <a:ea typeface="Calibri" pitchFamily="34" charset="-122"/>
                 <a:cs typeface="Calibri" pitchFamily="34" charset="-120"/>
               </a:rPr>
-              <a:t>YOUR TURN · 20 MINUTES</a:t>
+              <a:t>EVERY API IS SOMEBODY'S DESIGN</a:t>
             </a:r>
             <a:endParaRPr lang="en-US" sz="1300" dirty="0"/>
           </a:p>
@@ -9156,348 +9174,110 @@
                 <a:ea typeface="Cambria" pitchFamily="34" charset="-122"/>
                 <a:cs typeface="Cambria" pitchFamily="34" charset="-120"/>
               </a:rPr>
-              <a:t>Collect it, save it, start the repo</a:t>
+              <a:t>Two museums, two shapes</a:t>
             </a:r>
             <a:endParaRPr lang="en-US" sz="3400" dirty="0"/>
           </a:p>
         </p:txBody>
       </p:sp>
-      <p:sp>
-        <p:nvSpPr>
-          <p:cNvPr id="4" name="Shape 2"/>
-          <p:cNvSpPr/>
-          <p:nvPr/>
-        </p:nvSpPr>
-        <p:spPr>
-          <a:xfrm>
-            <a:off x="640080" y="2103120"/>
-            <a:ext cx="10881360" cy="1097280"/>
-          </a:xfrm>
-          <a:prstGeom prst="roundRect">
-            <a:avLst>
-              <a:gd name="adj" fmla="val 8333"/>
-            </a:avLst>
-          </a:prstGeom>
-          <a:solidFill>
-            <a:srgbClr val="F4EEE8"/>
-          </a:solidFill>
-          <a:ln/>
-        </p:spPr>
-      </p:sp>
-      <p:sp>
-        <p:nvSpPr>
-          <p:cNvPr id="5" name="Text 3"/>
-          <p:cNvSpPr/>
-          <p:nvPr/>
-        </p:nvSpPr>
-        <p:spPr>
-          <a:xfrm>
-            <a:off x="1005840" y="2240280"/>
-            <a:ext cx="4206240" cy="822960"/>
-          </a:xfrm>
-          <a:prstGeom prst="rect">
-            <a:avLst/>
-          </a:prstGeom>
-          <a:noFill/>
-          <a:ln/>
-        </p:spPr>
-        <p:txBody>
-          <a:bodyPr wrap="square" lIns="0" tIns="0" rIns="0" bIns="0" rtlCol="0" anchor="ctr"/>
-          <a:lstStyle/>
-          <a:p>
-            <a:pPr indent="0" marL="0">
-              <a:buNone/>
-            </a:pPr>
-            <a:r>
-              <a:rPr lang="en-US" sz="1900" b="1" dirty="0">
-                <a:solidFill>
-                  <a:srgbClr val="3F6F5F"/>
+      <p:pic>
+        <p:nvPicPr>
+          <p:cNvPr id="4" name="Image 0" descr="/tmp/figs/w4_api_shapes.png">    </p:cNvPr>
+          <p:cNvPicPr>
+            <a:picLocks noChangeAspect="1"/>
+          </p:cNvPicPr>
+          <p:nvPr/>
+        </p:nvPicPr>
+        <p:blipFill>
+          <a:blip r:embed="rId1"/>
+          <a:srcRect l="0" r="0" t="0" b="0"/>
+          <a:stretch/>
+        </p:blipFill>
+        <p:spPr>
+          <a:xfrm>
+            <a:off x="1005840" y="1828800"/>
+            <a:ext cx="10149840" cy="3840480"/>
+          </a:xfrm>
+          <a:prstGeom prst="rect">
+            <a:avLst/>
+          </a:prstGeom>
+        </p:spPr>
+      </p:pic>
+      <p:sp>
+        <p:nvSpPr>
+          <p:cNvPr id="5" name="Text 2"/>
+          <p:cNvSpPr/>
+          <p:nvPr/>
+        </p:nvSpPr>
+        <p:spPr>
+          <a:xfrm>
+            <a:off x="640080" y="5897880"/>
+            <a:ext cx="10881360" cy="411480"/>
+          </a:xfrm>
+          <a:prstGeom prst="rect">
+            <a:avLst/>
+          </a:prstGeom>
+          <a:noFill/>
+          <a:ln/>
+        </p:spPr>
+        <p:txBody>
+          <a:bodyPr wrap="square" rtlCol="0" anchor="ctr"/>
+          <a:lstStyle/>
+          <a:p>
+            <a:pPr indent="0" marL="0">
+              <a:buNone/>
+            </a:pPr>
+            <a:r>
+              <a:rPr lang="en-US" sz="1600" i="1" dirty="0">
+                <a:solidFill>
+                  <a:srgbClr val="1A1A1A"/>
                 </a:solidFill>
                 <a:latin typeface="Cambria" pitchFamily="34" charset="0"/>
                 <a:ea typeface="Cambria" pitchFamily="34" charset="-122"/>
                 <a:cs typeface="Cambria" pitchFamily="34" charset="-120"/>
               </a:rPr>
-              <a:t>a file in your Drive folder</a:t>
-            </a:r>
-            <a:endParaRPr lang="en-US" sz="1900" dirty="0"/>
-          </a:p>
-        </p:txBody>
-      </p:sp>
-      <p:sp>
-        <p:nvSpPr>
-          <p:cNvPr id="6" name="Text 4"/>
-          <p:cNvSpPr/>
-          <p:nvPr/>
-        </p:nvSpPr>
-        <p:spPr>
-          <a:xfrm>
-            <a:off x="5394960" y="2240280"/>
-            <a:ext cx="5760720" cy="822960"/>
-          </a:xfrm>
-          <a:prstGeom prst="rect">
-            <a:avLst/>
-          </a:prstGeom>
-          <a:noFill/>
-          <a:ln/>
-        </p:spPr>
-        <p:txBody>
-          <a:bodyPr wrap="square" lIns="0" tIns="0" rIns="0" bIns="0" rtlCol="0" anchor="ctr"/>
-          <a:lstStyle/>
-          <a:p>
-            <a:pPr indent="0" marL="0">
-              <a:buNone/>
-            </a:pPr>
-            <a:r>
-              <a:rPr lang="en-US" sz="1400" dirty="0">
-                <a:solidFill>
-                  <a:srgbClr val="1A1A1A"/>
+              <a:t>One hands you rows. The other hands you a phone book, and every row after that is another request.</a:t>
+            </a:r>
+            <a:endParaRPr lang="en-US" sz="1600" dirty="0"/>
+          </a:p>
+        </p:txBody>
+      </p:sp>
+      <p:sp>
+        <p:nvSpPr>
+          <p:cNvPr id="6" name="Text 3"/>
+          <p:cNvSpPr/>
+          <p:nvPr/>
+        </p:nvSpPr>
+        <p:spPr>
+          <a:xfrm>
+            <a:off x="640080" y="6355080"/>
+            <a:ext cx="10881360" cy="320040"/>
+          </a:xfrm>
+          <a:prstGeom prst="rect">
+            <a:avLst/>
+          </a:prstGeom>
+          <a:noFill/>
+          <a:ln/>
+        </p:spPr>
+        <p:txBody>
+          <a:bodyPr wrap="square" rtlCol="0" anchor="ctr"/>
+          <a:lstStyle/>
+          <a:p>
+            <a:pPr indent="0" marL="0">
+              <a:buNone/>
+            </a:pPr>
+            <a:r>
+              <a:rPr lang="en-US" sz="1000" dirty="0">
+                <a:solidFill>
+                  <a:srgbClr val="6B6B63"/>
                 </a:solidFill>
                 <a:latin typeface="Calibri" pitchFamily="34" charset="0"/>
                 <a:ea typeface="Calibri" pitchFamily="34" charset="-122"/>
                 <a:cs typeface="Calibri" pitchFamily="34" charset="-120"/>
               </a:rPr>
-              <a:t>Week 5 starts from it. Colab forgets everything else.</a:t>
-            </a:r>
-            <a:endParaRPr lang="en-US" sz="1400" dirty="0"/>
-          </a:p>
-        </p:txBody>
-      </p:sp>
-      <p:sp>
-        <p:nvSpPr>
-          <p:cNvPr id="7" name="Shape 5"/>
-          <p:cNvSpPr/>
-          <p:nvPr/>
-        </p:nvSpPr>
-        <p:spPr>
-          <a:xfrm>
-            <a:off x="640080" y="3383280"/>
-            <a:ext cx="10881360" cy="1097280"/>
-          </a:xfrm>
-          <a:prstGeom prst="roundRect">
-            <a:avLst>
-              <a:gd name="adj" fmla="val 8333"/>
-            </a:avLst>
-          </a:prstGeom>
-          <a:solidFill>
-            <a:srgbClr val="F4EEE8"/>
-          </a:solidFill>
-          <a:ln/>
-        </p:spPr>
-      </p:sp>
-      <p:sp>
-        <p:nvSpPr>
-          <p:cNvPr id="8" name="Text 6"/>
-          <p:cNvSpPr/>
-          <p:nvPr/>
-        </p:nvSpPr>
-        <p:spPr>
-          <a:xfrm>
-            <a:off x="1005840" y="3520440"/>
-            <a:ext cx="4206240" cy="822960"/>
-          </a:xfrm>
-          <a:prstGeom prst="rect">
-            <a:avLst/>
-          </a:prstGeom>
-          <a:noFill/>
-          <a:ln/>
-        </p:spPr>
-        <p:txBody>
-          <a:bodyPr wrap="square" lIns="0" tIns="0" rIns="0" bIns="0" rtlCol="0" anchor="ctr"/>
-          <a:lstStyle/>
-          <a:p>
-            <a:pPr indent="0" marL="0">
-              <a:buNone/>
-            </a:pPr>
-            <a:r>
-              <a:rPr lang="en-US" sz="1900" b="1" dirty="0">
-                <a:solidFill>
-                  <a:srgbClr val="2E5F8A"/>
-                </a:solidFill>
-                <a:latin typeface="Cambria" pitchFamily="34" charset="0"/>
-                <a:ea typeface="Cambria" pitchFamily="34" charset="-122"/>
-                <a:cs typeface="Cambria" pitchFamily="34" charset="-120"/>
-              </a:rPr>
-              <a:t>a repo with Pages switched on</a:t>
-            </a:r>
-            <a:endParaRPr lang="en-US" sz="1900" dirty="0"/>
-          </a:p>
-        </p:txBody>
-      </p:sp>
-      <p:sp>
-        <p:nvSpPr>
-          <p:cNvPr id="9" name="Text 7"/>
-          <p:cNvSpPr/>
-          <p:nvPr/>
-        </p:nvSpPr>
-        <p:spPr>
-          <a:xfrm>
-            <a:off x="5394960" y="3520440"/>
-            <a:ext cx="5760720" cy="822960"/>
-          </a:xfrm>
-          <a:prstGeom prst="rect">
-            <a:avLst/>
-          </a:prstGeom>
-          <a:noFill/>
-          <a:ln/>
-        </p:spPr>
-        <p:txBody>
-          <a:bodyPr wrap="square" lIns="0" tIns="0" rIns="0" bIns="0" rtlCol="0" anchor="ctr"/>
-          <a:lstStyle/>
-          <a:p>
-            <a:pPr indent="0" marL="0">
-              <a:buNone/>
-            </a:pPr>
-            <a:r>
-              <a:rPr lang="en-US" sz="1400" dirty="0">
-                <a:solidFill>
-                  <a:srgbClr val="1A1A1A"/>
-                </a:solidFill>
-                <a:latin typeface="Calibri" pitchFamily="34" charset="0"/>
-                <a:ea typeface="Calibri" pitchFamily="34" charset="-122"/>
-                <a:cs typeface="Calibri" pitchFamily="34" charset="-120"/>
-              </a:rPr>
-              <a:t>so a live URL exists today, not in Week 9 under deadline.</a:t>
-            </a:r>
-            <a:endParaRPr lang="en-US" sz="1400" dirty="0"/>
-          </a:p>
-        </p:txBody>
-      </p:sp>
-      <p:sp>
-        <p:nvSpPr>
-          <p:cNvPr id="10" name="Shape 8"/>
-          <p:cNvSpPr/>
-          <p:nvPr/>
-        </p:nvSpPr>
-        <p:spPr>
-          <a:xfrm>
-            <a:off x="640080" y="4663440"/>
-            <a:ext cx="10881360" cy="1097280"/>
-          </a:xfrm>
-          <a:prstGeom prst="roundRect">
-            <a:avLst>
-              <a:gd name="adj" fmla="val 8333"/>
-            </a:avLst>
-          </a:prstGeom>
-          <a:solidFill>
-            <a:srgbClr val="F4EEE8"/>
-          </a:solidFill>
-          <a:ln/>
-        </p:spPr>
-      </p:sp>
-      <p:sp>
-        <p:nvSpPr>
-          <p:cNvPr id="11" name="Text 9"/>
-          <p:cNvSpPr/>
-          <p:nvPr/>
-        </p:nvSpPr>
-        <p:spPr>
-          <a:xfrm>
-            <a:off x="1005840" y="4800600"/>
-            <a:ext cx="4206240" cy="822960"/>
-          </a:xfrm>
-          <a:prstGeom prst="rect">
-            <a:avLst/>
-          </a:prstGeom>
-          <a:noFill/>
-          <a:ln/>
-        </p:spPr>
-        <p:txBody>
-          <a:bodyPr wrap="square" lIns="0" tIns="0" rIns="0" bIns="0" rtlCol="0" anchor="ctr"/>
-          <a:lstStyle/>
-          <a:p>
-            <a:pPr indent="0" marL="0">
-              <a:buNone/>
-            </a:pPr>
-            <a:r>
-              <a:rPr lang="en-US" sz="1900" b="1" dirty="0">
-                <a:solidFill>
-                  <a:srgbClr val="7A3B2E"/>
-                </a:solidFill>
-                <a:latin typeface="Cambria" pitchFamily="34" charset="0"/>
-                <a:ea typeface="Cambria" pitchFamily="34" charset="-122"/>
-                <a:cs typeface="Cambria" pitchFamily="34" charset="-120"/>
-              </a:rPr>
-              <a:t>two minutes of pitch, to a partner</a:t>
-            </a:r>
-            <a:endParaRPr lang="en-US" sz="1900" dirty="0"/>
-          </a:p>
-        </p:txBody>
-      </p:sp>
-      <p:sp>
-        <p:nvSpPr>
-          <p:cNvPr id="12" name="Text 10"/>
-          <p:cNvSpPr/>
-          <p:nvPr/>
-        </p:nvSpPr>
-        <p:spPr>
-          <a:xfrm>
-            <a:off x="5394960" y="4800600"/>
-            <a:ext cx="5760720" cy="822960"/>
-          </a:xfrm>
-          <a:prstGeom prst="rect">
-            <a:avLst/>
-          </a:prstGeom>
-          <a:noFill/>
-          <a:ln/>
-        </p:spPr>
-        <p:txBody>
-          <a:bodyPr wrap="square" lIns="0" tIns="0" rIns="0" bIns="0" rtlCol="0" anchor="ctr"/>
-          <a:lstStyle/>
-          <a:p>
-            <a:pPr indent="0" marL="0">
-              <a:buNone/>
-            </a:pPr>
-            <a:r>
-              <a:rPr lang="en-US" sz="1400" dirty="0">
-                <a:solidFill>
-                  <a:srgbClr val="1A1A1A"/>
-                </a:solidFill>
-                <a:latin typeface="Calibri" pitchFamily="34" charset="0"/>
-                <a:ea typeface="Calibri" pitchFamily="34" charset="-122"/>
-                <a:cs typeface="Calibri" pitchFamily="34" charset="-120"/>
-              </a:rPr>
-              <a:t>corpus, two methods, what would count as a finding.</a:t>
-            </a:r>
-            <a:endParaRPr lang="en-US" sz="1400" dirty="0"/>
-          </a:p>
-        </p:txBody>
-      </p:sp>
-      <p:sp>
-        <p:nvSpPr>
-          <p:cNvPr id="13" name="Text 11"/>
-          <p:cNvSpPr/>
-          <p:nvPr/>
-        </p:nvSpPr>
-        <p:spPr>
-          <a:xfrm>
-            <a:off x="640080" y="6263640"/>
-            <a:ext cx="10881360" cy="365760"/>
-          </a:xfrm>
-          <a:prstGeom prst="rect">
-            <a:avLst/>
-          </a:prstGeom>
-          <a:noFill/>
-          <a:ln/>
-        </p:spPr>
-        <p:txBody>
-          <a:bodyPr wrap="square" rtlCol="0" anchor="ctr"/>
-          <a:lstStyle/>
-          <a:p>
-            <a:pPr indent="0" marL="0">
-              <a:buNone/>
-            </a:pPr>
-            <a:r>
-              <a:rPr lang="en-US" sz="1100" i="1" dirty="0">
-                <a:solidFill>
-                  <a:srgbClr val="6B6B63"/>
-                </a:solidFill>
-                <a:latin typeface="Calibri" pitchFamily="34" charset="0"/>
-                <a:ea typeface="Calibri" pitchFamily="34" charset="-122"/>
-                <a:cs typeface="Calibri" pitchFamily="34" charset="-120"/>
-              </a:rPr>
-              <a:t>A null result, honestly shown, is a complete project. The pivot kit is insurance, not a demotion.</a:t>
-            </a:r>
-            <a:endParaRPr lang="en-US" sz="1100" dirty="0"/>
+              <a:t>Both queried live for this slide. Work out which kind you have before you estimate how long anything will take.</a:t>
+            </a:r>
+            <a:endParaRPr lang="en-US" sz="1000" dirty="0"/>
           </a:p>
         </p:txBody>
       </p:sp>
@@ -9515,7 +9295,7 @@
     <p:bg>
       <p:bgPr>
         <a:solidFill>
-          <a:srgbClr val="4E261D"/>
+          <a:srgbClr val="FFFFFF"/>
         </a:solidFill>
       </p:bgPr>
     </p:bg>
@@ -9560,13 +9340,13 @@
             <a:r>
               <a:rPr lang="en-US" sz="1300" b="1" spc="300" kern="0" dirty="0">
                 <a:solidFill>
-                  <a:srgbClr val="B9852F"/>
+                  <a:srgbClr val="7A3B2E"/>
                 </a:solidFill>
                 <a:latin typeface="Calibri" pitchFamily="34" charset="0"/>
                 <a:ea typeface="Calibri" pitchFamily="34" charset="-122"/>
                 <a:cs typeface="Calibri" pitchFamily="34" charset="-120"/>
               </a:rPr>
-              <a:t>BEFORE WEEK 5</a:t>
+              <a:t>ROUTE THREE</a:t>
             </a:r>
             <a:endParaRPr lang="en-US" sz="1300" dirty="0"/>
           </a:p>
@@ -9580,17 +9360,17 @@
         </p:nvSpPr>
         <p:spPr>
           <a:xfrm>
-            <a:off x="640080" y="914400"/>
-            <a:ext cx="10058400" cy="731520"/>
-          </a:xfrm>
-          <a:prstGeom prst="rect">
-            <a:avLst/>
-          </a:prstGeom>
-          <a:noFill/>
-          <a:ln/>
-        </p:spPr>
-        <p:txBody>
-          <a:bodyPr wrap="square" rtlCol="0" anchor="ctr"/>
+            <a:off x="640080" y="868680"/>
+            <a:ext cx="10972800" cy="777240"/>
+          </a:xfrm>
+          <a:prstGeom prst="rect">
+            <a:avLst/>
+          </a:prstGeom>
+          <a:noFill/>
+          <a:ln/>
+        </p:spPr>
+        <p:txBody>
+          <a:bodyPr wrap="square" rtlCol="0" anchor="t"/>
           <a:lstStyle/>
           <a:p>
             <a:pPr indent="0" marL="0">
@@ -9599,13 +9379,13 @@
             <a:r>
               <a:rPr lang="en-US" sz="3400" b="1" dirty="0">
                 <a:solidFill>
-                  <a:srgbClr val="FFFFFF"/>
+                  <a:srgbClr val="1A1A1A"/>
                 </a:solidFill>
                 <a:latin typeface="Cambria" pitchFamily="34" charset="0"/>
                 <a:ea typeface="Cambria" pitchFamily="34" charset="-122"/>
                 <a:cs typeface="Cambria" pitchFamily="34" charset="-120"/>
               </a:rPr>
-              <a:t>Homework</a:t>
+              <a:t>Scraping, and the four things that come with it</a:t>
             </a:r>
             <a:endParaRPr lang="en-US" sz="3400" dirty="0"/>
           </a:p>
@@ -9619,14 +9399,16 @@
         </p:nvSpPr>
         <p:spPr>
           <a:xfrm>
-            <a:off x="640080" y="2057400"/>
-            <a:ext cx="219456" cy="219456"/>
-          </a:xfrm>
-          <a:prstGeom prst="ellipse">
-            <a:avLst/>
+            <a:off x="640080" y="2011680"/>
+            <a:ext cx="10881360" cy="914400"/>
+          </a:xfrm>
+          <a:prstGeom prst="roundRect">
+            <a:avLst>
+              <a:gd name="adj" fmla="val 10000"/>
+            </a:avLst>
           </a:prstGeom>
           <a:solidFill>
-            <a:srgbClr val="B9852F"/>
+            <a:srgbClr val="F4EEE8"/>
           </a:solidFill>
           <a:ln/>
         </p:spPr>
@@ -9639,8 +9421,8 @@
         </p:nvSpPr>
         <p:spPr>
           <a:xfrm>
-            <a:off x="1051560" y="1920240"/>
-            <a:ext cx="10058400" cy="365760"/>
+            <a:off x="960120" y="2103120"/>
+            <a:ext cx="4023360" cy="731520"/>
           </a:xfrm>
           <a:prstGeom prst="rect">
             <a:avLst/>
@@ -9656,89 +9438,191 @@
               <a:buNone/>
             </a:pPr>
             <a:r>
-              <a:rPr lang="en-US" sz="1500" b="1" dirty="0">
-                <a:solidFill>
-                  <a:srgbClr val="B9852F"/>
+              <a:rPr lang="en-US" sz="1700" b="1" dirty="0">
+                <a:solidFill>
+                  <a:srgbClr val="7A3B2E"/>
+                </a:solidFill>
+                <a:latin typeface="Cambria" pitchFamily="34" charset="0"/>
+                <a:ea typeface="Cambria" pitchFamily="34" charset="-122"/>
+                <a:cs typeface="Cambria" pitchFamily="34" charset="-120"/>
+              </a:rPr>
+              <a:t>Read robots.txt and the terms</a:t>
+            </a:r>
+            <a:endParaRPr lang="en-US" sz="1700" dirty="0"/>
+          </a:p>
+        </p:txBody>
+      </p:sp>
+      <p:sp>
+        <p:nvSpPr>
+          <p:cNvPr id="6" name="Text 4"/>
+          <p:cNvSpPr/>
+          <p:nvPr/>
+        </p:nvSpPr>
+        <p:spPr>
+          <a:xfrm>
+            <a:off x="5120640" y="2103120"/>
+            <a:ext cx="6126480" cy="731520"/>
+          </a:xfrm>
+          <a:prstGeom prst="rect">
+            <a:avLst/>
+          </a:prstGeom>
+          <a:noFill/>
+          <a:ln/>
+        </p:spPr>
+        <p:txBody>
+          <a:bodyPr wrap="square" lIns="0" tIns="0" rIns="0" bIns="0" rtlCol="0" anchor="ctr"/>
+          <a:lstStyle/>
+          <a:p>
+            <a:pPr indent="0" marL="0">
+              <a:buNone/>
+            </a:pPr>
+            <a:r>
+              <a:rPr lang="en-US" sz="1350" dirty="0">
+                <a:solidFill>
+                  <a:srgbClr val="1A1A1A"/>
                 </a:solidFill>
                 <a:latin typeface="Calibri" pitchFamily="34" charset="0"/>
                 <a:ea typeface="Calibri" pitchFamily="34" charset="-122"/>
                 <a:cs typeface="Calibri" pitchFamily="34" charset="-120"/>
               </a:rPr>
-              <a:t>Data Biography</a:t>
-            </a:r>
-            <a:endParaRPr lang="en-US" sz="1500" dirty="0"/>
-          </a:p>
-        </p:txBody>
-      </p:sp>
-      <p:sp>
-        <p:nvSpPr>
-          <p:cNvPr id="6" name="Text 4"/>
-          <p:cNvSpPr/>
-          <p:nvPr/>
-        </p:nvSpPr>
-        <p:spPr>
-          <a:xfrm>
-            <a:off x="1051560" y="2286000"/>
-            <a:ext cx="9875520" cy="868680"/>
-          </a:xfrm>
-          <a:prstGeom prst="rect">
-            <a:avLst/>
-          </a:prstGeom>
-          <a:noFill/>
-          <a:ln/>
-        </p:spPr>
-        <p:txBody>
-          <a:bodyPr wrap="square" lIns="0" tIns="0" rIns="0" bIns="0" rtlCol="0" anchor="t"/>
-          <a:lstStyle/>
-          <a:p>
-            <a:pPr indent="0" marL="0">
-              <a:buNone/>
-            </a:pPr>
-            <a:r>
-              <a:rPr lang="en-US" sz="1400" dirty="0">
-                <a:solidFill>
-                  <a:srgbClr val="E8DCD6"/>
+              <a:t>before the first request, not after the complaint.</a:t>
+            </a:r>
+            <a:endParaRPr lang="en-US" sz="1350" dirty="0"/>
+          </a:p>
+        </p:txBody>
+      </p:sp>
+      <p:sp>
+        <p:nvSpPr>
+          <p:cNvPr id="7" name="Shape 5"/>
+          <p:cNvSpPr/>
+          <p:nvPr/>
+        </p:nvSpPr>
+        <p:spPr>
+          <a:xfrm>
+            <a:off x="640080" y="3063240"/>
+            <a:ext cx="10881360" cy="914400"/>
+          </a:xfrm>
+          <a:prstGeom prst="roundRect">
+            <a:avLst>
+              <a:gd name="adj" fmla="val 10000"/>
+            </a:avLst>
+          </a:prstGeom>
+          <a:solidFill>
+            <a:srgbClr val="F4EEE8"/>
+          </a:solidFill>
+          <a:ln/>
+        </p:spPr>
+      </p:sp>
+      <p:sp>
+        <p:nvSpPr>
+          <p:cNvPr id="8" name="Text 6"/>
+          <p:cNvSpPr/>
+          <p:nvPr/>
+        </p:nvSpPr>
+        <p:spPr>
+          <a:xfrm>
+            <a:off x="960120" y="3154680"/>
+            <a:ext cx="4023360" cy="731520"/>
+          </a:xfrm>
+          <a:prstGeom prst="rect">
+            <a:avLst/>
+          </a:prstGeom>
+          <a:noFill/>
+          <a:ln/>
+        </p:spPr>
+        <p:txBody>
+          <a:bodyPr wrap="square" lIns="0" tIns="0" rIns="0" bIns="0" rtlCol="0" anchor="ctr"/>
+          <a:lstStyle/>
+          <a:p>
+            <a:pPr indent="0" marL="0">
+              <a:buNone/>
+            </a:pPr>
+            <a:r>
+              <a:rPr lang="en-US" sz="1700" b="1" dirty="0">
+                <a:solidFill>
+                  <a:srgbClr val="B9852F"/>
+                </a:solidFill>
+                <a:latin typeface="Cambria" pitchFamily="34" charset="0"/>
+                <a:ea typeface="Cambria" pitchFamily="34" charset="-122"/>
+                <a:cs typeface="Cambria" pitchFamily="34" charset="-120"/>
+              </a:rPr>
+              <a:t>Request slowly</a:t>
+            </a:r>
+            <a:endParaRPr lang="en-US" sz="1700" dirty="0"/>
+          </a:p>
+        </p:txBody>
+      </p:sp>
+      <p:sp>
+        <p:nvSpPr>
+          <p:cNvPr id="9" name="Text 7"/>
+          <p:cNvSpPr/>
+          <p:nvPr/>
+        </p:nvSpPr>
+        <p:spPr>
+          <a:xfrm>
+            <a:off x="5120640" y="3154680"/>
+            <a:ext cx="6126480" cy="731520"/>
+          </a:xfrm>
+          <a:prstGeom prst="rect">
+            <a:avLst/>
+          </a:prstGeom>
+          <a:noFill/>
+          <a:ln/>
+        </p:spPr>
+        <p:txBody>
+          <a:bodyPr wrap="square" lIns="0" tIns="0" rIns="0" bIns="0" rtlCol="0" anchor="ctr"/>
+          <a:lstStyle/>
+          <a:p>
+            <a:pPr indent="0" marL="0">
+              <a:buNone/>
+            </a:pPr>
+            <a:r>
+              <a:rPr lang="en-US" sz="1350" dirty="0">
+                <a:solidFill>
+                  <a:srgbClr val="1A1A1A"/>
                 </a:solidFill>
                 <a:latin typeface="Calibri" pitchFamily="34" charset="0"/>
                 <a:ea typeface="Calibri" pitchFamily="34" charset="-122"/>
                 <a:cs typeface="Calibri" pitchFamily="34" charset="-120"/>
               </a:rPr>
-              <a:t>~400 words: where it came from, who is in it, who is missing, what it cannot tell you.</a:t>
-            </a:r>
-            <a:endParaRPr lang="en-US" sz="1400" dirty="0"/>
-          </a:p>
-        </p:txBody>
-      </p:sp>
-      <p:sp>
-        <p:nvSpPr>
-          <p:cNvPr id="7" name="Shape 5"/>
-          <p:cNvSpPr/>
-          <p:nvPr/>
-        </p:nvSpPr>
-        <p:spPr>
-          <a:xfrm>
-            <a:off x="640080" y="3383280"/>
-            <a:ext cx="219456" cy="219456"/>
-          </a:xfrm>
-          <a:prstGeom prst="ellipse">
-            <a:avLst/>
+              <a:t>one page every couple of seconds. You are a guest on someone's server.</a:t>
+            </a:r>
+            <a:endParaRPr lang="en-US" sz="1350" dirty="0"/>
+          </a:p>
+        </p:txBody>
+      </p:sp>
+      <p:sp>
+        <p:nvSpPr>
+          <p:cNvPr id="10" name="Shape 8"/>
+          <p:cNvSpPr/>
+          <p:nvPr/>
+        </p:nvSpPr>
+        <p:spPr>
+          <a:xfrm>
+            <a:off x="640080" y="4114800"/>
+            <a:ext cx="10881360" cy="914400"/>
+          </a:xfrm>
+          <a:prstGeom prst="roundRect">
+            <a:avLst>
+              <a:gd name="adj" fmla="val 10000"/>
+            </a:avLst>
           </a:prstGeom>
           <a:solidFill>
-            <a:srgbClr val="3F6F5F"/>
+            <a:srgbClr val="F4EEE8"/>
           </a:solidFill>
           <a:ln/>
         </p:spPr>
       </p:sp>
       <p:sp>
         <p:nvSpPr>
-          <p:cNvPr id="8" name="Text 6"/>
-          <p:cNvSpPr/>
-          <p:nvPr/>
-        </p:nvSpPr>
-        <p:spPr>
-          <a:xfrm>
-            <a:off x="1051560" y="3246120"/>
-            <a:ext cx="10058400" cy="365760"/>
+          <p:cNvPr id="11" name="Text 9"/>
+          <p:cNvSpPr/>
+          <p:nvPr/>
+        </p:nvSpPr>
+        <p:spPr>
+          <a:xfrm>
+            <a:off x="960120" y="4206240"/>
+            <a:ext cx="4023360" cy="731520"/>
           </a:xfrm>
           <a:prstGeom prst="rect">
             <a:avLst/>
@@ -9754,167 +9638,341 @@
               <a:buNone/>
             </a:pPr>
             <a:r>
-              <a:rPr lang="en-US" sz="1500" b="1" dirty="0">
+              <a:rPr lang="en-US" sz="1700" b="1" dirty="0">
                 <a:solidFill>
                   <a:srgbClr val="3F6F5F"/>
+                </a:solidFill>
+                <a:latin typeface="Cambria" pitchFamily="34" charset="0"/>
+                <a:ea typeface="Cambria" pitchFamily="34" charset="-122"/>
+                <a:cs typeface="Cambria" pitchFamily="34" charset="-120"/>
+              </a:rPr>
+              <a:t>Take only what you need</a:t>
+            </a:r>
+            <a:endParaRPr lang="en-US" sz="1700" dirty="0"/>
+          </a:p>
+        </p:txBody>
+      </p:sp>
+      <p:sp>
+        <p:nvSpPr>
+          <p:cNvPr id="12" name="Text 10"/>
+          <p:cNvSpPr/>
+          <p:nvPr/>
+        </p:nvSpPr>
+        <p:spPr>
+          <a:xfrm>
+            <a:off x="5120640" y="4206240"/>
+            <a:ext cx="6126480" cy="731520"/>
+          </a:xfrm>
+          <a:prstGeom prst="rect">
+            <a:avLst/>
+          </a:prstGeom>
+          <a:noFill/>
+          <a:ln/>
+        </p:spPr>
+        <p:txBody>
+          <a:bodyPr wrap="square" lIns="0" tIns="0" rIns="0" bIns="0" rtlCol="0" anchor="ctr"/>
+          <a:lstStyle/>
+          <a:p>
+            <a:pPr indent="0" marL="0">
+              <a:buNone/>
+            </a:pPr>
+            <a:r>
+              <a:rPr lang="en-US" sz="1350" dirty="0">
+                <a:solidFill>
+                  <a:srgbClr val="1A1A1A"/>
                 </a:solidFill>
                 <a:latin typeface="Calibri" pitchFamily="34" charset="0"/>
                 <a:ea typeface="Calibri" pitchFamily="34" charset="-122"/>
                 <a:cs typeface="Calibri" pitchFamily="34" charset="-120"/>
               </a:rPr>
-              <a:t>Collect it for real</a:t>
-            </a:r>
-            <a:endParaRPr lang="en-US" sz="1500" dirty="0"/>
-          </a:p>
-        </p:txBody>
-      </p:sp>
-      <p:sp>
-        <p:nvSpPr>
-          <p:cNvPr id="9" name="Text 7"/>
-          <p:cNvSpPr/>
-          <p:nvPr/>
-        </p:nvSpPr>
-        <p:spPr>
-          <a:xfrm>
-            <a:off x="1051560" y="3611880"/>
-            <a:ext cx="9875520" cy="868680"/>
-          </a:xfrm>
-          <a:prstGeom prst="rect">
-            <a:avLst/>
-          </a:prstGeom>
-          <a:noFill/>
-          <a:ln/>
-        </p:spPr>
-        <p:txBody>
-          <a:bodyPr wrap="square" lIns="0" tIns="0" rIns="0" bIns="0" rtlCol="0" anchor="t"/>
-          <a:lstStyle/>
-          <a:p>
-            <a:pPr indent="0" marL="0">
-              <a:buNone/>
-            </a:pPr>
-            <a:r>
-              <a:rPr lang="en-US" sz="1400" dirty="0">
-                <a:solidFill>
-                  <a:srgbClr val="E8DCD6"/>
+              <a:t>the fields your question uses, not the whole site.</a:t>
+            </a:r>
+            <a:endParaRPr lang="en-US" sz="1350" dirty="0"/>
+          </a:p>
+        </p:txBody>
+      </p:sp>
+      <p:sp>
+        <p:nvSpPr>
+          <p:cNvPr id="13" name="Shape 11"/>
+          <p:cNvSpPr/>
+          <p:nvPr/>
+        </p:nvSpPr>
+        <p:spPr>
+          <a:xfrm>
+            <a:off x="640080" y="5166360"/>
+            <a:ext cx="10881360" cy="914400"/>
+          </a:xfrm>
+          <a:prstGeom prst="roundRect">
+            <a:avLst>
+              <a:gd name="adj" fmla="val 10000"/>
+            </a:avLst>
+          </a:prstGeom>
+          <a:solidFill>
+            <a:srgbClr val="F4EEE8"/>
+          </a:solidFill>
+          <a:ln/>
+        </p:spPr>
+      </p:sp>
+      <p:sp>
+        <p:nvSpPr>
+          <p:cNvPr id="14" name="Text 12"/>
+          <p:cNvSpPr/>
+          <p:nvPr/>
+        </p:nvSpPr>
+        <p:spPr>
+          <a:xfrm>
+            <a:off x="960120" y="5257800"/>
+            <a:ext cx="4023360" cy="731520"/>
+          </a:xfrm>
+          <a:prstGeom prst="rect">
+            <a:avLst/>
+          </a:prstGeom>
+          <a:noFill/>
+          <a:ln/>
+        </p:spPr>
+        <p:txBody>
+          <a:bodyPr wrap="square" lIns="0" tIns="0" rIns="0" bIns="0" rtlCol="0" anchor="ctr"/>
+          <a:lstStyle/>
+          <a:p>
+            <a:pPr indent="0" marL="0">
+              <a:buNone/>
+            </a:pPr>
+            <a:r>
+              <a:rPr lang="en-US" sz="1700" b="1" dirty="0">
+                <a:solidFill>
+                  <a:srgbClr val="2E5F8A"/>
+                </a:solidFill>
+                <a:latin typeface="Cambria" pitchFamily="34" charset="0"/>
+                <a:ea typeface="Cambria" pitchFamily="34" charset="-122"/>
+                <a:cs typeface="Cambria" pitchFamily="34" charset="-120"/>
+              </a:rPr>
+              <a:t>Never republish the text</a:t>
+            </a:r>
+            <a:endParaRPr lang="en-US" sz="1700" dirty="0"/>
+          </a:p>
+        </p:txBody>
+      </p:sp>
+      <p:sp>
+        <p:nvSpPr>
+          <p:cNvPr id="15" name="Text 13"/>
+          <p:cNvSpPr/>
+          <p:nvPr/>
+        </p:nvSpPr>
+        <p:spPr>
+          <a:xfrm>
+            <a:off x="5120640" y="5257800"/>
+            <a:ext cx="6126480" cy="731520"/>
+          </a:xfrm>
+          <a:prstGeom prst="rect">
+            <a:avLst/>
+          </a:prstGeom>
+          <a:noFill/>
+          <a:ln/>
+        </p:spPr>
+        <p:txBody>
+          <a:bodyPr wrap="square" lIns="0" tIns="0" rIns="0" bIns="0" rtlCol="0" anchor="ctr"/>
+          <a:lstStyle/>
+          <a:p>
+            <a:pPr indent="0" marL="0">
+              <a:buNone/>
+            </a:pPr>
+            <a:r>
+              <a:rPr lang="en-US" sz="1350" dirty="0">
+                <a:solidFill>
+                  <a:srgbClr val="1A1A1A"/>
                 </a:solidFill>
                 <a:latin typeface="Calibri" pitchFamily="34" charset="0"/>
                 <a:ea typeface="Calibri" pitchFamily="34" charset="-122"/>
                 <a:cs typeface="Calibri" pitchFamily="34" charset="-120"/>
               </a:rPr>
-              <a:t>The cookbook notebook, and leave the file in Drive. Week 5 begins there.</a:t>
-            </a:r>
-            <a:endParaRPr lang="en-US" sz="1400" dirty="0"/>
-          </a:p>
-        </p:txBody>
-      </p:sp>
-      <p:sp>
-        <p:nvSpPr>
-          <p:cNvPr id="10" name="Shape 8"/>
-          <p:cNvSpPr/>
-          <p:nvPr/>
-        </p:nvSpPr>
-        <p:spPr>
-          <a:xfrm>
-            <a:off x="640080" y="4709160"/>
-            <a:ext cx="219456" cy="219456"/>
-          </a:xfrm>
-          <a:prstGeom prst="ellipse">
-            <a:avLst/>
-          </a:prstGeom>
-          <a:solidFill>
-            <a:srgbClr val="E8DCD6"/>
-          </a:solidFill>
-          <a:ln/>
-        </p:spPr>
-      </p:sp>
-      <p:sp>
-        <p:nvSpPr>
-          <p:cNvPr id="11" name="Text 9"/>
-          <p:cNvSpPr/>
-          <p:nvPr/>
-        </p:nvSpPr>
-        <p:spPr>
-          <a:xfrm>
-            <a:off x="1051560" y="4572000"/>
-            <a:ext cx="10058400" cy="365760"/>
-          </a:xfrm>
-          <a:prstGeom prst="rect">
-            <a:avLst/>
-          </a:prstGeom>
-          <a:noFill/>
-          <a:ln/>
-        </p:spPr>
-        <p:txBody>
-          <a:bodyPr wrap="square" lIns="0" tIns="0" rIns="0" bIns="0" rtlCol="0" anchor="ctr"/>
-          <a:lstStyle/>
-          <a:p>
-            <a:pPr indent="0" marL="0">
-              <a:buNone/>
-            </a:pPr>
-            <a:r>
-              <a:rPr lang="en-US" sz="1500" b="1" dirty="0">
-                <a:solidFill>
-                  <a:srgbClr val="E8DCD6"/>
+              <a:t>analyse it, quote it, count it. Do not hand it on.</a:t>
+            </a:r>
+            <a:endParaRPr lang="en-US" sz="1350" dirty="0"/>
+          </a:p>
+        </p:txBody>
+      </p:sp>
+      <p:sp>
+        <p:nvSpPr>
+          <p:cNvPr id="16" name="Text 14"/>
+          <p:cNvSpPr/>
+          <p:nvPr/>
+        </p:nvSpPr>
+        <p:spPr>
+          <a:xfrm>
+            <a:off x="640080" y="6309360"/>
+            <a:ext cx="10881360" cy="365760"/>
+          </a:xfrm>
+          <a:prstGeom prst="rect">
+            <a:avLst/>
+          </a:prstGeom>
+          <a:noFill/>
+          <a:ln/>
+        </p:spPr>
+        <p:txBody>
+          <a:bodyPr wrap="square" rtlCol="0" anchor="ctr"/>
+          <a:lstStyle/>
+          <a:p>
+            <a:pPr indent="0" marL="0">
+              <a:buNone/>
+            </a:pPr>
+            <a:r>
+              <a:rPr lang="en-US" sz="1250" i="1" dirty="0">
+                <a:solidFill>
+                  <a:srgbClr val="6B6B63"/>
                 </a:solidFill>
                 <a:latin typeface="Calibri" pitchFamily="34" charset="0"/>
                 <a:ea typeface="Calibri" pitchFamily="34" charset="-122"/>
                 <a:cs typeface="Calibri" pitchFamily="34" charset="-120"/>
               </a:rPr>
-              <a:t>Play with the map</a:t>
-            </a:r>
-            <a:endParaRPr lang="en-US" sz="1500" dirty="0"/>
-          </a:p>
-        </p:txBody>
-      </p:sp>
-      <p:sp>
-        <p:nvSpPr>
-          <p:cNvPr id="12" name="Text 10"/>
-          <p:cNvSpPr/>
-          <p:nvPr/>
-        </p:nvSpPr>
-        <p:spPr>
-          <a:xfrm>
-            <a:off x="1051560" y="4937760"/>
-            <a:ext cx="9875520" cy="868680"/>
-          </a:xfrm>
-          <a:prstGeom prst="rect">
-            <a:avLst/>
-          </a:prstGeom>
-          <a:noFill/>
-          <a:ln/>
-        </p:spPr>
-        <p:txBody>
-          <a:bodyPr wrap="square" lIns="0" tIns="0" rIns="0" bIns="0" rtlCol="0" anchor="t"/>
-          <a:lstStyle/>
-          <a:p>
-            <a:pPr indent="0" marL="0">
-              <a:buNone/>
-            </a:pPr>
-            <a:r>
-              <a:rPr lang="en-US" sz="1400" dirty="0">
-                <a:solidFill>
-                  <a:srgbClr val="E8DCD6"/>
+              <a:t>CC0 and public domain: go anywhere.   Academic sets and community text: analyse, don't redistribute.   Shadow libraries: never.</a:t>
+            </a:r>
+            <a:endParaRPr lang="en-US" sz="1250" dirty="0"/>
+          </a:p>
+        </p:txBody>
+      </p:sp>
+    </p:spTree>
+  </p:cSld>
+  <p:clrMapOvr>
+    <a:masterClrMapping/>
+  </p:clrMapOvr>
+</p:sld>
+</file>
+
+<file path=ppt/slides/slide29.xml><?xml version="1.0" encoding="utf-8"?>
+<p:sld xmlns:a="http://schemas.openxmlformats.org/drawingml/2006/main" xmlns:r="http://schemas.openxmlformats.org/officeDocument/2006/relationships" xmlns:p="http://schemas.openxmlformats.org/presentationml/2006/main">
+  <p:cSld name="Slide 29">
+    <p:bg>
+      <p:bgPr>
+        <a:solidFill>
+          <a:srgbClr val="FFFFFF"/>
+        </a:solidFill>
+      </p:bgPr>
+    </p:bg>
+    <p:spTree>
+      <p:nvGrpSpPr>
+        <p:cNvPr id="1" name=""/>
+        <p:cNvGrpSpPr/>
+        <p:nvPr/>
+      </p:nvGrpSpPr>
+      <p:grpSpPr>
+        <a:xfrm>
+          <a:off x="0" y="0"/>
+          <a:ext cx="0" cy="0"/>
+          <a:chOff x="0" y="0"/>
+          <a:chExt cx="0" cy="0"/>
+        </a:xfrm>
+      </p:grpSpPr>
+      <p:sp>
+        <p:nvSpPr>
+          <p:cNvPr id="2" name="Text 0"/>
+          <p:cNvSpPr/>
+          <p:nvPr/>
+        </p:nvSpPr>
+        <p:spPr>
+          <a:xfrm>
+            <a:off x="640080" y="502920"/>
+            <a:ext cx="10515600" cy="320040"/>
+          </a:xfrm>
+          <a:prstGeom prst="rect">
+            <a:avLst/>
+          </a:prstGeom>
+          <a:noFill/>
+          <a:ln/>
+        </p:spPr>
+        <p:txBody>
+          <a:bodyPr wrap="square" rtlCol="0" anchor="ctr"/>
+          <a:lstStyle/>
+          <a:p>
+            <a:pPr indent="0" marL="0">
+              <a:buNone/>
+            </a:pPr>
+            <a:r>
+              <a:rPr lang="en-US" sz="1300" b="1" spc="300" kern="0" dirty="0">
+                <a:solidFill>
+                  <a:srgbClr val="7A3B2E"/>
                 </a:solidFill>
                 <a:latin typeface="Calibri" pitchFamily="34" charset="0"/>
                 <a:ea typeface="Calibri" pitchFamily="34" charset="-122"/>
                 <a:cs typeface="Calibri" pitchFamily="34" charset="-120"/>
               </a:rPr>
-              <a:t>Embedding Projector: a word from your corpus, one neighbour that makes sense and one that does not.</a:t>
-            </a:r>
-            <a:endParaRPr lang="en-US" sz="1400" dirty="0"/>
-          </a:p>
-        </p:txBody>
-      </p:sp>
-      <p:sp>
-        <p:nvSpPr>
-          <p:cNvPr id="13" name="Text 11"/>
-          <p:cNvSpPr/>
-          <p:nvPr/>
-        </p:nvSpPr>
-        <p:spPr>
-          <a:xfrm>
-            <a:off x="640080" y="6035040"/>
-            <a:ext cx="10881360" cy="457200"/>
+              <a:t>ROUTE THREE, IN PRACTICE</a:t>
+            </a:r>
+            <a:endParaRPr lang="en-US" sz="1300" dirty="0"/>
+          </a:p>
+        </p:txBody>
+      </p:sp>
+      <p:sp>
+        <p:nvSpPr>
+          <p:cNvPr id="3" name="Text 1"/>
+          <p:cNvSpPr/>
+          <p:nvPr/>
+        </p:nvSpPr>
+        <p:spPr>
+          <a:xfrm>
+            <a:off x="640080" y="868680"/>
+            <a:ext cx="10972800" cy="777240"/>
+          </a:xfrm>
+          <a:prstGeom prst="rect">
+            <a:avLst/>
+          </a:prstGeom>
+          <a:noFill/>
+          <a:ln/>
+        </p:spPr>
+        <p:txBody>
+          <a:bodyPr wrap="square" rtlCol="0" anchor="t"/>
+          <a:lstStyle/>
+          <a:p>
+            <a:pPr indent="0" marL="0">
+              <a:buNone/>
+            </a:pPr>
+            <a:r>
+              <a:rPr lang="en-US" sz="3400" b="1" dirty="0">
+                <a:solidFill>
+                  <a:srgbClr val="1A1A1A"/>
+                </a:solidFill>
+                <a:latin typeface="Cambria" pitchFamily="34" charset="0"/>
+                <a:ea typeface="Cambria" pitchFamily="34" charset="-122"/>
+                <a:cs typeface="Cambria" pitchFamily="34" charset="-120"/>
+              </a:rPr>
+              <a:t>Find the data inside the markup</a:t>
+            </a:r>
+            <a:endParaRPr lang="en-US" sz="3400" dirty="0"/>
+          </a:p>
+        </p:txBody>
+      </p:sp>
+      <p:pic>
+        <p:nvPicPr>
+          <p:cNvPr id="4" name="Image 0" descr="/tmp/figs/w4_scrape_anatomy.png">    </p:cNvPr>
+          <p:cNvPicPr>
+            <a:picLocks noChangeAspect="1"/>
+          </p:cNvPicPr>
+          <p:nvPr/>
+        </p:nvPicPr>
+        <p:blipFill>
+          <a:blip r:embed="rId1"/>
+          <a:srcRect l="0" r="0" t="0" b="0"/>
+          <a:stretch/>
+        </p:blipFill>
+        <p:spPr>
+          <a:xfrm>
+            <a:off x="640080" y="1874520"/>
+            <a:ext cx="10881360" cy="3566160"/>
+          </a:xfrm>
+          <a:prstGeom prst="rect">
+            <a:avLst/>
+          </a:prstGeom>
+        </p:spPr>
+      </p:pic>
+      <p:sp>
+        <p:nvSpPr>
+          <p:cNvPr id="5" name="Text 2"/>
+          <p:cNvSpPr/>
+          <p:nvPr/>
+        </p:nvSpPr>
+        <p:spPr>
+          <a:xfrm>
+            <a:off x="640080" y="5897880"/>
+            <a:ext cx="10881360" cy="411480"/>
           </a:xfrm>
           <a:prstGeom prst="rect">
             <a:avLst/>
@@ -9930,17 +9988,56 @@
               <a:buNone/>
             </a:pPr>
             <a:r>
-              <a:rPr lang="en-US" sz="1300" i="1" dirty="0">
-                <a:solidFill>
-                  <a:srgbClr val="B9852F"/>
+              <a:rPr lang="en-US" sz="1600" i="1" dirty="0">
+                <a:solidFill>
+                  <a:srgbClr val="1A1A1A"/>
+                </a:solidFill>
+                <a:latin typeface="Cambria" pitchFamily="34" charset="0"/>
+                <a:ea typeface="Cambria" pitchFamily="34" charset="-122"/>
+                <a:cs typeface="Cambria" pitchFamily="34" charset="-120"/>
+              </a:rPr>
+              <a:t>Fetch one page, look at one block, and read the selectors off it. Right-click, Inspect, and the tag names are right there.</a:t>
+            </a:r>
+            <a:endParaRPr lang="en-US" sz="1600" dirty="0"/>
+          </a:p>
+        </p:txBody>
+      </p:sp>
+      <p:sp>
+        <p:nvSpPr>
+          <p:cNvPr id="6" name="Text 3"/>
+          <p:cNvSpPr/>
+          <p:nvPr/>
+        </p:nvSpPr>
+        <p:spPr>
+          <a:xfrm>
+            <a:off x="640080" y="6355080"/>
+            <a:ext cx="10881360" cy="320040"/>
+          </a:xfrm>
+          <a:prstGeom prst="rect">
+            <a:avLst/>
+          </a:prstGeom>
+          <a:noFill/>
+          <a:ln/>
+        </p:spPr>
+        <p:txBody>
+          <a:bodyPr wrap="square" rtlCol="0" anchor="ctr"/>
+          <a:lstStyle/>
+          <a:p>
+            <a:pPr indent="0" marL="0">
+              <a:buNone/>
+            </a:pPr>
+            <a:r>
+              <a:rPr lang="en-US" sz="1000" dirty="0">
+                <a:solidFill>
+                  <a:srgbClr val="6B6B63"/>
                 </a:solidFill>
                 <a:latin typeface="Calibri" pitchFamily="34" charset="0"/>
                 <a:ea typeface="Calibri" pitchFamily="34" charset="-122"/>
                 <a:cs typeface="Calibri" pitchFamily="34" charset="-120"/>
               </a:rPr>
-              <a:t>Next week: embeddings on YOUR corpus, all session. Bring the file.</a:t>
-            </a:r>
-            <a:endParaRPr lang="en-US" sz="1300" dirty="0"/>
+              <a:t>Real HTML from quotes.toscrape.com. A selector that matches nothing returns None and raises no error, which is the bug you will actually hit.</a:t>
+            </a:r>
+            <a:endParaRPr lang="en-US" sz="1000" dirty="0"/>
           </a:p>
         </p:txBody>
       </p:sp>
@@ -10152,6 +10249,1109 @@
               <a:t>Fig. 1b, Garg, Schiebinger, Jurafsky &amp; Zou, PNAS 2018 (arXiv:1711.08412) · shown for teaching</a:t>
             </a:r>
             <a:endParaRPr lang="en-US" sz="1000" dirty="0"/>
+          </a:p>
+        </p:txBody>
+      </p:sp>
+    </p:spTree>
+  </p:cSld>
+  <p:clrMapOvr>
+    <a:masterClrMapping/>
+  </p:clrMapOvr>
+</p:sld>
+</file>
+
+<file path=ppt/slides/slide30.xml><?xml version="1.0" encoding="utf-8"?>
+<p:sld xmlns:a="http://schemas.openxmlformats.org/drawingml/2006/main" xmlns:r="http://schemas.openxmlformats.org/officeDocument/2006/relationships" xmlns:p="http://schemas.openxmlformats.org/presentationml/2006/main">
+  <p:cSld name="Slide 30">
+    <p:bg>
+      <p:bgPr>
+        <a:solidFill>
+          <a:srgbClr val="FFFFFF"/>
+        </a:solidFill>
+      </p:bgPr>
+    </p:bg>
+    <p:spTree>
+      <p:nvGrpSpPr>
+        <p:cNvPr id="1" name=""/>
+        <p:cNvGrpSpPr/>
+        <p:nvPr/>
+      </p:nvGrpSpPr>
+      <p:grpSpPr>
+        <a:xfrm>
+          <a:off x="0" y="0"/>
+          <a:ext cx="0" cy="0"/>
+          <a:chOff x="0" y="0"/>
+          <a:chExt cx="0" cy="0"/>
+        </a:xfrm>
+      </p:grpSpPr>
+      <p:sp>
+        <p:nvSpPr>
+          <p:cNvPr id="2" name="Text 0"/>
+          <p:cNvSpPr/>
+          <p:nvPr/>
+        </p:nvSpPr>
+        <p:spPr>
+          <a:xfrm>
+            <a:off x="640080" y="502920"/>
+            <a:ext cx="10515600" cy="320040"/>
+          </a:xfrm>
+          <a:prstGeom prst="rect">
+            <a:avLst/>
+          </a:prstGeom>
+          <a:noFill/>
+          <a:ln/>
+        </p:spPr>
+        <p:txBody>
+          <a:bodyPr wrap="square" rtlCol="0" anchor="ctr"/>
+          <a:lstStyle/>
+          <a:p>
+            <a:pPr indent="0" marL="0">
+              <a:buNone/>
+            </a:pPr>
+            <a:r>
+              <a:rPr lang="en-US" sz="1300" b="1" spc="300" kern="0" dirty="0">
+                <a:solidFill>
+                  <a:srgbClr val="B9852F"/>
+                </a:solidFill>
+                <a:latin typeface="Calibri" pitchFamily="34" charset="0"/>
+                <a:ea typeface="Calibri" pitchFamily="34" charset="-122"/>
+                <a:cs typeface="Calibri" pitchFamily="34" charset="-120"/>
+              </a:rPr>
+              <a:t>BEFORE YOU START IT RUNNING</a:t>
+            </a:r>
+            <a:endParaRPr lang="en-US" sz="1300" dirty="0"/>
+          </a:p>
+        </p:txBody>
+      </p:sp>
+      <p:sp>
+        <p:nvSpPr>
+          <p:cNvPr id="3" name="Text 1"/>
+          <p:cNvSpPr/>
+          <p:nvPr/>
+        </p:nvSpPr>
+        <p:spPr>
+          <a:xfrm>
+            <a:off x="640080" y="868680"/>
+            <a:ext cx="10972800" cy="777240"/>
+          </a:xfrm>
+          <a:prstGeom prst="rect">
+            <a:avLst/>
+          </a:prstGeom>
+          <a:noFill/>
+          <a:ln/>
+        </p:spPr>
+        <p:txBody>
+          <a:bodyPr wrap="square" rtlCol="0" anchor="t"/>
+          <a:lstStyle/>
+          <a:p>
+            <a:pPr indent="0" marL="0">
+              <a:buNone/>
+            </a:pPr>
+            <a:r>
+              <a:rPr lang="en-US" sz="3400" b="1" dirty="0">
+                <a:solidFill>
+                  <a:srgbClr val="1A1A1A"/>
+                </a:solidFill>
+                <a:latin typeface="Cambria" pitchFamily="34" charset="0"/>
+                <a:ea typeface="Cambria" pitchFamily="34" charset="-122"/>
+                <a:cs typeface="Cambria" pitchFamily="34" charset="-120"/>
+              </a:rPr>
+              <a:t>How long will this take?</a:t>
+            </a:r>
+            <a:endParaRPr lang="en-US" sz="3400" dirty="0"/>
+          </a:p>
+        </p:txBody>
+      </p:sp>
+      <p:pic>
+        <p:nvPicPr>
+          <p:cNvPr id="4" name="Image 0" descr="/tmp/figs/w4_scrape_cost.png">    </p:cNvPr>
+          <p:cNvPicPr>
+            <a:picLocks noChangeAspect="1"/>
+          </p:cNvPicPr>
+          <p:nvPr/>
+        </p:nvPicPr>
+        <p:blipFill>
+          <a:blip r:embed="rId1"/>
+          <a:srcRect l="0" r="0" t="0" b="0"/>
+          <a:stretch/>
+        </p:blipFill>
+        <p:spPr>
+          <a:xfrm>
+            <a:off x="2103120" y="1783080"/>
+            <a:ext cx="7955280" cy="3931920"/>
+          </a:xfrm>
+          <a:prstGeom prst="rect">
+            <a:avLst/>
+          </a:prstGeom>
+        </p:spPr>
+      </p:pic>
+      <p:sp>
+        <p:nvSpPr>
+          <p:cNvPr id="5" name="Text 2"/>
+          <p:cNvSpPr/>
+          <p:nvPr/>
+        </p:nvSpPr>
+        <p:spPr>
+          <a:xfrm>
+            <a:off x="640080" y="5897880"/>
+            <a:ext cx="10881360" cy="411480"/>
+          </a:xfrm>
+          <a:prstGeom prst="rect">
+            <a:avLst/>
+          </a:prstGeom>
+          <a:noFill/>
+          <a:ln/>
+        </p:spPr>
+        <p:txBody>
+          <a:bodyPr wrap="square" rtlCol="0" anchor="ctr"/>
+          <a:lstStyle/>
+          <a:p>
+            <a:pPr indent="0" marL="0">
+              <a:buNone/>
+            </a:pPr>
+            <a:r>
+              <a:rPr lang="en-US" sz="1600" i="1" dirty="0">
+                <a:solidFill>
+                  <a:srgbClr val="1A1A1A"/>
+                </a:solidFill>
+                <a:latin typeface="Cambria" pitchFamily="34" charset="0"/>
+                <a:ea typeface="Cambria" pitchFamily="34" charset="-122"/>
+                <a:cs typeface="Cambria" pitchFamily="34" charset="-120"/>
+              </a:rPr>
+              <a:t>A one-second pause on 5,000 pages is an hour and a half. That number decides your sample size, so work it out first.</a:t>
+            </a:r>
+            <a:endParaRPr lang="en-US" sz="1600" dirty="0"/>
+          </a:p>
+        </p:txBody>
+      </p:sp>
+      <p:sp>
+        <p:nvSpPr>
+          <p:cNvPr id="6" name="Text 3"/>
+          <p:cNvSpPr/>
+          <p:nvPr/>
+        </p:nvSpPr>
+        <p:spPr>
+          <a:xfrm>
+            <a:off x="640080" y="6355080"/>
+            <a:ext cx="10881360" cy="320040"/>
+          </a:xfrm>
+          <a:prstGeom prst="rect">
+            <a:avLst/>
+          </a:prstGeom>
+          <a:noFill/>
+          <a:ln/>
+        </p:spPr>
+        <p:txBody>
+          <a:bodyPr wrap="square" rtlCol="0" anchor="ctr"/>
+          <a:lstStyle/>
+          <a:p>
+            <a:pPr indent="0" marL="0">
+              <a:buNone/>
+            </a:pPr>
+            <a:r>
+              <a:rPr lang="en-US" sz="1000" dirty="0">
+                <a:solidFill>
+                  <a:srgbClr val="6B6B63"/>
+                </a:solidFill>
+                <a:latin typeface="Calibri" pitchFamily="34" charset="0"/>
+                <a:ea typeface="Calibri" pitchFamily="34" charset="-122"/>
+                <a:cs typeface="Calibri" pitchFamily="34" charset="-120"/>
+              </a:rPr>
+              <a:t>And the site notices the difference. One page a second is a reader; fifty a second is an outage.</a:t>
+            </a:r>
+            <a:endParaRPr lang="en-US" sz="1000" dirty="0"/>
+          </a:p>
+        </p:txBody>
+      </p:sp>
+    </p:spTree>
+  </p:cSld>
+  <p:clrMapOvr>
+    <a:masterClrMapping/>
+  </p:clrMapOvr>
+</p:sld>
+</file>
+
+<file path=ppt/slides/slide31.xml><?xml version="1.0" encoding="utf-8"?>
+<p:sld xmlns:a="http://schemas.openxmlformats.org/drawingml/2006/main" xmlns:r="http://schemas.openxmlformats.org/officeDocument/2006/relationships" xmlns:p="http://schemas.openxmlformats.org/presentationml/2006/main">
+  <p:cSld name="Slide 31">
+    <p:bg>
+      <p:bgPr>
+        <a:solidFill>
+          <a:srgbClr val="FFFFFF"/>
+        </a:solidFill>
+      </p:bgPr>
+    </p:bg>
+    <p:spTree>
+      <p:nvGrpSpPr>
+        <p:cNvPr id="1" name=""/>
+        <p:cNvGrpSpPr/>
+        <p:nvPr/>
+      </p:nvGrpSpPr>
+      <p:grpSpPr>
+        <a:xfrm>
+          <a:off x="0" y="0"/>
+          <a:ext cx="0" cy="0"/>
+          <a:chOff x="0" y="0"/>
+          <a:chExt cx="0" cy="0"/>
+        </a:xfrm>
+      </p:grpSpPr>
+      <p:sp>
+        <p:nvSpPr>
+          <p:cNvPr id="2" name="Text 0"/>
+          <p:cNvSpPr/>
+          <p:nvPr/>
+        </p:nvSpPr>
+        <p:spPr>
+          <a:xfrm>
+            <a:off x="640080" y="502920"/>
+            <a:ext cx="10515600" cy="320040"/>
+          </a:xfrm>
+          <a:prstGeom prst="rect">
+            <a:avLst/>
+          </a:prstGeom>
+          <a:noFill/>
+          <a:ln/>
+        </p:spPr>
+        <p:txBody>
+          <a:bodyPr wrap="square" rtlCol="0" anchor="ctr"/>
+          <a:lstStyle/>
+          <a:p>
+            <a:pPr indent="0" marL="0">
+              <a:buNone/>
+            </a:pPr>
+            <a:r>
+              <a:rPr lang="en-US" sz="1300" b="1" spc="300" kern="0" dirty="0">
+                <a:solidFill>
+                  <a:srgbClr val="3F6F5F"/>
+                </a:solidFill>
+                <a:latin typeface="Calibri" pitchFamily="34" charset="0"/>
+                <a:ea typeface="Calibri" pitchFamily="34" charset="-122"/>
+                <a:cs typeface="Calibri" pitchFamily="34" charset="-120"/>
+              </a:rPr>
+              <a:t>YOUR TURN · 20 MINUTES</a:t>
+            </a:r>
+            <a:endParaRPr lang="en-US" sz="1300" dirty="0"/>
+          </a:p>
+        </p:txBody>
+      </p:sp>
+      <p:sp>
+        <p:nvSpPr>
+          <p:cNvPr id="3" name="Text 1"/>
+          <p:cNvSpPr/>
+          <p:nvPr/>
+        </p:nvSpPr>
+        <p:spPr>
+          <a:xfrm>
+            <a:off x="640080" y="868680"/>
+            <a:ext cx="10972800" cy="777240"/>
+          </a:xfrm>
+          <a:prstGeom prst="rect">
+            <a:avLst/>
+          </a:prstGeom>
+          <a:noFill/>
+          <a:ln/>
+        </p:spPr>
+        <p:txBody>
+          <a:bodyPr wrap="square" rtlCol="0" anchor="t"/>
+          <a:lstStyle/>
+          <a:p>
+            <a:pPr indent="0" marL="0">
+              <a:buNone/>
+            </a:pPr>
+            <a:r>
+              <a:rPr lang="en-US" sz="3400" b="1" dirty="0">
+                <a:solidFill>
+                  <a:srgbClr val="1A1A1A"/>
+                </a:solidFill>
+                <a:latin typeface="Cambria" pitchFamily="34" charset="0"/>
+                <a:ea typeface="Cambria" pitchFamily="34" charset="-122"/>
+                <a:cs typeface="Cambria" pitchFamily="34" charset="-120"/>
+              </a:rPr>
+              <a:t>Collect it, save it, start the repo</a:t>
+            </a:r>
+            <a:endParaRPr lang="en-US" sz="3400" dirty="0"/>
+          </a:p>
+        </p:txBody>
+      </p:sp>
+      <p:sp>
+        <p:nvSpPr>
+          <p:cNvPr id="4" name="Shape 2"/>
+          <p:cNvSpPr/>
+          <p:nvPr/>
+        </p:nvSpPr>
+        <p:spPr>
+          <a:xfrm>
+            <a:off x="640080" y="2103120"/>
+            <a:ext cx="10881360" cy="1097280"/>
+          </a:xfrm>
+          <a:prstGeom prst="roundRect">
+            <a:avLst>
+              <a:gd name="adj" fmla="val 8333"/>
+            </a:avLst>
+          </a:prstGeom>
+          <a:solidFill>
+            <a:srgbClr val="F4EEE8"/>
+          </a:solidFill>
+          <a:ln/>
+        </p:spPr>
+      </p:sp>
+      <p:sp>
+        <p:nvSpPr>
+          <p:cNvPr id="5" name="Text 3"/>
+          <p:cNvSpPr/>
+          <p:nvPr/>
+        </p:nvSpPr>
+        <p:spPr>
+          <a:xfrm>
+            <a:off x="1005840" y="2240280"/>
+            <a:ext cx="4206240" cy="822960"/>
+          </a:xfrm>
+          <a:prstGeom prst="rect">
+            <a:avLst/>
+          </a:prstGeom>
+          <a:noFill/>
+          <a:ln/>
+        </p:spPr>
+        <p:txBody>
+          <a:bodyPr wrap="square" lIns="0" tIns="0" rIns="0" bIns="0" rtlCol="0" anchor="ctr"/>
+          <a:lstStyle/>
+          <a:p>
+            <a:pPr indent="0" marL="0">
+              <a:buNone/>
+            </a:pPr>
+            <a:r>
+              <a:rPr lang="en-US" sz="1900" b="1" dirty="0">
+                <a:solidFill>
+                  <a:srgbClr val="3F6F5F"/>
+                </a:solidFill>
+                <a:latin typeface="Cambria" pitchFamily="34" charset="0"/>
+                <a:ea typeface="Cambria" pitchFamily="34" charset="-122"/>
+                <a:cs typeface="Cambria" pitchFamily="34" charset="-120"/>
+              </a:rPr>
+              <a:t>a file in your Drive folder</a:t>
+            </a:r>
+            <a:endParaRPr lang="en-US" sz="1900" dirty="0"/>
+          </a:p>
+        </p:txBody>
+      </p:sp>
+      <p:sp>
+        <p:nvSpPr>
+          <p:cNvPr id="6" name="Text 4"/>
+          <p:cNvSpPr/>
+          <p:nvPr/>
+        </p:nvSpPr>
+        <p:spPr>
+          <a:xfrm>
+            <a:off x="5394960" y="2240280"/>
+            <a:ext cx="5760720" cy="822960"/>
+          </a:xfrm>
+          <a:prstGeom prst="rect">
+            <a:avLst/>
+          </a:prstGeom>
+          <a:noFill/>
+          <a:ln/>
+        </p:spPr>
+        <p:txBody>
+          <a:bodyPr wrap="square" lIns="0" tIns="0" rIns="0" bIns="0" rtlCol="0" anchor="ctr"/>
+          <a:lstStyle/>
+          <a:p>
+            <a:pPr indent="0" marL="0">
+              <a:buNone/>
+            </a:pPr>
+            <a:r>
+              <a:rPr lang="en-US" sz="1400" dirty="0">
+                <a:solidFill>
+                  <a:srgbClr val="1A1A1A"/>
+                </a:solidFill>
+                <a:latin typeface="Calibri" pitchFamily="34" charset="0"/>
+                <a:ea typeface="Calibri" pitchFamily="34" charset="-122"/>
+                <a:cs typeface="Calibri" pitchFamily="34" charset="-120"/>
+              </a:rPr>
+              <a:t>Week 5 starts from it. Colab forgets everything else.</a:t>
+            </a:r>
+            <a:endParaRPr lang="en-US" sz="1400" dirty="0"/>
+          </a:p>
+        </p:txBody>
+      </p:sp>
+      <p:sp>
+        <p:nvSpPr>
+          <p:cNvPr id="7" name="Shape 5"/>
+          <p:cNvSpPr/>
+          <p:nvPr/>
+        </p:nvSpPr>
+        <p:spPr>
+          <a:xfrm>
+            <a:off x="640080" y="3383280"/>
+            <a:ext cx="10881360" cy="1097280"/>
+          </a:xfrm>
+          <a:prstGeom prst="roundRect">
+            <a:avLst>
+              <a:gd name="adj" fmla="val 8333"/>
+            </a:avLst>
+          </a:prstGeom>
+          <a:solidFill>
+            <a:srgbClr val="F4EEE8"/>
+          </a:solidFill>
+          <a:ln/>
+        </p:spPr>
+      </p:sp>
+      <p:sp>
+        <p:nvSpPr>
+          <p:cNvPr id="8" name="Text 6"/>
+          <p:cNvSpPr/>
+          <p:nvPr/>
+        </p:nvSpPr>
+        <p:spPr>
+          <a:xfrm>
+            <a:off x="1005840" y="3520440"/>
+            <a:ext cx="4206240" cy="822960"/>
+          </a:xfrm>
+          <a:prstGeom prst="rect">
+            <a:avLst/>
+          </a:prstGeom>
+          <a:noFill/>
+          <a:ln/>
+        </p:spPr>
+        <p:txBody>
+          <a:bodyPr wrap="square" lIns="0" tIns="0" rIns="0" bIns="0" rtlCol="0" anchor="ctr"/>
+          <a:lstStyle/>
+          <a:p>
+            <a:pPr indent="0" marL="0">
+              <a:buNone/>
+            </a:pPr>
+            <a:r>
+              <a:rPr lang="en-US" sz="1900" b="1" dirty="0">
+                <a:solidFill>
+                  <a:srgbClr val="2E5F8A"/>
+                </a:solidFill>
+                <a:latin typeface="Cambria" pitchFamily="34" charset="0"/>
+                <a:ea typeface="Cambria" pitchFamily="34" charset="-122"/>
+                <a:cs typeface="Cambria" pitchFamily="34" charset="-120"/>
+              </a:rPr>
+              <a:t>a repo with Pages switched on</a:t>
+            </a:r>
+            <a:endParaRPr lang="en-US" sz="1900" dirty="0"/>
+          </a:p>
+        </p:txBody>
+      </p:sp>
+      <p:sp>
+        <p:nvSpPr>
+          <p:cNvPr id="9" name="Text 7"/>
+          <p:cNvSpPr/>
+          <p:nvPr/>
+        </p:nvSpPr>
+        <p:spPr>
+          <a:xfrm>
+            <a:off x="5394960" y="3520440"/>
+            <a:ext cx="5760720" cy="822960"/>
+          </a:xfrm>
+          <a:prstGeom prst="rect">
+            <a:avLst/>
+          </a:prstGeom>
+          <a:noFill/>
+          <a:ln/>
+        </p:spPr>
+        <p:txBody>
+          <a:bodyPr wrap="square" lIns="0" tIns="0" rIns="0" bIns="0" rtlCol="0" anchor="ctr"/>
+          <a:lstStyle/>
+          <a:p>
+            <a:pPr indent="0" marL="0">
+              <a:buNone/>
+            </a:pPr>
+            <a:r>
+              <a:rPr lang="en-US" sz="1400" dirty="0">
+                <a:solidFill>
+                  <a:srgbClr val="1A1A1A"/>
+                </a:solidFill>
+                <a:latin typeface="Calibri" pitchFamily="34" charset="0"/>
+                <a:ea typeface="Calibri" pitchFamily="34" charset="-122"/>
+                <a:cs typeface="Calibri" pitchFamily="34" charset="-120"/>
+              </a:rPr>
+              <a:t>so a live URL exists today, not in Week 9 under deadline.</a:t>
+            </a:r>
+            <a:endParaRPr lang="en-US" sz="1400" dirty="0"/>
+          </a:p>
+        </p:txBody>
+      </p:sp>
+      <p:sp>
+        <p:nvSpPr>
+          <p:cNvPr id="10" name="Shape 8"/>
+          <p:cNvSpPr/>
+          <p:nvPr/>
+        </p:nvSpPr>
+        <p:spPr>
+          <a:xfrm>
+            <a:off x="640080" y="4663440"/>
+            <a:ext cx="10881360" cy="1097280"/>
+          </a:xfrm>
+          <a:prstGeom prst="roundRect">
+            <a:avLst>
+              <a:gd name="adj" fmla="val 8333"/>
+            </a:avLst>
+          </a:prstGeom>
+          <a:solidFill>
+            <a:srgbClr val="F4EEE8"/>
+          </a:solidFill>
+          <a:ln/>
+        </p:spPr>
+      </p:sp>
+      <p:sp>
+        <p:nvSpPr>
+          <p:cNvPr id="11" name="Text 9"/>
+          <p:cNvSpPr/>
+          <p:nvPr/>
+        </p:nvSpPr>
+        <p:spPr>
+          <a:xfrm>
+            <a:off x="1005840" y="4800600"/>
+            <a:ext cx="4206240" cy="822960"/>
+          </a:xfrm>
+          <a:prstGeom prst="rect">
+            <a:avLst/>
+          </a:prstGeom>
+          <a:noFill/>
+          <a:ln/>
+        </p:spPr>
+        <p:txBody>
+          <a:bodyPr wrap="square" lIns="0" tIns="0" rIns="0" bIns="0" rtlCol="0" anchor="ctr"/>
+          <a:lstStyle/>
+          <a:p>
+            <a:pPr indent="0" marL="0">
+              <a:buNone/>
+            </a:pPr>
+            <a:r>
+              <a:rPr lang="en-US" sz="1900" b="1" dirty="0">
+                <a:solidFill>
+                  <a:srgbClr val="7A3B2E"/>
+                </a:solidFill>
+                <a:latin typeface="Cambria" pitchFamily="34" charset="0"/>
+                <a:ea typeface="Cambria" pitchFamily="34" charset="-122"/>
+                <a:cs typeface="Cambria" pitchFamily="34" charset="-120"/>
+              </a:rPr>
+              <a:t>two minutes of pitch, to a partner</a:t>
+            </a:r>
+            <a:endParaRPr lang="en-US" sz="1900" dirty="0"/>
+          </a:p>
+        </p:txBody>
+      </p:sp>
+      <p:sp>
+        <p:nvSpPr>
+          <p:cNvPr id="12" name="Text 10"/>
+          <p:cNvSpPr/>
+          <p:nvPr/>
+        </p:nvSpPr>
+        <p:spPr>
+          <a:xfrm>
+            <a:off x="5394960" y="4800600"/>
+            <a:ext cx="5760720" cy="822960"/>
+          </a:xfrm>
+          <a:prstGeom prst="rect">
+            <a:avLst/>
+          </a:prstGeom>
+          <a:noFill/>
+          <a:ln/>
+        </p:spPr>
+        <p:txBody>
+          <a:bodyPr wrap="square" lIns="0" tIns="0" rIns="0" bIns="0" rtlCol="0" anchor="ctr"/>
+          <a:lstStyle/>
+          <a:p>
+            <a:pPr indent="0" marL="0">
+              <a:buNone/>
+            </a:pPr>
+            <a:r>
+              <a:rPr lang="en-US" sz="1400" dirty="0">
+                <a:solidFill>
+                  <a:srgbClr val="1A1A1A"/>
+                </a:solidFill>
+                <a:latin typeface="Calibri" pitchFamily="34" charset="0"/>
+                <a:ea typeface="Calibri" pitchFamily="34" charset="-122"/>
+                <a:cs typeface="Calibri" pitchFamily="34" charset="-120"/>
+              </a:rPr>
+              <a:t>corpus, two methods, what would count as a finding.</a:t>
+            </a:r>
+            <a:endParaRPr lang="en-US" sz="1400" dirty="0"/>
+          </a:p>
+        </p:txBody>
+      </p:sp>
+      <p:sp>
+        <p:nvSpPr>
+          <p:cNvPr id="13" name="Text 11"/>
+          <p:cNvSpPr/>
+          <p:nvPr/>
+        </p:nvSpPr>
+        <p:spPr>
+          <a:xfrm>
+            <a:off x="640080" y="6263640"/>
+            <a:ext cx="10881360" cy="365760"/>
+          </a:xfrm>
+          <a:prstGeom prst="rect">
+            <a:avLst/>
+          </a:prstGeom>
+          <a:noFill/>
+          <a:ln/>
+        </p:spPr>
+        <p:txBody>
+          <a:bodyPr wrap="square" rtlCol="0" anchor="ctr"/>
+          <a:lstStyle/>
+          <a:p>
+            <a:pPr indent="0" marL="0">
+              <a:buNone/>
+            </a:pPr>
+            <a:r>
+              <a:rPr lang="en-US" sz="1100" i="1" dirty="0">
+                <a:solidFill>
+                  <a:srgbClr val="6B6B63"/>
+                </a:solidFill>
+                <a:latin typeface="Calibri" pitchFamily="34" charset="0"/>
+                <a:ea typeface="Calibri" pitchFamily="34" charset="-122"/>
+                <a:cs typeface="Calibri" pitchFamily="34" charset="-120"/>
+              </a:rPr>
+              <a:t>A null result, honestly shown, is a complete project. The pivot kit is insurance, not a demotion.</a:t>
+            </a:r>
+            <a:endParaRPr lang="en-US" sz="1100" dirty="0"/>
+          </a:p>
+        </p:txBody>
+      </p:sp>
+    </p:spTree>
+  </p:cSld>
+  <p:clrMapOvr>
+    <a:masterClrMapping/>
+  </p:clrMapOvr>
+</p:sld>
+</file>
+
+<file path=ppt/slides/slide32.xml><?xml version="1.0" encoding="utf-8"?>
+<p:sld xmlns:a="http://schemas.openxmlformats.org/drawingml/2006/main" xmlns:r="http://schemas.openxmlformats.org/officeDocument/2006/relationships" xmlns:p="http://schemas.openxmlformats.org/presentationml/2006/main">
+  <p:cSld name="Slide 32">
+    <p:bg>
+      <p:bgPr>
+        <a:solidFill>
+          <a:srgbClr val="4E261D"/>
+        </a:solidFill>
+      </p:bgPr>
+    </p:bg>
+    <p:spTree>
+      <p:nvGrpSpPr>
+        <p:cNvPr id="1" name=""/>
+        <p:cNvGrpSpPr/>
+        <p:nvPr/>
+      </p:nvGrpSpPr>
+      <p:grpSpPr>
+        <a:xfrm>
+          <a:off x="0" y="0"/>
+          <a:ext cx="0" cy="0"/>
+          <a:chOff x="0" y="0"/>
+          <a:chExt cx="0" cy="0"/>
+        </a:xfrm>
+      </p:grpSpPr>
+      <p:sp>
+        <p:nvSpPr>
+          <p:cNvPr id="2" name="Text 0"/>
+          <p:cNvSpPr/>
+          <p:nvPr/>
+        </p:nvSpPr>
+        <p:spPr>
+          <a:xfrm>
+            <a:off x="640080" y="502920"/>
+            <a:ext cx="10515600" cy="320040"/>
+          </a:xfrm>
+          <a:prstGeom prst="rect">
+            <a:avLst/>
+          </a:prstGeom>
+          <a:noFill/>
+          <a:ln/>
+        </p:spPr>
+        <p:txBody>
+          <a:bodyPr wrap="square" rtlCol="0" anchor="ctr"/>
+          <a:lstStyle/>
+          <a:p>
+            <a:pPr indent="0" marL="0">
+              <a:buNone/>
+            </a:pPr>
+            <a:r>
+              <a:rPr lang="en-US" sz="1300" b="1" spc="300" kern="0" dirty="0">
+                <a:solidFill>
+                  <a:srgbClr val="B9852F"/>
+                </a:solidFill>
+                <a:latin typeface="Calibri" pitchFamily="34" charset="0"/>
+                <a:ea typeface="Calibri" pitchFamily="34" charset="-122"/>
+                <a:cs typeface="Calibri" pitchFamily="34" charset="-120"/>
+              </a:rPr>
+              <a:t>BEFORE WEEK 5</a:t>
+            </a:r>
+            <a:endParaRPr lang="en-US" sz="1300" dirty="0"/>
+          </a:p>
+        </p:txBody>
+      </p:sp>
+      <p:sp>
+        <p:nvSpPr>
+          <p:cNvPr id="3" name="Text 1"/>
+          <p:cNvSpPr/>
+          <p:nvPr/>
+        </p:nvSpPr>
+        <p:spPr>
+          <a:xfrm>
+            <a:off x="640080" y="914400"/>
+            <a:ext cx="10058400" cy="731520"/>
+          </a:xfrm>
+          <a:prstGeom prst="rect">
+            <a:avLst/>
+          </a:prstGeom>
+          <a:noFill/>
+          <a:ln/>
+        </p:spPr>
+        <p:txBody>
+          <a:bodyPr wrap="square" rtlCol="0" anchor="ctr"/>
+          <a:lstStyle/>
+          <a:p>
+            <a:pPr indent="0" marL="0">
+              <a:buNone/>
+            </a:pPr>
+            <a:r>
+              <a:rPr lang="en-US" sz="3400" b="1" dirty="0">
+                <a:solidFill>
+                  <a:srgbClr val="FFFFFF"/>
+                </a:solidFill>
+                <a:latin typeface="Cambria" pitchFamily="34" charset="0"/>
+                <a:ea typeface="Cambria" pitchFamily="34" charset="-122"/>
+                <a:cs typeface="Cambria" pitchFamily="34" charset="-120"/>
+              </a:rPr>
+              <a:t>Homework</a:t>
+            </a:r>
+            <a:endParaRPr lang="en-US" sz="3400" dirty="0"/>
+          </a:p>
+        </p:txBody>
+      </p:sp>
+      <p:sp>
+        <p:nvSpPr>
+          <p:cNvPr id="4" name="Shape 2"/>
+          <p:cNvSpPr/>
+          <p:nvPr/>
+        </p:nvSpPr>
+        <p:spPr>
+          <a:xfrm>
+            <a:off x="640080" y="2057400"/>
+            <a:ext cx="219456" cy="219456"/>
+          </a:xfrm>
+          <a:prstGeom prst="ellipse">
+            <a:avLst/>
+          </a:prstGeom>
+          <a:solidFill>
+            <a:srgbClr val="B9852F"/>
+          </a:solidFill>
+          <a:ln/>
+        </p:spPr>
+      </p:sp>
+      <p:sp>
+        <p:nvSpPr>
+          <p:cNvPr id="5" name="Text 3"/>
+          <p:cNvSpPr/>
+          <p:nvPr/>
+        </p:nvSpPr>
+        <p:spPr>
+          <a:xfrm>
+            <a:off x="1051560" y="1920240"/>
+            <a:ext cx="10058400" cy="365760"/>
+          </a:xfrm>
+          <a:prstGeom prst="rect">
+            <a:avLst/>
+          </a:prstGeom>
+          <a:noFill/>
+          <a:ln/>
+        </p:spPr>
+        <p:txBody>
+          <a:bodyPr wrap="square" lIns="0" tIns="0" rIns="0" bIns="0" rtlCol="0" anchor="ctr"/>
+          <a:lstStyle/>
+          <a:p>
+            <a:pPr indent="0" marL="0">
+              <a:buNone/>
+            </a:pPr>
+            <a:r>
+              <a:rPr lang="en-US" sz="1500" b="1" dirty="0">
+                <a:solidFill>
+                  <a:srgbClr val="B9852F"/>
+                </a:solidFill>
+                <a:latin typeface="Calibri" pitchFamily="34" charset="0"/>
+                <a:ea typeface="Calibri" pitchFamily="34" charset="-122"/>
+                <a:cs typeface="Calibri" pitchFamily="34" charset="-120"/>
+              </a:rPr>
+              <a:t>Data Biography</a:t>
+            </a:r>
+            <a:endParaRPr lang="en-US" sz="1500" dirty="0"/>
+          </a:p>
+        </p:txBody>
+      </p:sp>
+      <p:sp>
+        <p:nvSpPr>
+          <p:cNvPr id="6" name="Text 4"/>
+          <p:cNvSpPr/>
+          <p:nvPr/>
+        </p:nvSpPr>
+        <p:spPr>
+          <a:xfrm>
+            <a:off x="1051560" y="2286000"/>
+            <a:ext cx="9875520" cy="868680"/>
+          </a:xfrm>
+          <a:prstGeom prst="rect">
+            <a:avLst/>
+          </a:prstGeom>
+          <a:noFill/>
+          <a:ln/>
+        </p:spPr>
+        <p:txBody>
+          <a:bodyPr wrap="square" lIns="0" tIns="0" rIns="0" bIns="0" rtlCol="0" anchor="t"/>
+          <a:lstStyle/>
+          <a:p>
+            <a:pPr indent="0" marL="0">
+              <a:buNone/>
+            </a:pPr>
+            <a:r>
+              <a:rPr lang="en-US" sz="1400" dirty="0">
+                <a:solidFill>
+                  <a:srgbClr val="E8DCD6"/>
+                </a:solidFill>
+                <a:latin typeface="Calibri" pitchFamily="34" charset="0"/>
+                <a:ea typeface="Calibri" pitchFamily="34" charset="-122"/>
+                <a:cs typeface="Calibri" pitchFamily="34" charset="-120"/>
+              </a:rPr>
+              <a:t>~400 words: where it came from, who is in it, who is missing, what it cannot tell you.</a:t>
+            </a:r>
+            <a:endParaRPr lang="en-US" sz="1400" dirty="0"/>
+          </a:p>
+        </p:txBody>
+      </p:sp>
+      <p:sp>
+        <p:nvSpPr>
+          <p:cNvPr id="7" name="Shape 5"/>
+          <p:cNvSpPr/>
+          <p:nvPr/>
+        </p:nvSpPr>
+        <p:spPr>
+          <a:xfrm>
+            <a:off x="640080" y="3383280"/>
+            <a:ext cx="219456" cy="219456"/>
+          </a:xfrm>
+          <a:prstGeom prst="ellipse">
+            <a:avLst/>
+          </a:prstGeom>
+          <a:solidFill>
+            <a:srgbClr val="3F6F5F"/>
+          </a:solidFill>
+          <a:ln/>
+        </p:spPr>
+      </p:sp>
+      <p:sp>
+        <p:nvSpPr>
+          <p:cNvPr id="8" name="Text 6"/>
+          <p:cNvSpPr/>
+          <p:nvPr/>
+        </p:nvSpPr>
+        <p:spPr>
+          <a:xfrm>
+            <a:off x="1051560" y="3246120"/>
+            <a:ext cx="10058400" cy="365760"/>
+          </a:xfrm>
+          <a:prstGeom prst="rect">
+            <a:avLst/>
+          </a:prstGeom>
+          <a:noFill/>
+          <a:ln/>
+        </p:spPr>
+        <p:txBody>
+          <a:bodyPr wrap="square" lIns="0" tIns="0" rIns="0" bIns="0" rtlCol="0" anchor="ctr"/>
+          <a:lstStyle/>
+          <a:p>
+            <a:pPr indent="0" marL="0">
+              <a:buNone/>
+            </a:pPr>
+            <a:r>
+              <a:rPr lang="en-US" sz="1500" b="1" dirty="0">
+                <a:solidFill>
+                  <a:srgbClr val="3F6F5F"/>
+                </a:solidFill>
+                <a:latin typeface="Calibri" pitchFamily="34" charset="0"/>
+                <a:ea typeface="Calibri" pitchFamily="34" charset="-122"/>
+                <a:cs typeface="Calibri" pitchFamily="34" charset="-120"/>
+              </a:rPr>
+              <a:t>Collect it for real</a:t>
+            </a:r>
+            <a:endParaRPr lang="en-US" sz="1500" dirty="0"/>
+          </a:p>
+        </p:txBody>
+      </p:sp>
+      <p:sp>
+        <p:nvSpPr>
+          <p:cNvPr id="9" name="Text 7"/>
+          <p:cNvSpPr/>
+          <p:nvPr/>
+        </p:nvSpPr>
+        <p:spPr>
+          <a:xfrm>
+            <a:off x="1051560" y="3611880"/>
+            <a:ext cx="9875520" cy="868680"/>
+          </a:xfrm>
+          <a:prstGeom prst="rect">
+            <a:avLst/>
+          </a:prstGeom>
+          <a:noFill/>
+          <a:ln/>
+        </p:spPr>
+        <p:txBody>
+          <a:bodyPr wrap="square" lIns="0" tIns="0" rIns="0" bIns="0" rtlCol="0" anchor="t"/>
+          <a:lstStyle/>
+          <a:p>
+            <a:pPr indent="0" marL="0">
+              <a:buNone/>
+            </a:pPr>
+            <a:r>
+              <a:rPr lang="en-US" sz="1400" dirty="0">
+                <a:solidFill>
+                  <a:srgbClr val="E8DCD6"/>
+                </a:solidFill>
+                <a:latin typeface="Calibri" pitchFamily="34" charset="0"/>
+                <a:ea typeface="Calibri" pitchFamily="34" charset="-122"/>
+                <a:cs typeface="Calibri" pitchFamily="34" charset="-120"/>
+              </a:rPr>
+              <a:t>The cookbook notebook, and leave the file in Drive. Week 5 begins there.</a:t>
+            </a:r>
+            <a:endParaRPr lang="en-US" sz="1400" dirty="0"/>
+          </a:p>
+        </p:txBody>
+      </p:sp>
+      <p:sp>
+        <p:nvSpPr>
+          <p:cNvPr id="10" name="Shape 8"/>
+          <p:cNvSpPr/>
+          <p:nvPr/>
+        </p:nvSpPr>
+        <p:spPr>
+          <a:xfrm>
+            <a:off x="640080" y="4709160"/>
+            <a:ext cx="219456" cy="219456"/>
+          </a:xfrm>
+          <a:prstGeom prst="ellipse">
+            <a:avLst/>
+          </a:prstGeom>
+          <a:solidFill>
+            <a:srgbClr val="E8DCD6"/>
+          </a:solidFill>
+          <a:ln/>
+        </p:spPr>
+      </p:sp>
+      <p:sp>
+        <p:nvSpPr>
+          <p:cNvPr id="11" name="Text 9"/>
+          <p:cNvSpPr/>
+          <p:nvPr/>
+        </p:nvSpPr>
+        <p:spPr>
+          <a:xfrm>
+            <a:off x="1051560" y="4572000"/>
+            <a:ext cx="10058400" cy="365760"/>
+          </a:xfrm>
+          <a:prstGeom prst="rect">
+            <a:avLst/>
+          </a:prstGeom>
+          <a:noFill/>
+          <a:ln/>
+        </p:spPr>
+        <p:txBody>
+          <a:bodyPr wrap="square" lIns="0" tIns="0" rIns="0" bIns="0" rtlCol="0" anchor="ctr"/>
+          <a:lstStyle/>
+          <a:p>
+            <a:pPr indent="0" marL="0">
+              <a:buNone/>
+            </a:pPr>
+            <a:r>
+              <a:rPr lang="en-US" sz="1500" b="1" dirty="0">
+                <a:solidFill>
+                  <a:srgbClr val="E8DCD6"/>
+                </a:solidFill>
+                <a:latin typeface="Calibri" pitchFamily="34" charset="0"/>
+                <a:ea typeface="Calibri" pitchFamily="34" charset="-122"/>
+                <a:cs typeface="Calibri" pitchFamily="34" charset="-120"/>
+              </a:rPr>
+              <a:t>Play with the map</a:t>
+            </a:r>
+            <a:endParaRPr lang="en-US" sz="1500" dirty="0"/>
+          </a:p>
+        </p:txBody>
+      </p:sp>
+      <p:sp>
+        <p:nvSpPr>
+          <p:cNvPr id="12" name="Text 10"/>
+          <p:cNvSpPr/>
+          <p:nvPr/>
+        </p:nvSpPr>
+        <p:spPr>
+          <a:xfrm>
+            <a:off x="1051560" y="4937760"/>
+            <a:ext cx="9875520" cy="868680"/>
+          </a:xfrm>
+          <a:prstGeom prst="rect">
+            <a:avLst/>
+          </a:prstGeom>
+          <a:noFill/>
+          <a:ln/>
+        </p:spPr>
+        <p:txBody>
+          <a:bodyPr wrap="square" lIns="0" tIns="0" rIns="0" bIns="0" rtlCol="0" anchor="t"/>
+          <a:lstStyle/>
+          <a:p>
+            <a:pPr indent="0" marL="0">
+              <a:buNone/>
+            </a:pPr>
+            <a:r>
+              <a:rPr lang="en-US" sz="1400" dirty="0">
+                <a:solidFill>
+                  <a:srgbClr val="E8DCD6"/>
+                </a:solidFill>
+                <a:latin typeface="Calibri" pitchFamily="34" charset="0"/>
+                <a:ea typeface="Calibri" pitchFamily="34" charset="-122"/>
+                <a:cs typeface="Calibri" pitchFamily="34" charset="-120"/>
+              </a:rPr>
+              <a:t>Embedding Projector: a word from your corpus, one neighbour that makes sense and one that does not.</a:t>
+            </a:r>
+            <a:endParaRPr lang="en-US" sz="1400" dirty="0"/>
+          </a:p>
+        </p:txBody>
+      </p:sp>
+      <p:sp>
+        <p:nvSpPr>
+          <p:cNvPr id="13" name="Text 11"/>
+          <p:cNvSpPr/>
+          <p:nvPr/>
+        </p:nvSpPr>
+        <p:spPr>
+          <a:xfrm>
+            <a:off x="640080" y="6035040"/>
+            <a:ext cx="10881360" cy="457200"/>
+          </a:xfrm>
+          <a:prstGeom prst="rect">
+            <a:avLst/>
+          </a:prstGeom>
+          <a:noFill/>
+          <a:ln/>
+        </p:spPr>
+        <p:txBody>
+          <a:bodyPr wrap="square" rtlCol="0" anchor="ctr"/>
+          <a:lstStyle/>
+          <a:p>
+            <a:pPr indent="0" marL="0">
+              <a:buNone/>
+            </a:pPr>
+            <a:r>
+              <a:rPr lang="en-US" sz="1300" i="1" dirty="0">
+                <a:solidFill>
+                  <a:srgbClr val="B9852F"/>
+                </a:solidFill>
+                <a:latin typeface="Calibri" pitchFamily="34" charset="0"/>
+                <a:ea typeface="Calibri" pitchFamily="34" charset="-122"/>
+                <a:cs typeface="Calibri" pitchFamily="34" charset="-120"/>
+              </a:rPr>
+              <a:t>Next week: embeddings on YOUR corpus, all session. Bring the file.</a:t>
+            </a:r>
+            <a:endParaRPr lang="en-US" sz="1300" dirty="0"/>
           </a:p>
         </p:txBody>
       </p:sp>

--- a/slides/week-04-lecture-draft.pptx
+++ b/slides/week-04-lecture-draft.pptx
@@ -37,9 +37,10 @@
     <p:sldId id="285" r:id="rId31"/>
     <p:sldId id="286" r:id="rId32"/>
     <p:sldId id="287" r:id="rId33"/>
+    <p:sldId id="288" r:id="rId34"/>
   </p:sldIdLst>
   <p:notesMasterIdLst>
-    <p:notesMasterId r:id="rId34"/>
+    <p:notesMasterId r:id="rId35"/>
   </p:notesMasterIdLst>
   <p:sldSz cx="12191695" cy="6858000"/>
   <p:notesSz cx="6858000" cy="12191695"/>
@@ -2757,6 +2758,94 @@
             <a:fld id="{F7021451-1387-4CA6-816F-3879F97B5CBC}" type="slidenum">
               <a:rPr lang="en-US"/>
               <a:t>32</a:t>
+            </a:fld>
+            <a:endParaRPr lang="en-US"/>
+          </a:p>
+        </p:txBody>
+      </p:sp>
+    </p:spTree>
+    <p:extLst>
+      <p:ext uri="{BB962C8B-B14F-4D97-AF65-F5344CB8AC3E}">
+        <p14:creationId xmlns:p14="http://schemas.microsoft.com/office/powerpoint/2010/main" val="1024086991"/>
+      </p:ext>
+    </p:extLst>
+  </p:cSld>
+  <p:clrMapOvr>
+    <a:masterClrMapping/>
+  </p:clrMapOvr>
+</p:notes>
+</file>
+
+<file path=ppt/notesSlides/notesSlide33.xml><?xml version="1.0" encoding="utf-8"?>
+<p:notes xmlns:a="http://schemas.openxmlformats.org/drawingml/2006/main" xmlns:r="http://schemas.openxmlformats.org/officeDocument/2006/relationships" xmlns:p="http://schemas.openxmlformats.org/presentationml/2006/main">
+  <p:cSld>
+    <p:spTree>
+      <p:nvGrpSpPr>
+        <p:cNvPr id="1" name=""/>
+        <p:cNvGrpSpPr/>
+        <p:nvPr/>
+      </p:nvGrpSpPr>
+      <p:grpSpPr>
+        <a:xfrm>
+          <a:off x="0" y="0"/>
+          <a:ext cx="0" cy="0"/>
+          <a:chOff x="0" y="0"/>
+          <a:chExt cx="0" cy="0"/>
+        </a:xfrm>
+      </p:grpSpPr>
+      <p:sp>
+        <p:nvSpPr>
+          <p:cNvPr id="2" name="Slide Image Placeholder 1"/>
+          <p:cNvSpPr>
+            <a:spLocks noGrp="1" noRot="1" noChangeAspect="1"/>
+          </p:cNvSpPr>
+          <p:nvPr>
+            <p:ph type="sldImg"/>
+          </p:nvPr>
+        </p:nvSpPr>
+        <p:spPr/>
+      </p:sp>
+      <p:sp>
+        <p:nvSpPr>
+          <p:cNvPr id="3" name="Notes Placeholder 2"/>
+          <p:cNvSpPr>
+            <a:spLocks noGrp="1"/>
+          </p:cNvSpPr>
+          <p:nvPr>
+            <p:ph type="body" idx="1"/>
+          </p:nvPr>
+        </p:nvSpPr>
+        <p:spPr/>
+        <p:txBody>
+          <a:bodyPr/>
+          <a:lstStyle/>
+          <a:p>
+            <a:r>
+              <a:rPr lang="en-US" dirty="0"/>
+              <a:t/>
+            </a:r>
+            <a:endParaRPr lang="en-US" dirty="0"/>
+          </a:p>
+        </p:txBody>
+      </p:sp>
+      <p:sp>
+        <p:nvSpPr>
+          <p:cNvPr id="4" name="Slide Number Placeholder 3"/>
+          <p:cNvSpPr>
+            <a:spLocks noGrp="1"/>
+          </p:cNvSpPr>
+          <p:nvPr>
+            <p:ph type="sldNum" sz="quarter" idx="10"/>
+          </p:nvPr>
+        </p:nvSpPr>
+        <p:spPr/>
+        <p:txBody>
+          <a:bodyPr/>
+          <a:lstStyle/>
+          <a:p>
+            <a:fld id="{F7021451-1387-4CA6-816F-3879F97B5CBC}" type="slidenum">
+              <a:rPr lang="en-US"/>
+              <a:t>33</a:t>
             </a:fld>
             <a:endParaRPr lang="en-US"/>
           </a:p>
@@ -4526,13 +4615,13 @@
             <a:r>
               <a:rPr lang="en-US" sz="1300" b="1" spc="300" kern="0" dirty="0">
                 <a:solidFill>
-                  <a:srgbClr val="7A3B2E"/>
+                  <a:srgbClr val="B9852F"/>
                 </a:solidFill>
                 <a:latin typeface="Calibri" pitchFamily="34" charset="0"/>
                 <a:ea typeface="Calibri" pitchFamily="34" charset="-122"/>
                 <a:cs typeface="Calibri" pitchFamily="34" charset="-120"/>
               </a:rPr>
-              <a:t>IDEA TWO</a:t>
+              <a:t>THE IDEA UNDERNEATH ALL OF IT</a:t>
             </a:r>
             <a:endParaRPr lang="en-US" sz="1300" dirty="0"/>
           </a:p>
@@ -4571,7 +4660,7 @@
                 <a:ea typeface="Cambria" pitchFamily="34" charset="-122"/>
                 <a:cs typeface="Cambria" pitchFamily="34" charset="-120"/>
               </a:rPr>
-              <a:t>Same context, pull together. Different, push apart</a:t>
+              <a:t>“You shall know a word by the company it keeps”</a:t>
             </a:r>
             <a:endParaRPr lang="en-US" sz="3400" dirty="0"/>
           </a:p>
@@ -4579,7 +4668,7 @@
       </p:sp>
       <p:pic>
         <p:nvPicPr>
-          <p:cNvPr id="4" name="Image 0" descr="/tmp/figs/w4_contrastive_idea.png">    </p:cNvPr>
+          <p:cNvPr id="4" name="Image 0" descr="/tmp/figs/w4_distributional.png">    </p:cNvPr>
           <p:cNvPicPr>
             <a:picLocks noChangeAspect="1"/>
           </p:cNvPicPr>
@@ -4592,8 +4681,8 @@
         </p:blipFill>
         <p:spPr>
           <a:xfrm>
-            <a:off x="1737360" y="1737360"/>
-            <a:ext cx="8778240" cy="4023360"/>
+            <a:off x="914400" y="1874520"/>
+            <a:ext cx="10332720" cy="3566160"/>
           </a:xfrm>
           <a:prstGeom prst="rect">
             <a:avLst/>
@@ -4633,7 +4722,7 @@
                 <a:ea typeface="Cambria" pitchFamily="34" charset="-122"/>
                 <a:cs typeface="Cambria" pitchFamily="34" charset="-120"/>
               </a:rPr>
-              <a:t>For a word, a context is a few words of text. That is the whole rule. It is called contrastive learning, and most modern embeddings are trained this way.</a:t>
+              <a:t>Ask the room before you show the answer. Nobody needs a definition of the word; the contexts are enough.</a:t>
             </a:r>
             <a:endParaRPr lang="en-US" sz="1600" dirty="0"/>
           </a:p>
@@ -4672,7 +4761,7 @@
                 <a:ea typeface="Calibri" pitchFamily="34" charset="-122"/>
                 <a:cs typeface="Calibri" pitchFamily="34" charset="-120"/>
               </a:rPr>
-              <a:t>Underneath it, Week 3's four moves: multiply, add, squash, nudge. The difference is that the prediction is thrown away and the weights are what you keep. 849,738 pairs in one pass.</a:t>
+              <a:t>J. R. Firth, “A Synopsis of Linguistic Theory 1930–1955” (1957). The claim itself is the distributional hypothesis, Zellig Harris, “Distributional Structure” (1954): words used in similar contexts tend to mean similar things. Lines drawn live from this week's corpus.</a:t>
             </a:r>
             <a:endParaRPr lang="en-US" sz="1000" dirty="0"/>
           </a:p>
@@ -4737,13 +4826,13 @@
             <a:r>
               <a:rPr lang="en-US" sz="1300" b="1" spc="300" kern="0" dirty="0">
                 <a:solidFill>
-                  <a:srgbClr val="B9852F"/>
+                  <a:srgbClr val="7A3B2E"/>
                 </a:solidFill>
                 <a:latin typeface="Calibri" pitchFamily="34" charset="0"/>
                 <a:ea typeface="Calibri" pitchFamily="34" charset="-122"/>
                 <a:cs typeface="Calibri" pitchFamily="34" charset="-120"/>
               </a:rPr>
-              <a:t>THE SAME VECTORS, BEFORE AND AFTER</a:t>
+              <a:t>IDEA TWO</a:t>
             </a:r>
             <a:endParaRPr lang="en-US" sz="1300" dirty="0"/>
           </a:p>
@@ -4782,7 +4871,7 @@
                 <a:ea typeface="Cambria" pitchFamily="34" charset="-122"/>
                 <a:cs typeface="Cambria" pitchFamily="34" charset="-120"/>
               </a:rPr>
-              <a:t>Nobody labelled the blocks</a:t>
+              <a:t>Same context, pull together. Different, push apart</a:t>
             </a:r>
             <a:endParaRPr lang="en-US" sz="3400" dirty="0"/>
           </a:p>
@@ -4790,7 +4879,7 @@
       </p:sp>
       <p:pic>
         <p:nvPicPr>
-          <p:cNvPr id="4" name="Image 0" descr="/tmp/figs/w4_contrastive_result.png">    </p:cNvPr>
+          <p:cNvPr id="4" name="Image 0" descr="/tmp/figs/w4_contrastive_idea.png">    </p:cNvPr>
           <p:cNvPicPr>
             <a:picLocks noChangeAspect="1"/>
           </p:cNvPicPr>
@@ -4803,8 +4892,8 @@
         </p:blipFill>
         <p:spPr>
           <a:xfrm>
-            <a:off x="1371600" y="1737360"/>
-            <a:ext cx="9418320" cy="4023360"/>
+            <a:off x="1737360" y="1737360"/>
+            <a:ext cx="8778240" cy="4023360"/>
           </a:xfrm>
           <a:prstGeom prst="rect">
             <a:avLst/>
@@ -4844,9 +4933,48 @@
                 <a:ea typeface="Cambria" pitchFamily="34" charset="-122"/>
                 <a:cs typeface="Cambria" pitchFamily="34" charset="-120"/>
               </a:rPr>
-              <a:t>Twelve words, every pair compared. On the left they start as noise. On the right, times of day, family and rooms have found each other.</a:t>
+              <a:t>For a word, a context is a few words of text. That is the whole rule. It is called contrastive learning, and most modern embeddings are trained this way.</a:t>
             </a:r>
             <a:endParaRPr lang="en-US" sz="1600" dirty="0"/>
+          </a:p>
+        </p:txBody>
+      </p:sp>
+      <p:sp>
+        <p:nvSpPr>
+          <p:cNvPr id="6" name="Text 3"/>
+          <p:cNvSpPr/>
+          <p:nvPr/>
+        </p:nvSpPr>
+        <p:spPr>
+          <a:xfrm>
+            <a:off x="640080" y="6355080"/>
+            <a:ext cx="10881360" cy="320040"/>
+          </a:xfrm>
+          <a:prstGeom prst="rect">
+            <a:avLst/>
+          </a:prstGeom>
+          <a:noFill/>
+          <a:ln/>
+        </p:spPr>
+        <p:txBody>
+          <a:bodyPr wrap="square" rtlCol="0" anchor="ctr"/>
+          <a:lstStyle/>
+          <a:p>
+            <a:pPr indent="0" marL="0">
+              <a:buNone/>
+            </a:pPr>
+            <a:r>
+              <a:rPr lang="en-US" sz="1000" dirty="0">
+                <a:solidFill>
+                  <a:srgbClr val="6B6B63"/>
+                </a:solidFill>
+                <a:latin typeface="Calibri" pitchFamily="34" charset="0"/>
+                <a:ea typeface="Calibri" pitchFamily="34" charset="-122"/>
+                <a:cs typeface="Calibri" pitchFamily="34" charset="-120"/>
+              </a:rPr>
+              <a:t>Underneath it, Week 3's four moves: multiply, add, squash, nudge. The difference is that the prediction is thrown away and the weights are what you keep. 849,738 pairs in one pass.</a:t>
+            </a:r>
+            <a:endParaRPr lang="en-US" sz="1000" dirty="0"/>
           </a:p>
         </p:txBody>
       </p:sp>
@@ -4909,13 +5037,13 @@
             <a:r>
               <a:rPr lang="en-US" sz="1300" b="1" spc="300" kern="0" dirty="0">
                 <a:solidFill>
-                  <a:srgbClr val="3F6F5F"/>
+                  <a:srgbClr val="B9852F"/>
                 </a:solidFill>
                 <a:latin typeface="Calibri" pitchFamily="34" charset="0"/>
                 <a:ea typeface="Calibri" pitchFamily="34" charset="-122"/>
                 <a:cs typeface="Calibri" pitchFamily="34" charset="-120"/>
               </a:rPr>
-              <a:t>IT WORKS ON A SMALL CORPUS TOO</a:t>
+              <a:t>THE SAME VECTORS, BEFORE AND AFTER</a:t>
             </a:r>
             <a:endParaRPr lang="en-US" sz="1300" dirty="0"/>
           </a:p>
@@ -4954,7 +5082,7 @@
                 <a:ea typeface="Cambria" pitchFamily="34" charset="-122"/>
                 <a:cs typeface="Cambria" pitchFamily="34" charset="-120"/>
               </a:rPr>
-              <a:t>Trained on two novels, an hour ago</a:t>
+              <a:t>Nobody labelled the blocks</a:t>
             </a:r>
             <a:endParaRPr lang="en-US" sz="3400" dirty="0"/>
           </a:p>
@@ -4962,7 +5090,7 @@
       </p:sp>
       <p:pic>
         <p:nvPicPr>
-          <p:cNvPr id="4" name="Image 0" descr="/tmp/figs/w4_neighbours.png">    </p:cNvPr>
+          <p:cNvPr id="4" name="Image 0" descr="/tmp/figs/w4_contrastive_result.png">    </p:cNvPr>
           <p:cNvPicPr>
             <a:picLocks noChangeAspect="1"/>
           </p:cNvPicPr>
@@ -4975,8 +5103,8 @@
         </p:blipFill>
         <p:spPr>
           <a:xfrm>
-            <a:off x="1554480" y="1828800"/>
-            <a:ext cx="9052560" cy="3931920"/>
+            <a:off x="1371600" y="1737360"/>
+            <a:ext cx="9418320" cy="4023360"/>
           </a:xfrm>
           <a:prstGeom prst="rect">
             <a:avLst/>
@@ -5016,7 +5144,7 @@
                 <a:ea typeface="Cambria" pitchFamily="34" charset="-122"/>
                 <a:cs typeface="Cambria" pitchFamily="34" charset="-120"/>
               </a:rPr>
-              <a:t>225,355 words of Frankenstein and Dracula, and no labels anywhere. Nobody told it what a door is.</a:t>
+              <a:t>Twelve words, every pair compared. On the left they start as noise. On the right, times of day, family and rooms have found each other.</a:t>
             </a:r>
             <a:endParaRPr lang="en-US" sz="1600" dirty="0"/>
           </a:p>
@@ -5081,13 +5209,13 @@
             <a:r>
               <a:rPr lang="en-US" sz="1300" b="1" spc="300" kern="0" dirty="0">
                 <a:solidFill>
-                  <a:srgbClr val="2E5F8A"/>
+                  <a:srgbClr val="3F6F5F"/>
                 </a:solidFill>
                 <a:latin typeface="Calibri" pitchFamily="34" charset="0"/>
                 <a:ea typeface="Calibri" pitchFamily="34" charset="-122"/>
                 <a:cs typeface="Calibri" pitchFamily="34" charset="-120"/>
               </a:rPr>
-              <a:t>THE MAP</a:t>
+              <a:t>IT WORKS ON A SMALL CORPUS TOO</a:t>
             </a:r>
             <a:endParaRPr lang="en-US" sz="1300" dirty="0"/>
           </a:p>
@@ -5126,7 +5254,7 @@
                 <a:ea typeface="Cambria" pitchFamily="34" charset="-122"/>
                 <a:cs typeface="Cambria" pitchFamily="34" charset="-120"/>
               </a:rPr>
-              <a:t>Meaning becomes geometry</a:t>
+              <a:t>Trained on two novels, an hour ago</a:t>
             </a:r>
             <a:endParaRPr lang="en-US" sz="3400" dirty="0"/>
           </a:p>
@@ -5134,7 +5262,7 @@
       </p:sp>
       <p:pic>
         <p:nvPicPr>
-          <p:cNvPr id="4" name="Image 0" descr="/tmp/figs/w4_map.png">    </p:cNvPr>
+          <p:cNvPr id="4" name="Image 0" descr="/tmp/figs/w4_neighbours.png">    </p:cNvPr>
           <p:cNvPicPr>
             <a:picLocks noChangeAspect="1"/>
           </p:cNvPicPr>
@@ -5147,8 +5275,8 @@
         </p:blipFill>
         <p:spPr>
           <a:xfrm>
-            <a:off x="2011680" y="1737360"/>
-            <a:ext cx="8138160" cy="4114800"/>
+            <a:off x="1554480" y="1828800"/>
+            <a:ext cx="9052560" cy="3931920"/>
           </a:xfrm>
           <a:prstGeom prst="rect">
             <a:avLst/>
@@ -5188,48 +5316,9 @@
                 <a:ea typeface="Cambria" pitchFamily="34" charset="-122"/>
                 <a:cs typeface="Cambria" pitchFamily="34" charset="-120"/>
               </a:rPr>
-              <a:t>Family words on one side. Door, room and window on the other. Night and morning at the bottom. Nothing was labelled.</a:t>
+              <a:t>225,355 words of Frankenstein and Dracula, and no labels anywhere. Nobody told it what a door is.</a:t>
             </a:r>
             <a:endParaRPr lang="en-US" sz="1600" dirty="0"/>
-          </a:p>
-        </p:txBody>
-      </p:sp>
-      <p:sp>
-        <p:nvSpPr>
-          <p:cNvPr id="6" name="Text 3"/>
-          <p:cNvSpPr/>
-          <p:nvPr/>
-        </p:nvSpPr>
-        <p:spPr>
-          <a:xfrm>
-            <a:off x="640080" y="6355080"/>
-            <a:ext cx="10881360" cy="320040"/>
-          </a:xfrm>
-          <a:prstGeom prst="rect">
-            <a:avLst/>
-          </a:prstGeom>
-          <a:noFill/>
-          <a:ln/>
-        </p:spPr>
-        <p:txBody>
-          <a:bodyPr wrap="square" rtlCol="0" anchor="ctr"/>
-          <a:lstStyle/>
-          <a:p>
-            <a:pPr indent="0" marL="0">
-              <a:buNone/>
-            </a:pPr>
-            <a:r>
-              <a:rPr lang="en-US" sz="1000" dirty="0">
-                <a:solidFill>
-                  <a:srgbClr val="6B6B63"/>
-                </a:solidFill>
-                <a:latin typeface="Calibri" pitchFamily="34" charset="0"/>
-                <a:ea typeface="Calibri" pitchFamily="34" charset="-122"/>
-                <a:cs typeface="Calibri" pitchFamily="34" charset="-120"/>
-              </a:rPr>
-              <a:t>Two dimensions of sixty; the picture always loses something. Next: the Embedding Projector, live.</a:t>
-            </a:r>
-            <a:endParaRPr lang="en-US" sz="1000" dirty="0"/>
           </a:p>
         </p:txBody>
       </p:sp>
@@ -5292,13 +5381,13 @@
             <a:r>
               <a:rPr lang="en-US" sz="1300" b="1" spc="300" kern="0" dirty="0">
                 <a:solidFill>
-                  <a:srgbClr val="7A3B2E"/>
+                  <a:srgbClr val="2E5F8A"/>
                 </a:solidFill>
                 <a:latin typeface="Calibri" pitchFamily="34" charset="0"/>
                 <a:ea typeface="Calibri" pitchFamily="34" charset="-122"/>
                 <a:cs typeface="Calibri" pitchFamily="34" charset="-120"/>
               </a:rPr>
-              <a:t>THE SAME GEOMETRY, THE OTHER RESULT</a:t>
+              <a:t>THE MAP</a:t>
             </a:r>
             <a:endParaRPr lang="en-US" sz="1300" dirty="0"/>
           </a:p>
@@ -5337,7 +5426,7 @@
                 <a:ea typeface="Cambria" pitchFamily="34" charset="-122"/>
                 <a:cs typeface="Cambria" pitchFamily="34" charset="-120"/>
               </a:rPr>
-              <a:t>Occupations closest to each group's words</a:t>
+              <a:t>Meaning becomes geometry</a:t>
             </a:r>
             <a:endParaRPr lang="en-US" sz="3400" dirty="0"/>
           </a:p>
@@ -5345,7 +5434,7 @@
       </p:sp>
       <p:pic>
         <p:nvPicPr>
-          <p:cNvPr id="4" name="Image 0" descr="/tmp/figs/w4_paper_ethnic.png">    </p:cNvPr>
+          <p:cNvPr id="4" name="Image 0" descr="/tmp/figs/w4_map.png">    </p:cNvPr>
           <p:cNvPicPr>
             <a:picLocks noChangeAspect="1"/>
           </p:cNvPicPr>
@@ -5358,8 +5447,8 @@
         </p:blipFill>
         <p:spPr>
           <a:xfrm>
-            <a:off x="3566160" y="1691640"/>
-            <a:ext cx="5120640" cy="4114800"/>
+            <a:off x="2011680" y="1737360"/>
+            <a:ext cx="8138160" cy="4114800"/>
           </a:xfrm>
           <a:prstGeom prst="rect">
             <a:avLst/>
@@ -5399,7 +5488,7 @@
                 <a:ea typeface="Cambria" pitchFamily="34" charset="-122"/>
                 <a:cs typeface="Cambria" pitchFamily="34" charset="-120"/>
               </a:rPr>
-              <a:t>Nobody labelled any of this. It is what a century of printed English put near what.</a:t>
+              <a:t>Family words on one side. Door, room and window on the other. Night and morning at the bottom. Nothing was labelled.</a:t>
             </a:r>
             <a:endParaRPr lang="en-US" sz="1600" dirty="0"/>
           </a:p>
@@ -5438,7 +5527,7 @@
                 <a:ea typeface="Calibri" pitchFamily="34" charset="-122"/>
                 <a:cs typeface="Calibri" pitchFamily="34" charset="-120"/>
               </a:rPr>
-              <a:t>Fig. 1c, Garg, Schiebinger, Jurafsky &amp; Zou, PNAS 2018 (arXiv:1711.08412) · shown for teaching</a:t>
+              <a:t>Two dimensions of sixty; the picture always loses something. Next: the Embedding Projector, live.</a:t>
             </a:r>
             <a:endParaRPr lang="en-US" sz="1000" dirty="0"/>
           </a:p>
@@ -5503,13 +5592,13 @@
             <a:r>
               <a:rPr lang="en-US" sz="1300" b="1" spc="300" kern="0" dirty="0">
                 <a:solidFill>
-                  <a:srgbClr val="B9852F"/>
+                  <a:srgbClr val="7A3B2E"/>
                 </a:solidFill>
                 <a:latin typeface="Calibri" pitchFamily="34" charset="0"/>
                 <a:ea typeface="Calibri" pitchFamily="34" charset="-122"/>
                 <a:cs typeface="Calibri" pitchFamily="34" charset="-120"/>
               </a:rPr>
-              <a:t>THE FAMOUS TRICK</a:t>
+              <a:t>THE SAME GEOMETRY, THE OTHER RESULT</a:t>
             </a:r>
             <a:endParaRPr lang="en-US" sz="1300" dirty="0"/>
           </a:p>
@@ -5548,420 +5637,110 @@
                 <a:ea typeface="Cambria" pitchFamily="34" charset="-122"/>
                 <a:cs typeface="Cambria" pitchFamily="34" charset="-120"/>
               </a:rPr>
-              <a:t>king − man + woman ≈ queen</a:t>
+              <a:t>Occupations closest to each group's words</a:t>
             </a:r>
             <a:endParaRPr lang="en-US" sz="3400" dirty="0"/>
           </a:p>
         </p:txBody>
       </p:sp>
-      <p:sp>
-        <p:nvSpPr>
-          <p:cNvPr id="4" name="Shape 2"/>
-          <p:cNvSpPr/>
-          <p:nvPr/>
-        </p:nvSpPr>
-        <p:spPr>
-          <a:xfrm>
-            <a:off x="640080" y="1920240"/>
-            <a:ext cx="10881360" cy="1463040"/>
-          </a:xfrm>
-          <a:prstGeom prst="roundRect">
-            <a:avLst>
-              <a:gd name="adj" fmla="val 6250"/>
-            </a:avLst>
-          </a:prstGeom>
-          <a:solidFill>
-            <a:srgbClr val="F4EEE8"/>
-          </a:solidFill>
-          <a:ln/>
-        </p:spPr>
-      </p:sp>
-      <p:sp>
-        <p:nvSpPr>
-          <p:cNvPr id="5" name="Text 3"/>
-          <p:cNvSpPr/>
-          <p:nvPr/>
-        </p:nvSpPr>
-        <p:spPr>
-          <a:xfrm>
-            <a:off x="1005840" y="2148840"/>
-            <a:ext cx="10149840" cy="1005840"/>
-          </a:xfrm>
-          <a:prstGeom prst="rect">
-            <a:avLst/>
-          </a:prstGeom>
-          <a:noFill/>
-          <a:ln/>
-        </p:spPr>
-        <p:txBody>
-          <a:bodyPr wrap="square" lIns="0" tIns="0" rIns="0" bIns="0" rtlCol="0" anchor="ctr"/>
-          <a:lstStyle/>
-          <a:p>
-            <a:pPr indent="0" marL="0">
-              <a:buNone/>
-            </a:pPr>
-            <a:r>
-              <a:rPr lang="en-US" sz="1900" dirty="0">
-                <a:solidFill>
-                  <a:srgbClr val="7A3B2E"/>
-                </a:solidFill>
-                <a:latin typeface="Courier New" pitchFamily="34" charset="0"/>
-                <a:ea typeface="Courier New" pitchFamily="34" charset="-122"/>
-                <a:cs typeface="Courier New" pitchFamily="34" charset="-120"/>
-              </a:rPr>
-              <a:t>king − man + woman → queen        paris − france + japan → tokyo</a:t>
-            </a:r>
-            <a:endParaRPr lang="en-US" sz="1900" dirty="0"/>
-          </a:p>
-        </p:txBody>
-      </p:sp>
-      <p:sp>
-        <p:nvSpPr>
-          <p:cNvPr id="6" name="Text 4"/>
-          <p:cNvSpPr/>
-          <p:nvPr/>
-        </p:nvSpPr>
-        <p:spPr>
-          <a:xfrm>
-            <a:off x="640080" y="3657600"/>
-            <a:ext cx="5577840" cy="2194560"/>
-          </a:xfrm>
-          <a:prstGeom prst="rect">
-            <a:avLst/>
-          </a:prstGeom>
-          <a:noFill/>
-          <a:ln/>
-        </p:spPr>
-        <p:txBody>
-          <a:bodyPr wrap="square" rtlCol="0" anchor="t"/>
-          <a:lstStyle/>
-          <a:p>
-            <a:pPr marL="152400" indent="-152400">
-              <a:lnSpc>
-                <a:spcPct val="115000"/>
-              </a:lnSpc>
-              <a:spcAft>
-                <a:spcPts val="1000"/>
-              </a:spcAft>
-              <a:buSzPct val="100000"/>
-              <a:buChar char="•"/>
-            </a:pPr>
-            <a:r>
-              <a:rPr lang="en-US" sz="1600" dirty="0">
+      <p:pic>
+        <p:nvPicPr>
+          <p:cNvPr id="4" name="Image 0" descr="/tmp/figs/w4_paper_ethnic.png">    </p:cNvPr>
+          <p:cNvPicPr>
+            <a:picLocks noChangeAspect="1"/>
+          </p:cNvPicPr>
+          <p:nvPr/>
+        </p:nvPicPr>
+        <p:blipFill>
+          <a:blip r:embed="rId1"/>
+          <a:srcRect l="0" r="0" t="0" b="0"/>
+          <a:stretch/>
+        </p:blipFill>
+        <p:spPr>
+          <a:xfrm>
+            <a:off x="3566160" y="1691640"/>
+            <a:ext cx="5120640" cy="4114800"/>
+          </a:xfrm>
+          <a:prstGeom prst="rect">
+            <a:avLst/>
+          </a:prstGeom>
+        </p:spPr>
+      </p:pic>
+      <p:sp>
+        <p:nvSpPr>
+          <p:cNvPr id="5" name="Text 2"/>
+          <p:cNvSpPr/>
+          <p:nvPr/>
+        </p:nvSpPr>
+        <p:spPr>
+          <a:xfrm>
+            <a:off x="640080" y="5897880"/>
+            <a:ext cx="10881360" cy="411480"/>
+          </a:xfrm>
+          <a:prstGeom prst="rect">
+            <a:avLst/>
+          </a:prstGeom>
+          <a:noFill/>
+          <a:ln/>
+        </p:spPr>
+        <p:txBody>
+          <a:bodyPr wrap="square" rtlCol="0" anchor="ctr"/>
+          <a:lstStyle/>
+          <a:p>
+            <a:pPr indent="0" marL="0">
+              <a:buNone/>
+            </a:pPr>
+            <a:r>
+              <a:rPr lang="en-US" sz="1600" i="1" dirty="0">
                 <a:solidFill>
                   <a:srgbClr val="1A1A1A"/>
+                </a:solidFill>
+                <a:latin typeface="Cambria" pitchFamily="34" charset="0"/>
+                <a:ea typeface="Cambria" pitchFamily="34" charset="-122"/>
+                <a:cs typeface="Cambria" pitchFamily="34" charset="-120"/>
+              </a:rPr>
+              <a:t>Nobody labelled any of this. It is what a century of printed English put near what.</a:t>
+            </a:r>
+            <a:endParaRPr lang="en-US" sz="1600" dirty="0"/>
+          </a:p>
+        </p:txBody>
+      </p:sp>
+      <p:sp>
+        <p:nvSpPr>
+          <p:cNvPr id="6" name="Text 3"/>
+          <p:cNvSpPr/>
+          <p:nvPr/>
+        </p:nvSpPr>
+        <p:spPr>
+          <a:xfrm>
+            <a:off x="640080" y="6355080"/>
+            <a:ext cx="10881360" cy="320040"/>
+          </a:xfrm>
+          <a:prstGeom prst="rect">
+            <a:avLst/>
+          </a:prstGeom>
+          <a:noFill/>
+          <a:ln/>
+        </p:spPr>
+        <p:txBody>
+          <a:bodyPr wrap="square" rtlCol="0" anchor="ctr"/>
+          <a:lstStyle/>
+          <a:p>
+            <a:pPr indent="0" marL="0">
+              <a:buNone/>
+            </a:pPr>
+            <a:r>
+              <a:rPr lang="en-US" sz="1000" dirty="0">
+                <a:solidFill>
+                  <a:srgbClr val="6B6B63"/>
                 </a:solidFill>
                 <a:latin typeface="Calibri" pitchFamily="34" charset="0"/>
                 <a:ea typeface="Calibri" pitchFamily="34" charset="-122"/>
                 <a:cs typeface="Calibri" pitchFamily="34" charset="-120"/>
               </a:rPr>
-              <a:t>Directions carry relationships nobody labelled.</a:t>
-            </a:r>
-            <a:endParaRPr lang="en-US" sz="1600" dirty="0"/>
-          </a:p>
-          <a:p>
-            <a:pPr marL="152400" indent="-152400">
-              <a:lnSpc>
-                <a:spcPct val="115000"/>
-              </a:lnSpc>
-              <a:spcAft>
-                <a:spcPts val="1000"/>
-              </a:spcAft>
-              <a:buSzPct val="100000"/>
-              <a:buChar char="•"/>
-            </a:pPr>
-            <a:r>
-              <a:rPr lang="en-US" sz="1600" dirty="0">
-                <a:solidFill>
-                  <a:srgbClr val="1A1A1A"/>
-                </a:solidFill>
-                <a:latin typeface="Calibri" pitchFamily="34" charset="0"/>
-                <a:ea typeface="Calibri" pitchFamily="34" charset="-122"/>
-                <a:cs typeface="Calibri" pitchFamily="34" charset="-120"/>
-              </a:rPr>
-              <a:t>The arithmetic is nudged, and most analogies fail. The famous four are the ones that worked.</a:t>
-            </a:r>
-            <a:endParaRPr lang="en-US" sz="1600" dirty="0"/>
-          </a:p>
-          <a:p>
-            <a:pPr marL="152400" indent="-152400">
-              <a:lnSpc>
-                <a:spcPct val="115000"/>
-              </a:lnSpc>
-              <a:spcAft>
-                <a:spcPts val="1000"/>
-              </a:spcAft>
-              <a:buSzPct val="100000"/>
-              <a:buChar char="•"/>
-            </a:pPr>
-            <a:r>
-              <a:rPr lang="en-US" sz="1600" dirty="0">
-                <a:solidFill>
-                  <a:srgbClr val="1A1A1A"/>
-                </a:solidFill>
-                <a:latin typeface="Calibri" pitchFamily="34" charset="0"/>
-                <a:ea typeface="Calibri" pitchFamily="34" charset="-122"/>
-                <a:cs typeface="Calibri" pitchFamily="34" charset="-120"/>
-              </a:rPr>
-              <a:t>Same geometry, other result: doctor − man + woman → nurse.</a:t>
-            </a:r>
-            <a:endParaRPr lang="en-US" sz="1600" dirty="0"/>
-          </a:p>
-        </p:txBody>
-      </p:sp>
-      <p:sp>
-        <p:nvSpPr>
-          <p:cNvPr id="7" name="Shape 5"/>
-          <p:cNvSpPr/>
-          <p:nvPr/>
-        </p:nvSpPr>
-        <p:spPr>
-          <a:xfrm>
-            <a:off x="6492240" y="3657600"/>
-            <a:ext cx="5029200" cy="2194560"/>
-          </a:xfrm>
-          <a:prstGeom prst="roundRect">
-            <a:avLst>
-              <a:gd name="adj" fmla="val 4167"/>
-            </a:avLst>
-          </a:prstGeom>
-          <a:solidFill>
-            <a:srgbClr val="F4EEE8"/>
-          </a:solidFill>
-          <a:ln/>
-        </p:spPr>
-      </p:sp>
-      <p:sp>
-        <p:nvSpPr>
-          <p:cNvPr id="8" name="Text 6"/>
-          <p:cNvSpPr/>
-          <p:nvPr/>
-        </p:nvSpPr>
-        <p:spPr>
-          <a:xfrm>
-            <a:off x="6766560" y="3840480"/>
-            <a:ext cx="2011680" cy="457200"/>
-          </a:xfrm>
-          <a:prstGeom prst="rect">
-            <a:avLst/>
-          </a:prstGeom>
-          <a:noFill/>
-          <a:ln/>
-        </p:spPr>
-        <p:txBody>
-          <a:bodyPr wrap="square" lIns="0" tIns="0" rIns="0" bIns="0" rtlCol="0" anchor="ctr"/>
-          <a:lstStyle/>
-          <a:p>
-            <a:pPr indent="0" marL="0">
-              <a:buNone/>
-            </a:pPr>
-            <a:r>
-              <a:rPr lang="en-US" sz="1600" b="1" dirty="0">
-                <a:solidFill>
-                  <a:srgbClr val="7A3B2E"/>
-                </a:solidFill>
-                <a:latin typeface="Cambria" pitchFamily="34" charset="0"/>
-                <a:ea typeface="Cambria" pitchFamily="34" charset="-122"/>
-                <a:cs typeface="Cambria" pitchFamily="34" charset="-120"/>
-              </a:rPr>
-              <a:t>static</a:t>
-            </a:r>
-            <a:endParaRPr lang="en-US" sz="1600" dirty="0"/>
-          </a:p>
-        </p:txBody>
-      </p:sp>
-      <p:sp>
-        <p:nvSpPr>
-          <p:cNvPr id="9" name="Text 7"/>
-          <p:cNvSpPr/>
-          <p:nvPr/>
-        </p:nvSpPr>
-        <p:spPr>
-          <a:xfrm>
-            <a:off x="8686800" y="3840480"/>
-            <a:ext cx="2651760" cy="457200"/>
-          </a:xfrm>
-          <a:prstGeom prst="rect">
-            <a:avLst/>
-          </a:prstGeom>
-          <a:noFill/>
-          <a:ln/>
-        </p:spPr>
-        <p:txBody>
-          <a:bodyPr wrap="square" lIns="0" tIns="0" rIns="0" bIns="0" rtlCol="0" anchor="ctr"/>
-          <a:lstStyle/>
-          <a:p>
-            <a:pPr indent="0" marL="0">
-              <a:buNone/>
-            </a:pPr>
-            <a:r>
-              <a:rPr lang="en-US" sz="1350" dirty="0">
-                <a:solidFill>
-                  <a:srgbClr val="1A1A1A"/>
-                </a:solidFill>
-                <a:latin typeface="Calibri" pitchFamily="34" charset="0"/>
-                <a:ea typeface="Calibri" pitchFamily="34" charset="-122"/>
-                <a:cs typeface="Calibri" pitchFamily="34" charset="-120"/>
-              </a:rPr>
-              <a:t>one vector per word</a:t>
-            </a:r>
-            <a:endParaRPr lang="en-US" sz="1350" dirty="0"/>
-          </a:p>
-        </p:txBody>
-      </p:sp>
-      <p:sp>
-        <p:nvSpPr>
-          <p:cNvPr id="10" name="Text 8"/>
-          <p:cNvSpPr/>
-          <p:nvPr/>
-        </p:nvSpPr>
-        <p:spPr>
-          <a:xfrm>
-            <a:off x="6766560" y="4498848"/>
-            <a:ext cx="2011680" cy="457200"/>
-          </a:xfrm>
-          <a:prstGeom prst="rect">
-            <a:avLst/>
-          </a:prstGeom>
-          <a:noFill/>
-          <a:ln/>
-        </p:spPr>
-        <p:txBody>
-          <a:bodyPr wrap="square" lIns="0" tIns="0" rIns="0" bIns="0" rtlCol="0" anchor="ctr"/>
-          <a:lstStyle/>
-          <a:p>
-            <a:pPr indent="0" marL="0">
-              <a:buNone/>
-            </a:pPr>
-            <a:r>
-              <a:rPr lang="en-US" sz="1600" b="1" dirty="0">
-                <a:solidFill>
-                  <a:srgbClr val="2E5F8A"/>
-                </a:solidFill>
-                <a:latin typeface="Cambria" pitchFamily="34" charset="0"/>
-                <a:ea typeface="Cambria" pitchFamily="34" charset="-122"/>
-                <a:cs typeface="Cambria" pitchFamily="34" charset="-120"/>
-              </a:rPr>
-              <a:t>contextual</a:t>
-            </a:r>
-            <a:endParaRPr lang="en-US" sz="1600" dirty="0"/>
-          </a:p>
-        </p:txBody>
-      </p:sp>
-      <p:sp>
-        <p:nvSpPr>
-          <p:cNvPr id="11" name="Text 9"/>
-          <p:cNvSpPr/>
-          <p:nvPr/>
-        </p:nvSpPr>
-        <p:spPr>
-          <a:xfrm>
-            <a:off x="8686800" y="4498848"/>
-            <a:ext cx="2651760" cy="457200"/>
-          </a:xfrm>
-          <a:prstGeom prst="rect">
-            <a:avLst/>
-          </a:prstGeom>
-          <a:noFill/>
-          <a:ln/>
-        </p:spPr>
-        <p:txBody>
-          <a:bodyPr wrap="square" lIns="0" tIns="0" rIns="0" bIns="0" rtlCol="0" anchor="ctr"/>
-          <a:lstStyle/>
-          <a:p>
-            <a:pPr indent="0" marL="0">
-              <a:buNone/>
-            </a:pPr>
-            <a:r>
-              <a:rPr lang="en-US" sz="1350" dirty="0">
-                <a:solidFill>
-                  <a:srgbClr val="1A1A1A"/>
-                </a:solidFill>
-                <a:latin typeface="Calibri" pitchFamily="34" charset="0"/>
-                <a:ea typeface="Calibri" pitchFamily="34" charset="-122"/>
-                <a:cs typeface="Calibri" pitchFamily="34" charset="-120"/>
-              </a:rPr>
-              <a:t>one per occurrence</a:t>
-            </a:r>
-            <a:endParaRPr lang="en-US" sz="1350" dirty="0"/>
-          </a:p>
-        </p:txBody>
-      </p:sp>
-      <p:sp>
-        <p:nvSpPr>
-          <p:cNvPr id="12" name="Text 10"/>
-          <p:cNvSpPr/>
-          <p:nvPr/>
-        </p:nvSpPr>
-        <p:spPr>
-          <a:xfrm>
-            <a:off x="6766560" y="5157216"/>
-            <a:ext cx="2011680" cy="457200"/>
-          </a:xfrm>
-          <a:prstGeom prst="rect">
-            <a:avLst/>
-          </a:prstGeom>
-          <a:noFill/>
-          <a:ln/>
-        </p:spPr>
-        <p:txBody>
-          <a:bodyPr wrap="square" lIns="0" tIns="0" rIns="0" bIns="0" rtlCol="0" anchor="ctr"/>
-          <a:lstStyle/>
-          <a:p>
-            <a:pPr indent="0" marL="0">
-              <a:buNone/>
-            </a:pPr>
-            <a:r>
-              <a:rPr lang="en-US" sz="1600" b="1" dirty="0">
-                <a:solidFill>
-                  <a:srgbClr val="3F6F5F"/>
-                </a:solidFill>
-                <a:latin typeface="Cambria" pitchFamily="34" charset="0"/>
-                <a:ea typeface="Cambria" pitchFamily="34" charset="-122"/>
-                <a:cs typeface="Cambria" pitchFamily="34" charset="-120"/>
-              </a:rPr>
-              <a:t>sentence</a:t>
-            </a:r>
-            <a:endParaRPr lang="en-US" sz="1600" dirty="0"/>
-          </a:p>
-        </p:txBody>
-      </p:sp>
-      <p:sp>
-        <p:nvSpPr>
-          <p:cNvPr id="13" name="Text 11"/>
-          <p:cNvSpPr/>
-          <p:nvPr/>
-        </p:nvSpPr>
-        <p:spPr>
-          <a:xfrm>
-            <a:off x="8686800" y="5157216"/>
-            <a:ext cx="2651760" cy="457200"/>
-          </a:xfrm>
-          <a:prstGeom prst="rect">
-            <a:avLst/>
-          </a:prstGeom>
-          <a:noFill/>
-          <a:ln/>
-        </p:spPr>
-        <p:txBody>
-          <a:bodyPr wrap="square" lIns="0" tIns="0" rIns="0" bIns="0" rtlCol="0" anchor="ctr"/>
-          <a:lstStyle/>
-          <a:p>
-            <a:pPr indent="0" marL="0">
-              <a:buNone/>
-            </a:pPr>
-            <a:r>
-              <a:rPr lang="en-US" sz="1350" dirty="0">
-                <a:solidFill>
-                  <a:srgbClr val="1A1A1A"/>
-                </a:solidFill>
-                <a:latin typeface="Calibri" pitchFamily="34" charset="0"/>
-                <a:ea typeface="Calibri" pitchFamily="34" charset="-122"/>
-                <a:cs typeface="Calibri" pitchFamily="34" charset="-120"/>
-              </a:rPr>
-              <a:t>one per document — Week 5</a:t>
-            </a:r>
-            <a:endParaRPr lang="en-US" sz="1350" dirty="0"/>
+              <a:t>Fig. 1c, Garg, Schiebinger, Jurafsky &amp; Zou, PNAS 2018 (arXiv:1711.08412) · shown for teaching</a:t>
+            </a:r>
+            <a:endParaRPr lang="en-US" sz="1000" dirty="0"/>
           </a:p>
         </p:txBody>
       </p:sp>
@@ -6024,13 +5803,13 @@
             <a:r>
               <a:rPr lang="en-US" sz="1300" b="1" spc="300" kern="0" dirty="0">
                 <a:solidFill>
-                  <a:srgbClr val="2E5F8A"/>
+                  <a:srgbClr val="B9852F"/>
                 </a:solidFill>
                 <a:latin typeface="Calibri" pitchFamily="34" charset="0"/>
                 <a:ea typeface="Calibri" pitchFamily="34" charset="-122"/>
                 <a:cs typeface="Calibri" pitchFamily="34" charset="-120"/>
               </a:rPr>
-              <a:t>THE SAME TRICK, ON PIXELS</a:t>
+              <a:t>THE FAMOUS TRICK</a:t>
             </a:r>
             <a:endParaRPr lang="en-US" sz="1300" dirty="0"/>
           </a:p>
@@ -6069,69 +5848,223 @@
                 <a:ea typeface="Cambria" pitchFamily="34" charset="-122"/>
                 <a:cs typeface="Cambria" pitchFamily="34" charset="-120"/>
               </a:rPr>
-              <a:t>A convolution, all of it</a:t>
+              <a:t>king − man + woman ≈ queen</a:t>
             </a:r>
             <a:endParaRPr lang="en-US" sz="3400" dirty="0"/>
           </a:p>
         </p:txBody>
       </p:sp>
-      <p:pic>
-        <p:nvPicPr>
-          <p:cNvPr id="4" name="Image 0" descr="/tmp/figs/w4_conv_arith.png">    </p:cNvPr>
-          <p:cNvPicPr>
-            <a:picLocks noChangeAspect="1"/>
-          </p:cNvPicPr>
-          <p:nvPr/>
-        </p:nvPicPr>
-        <p:blipFill>
-          <a:blip r:embed="rId1"/>
-          <a:srcRect l="0" r="0" t="0" b="0"/>
-          <a:stretch/>
-        </p:blipFill>
-        <p:spPr>
-          <a:xfrm>
-            <a:off x="548640" y="1965960"/>
-            <a:ext cx="11064240" cy="3291840"/>
-          </a:xfrm>
-          <a:prstGeom prst="rect">
-            <a:avLst/>
-          </a:prstGeom>
-        </p:spPr>
-      </p:pic>
-      <p:sp>
-        <p:nvSpPr>
-          <p:cNvPr id="5" name="Text 2"/>
-          <p:cNvSpPr/>
-          <p:nvPr/>
-        </p:nvSpPr>
-        <p:spPr>
-          <a:xfrm>
-            <a:off x="640080" y="5897880"/>
-            <a:ext cx="10881360" cy="411480"/>
-          </a:xfrm>
-          <a:prstGeom prst="rect">
-            <a:avLst/>
-          </a:prstGeom>
-          <a:noFill/>
-          <a:ln/>
-        </p:spPr>
-        <p:txBody>
-          <a:bodyPr wrap="square" rtlCol="0" anchor="ctr"/>
-          <a:lstStyle/>
-          <a:p>
-            <a:pPr indent="0" marL="0">
-              <a:buNone/>
-            </a:pPr>
-            <a:r>
-              <a:rPr lang="en-US" sz="1600" i="1" dirty="0">
+      <p:sp>
+        <p:nvSpPr>
+          <p:cNvPr id="4" name="Shape 2"/>
+          <p:cNvSpPr/>
+          <p:nvPr/>
+        </p:nvSpPr>
+        <p:spPr>
+          <a:xfrm>
+            <a:off x="640080" y="1920240"/>
+            <a:ext cx="10881360" cy="1463040"/>
+          </a:xfrm>
+          <a:prstGeom prst="roundRect">
+            <a:avLst>
+              <a:gd name="adj" fmla="val 6250"/>
+            </a:avLst>
+          </a:prstGeom>
+          <a:solidFill>
+            <a:srgbClr val="F4EEE8"/>
+          </a:solidFill>
+          <a:ln/>
+        </p:spPr>
+      </p:sp>
+      <p:sp>
+        <p:nvSpPr>
+          <p:cNvPr id="5" name="Text 3"/>
+          <p:cNvSpPr/>
+          <p:nvPr/>
+        </p:nvSpPr>
+        <p:spPr>
+          <a:xfrm>
+            <a:off x="1005840" y="2148840"/>
+            <a:ext cx="10149840" cy="1005840"/>
+          </a:xfrm>
+          <a:prstGeom prst="rect">
+            <a:avLst/>
+          </a:prstGeom>
+          <a:noFill/>
+          <a:ln/>
+        </p:spPr>
+        <p:txBody>
+          <a:bodyPr wrap="square" lIns="0" tIns="0" rIns="0" bIns="0" rtlCol="0" anchor="ctr"/>
+          <a:lstStyle/>
+          <a:p>
+            <a:pPr indent="0" marL="0">
+              <a:buNone/>
+            </a:pPr>
+            <a:r>
+              <a:rPr lang="en-US" sz="1900" dirty="0">
+                <a:solidFill>
+                  <a:srgbClr val="7A3B2E"/>
+                </a:solidFill>
+                <a:latin typeface="Courier New" pitchFamily="34" charset="0"/>
+                <a:ea typeface="Courier New" pitchFamily="34" charset="-122"/>
+                <a:cs typeface="Courier New" pitchFamily="34" charset="-120"/>
+              </a:rPr>
+              <a:t>king − man + woman → queen        paris − france + japan → tokyo</a:t>
+            </a:r>
+            <a:endParaRPr lang="en-US" sz="1900" dirty="0"/>
+          </a:p>
+        </p:txBody>
+      </p:sp>
+      <p:sp>
+        <p:nvSpPr>
+          <p:cNvPr id="6" name="Text 4"/>
+          <p:cNvSpPr/>
+          <p:nvPr/>
+        </p:nvSpPr>
+        <p:spPr>
+          <a:xfrm>
+            <a:off x="640080" y="3657600"/>
+            <a:ext cx="5577840" cy="2194560"/>
+          </a:xfrm>
+          <a:prstGeom prst="rect">
+            <a:avLst/>
+          </a:prstGeom>
+          <a:noFill/>
+          <a:ln/>
+        </p:spPr>
+        <p:txBody>
+          <a:bodyPr wrap="square" rtlCol="0" anchor="t"/>
+          <a:lstStyle/>
+          <a:p>
+            <a:pPr marL="152400" indent="-152400">
+              <a:lnSpc>
+                <a:spcPct val="115000"/>
+              </a:lnSpc>
+              <a:spcAft>
+                <a:spcPts val="1000"/>
+              </a:spcAft>
+              <a:buSzPct val="100000"/>
+              <a:buChar char="•"/>
+            </a:pPr>
+            <a:r>
+              <a:rPr lang="en-US" sz="1600" dirty="0">
                 <a:solidFill>
                   <a:srgbClr val="1A1A1A"/>
+                </a:solidFill>
+                <a:latin typeface="Calibri" pitchFamily="34" charset="0"/>
+                <a:ea typeface="Calibri" pitchFamily="34" charset="-122"/>
+                <a:cs typeface="Calibri" pitchFamily="34" charset="-120"/>
+              </a:rPr>
+              <a:t>Directions carry relationships nobody labelled.</a:t>
+            </a:r>
+            <a:endParaRPr lang="en-US" sz="1600" dirty="0"/>
+          </a:p>
+          <a:p>
+            <a:pPr marL="152400" indent="-152400">
+              <a:lnSpc>
+                <a:spcPct val="115000"/>
+              </a:lnSpc>
+              <a:spcAft>
+                <a:spcPts val="1000"/>
+              </a:spcAft>
+              <a:buSzPct val="100000"/>
+              <a:buChar char="•"/>
+            </a:pPr>
+            <a:r>
+              <a:rPr lang="en-US" sz="1600" dirty="0">
+                <a:solidFill>
+                  <a:srgbClr val="1A1A1A"/>
+                </a:solidFill>
+                <a:latin typeface="Calibri" pitchFamily="34" charset="0"/>
+                <a:ea typeface="Calibri" pitchFamily="34" charset="-122"/>
+                <a:cs typeface="Calibri" pitchFamily="34" charset="-120"/>
+              </a:rPr>
+              <a:t>The arithmetic is nudged, and most analogies fail. The famous four are the ones that worked.</a:t>
+            </a:r>
+            <a:endParaRPr lang="en-US" sz="1600" dirty="0"/>
+          </a:p>
+          <a:p>
+            <a:pPr marL="152400" indent="-152400">
+              <a:lnSpc>
+                <a:spcPct val="115000"/>
+              </a:lnSpc>
+              <a:spcAft>
+                <a:spcPts val="1000"/>
+              </a:spcAft>
+              <a:buSzPct val="100000"/>
+              <a:buChar char="•"/>
+            </a:pPr>
+            <a:r>
+              <a:rPr lang="en-US" sz="1600" dirty="0">
+                <a:solidFill>
+                  <a:srgbClr val="1A1A1A"/>
+                </a:solidFill>
+                <a:latin typeface="Calibri" pitchFamily="34" charset="0"/>
+                <a:ea typeface="Calibri" pitchFamily="34" charset="-122"/>
+                <a:cs typeface="Calibri" pitchFamily="34" charset="-120"/>
+              </a:rPr>
+              <a:t>Same geometry, other result: doctor − man + woman → nurse.</a:t>
+            </a:r>
+            <a:endParaRPr lang="en-US" sz="1600" dirty="0"/>
+          </a:p>
+        </p:txBody>
+      </p:sp>
+      <p:sp>
+        <p:nvSpPr>
+          <p:cNvPr id="7" name="Shape 5"/>
+          <p:cNvSpPr/>
+          <p:nvPr/>
+        </p:nvSpPr>
+        <p:spPr>
+          <a:xfrm>
+            <a:off x="6492240" y="3657600"/>
+            <a:ext cx="5029200" cy="2194560"/>
+          </a:xfrm>
+          <a:prstGeom prst="roundRect">
+            <a:avLst>
+              <a:gd name="adj" fmla="val 4167"/>
+            </a:avLst>
+          </a:prstGeom>
+          <a:solidFill>
+            <a:srgbClr val="F4EEE8"/>
+          </a:solidFill>
+          <a:ln/>
+        </p:spPr>
+      </p:sp>
+      <p:sp>
+        <p:nvSpPr>
+          <p:cNvPr id="8" name="Text 6"/>
+          <p:cNvSpPr/>
+          <p:nvPr/>
+        </p:nvSpPr>
+        <p:spPr>
+          <a:xfrm>
+            <a:off x="6766560" y="3840480"/>
+            <a:ext cx="2011680" cy="457200"/>
+          </a:xfrm>
+          <a:prstGeom prst="rect">
+            <a:avLst/>
+          </a:prstGeom>
+          <a:noFill/>
+          <a:ln/>
+        </p:spPr>
+        <p:txBody>
+          <a:bodyPr wrap="square" lIns="0" tIns="0" rIns="0" bIns="0" rtlCol="0" anchor="ctr"/>
+          <a:lstStyle/>
+          <a:p>
+            <a:pPr indent="0" marL="0">
+              <a:buNone/>
+            </a:pPr>
+            <a:r>
+              <a:rPr lang="en-US" sz="1600" b="1" dirty="0">
+                <a:solidFill>
+                  <a:srgbClr val="7A3B2E"/>
                 </a:solidFill>
                 <a:latin typeface="Cambria" pitchFamily="34" charset="0"/>
                 <a:ea typeface="Cambria" pitchFamily="34" charset="-122"/>
                 <a:cs typeface="Cambria" pitchFamily="34" charset="-120"/>
               </a:rPr>
-              <a:t>A picture is a grid of numbers. Take nine of them, multiply by nine other numbers, add them up: -162. Move one pixel across and repeat.</a:t>
+              <a:t>static</a:t>
             </a:r>
             <a:endParaRPr lang="en-US" sz="1600" dirty="0"/>
           </a:p>
@@ -6139,40 +6072,196 @@
       </p:sp>
       <p:sp>
         <p:nvSpPr>
-          <p:cNvPr id="6" name="Text 3"/>
-          <p:cNvSpPr/>
-          <p:nvPr/>
-        </p:nvSpPr>
-        <p:spPr>
-          <a:xfrm>
-            <a:off x="640080" y="6355080"/>
-            <a:ext cx="10881360" cy="320040"/>
-          </a:xfrm>
-          <a:prstGeom prst="rect">
-            <a:avLst/>
-          </a:prstGeom>
-          <a:noFill/>
-          <a:ln/>
-        </p:spPr>
-        <p:txBody>
-          <a:bodyPr wrap="square" rtlCol="0" anchor="ctr"/>
-          <a:lstStyle/>
-          <a:p>
-            <a:pPr indent="0" marL="0">
-              <a:buNone/>
-            </a:pPr>
-            <a:r>
-              <a:rPr lang="en-US" sz="1000" dirty="0">
-                <a:solidFill>
-                  <a:srgbClr val="6B6B63"/>
+          <p:cNvPr id="9" name="Text 7"/>
+          <p:cNvSpPr/>
+          <p:nvPr/>
+        </p:nvSpPr>
+        <p:spPr>
+          <a:xfrm>
+            <a:off x="8686800" y="3840480"/>
+            <a:ext cx="2651760" cy="457200"/>
+          </a:xfrm>
+          <a:prstGeom prst="rect">
+            <a:avLst/>
+          </a:prstGeom>
+          <a:noFill/>
+          <a:ln/>
+        </p:spPr>
+        <p:txBody>
+          <a:bodyPr wrap="square" lIns="0" tIns="0" rIns="0" bIns="0" rtlCol="0" anchor="ctr"/>
+          <a:lstStyle/>
+          <a:p>
+            <a:pPr indent="0" marL="0">
+              <a:buNone/>
+            </a:pPr>
+            <a:r>
+              <a:rPr lang="en-US" sz="1350" dirty="0">
+                <a:solidFill>
+                  <a:srgbClr val="1A1A1A"/>
                 </a:solidFill>
                 <a:latin typeface="Calibri" pitchFamily="34" charset="0"/>
                 <a:ea typeface="Calibri" pitchFamily="34" charset="-122"/>
                 <a:cs typeface="Calibri" pitchFamily="34" charset="-120"/>
               </a:rPr>
-              <a:t>Numbers read off a Met painting from the Week 1 data. Nothing else happens in a convolution.</a:t>
-            </a:r>
-            <a:endParaRPr lang="en-US" sz="1000" dirty="0"/>
+              <a:t>one vector per word</a:t>
+            </a:r>
+            <a:endParaRPr lang="en-US" sz="1350" dirty="0"/>
+          </a:p>
+        </p:txBody>
+      </p:sp>
+      <p:sp>
+        <p:nvSpPr>
+          <p:cNvPr id="10" name="Text 8"/>
+          <p:cNvSpPr/>
+          <p:nvPr/>
+        </p:nvSpPr>
+        <p:spPr>
+          <a:xfrm>
+            <a:off x="6766560" y="4498848"/>
+            <a:ext cx="2011680" cy="457200"/>
+          </a:xfrm>
+          <a:prstGeom prst="rect">
+            <a:avLst/>
+          </a:prstGeom>
+          <a:noFill/>
+          <a:ln/>
+        </p:spPr>
+        <p:txBody>
+          <a:bodyPr wrap="square" lIns="0" tIns="0" rIns="0" bIns="0" rtlCol="0" anchor="ctr"/>
+          <a:lstStyle/>
+          <a:p>
+            <a:pPr indent="0" marL="0">
+              <a:buNone/>
+            </a:pPr>
+            <a:r>
+              <a:rPr lang="en-US" sz="1600" b="1" dirty="0">
+                <a:solidFill>
+                  <a:srgbClr val="2E5F8A"/>
+                </a:solidFill>
+                <a:latin typeface="Cambria" pitchFamily="34" charset="0"/>
+                <a:ea typeface="Cambria" pitchFamily="34" charset="-122"/>
+                <a:cs typeface="Cambria" pitchFamily="34" charset="-120"/>
+              </a:rPr>
+              <a:t>contextual</a:t>
+            </a:r>
+            <a:endParaRPr lang="en-US" sz="1600" dirty="0"/>
+          </a:p>
+        </p:txBody>
+      </p:sp>
+      <p:sp>
+        <p:nvSpPr>
+          <p:cNvPr id="11" name="Text 9"/>
+          <p:cNvSpPr/>
+          <p:nvPr/>
+        </p:nvSpPr>
+        <p:spPr>
+          <a:xfrm>
+            <a:off x="8686800" y="4498848"/>
+            <a:ext cx="2651760" cy="457200"/>
+          </a:xfrm>
+          <a:prstGeom prst="rect">
+            <a:avLst/>
+          </a:prstGeom>
+          <a:noFill/>
+          <a:ln/>
+        </p:spPr>
+        <p:txBody>
+          <a:bodyPr wrap="square" lIns="0" tIns="0" rIns="0" bIns="0" rtlCol="0" anchor="ctr"/>
+          <a:lstStyle/>
+          <a:p>
+            <a:pPr indent="0" marL="0">
+              <a:buNone/>
+            </a:pPr>
+            <a:r>
+              <a:rPr lang="en-US" sz="1350" dirty="0">
+                <a:solidFill>
+                  <a:srgbClr val="1A1A1A"/>
+                </a:solidFill>
+                <a:latin typeface="Calibri" pitchFamily="34" charset="0"/>
+                <a:ea typeface="Calibri" pitchFamily="34" charset="-122"/>
+                <a:cs typeface="Calibri" pitchFamily="34" charset="-120"/>
+              </a:rPr>
+              <a:t>one per occurrence</a:t>
+            </a:r>
+            <a:endParaRPr lang="en-US" sz="1350" dirty="0"/>
+          </a:p>
+        </p:txBody>
+      </p:sp>
+      <p:sp>
+        <p:nvSpPr>
+          <p:cNvPr id="12" name="Text 10"/>
+          <p:cNvSpPr/>
+          <p:nvPr/>
+        </p:nvSpPr>
+        <p:spPr>
+          <a:xfrm>
+            <a:off x="6766560" y="5157216"/>
+            <a:ext cx="2011680" cy="457200"/>
+          </a:xfrm>
+          <a:prstGeom prst="rect">
+            <a:avLst/>
+          </a:prstGeom>
+          <a:noFill/>
+          <a:ln/>
+        </p:spPr>
+        <p:txBody>
+          <a:bodyPr wrap="square" lIns="0" tIns="0" rIns="0" bIns="0" rtlCol="0" anchor="ctr"/>
+          <a:lstStyle/>
+          <a:p>
+            <a:pPr indent="0" marL="0">
+              <a:buNone/>
+            </a:pPr>
+            <a:r>
+              <a:rPr lang="en-US" sz="1600" b="1" dirty="0">
+                <a:solidFill>
+                  <a:srgbClr val="3F6F5F"/>
+                </a:solidFill>
+                <a:latin typeface="Cambria" pitchFamily="34" charset="0"/>
+                <a:ea typeface="Cambria" pitchFamily="34" charset="-122"/>
+                <a:cs typeface="Cambria" pitchFamily="34" charset="-120"/>
+              </a:rPr>
+              <a:t>sentence</a:t>
+            </a:r>
+            <a:endParaRPr lang="en-US" sz="1600" dirty="0"/>
+          </a:p>
+        </p:txBody>
+      </p:sp>
+      <p:sp>
+        <p:nvSpPr>
+          <p:cNvPr id="13" name="Text 11"/>
+          <p:cNvSpPr/>
+          <p:nvPr/>
+        </p:nvSpPr>
+        <p:spPr>
+          <a:xfrm>
+            <a:off x="8686800" y="5157216"/>
+            <a:ext cx="2651760" cy="457200"/>
+          </a:xfrm>
+          <a:prstGeom prst="rect">
+            <a:avLst/>
+          </a:prstGeom>
+          <a:noFill/>
+          <a:ln/>
+        </p:spPr>
+        <p:txBody>
+          <a:bodyPr wrap="square" lIns="0" tIns="0" rIns="0" bIns="0" rtlCol="0" anchor="ctr"/>
+          <a:lstStyle/>
+          <a:p>
+            <a:pPr indent="0" marL="0">
+              <a:buNone/>
+            </a:pPr>
+            <a:r>
+              <a:rPr lang="en-US" sz="1350" dirty="0">
+                <a:solidFill>
+                  <a:srgbClr val="1A1A1A"/>
+                </a:solidFill>
+                <a:latin typeface="Calibri" pitchFamily="34" charset="0"/>
+                <a:ea typeface="Calibri" pitchFamily="34" charset="-122"/>
+                <a:cs typeface="Calibri" pitchFamily="34" charset="-120"/>
+              </a:rPr>
+              <a:t>one per document — Week 5</a:t>
+            </a:r>
+            <a:endParaRPr lang="en-US" sz="1350" dirty="0"/>
           </a:p>
         </p:txBody>
       </p:sp>
@@ -7305,7 +7394,7 @@
                 <a:ea typeface="Calibri" pitchFamily="34" charset="-122"/>
                 <a:cs typeface="Calibri" pitchFamily="34" charset="-120"/>
               </a:rPr>
-              <a:t>WHAT THE NINE NUMBERS DO</a:t>
+              <a:t>THE SAME TRICK, ON PIXELS</a:t>
             </a:r>
             <a:endParaRPr lang="en-US" sz="1300" dirty="0"/>
           </a:p>
@@ -7344,7 +7433,7 @@
                 <a:ea typeface="Cambria" pitchFamily="34" charset="-122"/>
                 <a:cs typeface="Cambria" pitchFamily="34" charset="-120"/>
               </a:rPr>
-              <a:t>Change the filter, ask a different question</a:t>
+              <a:t>A convolution, all of it</a:t>
             </a:r>
             <a:endParaRPr lang="en-US" sz="3400" dirty="0"/>
           </a:p>
@@ -7352,7 +7441,7 @@
       </p:sp>
       <p:pic>
         <p:nvPicPr>
-          <p:cNvPr id="4" name="Image 0" descr="/tmp/figs/w4_convolution.png">    </p:cNvPr>
+          <p:cNvPr id="4" name="Image 0" descr="/tmp/figs/w4_conv_arith.png">    </p:cNvPr>
           <p:cNvPicPr>
             <a:picLocks noChangeAspect="1"/>
           </p:cNvPicPr>
@@ -7365,8 +7454,8 @@
         </p:blipFill>
         <p:spPr>
           <a:xfrm>
-            <a:off x="822960" y="2011680"/>
-            <a:ext cx="10515600" cy="3200400"/>
+            <a:off x="548640" y="1965960"/>
+            <a:ext cx="11064240" cy="3291840"/>
           </a:xfrm>
           <a:prstGeom prst="rect">
             <a:avLst/>
@@ -7406,7 +7495,7 @@
                 <a:ea typeface="Cambria" pitchFamily="34" charset="-122"/>
                 <a:cs typeface="Cambria" pitchFamily="34" charset="-120"/>
               </a:rPr>
-              <a:t>Each panel is the same painting under a different 3x3 grid. One finds vertical edges, one horizontal, one blurs.</a:t>
+              <a:t>A picture is a grid of numbers. Take nine of them, multiply by nine other numbers, add them up: -162. Move one pixel across and repeat.</a:t>
             </a:r>
             <a:endParaRPr lang="en-US" sz="1600" dirty="0"/>
           </a:p>
@@ -7445,7 +7534,7 @@
                 <a:ea typeface="Calibri" pitchFamily="34" charset="-122"/>
                 <a:cs typeface="Calibri" pitchFamily="34" charset="-120"/>
               </a:rPr>
-              <a:t>A CNN is not given these. It starts with random grids and learns which ones are worth having, by the same downhill roll as before.</a:t>
+              <a:t>Numbers read off a Met painting from the Week 1 data. Nothing else happens in a convolution.</a:t>
             </a:r>
             <a:endParaRPr lang="en-US" sz="1000" dirty="0"/>
           </a:p>
@@ -7516,7 +7605,7 @@
                 <a:ea typeface="Calibri" pitchFamily="34" charset="-122"/>
                 <a:cs typeface="Calibri" pitchFamily="34" charset="-120"/>
               </a:rPr>
-              <a:t>WHY A CNN IS DEEP</a:t>
+              <a:t>WHAT THE NINE NUMBERS DO</a:t>
             </a:r>
             <a:endParaRPr lang="en-US" sz="1300" dirty="0"/>
           </a:p>
@@ -7555,7 +7644,7 @@
                 <a:ea typeface="Cambria" pitchFamily="34" charset="-122"/>
                 <a:cs typeface="Cambria" pitchFamily="34" charset="-120"/>
               </a:rPr>
-              <a:t>Filters on top of filters</a:t>
+              <a:t>Change the filter, ask a different question</a:t>
             </a:r>
             <a:endParaRPr lang="en-US" sz="3400" dirty="0"/>
           </a:p>
@@ -7563,7 +7652,7 @@
       </p:sp>
       <p:pic>
         <p:nvPicPr>
-          <p:cNvPr id="4" name="Image 0" descr="/tmp/figs/w4_conv_stack.png">    </p:cNvPr>
+          <p:cNvPr id="4" name="Image 0" descr="/tmp/figs/w4_convolution.png">    </p:cNvPr>
           <p:cNvPicPr>
             <a:picLocks noChangeAspect="1"/>
           </p:cNvPicPr>
@@ -7617,7 +7706,7 @@
                 <a:ea typeface="Cambria" pitchFamily="34" charset="-122"/>
                 <a:cs typeface="Cambria" pitchFamily="34" charset="-120"/>
               </a:rPr>
-              <a:t>Run a filter over the output of the last filter, then shrink. Edges turn into corners, and corners into regions.</a:t>
+              <a:t>Each panel is the same painting under a different 3x3 grid. One finds vertical edges, one horizontal, one blurs.</a:t>
             </a:r>
             <a:endParaRPr lang="en-US" sz="1600" dirty="0"/>
           </a:p>
@@ -7656,7 +7745,7 @@
                 <a:ea typeface="Calibri" pitchFamily="34" charset="-122"/>
                 <a:cs typeface="Calibri" pitchFamily="34" charset="-120"/>
               </a:rPr>
-              <a:t>Every panel is real arithmetic on the painting to its left. Stacking them is all a CNN is.</a:t>
+              <a:t>A CNN is not given these. It starts with random grids and learns which ones are worth having, by the same downhill roll as before.</a:t>
             </a:r>
             <a:endParaRPr lang="en-US" sz="1000" dirty="0"/>
           </a:p>
@@ -7721,13 +7810,13 @@
             <a:r>
               <a:rPr lang="en-US" sz="1300" b="1" spc="300" kern="0" dirty="0">
                 <a:solidFill>
-                  <a:srgbClr val="B9852F"/>
+                  <a:srgbClr val="2E5F8A"/>
                 </a:solidFill>
                 <a:latin typeface="Calibri" pitchFamily="34" charset="0"/>
                 <a:ea typeface="Calibri" pitchFamily="34" charset="-122"/>
                 <a:cs typeface="Calibri" pitchFamily="34" charset="-120"/>
               </a:rPr>
-              <a:t>BOTH IDEAS AT ONCE</a:t>
+              <a:t>WHY A CNN IS DEEP</a:t>
             </a:r>
             <a:endParaRPr lang="en-US" sz="1300" dirty="0"/>
           </a:p>
@@ -7766,7 +7855,7 @@
                 <a:ea typeface="Cambria" pitchFamily="34" charset="-122"/>
                 <a:cs typeface="Cambria" pitchFamily="34" charset="-120"/>
               </a:rPr>
-              <a:t>The same rule, where a context is a picture</a:t>
+              <a:t>Filters on top of filters</a:t>
             </a:r>
             <a:endParaRPr lang="en-US" sz="3400" dirty="0"/>
           </a:p>
@@ -7774,7 +7863,7 @@
       </p:sp>
       <p:pic>
         <p:nvPicPr>
-          <p:cNvPr id="4" name="Image 0" descr="/tmp/figs/w4_clip.png">    </p:cNvPr>
+          <p:cNvPr id="4" name="Image 0" descr="/tmp/figs/w4_conv_stack.png">    </p:cNvPr>
           <p:cNvPicPr>
             <a:picLocks noChangeAspect="1"/>
           </p:cNvPicPr>
@@ -7787,8 +7876,8 @@
         </p:blipFill>
         <p:spPr>
           <a:xfrm>
-            <a:off x="1097280" y="1783080"/>
-            <a:ext cx="9966960" cy="3840480"/>
+            <a:off x="822960" y="2011680"/>
+            <a:ext cx="10515600" cy="3200400"/>
           </a:xfrm>
           <a:prstGeom prst="rect">
             <a:avLst/>
@@ -7828,7 +7917,7 @@
                 <a:ea typeface="Cambria" pitchFamily="34" charset="-122"/>
                 <a:cs typeface="Cambria" pitchFamily="34" charset="-120"/>
               </a:rPr>
-              <a:t>Same context: a painting and its own caption, pulled together. Different context: anyone else's caption, pushed away. Two kinds of thing in one space.</a:t>
+              <a:t>Run a filter over the output of the last filter, then shrink. Edges turn into corners, and corners into regions.</a:t>
             </a:r>
             <a:endParaRPr lang="en-US" sz="1600" dirty="0"/>
           </a:p>
@@ -7867,7 +7956,7 @@
                 <a:ea typeface="Calibri" pitchFamily="34" charset="-122"/>
                 <a:cs typeface="Calibri" pitchFamily="34" charset="-120"/>
               </a:rPr>
-              <a:t>Which is why "a painting of a woman in a red hat" can search a museum with no tags in it at all. The notebook trains a small one on 18 paintings.</a:t>
+              <a:t>Every panel is real arithmetic on the painting to its left. Stacking them is all a CNN is.</a:t>
             </a:r>
             <a:endParaRPr lang="en-US" sz="1000" dirty="0"/>
           </a:p>
@@ -7884,6 +7973,217 @@
 <file path=ppt/slides/slide23.xml><?xml version="1.0" encoding="utf-8"?>
 <p:sld xmlns:a="http://schemas.openxmlformats.org/drawingml/2006/main" xmlns:r="http://schemas.openxmlformats.org/officeDocument/2006/relationships" xmlns:p="http://schemas.openxmlformats.org/presentationml/2006/main">
   <p:cSld name="Slide 23">
+    <p:bg>
+      <p:bgPr>
+        <a:solidFill>
+          <a:srgbClr val="FFFFFF"/>
+        </a:solidFill>
+      </p:bgPr>
+    </p:bg>
+    <p:spTree>
+      <p:nvGrpSpPr>
+        <p:cNvPr id="1" name=""/>
+        <p:cNvGrpSpPr/>
+        <p:nvPr/>
+      </p:nvGrpSpPr>
+      <p:grpSpPr>
+        <a:xfrm>
+          <a:off x="0" y="0"/>
+          <a:ext cx="0" cy="0"/>
+          <a:chOff x="0" y="0"/>
+          <a:chExt cx="0" cy="0"/>
+        </a:xfrm>
+      </p:grpSpPr>
+      <p:sp>
+        <p:nvSpPr>
+          <p:cNvPr id="2" name="Text 0"/>
+          <p:cNvSpPr/>
+          <p:nvPr/>
+        </p:nvSpPr>
+        <p:spPr>
+          <a:xfrm>
+            <a:off x="640080" y="502920"/>
+            <a:ext cx="10515600" cy="320040"/>
+          </a:xfrm>
+          <a:prstGeom prst="rect">
+            <a:avLst/>
+          </a:prstGeom>
+          <a:noFill/>
+          <a:ln/>
+        </p:spPr>
+        <p:txBody>
+          <a:bodyPr wrap="square" rtlCol="0" anchor="ctr"/>
+          <a:lstStyle/>
+          <a:p>
+            <a:pPr indent="0" marL="0">
+              <a:buNone/>
+            </a:pPr>
+            <a:r>
+              <a:rPr lang="en-US" sz="1300" b="1" spc="300" kern="0" dirty="0">
+                <a:solidFill>
+                  <a:srgbClr val="B9852F"/>
+                </a:solidFill>
+                <a:latin typeface="Calibri" pitchFamily="34" charset="0"/>
+                <a:ea typeface="Calibri" pitchFamily="34" charset="-122"/>
+                <a:cs typeface="Calibri" pitchFamily="34" charset="-120"/>
+              </a:rPr>
+              <a:t>BOTH IDEAS AT ONCE</a:t>
+            </a:r>
+            <a:endParaRPr lang="en-US" sz="1300" dirty="0"/>
+          </a:p>
+        </p:txBody>
+      </p:sp>
+      <p:sp>
+        <p:nvSpPr>
+          <p:cNvPr id="3" name="Text 1"/>
+          <p:cNvSpPr/>
+          <p:nvPr/>
+        </p:nvSpPr>
+        <p:spPr>
+          <a:xfrm>
+            <a:off x="640080" y="868680"/>
+            <a:ext cx="10972800" cy="777240"/>
+          </a:xfrm>
+          <a:prstGeom prst="rect">
+            <a:avLst/>
+          </a:prstGeom>
+          <a:noFill/>
+          <a:ln/>
+        </p:spPr>
+        <p:txBody>
+          <a:bodyPr wrap="square" rtlCol="0" anchor="t"/>
+          <a:lstStyle/>
+          <a:p>
+            <a:pPr indent="0" marL="0">
+              <a:buNone/>
+            </a:pPr>
+            <a:r>
+              <a:rPr lang="en-US" sz="3400" b="1" dirty="0">
+                <a:solidFill>
+                  <a:srgbClr val="1A1A1A"/>
+                </a:solidFill>
+                <a:latin typeface="Cambria" pitchFamily="34" charset="0"/>
+                <a:ea typeface="Cambria" pitchFamily="34" charset="-122"/>
+                <a:cs typeface="Cambria" pitchFamily="34" charset="-120"/>
+              </a:rPr>
+              <a:t>The same rule, where a context is a picture</a:t>
+            </a:r>
+            <a:endParaRPr lang="en-US" sz="3400" dirty="0"/>
+          </a:p>
+        </p:txBody>
+      </p:sp>
+      <p:pic>
+        <p:nvPicPr>
+          <p:cNvPr id="4" name="Image 0" descr="/tmp/figs/w4_clip.png">    </p:cNvPr>
+          <p:cNvPicPr>
+            <a:picLocks noChangeAspect="1"/>
+          </p:cNvPicPr>
+          <p:nvPr/>
+        </p:nvPicPr>
+        <p:blipFill>
+          <a:blip r:embed="rId1"/>
+          <a:srcRect l="0" r="0" t="0" b="0"/>
+          <a:stretch/>
+        </p:blipFill>
+        <p:spPr>
+          <a:xfrm>
+            <a:off x="1097280" y="1783080"/>
+            <a:ext cx="9966960" cy="3840480"/>
+          </a:xfrm>
+          <a:prstGeom prst="rect">
+            <a:avLst/>
+          </a:prstGeom>
+        </p:spPr>
+      </p:pic>
+      <p:sp>
+        <p:nvSpPr>
+          <p:cNvPr id="5" name="Text 2"/>
+          <p:cNvSpPr/>
+          <p:nvPr/>
+        </p:nvSpPr>
+        <p:spPr>
+          <a:xfrm>
+            <a:off x="640080" y="5897880"/>
+            <a:ext cx="10881360" cy="411480"/>
+          </a:xfrm>
+          <a:prstGeom prst="rect">
+            <a:avLst/>
+          </a:prstGeom>
+          <a:noFill/>
+          <a:ln/>
+        </p:spPr>
+        <p:txBody>
+          <a:bodyPr wrap="square" rtlCol="0" anchor="ctr"/>
+          <a:lstStyle/>
+          <a:p>
+            <a:pPr indent="0" marL="0">
+              <a:buNone/>
+            </a:pPr>
+            <a:r>
+              <a:rPr lang="en-US" sz="1600" i="1" dirty="0">
+                <a:solidFill>
+                  <a:srgbClr val="1A1A1A"/>
+                </a:solidFill>
+                <a:latin typeface="Cambria" pitchFamily="34" charset="0"/>
+                <a:ea typeface="Cambria" pitchFamily="34" charset="-122"/>
+                <a:cs typeface="Cambria" pitchFamily="34" charset="-120"/>
+              </a:rPr>
+              <a:t>Same context: a painting and its own caption, pulled together. Different context: anyone else's caption, pushed away. Two kinds of thing in one space.</a:t>
+            </a:r>
+            <a:endParaRPr lang="en-US" sz="1600" dirty="0"/>
+          </a:p>
+        </p:txBody>
+      </p:sp>
+      <p:sp>
+        <p:nvSpPr>
+          <p:cNvPr id="6" name="Text 3"/>
+          <p:cNvSpPr/>
+          <p:nvPr/>
+        </p:nvSpPr>
+        <p:spPr>
+          <a:xfrm>
+            <a:off x="640080" y="6355080"/>
+            <a:ext cx="10881360" cy="320040"/>
+          </a:xfrm>
+          <a:prstGeom prst="rect">
+            <a:avLst/>
+          </a:prstGeom>
+          <a:noFill/>
+          <a:ln/>
+        </p:spPr>
+        <p:txBody>
+          <a:bodyPr wrap="square" rtlCol="0" anchor="ctr"/>
+          <a:lstStyle/>
+          <a:p>
+            <a:pPr indent="0" marL="0">
+              <a:buNone/>
+            </a:pPr>
+            <a:r>
+              <a:rPr lang="en-US" sz="1000" dirty="0">
+                <a:solidFill>
+                  <a:srgbClr val="6B6B63"/>
+                </a:solidFill>
+                <a:latin typeface="Calibri" pitchFamily="34" charset="0"/>
+                <a:ea typeface="Calibri" pitchFamily="34" charset="-122"/>
+                <a:cs typeface="Calibri" pitchFamily="34" charset="-120"/>
+              </a:rPr>
+              <a:t>Which is why "a painting of a woman in a red hat" can search a museum with no tags in it at all. The notebook trains a small one on 18 paintings.</a:t>
+            </a:r>
+            <a:endParaRPr lang="en-US" sz="1000" dirty="0"/>
+          </a:p>
+        </p:txBody>
+      </p:sp>
+    </p:spTree>
+  </p:cSld>
+  <p:clrMapOvr>
+    <a:masterClrMapping/>
+  </p:clrMapOvr>
+</p:sld>
+</file>
+
+<file path=ppt/slides/slide24.xml><?xml version="1.0" encoding="utf-8"?>
+<p:sld xmlns:a="http://schemas.openxmlformats.org/drawingml/2006/main" xmlns:r="http://schemas.openxmlformats.org/officeDocument/2006/relationships" xmlns:p="http://schemas.openxmlformats.org/presentationml/2006/main">
+  <p:cSld name="Slide 24">
     <p:bg>
       <p:bgPr>
         <a:solidFill>
@@ -8019,632 +8319,6 @@
               <a:t>Then: where your corpus actually comes from.</a:t>
             </a:r>
             <a:endParaRPr lang="en-US" sz="1800" dirty="0"/>
-          </a:p>
-        </p:txBody>
-      </p:sp>
-    </p:spTree>
-  </p:cSld>
-  <p:clrMapOvr>
-    <a:masterClrMapping/>
-  </p:clrMapOvr>
-</p:sld>
-</file>
-
-<file path=ppt/slides/slide24.xml><?xml version="1.0" encoding="utf-8"?>
-<p:sld xmlns:a="http://schemas.openxmlformats.org/drawingml/2006/main" xmlns:r="http://schemas.openxmlformats.org/officeDocument/2006/relationships" xmlns:p="http://schemas.openxmlformats.org/presentationml/2006/main">
-  <p:cSld name="Slide 24">
-    <p:bg>
-      <p:bgPr>
-        <a:solidFill>
-          <a:srgbClr val="FFFFFF"/>
-        </a:solidFill>
-      </p:bgPr>
-    </p:bg>
-    <p:spTree>
-      <p:nvGrpSpPr>
-        <p:cNvPr id="1" name=""/>
-        <p:cNvGrpSpPr/>
-        <p:nvPr/>
-      </p:nvGrpSpPr>
-      <p:grpSpPr>
-        <a:xfrm>
-          <a:off x="0" y="0"/>
-          <a:ext cx="0" cy="0"/>
-          <a:chOff x="0" y="0"/>
-          <a:chExt cx="0" cy="0"/>
-        </a:xfrm>
-      </p:grpSpPr>
-      <p:sp>
-        <p:nvSpPr>
-          <p:cNvPr id="2" name="Text 0"/>
-          <p:cNvSpPr/>
-          <p:nvPr/>
-        </p:nvSpPr>
-        <p:spPr>
-          <a:xfrm>
-            <a:off x="640080" y="502920"/>
-            <a:ext cx="10515600" cy="320040"/>
-          </a:xfrm>
-          <a:prstGeom prst="rect">
-            <a:avLst/>
-          </a:prstGeom>
-          <a:noFill/>
-          <a:ln/>
-        </p:spPr>
-        <p:txBody>
-          <a:bodyPr wrap="square" rtlCol="0" anchor="ctr"/>
-          <a:lstStyle/>
-          <a:p>
-            <a:pPr indent="0" marL="0">
-              <a:buNone/>
-            </a:pPr>
-            <a:r>
-              <a:rPr lang="en-US" sz="1300" b="1" spc="300" kern="0" dirty="0">
-                <a:solidFill>
-                  <a:srgbClr val="7A3B2E"/>
-                </a:solidFill>
-                <a:latin typeface="Calibri" pitchFamily="34" charset="0"/>
-                <a:ea typeface="Calibri" pitchFamily="34" charset="-122"/>
-                <a:cs typeface="Calibri" pitchFamily="34" charset="-120"/>
-              </a:rPr>
-              <a:t>GETTING THE DATA</a:t>
-            </a:r>
-            <a:endParaRPr lang="en-US" sz="1300" dirty="0"/>
-          </a:p>
-        </p:txBody>
-      </p:sp>
-      <p:sp>
-        <p:nvSpPr>
-          <p:cNvPr id="3" name="Text 1"/>
-          <p:cNvSpPr/>
-          <p:nvPr/>
-        </p:nvSpPr>
-        <p:spPr>
-          <a:xfrm>
-            <a:off x="640080" y="868680"/>
-            <a:ext cx="10972800" cy="777240"/>
-          </a:xfrm>
-          <a:prstGeom prst="rect">
-            <a:avLst/>
-          </a:prstGeom>
-          <a:noFill/>
-          <a:ln/>
-        </p:spPr>
-        <p:txBody>
-          <a:bodyPr wrap="square" rtlCol="0" anchor="t"/>
-          <a:lstStyle/>
-          <a:p>
-            <a:pPr indent="0" marL="0">
-              <a:buNone/>
-            </a:pPr>
-            <a:r>
-              <a:rPr lang="en-US" sz="3400" b="1" dirty="0">
-                <a:solidFill>
-                  <a:srgbClr val="1A1A1A"/>
-                </a:solidFill>
-                <a:latin typeface="Cambria" pitchFamily="34" charset="0"/>
-                <a:ea typeface="Cambria" pitchFamily="34" charset="-122"/>
-                <a:cs typeface="Cambria" pitchFamily="34" charset="-120"/>
-              </a:rPr>
-              <a:t>Three routes, in the order you should try them</a:t>
-            </a:r>
-            <a:endParaRPr lang="en-US" sz="3400" dirty="0"/>
-          </a:p>
-        </p:txBody>
-      </p:sp>
-      <p:sp>
-        <p:nvSpPr>
-          <p:cNvPr id="4" name="Shape 2"/>
-          <p:cNvSpPr/>
-          <p:nvPr/>
-        </p:nvSpPr>
-        <p:spPr>
-          <a:xfrm>
-            <a:off x="640080" y="2011680"/>
-            <a:ext cx="10881360" cy="1143000"/>
-          </a:xfrm>
-          <a:prstGeom prst="roundRect">
-            <a:avLst>
-              <a:gd name="adj" fmla="val 8000"/>
-            </a:avLst>
-          </a:prstGeom>
-          <a:solidFill>
-            <a:srgbClr val="F4EEE8"/>
-          </a:solidFill>
-          <a:ln/>
-        </p:spPr>
-      </p:sp>
-      <p:sp>
-        <p:nvSpPr>
-          <p:cNvPr id="5" name="Shape 3"/>
-          <p:cNvSpPr/>
-          <p:nvPr/>
-        </p:nvSpPr>
-        <p:spPr>
-          <a:xfrm>
-            <a:off x="914400" y="2304288"/>
-            <a:ext cx="548640" cy="548640"/>
-          </a:xfrm>
-          <a:prstGeom prst="ellipse">
-            <a:avLst/>
-          </a:prstGeom>
-          <a:solidFill>
-            <a:srgbClr val="3F6F5F"/>
-          </a:solidFill>
-          <a:ln/>
-        </p:spPr>
-      </p:sp>
-      <p:sp>
-        <p:nvSpPr>
-          <p:cNvPr id="6" name="Text 4"/>
-          <p:cNvSpPr/>
-          <p:nvPr/>
-        </p:nvSpPr>
-        <p:spPr>
-          <a:xfrm>
-            <a:off x="914400" y="2304288"/>
-            <a:ext cx="548640" cy="548640"/>
-          </a:xfrm>
-          <a:prstGeom prst="rect">
-            <a:avLst/>
-          </a:prstGeom>
-          <a:noFill/>
-          <a:ln/>
-        </p:spPr>
-        <p:txBody>
-          <a:bodyPr wrap="square" rtlCol="0" anchor="ctr"/>
-          <a:lstStyle/>
-          <a:p>
-            <a:pPr algn="ctr" indent="0" marL="0">
-              <a:buNone/>
-            </a:pPr>
-            <a:r>
-              <a:rPr lang="en-US" sz="1900" b="1" dirty="0">
-                <a:solidFill>
-                  <a:srgbClr val="FFFFFF"/>
-                </a:solidFill>
-                <a:latin typeface="Cambria" pitchFamily="34" charset="0"/>
-                <a:ea typeface="Cambria" pitchFamily="34" charset="-122"/>
-                <a:cs typeface="Cambria" pitchFamily="34" charset="-120"/>
-              </a:rPr>
-              <a:t>1</a:t>
-            </a:r>
-            <a:endParaRPr lang="en-US" sz="1900" dirty="0"/>
-          </a:p>
-        </p:txBody>
-      </p:sp>
-      <p:sp>
-        <p:nvSpPr>
-          <p:cNvPr id="7" name="Text 5"/>
-          <p:cNvSpPr/>
-          <p:nvPr/>
-        </p:nvSpPr>
-        <p:spPr>
-          <a:xfrm>
-            <a:off x="1645920" y="2176272"/>
-            <a:ext cx="2834640" cy="457200"/>
-          </a:xfrm>
-          <a:prstGeom prst="rect">
-            <a:avLst/>
-          </a:prstGeom>
-          <a:noFill/>
-          <a:ln/>
-        </p:spPr>
-        <p:txBody>
-          <a:bodyPr wrap="square" lIns="0" tIns="0" rIns="0" bIns="0" rtlCol="0" anchor="ctr"/>
-          <a:lstStyle/>
-          <a:p>
-            <a:pPr indent="0" marL="0">
-              <a:buNone/>
-            </a:pPr>
-            <a:r>
-              <a:rPr lang="en-US" sz="1800" b="1" dirty="0">
-                <a:solidFill>
-                  <a:srgbClr val="1A1A1A"/>
-                </a:solidFill>
-                <a:latin typeface="Cambria" pitchFamily="34" charset="0"/>
-                <a:ea typeface="Cambria" pitchFamily="34" charset="-122"/>
-                <a:cs typeface="Cambria" pitchFamily="34" charset="-120"/>
-              </a:rPr>
-              <a:t>A prepared file</a:t>
-            </a:r>
-            <a:endParaRPr lang="en-US" sz="1800" dirty="0"/>
-          </a:p>
-        </p:txBody>
-      </p:sp>
-      <p:sp>
-        <p:nvSpPr>
-          <p:cNvPr id="8" name="Text 6"/>
-          <p:cNvSpPr/>
-          <p:nvPr/>
-        </p:nvSpPr>
-        <p:spPr>
-          <a:xfrm>
-            <a:off x="4572000" y="2194560"/>
-            <a:ext cx="6675120" cy="822960"/>
-          </a:xfrm>
-          <a:prstGeom prst="rect">
-            <a:avLst/>
-          </a:prstGeom>
-          <a:noFill/>
-          <a:ln/>
-        </p:spPr>
-        <p:txBody>
-          <a:bodyPr wrap="square" lIns="0" tIns="0" rIns="0" bIns="0" rtlCol="0" anchor="t"/>
-          <a:lstStyle/>
-          <a:p>
-            <a:pPr indent="0" marL="0">
-              <a:buNone/>
-            </a:pPr>
-            <a:r>
-              <a:rPr lang="en-US" sz="1350" dirty="0">
-                <a:solidFill>
-                  <a:srgbClr val="1A1A1A"/>
-                </a:solidFill>
-                <a:latin typeface="Calibri" pitchFamily="34" charset="0"/>
-                <a:ea typeface="Calibri" pitchFamily="34" charset="-122"/>
-                <a:cs typeface="Calibri" pitchFamily="34" charset="-120"/>
-              </a:rPr>
-              <a:t>pd.read_csv(url) · gdown · load_dataset(). Most projects should stop here.</a:t>
-            </a:r>
-            <a:endParaRPr lang="en-US" sz="1350" dirty="0"/>
-          </a:p>
-        </p:txBody>
-      </p:sp>
-      <p:sp>
-        <p:nvSpPr>
-          <p:cNvPr id="9" name="Shape 7"/>
-          <p:cNvSpPr/>
-          <p:nvPr/>
-        </p:nvSpPr>
-        <p:spPr>
-          <a:xfrm>
-            <a:off x="640080" y="3337560"/>
-            <a:ext cx="10881360" cy="1143000"/>
-          </a:xfrm>
-          <a:prstGeom prst="roundRect">
-            <a:avLst>
-              <a:gd name="adj" fmla="val 8000"/>
-            </a:avLst>
-          </a:prstGeom>
-          <a:solidFill>
-            <a:srgbClr val="F4EEE8"/>
-          </a:solidFill>
-          <a:ln/>
-        </p:spPr>
-      </p:sp>
-      <p:sp>
-        <p:nvSpPr>
-          <p:cNvPr id="10" name="Shape 8"/>
-          <p:cNvSpPr/>
-          <p:nvPr/>
-        </p:nvSpPr>
-        <p:spPr>
-          <a:xfrm>
-            <a:off x="914400" y="3630168"/>
-            <a:ext cx="548640" cy="548640"/>
-          </a:xfrm>
-          <a:prstGeom prst="ellipse">
-            <a:avLst/>
-          </a:prstGeom>
-          <a:solidFill>
-            <a:srgbClr val="2E5F8A"/>
-          </a:solidFill>
-          <a:ln/>
-        </p:spPr>
-      </p:sp>
-      <p:sp>
-        <p:nvSpPr>
-          <p:cNvPr id="11" name="Text 9"/>
-          <p:cNvSpPr/>
-          <p:nvPr/>
-        </p:nvSpPr>
-        <p:spPr>
-          <a:xfrm>
-            <a:off x="914400" y="3630168"/>
-            <a:ext cx="548640" cy="548640"/>
-          </a:xfrm>
-          <a:prstGeom prst="rect">
-            <a:avLst/>
-          </a:prstGeom>
-          <a:noFill/>
-          <a:ln/>
-        </p:spPr>
-        <p:txBody>
-          <a:bodyPr wrap="square" rtlCol="0" anchor="ctr"/>
-          <a:lstStyle/>
-          <a:p>
-            <a:pPr algn="ctr" indent="0" marL="0">
-              <a:buNone/>
-            </a:pPr>
-            <a:r>
-              <a:rPr lang="en-US" sz="1900" b="1" dirty="0">
-                <a:solidFill>
-                  <a:srgbClr val="FFFFFF"/>
-                </a:solidFill>
-                <a:latin typeface="Cambria" pitchFamily="34" charset="0"/>
-                <a:ea typeface="Cambria" pitchFamily="34" charset="-122"/>
-                <a:cs typeface="Cambria" pitchFamily="34" charset="-120"/>
-              </a:rPr>
-              <a:t>2</a:t>
-            </a:r>
-            <a:endParaRPr lang="en-US" sz="1900" dirty="0"/>
-          </a:p>
-        </p:txBody>
-      </p:sp>
-      <p:sp>
-        <p:nvSpPr>
-          <p:cNvPr id="12" name="Text 10"/>
-          <p:cNvSpPr/>
-          <p:nvPr/>
-        </p:nvSpPr>
-        <p:spPr>
-          <a:xfrm>
-            <a:off x="1645920" y="3502152"/>
-            <a:ext cx="2834640" cy="457200"/>
-          </a:xfrm>
-          <a:prstGeom prst="rect">
-            <a:avLst/>
-          </a:prstGeom>
-          <a:noFill/>
-          <a:ln/>
-        </p:spPr>
-        <p:txBody>
-          <a:bodyPr wrap="square" lIns="0" tIns="0" rIns="0" bIns="0" rtlCol="0" anchor="ctr"/>
-          <a:lstStyle/>
-          <a:p>
-            <a:pPr indent="0" marL="0">
-              <a:buNone/>
-            </a:pPr>
-            <a:r>
-              <a:rPr lang="en-US" sz="1800" b="1" dirty="0">
-                <a:solidFill>
-                  <a:srgbClr val="1A1A1A"/>
-                </a:solidFill>
-                <a:latin typeface="Cambria" pitchFamily="34" charset="0"/>
-                <a:ea typeface="Cambria" pitchFamily="34" charset="-122"/>
-                <a:cs typeface="Cambria" pitchFamily="34" charset="-120"/>
-              </a:rPr>
-              <a:t>An API</a:t>
-            </a:r>
-            <a:endParaRPr lang="en-US" sz="1800" dirty="0"/>
-          </a:p>
-        </p:txBody>
-      </p:sp>
-      <p:sp>
-        <p:nvSpPr>
-          <p:cNvPr id="13" name="Text 11"/>
-          <p:cNvSpPr/>
-          <p:nvPr/>
-        </p:nvSpPr>
-        <p:spPr>
-          <a:xfrm>
-            <a:off x="4572000" y="3520440"/>
-            <a:ext cx="6675120" cy="822960"/>
-          </a:xfrm>
-          <a:prstGeom prst="rect">
-            <a:avLst/>
-          </a:prstGeom>
-          <a:noFill/>
-          <a:ln/>
-        </p:spPr>
-        <p:txBody>
-          <a:bodyPr wrap="square" lIns="0" tIns="0" rIns="0" bIns="0" rtlCol="0" anchor="t"/>
-          <a:lstStyle/>
-          <a:p>
-            <a:pPr indent="0" marL="0">
-              <a:buNone/>
-            </a:pPr>
-            <a:r>
-              <a:rPr lang="en-US" sz="1350" dirty="0">
-                <a:solidFill>
-                  <a:srgbClr val="1A1A1A"/>
-                </a:solidFill>
-                <a:latin typeface="Calibri" pitchFamily="34" charset="0"/>
-                <a:ea typeface="Calibri" pitchFamily="34" charset="-122"/>
-                <a:cs typeface="Calibri" pitchFamily="34" charset="-120"/>
-              </a:rPr>
-              <a:t>A documented URL that returns JSON. Four words: endpoint, key, pagination, rate limit.</a:t>
-            </a:r>
-            <a:endParaRPr lang="en-US" sz="1350" dirty="0"/>
-          </a:p>
-        </p:txBody>
-      </p:sp>
-      <p:sp>
-        <p:nvSpPr>
-          <p:cNvPr id="14" name="Shape 12"/>
-          <p:cNvSpPr/>
-          <p:nvPr/>
-        </p:nvSpPr>
-        <p:spPr>
-          <a:xfrm>
-            <a:off x="640080" y="4663440"/>
-            <a:ext cx="10881360" cy="1143000"/>
-          </a:xfrm>
-          <a:prstGeom prst="roundRect">
-            <a:avLst>
-              <a:gd name="adj" fmla="val 8000"/>
-            </a:avLst>
-          </a:prstGeom>
-          <a:solidFill>
-            <a:srgbClr val="F4EEE8"/>
-          </a:solidFill>
-          <a:ln/>
-        </p:spPr>
-      </p:sp>
-      <p:sp>
-        <p:nvSpPr>
-          <p:cNvPr id="15" name="Shape 13"/>
-          <p:cNvSpPr/>
-          <p:nvPr/>
-        </p:nvSpPr>
-        <p:spPr>
-          <a:xfrm>
-            <a:off x="914400" y="4956048"/>
-            <a:ext cx="548640" cy="548640"/>
-          </a:xfrm>
-          <a:prstGeom prst="ellipse">
-            <a:avLst/>
-          </a:prstGeom>
-          <a:solidFill>
-            <a:srgbClr val="7A3B2E"/>
-          </a:solidFill>
-          <a:ln/>
-        </p:spPr>
-      </p:sp>
-      <p:sp>
-        <p:nvSpPr>
-          <p:cNvPr id="16" name="Text 14"/>
-          <p:cNvSpPr/>
-          <p:nvPr/>
-        </p:nvSpPr>
-        <p:spPr>
-          <a:xfrm>
-            <a:off x="914400" y="4956048"/>
-            <a:ext cx="548640" cy="548640"/>
-          </a:xfrm>
-          <a:prstGeom prst="rect">
-            <a:avLst/>
-          </a:prstGeom>
-          <a:noFill/>
-          <a:ln/>
-        </p:spPr>
-        <p:txBody>
-          <a:bodyPr wrap="square" rtlCol="0" anchor="ctr"/>
-          <a:lstStyle/>
-          <a:p>
-            <a:pPr algn="ctr" indent="0" marL="0">
-              <a:buNone/>
-            </a:pPr>
-            <a:r>
-              <a:rPr lang="en-US" sz="1900" b="1" dirty="0">
-                <a:solidFill>
-                  <a:srgbClr val="FFFFFF"/>
-                </a:solidFill>
-                <a:latin typeface="Cambria" pitchFamily="34" charset="0"/>
-                <a:ea typeface="Cambria" pitchFamily="34" charset="-122"/>
-                <a:cs typeface="Cambria" pitchFamily="34" charset="-120"/>
-              </a:rPr>
-              <a:t>3</a:t>
-            </a:r>
-            <a:endParaRPr lang="en-US" sz="1900" dirty="0"/>
-          </a:p>
-        </p:txBody>
-      </p:sp>
-      <p:sp>
-        <p:nvSpPr>
-          <p:cNvPr id="17" name="Text 15"/>
-          <p:cNvSpPr/>
-          <p:nvPr/>
-        </p:nvSpPr>
-        <p:spPr>
-          <a:xfrm>
-            <a:off x="1645920" y="4828032"/>
-            <a:ext cx="2834640" cy="457200"/>
-          </a:xfrm>
-          <a:prstGeom prst="rect">
-            <a:avLst/>
-          </a:prstGeom>
-          <a:noFill/>
-          <a:ln/>
-        </p:spPr>
-        <p:txBody>
-          <a:bodyPr wrap="square" lIns="0" tIns="0" rIns="0" bIns="0" rtlCol="0" anchor="ctr"/>
-          <a:lstStyle/>
-          <a:p>
-            <a:pPr indent="0" marL="0">
-              <a:buNone/>
-            </a:pPr>
-            <a:r>
-              <a:rPr lang="en-US" sz="1800" b="1" dirty="0">
-                <a:solidFill>
-                  <a:srgbClr val="1A1A1A"/>
-                </a:solidFill>
-                <a:latin typeface="Cambria" pitchFamily="34" charset="0"/>
-                <a:ea typeface="Cambria" pitchFamily="34" charset="-122"/>
-                <a:cs typeface="Cambria" pitchFamily="34" charset="-120"/>
-              </a:rPr>
-              <a:t>A careful scrape</a:t>
-            </a:r>
-            <a:endParaRPr lang="en-US" sz="1800" dirty="0"/>
-          </a:p>
-        </p:txBody>
-      </p:sp>
-      <p:sp>
-        <p:nvSpPr>
-          <p:cNvPr id="18" name="Text 16"/>
-          <p:cNvSpPr/>
-          <p:nvPr/>
-        </p:nvSpPr>
-        <p:spPr>
-          <a:xfrm>
-            <a:off x="4572000" y="4846320"/>
-            <a:ext cx="6675120" cy="822960"/>
-          </a:xfrm>
-          <a:prstGeom prst="rect">
-            <a:avLst/>
-          </a:prstGeom>
-          <a:noFill/>
-          <a:ln/>
-        </p:spPr>
-        <p:txBody>
-          <a:bodyPr wrap="square" lIns="0" tIns="0" rIns="0" bIns="0" rtlCol="0" anchor="t"/>
-          <a:lstStyle/>
-          <a:p>
-            <a:pPr indent="0" marL="0">
-              <a:buNone/>
-            </a:pPr>
-            <a:r>
-              <a:rPr lang="en-US" sz="1350" dirty="0">
-                <a:solidFill>
-                  <a:srgbClr val="1A1A1A"/>
-                </a:solidFill>
-                <a:latin typeface="Calibri" pitchFamily="34" charset="0"/>
-                <a:ea typeface="Calibri" pitchFamily="34" charset="-122"/>
-                <a:cs typeface="Calibri" pitchFamily="34" charset="-120"/>
-              </a:rPr>
-              <a:t>Only when there is no file and no API. Slowly, and never republished.</a:t>
-            </a:r>
-            <a:endParaRPr lang="en-US" sz="1350" dirty="0"/>
-          </a:p>
-        </p:txBody>
-      </p:sp>
-      <p:sp>
-        <p:nvSpPr>
-          <p:cNvPr id="19" name="Text 17"/>
-          <p:cNvSpPr/>
-          <p:nvPr/>
-        </p:nvSpPr>
-        <p:spPr>
-          <a:xfrm>
-            <a:off x="640080" y="6263640"/>
-            <a:ext cx="10881360" cy="365760"/>
-          </a:xfrm>
-          <a:prstGeom prst="rect">
-            <a:avLst/>
-          </a:prstGeom>
-          <a:noFill/>
-          <a:ln/>
-        </p:spPr>
-        <p:txBody>
-          <a:bodyPr wrap="square" rtlCol="0" anchor="ctr"/>
-          <a:lstStyle/>
-          <a:p>
-            <a:pPr indent="0" marL="0">
-              <a:buNone/>
-            </a:pPr>
-            <a:r>
-              <a:rPr lang="en-US" sz="1100" i="1" dirty="0">
-                <a:solidFill>
-                  <a:srgbClr val="6B6B63"/>
-                </a:solidFill>
-                <a:latin typeface="Calibri" pitchFamily="34" charset="0"/>
-                <a:ea typeface="Calibri" pitchFamily="34" charset="-122"/>
-                <a:cs typeface="Calibri" pitchFamily="34" charset="-120"/>
-              </a:rPr>
-              <a:t>The licensing line decides which routes are even open to you. That is the next slide.</a:t>
-            </a:r>
-            <a:endParaRPr lang="en-US" sz="1100" dirty="0"/>
           </a:p>
         </p:txBody>
       </p:sp>
@@ -8707,13 +8381,13 @@
             <a:r>
               <a:rPr lang="en-US" sz="1300" b="1" spc="300" kern="0" dirty="0">
                 <a:solidFill>
-                  <a:srgbClr val="2E5F8A"/>
+                  <a:srgbClr val="7A3B2E"/>
                 </a:solidFill>
                 <a:latin typeface="Calibri" pitchFamily="34" charset="0"/>
                 <a:ea typeface="Calibri" pitchFamily="34" charset="-122"/>
                 <a:cs typeface="Calibri" pitchFamily="34" charset="-120"/>
               </a:rPr>
-              <a:t>ROUTE TWO</a:t>
+              <a:t>GETTING THE DATA</a:t>
             </a:r>
             <a:endParaRPr lang="en-US" sz="1300" dirty="0"/>
           </a:p>
@@ -8752,45 +8426,64 @@
                 <a:ea typeface="Cambria" pitchFamily="34" charset="-122"/>
                 <a:cs typeface="Cambria" pitchFamily="34" charset="-120"/>
               </a:rPr>
-              <a:t>Look at one reply before you write the loop</a:t>
+              <a:t>Three routes, in the order you should try them</a:t>
             </a:r>
             <a:endParaRPr lang="en-US" sz="3400" dirty="0"/>
           </a:p>
         </p:txBody>
       </p:sp>
-      <p:pic>
-        <p:nvPicPr>
-          <p:cNvPr id="4" name="Image 0" descr="/tmp/figs/w4_api_anatomy.png">    </p:cNvPr>
-          <p:cNvPicPr>
-            <a:picLocks noChangeAspect="1"/>
-          </p:cNvPicPr>
-          <p:nvPr/>
-        </p:nvPicPr>
-        <p:blipFill>
-          <a:blip r:embed="rId1"/>
-          <a:srcRect l="0" r="0" t="0" b="0"/>
-          <a:stretch/>
-        </p:blipFill>
-        <p:spPr>
-          <a:xfrm>
-            <a:off x="640080" y="1874520"/>
-            <a:ext cx="10881360" cy="3566160"/>
-          </a:xfrm>
-          <a:prstGeom prst="rect">
-            <a:avLst/>
-          </a:prstGeom>
-        </p:spPr>
-      </p:pic>
-      <p:sp>
-        <p:nvSpPr>
-          <p:cNvPr id="5" name="Text 2"/>
-          <p:cNvSpPr/>
-          <p:nvPr/>
-        </p:nvSpPr>
-        <p:spPr>
-          <a:xfrm>
-            <a:off x="640080" y="5897880"/>
-            <a:ext cx="10881360" cy="411480"/>
+      <p:sp>
+        <p:nvSpPr>
+          <p:cNvPr id="4" name="Shape 2"/>
+          <p:cNvSpPr/>
+          <p:nvPr/>
+        </p:nvSpPr>
+        <p:spPr>
+          <a:xfrm>
+            <a:off x="640080" y="2011680"/>
+            <a:ext cx="10881360" cy="1143000"/>
+          </a:xfrm>
+          <a:prstGeom prst="roundRect">
+            <a:avLst>
+              <a:gd name="adj" fmla="val 8000"/>
+            </a:avLst>
+          </a:prstGeom>
+          <a:solidFill>
+            <a:srgbClr val="F4EEE8"/>
+          </a:solidFill>
+          <a:ln/>
+        </p:spPr>
+      </p:sp>
+      <p:sp>
+        <p:nvSpPr>
+          <p:cNvPr id="5" name="Shape 3"/>
+          <p:cNvSpPr/>
+          <p:nvPr/>
+        </p:nvSpPr>
+        <p:spPr>
+          <a:xfrm>
+            <a:off x="914400" y="2304288"/>
+            <a:ext cx="548640" cy="548640"/>
+          </a:xfrm>
+          <a:prstGeom prst="ellipse">
+            <a:avLst/>
+          </a:prstGeom>
+          <a:solidFill>
+            <a:srgbClr val="3F6F5F"/>
+          </a:solidFill>
+          <a:ln/>
+        </p:spPr>
+      </p:sp>
+      <p:sp>
+        <p:nvSpPr>
+          <p:cNvPr id="6" name="Text 4"/>
+          <p:cNvSpPr/>
+          <p:nvPr/>
+        </p:nvSpPr>
+        <p:spPr>
+          <a:xfrm>
+            <a:off x="914400" y="2304288"/>
+            <a:ext cx="548640" cy="548640"/>
           </a:xfrm>
           <a:prstGeom prst="rect">
             <a:avLst/>
@@ -8802,60 +8495,456 @@
           <a:bodyPr wrap="square" rtlCol="0" anchor="ctr"/>
           <a:lstStyle/>
           <a:p>
-            <a:pPr indent="0" marL="0">
-              <a:buNone/>
-            </a:pPr>
-            <a:r>
-              <a:rPr lang="en-US" sz="1600" i="1" dirty="0">
-                <a:solidFill>
-                  <a:srgbClr val="1A1A1A"/>
+            <a:pPr algn="ctr" indent="0" marL="0">
+              <a:buNone/>
+            </a:pPr>
+            <a:r>
+              <a:rPr lang="en-US" sz="1900" b="1" dirty="0">
+                <a:solidFill>
+                  <a:srgbClr val="FFFFFF"/>
                 </a:solidFill>
                 <a:latin typeface="Cambria" pitchFamily="34" charset="0"/>
                 <a:ea typeface="Cambria" pitchFamily="34" charset="-122"/>
                 <a:cs typeface="Cambria" pitchFamily="34" charset="-120"/>
               </a:rPr>
-              <a:t>Ask for one item. The pagination block tells you how big the job is; the data block is your rows.</a:t>
-            </a:r>
-            <a:endParaRPr lang="en-US" sz="1600" dirty="0"/>
-          </a:p>
-        </p:txBody>
-      </p:sp>
-      <p:sp>
-        <p:nvSpPr>
-          <p:cNvPr id="6" name="Text 3"/>
-          <p:cNvSpPr/>
-          <p:nvPr/>
-        </p:nvSpPr>
-        <p:spPr>
-          <a:xfrm>
-            <a:off x="640080" y="6355080"/>
-            <a:ext cx="10881360" cy="320040"/>
-          </a:xfrm>
-          <a:prstGeom prst="rect">
-            <a:avLst/>
-          </a:prstGeom>
-          <a:noFill/>
-          <a:ln/>
-        </p:spPr>
-        <p:txBody>
-          <a:bodyPr wrap="square" rtlCol="0" anchor="ctr"/>
-          <a:lstStyle/>
-          <a:p>
-            <a:pPr indent="0" marL="0">
-              <a:buNone/>
-            </a:pPr>
-            <a:r>
-              <a:rPr lang="en-US" sz="1000" dirty="0">
-                <a:solidFill>
-                  <a:srgbClr val="6B6B63"/>
+              <a:t>1</a:t>
+            </a:r>
+            <a:endParaRPr lang="en-US" sz="1900" dirty="0"/>
+          </a:p>
+        </p:txBody>
+      </p:sp>
+      <p:sp>
+        <p:nvSpPr>
+          <p:cNvPr id="7" name="Text 5"/>
+          <p:cNvSpPr/>
+          <p:nvPr/>
+        </p:nvSpPr>
+        <p:spPr>
+          <a:xfrm>
+            <a:off x="1645920" y="2176272"/>
+            <a:ext cx="2834640" cy="457200"/>
+          </a:xfrm>
+          <a:prstGeom prst="rect">
+            <a:avLst/>
+          </a:prstGeom>
+          <a:noFill/>
+          <a:ln/>
+        </p:spPr>
+        <p:txBody>
+          <a:bodyPr wrap="square" lIns="0" tIns="0" rIns="0" bIns="0" rtlCol="0" anchor="ctr"/>
+          <a:lstStyle/>
+          <a:p>
+            <a:pPr indent="0" marL="0">
+              <a:buNone/>
+            </a:pPr>
+            <a:r>
+              <a:rPr lang="en-US" sz="1800" b="1" dirty="0">
+                <a:solidFill>
+                  <a:srgbClr val="1A1A1A"/>
+                </a:solidFill>
+                <a:latin typeface="Cambria" pitchFamily="34" charset="0"/>
+                <a:ea typeface="Cambria" pitchFamily="34" charset="-122"/>
+                <a:cs typeface="Cambria" pitchFamily="34" charset="-120"/>
+              </a:rPr>
+              <a:t>A prepared file</a:t>
+            </a:r>
+            <a:endParaRPr lang="en-US" sz="1800" dirty="0"/>
+          </a:p>
+        </p:txBody>
+      </p:sp>
+      <p:sp>
+        <p:nvSpPr>
+          <p:cNvPr id="8" name="Text 6"/>
+          <p:cNvSpPr/>
+          <p:nvPr/>
+        </p:nvSpPr>
+        <p:spPr>
+          <a:xfrm>
+            <a:off x="4572000" y="2194560"/>
+            <a:ext cx="6675120" cy="822960"/>
+          </a:xfrm>
+          <a:prstGeom prst="rect">
+            <a:avLst/>
+          </a:prstGeom>
+          <a:noFill/>
+          <a:ln/>
+        </p:spPr>
+        <p:txBody>
+          <a:bodyPr wrap="square" lIns="0" tIns="0" rIns="0" bIns="0" rtlCol="0" anchor="t"/>
+          <a:lstStyle/>
+          <a:p>
+            <a:pPr indent="0" marL="0">
+              <a:buNone/>
+            </a:pPr>
+            <a:r>
+              <a:rPr lang="en-US" sz="1350" dirty="0">
+                <a:solidFill>
+                  <a:srgbClr val="1A1A1A"/>
                 </a:solidFill>
                 <a:latin typeface="Calibri" pitchFamily="34" charset="0"/>
                 <a:ea typeface="Calibri" pitchFamily="34" charset="-122"/>
                 <a:cs typeface="Calibri" pitchFamily="34" charset="-120"/>
               </a:rPr>
-              <a:t>A live call made while this deck was built: 132,681 works match "landscape", handed over two at a time.</a:t>
-            </a:r>
-            <a:endParaRPr lang="en-US" sz="1000" dirty="0"/>
+              <a:t>pd.read_csv(url) · gdown · load_dataset(). Most projects should stop here.</a:t>
+            </a:r>
+            <a:endParaRPr lang="en-US" sz="1350" dirty="0"/>
+          </a:p>
+        </p:txBody>
+      </p:sp>
+      <p:sp>
+        <p:nvSpPr>
+          <p:cNvPr id="9" name="Shape 7"/>
+          <p:cNvSpPr/>
+          <p:nvPr/>
+        </p:nvSpPr>
+        <p:spPr>
+          <a:xfrm>
+            <a:off x="640080" y="3337560"/>
+            <a:ext cx="10881360" cy="1143000"/>
+          </a:xfrm>
+          <a:prstGeom prst="roundRect">
+            <a:avLst>
+              <a:gd name="adj" fmla="val 8000"/>
+            </a:avLst>
+          </a:prstGeom>
+          <a:solidFill>
+            <a:srgbClr val="F4EEE8"/>
+          </a:solidFill>
+          <a:ln/>
+        </p:spPr>
+      </p:sp>
+      <p:sp>
+        <p:nvSpPr>
+          <p:cNvPr id="10" name="Shape 8"/>
+          <p:cNvSpPr/>
+          <p:nvPr/>
+        </p:nvSpPr>
+        <p:spPr>
+          <a:xfrm>
+            <a:off x="914400" y="3630168"/>
+            <a:ext cx="548640" cy="548640"/>
+          </a:xfrm>
+          <a:prstGeom prst="ellipse">
+            <a:avLst/>
+          </a:prstGeom>
+          <a:solidFill>
+            <a:srgbClr val="2E5F8A"/>
+          </a:solidFill>
+          <a:ln/>
+        </p:spPr>
+      </p:sp>
+      <p:sp>
+        <p:nvSpPr>
+          <p:cNvPr id="11" name="Text 9"/>
+          <p:cNvSpPr/>
+          <p:nvPr/>
+        </p:nvSpPr>
+        <p:spPr>
+          <a:xfrm>
+            <a:off x="914400" y="3630168"/>
+            <a:ext cx="548640" cy="548640"/>
+          </a:xfrm>
+          <a:prstGeom prst="rect">
+            <a:avLst/>
+          </a:prstGeom>
+          <a:noFill/>
+          <a:ln/>
+        </p:spPr>
+        <p:txBody>
+          <a:bodyPr wrap="square" rtlCol="0" anchor="ctr"/>
+          <a:lstStyle/>
+          <a:p>
+            <a:pPr algn="ctr" indent="0" marL="0">
+              <a:buNone/>
+            </a:pPr>
+            <a:r>
+              <a:rPr lang="en-US" sz="1900" b="1" dirty="0">
+                <a:solidFill>
+                  <a:srgbClr val="FFFFFF"/>
+                </a:solidFill>
+                <a:latin typeface="Cambria" pitchFamily="34" charset="0"/>
+                <a:ea typeface="Cambria" pitchFamily="34" charset="-122"/>
+                <a:cs typeface="Cambria" pitchFamily="34" charset="-120"/>
+              </a:rPr>
+              <a:t>2</a:t>
+            </a:r>
+            <a:endParaRPr lang="en-US" sz="1900" dirty="0"/>
+          </a:p>
+        </p:txBody>
+      </p:sp>
+      <p:sp>
+        <p:nvSpPr>
+          <p:cNvPr id="12" name="Text 10"/>
+          <p:cNvSpPr/>
+          <p:nvPr/>
+        </p:nvSpPr>
+        <p:spPr>
+          <a:xfrm>
+            <a:off x="1645920" y="3502152"/>
+            <a:ext cx="2834640" cy="457200"/>
+          </a:xfrm>
+          <a:prstGeom prst="rect">
+            <a:avLst/>
+          </a:prstGeom>
+          <a:noFill/>
+          <a:ln/>
+        </p:spPr>
+        <p:txBody>
+          <a:bodyPr wrap="square" lIns="0" tIns="0" rIns="0" bIns="0" rtlCol="0" anchor="ctr"/>
+          <a:lstStyle/>
+          <a:p>
+            <a:pPr indent="0" marL="0">
+              <a:buNone/>
+            </a:pPr>
+            <a:r>
+              <a:rPr lang="en-US" sz="1800" b="1" dirty="0">
+                <a:solidFill>
+                  <a:srgbClr val="1A1A1A"/>
+                </a:solidFill>
+                <a:latin typeface="Cambria" pitchFamily="34" charset="0"/>
+                <a:ea typeface="Cambria" pitchFamily="34" charset="-122"/>
+                <a:cs typeface="Cambria" pitchFamily="34" charset="-120"/>
+              </a:rPr>
+              <a:t>An API</a:t>
+            </a:r>
+            <a:endParaRPr lang="en-US" sz="1800" dirty="0"/>
+          </a:p>
+        </p:txBody>
+      </p:sp>
+      <p:sp>
+        <p:nvSpPr>
+          <p:cNvPr id="13" name="Text 11"/>
+          <p:cNvSpPr/>
+          <p:nvPr/>
+        </p:nvSpPr>
+        <p:spPr>
+          <a:xfrm>
+            <a:off x="4572000" y="3520440"/>
+            <a:ext cx="6675120" cy="822960"/>
+          </a:xfrm>
+          <a:prstGeom prst="rect">
+            <a:avLst/>
+          </a:prstGeom>
+          <a:noFill/>
+          <a:ln/>
+        </p:spPr>
+        <p:txBody>
+          <a:bodyPr wrap="square" lIns="0" tIns="0" rIns="0" bIns="0" rtlCol="0" anchor="t"/>
+          <a:lstStyle/>
+          <a:p>
+            <a:pPr indent="0" marL="0">
+              <a:buNone/>
+            </a:pPr>
+            <a:r>
+              <a:rPr lang="en-US" sz="1350" dirty="0">
+                <a:solidFill>
+                  <a:srgbClr val="1A1A1A"/>
+                </a:solidFill>
+                <a:latin typeface="Calibri" pitchFamily="34" charset="0"/>
+                <a:ea typeface="Calibri" pitchFamily="34" charset="-122"/>
+                <a:cs typeface="Calibri" pitchFamily="34" charset="-120"/>
+              </a:rPr>
+              <a:t>A documented URL that returns JSON. Four words: endpoint, key, pagination, rate limit.</a:t>
+            </a:r>
+            <a:endParaRPr lang="en-US" sz="1350" dirty="0"/>
+          </a:p>
+        </p:txBody>
+      </p:sp>
+      <p:sp>
+        <p:nvSpPr>
+          <p:cNvPr id="14" name="Shape 12"/>
+          <p:cNvSpPr/>
+          <p:nvPr/>
+        </p:nvSpPr>
+        <p:spPr>
+          <a:xfrm>
+            <a:off x="640080" y="4663440"/>
+            <a:ext cx="10881360" cy="1143000"/>
+          </a:xfrm>
+          <a:prstGeom prst="roundRect">
+            <a:avLst>
+              <a:gd name="adj" fmla="val 8000"/>
+            </a:avLst>
+          </a:prstGeom>
+          <a:solidFill>
+            <a:srgbClr val="F4EEE8"/>
+          </a:solidFill>
+          <a:ln/>
+        </p:spPr>
+      </p:sp>
+      <p:sp>
+        <p:nvSpPr>
+          <p:cNvPr id="15" name="Shape 13"/>
+          <p:cNvSpPr/>
+          <p:nvPr/>
+        </p:nvSpPr>
+        <p:spPr>
+          <a:xfrm>
+            <a:off x="914400" y="4956048"/>
+            <a:ext cx="548640" cy="548640"/>
+          </a:xfrm>
+          <a:prstGeom prst="ellipse">
+            <a:avLst/>
+          </a:prstGeom>
+          <a:solidFill>
+            <a:srgbClr val="7A3B2E"/>
+          </a:solidFill>
+          <a:ln/>
+        </p:spPr>
+      </p:sp>
+      <p:sp>
+        <p:nvSpPr>
+          <p:cNvPr id="16" name="Text 14"/>
+          <p:cNvSpPr/>
+          <p:nvPr/>
+        </p:nvSpPr>
+        <p:spPr>
+          <a:xfrm>
+            <a:off x="914400" y="4956048"/>
+            <a:ext cx="548640" cy="548640"/>
+          </a:xfrm>
+          <a:prstGeom prst="rect">
+            <a:avLst/>
+          </a:prstGeom>
+          <a:noFill/>
+          <a:ln/>
+        </p:spPr>
+        <p:txBody>
+          <a:bodyPr wrap="square" rtlCol="0" anchor="ctr"/>
+          <a:lstStyle/>
+          <a:p>
+            <a:pPr algn="ctr" indent="0" marL="0">
+              <a:buNone/>
+            </a:pPr>
+            <a:r>
+              <a:rPr lang="en-US" sz="1900" b="1" dirty="0">
+                <a:solidFill>
+                  <a:srgbClr val="FFFFFF"/>
+                </a:solidFill>
+                <a:latin typeface="Cambria" pitchFamily="34" charset="0"/>
+                <a:ea typeface="Cambria" pitchFamily="34" charset="-122"/>
+                <a:cs typeface="Cambria" pitchFamily="34" charset="-120"/>
+              </a:rPr>
+              <a:t>3</a:t>
+            </a:r>
+            <a:endParaRPr lang="en-US" sz="1900" dirty="0"/>
+          </a:p>
+        </p:txBody>
+      </p:sp>
+      <p:sp>
+        <p:nvSpPr>
+          <p:cNvPr id="17" name="Text 15"/>
+          <p:cNvSpPr/>
+          <p:nvPr/>
+        </p:nvSpPr>
+        <p:spPr>
+          <a:xfrm>
+            <a:off x="1645920" y="4828032"/>
+            <a:ext cx="2834640" cy="457200"/>
+          </a:xfrm>
+          <a:prstGeom prst="rect">
+            <a:avLst/>
+          </a:prstGeom>
+          <a:noFill/>
+          <a:ln/>
+        </p:spPr>
+        <p:txBody>
+          <a:bodyPr wrap="square" lIns="0" tIns="0" rIns="0" bIns="0" rtlCol="0" anchor="ctr"/>
+          <a:lstStyle/>
+          <a:p>
+            <a:pPr indent="0" marL="0">
+              <a:buNone/>
+            </a:pPr>
+            <a:r>
+              <a:rPr lang="en-US" sz="1800" b="1" dirty="0">
+                <a:solidFill>
+                  <a:srgbClr val="1A1A1A"/>
+                </a:solidFill>
+                <a:latin typeface="Cambria" pitchFamily="34" charset="0"/>
+                <a:ea typeface="Cambria" pitchFamily="34" charset="-122"/>
+                <a:cs typeface="Cambria" pitchFamily="34" charset="-120"/>
+              </a:rPr>
+              <a:t>A careful scrape</a:t>
+            </a:r>
+            <a:endParaRPr lang="en-US" sz="1800" dirty="0"/>
+          </a:p>
+        </p:txBody>
+      </p:sp>
+      <p:sp>
+        <p:nvSpPr>
+          <p:cNvPr id="18" name="Text 16"/>
+          <p:cNvSpPr/>
+          <p:nvPr/>
+        </p:nvSpPr>
+        <p:spPr>
+          <a:xfrm>
+            <a:off x="4572000" y="4846320"/>
+            <a:ext cx="6675120" cy="822960"/>
+          </a:xfrm>
+          <a:prstGeom prst="rect">
+            <a:avLst/>
+          </a:prstGeom>
+          <a:noFill/>
+          <a:ln/>
+        </p:spPr>
+        <p:txBody>
+          <a:bodyPr wrap="square" lIns="0" tIns="0" rIns="0" bIns="0" rtlCol="0" anchor="t"/>
+          <a:lstStyle/>
+          <a:p>
+            <a:pPr indent="0" marL="0">
+              <a:buNone/>
+            </a:pPr>
+            <a:r>
+              <a:rPr lang="en-US" sz="1350" dirty="0">
+                <a:solidFill>
+                  <a:srgbClr val="1A1A1A"/>
+                </a:solidFill>
+                <a:latin typeface="Calibri" pitchFamily="34" charset="0"/>
+                <a:ea typeface="Calibri" pitchFamily="34" charset="-122"/>
+                <a:cs typeface="Calibri" pitchFamily="34" charset="-120"/>
+              </a:rPr>
+              <a:t>Only when there is no file and no API. Slowly, and never republished.</a:t>
+            </a:r>
+            <a:endParaRPr lang="en-US" sz="1350" dirty="0"/>
+          </a:p>
+        </p:txBody>
+      </p:sp>
+      <p:sp>
+        <p:nvSpPr>
+          <p:cNvPr id="19" name="Text 17"/>
+          <p:cNvSpPr/>
+          <p:nvPr/>
+        </p:nvSpPr>
+        <p:spPr>
+          <a:xfrm>
+            <a:off x="640080" y="6263640"/>
+            <a:ext cx="10881360" cy="365760"/>
+          </a:xfrm>
+          <a:prstGeom prst="rect">
+            <a:avLst/>
+          </a:prstGeom>
+          <a:noFill/>
+          <a:ln/>
+        </p:spPr>
+        <p:txBody>
+          <a:bodyPr wrap="square" rtlCol="0" anchor="ctr"/>
+          <a:lstStyle/>
+          <a:p>
+            <a:pPr indent="0" marL="0">
+              <a:buNone/>
+            </a:pPr>
+            <a:r>
+              <a:rPr lang="en-US" sz="1100" i="1" dirty="0">
+                <a:solidFill>
+                  <a:srgbClr val="6B6B63"/>
+                </a:solidFill>
+                <a:latin typeface="Calibri" pitchFamily="34" charset="0"/>
+                <a:ea typeface="Calibri" pitchFamily="34" charset="-122"/>
+                <a:cs typeface="Calibri" pitchFamily="34" charset="-120"/>
+              </a:rPr>
+              <a:t>The licensing line decides which routes are even open to you. That is the next slide.</a:t>
+            </a:r>
+            <a:endParaRPr lang="en-US" sz="1100" dirty="0"/>
           </a:p>
         </p:txBody>
       </p:sp>
@@ -8924,7 +9013,7 @@
                 <a:ea typeface="Calibri" pitchFamily="34" charset="-122"/>
                 <a:cs typeface="Calibri" pitchFamily="34" charset="-120"/>
               </a:rPr>
-              <a:t>ROUTE TWO, LIVE</a:t>
+              <a:t>ROUTE TWO</a:t>
             </a:r>
             <a:endParaRPr lang="en-US" sz="1300" dirty="0"/>
           </a:p>
@@ -8963,7 +9052,7 @@
                 <a:ea typeface="Cambria" pitchFamily="34" charset="-122"/>
                 <a:cs typeface="Cambria" pitchFamily="34" charset="-120"/>
               </a:rPr>
-              <a:t>A URL, some JSON, and then a table</a:t>
+              <a:t>Look at one reply before you write the loop</a:t>
             </a:r>
             <a:endParaRPr lang="en-US" sz="3400" dirty="0"/>
           </a:p>
@@ -8971,7 +9060,7 @@
       </p:sp>
       <p:pic>
         <p:nvPicPr>
-          <p:cNvPr id="4" name="Image 0" descr="/tmp/figs/w4_api.png">    </p:cNvPr>
+          <p:cNvPr id="4" name="Image 0" descr="/tmp/figs/w4_api_anatomy.png">    </p:cNvPr>
           <p:cNvPicPr>
             <a:picLocks noChangeAspect="1"/>
           </p:cNvPicPr>
@@ -8984,8 +9073,8 @@
         </p:blipFill>
         <p:spPr>
           <a:xfrm>
-            <a:off x="1097280" y="1920240"/>
-            <a:ext cx="9966960" cy="3749040"/>
+            <a:off x="640080" y="1874520"/>
+            <a:ext cx="10881360" cy="3566160"/>
           </a:xfrm>
           <a:prstGeom prst="rect">
             <a:avLst/>
@@ -9025,7 +9114,7 @@
                 <a:ea typeface="Cambria" pitchFamily="34" charset="-122"/>
                 <a:cs typeface="Cambria" pitchFamily="34" charset="-120"/>
               </a:rPr>
-              <a:t>An endpoint is a URL that answers with data. A key is a name badge. Pagination hands you a page at a time.</a:t>
+              <a:t>Ask for one item. The pagination block tells you how big the job is; the data block is your rows.</a:t>
             </a:r>
             <a:endParaRPr lang="en-US" sz="1600" dirty="0"/>
           </a:p>
@@ -9064,7 +9153,7 @@
                 <a:ea typeface="Calibri" pitchFamily="34" charset="-122"/>
                 <a:cs typeface="Calibri" pitchFamily="34" charset="-120"/>
               </a:rPr>
-              <a:t>Left panel: a real response, live from api.artic.edu. The AI writes the three lines that make the table.</a:t>
+              <a:t>A live call made while this deck was built: 132,681 works match "landscape", handed over two at a time.</a:t>
             </a:r>
             <a:endParaRPr lang="en-US" sz="1000" dirty="0"/>
           </a:p>
@@ -9129,13 +9218,13 @@
             <a:r>
               <a:rPr lang="en-US" sz="1300" b="1" spc="300" kern="0" dirty="0">
                 <a:solidFill>
-                  <a:srgbClr val="B9852F"/>
+                  <a:srgbClr val="2E5F8A"/>
                 </a:solidFill>
                 <a:latin typeface="Calibri" pitchFamily="34" charset="0"/>
                 <a:ea typeface="Calibri" pitchFamily="34" charset="-122"/>
                 <a:cs typeface="Calibri" pitchFamily="34" charset="-120"/>
               </a:rPr>
-              <a:t>EVERY API IS SOMEBODY'S DESIGN</a:t>
+              <a:t>ROUTE TWO, LIVE</a:t>
             </a:r>
             <a:endParaRPr lang="en-US" sz="1300" dirty="0"/>
           </a:p>
@@ -9174,7 +9263,7 @@
                 <a:ea typeface="Cambria" pitchFamily="34" charset="-122"/>
                 <a:cs typeface="Cambria" pitchFamily="34" charset="-120"/>
               </a:rPr>
-              <a:t>Two museums, two shapes</a:t>
+              <a:t>A URL, some JSON, and then a table</a:t>
             </a:r>
             <a:endParaRPr lang="en-US" sz="3400" dirty="0"/>
           </a:p>
@@ -9182,7 +9271,7 @@
       </p:sp>
       <p:pic>
         <p:nvPicPr>
-          <p:cNvPr id="4" name="Image 0" descr="/tmp/figs/w4_api_shapes.png">    </p:cNvPr>
+          <p:cNvPr id="4" name="Image 0" descr="/tmp/figs/w4_api.png">    </p:cNvPr>
           <p:cNvPicPr>
             <a:picLocks noChangeAspect="1"/>
           </p:cNvPicPr>
@@ -9195,8 +9284,8 @@
         </p:blipFill>
         <p:spPr>
           <a:xfrm>
-            <a:off x="1005840" y="1828800"/>
-            <a:ext cx="10149840" cy="3840480"/>
+            <a:off x="1097280" y="1920240"/>
+            <a:ext cx="9966960" cy="3749040"/>
           </a:xfrm>
           <a:prstGeom prst="rect">
             <a:avLst/>
@@ -9236,7 +9325,7 @@
                 <a:ea typeface="Cambria" pitchFamily="34" charset="-122"/>
                 <a:cs typeface="Cambria" pitchFamily="34" charset="-120"/>
               </a:rPr>
-              <a:t>One hands you rows. The other hands you a phone book, and every row after that is another request.</a:t>
+              <a:t>An endpoint is a URL that answers with data. A key is a name badge. Pagination hands you a page at a time.</a:t>
             </a:r>
             <a:endParaRPr lang="en-US" sz="1600" dirty="0"/>
           </a:p>
@@ -9275,7 +9364,7 @@
                 <a:ea typeface="Calibri" pitchFamily="34" charset="-122"/>
                 <a:cs typeface="Calibri" pitchFamily="34" charset="-120"/>
               </a:rPr>
-              <a:t>Both queried live for this slide. Work out which kind you have before you estimate how long anything will take.</a:t>
+              <a:t>Left panel: a real response, live from api.artic.edu. The AI writes the three lines that make the table.</a:t>
             </a:r>
             <a:endParaRPr lang="en-US" sz="1000" dirty="0"/>
           </a:p>
@@ -9340,13 +9429,13 @@
             <a:r>
               <a:rPr lang="en-US" sz="1300" b="1" spc="300" kern="0" dirty="0">
                 <a:solidFill>
-                  <a:srgbClr val="7A3B2E"/>
+                  <a:srgbClr val="B9852F"/>
                 </a:solidFill>
                 <a:latin typeface="Calibri" pitchFamily="34" charset="0"/>
                 <a:ea typeface="Calibri" pitchFamily="34" charset="-122"/>
                 <a:cs typeface="Calibri" pitchFamily="34" charset="-120"/>
               </a:rPr>
-              <a:t>ROUTE THREE</a:t>
+              <a:t>EVERY API IS SOMEBODY'S DESIGN</a:t>
             </a:r>
             <a:endParaRPr lang="en-US" sz="1300" dirty="0"/>
           </a:p>
@@ -9385,448 +9474,110 @@
                 <a:ea typeface="Cambria" pitchFamily="34" charset="-122"/>
                 <a:cs typeface="Cambria" pitchFamily="34" charset="-120"/>
               </a:rPr>
-              <a:t>Scraping, and the four things that come with it</a:t>
+              <a:t>Two museums, two shapes</a:t>
             </a:r>
             <a:endParaRPr lang="en-US" sz="3400" dirty="0"/>
           </a:p>
         </p:txBody>
       </p:sp>
-      <p:sp>
-        <p:nvSpPr>
-          <p:cNvPr id="4" name="Shape 2"/>
-          <p:cNvSpPr/>
-          <p:nvPr/>
-        </p:nvSpPr>
-        <p:spPr>
-          <a:xfrm>
-            <a:off x="640080" y="2011680"/>
-            <a:ext cx="10881360" cy="914400"/>
-          </a:xfrm>
-          <a:prstGeom prst="roundRect">
-            <a:avLst>
-              <a:gd name="adj" fmla="val 10000"/>
-            </a:avLst>
-          </a:prstGeom>
-          <a:solidFill>
-            <a:srgbClr val="F4EEE8"/>
-          </a:solidFill>
-          <a:ln/>
-        </p:spPr>
-      </p:sp>
-      <p:sp>
-        <p:nvSpPr>
-          <p:cNvPr id="5" name="Text 3"/>
-          <p:cNvSpPr/>
-          <p:nvPr/>
-        </p:nvSpPr>
-        <p:spPr>
-          <a:xfrm>
-            <a:off x="960120" y="2103120"/>
-            <a:ext cx="4023360" cy="731520"/>
-          </a:xfrm>
-          <a:prstGeom prst="rect">
-            <a:avLst/>
-          </a:prstGeom>
-          <a:noFill/>
-          <a:ln/>
-        </p:spPr>
-        <p:txBody>
-          <a:bodyPr wrap="square" lIns="0" tIns="0" rIns="0" bIns="0" rtlCol="0" anchor="ctr"/>
-          <a:lstStyle/>
-          <a:p>
-            <a:pPr indent="0" marL="0">
-              <a:buNone/>
-            </a:pPr>
-            <a:r>
-              <a:rPr lang="en-US" sz="1700" b="1" dirty="0">
-                <a:solidFill>
-                  <a:srgbClr val="7A3B2E"/>
+      <p:pic>
+        <p:nvPicPr>
+          <p:cNvPr id="4" name="Image 0" descr="/tmp/figs/w4_api_shapes.png">    </p:cNvPr>
+          <p:cNvPicPr>
+            <a:picLocks noChangeAspect="1"/>
+          </p:cNvPicPr>
+          <p:nvPr/>
+        </p:nvPicPr>
+        <p:blipFill>
+          <a:blip r:embed="rId1"/>
+          <a:srcRect l="0" r="0" t="0" b="0"/>
+          <a:stretch/>
+        </p:blipFill>
+        <p:spPr>
+          <a:xfrm>
+            <a:off x="1005840" y="1828800"/>
+            <a:ext cx="10149840" cy="3840480"/>
+          </a:xfrm>
+          <a:prstGeom prst="rect">
+            <a:avLst/>
+          </a:prstGeom>
+        </p:spPr>
+      </p:pic>
+      <p:sp>
+        <p:nvSpPr>
+          <p:cNvPr id="5" name="Text 2"/>
+          <p:cNvSpPr/>
+          <p:nvPr/>
+        </p:nvSpPr>
+        <p:spPr>
+          <a:xfrm>
+            <a:off x="640080" y="5897880"/>
+            <a:ext cx="10881360" cy="411480"/>
+          </a:xfrm>
+          <a:prstGeom prst="rect">
+            <a:avLst/>
+          </a:prstGeom>
+          <a:noFill/>
+          <a:ln/>
+        </p:spPr>
+        <p:txBody>
+          <a:bodyPr wrap="square" rtlCol="0" anchor="ctr"/>
+          <a:lstStyle/>
+          <a:p>
+            <a:pPr indent="0" marL="0">
+              <a:buNone/>
+            </a:pPr>
+            <a:r>
+              <a:rPr lang="en-US" sz="1600" i="1" dirty="0">
+                <a:solidFill>
+                  <a:srgbClr val="1A1A1A"/>
                 </a:solidFill>
                 <a:latin typeface="Cambria" pitchFamily="34" charset="0"/>
                 <a:ea typeface="Cambria" pitchFamily="34" charset="-122"/>
                 <a:cs typeface="Cambria" pitchFamily="34" charset="-120"/>
               </a:rPr>
-              <a:t>Read robots.txt and the terms</a:t>
-            </a:r>
-            <a:endParaRPr lang="en-US" sz="1700" dirty="0"/>
-          </a:p>
-        </p:txBody>
-      </p:sp>
-      <p:sp>
-        <p:nvSpPr>
-          <p:cNvPr id="6" name="Text 4"/>
-          <p:cNvSpPr/>
-          <p:nvPr/>
-        </p:nvSpPr>
-        <p:spPr>
-          <a:xfrm>
-            <a:off x="5120640" y="2103120"/>
-            <a:ext cx="6126480" cy="731520"/>
-          </a:xfrm>
-          <a:prstGeom prst="rect">
-            <a:avLst/>
-          </a:prstGeom>
-          <a:noFill/>
-          <a:ln/>
-        </p:spPr>
-        <p:txBody>
-          <a:bodyPr wrap="square" lIns="0" tIns="0" rIns="0" bIns="0" rtlCol="0" anchor="ctr"/>
-          <a:lstStyle/>
-          <a:p>
-            <a:pPr indent="0" marL="0">
-              <a:buNone/>
-            </a:pPr>
-            <a:r>
-              <a:rPr lang="en-US" sz="1350" dirty="0">
-                <a:solidFill>
-                  <a:srgbClr val="1A1A1A"/>
+              <a:t>One hands you rows. The other hands you a phone book, and every row after that is another request.</a:t>
+            </a:r>
+            <a:endParaRPr lang="en-US" sz="1600" dirty="0"/>
+          </a:p>
+        </p:txBody>
+      </p:sp>
+      <p:sp>
+        <p:nvSpPr>
+          <p:cNvPr id="6" name="Text 3"/>
+          <p:cNvSpPr/>
+          <p:nvPr/>
+        </p:nvSpPr>
+        <p:spPr>
+          <a:xfrm>
+            <a:off x="640080" y="6355080"/>
+            <a:ext cx="10881360" cy="320040"/>
+          </a:xfrm>
+          <a:prstGeom prst="rect">
+            <a:avLst/>
+          </a:prstGeom>
+          <a:noFill/>
+          <a:ln/>
+        </p:spPr>
+        <p:txBody>
+          <a:bodyPr wrap="square" rtlCol="0" anchor="ctr"/>
+          <a:lstStyle/>
+          <a:p>
+            <a:pPr indent="0" marL="0">
+              <a:buNone/>
+            </a:pPr>
+            <a:r>
+              <a:rPr lang="en-US" sz="1000" dirty="0">
+                <a:solidFill>
+                  <a:srgbClr val="6B6B63"/>
                 </a:solidFill>
                 <a:latin typeface="Calibri" pitchFamily="34" charset="0"/>
                 <a:ea typeface="Calibri" pitchFamily="34" charset="-122"/>
                 <a:cs typeface="Calibri" pitchFamily="34" charset="-120"/>
               </a:rPr>
-              <a:t>before the first request, not after the complaint.</a:t>
-            </a:r>
-            <a:endParaRPr lang="en-US" sz="1350" dirty="0"/>
-          </a:p>
-        </p:txBody>
-      </p:sp>
-      <p:sp>
-        <p:nvSpPr>
-          <p:cNvPr id="7" name="Shape 5"/>
-          <p:cNvSpPr/>
-          <p:nvPr/>
-        </p:nvSpPr>
-        <p:spPr>
-          <a:xfrm>
-            <a:off x="640080" y="3063240"/>
-            <a:ext cx="10881360" cy="914400"/>
-          </a:xfrm>
-          <a:prstGeom prst="roundRect">
-            <a:avLst>
-              <a:gd name="adj" fmla="val 10000"/>
-            </a:avLst>
-          </a:prstGeom>
-          <a:solidFill>
-            <a:srgbClr val="F4EEE8"/>
-          </a:solidFill>
-          <a:ln/>
-        </p:spPr>
-      </p:sp>
-      <p:sp>
-        <p:nvSpPr>
-          <p:cNvPr id="8" name="Text 6"/>
-          <p:cNvSpPr/>
-          <p:nvPr/>
-        </p:nvSpPr>
-        <p:spPr>
-          <a:xfrm>
-            <a:off x="960120" y="3154680"/>
-            <a:ext cx="4023360" cy="731520"/>
-          </a:xfrm>
-          <a:prstGeom prst="rect">
-            <a:avLst/>
-          </a:prstGeom>
-          <a:noFill/>
-          <a:ln/>
-        </p:spPr>
-        <p:txBody>
-          <a:bodyPr wrap="square" lIns="0" tIns="0" rIns="0" bIns="0" rtlCol="0" anchor="ctr"/>
-          <a:lstStyle/>
-          <a:p>
-            <a:pPr indent="0" marL="0">
-              <a:buNone/>
-            </a:pPr>
-            <a:r>
-              <a:rPr lang="en-US" sz="1700" b="1" dirty="0">
-                <a:solidFill>
-                  <a:srgbClr val="B9852F"/>
-                </a:solidFill>
-                <a:latin typeface="Cambria" pitchFamily="34" charset="0"/>
-                <a:ea typeface="Cambria" pitchFamily="34" charset="-122"/>
-                <a:cs typeface="Cambria" pitchFamily="34" charset="-120"/>
-              </a:rPr>
-              <a:t>Request slowly</a:t>
-            </a:r>
-            <a:endParaRPr lang="en-US" sz="1700" dirty="0"/>
-          </a:p>
-        </p:txBody>
-      </p:sp>
-      <p:sp>
-        <p:nvSpPr>
-          <p:cNvPr id="9" name="Text 7"/>
-          <p:cNvSpPr/>
-          <p:nvPr/>
-        </p:nvSpPr>
-        <p:spPr>
-          <a:xfrm>
-            <a:off x="5120640" y="3154680"/>
-            <a:ext cx="6126480" cy="731520"/>
-          </a:xfrm>
-          <a:prstGeom prst="rect">
-            <a:avLst/>
-          </a:prstGeom>
-          <a:noFill/>
-          <a:ln/>
-        </p:spPr>
-        <p:txBody>
-          <a:bodyPr wrap="square" lIns="0" tIns="0" rIns="0" bIns="0" rtlCol="0" anchor="ctr"/>
-          <a:lstStyle/>
-          <a:p>
-            <a:pPr indent="0" marL="0">
-              <a:buNone/>
-            </a:pPr>
-            <a:r>
-              <a:rPr lang="en-US" sz="1350" dirty="0">
-                <a:solidFill>
-                  <a:srgbClr val="1A1A1A"/>
-                </a:solidFill>
-                <a:latin typeface="Calibri" pitchFamily="34" charset="0"/>
-                <a:ea typeface="Calibri" pitchFamily="34" charset="-122"/>
-                <a:cs typeface="Calibri" pitchFamily="34" charset="-120"/>
-              </a:rPr>
-              <a:t>one page every couple of seconds. You are a guest on someone's server.</a:t>
-            </a:r>
-            <a:endParaRPr lang="en-US" sz="1350" dirty="0"/>
-          </a:p>
-        </p:txBody>
-      </p:sp>
-      <p:sp>
-        <p:nvSpPr>
-          <p:cNvPr id="10" name="Shape 8"/>
-          <p:cNvSpPr/>
-          <p:nvPr/>
-        </p:nvSpPr>
-        <p:spPr>
-          <a:xfrm>
-            <a:off x="640080" y="4114800"/>
-            <a:ext cx="10881360" cy="914400"/>
-          </a:xfrm>
-          <a:prstGeom prst="roundRect">
-            <a:avLst>
-              <a:gd name="adj" fmla="val 10000"/>
-            </a:avLst>
-          </a:prstGeom>
-          <a:solidFill>
-            <a:srgbClr val="F4EEE8"/>
-          </a:solidFill>
-          <a:ln/>
-        </p:spPr>
-      </p:sp>
-      <p:sp>
-        <p:nvSpPr>
-          <p:cNvPr id="11" name="Text 9"/>
-          <p:cNvSpPr/>
-          <p:nvPr/>
-        </p:nvSpPr>
-        <p:spPr>
-          <a:xfrm>
-            <a:off x="960120" y="4206240"/>
-            <a:ext cx="4023360" cy="731520"/>
-          </a:xfrm>
-          <a:prstGeom prst="rect">
-            <a:avLst/>
-          </a:prstGeom>
-          <a:noFill/>
-          <a:ln/>
-        </p:spPr>
-        <p:txBody>
-          <a:bodyPr wrap="square" lIns="0" tIns="0" rIns="0" bIns="0" rtlCol="0" anchor="ctr"/>
-          <a:lstStyle/>
-          <a:p>
-            <a:pPr indent="0" marL="0">
-              <a:buNone/>
-            </a:pPr>
-            <a:r>
-              <a:rPr lang="en-US" sz="1700" b="1" dirty="0">
-                <a:solidFill>
-                  <a:srgbClr val="3F6F5F"/>
-                </a:solidFill>
-                <a:latin typeface="Cambria" pitchFamily="34" charset="0"/>
-                <a:ea typeface="Cambria" pitchFamily="34" charset="-122"/>
-                <a:cs typeface="Cambria" pitchFamily="34" charset="-120"/>
-              </a:rPr>
-              <a:t>Take only what you need</a:t>
-            </a:r>
-            <a:endParaRPr lang="en-US" sz="1700" dirty="0"/>
-          </a:p>
-        </p:txBody>
-      </p:sp>
-      <p:sp>
-        <p:nvSpPr>
-          <p:cNvPr id="12" name="Text 10"/>
-          <p:cNvSpPr/>
-          <p:nvPr/>
-        </p:nvSpPr>
-        <p:spPr>
-          <a:xfrm>
-            <a:off x="5120640" y="4206240"/>
-            <a:ext cx="6126480" cy="731520"/>
-          </a:xfrm>
-          <a:prstGeom prst="rect">
-            <a:avLst/>
-          </a:prstGeom>
-          <a:noFill/>
-          <a:ln/>
-        </p:spPr>
-        <p:txBody>
-          <a:bodyPr wrap="square" lIns="0" tIns="0" rIns="0" bIns="0" rtlCol="0" anchor="ctr"/>
-          <a:lstStyle/>
-          <a:p>
-            <a:pPr indent="0" marL="0">
-              <a:buNone/>
-            </a:pPr>
-            <a:r>
-              <a:rPr lang="en-US" sz="1350" dirty="0">
-                <a:solidFill>
-                  <a:srgbClr val="1A1A1A"/>
-                </a:solidFill>
-                <a:latin typeface="Calibri" pitchFamily="34" charset="0"/>
-                <a:ea typeface="Calibri" pitchFamily="34" charset="-122"/>
-                <a:cs typeface="Calibri" pitchFamily="34" charset="-120"/>
-              </a:rPr>
-              <a:t>the fields your question uses, not the whole site.</a:t>
-            </a:r>
-            <a:endParaRPr lang="en-US" sz="1350" dirty="0"/>
-          </a:p>
-        </p:txBody>
-      </p:sp>
-      <p:sp>
-        <p:nvSpPr>
-          <p:cNvPr id="13" name="Shape 11"/>
-          <p:cNvSpPr/>
-          <p:nvPr/>
-        </p:nvSpPr>
-        <p:spPr>
-          <a:xfrm>
-            <a:off x="640080" y="5166360"/>
-            <a:ext cx="10881360" cy="914400"/>
-          </a:xfrm>
-          <a:prstGeom prst="roundRect">
-            <a:avLst>
-              <a:gd name="adj" fmla="val 10000"/>
-            </a:avLst>
-          </a:prstGeom>
-          <a:solidFill>
-            <a:srgbClr val="F4EEE8"/>
-          </a:solidFill>
-          <a:ln/>
-        </p:spPr>
-      </p:sp>
-      <p:sp>
-        <p:nvSpPr>
-          <p:cNvPr id="14" name="Text 12"/>
-          <p:cNvSpPr/>
-          <p:nvPr/>
-        </p:nvSpPr>
-        <p:spPr>
-          <a:xfrm>
-            <a:off x="960120" y="5257800"/>
-            <a:ext cx="4023360" cy="731520"/>
-          </a:xfrm>
-          <a:prstGeom prst="rect">
-            <a:avLst/>
-          </a:prstGeom>
-          <a:noFill/>
-          <a:ln/>
-        </p:spPr>
-        <p:txBody>
-          <a:bodyPr wrap="square" lIns="0" tIns="0" rIns="0" bIns="0" rtlCol="0" anchor="ctr"/>
-          <a:lstStyle/>
-          <a:p>
-            <a:pPr indent="0" marL="0">
-              <a:buNone/>
-            </a:pPr>
-            <a:r>
-              <a:rPr lang="en-US" sz="1700" b="1" dirty="0">
-                <a:solidFill>
-                  <a:srgbClr val="2E5F8A"/>
-                </a:solidFill>
-                <a:latin typeface="Cambria" pitchFamily="34" charset="0"/>
-                <a:ea typeface="Cambria" pitchFamily="34" charset="-122"/>
-                <a:cs typeface="Cambria" pitchFamily="34" charset="-120"/>
-              </a:rPr>
-              <a:t>Never republish the text</a:t>
-            </a:r>
-            <a:endParaRPr lang="en-US" sz="1700" dirty="0"/>
-          </a:p>
-        </p:txBody>
-      </p:sp>
-      <p:sp>
-        <p:nvSpPr>
-          <p:cNvPr id="15" name="Text 13"/>
-          <p:cNvSpPr/>
-          <p:nvPr/>
-        </p:nvSpPr>
-        <p:spPr>
-          <a:xfrm>
-            <a:off x="5120640" y="5257800"/>
-            <a:ext cx="6126480" cy="731520"/>
-          </a:xfrm>
-          <a:prstGeom prst="rect">
-            <a:avLst/>
-          </a:prstGeom>
-          <a:noFill/>
-          <a:ln/>
-        </p:spPr>
-        <p:txBody>
-          <a:bodyPr wrap="square" lIns="0" tIns="0" rIns="0" bIns="0" rtlCol="0" anchor="ctr"/>
-          <a:lstStyle/>
-          <a:p>
-            <a:pPr indent="0" marL="0">
-              <a:buNone/>
-            </a:pPr>
-            <a:r>
-              <a:rPr lang="en-US" sz="1350" dirty="0">
-                <a:solidFill>
-                  <a:srgbClr val="1A1A1A"/>
-                </a:solidFill>
-                <a:latin typeface="Calibri" pitchFamily="34" charset="0"/>
-                <a:ea typeface="Calibri" pitchFamily="34" charset="-122"/>
-                <a:cs typeface="Calibri" pitchFamily="34" charset="-120"/>
-              </a:rPr>
-              <a:t>analyse it, quote it, count it. Do not hand it on.</a:t>
-            </a:r>
-            <a:endParaRPr lang="en-US" sz="1350" dirty="0"/>
-          </a:p>
-        </p:txBody>
-      </p:sp>
-      <p:sp>
-        <p:nvSpPr>
-          <p:cNvPr id="16" name="Text 14"/>
-          <p:cNvSpPr/>
-          <p:nvPr/>
-        </p:nvSpPr>
-        <p:spPr>
-          <a:xfrm>
-            <a:off x="640080" y="6309360"/>
-            <a:ext cx="10881360" cy="365760"/>
-          </a:xfrm>
-          <a:prstGeom prst="rect">
-            <a:avLst/>
-          </a:prstGeom>
-          <a:noFill/>
-          <a:ln/>
-        </p:spPr>
-        <p:txBody>
-          <a:bodyPr wrap="square" rtlCol="0" anchor="ctr"/>
-          <a:lstStyle/>
-          <a:p>
-            <a:pPr indent="0" marL="0">
-              <a:buNone/>
-            </a:pPr>
-            <a:r>
-              <a:rPr lang="en-US" sz="1250" i="1" dirty="0">
-                <a:solidFill>
-                  <a:srgbClr val="6B6B63"/>
-                </a:solidFill>
-                <a:latin typeface="Calibri" pitchFamily="34" charset="0"/>
-                <a:ea typeface="Calibri" pitchFamily="34" charset="-122"/>
-                <a:cs typeface="Calibri" pitchFamily="34" charset="-120"/>
-              </a:rPr>
-              <a:t>CC0 and public domain: go anywhere.   Academic sets and community text: analyse, don't redistribute.   Shadow libraries: never.</a:t>
-            </a:r>
-            <a:endParaRPr lang="en-US" sz="1250" dirty="0"/>
+              <a:t>Both queried live for this slide. Work out which kind you have before you estimate how long anything will take.</a:t>
+            </a:r>
+            <a:endParaRPr lang="en-US" sz="1000" dirty="0"/>
           </a:p>
         </p:txBody>
       </p:sp>
@@ -9895,7 +9646,7 @@
                 <a:ea typeface="Calibri" pitchFamily="34" charset="-122"/>
                 <a:cs typeface="Calibri" pitchFamily="34" charset="-120"/>
               </a:rPr>
-              <a:t>ROUTE THREE, IN PRACTICE</a:t>
+              <a:t>ROUTE THREE</a:t>
             </a:r>
             <a:endParaRPr lang="en-US" sz="1300" dirty="0"/>
           </a:p>
@@ -9934,110 +9685,448 @@
                 <a:ea typeface="Cambria" pitchFamily="34" charset="-122"/>
                 <a:cs typeface="Cambria" pitchFamily="34" charset="-120"/>
               </a:rPr>
-              <a:t>Find the data inside the markup</a:t>
+              <a:t>Scraping, and the four things that come with it</a:t>
             </a:r>
             <a:endParaRPr lang="en-US" sz="3400" dirty="0"/>
           </a:p>
         </p:txBody>
       </p:sp>
-      <p:pic>
-        <p:nvPicPr>
-          <p:cNvPr id="4" name="Image 0" descr="/tmp/figs/w4_scrape_anatomy.png">    </p:cNvPr>
-          <p:cNvPicPr>
-            <a:picLocks noChangeAspect="1"/>
-          </p:cNvPicPr>
-          <p:nvPr/>
-        </p:nvPicPr>
-        <p:blipFill>
-          <a:blip r:embed="rId1"/>
-          <a:srcRect l="0" r="0" t="0" b="0"/>
-          <a:stretch/>
-        </p:blipFill>
-        <p:spPr>
-          <a:xfrm>
-            <a:off x="640080" y="1874520"/>
-            <a:ext cx="10881360" cy="3566160"/>
-          </a:xfrm>
-          <a:prstGeom prst="rect">
-            <a:avLst/>
-          </a:prstGeom>
-        </p:spPr>
-      </p:pic>
-      <p:sp>
-        <p:nvSpPr>
-          <p:cNvPr id="5" name="Text 2"/>
-          <p:cNvSpPr/>
-          <p:nvPr/>
-        </p:nvSpPr>
-        <p:spPr>
-          <a:xfrm>
-            <a:off x="640080" y="5897880"/>
-            <a:ext cx="10881360" cy="411480"/>
-          </a:xfrm>
-          <a:prstGeom prst="rect">
-            <a:avLst/>
-          </a:prstGeom>
-          <a:noFill/>
-          <a:ln/>
-        </p:spPr>
-        <p:txBody>
-          <a:bodyPr wrap="square" rtlCol="0" anchor="ctr"/>
-          <a:lstStyle/>
-          <a:p>
-            <a:pPr indent="0" marL="0">
-              <a:buNone/>
-            </a:pPr>
-            <a:r>
-              <a:rPr lang="en-US" sz="1600" i="1" dirty="0">
-                <a:solidFill>
-                  <a:srgbClr val="1A1A1A"/>
+      <p:sp>
+        <p:nvSpPr>
+          <p:cNvPr id="4" name="Shape 2"/>
+          <p:cNvSpPr/>
+          <p:nvPr/>
+        </p:nvSpPr>
+        <p:spPr>
+          <a:xfrm>
+            <a:off x="640080" y="2011680"/>
+            <a:ext cx="10881360" cy="914400"/>
+          </a:xfrm>
+          <a:prstGeom prst="roundRect">
+            <a:avLst>
+              <a:gd name="adj" fmla="val 10000"/>
+            </a:avLst>
+          </a:prstGeom>
+          <a:solidFill>
+            <a:srgbClr val="F4EEE8"/>
+          </a:solidFill>
+          <a:ln/>
+        </p:spPr>
+      </p:sp>
+      <p:sp>
+        <p:nvSpPr>
+          <p:cNvPr id="5" name="Text 3"/>
+          <p:cNvSpPr/>
+          <p:nvPr/>
+        </p:nvSpPr>
+        <p:spPr>
+          <a:xfrm>
+            <a:off x="960120" y="2103120"/>
+            <a:ext cx="4023360" cy="731520"/>
+          </a:xfrm>
+          <a:prstGeom prst="rect">
+            <a:avLst/>
+          </a:prstGeom>
+          <a:noFill/>
+          <a:ln/>
+        </p:spPr>
+        <p:txBody>
+          <a:bodyPr wrap="square" lIns="0" tIns="0" rIns="0" bIns="0" rtlCol="0" anchor="ctr"/>
+          <a:lstStyle/>
+          <a:p>
+            <a:pPr indent="0" marL="0">
+              <a:buNone/>
+            </a:pPr>
+            <a:r>
+              <a:rPr lang="en-US" sz="1700" b="1" dirty="0">
+                <a:solidFill>
+                  <a:srgbClr val="7A3B2E"/>
                 </a:solidFill>
                 <a:latin typeface="Cambria" pitchFamily="34" charset="0"/>
                 <a:ea typeface="Cambria" pitchFamily="34" charset="-122"/>
                 <a:cs typeface="Cambria" pitchFamily="34" charset="-120"/>
               </a:rPr>
-              <a:t>Fetch one page, look at one block, and read the selectors off it. Right-click, Inspect, and the tag names are right there.</a:t>
-            </a:r>
-            <a:endParaRPr lang="en-US" sz="1600" dirty="0"/>
-          </a:p>
-        </p:txBody>
-      </p:sp>
-      <p:sp>
-        <p:nvSpPr>
-          <p:cNvPr id="6" name="Text 3"/>
-          <p:cNvSpPr/>
-          <p:nvPr/>
-        </p:nvSpPr>
-        <p:spPr>
-          <a:xfrm>
-            <a:off x="640080" y="6355080"/>
-            <a:ext cx="10881360" cy="320040"/>
-          </a:xfrm>
-          <a:prstGeom prst="rect">
-            <a:avLst/>
-          </a:prstGeom>
-          <a:noFill/>
-          <a:ln/>
-        </p:spPr>
-        <p:txBody>
-          <a:bodyPr wrap="square" rtlCol="0" anchor="ctr"/>
-          <a:lstStyle/>
-          <a:p>
-            <a:pPr indent="0" marL="0">
-              <a:buNone/>
-            </a:pPr>
-            <a:r>
-              <a:rPr lang="en-US" sz="1000" dirty="0">
-                <a:solidFill>
-                  <a:srgbClr val="6B6B63"/>
+              <a:t>Read robots.txt and the terms</a:t>
+            </a:r>
+            <a:endParaRPr lang="en-US" sz="1700" dirty="0"/>
+          </a:p>
+        </p:txBody>
+      </p:sp>
+      <p:sp>
+        <p:nvSpPr>
+          <p:cNvPr id="6" name="Text 4"/>
+          <p:cNvSpPr/>
+          <p:nvPr/>
+        </p:nvSpPr>
+        <p:spPr>
+          <a:xfrm>
+            <a:off x="5120640" y="2103120"/>
+            <a:ext cx="6126480" cy="731520"/>
+          </a:xfrm>
+          <a:prstGeom prst="rect">
+            <a:avLst/>
+          </a:prstGeom>
+          <a:noFill/>
+          <a:ln/>
+        </p:spPr>
+        <p:txBody>
+          <a:bodyPr wrap="square" lIns="0" tIns="0" rIns="0" bIns="0" rtlCol="0" anchor="ctr"/>
+          <a:lstStyle/>
+          <a:p>
+            <a:pPr indent="0" marL="0">
+              <a:buNone/>
+            </a:pPr>
+            <a:r>
+              <a:rPr lang="en-US" sz="1350" dirty="0">
+                <a:solidFill>
+                  <a:srgbClr val="1A1A1A"/>
                 </a:solidFill>
                 <a:latin typeface="Calibri" pitchFamily="34" charset="0"/>
                 <a:ea typeface="Calibri" pitchFamily="34" charset="-122"/>
                 <a:cs typeface="Calibri" pitchFamily="34" charset="-120"/>
               </a:rPr>
-              <a:t>Real HTML from quotes.toscrape.com. A selector that matches nothing returns None and raises no error, which is the bug you will actually hit.</a:t>
-            </a:r>
-            <a:endParaRPr lang="en-US" sz="1000" dirty="0"/>
+              <a:t>before the first request, not after the complaint.</a:t>
+            </a:r>
+            <a:endParaRPr lang="en-US" sz="1350" dirty="0"/>
+          </a:p>
+        </p:txBody>
+      </p:sp>
+      <p:sp>
+        <p:nvSpPr>
+          <p:cNvPr id="7" name="Shape 5"/>
+          <p:cNvSpPr/>
+          <p:nvPr/>
+        </p:nvSpPr>
+        <p:spPr>
+          <a:xfrm>
+            <a:off x="640080" y="3063240"/>
+            <a:ext cx="10881360" cy="914400"/>
+          </a:xfrm>
+          <a:prstGeom prst="roundRect">
+            <a:avLst>
+              <a:gd name="adj" fmla="val 10000"/>
+            </a:avLst>
+          </a:prstGeom>
+          <a:solidFill>
+            <a:srgbClr val="F4EEE8"/>
+          </a:solidFill>
+          <a:ln/>
+        </p:spPr>
+      </p:sp>
+      <p:sp>
+        <p:nvSpPr>
+          <p:cNvPr id="8" name="Text 6"/>
+          <p:cNvSpPr/>
+          <p:nvPr/>
+        </p:nvSpPr>
+        <p:spPr>
+          <a:xfrm>
+            <a:off x="960120" y="3154680"/>
+            <a:ext cx="4023360" cy="731520"/>
+          </a:xfrm>
+          <a:prstGeom prst="rect">
+            <a:avLst/>
+          </a:prstGeom>
+          <a:noFill/>
+          <a:ln/>
+        </p:spPr>
+        <p:txBody>
+          <a:bodyPr wrap="square" lIns="0" tIns="0" rIns="0" bIns="0" rtlCol="0" anchor="ctr"/>
+          <a:lstStyle/>
+          <a:p>
+            <a:pPr indent="0" marL="0">
+              <a:buNone/>
+            </a:pPr>
+            <a:r>
+              <a:rPr lang="en-US" sz="1700" b="1" dirty="0">
+                <a:solidFill>
+                  <a:srgbClr val="B9852F"/>
+                </a:solidFill>
+                <a:latin typeface="Cambria" pitchFamily="34" charset="0"/>
+                <a:ea typeface="Cambria" pitchFamily="34" charset="-122"/>
+                <a:cs typeface="Cambria" pitchFamily="34" charset="-120"/>
+              </a:rPr>
+              <a:t>Request slowly</a:t>
+            </a:r>
+            <a:endParaRPr lang="en-US" sz="1700" dirty="0"/>
+          </a:p>
+        </p:txBody>
+      </p:sp>
+      <p:sp>
+        <p:nvSpPr>
+          <p:cNvPr id="9" name="Text 7"/>
+          <p:cNvSpPr/>
+          <p:nvPr/>
+        </p:nvSpPr>
+        <p:spPr>
+          <a:xfrm>
+            <a:off x="5120640" y="3154680"/>
+            <a:ext cx="6126480" cy="731520"/>
+          </a:xfrm>
+          <a:prstGeom prst="rect">
+            <a:avLst/>
+          </a:prstGeom>
+          <a:noFill/>
+          <a:ln/>
+        </p:spPr>
+        <p:txBody>
+          <a:bodyPr wrap="square" lIns="0" tIns="0" rIns="0" bIns="0" rtlCol="0" anchor="ctr"/>
+          <a:lstStyle/>
+          <a:p>
+            <a:pPr indent="0" marL="0">
+              <a:buNone/>
+            </a:pPr>
+            <a:r>
+              <a:rPr lang="en-US" sz="1350" dirty="0">
+                <a:solidFill>
+                  <a:srgbClr val="1A1A1A"/>
+                </a:solidFill>
+                <a:latin typeface="Calibri" pitchFamily="34" charset="0"/>
+                <a:ea typeface="Calibri" pitchFamily="34" charset="-122"/>
+                <a:cs typeface="Calibri" pitchFamily="34" charset="-120"/>
+              </a:rPr>
+              <a:t>one page every couple of seconds. You are a guest on someone's server.</a:t>
+            </a:r>
+            <a:endParaRPr lang="en-US" sz="1350" dirty="0"/>
+          </a:p>
+        </p:txBody>
+      </p:sp>
+      <p:sp>
+        <p:nvSpPr>
+          <p:cNvPr id="10" name="Shape 8"/>
+          <p:cNvSpPr/>
+          <p:nvPr/>
+        </p:nvSpPr>
+        <p:spPr>
+          <a:xfrm>
+            <a:off x="640080" y="4114800"/>
+            <a:ext cx="10881360" cy="914400"/>
+          </a:xfrm>
+          <a:prstGeom prst="roundRect">
+            <a:avLst>
+              <a:gd name="adj" fmla="val 10000"/>
+            </a:avLst>
+          </a:prstGeom>
+          <a:solidFill>
+            <a:srgbClr val="F4EEE8"/>
+          </a:solidFill>
+          <a:ln/>
+        </p:spPr>
+      </p:sp>
+      <p:sp>
+        <p:nvSpPr>
+          <p:cNvPr id="11" name="Text 9"/>
+          <p:cNvSpPr/>
+          <p:nvPr/>
+        </p:nvSpPr>
+        <p:spPr>
+          <a:xfrm>
+            <a:off x="960120" y="4206240"/>
+            <a:ext cx="4023360" cy="731520"/>
+          </a:xfrm>
+          <a:prstGeom prst="rect">
+            <a:avLst/>
+          </a:prstGeom>
+          <a:noFill/>
+          <a:ln/>
+        </p:spPr>
+        <p:txBody>
+          <a:bodyPr wrap="square" lIns="0" tIns="0" rIns="0" bIns="0" rtlCol="0" anchor="ctr"/>
+          <a:lstStyle/>
+          <a:p>
+            <a:pPr indent="0" marL="0">
+              <a:buNone/>
+            </a:pPr>
+            <a:r>
+              <a:rPr lang="en-US" sz="1700" b="1" dirty="0">
+                <a:solidFill>
+                  <a:srgbClr val="3F6F5F"/>
+                </a:solidFill>
+                <a:latin typeface="Cambria" pitchFamily="34" charset="0"/>
+                <a:ea typeface="Cambria" pitchFamily="34" charset="-122"/>
+                <a:cs typeface="Cambria" pitchFamily="34" charset="-120"/>
+              </a:rPr>
+              <a:t>Take only what you need</a:t>
+            </a:r>
+            <a:endParaRPr lang="en-US" sz="1700" dirty="0"/>
+          </a:p>
+        </p:txBody>
+      </p:sp>
+      <p:sp>
+        <p:nvSpPr>
+          <p:cNvPr id="12" name="Text 10"/>
+          <p:cNvSpPr/>
+          <p:nvPr/>
+        </p:nvSpPr>
+        <p:spPr>
+          <a:xfrm>
+            <a:off x="5120640" y="4206240"/>
+            <a:ext cx="6126480" cy="731520"/>
+          </a:xfrm>
+          <a:prstGeom prst="rect">
+            <a:avLst/>
+          </a:prstGeom>
+          <a:noFill/>
+          <a:ln/>
+        </p:spPr>
+        <p:txBody>
+          <a:bodyPr wrap="square" lIns="0" tIns="0" rIns="0" bIns="0" rtlCol="0" anchor="ctr"/>
+          <a:lstStyle/>
+          <a:p>
+            <a:pPr indent="0" marL="0">
+              <a:buNone/>
+            </a:pPr>
+            <a:r>
+              <a:rPr lang="en-US" sz="1350" dirty="0">
+                <a:solidFill>
+                  <a:srgbClr val="1A1A1A"/>
+                </a:solidFill>
+                <a:latin typeface="Calibri" pitchFamily="34" charset="0"/>
+                <a:ea typeface="Calibri" pitchFamily="34" charset="-122"/>
+                <a:cs typeface="Calibri" pitchFamily="34" charset="-120"/>
+              </a:rPr>
+              <a:t>the fields your question uses, not the whole site.</a:t>
+            </a:r>
+            <a:endParaRPr lang="en-US" sz="1350" dirty="0"/>
+          </a:p>
+        </p:txBody>
+      </p:sp>
+      <p:sp>
+        <p:nvSpPr>
+          <p:cNvPr id="13" name="Shape 11"/>
+          <p:cNvSpPr/>
+          <p:nvPr/>
+        </p:nvSpPr>
+        <p:spPr>
+          <a:xfrm>
+            <a:off x="640080" y="5166360"/>
+            <a:ext cx="10881360" cy="914400"/>
+          </a:xfrm>
+          <a:prstGeom prst="roundRect">
+            <a:avLst>
+              <a:gd name="adj" fmla="val 10000"/>
+            </a:avLst>
+          </a:prstGeom>
+          <a:solidFill>
+            <a:srgbClr val="F4EEE8"/>
+          </a:solidFill>
+          <a:ln/>
+        </p:spPr>
+      </p:sp>
+      <p:sp>
+        <p:nvSpPr>
+          <p:cNvPr id="14" name="Text 12"/>
+          <p:cNvSpPr/>
+          <p:nvPr/>
+        </p:nvSpPr>
+        <p:spPr>
+          <a:xfrm>
+            <a:off x="960120" y="5257800"/>
+            <a:ext cx="4023360" cy="731520"/>
+          </a:xfrm>
+          <a:prstGeom prst="rect">
+            <a:avLst/>
+          </a:prstGeom>
+          <a:noFill/>
+          <a:ln/>
+        </p:spPr>
+        <p:txBody>
+          <a:bodyPr wrap="square" lIns="0" tIns="0" rIns="0" bIns="0" rtlCol="0" anchor="ctr"/>
+          <a:lstStyle/>
+          <a:p>
+            <a:pPr indent="0" marL="0">
+              <a:buNone/>
+            </a:pPr>
+            <a:r>
+              <a:rPr lang="en-US" sz="1700" b="1" dirty="0">
+                <a:solidFill>
+                  <a:srgbClr val="2E5F8A"/>
+                </a:solidFill>
+                <a:latin typeface="Cambria" pitchFamily="34" charset="0"/>
+                <a:ea typeface="Cambria" pitchFamily="34" charset="-122"/>
+                <a:cs typeface="Cambria" pitchFamily="34" charset="-120"/>
+              </a:rPr>
+              <a:t>Never republish the text</a:t>
+            </a:r>
+            <a:endParaRPr lang="en-US" sz="1700" dirty="0"/>
+          </a:p>
+        </p:txBody>
+      </p:sp>
+      <p:sp>
+        <p:nvSpPr>
+          <p:cNvPr id="15" name="Text 13"/>
+          <p:cNvSpPr/>
+          <p:nvPr/>
+        </p:nvSpPr>
+        <p:spPr>
+          <a:xfrm>
+            <a:off x="5120640" y="5257800"/>
+            <a:ext cx="6126480" cy="731520"/>
+          </a:xfrm>
+          <a:prstGeom prst="rect">
+            <a:avLst/>
+          </a:prstGeom>
+          <a:noFill/>
+          <a:ln/>
+        </p:spPr>
+        <p:txBody>
+          <a:bodyPr wrap="square" lIns="0" tIns="0" rIns="0" bIns="0" rtlCol="0" anchor="ctr"/>
+          <a:lstStyle/>
+          <a:p>
+            <a:pPr indent="0" marL="0">
+              <a:buNone/>
+            </a:pPr>
+            <a:r>
+              <a:rPr lang="en-US" sz="1350" dirty="0">
+                <a:solidFill>
+                  <a:srgbClr val="1A1A1A"/>
+                </a:solidFill>
+                <a:latin typeface="Calibri" pitchFamily="34" charset="0"/>
+                <a:ea typeface="Calibri" pitchFamily="34" charset="-122"/>
+                <a:cs typeface="Calibri" pitchFamily="34" charset="-120"/>
+              </a:rPr>
+              <a:t>analyse it, quote it, count it. Do not hand it on.</a:t>
+            </a:r>
+            <a:endParaRPr lang="en-US" sz="1350" dirty="0"/>
+          </a:p>
+        </p:txBody>
+      </p:sp>
+      <p:sp>
+        <p:nvSpPr>
+          <p:cNvPr id="16" name="Text 14"/>
+          <p:cNvSpPr/>
+          <p:nvPr/>
+        </p:nvSpPr>
+        <p:spPr>
+          <a:xfrm>
+            <a:off x="640080" y="6309360"/>
+            <a:ext cx="10881360" cy="365760"/>
+          </a:xfrm>
+          <a:prstGeom prst="rect">
+            <a:avLst/>
+          </a:prstGeom>
+          <a:noFill/>
+          <a:ln/>
+        </p:spPr>
+        <p:txBody>
+          <a:bodyPr wrap="square" rtlCol="0" anchor="ctr"/>
+          <a:lstStyle/>
+          <a:p>
+            <a:pPr indent="0" marL="0">
+              <a:buNone/>
+            </a:pPr>
+            <a:r>
+              <a:rPr lang="en-US" sz="1250" i="1" dirty="0">
+                <a:solidFill>
+                  <a:srgbClr val="6B6B63"/>
+                </a:solidFill>
+                <a:latin typeface="Calibri" pitchFamily="34" charset="0"/>
+                <a:ea typeface="Calibri" pitchFamily="34" charset="-122"/>
+                <a:cs typeface="Calibri" pitchFamily="34" charset="-120"/>
+              </a:rPr>
+              <a:t>CC0 and public domain: go anywhere.   Academic sets and community text: analyse, don't redistribute.   Shadow libraries: never.</a:t>
+            </a:r>
+            <a:endParaRPr lang="en-US" sz="1250" dirty="0"/>
           </a:p>
         </p:txBody>
       </p:sp>
@@ -10311,13 +10400,13 @@
             <a:r>
               <a:rPr lang="en-US" sz="1300" b="1" spc="300" kern="0" dirty="0">
                 <a:solidFill>
-                  <a:srgbClr val="B9852F"/>
+                  <a:srgbClr val="7A3B2E"/>
                 </a:solidFill>
                 <a:latin typeface="Calibri" pitchFamily="34" charset="0"/>
                 <a:ea typeface="Calibri" pitchFamily="34" charset="-122"/>
                 <a:cs typeface="Calibri" pitchFamily="34" charset="-120"/>
               </a:rPr>
-              <a:t>BEFORE YOU START IT RUNNING</a:t>
+              <a:t>ROUTE THREE, IN PRACTICE</a:t>
             </a:r>
             <a:endParaRPr lang="en-US" sz="1300" dirty="0"/>
           </a:p>
@@ -10356,7 +10445,7 @@
                 <a:ea typeface="Cambria" pitchFamily="34" charset="-122"/>
                 <a:cs typeface="Cambria" pitchFamily="34" charset="-120"/>
               </a:rPr>
-              <a:t>How long will this take?</a:t>
+              <a:t>Find the data inside the markup</a:t>
             </a:r>
             <a:endParaRPr lang="en-US" sz="3400" dirty="0"/>
           </a:p>
@@ -10364,7 +10453,7 @@
       </p:sp>
       <p:pic>
         <p:nvPicPr>
-          <p:cNvPr id="4" name="Image 0" descr="/tmp/figs/w4_scrape_cost.png">    </p:cNvPr>
+          <p:cNvPr id="4" name="Image 0" descr="/tmp/figs/w4_scrape_anatomy.png">    </p:cNvPr>
           <p:cNvPicPr>
             <a:picLocks noChangeAspect="1"/>
           </p:cNvPicPr>
@@ -10377,8 +10466,8 @@
         </p:blipFill>
         <p:spPr>
           <a:xfrm>
-            <a:off x="2103120" y="1783080"/>
-            <a:ext cx="7955280" cy="3931920"/>
+            <a:off x="640080" y="1874520"/>
+            <a:ext cx="10881360" cy="3566160"/>
           </a:xfrm>
           <a:prstGeom prst="rect">
             <a:avLst/>
@@ -10418,7 +10507,7 @@
                 <a:ea typeface="Cambria" pitchFamily="34" charset="-122"/>
                 <a:cs typeface="Cambria" pitchFamily="34" charset="-120"/>
               </a:rPr>
-              <a:t>A one-second pause on 5,000 pages is an hour and a half. That number decides your sample size, so work it out first.</a:t>
+              <a:t>Fetch one page, look at one block, and read the selectors off it. Right-click, Inspect, and the tag names are right there.</a:t>
             </a:r>
             <a:endParaRPr lang="en-US" sz="1600" dirty="0"/>
           </a:p>
@@ -10457,7 +10546,7 @@
                 <a:ea typeface="Calibri" pitchFamily="34" charset="-122"/>
                 <a:cs typeface="Calibri" pitchFamily="34" charset="-120"/>
               </a:rPr>
-              <a:t>And the site notices the difference. One page a second is a reader; fifty a second is an outage.</a:t>
+              <a:t>Real HTML from quotes.toscrape.com. A selector that matches nothing returns None and raises no error, which is the bug you will actually hit.</a:t>
             </a:r>
             <a:endParaRPr lang="en-US" sz="1000" dirty="0"/>
           </a:p>
@@ -10522,13 +10611,13 @@
             <a:r>
               <a:rPr lang="en-US" sz="1300" b="1" spc="300" kern="0" dirty="0">
                 <a:solidFill>
-                  <a:srgbClr val="3F6F5F"/>
+                  <a:srgbClr val="B9852F"/>
                 </a:solidFill>
                 <a:latin typeface="Calibri" pitchFamily="34" charset="0"/>
                 <a:ea typeface="Calibri" pitchFamily="34" charset="-122"/>
                 <a:cs typeface="Calibri" pitchFamily="34" charset="-120"/>
               </a:rPr>
-              <a:t>YOUR TURN · 20 MINUTES</a:t>
+              <a:t>BEFORE YOU START IT RUNNING</a:t>
             </a:r>
             <a:endParaRPr lang="en-US" sz="1300" dirty="0"/>
           </a:p>
@@ -10567,348 +10656,110 @@
                 <a:ea typeface="Cambria" pitchFamily="34" charset="-122"/>
                 <a:cs typeface="Cambria" pitchFamily="34" charset="-120"/>
               </a:rPr>
-              <a:t>Collect it, save it, start the repo</a:t>
+              <a:t>How long will this take?</a:t>
             </a:r>
             <a:endParaRPr lang="en-US" sz="3400" dirty="0"/>
           </a:p>
         </p:txBody>
       </p:sp>
-      <p:sp>
-        <p:nvSpPr>
-          <p:cNvPr id="4" name="Shape 2"/>
-          <p:cNvSpPr/>
-          <p:nvPr/>
-        </p:nvSpPr>
-        <p:spPr>
-          <a:xfrm>
-            <a:off x="640080" y="2103120"/>
-            <a:ext cx="10881360" cy="1097280"/>
-          </a:xfrm>
-          <a:prstGeom prst="roundRect">
-            <a:avLst>
-              <a:gd name="adj" fmla="val 8333"/>
-            </a:avLst>
-          </a:prstGeom>
-          <a:solidFill>
-            <a:srgbClr val="F4EEE8"/>
-          </a:solidFill>
-          <a:ln/>
-        </p:spPr>
-      </p:sp>
-      <p:sp>
-        <p:nvSpPr>
-          <p:cNvPr id="5" name="Text 3"/>
-          <p:cNvSpPr/>
-          <p:nvPr/>
-        </p:nvSpPr>
-        <p:spPr>
-          <a:xfrm>
-            <a:off x="1005840" y="2240280"/>
-            <a:ext cx="4206240" cy="822960"/>
-          </a:xfrm>
-          <a:prstGeom prst="rect">
-            <a:avLst/>
-          </a:prstGeom>
-          <a:noFill/>
-          <a:ln/>
-        </p:spPr>
-        <p:txBody>
-          <a:bodyPr wrap="square" lIns="0" tIns="0" rIns="0" bIns="0" rtlCol="0" anchor="ctr"/>
-          <a:lstStyle/>
-          <a:p>
-            <a:pPr indent="0" marL="0">
-              <a:buNone/>
-            </a:pPr>
-            <a:r>
-              <a:rPr lang="en-US" sz="1900" b="1" dirty="0">
-                <a:solidFill>
-                  <a:srgbClr val="3F6F5F"/>
+      <p:pic>
+        <p:nvPicPr>
+          <p:cNvPr id="4" name="Image 0" descr="/tmp/figs/w4_scrape_cost.png">    </p:cNvPr>
+          <p:cNvPicPr>
+            <a:picLocks noChangeAspect="1"/>
+          </p:cNvPicPr>
+          <p:nvPr/>
+        </p:nvPicPr>
+        <p:blipFill>
+          <a:blip r:embed="rId1"/>
+          <a:srcRect l="0" r="0" t="0" b="0"/>
+          <a:stretch/>
+        </p:blipFill>
+        <p:spPr>
+          <a:xfrm>
+            <a:off x="2103120" y="1783080"/>
+            <a:ext cx="7955280" cy="3931920"/>
+          </a:xfrm>
+          <a:prstGeom prst="rect">
+            <a:avLst/>
+          </a:prstGeom>
+        </p:spPr>
+      </p:pic>
+      <p:sp>
+        <p:nvSpPr>
+          <p:cNvPr id="5" name="Text 2"/>
+          <p:cNvSpPr/>
+          <p:nvPr/>
+        </p:nvSpPr>
+        <p:spPr>
+          <a:xfrm>
+            <a:off x="640080" y="5897880"/>
+            <a:ext cx="10881360" cy="411480"/>
+          </a:xfrm>
+          <a:prstGeom prst="rect">
+            <a:avLst/>
+          </a:prstGeom>
+          <a:noFill/>
+          <a:ln/>
+        </p:spPr>
+        <p:txBody>
+          <a:bodyPr wrap="square" rtlCol="0" anchor="ctr"/>
+          <a:lstStyle/>
+          <a:p>
+            <a:pPr indent="0" marL="0">
+              <a:buNone/>
+            </a:pPr>
+            <a:r>
+              <a:rPr lang="en-US" sz="1600" i="1" dirty="0">
+                <a:solidFill>
+                  <a:srgbClr val="1A1A1A"/>
                 </a:solidFill>
                 <a:latin typeface="Cambria" pitchFamily="34" charset="0"/>
                 <a:ea typeface="Cambria" pitchFamily="34" charset="-122"/>
                 <a:cs typeface="Cambria" pitchFamily="34" charset="-120"/>
               </a:rPr>
-              <a:t>a file in your Drive folder</a:t>
-            </a:r>
-            <a:endParaRPr lang="en-US" sz="1900" dirty="0"/>
-          </a:p>
-        </p:txBody>
-      </p:sp>
-      <p:sp>
-        <p:nvSpPr>
-          <p:cNvPr id="6" name="Text 4"/>
-          <p:cNvSpPr/>
-          <p:nvPr/>
-        </p:nvSpPr>
-        <p:spPr>
-          <a:xfrm>
-            <a:off x="5394960" y="2240280"/>
-            <a:ext cx="5760720" cy="822960"/>
-          </a:xfrm>
-          <a:prstGeom prst="rect">
-            <a:avLst/>
-          </a:prstGeom>
-          <a:noFill/>
-          <a:ln/>
-        </p:spPr>
-        <p:txBody>
-          <a:bodyPr wrap="square" lIns="0" tIns="0" rIns="0" bIns="0" rtlCol="0" anchor="ctr"/>
-          <a:lstStyle/>
-          <a:p>
-            <a:pPr indent="0" marL="0">
-              <a:buNone/>
-            </a:pPr>
-            <a:r>
-              <a:rPr lang="en-US" sz="1400" dirty="0">
-                <a:solidFill>
-                  <a:srgbClr val="1A1A1A"/>
+              <a:t>A one-second pause on 5,000 pages is an hour and a half. That number decides your sample size, so work it out first.</a:t>
+            </a:r>
+            <a:endParaRPr lang="en-US" sz="1600" dirty="0"/>
+          </a:p>
+        </p:txBody>
+      </p:sp>
+      <p:sp>
+        <p:nvSpPr>
+          <p:cNvPr id="6" name="Text 3"/>
+          <p:cNvSpPr/>
+          <p:nvPr/>
+        </p:nvSpPr>
+        <p:spPr>
+          <a:xfrm>
+            <a:off x="640080" y="6355080"/>
+            <a:ext cx="10881360" cy="320040"/>
+          </a:xfrm>
+          <a:prstGeom prst="rect">
+            <a:avLst/>
+          </a:prstGeom>
+          <a:noFill/>
+          <a:ln/>
+        </p:spPr>
+        <p:txBody>
+          <a:bodyPr wrap="square" rtlCol="0" anchor="ctr"/>
+          <a:lstStyle/>
+          <a:p>
+            <a:pPr indent="0" marL="0">
+              <a:buNone/>
+            </a:pPr>
+            <a:r>
+              <a:rPr lang="en-US" sz="1000" dirty="0">
+                <a:solidFill>
+                  <a:srgbClr val="6B6B63"/>
                 </a:solidFill>
                 <a:latin typeface="Calibri" pitchFamily="34" charset="0"/>
                 <a:ea typeface="Calibri" pitchFamily="34" charset="-122"/>
                 <a:cs typeface="Calibri" pitchFamily="34" charset="-120"/>
               </a:rPr>
-              <a:t>Week 5 starts from it. Colab forgets everything else.</a:t>
-            </a:r>
-            <a:endParaRPr lang="en-US" sz="1400" dirty="0"/>
-          </a:p>
-        </p:txBody>
-      </p:sp>
-      <p:sp>
-        <p:nvSpPr>
-          <p:cNvPr id="7" name="Shape 5"/>
-          <p:cNvSpPr/>
-          <p:nvPr/>
-        </p:nvSpPr>
-        <p:spPr>
-          <a:xfrm>
-            <a:off x="640080" y="3383280"/>
-            <a:ext cx="10881360" cy="1097280"/>
-          </a:xfrm>
-          <a:prstGeom prst="roundRect">
-            <a:avLst>
-              <a:gd name="adj" fmla="val 8333"/>
-            </a:avLst>
-          </a:prstGeom>
-          <a:solidFill>
-            <a:srgbClr val="F4EEE8"/>
-          </a:solidFill>
-          <a:ln/>
-        </p:spPr>
-      </p:sp>
-      <p:sp>
-        <p:nvSpPr>
-          <p:cNvPr id="8" name="Text 6"/>
-          <p:cNvSpPr/>
-          <p:nvPr/>
-        </p:nvSpPr>
-        <p:spPr>
-          <a:xfrm>
-            <a:off x="1005840" y="3520440"/>
-            <a:ext cx="4206240" cy="822960"/>
-          </a:xfrm>
-          <a:prstGeom prst="rect">
-            <a:avLst/>
-          </a:prstGeom>
-          <a:noFill/>
-          <a:ln/>
-        </p:spPr>
-        <p:txBody>
-          <a:bodyPr wrap="square" lIns="0" tIns="0" rIns="0" bIns="0" rtlCol="0" anchor="ctr"/>
-          <a:lstStyle/>
-          <a:p>
-            <a:pPr indent="0" marL="0">
-              <a:buNone/>
-            </a:pPr>
-            <a:r>
-              <a:rPr lang="en-US" sz="1900" b="1" dirty="0">
-                <a:solidFill>
-                  <a:srgbClr val="2E5F8A"/>
-                </a:solidFill>
-                <a:latin typeface="Cambria" pitchFamily="34" charset="0"/>
-                <a:ea typeface="Cambria" pitchFamily="34" charset="-122"/>
-                <a:cs typeface="Cambria" pitchFamily="34" charset="-120"/>
-              </a:rPr>
-              <a:t>a repo with Pages switched on</a:t>
-            </a:r>
-            <a:endParaRPr lang="en-US" sz="1900" dirty="0"/>
-          </a:p>
-        </p:txBody>
-      </p:sp>
-      <p:sp>
-        <p:nvSpPr>
-          <p:cNvPr id="9" name="Text 7"/>
-          <p:cNvSpPr/>
-          <p:nvPr/>
-        </p:nvSpPr>
-        <p:spPr>
-          <a:xfrm>
-            <a:off x="5394960" y="3520440"/>
-            <a:ext cx="5760720" cy="822960"/>
-          </a:xfrm>
-          <a:prstGeom prst="rect">
-            <a:avLst/>
-          </a:prstGeom>
-          <a:noFill/>
-          <a:ln/>
-        </p:spPr>
-        <p:txBody>
-          <a:bodyPr wrap="square" lIns="0" tIns="0" rIns="0" bIns="0" rtlCol="0" anchor="ctr"/>
-          <a:lstStyle/>
-          <a:p>
-            <a:pPr indent="0" marL="0">
-              <a:buNone/>
-            </a:pPr>
-            <a:r>
-              <a:rPr lang="en-US" sz="1400" dirty="0">
-                <a:solidFill>
-                  <a:srgbClr val="1A1A1A"/>
-                </a:solidFill>
-                <a:latin typeface="Calibri" pitchFamily="34" charset="0"/>
-                <a:ea typeface="Calibri" pitchFamily="34" charset="-122"/>
-                <a:cs typeface="Calibri" pitchFamily="34" charset="-120"/>
-              </a:rPr>
-              <a:t>so a live URL exists today, not in Week 9 under deadline.</a:t>
-            </a:r>
-            <a:endParaRPr lang="en-US" sz="1400" dirty="0"/>
-          </a:p>
-        </p:txBody>
-      </p:sp>
-      <p:sp>
-        <p:nvSpPr>
-          <p:cNvPr id="10" name="Shape 8"/>
-          <p:cNvSpPr/>
-          <p:nvPr/>
-        </p:nvSpPr>
-        <p:spPr>
-          <a:xfrm>
-            <a:off x="640080" y="4663440"/>
-            <a:ext cx="10881360" cy="1097280"/>
-          </a:xfrm>
-          <a:prstGeom prst="roundRect">
-            <a:avLst>
-              <a:gd name="adj" fmla="val 8333"/>
-            </a:avLst>
-          </a:prstGeom>
-          <a:solidFill>
-            <a:srgbClr val="F4EEE8"/>
-          </a:solidFill>
-          <a:ln/>
-        </p:spPr>
-      </p:sp>
-      <p:sp>
-        <p:nvSpPr>
-          <p:cNvPr id="11" name="Text 9"/>
-          <p:cNvSpPr/>
-          <p:nvPr/>
-        </p:nvSpPr>
-        <p:spPr>
-          <a:xfrm>
-            <a:off x="1005840" y="4800600"/>
-            <a:ext cx="4206240" cy="822960"/>
-          </a:xfrm>
-          <a:prstGeom prst="rect">
-            <a:avLst/>
-          </a:prstGeom>
-          <a:noFill/>
-          <a:ln/>
-        </p:spPr>
-        <p:txBody>
-          <a:bodyPr wrap="square" lIns="0" tIns="0" rIns="0" bIns="0" rtlCol="0" anchor="ctr"/>
-          <a:lstStyle/>
-          <a:p>
-            <a:pPr indent="0" marL="0">
-              <a:buNone/>
-            </a:pPr>
-            <a:r>
-              <a:rPr lang="en-US" sz="1900" b="1" dirty="0">
-                <a:solidFill>
-                  <a:srgbClr val="7A3B2E"/>
-                </a:solidFill>
-                <a:latin typeface="Cambria" pitchFamily="34" charset="0"/>
-                <a:ea typeface="Cambria" pitchFamily="34" charset="-122"/>
-                <a:cs typeface="Cambria" pitchFamily="34" charset="-120"/>
-              </a:rPr>
-              <a:t>two minutes of pitch, to a partner</a:t>
-            </a:r>
-            <a:endParaRPr lang="en-US" sz="1900" dirty="0"/>
-          </a:p>
-        </p:txBody>
-      </p:sp>
-      <p:sp>
-        <p:nvSpPr>
-          <p:cNvPr id="12" name="Text 10"/>
-          <p:cNvSpPr/>
-          <p:nvPr/>
-        </p:nvSpPr>
-        <p:spPr>
-          <a:xfrm>
-            <a:off x="5394960" y="4800600"/>
-            <a:ext cx="5760720" cy="822960"/>
-          </a:xfrm>
-          <a:prstGeom prst="rect">
-            <a:avLst/>
-          </a:prstGeom>
-          <a:noFill/>
-          <a:ln/>
-        </p:spPr>
-        <p:txBody>
-          <a:bodyPr wrap="square" lIns="0" tIns="0" rIns="0" bIns="0" rtlCol="0" anchor="ctr"/>
-          <a:lstStyle/>
-          <a:p>
-            <a:pPr indent="0" marL="0">
-              <a:buNone/>
-            </a:pPr>
-            <a:r>
-              <a:rPr lang="en-US" sz="1400" dirty="0">
-                <a:solidFill>
-                  <a:srgbClr val="1A1A1A"/>
-                </a:solidFill>
-                <a:latin typeface="Calibri" pitchFamily="34" charset="0"/>
-                <a:ea typeface="Calibri" pitchFamily="34" charset="-122"/>
-                <a:cs typeface="Calibri" pitchFamily="34" charset="-120"/>
-              </a:rPr>
-              <a:t>corpus, two methods, what would count as a finding.</a:t>
-            </a:r>
-            <a:endParaRPr lang="en-US" sz="1400" dirty="0"/>
-          </a:p>
-        </p:txBody>
-      </p:sp>
-      <p:sp>
-        <p:nvSpPr>
-          <p:cNvPr id="13" name="Text 11"/>
-          <p:cNvSpPr/>
-          <p:nvPr/>
-        </p:nvSpPr>
-        <p:spPr>
-          <a:xfrm>
-            <a:off x="640080" y="6263640"/>
-            <a:ext cx="10881360" cy="365760"/>
-          </a:xfrm>
-          <a:prstGeom prst="rect">
-            <a:avLst/>
-          </a:prstGeom>
-          <a:noFill/>
-          <a:ln/>
-        </p:spPr>
-        <p:txBody>
-          <a:bodyPr wrap="square" rtlCol="0" anchor="ctr"/>
-          <a:lstStyle/>
-          <a:p>
-            <a:pPr indent="0" marL="0">
-              <a:buNone/>
-            </a:pPr>
-            <a:r>
-              <a:rPr lang="en-US" sz="1100" i="1" dirty="0">
-                <a:solidFill>
-                  <a:srgbClr val="6B6B63"/>
-                </a:solidFill>
-                <a:latin typeface="Calibri" pitchFamily="34" charset="0"/>
-                <a:ea typeface="Calibri" pitchFamily="34" charset="-122"/>
-                <a:cs typeface="Calibri" pitchFamily="34" charset="-120"/>
-              </a:rPr>
-              <a:t>A null result, honestly shown, is a complete project. The pivot kit is insurance, not a demotion.</a:t>
-            </a:r>
-            <a:endParaRPr lang="en-US" sz="1100" dirty="0"/>
+              <a:t>And the site notices the difference. One page a second is a reader; fifty a second is an outage.</a:t>
+            </a:r>
+            <a:endParaRPr lang="en-US" sz="1000" dirty="0"/>
           </a:p>
         </p:txBody>
       </p:sp>
@@ -10923,6 +10774,455 @@
 <file path=ppt/slides/slide32.xml><?xml version="1.0" encoding="utf-8"?>
 <p:sld xmlns:a="http://schemas.openxmlformats.org/drawingml/2006/main" xmlns:r="http://schemas.openxmlformats.org/officeDocument/2006/relationships" xmlns:p="http://schemas.openxmlformats.org/presentationml/2006/main">
   <p:cSld name="Slide 32">
+    <p:bg>
+      <p:bgPr>
+        <a:solidFill>
+          <a:srgbClr val="FFFFFF"/>
+        </a:solidFill>
+      </p:bgPr>
+    </p:bg>
+    <p:spTree>
+      <p:nvGrpSpPr>
+        <p:cNvPr id="1" name=""/>
+        <p:cNvGrpSpPr/>
+        <p:nvPr/>
+      </p:nvGrpSpPr>
+      <p:grpSpPr>
+        <a:xfrm>
+          <a:off x="0" y="0"/>
+          <a:ext cx="0" cy="0"/>
+          <a:chOff x="0" y="0"/>
+          <a:chExt cx="0" cy="0"/>
+        </a:xfrm>
+      </p:grpSpPr>
+      <p:sp>
+        <p:nvSpPr>
+          <p:cNvPr id="2" name="Text 0"/>
+          <p:cNvSpPr/>
+          <p:nvPr/>
+        </p:nvSpPr>
+        <p:spPr>
+          <a:xfrm>
+            <a:off x="640080" y="502920"/>
+            <a:ext cx="10515600" cy="320040"/>
+          </a:xfrm>
+          <a:prstGeom prst="rect">
+            <a:avLst/>
+          </a:prstGeom>
+          <a:noFill/>
+          <a:ln/>
+        </p:spPr>
+        <p:txBody>
+          <a:bodyPr wrap="square" rtlCol="0" anchor="ctr"/>
+          <a:lstStyle/>
+          <a:p>
+            <a:pPr indent="0" marL="0">
+              <a:buNone/>
+            </a:pPr>
+            <a:r>
+              <a:rPr lang="en-US" sz="1300" b="1" spc="300" kern="0" dirty="0">
+                <a:solidFill>
+                  <a:srgbClr val="3F6F5F"/>
+                </a:solidFill>
+                <a:latin typeface="Calibri" pitchFamily="34" charset="0"/>
+                <a:ea typeface="Calibri" pitchFamily="34" charset="-122"/>
+                <a:cs typeface="Calibri" pitchFamily="34" charset="-120"/>
+              </a:rPr>
+              <a:t>YOUR TURN · 20 MINUTES</a:t>
+            </a:r>
+            <a:endParaRPr lang="en-US" sz="1300" dirty="0"/>
+          </a:p>
+        </p:txBody>
+      </p:sp>
+      <p:sp>
+        <p:nvSpPr>
+          <p:cNvPr id="3" name="Text 1"/>
+          <p:cNvSpPr/>
+          <p:nvPr/>
+        </p:nvSpPr>
+        <p:spPr>
+          <a:xfrm>
+            <a:off x="640080" y="868680"/>
+            <a:ext cx="10972800" cy="777240"/>
+          </a:xfrm>
+          <a:prstGeom prst="rect">
+            <a:avLst/>
+          </a:prstGeom>
+          <a:noFill/>
+          <a:ln/>
+        </p:spPr>
+        <p:txBody>
+          <a:bodyPr wrap="square" rtlCol="0" anchor="t"/>
+          <a:lstStyle/>
+          <a:p>
+            <a:pPr indent="0" marL="0">
+              <a:buNone/>
+            </a:pPr>
+            <a:r>
+              <a:rPr lang="en-US" sz="3400" b="1" dirty="0">
+                <a:solidFill>
+                  <a:srgbClr val="1A1A1A"/>
+                </a:solidFill>
+                <a:latin typeface="Cambria" pitchFamily="34" charset="0"/>
+                <a:ea typeface="Cambria" pitchFamily="34" charset="-122"/>
+                <a:cs typeface="Cambria" pitchFamily="34" charset="-120"/>
+              </a:rPr>
+              <a:t>Collect it, save it, start the repo</a:t>
+            </a:r>
+            <a:endParaRPr lang="en-US" sz="3400" dirty="0"/>
+          </a:p>
+        </p:txBody>
+      </p:sp>
+      <p:sp>
+        <p:nvSpPr>
+          <p:cNvPr id="4" name="Shape 2"/>
+          <p:cNvSpPr/>
+          <p:nvPr/>
+        </p:nvSpPr>
+        <p:spPr>
+          <a:xfrm>
+            <a:off x="640080" y="2103120"/>
+            <a:ext cx="10881360" cy="1097280"/>
+          </a:xfrm>
+          <a:prstGeom prst="roundRect">
+            <a:avLst>
+              <a:gd name="adj" fmla="val 8333"/>
+            </a:avLst>
+          </a:prstGeom>
+          <a:solidFill>
+            <a:srgbClr val="F4EEE8"/>
+          </a:solidFill>
+          <a:ln/>
+        </p:spPr>
+      </p:sp>
+      <p:sp>
+        <p:nvSpPr>
+          <p:cNvPr id="5" name="Text 3"/>
+          <p:cNvSpPr/>
+          <p:nvPr/>
+        </p:nvSpPr>
+        <p:spPr>
+          <a:xfrm>
+            <a:off x="1005840" y="2240280"/>
+            <a:ext cx="4206240" cy="822960"/>
+          </a:xfrm>
+          <a:prstGeom prst="rect">
+            <a:avLst/>
+          </a:prstGeom>
+          <a:noFill/>
+          <a:ln/>
+        </p:spPr>
+        <p:txBody>
+          <a:bodyPr wrap="square" lIns="0" tIns="0" rIns="0" bIns="0" rtlCol="0" anchor="ctr"/>
+          <a:lstStyle/>
+          <a:p>
+            <a:pPr indent="0" marL="0">
+              <a:buNone/>
+            </a:pPr>
+            <a:r>
+              <a:rPr lang="en-US" sz="1900" b="1" dirty="0">
+                <a:solidFill>
+                  <a:srgbClr val="3F6F5F"/>
+                </a:solidFill>
+                <a:latin typeface="Cambria" pitchFamily="34" charset="0"/>
+                <a:ea typeface="Cambria" pitchFamily="34" charset="-122"/>
+                <a:cs typeface="Cambria" pitchFamily="34" charset="-120"/>
+              </a:rPr>
+              <a:t>a file in your Drive folder</a:t>
+            </a:r>
+            <a:endParaRPr lang="en-US" sz="1900" dirty="0"/>
+          </a:p>
+        </p:txBody>
+      </p:sp>
+      <p:sp>
+        <p:nvSpPr>
+          <p:cNvPr id="6" name="Text 4"/>
+          <p:cNvSpPr/>
+          <p:nvPr/>
+        </p:nvSpPr>
+        <p:spPr>
+          <a:xfrm>
+            <a:off x="5394960" y="2240280"/>
+            <a:ext cx="5760720" cy="822960"/>
+          </a:xfrm>
+          <a:prstGeom prst="rect">
+            <a:avLst/>
+          </a:prstGeom>
+          <a:noFill/>
+          <a:ln/>
+        </p:spPr>
+        <p:txBody>
+          <a:bodyPr wrap="square" lIns="0" tIns="0" rIns="0" bIns="0" rtlCol="0" anchor="ctr"/>
+          <a:lstStyle/>
+          <a:p>
+            <a:pPr indent="0" marL="0">
+              <a:buNone/>
+            </a:pPr>
+            <a:r>
+              <a:rPr lang="en-US" sz="1400" dirty="0">
+                <a:solidFill>
+                  <a:srgbClr val="1A1A1A"/>
+                </a:solidFill>
+                <a:latin typeface="Calibri" pitchFamily="34" charset="0"/>
+                <a:ea typeface="Calibri" pitchFamily="34" charset="-122"/>
+                <a:cs typeface="Calibri" pitchFamily="34" charset="-120"/>
+              </a:rPr>
+              <a:t>Week 5 starts from it. Colab forgets everything else.</a:t>
+            </a:r>
+            <a:endParaRPr lang="en-US" sz="1400" dirty="0"/>
+          </a:p>
+        </p:txBody>
+      </p:sp>
+      <p:sp>
+        <p:nvSpPr>
+          <p:cNvPr id="7" name="Shape 5"/>
+          <p:cNvSpPr/>
+          <p:nvPr/>
+        </p:nvSpPr>
+        <p:spPr>
+          <a:xfrm>
+            <a:off x="640080" y="3383280"/>
+            <a:ext cx="10881360" cy="1097280"/>
+          </a:xfrm>
+          <a:prstGeom prst="roundRect">
+            <a:avLst>
+              <a:gd name="adj" fmla="val 8333"/>
+            </a:avLst>
+          </a:prstGeom>
+          <a:solidFill>
+            <a:srgbClr val="F4EEE8"/>
+          </a:solidFill>
+          <a:ln/>
+        </p:spPr>
+      </p:sp>
+      <p:sp>
+        <p:nvSpPr>
+          <p:cNvPr id="8" name="Text 6"/>
+          <p:cNvSpPr/>
+          <p:nvPr/>
+        </p:nvSpPr>
+        <p:spPr>
+          <a:xfrm>
+            <a:off x="1005840" y="3520440"/>
+            <a:ext cx="4206240" cy="822960"/>
+          </a:xfrm>
+          <a:prstGeom prst="rect">
+            <a:avLst/>
+          </a:prstGeom>
+          <a:noFill/>
+          <a:ln/>
+        </p:spPr>
+        <p:txBody>
+          <a:bodyPr wrap="square" lIns="0" tIns="0" rIns="0" bIns="0" rtlCol="0" anchor="ctr"/>
+          <a:lstStyle/>
+          <a:p>
+            <a:pPr indent="0" marL="0">
+              <a:buNone/>
+            </a:pPr>
+            <a:r>
+              <a:rPr lang="en-US" sz="1900" b="1" dirty="0">
+                <a:solidFill>
+                  <a:srgbClr val="2E5F8A"/>
+                </a:solidFill>
+                <a:latin typeface="Cambria" pitchFamily="34" charset="0"/>
+                <a:ea typeface="Cambria" pitchFamily="34" charset="-122"/>
+                <a:cs typeface="Cambria" pitchFamily="34" charset="-120"/>
+              </a:rPr>
+              <a:t>a repo with Pages switched on</a:t>
+            </a:r>
+            <a:endParaRPr lang="en-US" sz="1900" dirty="0"/>
+          </a:p>
+        </p:txBody>
+      </p:sp>
+      <p:sp>
+        <p:nvSpPr>
+          <p:cNvPr id="9" name="Text 7"/>
+          <p:cNvSpPr/>
+          <p:nvPr/>
+        </p:nvSpPr>
+        <p:spPr>
+          <a:xfrm>
+            <a:off x="5394960" y="3520440"/>
+            <a:ext cx="5760720" cy="822960"/>
+          </a:xfrm>
+          <a:prstGeom prst="rect">
+            <a:avLst/>
+          </a:prstGeom>
+          <a:noFill/>
+          <a:ln/>
+        </p:spPr>
+        <p:txBody>
+          <a:bodyPr wrap="square" lIns="0" tIns="0" rIns="0" bIns="0" rtlCol="0" anchor="ctr"/>
+          <a:lstStyle/>
+          <a:p>
+            <a:pPr indent="0" marL="0">
+              <a:buNone/>
+            </a:pPr>
+            <a:r>
+              <a:rPr lang="en-US" sz="1400" dirty="0">
+                <a:solidFill>
+                  <a:srgbClr val="1A1A1A"/>
+                </a:solidFill>
+                <a:latin typeface="Calibri" pitchFamily="34" charset="0"/>
+                <a:ea typeface="Calibri" pitchFamily="34" charset="-122"/>
+                <a:cs typeface="Calibri" pitchFamily="34" charset="-120"/>
+              </a:rPr>
+              <a:t>so a live URL exists today, not in Week 9 under deadline.</a:t>
+            </a:r>
+            <a:endParaRPr lang="en-US" sz="1400" dirty="0"/>
+          </a:p>
+        </p:txBody>
+      </p:sp>
+      <p:sp>
+        <p:nvSpPr>
+          <p:cNvPr id="10" name="Shape 8"/>
+          <p:cNvSpPr/>
+          <p:nvPr/>
+        </p:nvSpPr>
+        <p:spPr>
+          <a:xfrm>
+            <a:off x="640080" y="4663440"/>
+            <a:ext cx="10881360" cy="1097280"/>
+          </a:xfrm>
+          <a:prstGeom prst="roundRect">
+            <a:avLst>
+              <a:gd name="adj" fmla="val 8333"/>
+            </a:avLst>
+          </a:prstGeom>
+          <a:solidFill>
+            <a:srgbClr val="F4EEE8"/>
+          </a:solidFill>
+          <a:ln/>
+        </p:spPr>
+      </p:sp>
+      <p:sp>
+        <p:nvSpPr>
+          <p:cNvPr id="11" name="Text 9"/>
+          <p:cNvSpPr/>
+          <p:nvPr/>
+        </p:nvSpPr>
+        <p:spPr>
+          <a:xfrm>
+            <a:off x="1005840" y="4800600"/>
+            <a:ext cx="4206240" cy="822960"/>
+          </a:xfrm>
+          <a:prstGeom prst="rect">
+            <a:avLst/>
+          </a:prstGeom>
+          <a:noFill/>
+          <a:ln/>
+        </p:spPr>
+        <p:txBody>
+          <a:bodyPr wrap="square" lIns="0" tIns="0" rIns="0" bIns="0" rtlCol="0" anchor="ctr"/>
+          <a:lstStyle/>
+          <a:p>
+            <a:pPr indent="0" marL="0">
+              <a:buNone/>
+            </a:pPr>
+            <a:r>
+              <a:rPr lang="en-US" sz="1900" b="1" dirty="0">
+                <a:solidFill>
+                  <a:srgbClr val="7A3B2E"/>
+                </a:solidFill>
+                <a:latin typeface="Cambria" pitchFamily="34" charset="0"/>
+                <a:ea typeface="Cambria" pitchFamily="34" charset="-122"/>
+                <a:cs typeface="Cambria" pitchFamily="34" charset="-120"/>
+              </a:rPr>
+              <a:t>two minutes of pitch, to a partner</a:t>
+            </a:r>
+            <a:endParaRPr lang="en-US" sz="1900" dirty="0"/>
+          </a:p>
+        </p:txBody>
+      </p:sp>
+      <p:sp>
+        <p:nvSpPr>
+          <p:cNvPr id="12" name="Text 10"/>
+          <p:cNvSpPr/>
+          <p:nvPr/>
+        </p:nvSpPr>
+        <p:spPr>
+          <a:xfrm>
+            <a:off x="5394960" y="4800600"/>
+            <a:ext cx="5760720" cy="822960"/>
+          </a:xfrm>
+          <a:prstGeom prst="rect">
+            <a:avLst/>
+          </a:prstGeom>
+          <a:noFill/>
+          <a:ln/>
+        </p:spPr>
+        <p:txBody>
+          <a:bodyPr wrap="square" lIns="0" tIns="0" rIns="0" bIns="0" rtlCol="0" anchor="ctr"/>
+          <a:lstStyle/>
+          <a:p>
+            <a:pPr indent="0" marL="0">
+              <a:buNone/>
+            </a:pPr>
+            <a:r>
+              <a:rPr lang="en-US" sz="1400" dirty="0">
+                <a:solidFill>
+                  <a:srgbClr val="1A1A1A"/>
+                </a:solidFill>
+                <a:latin typeface="Calibri" pitchFamily="34" charset="0"/>
+                <a:ea typeface="Calibri" pitchFamily="34" charset="-122"/>
+                <a:cs typeface="Calibri" pitchFamily="34" charset="-120"/>
+              </a:rPr>
+              <a:t>corpus, two methods, what would count as a finding.</a:t>
+            </a:r>
+            <a:endParaRPr lang="en-US" sz="1400" dirty="0"/>
+          </a:p>
+        </p:txBody>
+      </p:sp>
+      <p:sp>
+        <p:nvSpPr>
+          <p:cNvPr id="13" name="Text 11"/>
+          <p:cNvSpPr/>
+          <p:nvPr/>
+        </p:nvSpPr>
+        <p:spPr>
+          <a:xfrm>
+            <a:off x="640080" y="6263640"/>
+            <a:ext cx="10881360" cy="365760"/>
+          </a:xfrm>
+          <a:prstGeom prst="rect">
+            <a:avLst/>
+          </a:prstGeom>
+          <a:noFill/>
+          <a:ln/>
+        </p:spPr>
+        <p:txBody>
+          <a:bodyPr wrap="square" rtlCol="0" anchor="ctr"/>
+          <a:lstStyle/>
+          <a:p>
+            <a:pPr indent="0" marL="0">
+              <a:buNone/>
+            </a:pPr>
+            <a:r>
+              <a:rPr lang="en-US" sz="1100" i="1" dirty="0">
+                <a:solidFill>
+                  <a:srgbClr val="6B6B63"/>
+                </a:solidFill>
+                <a:latin typeface="Calibri" pitchFamily="34" charset="0"/>
+                <a:ea typeface="Calibri" pitchFamily="34" charset="-122"/>
+                <a:cs typeface="Calibri" pitchFamily="34" charset="-120"/>
+              </a:rPr>
+              <a:t>A null result, honestly shown, is a complete project. The pivot kit is insurance, not a demotion.</a:t>
+            </a:r>
+            <a:endParaRPr lang="en-US" sz="1100" dirty="0"/>
+          </a:p>
+        </p:txBody>
+      </p:sp>
+    </p:spTree>
+  </p:cSld>
+  <p:clrMapOvr>
+    <a:masterClrMapping/>
+  </p:clrMapOvr>
+</p:sld>
+</file>
+
+<file path=ppt/slides/slide33.xml><?xml version="1.0" encoding="utf-8"?>
+<p:sld xmlns:a="http://schemas.openxmlformats.org/drawingml/2006/main" xmlns:r="http://schemas.openxmlformats.org/officeDocument/2006/relationships" xmlns:p="http://schemas.openxmlformats.org/presentationml/2006/main">
+  <p:cSld name="Slide 33">
     <p:bg>
       <p:bgPr>
         <a:solidFill>

--- a/slides/week-04-lecture-draft.pptx
+++ b/slides/week-04-lecture-draft.pptx
@@ -4761,7 +4761,7 @@
                 <a:ea typeface="Calibri" pitchFamily="34" charset="-122"/>
                 <a:cs typeface="Calibri" pitchFamily="34" charset="-120"/>
               </a:rPr>
-              <a:t>J. R. Firth, “A Synopsis of Linguistic Theory 1930–1955” (1957). The claim itself is the distributional hypothesis, Zellig Harris, “Distributional Structure” (1954): words used in similar contexts tend to mean similar things. Lines drawn live from this week's corpus.</a:t>
+              <a:t>Frege 1884, never ask for the meaning of a word in isolation · Wittgenstein 1953, the meaning of a word is its use · Harris 1954, the distributional hypothesis · Firth 1957, the line above. Lines drawn live from this week's corpus.</a:t>
             </a:r>
             <a:endParaRPr lang="en-US" sz="1000" dirty="0"/>
           </a:p>

--- a/slides/week-04-lecture-draft.pptx
+++ b/slides/week-04-lecture-draft.pptx
@@ -4666,9 +4666,62 @@
           </a:p>
         </p:txBody>
       </p:sp>
+      <p:sp>
+        <p:nvSpPr>
+          <p:cNvPr id="4" name="Text 2"/>
+          <p:cNvSpPr/>
+          <p:nvPr/>
+        </p:nvSpPr>
+        <p:spPr>
+          <a:xfrm>
+            <a:off x="640080" y="1664208"/>
+            <a:ext cx="10881360" cy="365760"/>
+          </a:xfrm>
+          <a:prstGeom prst="rect">
+            <a:avLst/>
+          </a:prstGeom>
+          <a:noFill/>
+          <a:ln/>
+        </p:spPr>
+        <p:txBody>
+          <a:bodyPr wrap="square" rtlCol="0" anchor="ctr"/>
+          <a:lstStyle/>
+          <a:p>
+            <a:pPr indent="0" marL="0">
+              <a:buNone/>
+            </a:pPr>
+            <a:r>
+              <a:rPr lang="en-US" sz="1700" i="1" dirty="0">
+                <a:solidFill>
+                  <a:srgbClr val="7A3B2E"/>
+                </a:solidFill>
+                <a:latin typeface="Cambria" pitchFamily="34" charset="0"/>
+                <a:ea typeface="Cambria" pitchFamily="34" charset="-122"/>
+                <a:cs typeface="Cambria" pitchFamily="34" charset="-120"/>
+              </a:rPr>
+              <a:t>“The meaning of a word is its use in the language.”</a:t>
+            </a:r>
+            <a:pPr indent="0" marL="0">
+              <a:buNone/>
+            </a:pPr>
+            <a:r>
+              <a:rPr lang="en-US" sz="1300" dirty="0">
+                <a:solidFill>
+                  <a:srgbClr val="6B6B63"/>
+                </a:solidFill>
+                <a:latin typeface="Cambria" pitchFamily="34" charset="0"/>
+                <a:ea typeface="Cambria" pitchFamily="34" charset="-122"/>
+                <a:cs typeface="Cambria" pitchFamily="34" charset="-120"/>
+              </a:rPr>
+              <a:t>   Wittgenstein, Philosophical Investigations §43 (1953)</a:t>
+            </a:r>
+            <a:endParaRPr lang="en-US" sz="1700" dirty="0"/>
+          </a:p>
+        </p:txBody>
+      </p:sp>
       <p:pic>
         <p:nvPicPr>
-          <p:cNvPr id="4" name="Image 0" descr="/tmp/figs/w4_distributional.png">    </p:cNvPr>
+          <p:cNvPr id="5" name="Image 0" descr="/tmp/figs/w4_distributional.png">    </p:cNvPr>
           <p:cNvPicPr>
             <a:picLocks noChangeAspect="1"/>
           </p:cNvPicPr>
@@ -4681,8 +4734,8 @@
         </p:blipFill>
         <p:spPr>
           <a:xfrm>
-            <a:off x="914400" y="1874520"/>
-            <a:ext cx="10332720" cy="3566160"/>
+            <a:off x="914400" y="2148840"/>
+            <a:ext cx="10332720" cy="3291840"/>
           </a:xfrm>
           <a:prstGeom prst="rect">
             <a:avLst/>
@@ -4691,7 +4744,7 @@
       </p:pic>
       <p:sp>
         <p:nvSpPr>
-          <p:cNvPr id="5" name="Text 2"/>
+          <p:cNvPr id="6" name="Text 3"/>
           <p:cNvSpPr/>
           <p:nvPr/>
         </p:nvSpPr>
@@ -4730,7 +4783,7 @@
       </p:sp>
       <p:sp>
         <p:nvSpPr>
-          <p:cNvPr id="6" name="Text 3"/>
+          <p:cNvPr id="7" name="Text 4"/>
           <p:cNvSpPr/>
           <p:nvPr/>
         </p:nvSpPr>
@@ -4761,7 +4814,7 @@
                 <a:ea typeface="Calibri" pitchFamily="34" charset="-122"/>
                 <a:cs typeface="Calibri" pitchFamily="34" charset="-120"/>
               </a:rPr>
-              <a:t>Frege 1884, never ask for the meaning of a word in isolation · Wittgenstein 1953, the meaning of a word is its use · Harris 1954, the distributional hypothesis · Firth 1957, the line above. Lines drawn live from this week's corpus.</a:t>
+              <a:t>Frege 1884, never ask for the meaning of a word in isolation · Harris 1954, the distributional hypothesis · Firth 1957, the title. Lines drawn live from this week's corpus.</a:t>
             </a:r>
             <a:endParaRPr lang="en-US" sz="1000" dirty="0"/>
           </a:p>

--- a/slides/week-04-lecture-draft.pptx
+++ b/slides/week-04-lecture-draft.pptx
@@ -4775,7 +4775,7 @@
                 <a:ea typeface="Cambria" pitchFamily="34" charset="-122"/>
                 <a:cs typeface="Cambria" pitchFamily="34" charset="-120"/>
               </a:rPr>
-              <a:t>Ask the room before you show the answer. Nobody needs a definition of the word; the contexts are enough.</a:t>
+              <a:t>Ask the room before you show the answer. Nobody needs a definition. The contexts are enough.</a:t>
             </a:r>
             <a:endParaRPr lang="en-US" sz="1600" dirty="0"/>
           </a:p>
@@ -5025,7 +5025,7 @@
                 <a:ea typeface="Calibri" pitchFamily="34" charset="-122"/>
                 <a:cs typeface="Calibri" pitchFamily="34" charset="-120"/>
               </a:rPr>
-              <a:t>Underneath it, Week 3's four moves: multiply, add, squash, nudge. The difference is that the prediction is thrown away and the weights are what you keep. 849,738 pairs in one pass.</a:t>
+              <a:t>Underneath it, Week 3's four moves: multiply, add, squash, nudge. The prediction gets thrown away; the weights are what you keep. 849,738 pairs in one pass.</a:t>
             </a:r>
             <a:endParaRPr lang="en-US" sz="1000" dirty="0"/>
           </a:p>
@@ -5369,7 +5369,7 @@
                 <a:ea typeface="Cambria" pitchFamily="34" charset="-122"/>
                 <a:cs typeface="Cambria" pitchFamily="34" charset="-120"/>
               </a:rPr>
-              <a:t>225,355 words of Frankenstein and Dracula, and no labels anywhere. Nobody told it what a door is.</a:t>
+              <a:t>225,355 words of Frankenstein and Dracula. Nobody told it what a door is.</a:t>
             </a:r>
             <a:endParaRPr lang="en-US" sz="1600" dirty="0"/>
           </a:p>
@@ -5752,7 +5752,7 @@
                 <a:ea typeface="Cambria" pitchFamily="34" charset="-122"/>
                 <a:cs typeface="Cambria" pitchFamily="34" charset="-120"/>
               </a:rPr>
-              <a:t>Nobody labelled any of this. It is what a century of printed English put near what.</a:t>
+              <a:t>Nobody labelled any of this. It is only what a century of printed English put side by side.</a:t>
             </a:r>
             <a:endParaRPr lang="en-US" sz="1600" dirty="0"/>
           </a:p>
@@ -8009,7 +8009,7 @@
                 <a:ea typeface="Calibri" pitchFamily="34" charset="-122"/>
                 <a:cs typeface="Calibri" pitchFamily="34" charset="-120"/>
               </a:rPr>
-              <a:t>Every panel is real arithmetic on the painting to its left. Stacking them is all a CNN is.</a:t>
+              <a:t>Every panel is real arithmetic on the painting to its left. Stacking them is what a CNN does.</a:t>
             </a:r>
             <a:endParaRPr lang="en-US" sz="1000" dirty="0"/>
           </a:p>
@@ -8220,7 +8220,7 @@
                 <a:ea typeface="Calibri" pitchFamily="34" charset="-122"/>
                 <a:cs typeface="Calibri" pitchFamily="34" charset="-120"/>
               </a:rPr>
-              <a:t>Which is why "a painting of a woman in a red hat" can search a museum with no tags in it at all. The notebook trains a small one on 18 paintings.</a:t>
+              <a:t>Which is why "a painting of a woman in a red hat" can search a museum with no tags in it. The notebook trains a small one on 18 paintings.</a:t>
             </a:r>
             <a:endParaRPr lang="en-US" sz="1000" dirty="0"/>
           </a:p>
@@ -9628,7 +9628,7 @@
                 <a:ea typeface="Calibri" pitchFamily="34" charset="-122"/>
                 <a:cs typeface="Calibri" pitchFamily="34" charset="-120"/>
               </a:rPr>
-              <a:t>Both queried live for this slide. Work out which kind you have before you estimate how long anything will take.</a:t>
+              <a:t>Both queried live for this slide. Work out which kind you have before you estimate how long it takes.</a:t>
             </a:r>
             <a:endParaRPr lang="en-US" sz="1000" dirty="0"/>
           </a:p>
@@ -10599,7 +10599,7 @@
                 <a:ea typeface="Calibri" pitchFamily="34" charset="-122"/>
                 <a:cs typeface="Calibri" pitchFamily="34" charset="-120"/>
               </a:rPr>
-              <a:t>Real HTML from quotes.toscrape.com. A selector that matches nothing returns None and raises no error, which is the bug you will actually hit.</a:t>
+              <a:t>Real HTML from quotes.toscrape.com. A selector that matches nothing returns None and raises no error. That is the bug you will hit.</a:t>
             </a:r>
             <a:endParaRPr lang="en-US" sz="1000" dirty="0"/>
           </a:p>
@@ -10810,7 +10810,7 @@
                 <a:ea typeface="Calibri" pitchFamily="34" charset="-122"/>
                 <a:cs typeface="Calibri" pitchFamily="34" charset="-120"/>
               </a:rPr>
-              <a:t>And the site notices the difference. One page a second is a reader; fifty a second is an outage.</a:t>
+              <a:t>One page a second is a reader. Fifty a second is an outage.</a:t>
             </a:r>
             <a:endParaRPr lang="en-US" sz="1000" dirty="0"/>
           </a:p>
@@ -13074,7 +13074,7 @@
                 <a:ea typeface="Cambria" pitchFamily="34" charset="-122"/>
                 <a:cs typeface="Cambria" pitchFamily="34" charset="-120"/>
               </a:rPr>
-              <a:t>Same passages, same job: 100% against 99%. You can read the left panel and say why. You cannot do that with the right one.</a:t>
+              <a:t>Same passages, same job: 100% against 99%. You can read the left panel. You cannot read the right one.</a:t>
             </a:r>
             <a:endParaRPr lang="en-US" sz="1600" dirty="0"/>
           </a:p>

--- a/slides/week-04-lecture-draft.pptx
+++ b/slides/week-04-lecture-draft.pptx
@@ -3876,7 +3876,7 @@
                 <a:ea typeface="Calibri" pitchFamily="34" charset="-122"/>
                 <a:cs typeface="Calibri" pitchFamily="34" charset="-120"/>
               </a:rPr>
-              <a:t>Your Week 3 classifier is one neuron. Today it grows, learns a map of meaning,</a:t>
+              <a:t>Your Week 3 classifier is one neuron. Today it grows, learns to place words by the</a:t>
             </a:r>
             <a:endParaRPr lang="en-US" sz="1700" dirty="0"/>
           </a:p>
@@ -3896,7 +3896,7 @@
                 <a:ea typeface="Calibri" pitchFamily="34" charset="-122"/>
                 <a:cs typeface="Calibri" pitchFamily="34" charset="-120"/>
               </a:rPr>
-              <a:t>and then you go and fetch the data you will use it on</a:t>
+              <a:t>company they keep, and then you go and collect the data you will use it on</a:t>
             </a:r>
             <a:endParaRPr lang="en-US" sz="1700" dirty="0"/>
           </a:p>
@@ -4339,7 +4339,7 @@
                 <a:ea typeface="Cambria" pitchFamily="34" charset="-122"/>
                 <a:cs typeface="Cambria" pitchFamily="34" charset="-120"/>
               </a:rPr>
-              <a:t>A loss says how wrong you are. Step downhill, repeat, thousands of weights at once. No calculus today.</a:t>
+              <a:t>A loss is one number saying how wrong you are. Step downhill, repeat, for thousands of weights at once. No calculus today.</a:t>
             </a:r>
             <a:endParaRPr lang="en-US" sz="1600" dirty="0"/>
           </a:p>
@@ -5580,7 +5580,7 @@
                 <a:ea typeface="Calibri" pitchFamily="34" charset="-122"/>
                 <a:cs typeface="Calibri" pitchFamily="34" charset="-120"/>
               </a:rPr>
-              <a:t>Two dimensions of sixty; the picture always loses something. Next: the Embedding Projector, live.</a:t>
+              <a:t>Two dimensions out of sixty, so the picture loses a lot. Next: the Embedding Projector, live.</a:t>
             </a:r>
             <a:endParaRPr lang="en-US" sz="1000" dirty="0"/>
           </a:p>
@@ -5752,7 +5752,7 @@
                 <a:ea typeface="Cambria" pitchFamily="34" charset="-122"/>
                 <a:cs typeface="Cambria" pitchFamily="34" charset="-120"/>
               </a:rPr>
-              <a:t>Nobody labelled any of this. It is only what a century of printed English put side by side.</a:t>
+              <a:t>Nobody labelled any of this. It is what a century of printed English put side by side.</a:t>
             </a:r>
             <a:endParaRPr lang="en-US" sz="1600" dirty="0"/>
           </a:p>
@@ -6740,7 +6740,7 @@
                 <a:ea typeface="Calibri" pitchFamily="34" charset="-122"/>
                 <a:cs typeface="Calibri" pitchFamily="34" charset="-120"/>
               </a:rPr>
-              <a:t>Your classifier, stacked - and what stacking buys and costs</a:t>
+              <a:t>Your classifier, stacked, and what that gains and costs</a:t>
             </a:r>
             <a:endParaRPr lang="en-US" sz="1250" dirty="0"/>
           </a:p>
@@ -8220,7 +8220,7 @@
                 <a:ea typeface="Calibri" pitchFamily="34" charset="-122"/>
                 <a:cs typeface="Calibri" pitchFamily="34" charset="-120"/>
               </a:rPr>
-              <a:t>Which is why "a painting of a woman in a red hat" can search a museum with no tags in it. The notebook trains a small one on 18 paintings.</a:t>
+              <a:t>This is why you can search an untagged museum by typing "a woman in a red hat". The notebook trains a small one on 18 paintings.</a:t>
             </a:r>
             <a:endParaRPr lang="en-US" sz="1000" dirty="0"/>
           </a:p>
@@ -9167,7 +9167,7 @@
                 <a:ea typeface="Cambria" pitchFamily="34" charset="-122"/>
                 <a:cs typeface="Cambria" pitchFamily="34" charset="-120"/>
               </a:rPr>
-              <a:t>Ask for one item. The pagination block tells you how big the job is; the data block is your rows.</a:t>
+              <a:t>Ask for one item. The pagination block tells you how big the job is. The data block is your rows.</a:t>
             </a:r>
             <a:endParaRPr lang="en-US" sz="1600" dirty="0"/>
           </a:p>
@@ -9589,7 +9589,7 @@
                 <a:ea typeface="Cambria" pitchFamily="34" charset="-122"/>
                 <a:cs typeface="Cambria" pitchFamily="34" charset="-120"/>
               </a:rPr>
-              <a:t>One hands you rows. The other hands you a phone book, and every row after that is another request.</a:t>
+              <a:t>One returns rows. The other returns ID numbers, and every row after that is another request.</a:t>
             </a:r>
             <a:endParaRPr lang="en-US" sz="1600" dirty="0"/>
           </a:p>
@@ -10560,7 +10560,7 @@
                 <a:ea typeface="Cambria" pitchFamily="34" charset="-122"/>
                 <a:cs typeface="Cambria" pitchFamily="34" charset="-120"/>
               </a:rPr>
-              <a:t>Fetch one page, look at one block, and read the selectors off it. Right-click, Inspect, and the tag names are right there.</a:t>
+              <a:t>Fetch one page, look at one block, and read the selectors off it. In a browser: right-click, Inspect, and the tag names are there.</a:t>
             </a:r>
             <a:endParaRPr lang="en-US" sz="1600" dirty="0"/>
           </a:p>
@@ -12840,7 +12840,7 @@
                 <a:ea typeface="Cambria" pitchFamily="34" charset="-122"/>
                 <a:cs typeface="Cambria" pitchFamily="34" charset="-120"/>
               </a:rPr>
-              <a:t>Stack them and something changes</a:t>
+              <a:t>Stack them and they learn combinations</a:t>
             </a:r>
             <a:endParaRPr lang="en-US" sz="3400" dirty="0"/>
           </a:p>

--- a/slides/week-04-lecture-draft.pptx
+++ b/slides/week-04-lecture-draft.pptx
@@ -4027,7 +4027,7 @@
                 <a:ea typeface="Calibri" pitchFamily="34" charset="-122"/>
                 <a:cs typeface="Calibri" pitchFamily="34" charset="-120"/>
               </a:rPr>
-              <a:t>WHY IT MATTERS</a:t>
+              <a:t>WHEN YOU NEED THE EXTRA LAYER</a:t>
             </a:r>
             <a:endParaRPr lang="en-US" sz="1300" dirty="0"/>
           </a:p>
@@ -4066,7 +4066,7 @@
                 <a:ea typeface="Cambria" pitchFamily="34" charset="-122"/>
                 <a:cs typeface="Cambria" pitchFamily="34" charset="-120"/>
               </a:rPr>
-              <a:t>Some questions a straight line cannot answer</a:t>
+              <a:t>One question a line can answer, one it cannot</a:t>
             </a:r>
             <a:endParaRPr lang="en-US" sz="3400" dirty="0"/>
           </a:p>
@@ -4074,7 +4074,7 @@
       </p:sp>
       <p:pic>
         <p:nvPicPr>
-          <p:cNvPr id="4" name="Image 0" descr="/tmp/figs/w4_spiral.png">    </p:cNvPr>
+          <p:cNvPr id="4" name="Image 0" descr="/tmp/figs/w4_meaning.png">    </p:cNvPr>
           <p:cNvPicPr>
             <a:picLocks noChangeAspect="1"/>
           </p:cNvPicPr>
@@ -4087,8 +4087,8 @@
         </p:blipFill>
         <p:spPr>
           <a:xfrm>
-            <a:off x="1097280" y="1737360"/>
-            <a:ext cx="9966960" cy="4114800"/>
+            <a:off x="548640" y="1828800"/>
+            <a:ext cx="11064240" cy="3657600"/>
           </a:xfrm>
           <a:prstGeom prst="rect">
             <a:avLst/>
@@ -4128,7 +4128,7 @@
                 <a:ea typeface="Cambria" pitchFamily="34" charset="-122"/>
                 <a:cs typeface="Cambria" pitchFamily="34" charset="-120"/>
               </a:rPr>
-              <a:t>Same points, same training. One neuron: 70%. Two hidden layers: 99%.</a:t>
+              <a:t>"Which side?" is a direction: a line gets 100%. "How far from the middle?" is a distance: 68% for the line, 100% for the network.</a:t>
             </a:r>
             <a:endParaRPr lang="en-US" sz="1600" dirty="0"/>
           </a:p>
@@ -4167,7 +4167,7 @@
                 <a:ea typeface="Calibri" pitchFamily="34" charset="-122"/>
                 <a:cs typeface="Calibri" pitchFamily="34" charset="-120"/>
               </a:rPr>
-              <a:t>Both models fitted for this slide. Next: the same thing live in TensorFlow Playground.</a:t>
+              <a:t>Valence and arousal for 13,915 words, Warriner, Kuperman &amp; Brysbaert (2013), fetched at build time. Osgood's dimensions, measured again. Next: Playground on the XOR set.</a:t>
             </a:r>
             <a:endParaRPr lang="en-US" sz="1000" dirty="0"/>
           </a:p>
@@ -4986,7 +4986,7 @@
                 <a:ea typeface="Cambria" pitchFamily="34" charset="-122"/>
                 <a:cs typeface="Cambria" pitchFamily="34" charset="-120"/>
               </a:rPr>
-              <a:t>For a word, a context is a few words of text. That is the whole rule. It is called contrastive learning, and most modern embeddings are trained this way.</a:t>
+              <a:t>For a word, a context is a few words of text. That is the whole rule, and it is how most modern embeddings are trained.</a:t>
             </a:r>
             <a:endParaRPr lang="en-US" sz="1600" dirty="0"/>
           </a:p>

--- a/slides/week-04-lecture-draft.pptx
+++ b/slides/week-04-lecture-draft.pptx
@@ -38,9 +38,10 @@
     <p:sldId id="286" r:id="rId32"/>
     <p:sldId id="287" r:id="rId33"/>
     <p:sldId id="288" r:id="rId34"/>
+    <p:sldId id="289" r:id="rId35"/>
   </p:sldIdLst>
   <p:notesMasterIdLst>
-    <p:notesMasterId r:id="rId35"/>
+    <p:notesMasterId r:id="rId36"/>
   </p:notesMasterIdLst>
   <p:sldSz cx="12191695" cy="6858000"/>
   <p:notesSz cx="6858000" cy="12191695"/>
@@ -2846,6 +2847,94 @@
             <a:fld id="{F7021451-1387-4CA6-816F-3879F97B5CBC}" type="slidenum">
               <a:rPr lang="en-US"/>
               <a:t>33</a:t>
+            </a:fld>
+            <a:endParaRPr lang="en-US"/>
+          </a:p>
+        </p:txBody>
+      </p:sp>
+    </p:spTree>
+    <p:extLst>
+      <p:ext uri="{BB962C8B-B14F-4D97-AF65-F5344CB8AC3E}">
+        <p14:creationId xmlns:p14="http://schemas.microsoft.com/office/powerpoint/2010/main" val="1024086991"/>
+      </p:ext>
+    </p:extLst>
+  </p:cSld>
+  <p:clrMapOvr>
+    <a:masterClrMapping/>
+  </p:clrMapOvr>
+</p:notes>
+</file>
+
+<file path=ppt/notesSlides/notesSlide34.xml><?xml version="1.0" encoding="utf-8"?>
+<p:notes xmlns:a="http://schemas.openxmlformats.org/drawingml/2006/main" xmlns:r="http://schemas.openxmlformats.org/officeDocument/2006/relationships" xmlns:p="http://schemas.openxmlformats.org/presentationml/2006/main">
+  <p:cSld>
+    <p:spTree>
+      <p:nvGrpSpPr>
+        <p:cNvPr id="1" name=""/>
+        <p:cNvGrpSpPr/>
+        <p:nvPr/>
+      </p:nvGrpSpPr>
+      <p:grpSpPr>
+        <a:xfrm>
+          <a:off x="0" y="0"/>
+          <a:ext cx="0" cy="0"/>
+          <a:chOff x="0" y="0"/>
+          <a:chExt cx="0" cy="0"/>
+        </a:xfrm>
+      </p:grpSpPr>
+      <p:sp>
+        <p:nvSpPr>
+          <p:cNvPr id="2" name="Slide Image Placeholder 1"/>
+          <p:cNvSpPr>
+            <a:spLocks noGrp="1" noRot="1" noChangeAspect="1"/>
+          </p:cNvSpPr>
+          <p:nvPr>
+            <p:ph type="sldImg"/>
+          </p:nvPr>
+        </p:nvSpPr>
+        <p:spPr/>
+      </p:sp>
+      <p:sp>
+        <p:nvSpPr>
+          <p:cNvPr id="3" name="Notes Placeholder 2"/>
+          <p:cNvSpPr>
+            <a:spLocks noGrp="1"/>
+          </p:cNvSpPr>
+          <p:nvPr>
+            <p:ph type="body" idx="1"/>
+          </p:nvPr>
+        </p:nvSpPr>
+        <p:spPr/>
+        <p:txBody>
+          <a:bodyPr/>
+          <a:lstStyle/>
+          <a:p>
+            <a:r>
+              <a:rPr lang="en-US" dirty="0"/>
+              <a:t/>
+            </a:r>
+            <a:endParaRPr lang="en-US" dirty="0"/>
+          </a:p>
+        </p:txBody>
+      </p:sp>
+      <p:sp>
+        <p:nvSpPr>
+          <p:cNvPr id="4" name="Slide Number Placeholder 3"/>
+          <p:cNvSpPr>
+            <a:spLocks noGrp="1"/>
+          </p:cNvSpPr>
+          <p:nvPr>
+            <p:ph type="sldNum" sz="quarter" idx="10"/>
+          </p:nvPr>
+        </p:nvSpPr>
+        <p:spPr/>
+        <p:txBody>
+          <a:bodyPr/>
+          <a:lstStyle/>
+          <a:p>
+            <a:fld id="{F7021451-1387-4CA6-816F-3879F97B5CBC}" type="slidenum">
+              <a:rPr lang="en-US"/>
+              <a:t>34</a:t>
             </a:fld>
             <a:endParaRPr lang="en-US"/>
           </a:p>
@@ -4021,13 +4110,13 @@
             <a:r>
               <a:rPr lang="en-US" sz="1300" b="1" spc="300" kern="0" dirty="0">
                 <a:solidFill>
-                  <a:srgbClr val="2E5F8A"/>
+                  <a:srgbClr val="7A3B2E"/>
                 </a:solidFill>
                 <a:latin typeface="Calibri" pitchFamily="34" charset="0"/>
                 <a:ea typeface="Calibri" pitchFamily="34" charset="-122"/>
                 <a:cs typeface="Calibri" pitchFamily="34" charset="-120"/>
               </a:rPr>
-              <a:t>WHEN YOU NEED THE EXTRA LAYER</a:t>
+              <a:t>BEFORE YOU BELIEVE THE NUMBER</a:t>
             </a:r>
             <a:endParaRPr lang="en-US" sz="1300" dirty="0"/>
           </a:p>
@@ -4066,7 +4155,7 @@
                 <a:ea typeface="Cambria" pitchFamily="34" charset="-122"/>
                 <a:cs typeface="Cambria" pitchFamily="34" charset="-120"/>
               </a:rPr>
-              <a:t>One question a line can answer, one it cannot</a:t>
+              <a:t>Ask a harder question and watch it drop</a:t>
             </a:r>
             <a:endParaRPr lang="en-US" sz="3400" dirty="0"/>
           </a:p>
@@ -4074,7 +4163,7 @@
       </p:sp>
       <p:pic>
         <p:nvPicPr>
-          <p:cNvPr id="4" name="Image 0" descr="/tmp/figs/w4_meaning.png">    </p:cNvPr>
+          <p:cNvPr id="4" name="Image 0" descr="/tmp/figs/w4_hard.png">    </p:cNvPr>
           <p:cNvPicPr>
             <a:picLocks noChangeAspect="1"/>
           </p:cNvPicPr>
@@ -4087,8 +4176,8 @@
         </p:blipFill>
         <p:spPr>
           <a:xfrm>
-            <a:off x="548640" y="1828800"/>
-            <a:ext cx="11064240" cy="3657600"/>
+            <a:off x="2011680" y="1783080"/>
+            <a:ext cx="8138160" cy="3931920"/>
           </a:xfrm>
           <a:prstGeom prst="rect">
             <a:avLst/>
@@ -4128,7 +4217,7 @@
                 <a:ea typeface="Cambria" pitchFamily="34" charset="-122"/>
                 <a:cs typeface="Cambria" pitchFamily="34" charset="-120"/>
               </a:rPr>
-              <a:t>"Which side?" is a direction: a line gets 100%. "How far from the middle?" is a distance: 68% for the line, 100% for the network.</a:t>
+              <a:t>Two authors with different casts: anything gets that right. Three narrators inside one book is a real question, and the models drop to 71% and 77%.</a:t>
             </a:r>
             <a:endParaRPr lang="en-US" sz="1600" dirty="0"/>
           </a:p>
@@ -4167,7 +4256,7 @@
                 <a:ea typeface="Calibri" pitchFamily="34" charset="-122"/>
                 <a:cs typeface="Calibri" pitchFamily="34" charset="-120"/>
               </a:rPr>
-              <a:t>Valence and arousal for 13,915 words, Warriner, Kuperman &amp; Brysbaert (2013), fetched at build time. Osgood's dimensions, measured again. Next: Playground on the XOR set.</a:t>
+              <a:t>The left-hand 100% is a fact about the question, not proof the method works. Journals parsed from the chapter headings: 427 passages, Jonathan, Mina and Seward.</a:t>
             </a:r>
             <a:endParaRPr lang="en-US" sz="1000" dirty="0"/>
           </a:p>
@@ -4232,13 +4321,13 @@
             <a:r>
               <a:rPr lang="en-US" sz="1300" b="1" spc="300" kern="0" dirty="0">
                 <a:solidFill>
-                  <a:srgbClr val="B9852F"/>
+                  <a:srgbClr val="2E5F8A"/>
                 </a:solidFill>
                 <a:latin typeface="Calibri" pitchFamily="34" charset="0"/>
                 <a:ea typeface="Calibri" pitchFamily="34" charset="-122"/>
                 <a:cs typeface="Calibri" pitchFamily="34" charset="-120"/>
               </a:rPr>
-              <a:t>HOW IT LEARNS</a:t>
+              <a:t>WHEN YOU NEED THE EXTRA LAYER</a:t>
             </a:r>
             <a:endParaRPr lang="en-US" sz="1300" dirty="0"/>
           </a:p>
@@ -4277,7 +4366,7 @@
                 <a:ea typeface="Cambria" pitchFamily="34" charset="-122"/>
                 <a:cs typeface="Cambria" pitchFamily="34" charset="-120"/>
               </a:rPr>
-              <a:t>Rolling downhill in fog</a:t>
+              <a:t>One question a line can answer, one it cannot</a:t>
             </a:r>
             <a:endParaRPr lang="en-US" sz="3400" dirty="0"/>
           </a:p>
@@ -4285,7 +4374,7 @@
       </p:sp>
       <p:pic>
         <p:nvPicPr>
-          <p:cNvPr id="4" name="Image 0" descr="/tmp/figs/w4_gradient.png">    </p:cNvPr>
+          <p:cNvPr id="4" name="Image 0" descr="/tmp/figs/w4_meaning.png">    </p:cNvPr>
           <p:cNvPicPr>
             <a:picLocks noChangeAspect="1"/>
           </p:cNvPicPr>
@@ -4298,8 +4387,8 @@
         </p:blipFill>
         <p:spPr>
           <a:xfrm>
-            <a:off x="2194560" y="1737360"/>
-            <a:ext cx="7772400" cy="4114800"/>
+            <a:off x="548640" y="1828800"/>
+            <a:ext cx="11064240" cy="3657600"/>
           </a:xfrm>
           <a:prstGeom prst="rect">
             <a:avLst/>
@@ -4339,9 +4428,48 @@
                 <a:ea typeface="Cambria" pitchFamily="34" charset="-122"/>
                 <a:cs typeface="Cambria" pitchFamily="34" charset="-120"/>
               </a:rPr>
-              <a:t>A loss is one number saying how wrong you are. Step downhill, repeat, for thousands of weights at once. No calculus today.</a:t>
+              <a:t>"Which side?" is a direction: a line gets 100%. "How far from the middle?" is a distance: 68% for the line, 100% for the network.</a:t>
             </a:r>
             <a:endParaRPr lang="en-US" sz="1600" dirty="0"/>
+          </a:p>
+        </p:txBody>
+      </p:sp>
+      <p:sp>
+        <p:nvSpPr>
+          <p:cNvPr id="6" name="Text 3"/>
+          <p:cNvSpPr/>
+          <p:nvPr/>
+        </p:nvSpPr>
+        <p:spPr>
+          <a:xfrm>
+            <a:off x="640080" y="6355080"/>
+            <a:ext cx="10881360" cy="320040"/>
+          </a:xfrm>
+          <a:prstGeom prst="rect">
+            <a:avLst/>
+          </a:prstGeom>
+          <a:noFill/>
+          <a:ln/>
+        </p:spPr>
+        <p:txBody>
+          <a:bodyPr wrap="square" rtlCol="0" anchor="ctr"/>
+          <a:lstStyle/>
+          <a:p>
+            <a:pPr indent="0" marL="0">
+              <a:buNone/>
+            </a:pPr>
+            <a:r>
+              <a:rPr lang="en-US" sz="1000" dirty="0">
+                <a:solidFill>
+                  <a:srgbClr val="6B6B63"/>
+                </a:solidFill>
+                <a:latin typeface="Calibri" pitchFamily="34" charset="0"/>
+                <a:ea typeface="Calibri" pitchFamily="34" charset="-122"/>
+                <a:cs typeface="Calibri" pitchFamily="34" charset="-120"/>
+              </a:rPr>
+              <a:t>Valence and arousal for 13,915 words, Warriner, Kuperman &amp; Brysbaert (2013), fetched at build time. Osgood's dimensions, measured again. Next: Playground on the XOR set.</a:t>
+            </a:r>
+            <a:endParaRPr lang="en-US" sz="1000" dirty="0"/>
           </a:p>
         </p:txBody>
       </p:sp>
@@ -4404,13 +4532,13 @@
             <a:r>
               <a:rPr lang="en-US" sz="1300" b="1" spc="300" kern="0" dirty="0">
                 <a:solidFill>
-                  <a:srgbClr val="7A3B2E"/>
+                  <a:srgbClr val="B9852F"/>
                 </a:solidFill>
                 <a:latin typeface="Calibri" pitchFamily="34" charset="0"/>
                 <a:ea typeface="Calibri" pitchFamily="34" charset="-122"/>
                 <a:cs typeface="Calibri" pitchFamily="34" charset="-120"/>
               </a:rPr>
-              <a:t>IDEA TWO</a:t>
+              <a:t>HOW IT LEARNS</a:t>
             </a:r>
             <a:endParaRPr lang="en-US" sz="1300" dirty="0"/>
           </a:p>
@@ -4449,7 +4577,7 @@
                 <a:ea typeface="Cambria" pitchFamily="34" charset="-122"/>
                 <a:cs typeface="Cambria" pitchFamily="34" charset="-120"/>
               </a:rPr>
-              <a:t>What counting cannot do</a:t>
+              <a:t>Rolling downhill in fog</a:t>
             </a:r>
             <a:endParaRPr lang="en-US" sz="3400" dirty="0"/>
           </a:p>
@@ -4457,7 +4585,7 @@
       </p:sp>
       <p:pic>
         <p:nvPicPr>
-          <p:cNvPr id="4" name="Image 0" descr="/tmp/figs/w4_onehot_vs_dense.png">    </p:cNvPr>
+          <p:cNvPr id="4" name="Image 0" descr="/tmp/figs/w4_gradient.png">    </p:cNvPr>
           <p:cNvPicPr>
             <a:picLocks noChangeAspect="1"/>
           </p:cNvPicPr>
@@ -4470,8 +4598,8 @@
         </p:blipFill>
         <p:spPr>
           <a:xfrm>
-            <a:off x="1097280" y="1920240"/>
-            <a:ext cx="9966960" cy="3657600"/>
+            <a:off x="2194560" y="1737360"/>
+            <a:ext cx="7772400" cy="4114800"/>
           </a:xfrm>
           <a:prstGeom prst="rect">
             <a:avLst/>
@@ -4511,48 +4639,9 @@
                 <a:ea typeface="Cambria" pitchFamily="34" charset="-122"/>
                 <a:cs typeface="Cambria" pitchFamily="34" charset="-120"/>
               </a:rPr>
-              <a:t>Week 2 gave every word its own column, so night and morning have nothing in common. Nor do night and ship.</a:t>
+              <a:t>A loss is one number saying how wrong you are. Step downhill, repeat, for thousands of weights at once. No calculus today.</a:t>
             </a:r>
             <a:endParaRPr lang="en-US" sz="1600" dirty="0"/>
-          </a:p>
-        </p:txBody>
-      </p:sp>
-      <p:sp>
-        <p:nvSpPr>
-          <p:cNvPr id="6" name="Text 3"/>
-          <p:cNvSpPr/>
-          <p:nvPr/>
-        </p:nvSpPr>
-        <p:spPr>
-          <a:xfrm>
-            <a:off x="640080" y="6355080"/>
-            <a:ext cx="10881360" cy="320040"/>
-          </a:xfrm>
-          <a:prstGeom prst="rect">
-            <a:avLst/>
-          </a:prstGeom>
-          <a:noFill/>
-          <a:ln/>
-        </p:spPr>
-        <p:txBody>
-          <a:bodyPr wrap="square" rtlCol="0" anchor="ctr"/>
-          <a:lstStyle/>
-          <a:p>
-            <a:pPr indent="0" marL="0">
-              <a:buNone/>
-            </a:pPr>
-            <a:r>
-              <a:rPr lang="en-US" sz="1000" dirty="0">
-                <a:solidFill>
-                  <a:srgbClr val="6B6B63"/>
-                </a:solidFill>
-                <a:latin typeface="Calibri" pitchFamily="34" charset="0"/>
-                <a:ea typeface="Calibri" pitchFamily="34" charset="-122"/>
-                <a:cs typeface="Calibri" pitchFamily="34" charset="-120"/>
-              </a:rPr>
-              <a:t>And Week 3 puts one weight on each column, so what it learns about one word tells it nothing about the next. Trained vectors: night and morning 0.32, night and ship 0.08.</a:t>
-            </a:r>
-            <a:endParaRPr lang="en-US" sz="1000" dirty="0"/>
           </a:p>
         </p:txBody>
       </p:sp>
@@ -4615,13 +4704,13 @@
             <a:r>
               <a:rPr lang="en-US" sz="1300" b="1" spc="300" kern="0" dirty="0">
                 <a:solidFill>
-                  <a:srgbClr val="B9852F"/>
+                  <a:srgbClr val="7A3B2E"/>
                 </a:solidFill>
                 <a:latin typeface="Calibri" pitchFamily="34" charset="0"/>
                 <a:ea typeface="Calibri" pitchFamily="34" charset="-122"/>
                 <a:cs typeface="Calibri" pitchFamily="34" charset="-120"/>
               </a:rPr>
-              <a:t>THE IDEA UNDERNEATH ALL OF IT</a:t>
+              <a:t>IDEA TWO</a:t>
             </a:r>
             <a:endParaRPr lang="en-US" sz="1300" dirty="0"/>
           </a:p>
@@ -4660,68 +4749,15 @@
                 <a:ea typeface="Cambria" pitchFamily="34" charset="-122"/>
                 <a:cs typeface="Cambria" pitchFamily="34" charset="-120"/>
               </a:rPr>
-              <a:t>“You shall know a word by the company it keeps”</a:t>
+              <a:t>What counting cannot do</a:t>
             </a:r>
             <a:endParaRPr lang="en-US" sz="3400" dirty="0"/>
-          </a:p>
-        </p:txBody>
-      </p:sp>
-      <p:sp>
-        <p:nvSpPr>
-          <p:cNvPr id="4" name="Text 2"/>
-          <p:cNvSpPr/>
-          <p:nvPr/>
-        </p:nvSpPr>
-        <p:spPr>
-          <a:xfrm>
-            <a:off x="640080" y="1664208"/>
-            <a:ext cx="10881360" cy="365760"/>
-          </a:xfrm>
-          <a:prstGeom prst="rect">
-            <a:avLst/>
-          </a:prstGeom>
-          <a:noFill/>
-          <a:ln/>
-        </p:spPr>
-        <p:txBody>
-          <a:bodyPr wrap="square" rtlCol="0" anchor="ctr"/>
-          <a:lstStyle/>
-          <a:p>
-            <a:pPr indent="0" marL="0">
-              <a:buNone/>
-            </a:pPr>
-            <a:r>
-              <a:rPr lang="en-US" sz="1700" i="1" dirty="0">
-                <a:solidFill>
-                  <a:srgbClr val="7A3B2E"/>
-                </a:solidFill>
-                <a:latin typeface="Cambria" pitchFamily="34" charset="0"/>
-                <a:ea typeface="Cambria" pitchFamily="34" charset="-122"/>
-                <a:cs typeface="Cambria" pitchFamily="34" charset="-120"/>
-              </a:rPr>
-              <a:t>“The meaning of a word is its use in the language.”</a:t>
-            </a:r>
-            <a:pPr indent="0" marL="0">
-              <a:buNone/>
-            </a:pPr>
-            <a:r>
-              <a:rPr lang="en-US" sz="1300" dirty="0">
-                <a:solidFill>
-                  <a:srgbClr val="6B6B63"/>
-                </a:solidFill>
-                <a:latin typeface="Cambria" pitchFamily="34" charset="0"/>
-                <a:ea typeface="Cambria" pitchFamily="34" charset="-122"/>
-                <a:cs typeface="Cambria" pitchFamily="34" charset="-120"/>
-              </a:rPr>
-              <a:t>   Wittgenstein, Philosophical Investigations §43 (1953)</a:t>
-            </a:r>
-            <a:endParaRPr lang="en-US" sz="1700" dirty="0"/>
           </a:p>
         </p:txBody>
       </p:sp>
       <p:pic>
         <p:nvPicPr>
-          <p:cNvPr id="5" name="Image 0" descr="/tmp/figs/w4_distributional.png">    </p:cNvPr>
+          <p:cNvPr id="4" name="Image 0" descr="/tmp/figs/w4_onehot_vs_dense.png">    </p:cNvPr>
           <p:cNvPicPr>
             <a:picLocks noChangeAspect="1"/>
           </p:cNvPicPr>
@@ -4734,8 +4770,8 @@
         </p:blipFill>
         <p:spPr>
           <a:xfrm>
-            <a:off x="914400" y="2148840"/>
-            <a:ext cx="10332720" cy="3291840"/>
+            <a:off x="1097280" y="1920240"/>
+            <a:ext cx="9966960" cy="3657600"/>
           </a:xfrm>
           <a:prstGeom prst="rect">
             <a:avLst/>
@@ -4744,7 +4780,7 @@
       </p:pic>
       <p:sp>
         <p:nvSpPr>
-          <p:cNvPr id="6" name="Text 3"/>
+          <p:cNvPr id="5" name="Text 2"/>
           <p:cNvSpPr/>
           <p:nvPr/>
         </p:nvSpPr>
@@ -4775,7 +4811,7 @@
                 <a:ea typeface="Cambria" pitchFamily="34" charset="-122"/>
                 <a:cs typeface="Cambria" pitchFamily="34" charset="-120"/>
               </a:rPr>
-              <a:t>Ask the room before you show the answer. Nobody needs a definition. The contexts are enough.</a:t>
+              <a:t>Week 2 gave every word its own column, so night and morning have nothing in common. Nor do night and ship.</a:t>
             </a:r>
             <a:endParaRPr lang="en-US" sz="1600" dirty="0"/>
           </a:p>
@@ -4783,7 +4819,7 @@
       </p:sp>
       <p:sp>
         <p:nvSpPr>
-          <p:cNvPr id="7" name="Text 4"/>
+          <p:cNvPr id="6" name="Text 3"/>
           <p:cNvSpPr/>
           <p:nvPr/>
         </p:nvSpPr>
@@ -4814,7 +4850,7 @@
                 <a:ea typeface="Calibri" pitchFamily="34" charset="-122"/>
                 <a:cs typeface="Calibri" pitchFamily="34" charset="-120"/>
               </a:rPr>
-              <a:t>Frege 1884, never ask for the meaning of a word in isolation · Harris 1954, the distributional hypothesis · Firth 1957, the title. Lines drawn live from this week's corpus.</a:t>
+              <a:t>And Week 3 puts one weight on each column, so what it learns about one word tells it nothing about the next. Trained vectors: night and morning 0.32, night and ship 0.08.</a:t>
             </a:r>
             <a:endParaRPr lang="en-US" sz="1000" dirty="0"/>
           </a:p>
@@ -4879,13 +4915,13 @@
             <a:r>
               <a:rPr lang="en-US" sz="1300" b="1" spc="300" kern="0" dirty="0">
                 <a:solidFill>
-                  <a:srgbClr val="7A3B2E"/>
+                  <a:srgbClr val="B9852F"/>
                 </a:solidFill>
                 <a:latin typeface="Calibri" pitchFamily="34" charset="0"/>
                 <a:ea typeface="Calibri" pitchFamily="34" charset="-122"/>
                 <a:cs typeface="Calibri" pitchFamily="34" charset="-120"/>
               </a:rPr>
-              <a:t>IDEA TWO</a:t>
+              <a:t>THE IDEA UNDERNEATH ALL OF IT</a:t>
             </a:r>
             <a:endParaRPr lang="en-US" sz="1300" dirty="0"/>
           </a:p>
@@ -4924,15 +4960,68 @@
                 <a:ea typeface="Cambria" pitchFamily="34" charset="-122"/>
                 <a:cs typeface="Cambria" pitchFamily="34" charset="-120"/>
               </a:rPr>
-              <a:t>Same context, pull together. Different, push apart</a:t>
+              <a:t>“You shall know a word by the company it keeps”</a:t>
             </a:r>
             <a:endParaRPr lang="en-US" sz="3400" dirty="0"/>
+          </a:p>
+        </p:txBody>
+      </p:sp>
+      <p:sp>
+        <p:nvSpPr>
+          <p:cNvPr id="4" name="Text 2"/>
+          <p:cNvSpPr/>
+          <p:nvPr/>
+        </p:nvSpPr>
+        <p:spPr>
+          <a:xfrm>
+            <a:off x="640080" y="1664208"/>
+            <a:ext cx="10881360" cy="365760"/>
+          </a:xfrm>
+          <a:prstGeom prst="rect">
+            <a:avLst/>
+          </a:prstGeom>
+          <a:noFill/>
+          <a:ln/>
+        </p:spPr>
+        <p:txBody>
+          <a:bodyPr wrap="square" rtlCol="0" anchor="ctr"/>
+          <a:lstStyle/>
+          <a:p>
+            <a:pPr indent="0" marL="0">
+              <a:buNone/>
+            </a:pPr>
+            <a:r>
+              <a:rPr lang="en-US" sz="1700" i="1" dirty="0">
+                <a:solidFill>
+                  <a:srgbClr val="7A3B2E"/>
+                </a:solidFill>
+                <a:latin typeface="Cambria" pitchFamily="34" charset="0"/>
+                <a:ea typeface="Cambria" pitchFamily="34" charset="-122"/>
+                <a:cs typeface="Cambria" pitchFamily="34" charset="-120"/>
+              </a:rPr>
+              <a:t>“The meaning of a word is its use in the language.”</a:t>
+            </a:r>
+            <a:pPr indent="0" marL="0">
+              <a:buNone/>
+            </a:pPr>
+            <a:r>
+              <a:rPr lang="en-US" sz="1300" dirty="0">
+                <a:solidFill>
+                  <a:srgbClr val="6B6B63"/>
+                </a:solidFill>
+                <a:latin typeface="Cambria" pitchFamily="34" charset="0"/>
+                <a:ea typeface="Cambria" pitchFamily="34" charset="-122"/>
+                <a:cs typeface="Cambria" pitchFamily="34" charset="-120"/>
+              </a:rPr>
+              <a:t>   Wittgenstein, Philosophical Investigations §43 (1953)</a:t>
+            </a:r>
+            <a:endParaRPr lang="en-US" sz="1700" dirty="0"/>
           </a:p>
         </p:txBody>
       </p:sp>
       <p:pic>
         <p:nvPicPr>
-          <p:cNvPr id="4" name="Image 0" descr="/tmp/figs/w4_contrastive_idea.png">    </p:cNvPr>
+          <p:cNvPr id="5" name="Image 0" descr="/tmp/figs/w4_distributional.png">    </p:cNvPr>
           <p:cNvPicPr>
             <a:picLocks noChangeAspect="1"/>
           </p:cNvPicPr>
@@ -4945,8 +5034,8 @@
         </p:blipFill>
         <p:spPr>
           <a:xfrm>
-            <a:off x="1737360" y="1737360"/>
-            <a:ext cx="8778240" cy="4023360"/>
+            <a:off x="914400" y="2148840"/>
+            <a:ext cx="10332720" cy="3291840"/>
           </a:xfrm>
           <a:prstGeom prst="rect">
             <a:avLst/>
@@ -4955,7 +5044,7 @@
       </p:pic>
       <p:sp>
         <p:nvSpPr>
-          <p:cNvPr id="5" name="Text 2"/>
+          <p:cNvPr id="6" name="Text 3"/>
           <p:cNvSpPr/>
           <p:nvPr/>
         </p:nvSpPr>
@@ -4986,7 +5075,7 @@
                 <a:ea typeface="Cambria" pitchFamily="34" charset="-122"/>
                 <a:cs typeface="Cambria" pitchFamily="34" charset="-120"/>
               </a:rPr>
-              <a:t>For a word, a context is a few words of text. That is the whole rule, and it is how most modern embeddings are trained.</a:t>
+              <a:t>Ask the room before you show the answer. Nobody needs a definition. The contexts are enough.</a:t>
             </a:r>
             <a:endParaRPr lang="en-US" sz="1600" dirty="0"/>
           </a:p>
@@ -4994,7 +5083,7 @@
       </p:sp>
       <p:sp>
         <p:nvSpPr>
-          <p:cNvPr id="6" name="Text 3"/>
+          <p:cNvPr id="7" name="Text 4"/>
           <p:cNvSpPr/>
           <p:nvPr/>
         </p:nvSpPr>
@@ -5025,7 +5114,7 @@
                 <a:ea typeface="Calibri" pitchFamily="34" charset="-122"/>
                 <a:cs typeface="Calibri" pitchFamily="34" charset="-120"/>
               </a:rPr>
-              <a:t>Underneath it, Week 3's four moves: multiply, add, squash, nudge. The prediction gets thrown away; the weights are what you keep. 849,738 pairs in one pass.</a:t>
+              <a:t>Frege 1884, never ask for the meaning of a word in isolation · Harris 1954, the distributional hypothesis · Firth 1957, the title. Lines drawn live from this week's corpus.</a:t>
             </a:r>
             <a:endParaRPr lang="en-US" sz="1000" dirty="0"/>
           </a:p>
@@ -5090,13 +5179,13 @@
             <a:r>
               <a:rPr lang="en-US" sz="1300" b="1" spc="300" kern="0" dirty="0">
                 <a:solidFill>
-                  <a:srgbClr val="B9852F"/>
+                  <a:srgbClr val="7A3B2E"/>
                 </a:solidFill>
                 <a:latin typeface="Calibri" pitchFamily="34" charset="0"/>
                 <a:ea typeface="Calibri" pitchFamily="34" charset="-122"/>
                 <a:cs typeface="Calibri" pitchFamily="34" charset="-120"/>
               </a:rPr>
-              <a:t>THE SAME VECTORS, BEFORE AND AFTER</a:t>
+              <a:t>IDEA TWO</a:t>
             </a:r>
             <a:endParaRPr lang="en-US" sz="1300" dirty="0"/>
           </a:p>
@@ -5135,7 +5224,7 @@
                 <a:ea typeface="Cambria" pitchFamily="34" charset="-122"/>
                 <a:cs typeface="Cambria" pitchFamily="34" charset="-120"/>
               </a:rPr>
-              <a:t>Nobody labelled the blocks</a:t>
+              <a:t>Same context, pull together. Different, push apart</a:t>
             </a:r>
             <a:endParaRPr lang="en-US" sz="3400" dirty="0"/>
           </a:p>
@@ -5143,7 +5232,7 @@
       </p:sp>
       <p:pic>
         <p:nvPicPr>
-          <p:cNvPr id="4" name="Image 0" descr="/tmp/figs/w4_contrastive_result.png">    </p:cNvPr>
+          <p:cNvPr id="4" name="Image 0" descr="/tmp/figs/w4_contrastive_idea.png">    </p:cNvPr>
           <p:cNvPicPr>
             <a:picLocks noChangeAspect="1"/>
           </p:cNvPicPr>
@@ -5156,8 +5245,8 @@
         </p:blipFill>
         <p:spPr>
           <a:xfrm>
-            <a:off x="1371600" y="1737360"/>
-            <a:ext cx="9418320" cy="4023360"/>
+            <a:off x="1737360" y="1737360"/>
+            <a:ext cx="8778240" cy="4023360"/>
           </a:xfrm>
           <a:prstGeom prst="rect">
             <a:avLst/>
@@ -5197,9 +5286,48 @@
                 <a:ea typeface="Cambria" pitchFamily="34" charset="-122"/>
                 <a:cs typeface="Cambria" pitchFamily="34" charset="-120"/>
               </a:rPr>
-              <a:t>Twelve words, every pair compared. On the left they start as noise. On the right, times of day, family and rooms have found each other.</a:t>
+              <a:t>For a word, a context is a few words of text. That is the whole rule, and it is how most modern embeddings are trained.</a:t>
             </a:r>
             <a:endParaRPr lang="en-US" sz="1600" dirty="0"/>
+          </a:p>
+        </p:txBody>
+      </p:sp>
+      <p:sp>
+        <p:nvSpPr>
+          <p:cNvPr id="6" name="Text 3"/>
+          <p:cNvSpPr/>
+          <p:nvPr/>
+        </p:nvSpPr>
+        <p:spPr>
+          <a:xfrm>
+            <a:off x="640080" y="6355080"/>
+            <a:ext cx="10881360" cy="320040"/>
+          </a:xfrm>
+          <a:prstGeom prst="rect">
+            <a:avLst/>
+          </a:prstGeom>
+          <a:noFill/>
+          <a:ln/>
+        </p:spPr>
+        <p:txBody>
+          <a:bodyPr wrap="square" rtlCol="0" anchor="ctr"/>
+          <a:lstStyle/>
+          <a:p>
+            <a:pPr indent="0" marL="0">
+              <a:buNone/>
+            </a:pPr>
+            <a:r>
+              <a:rPr lang="en-US" sz="1000" dirty="0">
+                <a:solidFill>
+                  <a:srgbClr val="6B6B63"/>
+                </a:solidFill>
+                <a:latin typeface="Calibri" pitchFamily="34" charset="0"/>
+                <a:ea typeface="Calibri" pitchFamily="34" charset="-122"/>
+                <a:cs typeface="Calibri" pitchFamily="34" charset="-120"/>
+              </a:rPr>
+              <a:t>Underneath it, Week 3's four moves: multiply, add, squash, nudge. The prediction gets thrown away; the weights are what you keep. 849,738 pairs in one pass.</a:t>
+            </a:r>
+            <a:endParaRPr lang="en-US" sz="1000" dirty="0"/>
           </a:p>
         </p:txBody>
       </p:sp>
@@ -5262,13 +5390,13 @@
             <a:r>
               <a:rPr lang="en-US" sz="1300" b="1" spc="300" kern="0" dirty="0">
                 <a:solidFill>
-                  <a:srgbClr val="3F6F5F"/>
+                  <a:srgbClr val="B9852F"/>
                 </a:solidFill>
                 <a:latin typeface="Calibri" pitchFamily="34" charset="0"/>
                 <a:ea typeface="Calibri" pitchFamily="34" charset="-122"/>
                 <a:cs typeface="Calibri" pitchFamily="34" charset="-120"/>
               </a:rPr>
-              <a:t>IT WORKS ON A SMALL CORPUS TOO</a:t>
+              <a:t>THE SAME VECTORS, BEFORE AND AFTER</a:t>
             </a:r>
             <a:endParaRPr lang="en-US" sz="1300" dirty="0"/>
           </a:p>
@@ -5307,7 +5435,7 @@
                 <a:ea typeface="Cambria" pitchFamily="34" charset="-122"/>
                 <a:cs typeface="Cambria" pitchFamily="34" charset="-120"/>
               </a:rPr>
-              <a:t>Trained on two novels, an hour ago</a:t>
+              <a:t>Nobody labelled the blocks</a:t>
             </a:r>
             <a:endParaRPr lang="en-US" sz="3400" dirty="0"/>
           </a:p>
@@ -5315,7 +5443,7 @@
       </p:sp>
       <p:pic>
         <p:nvPicPr>
-          <p:cNvPr id="4" name="Image 0" descr="/tmp/figs/w4_neighbours.png">    </p:cNvPr>
+          <p:cNvPr id="4" name="Image 0" descr="/tmp/figs/w4_contrastive_result.png">    </p:cNvPr>
           <p:cNvPicPr>
             <a:picLocks noChangeAspect="1"/>
           </p:cNvPicPr>
@@ -5328,8 +5456,8 @@
         </p:blipFill>
         <p:spPr>
           <a:xfrm>
-            <a:off x="1554480" y="1828800"/>
-            <a:ext cx="9052560" cy="3931920"/>
+            <a:off x="1371600" y="1737360"/>
+            <a:ext cx="9418320" cy="4023360"/>
           </a:xfrm>
           <a:prstGeom prst="rect">
             <a:avLst/>
@@ -5369,7 +5497,7 @@
                 <a:ea typeface="Cambria" pitchFamily="34" charset="-122"/>
                 <a:cs typeface="Cambria" pitchFamily="34" charset="-120"/>
               </a:rPr>
-              <a:t>225,355 words of Frankenstein and Dracula. Nobody told it what a door is.</a:t>
+              <a:t>Twelve words, every pair compared. On the left they start as noise. On the right, times of day, family and rooms have found each other.</a:t>
             </a:r>
             <a:endParaRPr lang="en-US" sz="1600" dirty="0"/>
           </a:p>
@@ -5434,13 +5562,13 @@
             <a:r>
               <a:rPr lang="en-US" sz="1300" b="1" spc="300" kern="0" dirty="0">
                 <a:solidFill>
-                  <a:srgbClr val="2E5F8A"/>
+                  <a:srgbClr val="3F6F5F"/>
                 </a:solidFill>
                 <a:latin typeface="Calibri" pitchFamily="34" charset="0"/>
                 <a:ea typeface="Calibri" pitchFamily="34" charset="-122"/>
                 <a:cs typeface="Calibri" pitchFamily="34" charset="-120"/>
               </a:rPr>
-              <a:t>THE MAP</a:t>
+              <a:t>IT WORKS ON A SMALL CORPUS TOO</a:t>
             </a:r>
             <a:endParaRPr lang="en-US" sz="1300" dirty="0"/>
           </a:p>
@@ -5479,7 +5607,7 @@
                 <a:ea typeface="Cambria" pitchFamily="34" charset="-122"/>
                 <a:cs typeface="Cambria" pitchFamily="34" charset="-120"/>
               </a:rPr>
-              <a:t>Meaning becomes geometry</a:t>
+              <a:t>Trained on two novels, an hour ago</a:t>
             </a:r>
             <a:endParaRPr lang="en-US" sz="3400" dirty="0"/>
           </a:p>
@@ -5487,7 +5615,7 @@
       </p:sp>
       <p:pic>
         <p:nvPicPr>
-          <p:cNvPr id="4" name="Image 0" descr="/tmp/figs/w4_map.png">    </p:cNvPr>
+          <p:cNvPr id="4" name="Image 0" descr="/tmp/figs/w4_neighbours.png">    </p:cNvPr>
           <p:cNvPicPr>
             <a:picLocks noChangeAspect="1"/>
           </p:cNvPicPr>
@@ -5500,8 +5628,8 @@
         </p:blipFill>
         <p:spPr>
           <a:xfrm>
-            <a:off x="2011680" y="1737360"/>
-            <a:ext cx="8138160" cy="4114800"/>
+            <a:off x="1554480" y="1828800"/>
+            <a:ext cx="9052560" cy="3931920"/>
           </a:xfrm>
           <a:prstGeom prst="rect">
             <a:avLst/>
@@ -5541,48 +5669,9 @@
                 <a:ea typeface="Cambria" pitchFamily="34" charset="-122"/>
                 <a:cs typeface="Cambria" pitchFamily="34" charset="-120"/>
               </a:rPr>
-              <a:t>Family words on one side. Door, room and window on the other. Night and morning at the bottom. Nothing was labelled.</a:t>
+              <a:t>225,355 words of Frankenstein and Dracula. Nobody told it what a door is.</a:t>
             </a:r>
             <a:endParaRPr lang="en-US" sz="1600" dirty="0"/>
-          </a:p>
-        </p:txBody>
-      </p:sp>
-      <p:sp>
-        <p:nvSpPr>
-          <p:cNvPr id="6" name="Text 3"/>
-          <p:cNvSpPr/>
-          <p:nvPr/>
-        </p:nvSpPr>
-        <p:spPr>
-          <a:xfrm>
-            <a:off x="640080" y="6355080"/>
-            <a:ext cx="10881360" cy="320040"/>
-          </a:xfrm>
-          <a:prstGeom prst="rect">
-            <a:avLst/>
-          </a:prstGeom>
-          <a:noFill/>
-          <a:ln/>
-        </p:spPr>
-        <p:txBody>
-          <a:bodyPr wrap="square" rtlCol="0" anchor="ctr"/>
-          <a:lstStyle/>
-          <a:p>
-            <a:pPr indent="0" marL="0">
-              <a:buNone/>
-            </a:pPr>
-            <a:r>
-              <a:rPr lang="en-US" sz="1000" dirty="0">
-                <a:solidFill>
-                  <a:srgbClr val="6B6B63"/>
-                </a:solidFill>
-                <a:latin typeface="Calibri" pitchFamily="34" charset="0"/>
-                <a:ea typeface="Calibri" pitchFamily="34" charset="-122"/>
-                <a:cs typeface="Calibri" pitchFamily="34" charset="-120"/>
-              </a:rPr>
-              <a:t>Two dimensions out of sixty, so the picture loses a lot. Next: the Embedding Projector, live.</a:t>
-            </a:r>
-            <a:endParaRPr lang="en-US" sz="1000" dirty="0"/>
           </a:p>
         </p:txBody>
       </p:sp>
@@ -5645,13 +5734,13 @@
             <a:r>
               <a:rPr lang="en-US" sz="1300" b="1" spc="300" kern="0" dirty="0">
                 <a:solidFill>
-                  <a:srgbClr val="7A3B2E"/>
+                  <a:srgbClr val="2E5F8A"/>
                 </a:solidFill>
                 <a:latin typeface="Calibri" pitchFamily="34" charset="0"/>
                 <a:ea typeface="Calibri" pitchFamily="34" charset="-122"/>
                 <a:cs typeface="Calibri" pitchFamily="34" charset="-120"/>
               </a:rPr>
-              <a:t>THE SAME GEOMETRY, THE OTHER RESULT</a:t>
+              <a:t>THE MAP</a:t>
             </a:r>
             <a:endParaRPr lang="en-US" sz="1300" dirty="0"/>
           </a:p>
@@ -5690,7 +5779,7 @@
                 <a:ea typeface="Cambria" pitchFamily="34" charset="-122"/>
                 <a:cs typeface="Cambria" pitchFamily="34" charset="-120"/>
               </a:rPr>
-              <a:t>Occupations closest to each group's words</a:t>
+              <a:t>Meaning becomes geometry</a:t>
             </a:r>
             <a:endParaRPr lang="en-US" sz="3400" dirty="0"/>
           </a:p>
@@ -5698,7 +5787,7 @@
       </p:sp>
       <p:pic>
         <p:nvPicPr>
-          <p:cNvPr id="4" name="Image 0" descr="/tmp/figs/w4_paper_ethnic.png">    </p:cNvPr>
+          <p:cNvPr id="4" name="Image 0" descr="/tmp/figs/w4_map.png">    </p:cNvPr>
           <p:cNvPicPr>
             <a:picLocks noChangeAspect="1"/>
           </p:cNvPicPr>
@@ -5711,8 +5800,8 @@
         </p:blipFill>
         <p:spPr>
           <a:xfrm>
-            <a:off x="3566160" y="1691640"/>
-            <a:ext cx="5120640" cy="4114800"/>
+            <a:off x="2011680" y="1737360"/>
+            <a:ext cx="8138160" cy="4114800"/>
           </a:xfrm>
           <a:prstGeom prst="rect">
             <a:avLst/>
@@ -5752,7 +5841,7 @@
                 <a:ea typeface="Cambria" pitchFamily="34" charset="-122"/>
                 <a:cs typeface="Cambria" pitchFamily="34" charset="-120"/>
               </a:rPr>
-              <a:t>Nobody labelled any of this. It is what a century of printed English put side by side.</a:t>
+              <a:t>Family words on one side. Door, room and window on the other. Night and morning at the bottom. Nothing was labelled.</a:t>
             </a:r>
             <a:endParaRPr lang="en-US" sz="1600" dirty="0"/>
           </a:p>
@@ -5791,7 +5880,7 @@
                 <a:ea typeface="Calibri" pitchFamily="34" charset="-122"/>
                 <a:cs typeface="Calibri" pitchFamily="34" charset="-120"/>
               </a:rPr>
-              <a:t>Fig. 1c, Garg, Schiebinger, Jurafsky &amp; Zou, PNAS 2018 (arXiv:1711.08412) · shown for teaching</a:t>
+              <a:t>Two dimensions out of sixty, so the picture loses a lot. Next: the Embedding Projector, live.</a:t>
             </a:r>
             <a:endParaRPr lang="en-US" sz="1000" dirty="0"/>
           </a:p>
@@ -5856,13 +5945,13 @@
             <a:r>
               <a:rPr lang="en-US" sz="1300" b="1" spc="300" kern="0" dirty="0">
                 <a:solidFill>
-                  <a:srgbClr val="B9852F"/>
+                  <a:srgbClr val="7A3B2E"/>
                 </a:solidFill>
                 <a:latin typeface="Calibri" pitchFamily="34" charset="0"/>
                 <a:ea typeface="Calibri" pitchFamily="34" charset="-122"/>
                 <a:cs typeface="Calibri" pitchFamily="34" charset="-120"/>
               </a:rPr>
-              <a:t>THE FAMOUS TRICK</a:t>
+              <a:t>THE SAME GEOMETRY, THE OTHER RESULT</a:t>
             </a:r>
             <a:endParaRPr lang="en-US" sz="1300" dirty="0"/>
           </a:p>
@@ -5901,420 +5990,110 @@
                 <a:ea typeface="Cambria" pitchFamily="34" charset="-122"/>
                 <a:cs typeface="Cambria" pitchFamily="34" charset="-120"/>
               </a:rPr>
-              <a:t>king − man + woman ≈ queen</a:t>
+              <a:t>Occupations closest to each group's words</a:t>
             </a:r>
             <a:endParaRPr lang="en-US" sz="3400" dirty="0"/>
           </a:p>
         </p:txBody>
       </p:sp>
-      <p:sp>
-        <p:nvSpPr>
-          <p:cNvPr id="4" name="Shape 2"/>
-          <p:cNvSpPr/>
-          <p:nvPr/>
-        </p:nvSpPr>
-        <p:spPr>
-          <a:xfrm>
-            <a:off x="640080" y="1920240"/>
-            <a:ext cx="10881360" cy="1463040"/>
-          </a:xfrm>
-          <a:prstGeom prst="roundRect">
-            <a:avLst>
-              <a:gd name="adj" fmla="val 6250"/>
-            </a:avLst>
-          </a:prstGeom>
-          <a:solidFill>
-            <a:srgbClr val="F4EEE8"/>
-          </a:solidFill>
-          <a:ln/>
-        </p:spPr>
-      </p:sp>
-      <p:sp>
-        <p:nvSpPr>
-          <p:cNvPr id="5" name="Text 3"/>
-          <p:cNvSpPr/>
-          <p:nvPr/>
-        </p:nvSpPr>
-        <p:spPr>
-          <a:xfrm>
-            <a:off x="1005840" y="2148840"/>
-            <a:ext cx="10149840" cy="1005840"/>
-          </a:xfrm>
-          <a:prstGeom prst="rect">
-            <a:avLst/>
-          </a:prstGeom>
-          <a:noFill/>
-          <a:ln/>
-        </p:spPr>
-        <p:txBody>
-          <a:bodyPr wrap="square" lIns="0" tIns="0" rIns="0" bIns="0" rtlCol="0" anchor="ctr"/>
-          <a:lstStyle/>
-          <a:p>
-            <a:pPr indent="0" marL="0">
-              <a:buNone/>
-            </a:pPr>
-            <a:r>
-              <a:rPr lang="en-US" sz="1900" dirty="0">
-                <a:solidFill>
-                  <a:srgbClr val="7A3B2E"/>
-                </a:solidFill>
-                <a:latin typeface="Courier New" pitchFamily="34" charset="0"/>
-                <a:ea typeface="Courier New" pitchFamily="34" charset="-122"/>
-                <a:cs typeface="Courier New" pitchFamily="34" charset="-120"/>
-              </a:rPr>
-              <a:t>king − man + woman → queen        paris − france + japan → tokyo</a:t>
-            </a:r>
-            <a:endParaRPr lang="en-US" sz="1900" dirty="0"/>
-          </a:p>
-        </p:txBody>
-      </p:sp>
-      <p:sp>
-        <p:nvSpPr>
-          <p:cNvPr id="6" name="Text 4"/>
-          <p:cNvSpPr/>
-          <p:nvPr/>
-        </p:nvSpPr>
-        <p:spPr>
-          <a:xfrm>
-            <a:off x="640080" y="3657600"/>
-            <a:ext cx="5577840" cy="2194560"/>
-          </a:xfrm>
-          <a:prstGeom prst="rect">
-            <a:avLst/>
-          </a:prstGeom>
-          <a:noFill/>
-          <a:ln/>
-        </p:spPr>
-        <p:txBody>
-          <a:bodyPr wrap="square" rtlCol="0" anchor="t"/>
-          <a:lstStyle/>
-          <a:p>
-            <a:pPr marL="152400" indent="-152400">
-              <a:lnSpc>
-                <a:spcPct val="115000"/>
-              </a:lnSpc>
-              <a:spcAft>
-                <a:spcPts val="1000"/>
-              </a:spcAft>
-              <a:buSzPct val="100000"/>
-              <a:buChar char="•"/>
-            </a:pPr>
-            <a:r>
-              <a:rPr lang="en-US" sz="1600" dirty="0">
+      <p:pic>
+        <p:nvPicPr>
+          <p:cNvPr id="4" name="Image 0" descr="/tmp/figs/w4_paper_ethnic.png">    </p:cNvPr>
+          <p:cNvPicPr>
+            <a:picLocks noChangeAspect="1"/>
+          </p:cNvPicPr>
+          <p:nvPr/>
+        </p:nvPicPr>
+        <p:blipFill>
+          <a:blip r:embed="rId1"/>
+          <a:srcRect l="0" r="0" t="0" b="0"/>
+          <a:stretch/>
+        </p:blipFill>
+        <p:spPr>
+          <a:xfrm>
+            <a:off x="3566160" y="1691640"/>
+            <a:ext cx="5120640" cy="4114800"/>
+          </a:xfrm>
+          <a:prstGeom prst="rect">
+            <a:avLst/>
+          </a:prstGeom>
+        </p:spPr>
+      </p:pic>
+      <p:sp>
+        <p:nvSpPr>
+          <p:cNvPr id="5" name="Text 2"/>
+          <p:cNvSpPr/>
+          <p:nvPr/>
+        </p:nvSpPr>
+        <p:spPr>
+          <a:xfrm>
+            <a:off x="640080" y="5897880"/>
+            <a:ext cx="10881360" cy="411480"/>
+          </a:xfrm>
+          <a:prstGeom prst="rect">
+            <a:avLst/>
+          </a:prstGeom>
+          <a:noFill/>
+          <a:ln/>
+        </p:spPr>
+        <p:txBody>
+          <a:bodyPr wrap="square" rtlCol="0" anchor="ctr"/>
+          <a:lstStyle/>
+          <a:p>
+            <a:pPr indent="0" marL="0">
+              <a:buNone/>
+            </a:pPr>
+            <a:r>
+              <a:rPr lang="en-US" sz="1600" i="1" dirty="0">
                 <a:solidFill>
                   <a:srgbClr val="1A1A1A"/>
+                </a:solidFill>
+                <a:latin typeface="Cambria" pitchFamily="34" charset="0"/>
+                <a:ea typeface="Cambria" pitchFamily="34" charset="-122"/>
+                <a:cs typeface="Cambria" pitchFamily="34" charset="-120"/>
+              </a:rPr>
+              <a:t>Nobody labelled any of this. It is what a century of printed English put side by side.</a:t>
+            </a:r>
+            <a:endParaRPr lang="en-US" sz="1600" dirty="0"/>
+          </a:p>
+        </p:txBody>
+      </p:sp>
+      <p:sp>
+        <p:nvSpPr>
+          <p:cNvPr id="6" name="Text 3"/>
+          <p:cNvSpPr/>
+          <p:nvPr/>
+        </p:nvSpPr>
+        <p:spPr>
+          <a:xfrm>
+            <a:off x="640080" y="6355080"/>
+            <a:ext cx="10881360" cy="320040"/>
+          </a:xfrm>
+          <a:prstGeom prst="rect">
+            <a:avLst/>
+          </a:prstGeom>
+          <a:noFill/>
+          <a:ln/>
+        </p:spPr>
+        <p:txBody>
+          <a:bodyPr wrap="square" rtlCol="0" anchor="ctr"/>
+          <a:lstStyle/>
+          <a:p>
+            <a:pPr indent="0" marL="0">
+              <a:buNone/>
+            </a:pPr>
+            <a:r>
+              <a:rPr lang="en-US" sz="1000" dirty="0">
+                <a:solidFill>
+                  <a:srgbClr val="6B6B63"/>
                 </a:solidFill>
                 <a:latin typeface="Calibri" pitchFamily="34" charset="0"/>
                 <a:ea typeface="Calibri" pitchFamily="34" charset="-122"/>
                 <a:cs typeface="Calibri" pitchFamily="34" charset="-120"/>
               </a:rPr>
-              <a:t>Directions carry relationships nobody labelled.</a:t>
-            </a:r>
-            <a:endParaRPr lang="en-US" sz="1600" dirty="0"/>
-          </a:p>
-          <a:p>
-            <a:pPr marL="152400" indent="-152400">
-              <a:lnSpc>
-                <a:spcPct val="115000"/>
-              </a:lnSpc>
-              <a:spcAft>
-                <a:spcPts val="1000"/>
-              </a:spcAft>
-              <a:buSzPct val="100000"/>
-              <a:buChar char="•"/>
-            </a:pPr>
-            <a:r>
-              <a:rPr lang="en-US" sz="1600" dirty="0">
-                <a:solidFill>
-                  <a:srgbClr val="1A1A1A"/>
-                </a:solidFill>
-                <a:latin typeface="Calibri" pitchFamily="34" charset="0"/>
-                <a:ea typeface="Calibri" pitchFamily="34" charset="-122"/>
-                <a:cs typeface="Calibri" pitchFamily="34" charset="-120"/>
-              </a:rPr>
-              <a:t>The arithmetic is nudged, and most analogies fail. The famous four are the ones that worked.</a:t>
-            </a:r>
-            <a:endParaRPr lang="en-US" sz="1600" dirty="0"/>
-          </a:p>
-          <a:p>
-            <a:pPr marL="152400" indent="-152400">
-              <a:lnSpc>
-                <a:spcPct val="115000"/>
-              </a:lnSpc>
-              <a:spcAft>
-                <a:spcPts val="1000"/>
-              </a:spcAft>
-              <a:buSzPct val="100000"/>
-              <a:buChar char="•"/>
-            </a:pPr>
-            <a:r>
-              <a:rPr lang="en-US" sz="1600" dirty="0">
-                <a:solidFill>
-                  <a:srgbClr val="1A1A1A"/>
-                </a:solidFill>
-                <a:latin typeface="Calibri" pitchFamily="34" charset="0"/>
-                <a:ea typeface="Calibri" pitchFamily="34" charset="-122"/>
-                <a:cs typeface="Calibri" pitchFamily="34" charset="-120"/>
-              </a:rPr>
-              <a:t>Same geometry, other result: doctor − man + woman → nurse.</a:t>
-            </a:r>
-            <a:endParaRPr lang="en-US" sz="1600" dirty="0"/>
-          </a:p>
-        </p:txBody>
-      </p:sp>
-      <p:sp>
-        <p:nvSpPr>
-          <p:cNvPr id="7" name="Shape 5"/>
-          <p:cNvSpPr/>
-          <p:nvPr/>
-        </p:nvSpPr>
-        <p:spPr>
-          <a:xfrm>
-            <a:off x="6492240" y="3657600"/>
-            <a:ext cx="5029200" cy="2194560"/>
-          </a:xfrm>
-          <a:prstGeom prst="roundRect">
-            <a:avLst>
-              <a:gd name="adj" fmla="val 4167"/>
-            </a:avLst>
-          </a:prstGeom>
-          <a:solidFill>
-            <a:srgbClr val="F4EEE8"/>
-          </a:solidFill>
-          <a:ln/>
-        </p:spPr>
-      </p:sp>
-      <p:sp>
-        <p:nvSpPr>
-          <p:cNvPr id="8" name="Text 6"/>
-          <p:cNvSpPr/>
-          <p:nvPr/>
-        </p:nvSpPr>
-        <p:spPr>
-          <a:xfrm>
-            <a:off x="6766560" y="3840480"/>
-            <a:ext cx="2011680" cy="457200"/>
-          </a:xfrm>
-          <a:prstGeom prst="rect">
-            <a:avLst/>
-          </a:prstGeom>
-          <a:noFill/>
-          <a:ln/>
-        </p:spPr>
-        <p:txBody>
-          <a:bodyPr wrap="square" lIns="0" tIns="0" rIns="0" bIns="0" rtlCol="0" anchor="ctr"/>
-          <a:lstStyle/>
-          <a:p>
-            <a:pPr indent="0" marL="0">
-              <a:buNone/>
-            </a:pPr>
-            <a:r>
-              <a:rPr lang="en-US" sz="1600" b="1" dirty="0">
-                <a:solidFill>
-                  <a:srgbClr val="7A3B2E"/>
-                </a:solidFill>
-                <a:latin typeface="Cambria" pitchFamily="34" charset="0"/>
-                <a:ea typeface="Cambria" pitchFamily="34" charset="-122"/>
-                <a:cs typeface="Cambria" pitchFamily="34" charset="-120"/>
-              </a:rPr>
-              <a:t>static</a:t>
-            </a:r>
-            <a:endParaRPr lang="en-US" sz="1600" dirty="0"/>
-          </a:p>
-        </p:txBody>
-      </p:sp>
-      <p:sp>
-        <p:nvSpPr>
-          <p:cNvPr id="9" name="Text 7"/>
-          <p:cNvSpPr/>
-          <p:nvPr/>
-        </p:nvSpPr>
-        <p:spPr>
-          <a:xfrm>
-            <a:off x="8686800" y="3840480"/>
-            <a:ext cx="2651760" cy="457200"/>
-          </a:xfrm>
-          <a:prstGeom prst="rect">
-            <a:avLst/>
-          </a:prstGeom>
-          <a:noFill/>
-          <a:ln/>
-        </p:spPr>
-        <p:txBody>
-          <a:bodyPr wrap="square" lIns="0" tIns="0" rIns="0" bIns="0" rtlCol="0" anchor="ctr"/>
-          <a:lstStyle/>
-          <a:p>
-            <a:pPr indent="0" marL="0">
-              <a:buNone/>
-            </a:pPr>
-            <a:r>
-              <a:rPr lang="en-US" sz="1350" dirty="0">
-                <a:solidFill>
-                  <a:srgbClr val="1A1A1A"/>
-                </a:solidFill>
-                <a:latin typeface="Calibri" pitchFamily="34" charset="0"/>
-                <a:ea typeface="Calibri" pitchFamily="34" charset="-122"/>
-                <a:cs typeface="Calibri" pitchFamily="34" charset="-120"/>
-              </a:rPr>
-              <a:t>one vector per word</a:t>
-            </a:r>
-            <a:endParaRPr lang="en-US" sz="1350" dirty="0"/>
-          </a:p>
-        </p:txBody>
-      </p:sp>
-      <p:sp>
-        <p:nvSpPr>
-          <p:cNvPr id="10" name="Text 8"/>
-          <p:cNvSpPr/>
-          <p:nvPr/>
-        </p:nvSpPr>
-        <p:spPr>
-          <a:xfrm>
-            <a:off x="6766560" y="4498848"/>
-            <a:ext cx="2011680" cy="457200"/>
-          </a:xfrm>
-          <a:prstGeom prst="rect">
-            <a:avLst/>
-          </a:prstGeom>
-          <a:noFill/>
-          <a:ln/>
-        </p:spPr>
-        <p:txBody>
-          <a:bodyPr wrap="square" lIns="0" tIns="0" rIns="0" bIns="0" rtlCol="0" anchor="ctr"/>
-          <a:lstStyle/>
-          <a:p>
-            <a:pPr indent="0" marL="0">
-              <a:buNone/>
-            </a:pPr>
-            <a:r>
-              <a:rPr lang="en-US" sz="1600" b="1" dirty="0">
-                <a:solidFill>
-                  <a:srgbClr val="2E5F8A"/>
-                </a:solidFill>
-                <a:latin typeface="Cambria" pitchFamily="34" charset="0"/>
-                <a:ea typeface="Cambria" pitchFamily="34" charset="-122"/>
-                <a:cs typeface="Cambria" pitchFamily="34" charset="-120"/>
-              </a:rPr>
-              <a:t>contextual</a:t>
-            </a:r>
-            <a:endParaRPr lang="en-US" sz="1600" dirty="0"/>
-          </a:p>
-        </p:txBody>
-      </p:sp>
-      <p:sp>
-        <p:nvSpPr>
-          <p:cNvPr id="11" name="Text 9"/>
-          <p:cNvSpPr/>
-          <p:nvPr/>
-        </p:nvSpPr>
-        <p:spPr>
-          <a:xfrm>
-            <a:off x="8686800" y="4498848"/>
-            <a:ext cx="2651760" cy="457200"/>
-          </a:xfrm>
-          <a:prstGeom prst="rect">
-            <a:avLst/>
-          </a:prstGeom>
-          <a:noFill/>
-          <a:ln/>
-        </p:spPr>
-        <p:txBody>
-          <a:bodyPr wrap="square" lIns="0" tIns="0" rIns="0" bIns="0" rtlCol="0" anchor="ctr"/>
-          <a:lstStyle/>
-          <a:p>
-            <a:pPr indent="0" marL="0">
-              <a:buNone/>
-            </a:pPr>
-            <a:r>
-              <a:rPr lang="en-US" sz="1350" dirty="0">
-                <a:solidFill>
-                  <a:srgbClr val="1A1A1A"/>
-                </a:solidFill>
-                <a:latin typeface="Calibri" pitchFamily="34" charset="0"/>
-                <a:ea typeface="Calibri" pitchFamily="34" charset="-122"/>
-                <a:cs typeface="Calibri" pitchFamily="34" charset="-120"/>
-              </a:rPr>
-              <a:t>one per occurrence</a:t>
-            </a:r>
-            <a:endParaRPr lang="en-US" sz="1350" dirty="0"/>
-          </a:p>
-        </p:txBody>
-      </p:sp>
-      <p:sp>
-        <p:nvSpPr>
-          <p:cNvPr id="12" name="Text 10"/>
-          <p:cNvSpPr/>
-          <p:nvPr/>
-        </p:nvSpPr>
-        <p:spPr>
-          <a:xfrm>
-            <a:off x="6766560" y="5157216"/>
-            <a:ext cx="2011680" cy="457200"/>
-          </a:xfrm>
-          <a:prstGeom prst="rect">
-            <a:avLst/>
-          </a:prstGeom>
-          <a:noFill/>
-          <a:ln/>
-        </p:spPr>
-        <p:txBody>
-          <a:bodyPr wrap="square" lIns="0" tIns="0" rIns="0" bIns="0" rtlCol="0" anchor="ctr"/>
-          <a:lstStyle/>
-          <a:p>
-            <a:pPr indent="0" marL="0">
-              <a:buNone/>
-            </a:pPr>
-            <a:r>
-              <a:rPr lang="en-US" sz="1600" b="1" dirty="0">
-                <a:solidFill>
-                  <a:srgbClr val="3F6F5F"/>
-                </a:solidFill>
-                <a:latin typeface="Cambria" pitchFamily="34" charset="0"/>
-                <a:ea typeface="Cambria" pitchFamily="34" charset="-122"/>
-                <a:cs typeface="Cambria" pitchFamily="34" charset="-120"/>
-              </a:rPr>
-              <a:t>sentence</a:t>
-            </a:r>
-            <a:endParaRPr lang="en-US" sz="1600" dirty="0"/>
-          </a:p>
-        </p:txBody>
-      </p:sp>
-      <p:sp>
-        <p:nvSpPr>
-          <p:cNvPr id="13" name="Text 11"/>
-          <p:cNvSpPr/>
-          <p:nvPr/>
-        </p:nvSpPr>
-        <p:spPr>
-          <a:xfrm>
-            <a:off x="8686800" y="5157216"/>
-            <a:ext cx="2651760" cy="457200"/>
-          </a:xfrm>
-          <a:prstGeom prst="rect">
-            <a:avLst/>
-          </a:prstGeom>
-          <a:noFill/>
-          <a:ln/>
-        </p:spPr>
-        <p:txBody>
-          <a:bodyPr wrap="square" lIns="0" tIns="0" rIns="0" bIns="0" rtlCol="0" anchor="ctr"/>
-          <a:lstStyle/>
-          <a:p>
-            <a:pPr indent="0" marL="0">
-              <a:buNone/>
-            </a:pPr>
-            <a:r>
-              <a:rPr lang="en-US" sz="1350" dirty="0">
-                <a:solidFill>
-                  <a:srgbClr val="1A1A1A"/>
-                </a:solidFill>
-                <a:latin typeface="Calibri" pitchFamily="34" charset="0"/>
-                <a:ea typeface="Calibri" pitchFamily="34" charset="-122"/>
-                <a:cs typeface="Calibri" pitchFamily="34" charset="-120"/>
-              </a:rPr>
-              <a:t>one per document — Week 5</a:t>
-            </a:r>
-            <a:endParaRPr lang="en-US" sz="1350" dirty="0"/>
+              <a:t>Fig. 1c, Garg, Schiebinger, Jurafsky &amp; Zou, PNAS 2018 (arXiv:1711.08412) · shown for teaching</a:t>
+            </a:r>
+            <a:endParaRPr lang="en-US" sz="1000" dirty="0"/>
           </a:p>
         </p:txBody>
       </p:sp>
@@ -7441,13 +7220,13 @@
             <a:r>
               <a:rPr lang="en-US" sz="1300" b="1" spc="300" kern="0" dirty="0">
                 <a:solidFill>
-                  <a:srgbClr val="2E5F8A"/>
+                  <a:srgbClr val="B9852F"/>
                 </a:solidFill>
                 <a:latin typeface="Calibri" pitchFamily="34" charset="0"/>
                 <a:ea typeface="Calibri" pitchFamily="34" charset="-122"/>
                 <a:cs typeface="Calibri" pitchFamily="34" charset="-120"/>
               </a:rPr>
-              <a:t>THE SAME TRICK, ON PIXELS</a:t>
+              <a:t>THE FAMOUS TRICK</a:t>
             </a:r>
             <a:endParaRPr lang="en-US" sz="1300" dirty="0"/>
           </a:p>
@@ -7486,69 +7265,223 @@
                 <a:ea typeface="Cambria" pitchFamily="34" charset="-122"/>
                 <a:cs typeface="Cambria" pitchFamily="34" charset="-120"/>
               </a:rPr>
-              <a:t>A convolution, all of it</a:t>
+              <a:t>king − man + woman ≈ queen</a:t>
             </a:r>
             <a:endParaRPr lang="en-US" sz="3400" dirty="0"/>
           </a:p>
         </p:txBody>
       </p:sp>
-      <p:pic>
-        <p:nvPicPr>
-          <p:cNvPr id="4" name="Image 0" descr="/tmp/figs/w4_conv_arith.png">    </p:cNvPr>
-          <p:cNvPicPr>
-            <a:picLocks noChangeAspect="1"/>
-          </p:cNvPicPr>
-          <p:nvPr/>
-        </p:nvPicPr>
-        <p:blipFill>
-          <a:blip r:embed="rId1"/>
-          <a:srcRect l="0" r="0" t="0" b="0"/>
-          <a:stretch/>
-        </p:blipFill>
-        <p:spPr>
-          <a:xfrm>
-            <a:off x="548640" y="1965960"/>
-            <a:ext cx="11064240" cy="3291840"/>
-          </a:xfrm>
-          <a:prstGeom prst="rect">
-            <a:avLst/>
-          </a:prstGeom>
-        </p:spPr>
-      </p:pic>
-      <p:sp>
-        <p:nvSpPr>
-          <p:cNvPr id="5" name="Text 2"/>
-          <p:cNvSpPr/>
-          <p:nvPr/>
-        </p:nvSpPr>
-        <p:spPr>
-          <a:xfrm>
-            <a:off x="640080" y="5897880"/>
-            <a:ext cx="10881360" cy="411480"/>
-          </a:xfrm>
-          <a:prstGeom prst="rect">
-            <a:avLst/>
-          </a:prstGeom>
-          <a:noFill/>
-          <a:ln/>
-        </p:spPr>
-        <p:txBody>
-          <a:bodyPr wrap="square" rtlCol="0" anchor="ctr"/>
-          <a:lstStyle/>
-          <a:p>
-            <a:pPr indent="0" marL="0">
-              <a:buNone/>
-            </a:pPr>
-            <a:r>
-              <a:rPr lang="en-US" sz="1600" i="1" dirty="0">
+      <p:sp>
+        <p:nvSpPr>
+          <p:cNvPr id="4" name="Shape 2"/>
+          <p:cNvSpPr/>
+          <p:nvPr/>
+        </p:nvSpPr>
+        <p:spPr>
+          <a:xfrm>
+            <a:off x="640080" y="1920240"/>
+            <a:ext cx="10881360" cy="1463040"/>
+          </a:xfrm>
+          <a:prstGeom prst="roundRect">
+            <a:avLst>
+              <a:gd name="adj" fmla="val 6250"/>
+            </a:avLst>
+          </a:prstGeom>
+          <a:solidFill>
+            <a:srgbClr val="F4EEE8"/>
+          </a:solidFill>
+          <a:ln/>
+        </p:spPr>
+      </p:sp>
+      <p:sp>
+        <p:nvSpPr>
+          <p:cNvPr id="5" name="Text 3"/>
+          <p:cNvSpPr/>
+          <p:nvPr/>
+        </p:nvSpPr>
+        <p:spPr>
+          <a:xfrm>
+            <a:off x="1005840" y="2148840"/>
+            <a:ext cx="10149840" cy="1005840"/>
+          </a:xfrm>
+          <a:prstGeom prst="rect">
+            <a:avLst/>
+          </a:prstGeom>
+          <a:noFill/>
+          <a:ln/>
+        </p:spPr>
+        <p:txBody>
+          <a:bodyPr wrap="square" lIns="0" tIns="0" rIns="0" bIns="0" rtlCol="0" anchor="ctr"/>
+          <a:lstStyle/>
+          <a:p>
+            <a:pPr indent="0" marL="0">
+              <a:buNone/>
+            </a:pPr>
+            <a:r>
+              <a:rPr lang="en-US" sz="1900" dirty="0">
+                <a:solidFill>
+                  <a:srgbClr val="7A3B2E"/>
+                </a:solidFill>
+                <a:latin typeface="Courier New" pitchFamily="34" charset="0"/>
+                <a:ea typeface="Courier New" pitchFamily="34" charset="-122"/>
+                <a:cs typeface="Courier New" pitchFamily="34" charset="-120"/>
+              </a:rPr>
+              <a:t>king − man + woman → queen        paris − france + japan → tokyo</a:t>
+            </a:r>
+            <a:endParaRPr lang="en-US" sz="1900" dirty="0"/>
+          </a:p>
+        </p:txBody>
+      </p:sp>
+      <p:sp>
+        <p:nvSpPr>
+          <p:cNvPr id="6" name="Text 4"/>
+          <p:cNvSpPr/>
+          <p:nvPr/>
+        </p:nvSpPr>
+        <p:spPr>
+          <a:xfrm>
+            <a:off x="640080" y="3657600"/>
+            <a:ext cx="5577840" cy="2194560"/>
+          </a:xfrm>
+          <a:prstGeom prst="rect">
+            <a:avLst/>
+          </a:prstGeom>
+          <a:noFill/>
+          <a:ln/>
+        </p:spPr>
+        <p:txBody>
+          <a:bodyPr wrap="square" rtlCol="0" anchor="t"/>
+          <a:lstStyle/>
+          <a:p>
+            <a:pPr marL="152400" indent="-152400">
+              <a:lnSpc>
+                <a:spcPct val="115000"/>
+              </a:lnSpc>
+              <a:spcAft>
+                <a:spcPts val="1000"/>
+              </a:spcAft>
+              <a:buSzPct val="100000"/>
+              <a:buChar char="•"/>
+            </a:pPr>
+            <a:r>
+              <a:rPr lang="en-US" sz="1600" dirty="0">
                 <a:solidFill>
                   <a:srgbClr val="1A1A1A"/>
+                </a:solidFill>
+                <a:latin typeface="Calibri" pitchFamily="34" charset="0"/>
+                <a:ea typeface="Calibri" pitchFamily="34" charset="-122"/>
+                <a:cs typeface="Calibri" pitchFamily="34" charset="-120"/>
+              </a:rPr>
+              <a:t>Directions carry relationships nobody labelled.</a:t>
+            </a:r>
+            <a:endParaRPr lang="en-US" sz="1600" dirty="0"/>
+          </a:p>
+          <a:p>
+            <a:pPr marL="152400" indent="-152400">
+              <a:lnSpc>
+                <a:spcPct val="115000"/>
+              </a:lnSpc>
+              <a:spcAft>
+                <a:spcPts val="1000"/>
+              </a:spcAft>
+              <a:buSzPct val="100000"/>
+              <a:buChar char="•"/>
+            </a:pPr>
+            <a:r>
+              <a:rPr lang="en-US" sz="1600" dirty="0">
+                <a:solidFill>
+                  <a:srgbClr val="1A1A1A"/>
+                </a:solidFill>
+                <a:latin typeface="Calibri" pitchFamily="34" charset="0"/>
+                <a:ea typeface="Calibri" pitchFamily="34" charset="-122"/>
+                <a:cs typeface="Calibri" pitchFamily="34" charset="-120"/>
+              </a:rPr>
+              <a:t>The arithmetic is nudged, and most analogies fail. The famous four are the ones that worked.</a:t>
+            </a:r>
+            <a:endParaRPr lang="en-US" sz="1600" dirty="0"/>
+          </a:p>
+          <a:p>
+            <a:pPr marL="152400" indent="-152400">
+              <a:lnSpc>
+                <a:spcPct val="115000"/>
+              </a:lnSpc>
+              <a:spcAft>
+                <a:spcPts val="1000"/>
+              </a:spcAft>
+              <a:buSzPct val="100000"/>
+              <a:buChar char="•"/>
+            </a:pPr>
+            <a:r>
+              <a:rPr lang="en-US" sz="1600" dirty="0">
+                <a:solidFill>
+                  <a:srgbClr val="1A1A1A"/>
+                </a:solidFill>
+                <a:latin typeface="Calibri" pitchFamily="34" charset="0"/>
+                <a:ea typeface="Calibri" pitchFamily="34" charset="-122"/>
+                <a:cs typeface="Calibri" pitchFamily="34" charset="-120"/>
+              </a:rPr>
+              <a:t>Same geometry, other result: doctor − man + woman → nurse.</a:t>
+            </a:r>
+            <a:endParaRPr lang="en-US" sz="1600" dirty="0"/>
+          </a:p>
+        </p:txBody>
+      </p:sp>
+      <p:sp>
+        <p:nvSpPr>
+          <p:cNvPr id="7" name="Shape 5"/>
+          <p:cNvSpPr/>
+          <p:nvPr/>
+        </p:nvSpPr>
+        <p:spPr>
+          <a:xfrm>
+            <a:off x="6492240" y="3657600"/>
+            <a:ext cx="5029200" cy="2194560"/>
+          </a:xfrm>
+          <a:prstGeom prst="roundRect">
+            <a:avLst>
+              <a:gd name="adj" fmla="val 4167"/>
+            </a:avLst>
+          </a:prstGeom>
+          <a:solidFill>
+            <a:srgbClr val="F4EEE8"/>
+          </a:solidFill>
+          <a:ln/>
+        </p:spPr>
+      </p:sp>
+      <p:sp>
+        <p:nvSpPr>
+          <p:cNvPr id="8" name="Text 6"/>
+          <p:cNvSpPr/>
+          <p:nvPr/>
+        </p:nvSpPr>
+        <p:spPr>
+          <a:xfrm>
+            <a:off x="6766560" y="3840480"/>
+            <a:ext cx="2011680" cy="457200"/>
+          </a:xfrm>
+          <a:prstGeom prst="rect">
+            <a:avLst/>
+          </a:prstGeom>
+          <a:noFill/>
+          <a:ln/>
+        </p:spPr>
+        <p:txBody>
+          <a:bodyPr wrap="square" lIns="0" tIns="0" rIns="0" bIns="0" rtlCol="0" anchor="ctr"/>
+          <a:lstStyle/>
+          <a:p>
+            <a:pPr indent="0" marL="0">
+              <a:buNone/>
+            </a:pPr>
+            <a:r>
+              <a:rPr lang="en-US" sz="1600" b="1" dirty="0">
+                <a:solidFill>
+                  <a:srgbClr val="7A3B2E"/>
                 </a:solidFill>
                 <a:latin typeface="Cambria" pitchFamily="34" charset="0"/>
                 <a:ea typeface="Cambria" pitchFamily="34" charset="-122"/>
                 <a:cs typeface="Cambria" pitchFamily="34" charset="-120"/>
               </a:rPr>
-              <a:t>A picture is a grid of numbers. Take nine of them, multiply by nine other numbers, add them up: -162. Move one pixel across and repeat.</a:t>
+              <a:t>static</a:t>
             </a:r>
             <a:endParaRPr lang="en-US" sz="1600" dirty="0"/>
           </a:p>
@@ -7556,40 +7489,196 @@
       </p:sp>
       <p:sp>
         <p:nvSpPr>
-          <p:cNvPr id="6" name="Text 3"/>
-          <p:cNvSpPr/>
-          <p:nvPr/>
-        </p:nvSpPr>
-        <p:spPr>
-          <a:xfrm>
-            <a:off x="640080" y="6355080"/>
-            <a:ext cx="10881360" cy="320040"/>
-          </a:xfrm>
-          <a:prstGeom prst="rect">
-            <a:avLst/>
-          </a:prstGeom>
-          <a:noFill/>
-          <a:ln/>
-        </p:spPr>
-        <p:txBody>
-          <a:bodyPr wrap="square" rtlCol="0" anchor="ctr"/>
-          <a:lstStyle/>
-          <a:p>
-            <a:pPr indent="0" marL="0">
-              <a:buNone/>
-            </a:pPr>
-            <a:r>
-              <a:rPr lang="en-US" sz="1000" dirty="0">
-                <a:solidFill>
-                  <a:srgbClr val="6B6B63"/>
+          <p:cNvPr id="9" name="Text 7"/>
+          <p:cNvSpPr/>
+          <p:nvPr/>
+        </p:nvSpPr>
+        <p:spPr>
+          <a:xfrm>
+            <a:off x="8686800" y="3840480"/>
+            <a:ext cx="2651760" cy="457200"/>
+          </a:xfrm>
+          <a:prstGeom prst="rect">
+            <a:avLst/>
+          </a:prstGeom>
+          <a:noFill/>
+          <a:ln/>
+        </p:spPr>
+        <p:txBody>
+          <a:bodyPr wrap="square" lIns="0" tIns="0" rIns="0" bIns="0" rtlCol="0" anchor="ctr"/>
+          <a:lstStyle/>
+          <a:p>
+            <a:pPr indent="0" marL="0">
+              <a:buNone/>
+            </a:pPr>
+            <a:r>
+              <a:rPr lang="en-US" sz="1350" dirty="0">
+                <a:solidFill>
+                  <a:srgbClr val="1A1A1A"/>
                 </a:solidFill>
                 <a:latin typeface="Calibri" pitchFamily="34" charset="0"/>
                 <a:ea typeface="Calibri" pitchFamily="34" charset="-122"/>
                 <a:cs typeface="Calibri" pitchFamily="34" charset="-120"/>
               </a:rPr>
-              <a:t>Numbers read off a Met painting from the Week 1 data. Nothing else happens in a convolution.</a:t>
-            </a:r>
-            <a:endParaRPr lang="en-US" sz="1000" dirty="0"/>
+              <a:t>one vector per word</a:t>
+            </a:r>
+            <a:endParaRPr lang="en-US" sz="1350" dirty="0"/>
+          </a:p>
+        </p:txBody>
+      </p:sp>
+      <p:sp>
+        <p:nvSpPr>
+          <p:cNvPr id="10" name="Text 8"/>
+          <p:cNvSpPr/>
+          <p:nvPr/>
+        </p:nvSpPr>
+        <p:spPr>
+          <a:xfrm>
+            <a:off x="6766560" y="4498848"/>
+            <a:ext cx="2011680" cy="457200"/>
+          </a:xfrm>
+          <a:prstGeom prst="rect">
+            <a:avLst/>
+          </a:prstGeom>
+          <a:noFill/>
+          <a:ln/>
+        </p:spPr>
+        <p:txBody>
+          <a:bodyPr wrap="square" lIns="0" tIns="0" rIns="0" bIns="0" rtlCol="0" anchor="ctr"/>
+          <a:lstStyle/>
+          <a:p>
+            <a:pPr indent="0" marL="0">
+              <a:buNone/>
+            </a:pPr>
+            <a:r>
+              <a:rPr lang="en-US" sz="1600" b="1" dirty="0">
+                <a:solidFill>
+                  <a:srgbClr val="2E5F8A"/>
+                </a:solidFill>
+                <a:latin typeface="Cambria" pitchFamily="34" charset="0"/>
+                <a:ea typeface="Cambria" pitchFamily="34" charset="-122"/>
+                <a:cs typeface="Cambria" pitchFamily="34" charset="-120"/>
+              </a:rPr>
+              <a:t>contextual</a:t>
+            </a:r>
+            <a:endParaRPr lang="en-US" sz="1600" dirty="0"/>
+          </a:p>
+        </p:txBody>
+      </p:sp>
+      <p:sp>
+        <p:nvSpPr>
+          <p:cNvPr id="11" name="Text 9"/>
+          <p:cNvSpPr/>
+          <p:nvPr/>
+        </p:nvSpPr>
+        <p:spPr>
+          <a:xfrm>
+            <a:off x="8686800" y="4498848"/>
+            <a:ext cx="2651760" cy="457200"/>
+          </a:xfrm>
+          <a:prstGeom prst="rect">
+            <a:avLst/>
+          </a:prstGeom>
+          <a:noFill/>
+          <a:ln/>
+        </p:spPr>
+        <p:txBody>
+          <a:bodyPr wrap="square" lIns="0" tIns="0" rIns="0" bIns="0" rtlCol="0" anchor="ctr"/>
+          <a:lstStyle/>
+          <a:p>
+            <a:pPr indent="0" marL="0">
+              <a:buNone/>
+            </a:pPr>
+            <a:r>
+              <a:rPr lang="en-US" sz="1350" dirty="0">
+                <a:solidFill>
+                  <a:srgbClr val="1A1A1A"/>
+                </a:solidFill>
+                <a:latin typeface="Calibri" pitchFamily="34" charset="0"/>
+                <a:ea typeface="Calibri" pitchFamily="34" charset="-122"/>
+                <a:cs typeface="Calibri" pitchFamily="34" charset="-120"/>
+              </a:rPr>
+              <a:t>one per occurrence</a:t>
+            </a:r>
+            <a:endParaRPr lang="en-US" sz="1350" dirty="0"/>
+          </a:p>
+        </p:txBody>
+      </p:sp>
+      <p:sp>
+        <p:nvSpPr>
+          <p:cNvPr id="12" name="Text 10"/>
+          <p:cNvSpPr/>
+          <p:nvPr/>
+        </p:nvSpPr>
+        <p:spPr>
+          <a:xfrm>
+            <a:off x="6766560" y="5157216"/>
+            <a:ext cx="2011680" cy="457200"/>
+          </a:xfrm>
+          <a:prstGeom prst="rect">
+            <a:avLst/>
+          </a:prstGeom>
+          <a:noFill/>
+          <a:ln/>
+        </p:spPr>
+        <p:txBody>
+          <a:bodyPr wrap="square" lIns="0" tIns="0" rIns="0" bIns="0" rtlCol="0" anchor="ctr"/>
+          <a:lstStyle/>
+          <a:p>
+            <a:pPr indent="0" marL="0">
+              <a:buNone/>
+            </a:pPr>
+            <a:r>
+              <a:rPr lang="en-US" sz="1600" b="1" dirty="0">
+                <a:solidFill>
+                  <a:srgbClr val="3F6F5F"/>
+                </a:solidFill>
+                <a:latin typeface="Cambria" pitchFamily="34" charset="0"/>
+                <a:ea typeface="Cambria" pitchFamily="34" charset="-122"/>
+                <a:cs typeface="Cambria" pitchFamily="34" charset="-120"/>
+              </a:rPr>
+              <a:t>sentence</a:t>
+            </a:r>
+            <a:endParaRPr lang="en-US" sz="1600" dirty="0"/>
+          </a:p>
+        </p:txBody>
+      </p:sp>
+      <p:sp>
+        <p:nvSpPr>
+          <p:cNvPr id="13" name="Text 11"/>
+          <p:cNvSpPr/>
+          <p:nvPr/>
+        </p:nvSpPr>
+        <p:spPr>
+          <a:xfrm>
+            <a:off x="8686800" y="5157216"/>
+            <a:ext cx="2651760" cy="457200"/>
+          </a:xfrm>
+          <a:prstGeom prst="rect">
+            <a:avLst/>
+          </a:prstGeom>
+          <a:noFill/>
+          <a:ln/>
+        </p:spPr>
+        <p:txBody>
+          <a:bodyPr wrap="square" lIns="0" tIns="0" rIns="0" bIns="0" rtlCol="0" anchor="ctr"/>
+          <a:lstStyle/>
+          <a:p>
+            <a:pPr indent="0" marL="0">
+              <a:buNone/>
+            </a:pPr>
+            <a:r>
+              <a:rPr lang="en-US" sz="1350" dirty="0">
+                <a:solidFill>
+                  <a:srgbClr val="1A1A1A"/>
+                </a:solidFill>
+                <a:latin typeface="Calibri" pitchFamily="34" charset="0"/>
+                <a:ea typeface="Calibri" pitchFamily="34" charset="-122"/>
+                <a:cs typeface="Calibri" pitchFamily="34" charset="-120"/>
+              </a:rPr>
+              <a:t>one per document — Week 5</a:t>
+            </a:r>
+            <a:endParaRPr lang="en-US" sz="1350" dirty="0"/>
           </a:p>
         </p:txBody>
       </p:sp>
@@ -7658,7 +7747,7 @@
                 <a:ea typeface="Calibri" pitchFamily="34" charset="-122"/>
                 <a:cs typeface="Calibri" pitchFamily="34" charset="-120"/>
               </a:rPr>
-              <a:t>WHAT THE NINE NUMBERS DO</a:t>
+              <a:t>THE SAME TRICK, ON PIXELS</a:t>
             </a:r>
             <a:endParaRPr lang="en-US" sz="1300" dirty="0"/>
           </a:p>
@@ -7697,7 +7786,7 @@
                 <a:ea typeface="Cambria" pitchFamily="34" charset="-122"/>
                 <a:cs typeface="Cambria" pitchFamily="34" charset="-120"/>
               </a:rPr>
-              <a:t>Change the filter, ask a different question</a:t>
+              <a:t>A convolution, all of it</a:t>
             </a:r>
             <a:endParaRPr lang="en-US" sz="3400" dirty="0"/>
           </a:p>
@@ -7705,7 +7794,7 @@
       </p:sp>
       <p:pic>
         <p:nvPicPr>
-          <p:cNvPr id="4" name="Image 0" descr="/tmp/figs/w4_convolution.png">    </p:cNvPr>
+          <p:cNvPr id="4" name="Image 0" descr="/tmp/figs/w4_conv_arith.png">    </p:cNvPr>
           <p:cNvPicPr>
             <a:picLocks noChangeAspect="1"/>
           </p:cNvPicPr>
@@ -7718,8 +7807,8 @@
         </p:blipFill>
         <p:spPr>
           <a:xfrm>
-            <a:off x="822960" y="2011680"/>
-            <a:ext cx="10515600" cy="3200400"/>
+            <a:off x="548640" y="1965960"/>
+            <a:ext cx="11064240" cy="3291840"/>
           </a:xfrm>
           <a:prstGeom prst="rect">
             <a:avLst/>
@@ -7759,7 +7848,7 @@
                 <a:ea typeface="Cambria" pitchFamily="34" charset="-122"/>
                 <a:cs typeface="Cambria" pitchFamily="34" charset="-120"/>
               </a:rPr>
-              <a:t>Each panel is the same painting under a different 3x3 grid. One finds vertical edges, one horizontal, one blurs.</a:t>
+              <a:t>A picture is a grid of numbers. Take nine of them, multiply by nine other numbers, add them up: -162. Move one pixel across and repeat.</a:t>
             </a:r>
             <a:endParaRPr lang="en-US" sz="1600" dirty="0"/>
           </a:p>
@@ -7798,7 +7887,7 @@
                 <a:ea typeface="Calibri" pitchFamily="34" charset="-122"/>
                 <a:cs typeface="Calibri" pitchFamily="34" charset="-120"/>
               </a:rPr>
-              <a:t>A CNN is not given these. It starts with random grids and learns which ones are worth having, by the same downhill roll as before.</a:t>
+              <a:t>Numbers read off a Met painting from the Week 1 data. Nothing else happens in a convolution.</a:t>
             </a:r>
             <a:endParaRPr lang="en-US" sz="1000" dirty="0"/>
           </a:p>
@@ -7869,7 +7958,7 @@
                 <a:ea typeface="Calibri" pitchFamily="34" charset="-122"/>
                 <a:cs typeface="Calibri" pitchFamily="34" charset="-120"/>
               </a:rPr>
-              <a:t>WHY A CNN IS DEEP</a:t>
+              <a:t>WHAT THE NINE NUMBERS DO</a:t>
             </a:r>
             <a:endParaRPr lang="en-US" sz="1300" dirty="0"/>
           </a:p>
@@ -7908,7 +7997,7 @@
                 <a:ea typeface="Cambria" pitchFamily="34" charset="-122"/>
                 <a:cs typeface="Cambria" pitchFamily="34" charset="-120"/>
               </a:rPr>
-              <a:t>Filters on top of filters</a:t>
+              <a:t>Change the filter, ask a different question</a:t>
             </a:r>
             <a:endParaRPr lang="en-US" sz="3400" dirty="0"/>
           </a:p>
@@ -7916,7 +8005,7 @@
       </p:sp>
       <p:pic>
         <p:nvPicPr>
-          <p:cNvPr id="4" name="Image 0" descr="/tmp/figs/w4_conv_stack.png">    </p:cNvPr>
+          <p:cNvPr id="4" name="Image 0" descr="/tmp/figs/w4_convolution.png">    </p:cNvPr>
           <p:cNvPicPr>
             <a:picLocks noChangeAspect="1"/>
           </p:cNvPicPr>
@@ -7970,7 +8059,7 @@
                 <a:ea typeface="Cambria" pitchFamily="34" charset="-122"/>
                 <a:cs typeface="Cambria" pitchFamily="34" charset="-120"/>
               </a:rPr>
-              <a:t>Run a filter over the output of the last filter, then shrink. Edges turn into corners, and corners into regions.</a:t>
+              <a:t>Each panel is the same painting under a different 3x3 grid. One finds vertical edges, one horizontal, one blurs.</a:t>
             </a:r>
             <a:endParaRPr lang="en-US" sz="1600" dirty="0"/>
           </a:p>
@@ -8009,7 +8098,7 @@
                 <a:ea typeface="Calibri" pitchFamily="34" charset="-122"/>
                 <a:cs typeface="Calibri" pitchFamily="34" charset="-120"/>
               </a:rPr>
-              <a:t>Every panel is real arithmetic on the painting to its left. Stacking them is what a CNN does.</a:t>
+              <a:t>A CNN is not given these. It starts with random grids and learns which ones are worth having, by the same downhill roll as before.</a:t>
             </a:r>
             <a:endParaRPr lang="en-US" sz="1000" dirty="0"/>
           </a:p>
@@ -8074,13 +8163,13 @@
             <a:r>
               <a:rPr lang="en-US" sz="1300" b="1" spc="300" kern="0" dirty="0">
                 <a:solidFill>
-                  <a:srgbClr val="B9852F"/>
+                  <a:srgbClr val="2E5F8A"/>
                 </a:solidFill>
                 <a:latin typeface="Calibri" pitchFamily="34" charset="0"/>
                 <a:ea typeface="Calibri" pitchFamily="34" charset="-122"/>
                 <a:cs typeface="Calibri" pitchFamily="34" charset="-120"/>
               </a:rPr>
-              <a:t>BOTH IDEAS AT ONCE</a:t>
+              <a:t>WHY A CNN IS DEEP</a:t>
             </a:r>
             <a:endParaRPr lang="en-US" sz="1300" dirty="0"/>
           </a:p>
@@ -8119,7 +8208,7 @@
                 <a:ea typeface="Cambria" pitchFamily="34" charset="-122"/>
                 <a:cs typeface="Cambria" pitchFamily="34" charset="-120"/>
               </a:rPr>
-              <a:t>The same rule, where a context is a picture</a:t>
+              <a:t>Filters on top of filters</a:t>
             </a:r>
             <a:endParaRPr lang="en-US" sz="3400" dirty="0"/>
           </a:p>
@@ -8127,7 +8216,7 @@
       </p:sp>
       <p:pic>
         <p:nvPicPr>
-          <p:cNvPr id="4" name="Image 0" descr="/tmp/figs/w4_clip.png">    </p:cNvPr>
+          <p:cNvPr id="4" name="Image 0" descr="/tmp/figs/w4_conv_stack.png">    </p:cNvPr>
           <p:cNvPicPr>
             <a:picLocks noChangeAspect="1"/>
           </p:cNvPicPr>
@@ -8140,8 +8229,8 @@
         </p:blipFill>
         <p:spPr>
           <a:xfrm>
-            <a:off x="1097280" y="1783080"/>
-            <a:ext cx="9966960" cy="3840480"/>
+            <a:off x="822960" y="2011680"/>
+            <a:ext cx="10515600" cy="3200400"/>
           </a:xfrm>
           <a:prstGeom prst="rect">
             <a:avLst/>
@@ -8181,7 +8270,7 @@
                 <a:ea typeface="Cambria" pitchFamily="34" charset="-122"/>
                 <a:cs typeface="Cambria" pitchFamily="34" charset="-120"/>
               </a:rPr>
-              <a:t>Same context: a painting and its own caption, pulled together. Different context: anyone else's caption, pushed away. Two kinds of thing in one space.</a:t>
+              <a:t>Run a filter over the output of the last filter, then shrink. Edges turn into corners, and corners into regions.</a:t>
             </a:r>
             <a:endParaRPr lang="en-US" sz="1600" dirty="0"/>
           </a:p>
@@ -8220,7 +8309,7 @@
                 <a:ea typeface="Calibri" pitchFamily="34" charset="-122"/>
                 <a:cs typeface="Calibri" pitchFamily="34" charset="-120"/>
               </a:rPr>
-              <a:t>This is why you can search an untagged museum by typing "a woman in a red hat". The notebook trains a small one on 18 paintings.</a:t>
+              <a:t>Every panel is real arithmetic on the painting to its left. Stacking them is what a CNN does.</a:t>
             </a:r>
             <a:endParaRPr lang="en-US" sz="1000" dirty="0"/>
           </a:p>
@@ -8237,6 +8326,217 @@
 <file path=ppt/slides/slide24.xml><?xml version="1.0" encoding="utf-8"?>
 <p:sld xmlns:a="http://schemas.openxmlformats.org/drawingml/2006/main" xmlns:r="http://schemas.openxmlformats.org/officeDocument/2006/relationships" xmlns:p="http://schemas.openxmlformats.org/presentationml/2006/main">
   <p:cSld name="Slide 24">
+    <p:bg>
+      <p:bgPr>
+        <a:solidFill>
+          <a:srgbClr val="FFFFFF"/>
+        </a:solidFill>
+      </p:bgPr>
+    </p:bg>
+    <p:spTree>
+      <p:nvGrpSpPr>
+        <p:cNvPr id="1" name=""/>
+        <p:cNvGrpSpPr/>
+        <p:nvPr/>
+      </p:nvGrpSpPr>
+      <p:grpSpPr>
+        <a:xfrm>
+          <a:off x="0" y="0"/>
+          <a:ext cx="0" cy="0"/>
+          <a:chOff x="0" y="0"/>
+          <a:chExt cx="0" cy="0"/>
+        </a:xfrm>
+      </p:grpSpPr>
+      <p:sp>
+        <p:nvSpPr>
+          <p:cNvPr id="2" name="Text 0"/>
+          <p:cNvSpPr/>
+          <p:nvPr/>
+        </p:nvSpPr>
+        <p:spPr>
+          <a:xfrm>
+            <a:off x="640080" y="502920"/>
+            <a:ext cx="10515600" cy="320040"/>
+          </a:xfrm>
+          <a:prstGeom prst="rect">
+            <a:avLst/>
+          </a:prstGeom>
+          <a:noFill/>
+          <a:ln/>
+        </p:spPr>
+        <p:txBody>
+          <a:bodyPr wrap="square" rtlCol="0" anchor="ctr"/>
+          <a:lstStyle/>
+          <a:p>
+            <a:pPr indent="0" marL="0">
+              <a:buNone/>
+            </a:pPr>
+            <a:r>
+              <a:rPr lang="en-US" sz="1300" b="1" spc="300" kern="0" dirty="0">
+                <a:solidFill>
+                  <a:srgbClr val="B9852F"/>
+                </a:solidFill>
+                <a:latin typeface="Calibri" pitchFamily="34" charset="0"/>
+                <a:ea typeface="Calibri" pitchFamily="34" charset="-122"/>
+                <a:cs typeface="Calibri" pitchFamily="34" charset="-120"/>
+              </a:rPr>
+              <a:t>BOTH IDEAS AT ONCE</a:t>
+            </a:r>
+            <a:endParaRPr lang="en-US" sz="1300" dirty="0"/>
+          </a:p>
+        </p:txBody>
+      </p:sp>
+      <p:sp>
+        <p:nvSpPr>
+          <p:cNvPr id="3" name="Text 1"/>
+          <p:cNvSpPr/>
+          <p:nvPr/>
+        </p:nvSpPr>
+        <p:spPr>
+          <a:xfrm>
+            <a:off x="640080" y="868680"/>
+            <a:ext cx="10972800" cy="777240"/>
+          </a:xfrm>
+          <a:prstGeom prst="rect">
+            <a:avLst/>
+          </a:prstGeom>
+          <a:noFill/>
+          <a:ln/>
+        </p:spPr>
+        <p:txBody>
+          <a:bodyPr wrap="square" rtlCol="0" anchor="t"/>
+          <a:lstStyle/>
+          <a:p>
+            <a:pPr indent="0" marL="0">
+              <a:buNone/>
+            </a:pPr>
+            <a:r>
+              <a:rPr lang="en-US" sz="3400" b="1" dirty="0">
+                <a:solidFill>
+                  <a:srgbClr val="1A1A1A"/>
+                </a:solidFill>
+                <a:latin typeface="Cambria" pitchFamily="34" charset="0"/>
+                <a:ea typeface="Cambria" pitchFamily="34" charset="-122"/>
+                <a:cs typeface="Cambria" pitchFamily="34" charset="-120"/>
+              </a:rPr>
+              <a:t>The same rule, where a context is a picture</a:t>
+            </a:r>
+            <a:endParaRPr lang="en-US" sz="3400" dirty="0"/>
+          </a:p>
+        </p:txBody>
+      </p:sp>
+      <p:pic>
+        <p:nvPicPr>
+          <p:cNvPr id="4" name="Image 0" descr="/tmp/figs/w4_clip.png">    </p:cNvPr>
+          <p:cNvPicPr>
+            <a:picLocks noChangeAspect="1"/>
+          </p:cNvPicPr>
+          <p:nvPr/>
+        </p:nvPicPr>
+        <p:blipFill>
+          <a:blip r:embed="rId1"/>
+          <a:srcRect l="0" r="0" t="0" b="0"/>
+          <a:stretch/>
+        </p:blipFill>
+        <p:spPr>
+          <a:xfrm>
+            <a:off x="1097280" y="1783080"/>
+            <a:ext cx="9966960" cy="3840480"/>
+          </a:xfrm>
+          <a:prstGeom prst="rect">
+            <a:avLst/>
+          </a:prstGeom>
+        </p:spPr>
+      </p:pic>
+      <p:sp>
+        <p:nvSpPr>
+          <p:cNvPr id="5" name="Text 2"/>
+          <p:cNvSpPr/>
+          <p:nvPr/>
+        </p:nvSpPr>
+        <p:spPr>
+          <a:xfrm>
+            <a:off x="640080" y="5897880"/>
+            <a:ext cx="10881360" cy="411480"/>
+          </a:xfrm>
+          <a:prstGeom prst="rect">
+            <a:avLst/>
+          </a:prstGeom>
+          <a:noFill/>
+          <a:ln/>
+        </p:spPr>
+        <p:txBody>
+          <a:bodyPr wrap="square" rtlCol="0" anchor="ctr"/>
+          <a:lstStyle/>
+          <a:p>
+            <a:pPr indent="0" marL="0">
+              <a:buNone/>
+            </a:pPr>
+            <a:r>
+              <a:rPr lang="en-US" sz="1600" i="1" dirty="0">
+                <a:solidFill>
+                  <a:srgbClr val="1A1A1A"/>
+                </a:solidFill>
+                <a:latin typeface="Cambria" pitchFamily="34" charset="0"/>
+                <a:ea typeface="Cambria" pitchFamily="34" charset="-122"/>
+                <a:cs typeface="Cambria" pitchFamily="34" charset="-120"/>
+              </a:rPr>
+              <a:t>Same context: a painting and its own caption, pulled together. Different context: anyone else's caption, pushed away. Two kinds of thing in one space.</a:t>
+            </a:r>
+            <a:endParaRPr lang="en-US" sz="1600" dirty="0"/>
+          </a:p>
+        </p:txBody>
+      </p:sp>
+      <p:sp>
+        <p:nvSpPr>
+          <p:cNvPr id="6" name="Text 3"/>
+          <p:cNvSpPr/>
+          <p:nvPr/>
+        </p:nvSpPr>
+        <p:spPr>
+          <a:xfrm>
+            <a:off x="640080" y="6355080"/>
+            <a:ext cx="10881360" cy="320040"/>
+          </a:xfrm>
+          <a:prstGeom prst="rect">
+            <a:avLst/>
+          </a:prstGeom>
+          <a:noFill/>
+          <a:ln/>
+        </p:spPr>
+        <p:txBody>
+          <a:bodyPr wrap="square" rtlCol="0" anchor="ctr"/>
+          <a:lstStyle/>
+          <a:p>
+            <a:pPr indent="0" marL="0">
+              <a:buNone/>
+            </a:pPr>
+            <a:r>
+              <a:rPr lang="en-US" sz="1000" dirty="0">
+                <a:solidFill>
+                  <a:srgbClr val="6B6B63"/>
+                </a:solidFill>
+                <a:latin typeface="Calibri" pitchFamily="34" charset="0"/>
+                <a:ea typeface="Calibri" pitchFamily="34" charset="-122"/>
+                <a:cs typeface="Calibri" pitchFamily="34" charset="-120"/>
+              </a:rPr>
+              <a:t>This is why you can search an untagged museum by typing "a woman in a red hat". The notebook trains a small one on 18 paintings.</a:t>
+            </a:r>
+            <a:endParaRPr lang="en-US" sz="1000" dirty="0"/>
+          </a:p>
+        </p:txBody>
+      </p:sp>
+    </p:spTree>
+  </p:cSld>
+  <p:clrMapOvr>
+    <a:masterClrMapping/>
+  </p:clrMapOvr>
+</p:sld>
+</file>
+
+<file path=ppt/slides/slide25.xml><?xml version="1.0" encoding="utf-8"?>
+<p:sld xmlns:a="http://schemas.openxmlformats.org/drawingml/2006/main" xmlns:r="http://schemas.openxmlformats.org/officeDocument/2006/relationships" xmlns:p="http://schemas.openxmlformats.org/presentationml/2006/main">
+  <p:cSld name="Slide 25">
     <p:bg>
       <p:bgPr>
         <a:solidFill>
@@ -8372,632 +8672,6 @@
               <a:t>Then: where your corpus actually comes from.</a:t>
             </a:r>
             <a:endParaRPr lang="en-US" sz="1800" dirty="0"/>
-          </a:p>
-        </p:txBody>
-      </p:sp>
-    </p:spTree>
-  </p:cSld>
-  <p:clrMapOvr>
-    <a:masterClrMapping/>
-  </p:clrMapOvr>
-</p:sld>
-</file>
-
-<file path=ppt/slides/slide25.xml><?xml version="1.0" encoding="utf-8"?>
-<p:sld xmlns:a="http://schemas.openxmlformats.org/drawingml/2006/main" xmlns:r="http://schemas.openxmlformats.org/officeDocument/2006/relationships" xmlns:p="http://schemas.openxmlformats.org/presentationml/2006/main">
-  <p:cSld name="Slide 25">
-    <p:bg>
-      <p:bgPr>
-        <a:solidFill>
-          <a:srgbClr val="FFFFFF"/>
-        </a:solidFill>
-      </p:bgPr>
-    </p:bg>
-    <p:spTree>
-      <p:nvGrpSpPr>
-        <p:cNvPr id="1" name=""/>
-        <p:cNvGrpSpPr/>
-        <p:nvPr/>
-      </p:nvGrpSpPr>
-      <p:grpSpPr>
-        <a:xfrm>
-          <a:off x="0" y="0"/>
-          <a:ext cx="0" cy="0"/>
-          <a:chOff x="0" y="0"/>
-          <a:chExt cx="0" cy="0"/>
-        </a:xfrm>
-      </p:grpSpPr>
-      <p:sp>
-        <p:nvSpPr>
-          <p:cNvPr id="2" name="Text 0"/>
-          <p:cNvSpPr/>
-          <p:nvPr/>
-        </p:nvSpPr>
-        <p:spPr>
-          <a:xfrm>
-            <a:off x="640080" y="502920"/>
-            <a:ext cx="10515600" cy="320040"/>
-          </a:xfrm>
-          <a:prstGeom prst="rect">
-            <a:avLst/>
-          </a:prstGeom>
-          <a:noFill/>
-          <a:ln/>
-        </p:spPr>
-        <p:txBody>
-          <a:bodyPr wrap="square" rtlCol="0" anchor="ctr"/>
-          <a:lstStyle/>
-          <a:p>
-            <a:pPr indent="0" marL="0">
-              <a:buNone/>
-            </a:pPr>
-            <a:r>
-              <a:rPr lang="en-US" sz="1300" b="1" spc="300" kern="0" dirty="0">
-                <a:solidFill>
-                  <a:srgbClr val="7A3B2E"/>
-                </a:solidFill>
-                <a:latin typeface="Calibri" pitchFamily="34" charset="0"/>
-                <a:ea typeface="Calibri" pitchFamily="34" charset="-122"/>
-                <a:cs typeface="Calibri" pitchFamily="34" charset="-120"/>
-              </a:rPr>
-              <a:t>GETTING THE DATA</a:t>
-            </a:r>
-            <a:endParaRPr lang="en-US" sz="1300" dirty="0"/>
-          </a:p>
-        </p:txBody>
-      </p:sp>
-      <p:sp>
-        <p:nvSpPr>
-          <p:cNvPr id="3" name="Text 1"/>
-          <p:cNvSpPr/>
-          <p:nvPr/>
-        </p:nvSpPr>
-        <p:spPr>
-          <a:xfrm>
-            <a:off x="640080" y="868680"/>
-            <a:ext cx="10972800" cy="777240"/>
-          </a:xfrm>
-          <a:prstGeom prst="rect">
-            <a:avLst/>
-          </a:prstGeom>
-          <a:noFill/>
-          <a:ln/>
-        </p:spPr>
-        <p:txBody>
-          <a:bodyPr wrap="square" rtlCol="0" anchor="t"/>
-          <a:lstStyle/>
-          <a:p>
-            <a:pPr indent="0" marL="0">
-              <a:buNone/>
-            </a:pPr>
-            <a:r>
-              <a:rPr lang="en-US" sz="3400" b="1" dirty="0">
-                <a:solidFill>
-                  <a:srgbClr val="1A1A1A"/>
-                </a:solidFill>
-                <a:latin typeface="Cambria" pitchFamily="34" charset="0"/>
-                <a:ea typeface="Cambria" pitchFamily="34" charset="-122"/>
-                <a:cs typeface="Cambria" pitchFamily="34" charset="-120"/>
-              </a:rPr>
-              <a:t>Three routes, in the order you should try them</a:t>
-            </a:r>
-            <a:endParaRPr lang="en-US" sz="3400" dirty="0"/>
-          </a:p>
-        </p:txBody>
-      </p:sp>
-      <p:sp>
-        <p:nvSpPr>
-          <p:cNvPr id="4" name="Shape 2"/>
-          <p:cNvSpPr/>
-          <p:nvPr/>
-        </p:nvSpPr>
-        <p:spPr>
-          <a:xfrm>
-            <a:off x="640080" y="2011680"/>
-            <a:ext cx="10881360" cy="1143000"/>
-          </a:xfrm>
-          <a:prstGeom prst="roundRect">
-            <a:avLst>
-              <a:gd name="adj" fmla="val 8000"/>
-            </a:avLst>
-          </a:prstGeom>
-          <a:solidFill>
-            <a:srgbClr val="F4EEE8"/>
-          </a:solidFill>
-          <a:ln/>
-        </p:spPr>
-      </p:sp>
-      <p:sp>
-        <p:nvSpPr>
-          <p:cNvPr id="5" name="Shape 3"/>
-          <p:cNvSpPr/>
-          <p:nvPr/>
-        </p:nvSpPr>
-        <p:spPr>
-          <a:xfrm>
-            <a:off x="914400" y="2304288"/>
-            <a:ext cx="548640" cy="548640"/>
-          </a:xfrm>
-          <a:prstGeom prst="ellipse">
-            <a:avLst/>
-          </a:prstGeom>
-          <a:solidFill>
-            <a:srgbClr val="3F6F5F"/>
-          </a:solidFill>
-          <a:ln/>
-        </p:spPr>
-      </p:sp>
-      <p:sp>
-        <p:nvSpPr>
-          <p:cNvPr id="6" name="Text 4"/>
-          <p:cNvSpPr/>
-          <p:nvPr/>
-        </p:nvSpPr>
-        <p:spPr>
-          <a:xfrm>
-            <a:off x="914400" y="2304288"/>
-            <a:ext cx="548640" cy="548640"/>
-          </a:xfrm>
-          <a:prstGeom prst="rect">
-            <a:avLst/>
-          </a:prstGeom>
-          <a:noFill/>
-          <a:ln/>
-        </p:spPr>
-        <p:txBody>
-          <a:bodyPr wrap="square" rtlCol="0" anchor="ctr"/>
-          <a:lstStyle/>
-          <a:p>
-            <a:pPr algn="ctr" indent="0" marL="0">
-              <a:buNone/>
-            </a:pPr>
-            <a:r>
-              <a:rPr lang="en-US" sz="1900" b="1" dirty="0">
-                <a:solidFill>
-                  <a:srgbClr val="FFFFFF"/>
-                </a:solidFill>
-                <a:latin typeface="Cambria" pitchFamily="34" charset="0"/>
-                <a:ea typeface="Cambria" pitchFamily="34" charset="-122"/>
-                <a:cs typeface="Cambria" pitchFamily="34" charset="-120"/>
-              </a:rPr>
-              <a:t>1</a:t>
-            </a:r>
-            <a:endParaRPr lang="en-US" sz="1900" dirty="0"/>
-          </a:p>
-        </p:txBody>
-      </p:sp>
-      <p:sp>
-        <p:nvSpPr>
-          <p:cNvPr id="7" name="Text 5"/>
-          <p:cNvSpPr/>
-          <p:nvPr/>
-        </p:nvSpPr>
-        <p:spPr>
-          <a:xfrm>
-            <a:off x="1645920" y="2176272"/>
-            <a:ext cx="2834640" cy="457200"/>
-          </a:xfrm>
-          <a:prstGeom prst="rect">
-            <a:avLst/>
-          </a:prstGeom>
-          <a:noFill/>
-          <a:ln/>
-        </p:spPr>
-        <p:txBody>
-          <a:bodyPr wrap="square" lIns="0" tIns="0" rIns="0" bIns="0" rtlCol="0" anchor="ctr"/>
-          <a:lstStyle/>
-          <a:p>
-            <a:pPr indent="0" marL="0">
-              <a:buNone/>
-            </a:pPr>
-            <a:r>
-              <a:rPr lang="en-US" sz="1800" b="1" dirty="0">
-                <a:solidFill>
-                  <a:srgbClr val="1A1A1A"/>
-                </a:solidFill>
-                <a:latin typeface="Cambria" pitchFamily="34" charset="0"/>
-                <a:ea typeface="Cambria" pitchFamily="34" charset="-122"/>
-                <a:cs typeface="Cambria" pitchFamily="34" charset="-120"/>
-              </a:rPr>
-              <a:t>A prepared file</a:t>
-            </a:r>
-            <a:endParaRPr lang="en-US" sz="1800" dirty="0"/>
-          </a:p>
-        </p:txBody>
-      </p:sp>
-      <p:sp>
-        <p:nvSpPr>
-          <p:cNvPr id="8" name="Text 6"/>
-          <p:cNvSpPr/>
-          <p:nvPr/>
-        </p:nvSpPr>
-        <p:spPr>
-          <a:xfrm>
-            <a:off x="4572000" y="2194560"/>
-            <a:ext cx="6675120" cy="822960"/>
-          </a:xfrm>
-          <a:prstGeom prst="rect">
-            <a:avLst/>
-          </a:prstGeom>
-          <a:noFill/>
-          <a:ln/>
-        </p:spPr>
-        <p:txBody>
-          <a:bodyPr wrap="square" lIns="0" tIns="0" rIns="0" bIns="0" rtlCol="0" anchor="t"/>
-          <a:lstStyle/>
-          <a:p>
-            <a:pPr indent="0" marL="0">
-              <a:buNone/>
-            </a:pPr>
-            <a:r>
-              <a:rPr lang="en-US" sz="1350" dirty="0">
-                <a:solidFill>
-                  <a:srgbClr val="1A1A1A"/>
-                </a:solidFill>
-                <a:latin typeface="Calibri" pitchFamily="34" charset="0"/>
-                <a:ea typeface="Calibri" pitchFamily="34" charset="-122"/>
-                <a:cs typeface="Calibri" pitchFamily="34" charset="-120"/>
-              </a:rPr>
-              <a:t>pd.read_csv(url) · gdown · load_dataset(). Most projects should stop here.</a:t>
-            </a:r>
-            <a:endParaRPr lang="en-US" sz="1350" dirty="0"/>
-          </a:p>
-        </p:txBody>
-      </p:sp>
-      <p:sp>
-        <p:nvSpPr>
-          <p:cNvPr id="9" name="Shape 7"/>
-          <p:cNvSpPr/>
-          <p:nvPr/>
-        </p:nvSpPr>
-        <p:spPr>
-          <a:xfrm>
-            <a:off x="640080" y="3337560"/>
-            <a:ext cx="10881360" cy="1143000"/>
-          </a:xfrm>
-          <a:prstGeom prst="roundRect">
-            <a:avLst>
-              <a:gd name="adj" fmla="val 8000"/>
-            </a:avLst>
-          </a:prstGeom>
-          <a:solidFill>
-            <a:srgbClr val="F4EEE8"/>
-          </a:solidFill>
-          <a:ln/>
-        </p:spPr>
-      </p:sp>
-      <p:sp>
-        <p:nvSpPr>
-          <p:cNvPr id="10" name="Shape 8"/>
-          <p:cNvSpPr/>
-          <p:nvPr/>
-        </p:nvSpPr>
-        <p:spPr>
-          <a:xfrm>
-            <a:off x="914400" y="3630168"/>
-            <a:ext cx="548640" cy="548640"/>
-          </a:xfrm>
-          <a:prstGeom prst="ellipse">
-            <a:avLst/>
-          </a:prstGeom>
-          <a:solidFill>
-            <a:srgbClr val="2E5F8A"/>
-          </a:solidFill>
-          <a:ln/>
-        </p:spPr>
-      </p:sp>
-      <p:sp>
-        <p:nvSpPr>
-          <p:cNvPr id="11" name="Text 9"/>
-          <p:cNvSpPr/>
-          <p:nvPr/>
-        </p:nvSpPr>
-        <p:spPr>
-          <a:xfrm>
-            <a:off x="914400" y="3630168"/>
-            <a:ext cx="548640" cy="548640"/>
-          </a:xfrm>
-          <a:prstGeom prst="rect">
-            <a:avLst/>
-          </a:prstGeom>
-          <a:noFill/>
-          <a:ln/>
-        </p:spPr>
-        <p:txBody>
-          <a:bodyPr wrap="square" rtlCol="0" anchor="ctr"/>
-          <a:lstStyle/>
-          <a:p>
-            <a:pPr algn="ctr" indent="0" marL="0">
-              <a:buNone/>
-            </a:pPr>
-            <a:r>
-              <a:rPr lang="en-US" sz="1900" b="1" dirty="0">
-                <a:solidFill>
-                  <a:srgbClr val="FFFFFF"/>
-                </a:solidFill>
-                <a:latin typeface="Cambria" pitchFamily="34" charset="0"/>
-                <a:ea typeface="Cambria" pitchFamily="34" charset="-122"/>
-                <a:cs typeface="Cambria" pitchFamily="34" charset="-120"/>
-              </a:rPr>
-              <a:t>2</a:t>
-            </a:r>
-            <a:endParaRPr lang="en-US" sz="1900" dirty="0"/>
-          </a:p>
-        </p:txBody>
-      </p:sp>
-      <p:sp>
-        <p:nvSpPr>
-          <p:cNvPr id="12" name="Text 10"/>
-          <p:cNvSpPr/>
-          <p:nvPr/>
-        </p:nvSpPr>
-        <p:spPr>
-          <a:xfrm>
-            <a:off x="1645920" y="3502152"/>
-            <a:ext cx="2834640" cy="457200"/>
-          </a:xfrm>
-          <a:prstGeom prst="rect">
-            <a:avLst/>
-          </a:prstGeom>
-          <a:noFill/>
-          <a:ln/>
-        </p:spPr>
-        <p:txBody>
-          <a:bodyPr wrap="square" lIns="0" tIns="0" rIns="0" bIns="0" rtlCol="0" anchor="ctr"/>
-          <a:lstStyle/>
-          <a:p>
-            <a:pPr indent="0" marL="0">
-              <a:buNone/>
-            </a:pPr>
-            <a:r>
-              <a:rPr lang="en-US" sz="1800" b="1" dirty="0">
-                <a:solidFill>
-                  <a:srgbClr val="1A1A1A"/>
-                </a:solidFill>
-                <a:latin typeface="Cambria" pitchFamily="34" charset="0"/>
-                <a:ea typeface="Cambria" pitchFamily="34" charset="-122"/>
-                <a:cs typeface="Cambria" pitchFamily="34" charset="-120"/>
-              </a:rPr>
-              <a:t>An API</a:t>
-            </a:r>
-            <a:endParaRPr lang="en-US" sz="1800" dirty="0"/>
-          </a:p>
-        </p:txBody>
-      </p:sp>
-      <p:sp>
-        <p:nvSpPr>
-          <p:cNvPr id="13" name="Text 11"/>
-          <p:cNvSpPr/>
-          <p:nvPr/>
-        </p:nvSpPr>
-        <p:spPr>
-          <a:xfrm>
-            <a:off x="4572000" y="3520440"/>
-            <a:ext cx="6675120" cy="822960"/>
-          </a:xfrm>
-          <a:prstGeom prst="rect">
-            <a:avLst/>
-          </a:prstGeom>
-          <a:noFill/>
-          <a:ln/>
-        </p:spPr>
-        <p:txBody>
-          <a:bodyPr wrap="square" lIns="0" tIns="0" rIns="0" bIns="0" rtlCol="0" anchor="t"/>
-          <a:lstStyle/>
-          <a:p>
-            <a:pPr indent="0" marL="0">
-              <a:buNone/>
-            </a:pPr>
-            <a:r>
-              <a:rPr lang="en-US" sz="1350" dirty="0">
-                <a:solidFill>
-                  <a:srgbClr val="1A1A1A"/>
-                </a:solidFill>
-                <a:latin typeface="Calibri" pitchFamily="34" charset="0"/>
-                <a:ea typeface="Calibri" pitchFamily="34" charset="-122"/>
-                <a:cs typeface="Calibri" pitchFamily="34" charset="-120"/>
-              </a:rPr>
-              <a:t>A documented URL that returns JSON. Four words: endpoint, key, pagination, rate limit.</a:t>
-            </a:r>
-            <a:endParaRPr lang="en-US" sz="1350" dirty="0"/>
-          </a:p>
-        </p:txBody>
-      </p:sp>
-      <p:sp>
-        <p:nvSpPr>
-          <p:cNvPr id="14" name="Shape 12"/>
-          <p:cNvSpPr/>
-          <p:nvPr/>
-        </p:nvSpPr>
-        <p:spPr>
-          <a:xfrm>
-            <a:off x="640080" y="4663440"/>
-            <a:ext cx="10881360" cy="1143000"/>
-          </a:xfrm>
-          <a:prstGeom prst="roundRect">
-            <a:avLst>
-              <a:gd name="adj" fmla="val 8000"/>
-            </a:avLst>
-          </a:prstGeom>
-          <a:solidFill>
-            <a:srgbClr val="F4EEE8"/>
-          </a:solidFill>
-          <a:ln/>
-        </p:spPr>
-      </p:sp>
-      <p:sp>
-        <p:nvSpPr>
-          <p:cNvPr id="15" name="Shape 13"/>
-          <p:cNvSpPr/>
-          <p:nvPr/>
-        </p:nvSpPr>
-        <p:spPr>
-          <a:xfrm>
-            <a:off x="914400" y="4956048"/>
-            <a:ext cx="548640" cy="548640"/>
-          </a:xfrm>
-          <a:prstGeom prst="ellipse">
-            <a:avLst/>
-          </a:prstGeom>
-          <a:solidFill>
-            <a:srgbClr val="7A3B2E"/>
-          </a:solidFill>
-          <a:ln/>
-        </p:spPr>
-      </p:sp>
-      <p:sp>
-        <p:nvSpPr>
-          <p:cNvPr id="16" name="Text 14"/>
-          <p:cNvSpPr/>
-          <p:nvPr/>
-        </p:nvSpPr>
-        <p:spPr>
-          <a:xfrm>
-            <a:off x="914400" y="4956048"/>
-            <a:ext cx="548640" cy="548640"/>
-          </a:xfrm>
-          <a:prstGeom prst="rect">
-            <a:avLst/>
-          </a:prstGeom>
-          <a:noFill/>
-          <a:ln/>
-        </p:spPr>
-        <p:txBody>
-          <a:bodyPr wrap="square" rtlCol="0" anchor="ctr"/>
-          <a:lstStyle/>
-          <a:p>
-            <a:pPr algn="ctr" indent="0" marL="0">
-              <a:buNone/>
-            </a:pPr>
-            <a:r>
-              <a:rPr lang="en-US" sz="1900" b="1" dirty="0">
-                <a:solidFill>
-                  <a:srgbClr val="FFFFFF"/>
-                </a:solidFill>
-                <a:latin typeface="Cambria" pitchFamily="34" charset="0"/>
-                <a:ea typeface="Cambria" pitchFamily="34" charset="-122"/>
-                <a:cs typeface="Cambria" pitchFamily="34" charset="-120"/>
-              </a:rPr>
-              <a:t>3</a:t>
-            </a:r>
-            <a:endParaRPr lang="en-US" sz="1900" dirty="0"/>
-          </a:p>
-        </p:txBody>
-      </p:sp>
-      <p:sp>
-        <p:nvSpPr>
-          <p:cNvPr id="17" name="Text 15"/>
-          <p:cNvSpPr/>
-          <p:nvPr/>
-        </p:nvSpPr>
-        <p:spPr>
-          <a:xfrm>
-            <a:off x="1645920" y="4828032"/>
-            <a:ext cx="2834640" cy="457200"/>
-          </a:xfrm>
-          <a:prstGeom prst="rect">
-            <a:avLst/>
-          </a:prstGeom>
-          <a:noFill/>
-          <a:ln/>
-        </p:spPr>
-        <p:txBody>
-          <a:bodyPr wrap="square" lIns="0" tIns="0" rIns="0" bIns="0" rtlCol="0" anchor="ctr"/>
-          <a:lstStyle/>
-          <a:p>
-            <a:pPr indent="0" marL="0">
-              <a:buNone/>
-            </a:pPr>
-            <a:r>
-              <a:rPr lang="en-US" sz="1800" b="1" dirty="0">
-                <a:solidFill>
-                  <a:srgbClr val="1A1A1A"/>
-                </a:solidFill>
-                <a:latin typeface="Cambria" pitchFamily="34" charset="0"/>
-                <a:ea typeface="Cambria" pitchFamily="34" charset="-122"/>
-                <a:cs typeface="Cambria" pitchFamily="34" charset="-120"/>
-              </a:rPr>
-              <a:t>A careful scrape</a:t>
-            </a:r>
-            <a:endParaRPr lang="en-US" sz="1800" dirty="0"/>
-          </a:p>
-        </p:txBody>
-      </p:sp>
-      <p:sp>
-        <p:nvSpPr>
-          <p:cNvPr id="18" name="Text 16"/>
-          <p:cNvSpPr/>
-          <p:nvPr/>
-        </p:nvSpPr>
-        <p:spPr>
-          <a:xfrm>
-            <a:off x="4572000" y="4846320"/>
-            <a:ext cx="6675120" cy="822960"/>
-          </a:xfrm>
-          <a:prstGeom prst="rect">
-            <a:avLst/>
-          </a:prstGeom>
-          <a:noFill/>
-          <a:ln/>
-        </p:spPr>
-        <p:txBody>
-          <a:bodyPr wrap="square" lIns="0" tIns="0" rIns="0" bIns="0" rtlCol="0" anchor="t"/>
-          <a:lstStyle/>
-          <a:p>
-            <a:pPr indent="0" marL="0">
-              <a:buNone/>
-            </a:pPr>
-            <a:r>
-              <a:rPr lang="en-US" sz="1350" dirty="0">
-                <a:solidFill>
-                  <a:srgbClr val="1A1A1A"/>
-                </a:solidFill>
-                <a:latin typeface="Calibri" pitchFamily="34" charset="0"/>
-                <a:ea typeface="Calibri" pitchFamily="34" charset="-122"/>
-                <a:cs typeface="Calibri" pitchFamily="34" charset="-120"/>
-              </a:rPr>
-              <a:t>Only when there is no file and no API. Slowly, and never republished.</a:t>
-            </a:r>
-            <a:endParaRPr lang="en-US" sz="1350" dirty="0"/>
-          </a:p>
-        </p:txBody>
-      </p:sp>
-      <p:sp>
-        <p:nvSpPr>
-          <p:cNvPr id="19" name="Text 17"/>
-          <p:cNvSpPr/>
-          <p:nvPr/>
-        </p:nvSpPr>
-        <p:spPr>
-          <a:xfrm>
-            <a:off x="640080" y="6263640"/>
-            <a:ext cx="10881360" cy="365760"/>
-          </a:xfrm>
-          <a:prstGeom prst="rect">
-            <a:avLst/>
-          </a:prstGeom>
-          <a:noFill/>
-          <a:ln/>
-        </p:spPr>
-        <p:txBody>
-          <a:bodyPr wrap="square" rtlCol="0" anchor="ctr"/>
-          <a:lstStyle/>
-          <a:p>
-            <a:pPr indent="0" marL="0">
-              <a:buNone/>
-            </a:pPr>
-            <a:r>
-              <a:rPr lang="en-US" sz="1100" i="1" dirty="0">
-                <a:solidFill>
-                  <a:srgbClr val="6B6B63"/>
-                </a:solidFill>
-                <a:latin typeface="Calibri" pitchFamily="34" charset="0"/>
-                <a:ea typeface="Calibri" pitchFamily="34" charset="-122"/>
-                <a:cs typeface="Calibri" pitchFamily="34" charset="-120"/>
-              </a:rPr>
-              <a:t>The licensing line decides which routes are even open to you. That is the next slide.</a:t>
-            </a:r>
-            <a:endParaRPr lang="en-US" sz="1100" dirty="0"/>
           </a:p>
         </p:txBody>
       </p:sp>
@@ -9060,13 +8734,13 @@
             <a:r>
               <a:rPr lang="en-US" sz="1300" b="1" spc="300" kern="0" dirty="0">
                 <a:solidFill>
-                  <a:srgbClr val="2E5F8A"/>
+                  <a:srgbClr val="7A3B2E"/>
                 </a:solidFill>
                 <a:latin typeface="Calibri" pitchFamily="34" charset="0"/>
                 <a:ea typeface="Calibri" pitchFamily="34" charset="-122"/>
                 <a:cs typeface="Calibri" pitchFamily="34" charset="-120"/>
               </a:rPr>
-              <a:t>ROUTE TWO</a:t>
+              <a:t>GETTING THE DATA</a:t>
             </a:r>
             <a:endParaRPr lang="en-US" sz="1300" dirty="0"/>
           </a:p>
@@ -9105,45 +8779,64 @@
                 <a:ea typeface="Cambria" pitchFamily="34" charset="-122"/>
                 <a:cs typeface="Cambria" pitchFamily="34" charset="-120"/>
               </a:rPr>
-              <a:t>Look at one reply before you write the loop</a:t>
+              <a:t>Three routes, in the order you should try them</a:t>
             </a:r>
             <a:endParaRPr lang="en-US" sz="3400" dirty="0"/>
           </a:p>
         </p:txBody>
       </p:sp>
-      <p:pic>
-        <p:nvPicPr>
-          <p:cNvPr id="4" name="Image 0" descr="/tmp/figs/w4_api_anatomy.png">    </p:cNvPr>
-          <p:cNvPicPr>
-            <a:picLocks noChangeAspect="1"/>
-          </p:cNvPicPr>
-          <p:nvPr/>
-        </p:nvPicPr>
-        <p:blipFill>
-          <a:blip r:embed="rId1"/>
-          <a:srcRect l="0" r="0" t="0" b="0"/>
-          <a:stretch/>
-        </p:blipFill>
-        <p:spPr>
-          <a:xfrm>
-            <a:off x="640080" y="1874520"/>
-            <a:ext cx="10881360" cy="3566160"/>
-          </a:xfrm>
-          <a:prstGeom prst="rect">
-            <a:avLst/>
-          </a:prstGeom>
-        </p:spPr>
-      </p:pic>
-      <p:sp>
-        <p:nvSpPr>
-          <p:cNvPr id="5" name="Text 2"/>
-          <p:cNvSpPr/>
-          <p:nvPr/>
-        </p:nvSpPr>
-        <p:spPr>
-          <a:xfrm>
-            <a:off x="640080" y="5897880"/>
-            <a:ext cx="10881360" cy="411480"/>
+      <p:sp>
+        <p:nvSpPr>
+          <p:cNvPr id="4" name="Shape 2"/>
+          <p:cNvSpPr/>
+          <p:nvPr/>
+        </p:nvSpPr>
+        <p:spPr>
+          <a:xfrm>
+            <a:off x="640080" y="2011680"/>
+            <a:ext cx="10881360" cy="1143000"/>
+          </a:xfrm>
+          <a:prstGeom prst="roundRect">
+            <a:avLst>
+              <a:gd name="adj" fmla="val 8000"/>
+            </a:avLst>
+          </a:prstGeom>
+          <a:solidFill>
+            <a:srgbClr val="F4EEE8"/>
+          </a:solidFill>
+          <a:ln/>
+        </p:spPr>
+      </p:sp>
+      <p:sp>
+        <p:nvSpPr>
+          <p:cNvPr id="5" name="Shape 3"/>
+          <p:cNvSpPr/>
+          <p:nvPr/>
+        </p:nvSpPr>
+        <p:spPr>
+          <a:xfrm>
+            <a:off x="914400" y="2304288"/>
+            <a:ext cx="548640" cy="548640"/>
+          </a:xfrm>
+          <a:prstGeom prst="ellipse">
+            <a:avLst/>
+          </a:prstGeom>
+          <a:solidFill>
+            <a:srgbClr val="3F6F5F"/>
+          </a:solidFill>
+          <a:ln/>
+        </p:spPr>
+      </p:sp>
+      <p:sp>
+        <p:nvSpPr>
+          <p:cNvPr id="6" name="Text 4"/>
+          <p:cNvSpPr/>
+          <p:nvPr/>
+        </p:nvSpPr>
+        <p:spPr>
+          <a:xfrm>
+            <a:off x="914400" y="2304288"/>
+            <a:ext cx="548640" cy="548640"/>
           </a:xfrm>
           <a:prstGeom prst="rect">
             <a:avLst/>
@@ -9155,60 +8848,456 @@
           <a:bodyPr wrap="square" rtlCol="0" anchor="ctr"/>
           <a:lstStyle/>
           <a:p>
-            <a:pPr indent="0" marL="0">
-              <a:buNone/>
-            </a:pPr>
-            <a:r>
-              <a:rPr lang="en-US" sz="1600" i="1" dirty="0">
-                <a:solidFill>
-                  <a:srgbClr val="1A1A1A"/>
+            <a:pPr algn="ctr" indent="0" marL="0">
+              <a:buNone/>
+            </a:pPr>
+            <a:r>
+              <a:rPr lang="en-US" sz="1900" b="1" dirty="0">
+                <a:solidFill>
+                  <a:srgbClr val="FFFFFF"/>
                 </a:solidFill>
                 <a:latin typeface="Cambria" pitchFamily="34" charset="0"/>
                 <a:ea typeface="Cambria" pitchFamily="34" charset="-122"/>
                 <a:cs typeface="Cambria" pitchFamily="34" charset="-120"/>
               </a:rPr>
-              <a:t>Ask for one item. The pagination block tells you how big the job is. The data block is your rows.</a:t>
-            </a:r>
-            <a:endParaRPr lang="en-US" sz="1600" dirty="0"/>
-          </a:p>
-        </p:txBody>
-      </p:sp>
-      <p:sp>
-        <p:nvSpPr>
-          <p:cNvPr id="6" name="Text 3"/>
-          <p:cNvSpPr/>
-          <p:nvPr/>
-        </p:nvSpPr>
-        <p:spPr>
-          <a:xfrm>
-            <a:off x="640080" y="6355080"/>
-            <a:ext cx="10881360" cy="320040"/>
-          </a:xfrm>
-          <a:prstGeom prst="rect">
-            <a:avLst/>
-          </a:prstGeom>
-          <a:noFill/>
-          <a:ln/>
-        </p:spPr>
-        <p:txBody>
-          <a:bodyPr wrap="square" rtlCol="0" anchor="ctr"/>
-          <a:lstStyle/>
-          <a:p>
-            <a:pPr indent="0" marL="0">
-              <a:buNone/>
-            </a:pPr>
-            <a:r>
-              <a:rPr lang="en-US" sz="1000" dirty="0">
-                <a:solidFill>
-                  <a:srgbClr val="6B6B63"/>
+              <a:t>1</a:t>
+            </a:r>
+            <a:endParaRPr lang="en-US" sz="1900" dirty="0"/>
+          </a:p>
+        </p:txBody>
+      </p:sp>
+      <p:sp>
+        <p:nvSpPr>
+          <p:cNvPr id="7" name="Text 5"/>
+          <p:cNvSpPr/>
+          <p:nvPr/>
+        </p:nvSpPr>
+        <p:spPr>
+          <a:xfrm>
+            <a:off x="1645920" y="2176272"/>
+            <a:ext cx="2834640" cy="457200"/>
+          </a:xfrm>
+          <a:prstGeom prst="rect">
+            <a:avLst/>
+          </a:prstGeom>
+          <a:noFill/>
+          <a:ln/>
+        </p:spPr>
+        <p:txBody>
+          <a:bodyPr wrap="square" lIns="0" tIns="0" rIns="0" bIns="0" rtlCol="0" anchor="ctr"/>
+          <a:lstStyle/>
+          <a:p>
+            <a:pPr indent="0" marL="0">
+              <a:buNone/>
+            </a:pPr>
+            <a:r>
+              <a:rPr lang="en-US" sz="1800" b="1" dirty="0">
+                <a:solidFill>
+                  <a:srgbClr val="1A1A1A"/>
+                </a:solidFill>
+                <a:latin typeface="Cambria" pitchFamily="34" charset="0"/>
+                <a:ea typeface="Cambria" pitchFamily="34" charset="-122"/>
+                <a:cs typeface="Cambria" pitchFamily="34" charset="-120"/>
+              </a:rPr>
+              <a:t>A prepared file</a:t>
+            </a:r>
+            <a:endParaRPr lang="en-US" sz="1800" dirty="0"/>
+          </a:p>
+        </p:txBody>
+      </p:sp>
+      <p:sp>
+        <p:nvSpPr>
+          <p:cNvPr id="8" name="Text 6"/>
+          <p:cNvSpPr/>
+          <p:nvPr/>
+        </p:nvSpPr>
+        <p:spPr>
+          <a:xfrm>
+            <a:off x="4572000" y="2194560"/>
+            <a:ext cx="6675120" cy="822960"/>
+          </a:xfrm>
+          <a:prstGeom prst="rect">
+            <a:avLst/>
+          </a:prstGeom>
+          <a:noFill/>
+          <a:ln/>
+        </p:spPr>
+        <p:txBody>
+          <a:bodyPr wrap="square" lIns="0" tIns="0" rIns="0" bIns="0" rtlCol="0" anchor="t"/>
+          <a:lstStyle/>
+          <a:p>
+            <a:pPr indent="0" marL="0">
+              <a:buNone/>
+            </a:pPr>
+            <a:r>
+              <a:rPr lang="en-US" sz="1350" dirty="0">
+                <a:solidFill>
+                  <a:srgbClr val="1A1A1A"/>
                 </a:solidFill>
                 <a:latin typeface="Calibri" pitchFamily="34" charset="0"/>
                 <a:ea typeface="Calibri" pitchFamily="34" charset="-122"/>
                 <a:cs typeface="Calibri" pitchFamily="34" charset="-120"/>
               </a:rPr>
-              <a:t>A live call made while this deck was built: 132,681 works match "landscape", handed over two at a time.</a:t>
-            </a:r>
-            <a:endParaRPr lang="en-US" sz="1000" dirty="0"/>
+              <a:t>pd.read_csv(url) · gdown · load_dataset(). Most projects should stop here.</a:t>
+            </a:r>
+            <a:endParaRPr lang="en-US" sz="1350" dirty="0"/>
+          </a:p>
+        </p:txBody>
+      </p:sp>
+      <p:sp>
+        <p:nvSpPr>
+          <p:cNvPr id="9" name="Shape 7"/>
+          <p:cNvSpPr/>
+          <p:nvPr/>
+        </p:nvSpPr>
+        <p:spPr>
+          <a:xfrm>
+            <a:off x="640080" y="3337560"/>
+            <a:ext cx="10881360" cy="1143000"/>
+          </a:xfrm>
+          <a:prstGeom prst="roundRect">
+            <a:avLst>
+              <a:gd name="adj" fmla="val 8000"/>
+            </a:avLst>
+          </a:prstGeom>
+          <a:solidFill>
+            <a:srgbClr val="F4EEE8"/>
+          </a:solidFill>
+          <a:ln/>
+        </p:spPr>
+      </p:sp>
+      <p:sp>
+        <p:nvSpPr>
+          <p:cNvPr id="10" name="Shape 8"/>
+          <p:cNvSpPr/>
+          <p:nvPr/>
+        </p:nvSpPr>
+        <p:spPr>
+          <a:xfrm>
+            <a:off x="914400" y="3630168"/>
+            <a:ext cx="548640" cy="548640"/>
+          </a:xfrm>
+          <a:prstGeom prst="ellipse">
+            <a:avLst/>
+          </a:prstGeom>
+          <a:solidFill>
+            <a:srgbClr val="2E5F8A"/>
+          </a:solidFill>
+          <a:ln/>
+        </p:spPr>
+      </p:sp>
+      <p:sp>
+        <p:nvSpPr>
+          <p:cNvPr id="11" name="Text 9"/>
+          <p:cNvSpPr/>
+          <p:nvPr/>
+        </p:nvSpPr>
+        <p:spPr>
+          <a:xfrm>
+            <a:off x="914400" y="3630168"/>
+            <a:ext cx="548640" cy="548640"/>
+          </a:xfrm>
+          <a:prstGeom prst="rect">
+            <a:avLst/>
+          </a:prstGeom>
+          <a:noFill/>
+          <a:ln/>
+        </p:spPr>
+        <p:txBody>
+          <a:bodyPr wrap="square" rtlCol="0" anchor="ctr"/>
+          <a:lstStyle/>
+          <a:p>
+            <a:pPr algn="ctr" indent="0" marL="0">
+              <a:buNone/>
+            </a:pPr>
+            <a:r>
+              <a:rPr lang="en-US" sz="1900" b="1" dirty="0">
+                <a:solidFill>
+                  <a:srgbClr val="FFFFFF"/>
+                </a:solidFill>
+                <a:latin typeface="Cambria" pitchFamily="34" charset="0"/>
+                <a:ea typeface="Cambria" pitchFamily="34" charset="-122"/>
+                <a:cs typeface="Cambria" pitchFamily="34" charset="-120"/>
+              </a:rPr>
+              <a:t>2</a:t>
+            </a:r>
+            <a:endParaRPr lang="en-US" sz="1900" dirty="0"/>
+          </a:p>
+        </p:txBody>
+      </p:sp>
+      <p:sp>
+        <p:nvSpPr>
+          <p:cNvPr id="12" name="Text 10"/>
+          <p:cNvSpPr/>
+          <p:nvPr/>
+        </p:nvSpPr>
+        <p:spPr>
+          <a:xfrm>
+            <a:off x="1645920" y="3502152"/>
+            <a:ext cx="2834640" cy="457200"/>
+          </a:xfrm>
+          <a:prstGeom prst="rect">
+            <a:avLst/>
+          </a:prstGeom>
+          <a:noFill/>
+          <a:ln/>
+        </p:spPr>
+        <p:txBody>
+          <a:bodyPr wrap="square" lIns="0" tIns="0" rIns="0" bIns="0" rtlCol="0" anchor="ctr"/>
+          <a:lstStyle/>
+          <a:p>
+            <a:pPr indent="0" marL="0">
+              <a:buNone/>
+            </a:pPr>
+            <a:r>
+              <a:rPr lang="en-US" sz="1800" b="1" dirty="0">
+                <a:solidFill>
+                  <a:srgbClr val="1A1A1A"/>
+                </a:solidFill>
+                <a:latin typeface="Cambria" pitchFamily="34" charset="0"/>
+                <a:ea typeface="Cambria" pitchFamily="34" charset="-122"/>
+                <a:cs typeface="Cambria" pitchFamily="34" charset="-120"/>
+              </a:rPr>
+              <a:t>An API</a:t>
+            </a:r>
+            <a:endParaRPr lang="en-US" sz="1800" dirty="0"/>
+          </a:p>
+        </p:txBody>
+      </p:sp>
+      <p:sp>
+        <p:nvSpPr>
+          <p:cNvPr id="13" name="Text 11"/>
+          <p:cNvSpPr/>
+          <p:nvPr/>
+        </p:nvSpPr>
+        <p:spPr>
+          <a:xfrm>
+            <a:off x="4572000" y="3520440"/>
+            <a:ext cx="6675120" cy="822960"/>
+          </a:xfrm>
+          <a:prstGeom prst="rect">
+            <a:avLst/>
+          </a:prstGeom>
+          <a:noFill/>
+          <a:ln/>
+        </p:spPr>
+        <p:txBody>
+          <a:bodyPr wrap="square" lIns="0" tIns="0" rIns="0" bIns="0" rtlCol="0" anchor="t"/>
+          <a:lstStyle/>
+          <a:p>
+            <a:pPr indent="0" marL="0">
+              <a:buNone/>
+            </a:pPr>
+            <a:r>
+              <a:rPr lang="en-US" sz="1350" dirty="0">
+                <a:solidFill>
+                  <a:srgbClr val="1A1A1A"/>
+                </a:solidFill>
+                <a:latin typeface="Calibri" pitchFamily="34" charset="0"/>
+                <a:ea typeface="Calibri" pitchFamily="34" charset="-122"/>
+                <a:cs typeface="Calibri" pitchFamily="34" charset="-120"/>
+              </a:rPr>
+              <a:t>A documented URL that returns JSON. Four words: endpoint, key, pagination, rate limit.</a:t>
+            </a:r>
+            <a:endParaRPr lang="en-US" sz="1350" dirty="0"/>
+          </a:p>
+        </p:txBody>
+      </p:sp>
+      <p:sp>
+        <p:nvSpPr>
+          <p:cNvPr id="14" name="Shape 12"/>
+          <p:cNvSpPr/>
+          <p:nvPr/>
+        </p:nvSpPr>
+        <p:spPr>
+          <a:xfrm>
+            <a:off x="640080" y="4663440"/>
+            <a:ext cx="10881360" cy="1143000"/>
+          </a:xfrm>
+          <a:prstGeom prst="roundRect">
+            <a:avLst>
+              <a:gd name="adj" fmla="val 8000"/>
+            </a:avLst>
+          </a:prstGeom>
+          <a:solidFill>
+            <a:srgbClr val="F4EEE8"/>
+          </a:solidFill>
+          <a:ln/>
+        </p:spPr>
+      </p:sp>
+      <p:sp>
+        <p:nvSpPr>
+          <p:cNvPr id="15" name="Shape 13"/>
+          <p:cNvSpPr/>
+          <p:nvPr/>
+        </p:nvSpPr>
+        <p:spPr>
+          <a:xfrm>
+            <a:off x="914400" y="4956048"/>
+            <a:ext cx="548640" cy="548640"/>
+          </a:xfrm>
+          <a:prstGeom prst="ellipse">
+            <a:avLst/>
+          </a:prstGeom>
+          <a:solidFill>
+            <a:srgbClr val="7A3B2E"/>
+          </a:solidFill>
+          <a:ln/>
+        </p:spPr>
+      </p:sp>
+      <p:sp>
+        <p:nvSpPr>
+          <p:cNvPr id="16" name="Text 14"/>
+          <p:cNvSpPr/>
+          <p:nvPr/>
+        </p:nvSpPr>
+        <p:spPr>
+          <a:xfrm>
+            <a:off x="914400" y="4956048"/>
+            <a:ext cx="548640" cy="548640"/>
+          </a:xfrm>
+          <a:prstGeom prst="rect">
+            <a:avLst/>
+          </a:prstGeom>
+          <a:noFill/>
+          <a:ln/>
+        </p:spPr>
+        <p:txBody>
+          <a:bodyPr wrap="square" rtlCol="0" anchor="ctr"/>
+          <a:lstStyle/>
+          <a:p>
+            <a:pPr algn="ctr" indent="0" marL="0">
+              <a:buNone/>
+            </a:pPr>
+            <a:r>
+              <a:rPr lang="en-US" sz="1900" b="1" dirty="0">
+                <a:solidFill>
+                  <a:srgbClr val="FFFFFF"/>
+                </a:solidFill>
+                <a:latin typeface="Cambria" pitchFamily="34" charset="0"/>
+                <a:ea typeface="Cambria" pitchFamily="34" charset="-122"/>
+                <a:cs typeface="Cambria" pitchFamily="34" charset="-120"/>
+              </a:rPr>
+              <a:t>3</a:t>
+            </a:r>
+            <a:endParaRPr lang="en-US" sz="1900" dirty="0"/>
+          </a:p>
+        </p:txBody>
+      </p:sp>
+      <p:sp>
+        <p:nvSpPr>
+          <p:cNvPr id="17" name="Text 15"/>
+          <p:cNvSpPr/>
+          <p:nvPr/>
+        </p:nvSpPr>
+        <p:spPr>
+          <a:xfrm>
+            <a:off x="1645920" y="4828032"/>
+            <a:ext cx="2834640" cy="457200"/>
+          </a:xfrm>
+          <a:prstGeom prst="rect">
+            <a:avLst/>
+          </a:prstGeom>
+          <a:noFill/>
+          <a:ln/>
+        </p:spPr>
+        <p:txBody>
+          <a:bodyPr wrap="square" lIns="0" tIns="0" rIns="0" bIns="0" rtlCol="0" anchor="ctr"/>
+          <a:lstStyle/>
+          <a:p>
+            <a:pPr indent="0" marL="0">
+              <a:buNone/>
+            </a:pPr>
+            <a:r>
+              <a:rPr lang="en-US" sz="1800" b="1" dirty="0">
+                <a:solidFill>
+                  <a:srgbClr val="1A1A1A"/>
+                </a:solidFill>
+                <a:latin typeface="Cambria" pitchFamily="34" charset="0"/>
+                <a:ea typeface="Cambria" pitchFamily="34" charset="-122"/>
+                <a:cs typeface="Cambria" pitchFamily="34" charset="-120"/>
+              </a:rPr>
+              <a:t>A careful scrape</a:t>
+            </a:r>
+            <a:endParaRPr lang="en-US" sz="1800" dirty="0"/>
+          </a:p>
+        </p:txBody>
+      </p:sp>
+      <p:sp>
+        <p:nvSpPr>
+          <p:cNvPr id="18" name="Text 16"/>
+          <p:cNvSpPr/>
+          <p:nvPr/>
+        </p:nvSpPr>
+        <p:spPr>
+          <a:xfrm>
+            <a:off x="4572000" y="4846320"/>
+            <a:ext cx="6675120" cy="822960"/>
+          </a:xfrm>
+          <a:prstGeom prst="rect">
+            <a:avLst/>
+          </a:prstGeom>
+          <a:noFill/>
+          <a:ln/>
+        </p:spPr>
+        <p:txBody>
+          <a:bodyPr wrap="square" lIns="0" tIns="0" rIns="0" bIns="0" rtlCol="0" anchor="t"/>
+          <a:lstStyle/>
+          <a:p>
+            <a:pPr indent="0" marL="0">
+              <a:buNone/>
+            </a:pPr>
+            <a:r>
+              <a:rPr lang="en-US" sz="1350" dirty="0">
+                <a:solidFill>
+                  <a:srgbClr val="1A1A1A"/>
+                </a:solidFill>
+                <a:latin typeface="Calibri" pitchFamily="34" charset="0"/>
+                <a:ea typeface="Calibri" pitchFamily="34" charset="-122"/>
+                <a:cs typeface="Calibri" pitchFamily="34" charset="-120"/>
+              </a:rPr>
+              <a:t>Only when there is no file and no API. Slowly, and never republished.</a:t>
+            </a:r>
+            <a:endParaRPr lang="en-US" sz="1350" dirty="0"/>
+          </a:p>
+        </p:txBody>
+      </p:sp>
+      <p:sp>
+        <p:nvSpPr>
+          <p:cNvPr id="19" name="Text 17"/>
+          <p:cNvSpPr/>
+          <p:nvPr/>
+        </p:nvSpPr>
+        <p:spPr>
+          <a:xfrm>
+            <a:off x="640080" y="6263640"/>
+            <a:ext cx="10881360" cy="365760"/>
+          </a:xfrm>
+          <a:prstGeom prst="rect">
+            <a:avLst/>
+          </a:prstGeom>
+          <a:noFill/>
+          <a:ln/>
+        </p:spPr>
+        <p:txBody>
+          <a:bodyPr wrap="square" rtlCol="0" anchor="ctr"/>
+          <a:lstStyle/>
+          <a:p>
+            <a:pPr indent="0" marL="0">
+              <a:buNone/>
+            </a:pPr>
+            <a:r>
+              <a:rPr lang="en-US" sz="1100" i="1" dirty="0">
+                <a:solidFill>
+                  <a:srgbClr val="6B6B63"/>
+                </a:solidFill>
+                <a:latin typeface="Calibri" pitchFamily="34" charset="0"/>
+                <a:ea typeface="Calibri" pitchFamily="34" charset="-122"/>
+                <a:cs typeface="Calibri" pitchFamily="34" charset="-120"/>
+              </a:rPr>
+              <a:t>The licensing line decides which routes are even open to you. That is the next slide.</a:t>
+            </a:r>
+            <a:endParaRPr lang="en-US" sz="1100" dirty="0"/>
           </a:p>
         </p:txBody>
       </p:sp>
@@ -9277,7 +9366,7 @@
                 <a:ea typeface="Calibri" pitchFamily="34" charset="-122"/>
                 <a:cs typeface="Calibri" pitchFamily="34" charset="-120"/>
               </a:rPr>
-              <a:t>ROUTE TWO, LIVE</a:t>
+              <a:t>ROUTE TWO</a:t>
             </a:r>
             <a:endParaRPr lang="en-US" sz="1300" dirty="0"/>
           </a:p>
@@ -9316,7 +9405,7 @@
                 <a:ea typeface="Cambria" pitchFamily="34" charset="-122"/>
                 <a:cs typeface="Cambria" pitchFamily="34" charset="-120"/>
               </a:rPr>
-              <a:t>A URL, some JSON, and then a table</a:t>
+              <a:t>Look at one reply before you write the loop</a:t>
             </a:r>
             <a:endParaRPr lang="en-US" sz="3400" dirty="0"/>
           </a:p>
@@ -9324,7 +9413,7 @@
       </p:sp>
       <p:pic>
         <p:nvPicPr>
-          <p:cNvPr id="4" name="Image 0" descr="/tmp/figs/w4_api.png">    </p:cNvPr>
+          <p:cNvPr id="4" name="Image 0" descr="/tmp/figs/w4_api_anatomy.png">    </p:cNvPr>
           <p:cNvPicPr>
             <a:picLocks noChangeAspect="1"/>
           </p:cNvPicPr>
@@ -9337,8 +9426,8 @@
         </p:blipFill>
         <p:spPr>
           <a:xfrm>
-            <a:off x="1097280" y="1920240"/>
-            <a:ext cx="9966960" cy="3749040"/>
+            <a:off x="640080" y="1874520"/>
+            <a:ext cx="10881360" cy="3566160"/>
           </a:xfrm>
           <a:prstGeom prst="rect">
             <a:avLst/>
@@ -9378,7 +9467,7 @@
                 <a:ea typeface="Cambria" pitchFamily="34" charset="-122"/>
                 <a:cs typeface="Cambria" pitchFamily="34" charset="-120"/>
               </a:rPr>
-              <a:t>An endpoint is a URL that answers with data. A key is a name badge. Pagination hands you a page at a time.</a:t>
+              <a:t>Ask for one item. The pagination block tells you how big the job is. The data block is your rows.</a:t>
             </a:r>
             <a:endParaRPr lang="en-US" sz="1600" dirty="0"/>
           </a:p>
@@ -9417,7 +9506,7 @@
                 <a:ea typeface="Calibri" pitchFamily="34" charset="-122"/>
                 <a:cs typeface="Calibri" pitchFamily="34" charset="-120"/>
               </a:rPr>
-              <a:t>Left panel: a real response, live from api.artic.edu. The AI writes the three lines that make the table.</a:t>
+              <a:t>A live call made while this deck was built: 132,681 works match "landscape", handed over two at a time.</a:t>
             </a:r>
             <a:endParaRPr lang="en-US" sz="1000" dirty="0"/>
           </a:p>
@@ -9482,13 +9571,13 @@
             <a:r>
               <a:rPr lang="en-US" sz="1300" b="1" spc="300" kern="0" dirty="0">
                 <a:solidFill>
-                  <a:srgbClr val="B9852F"/>
+                  <a:srgbClr val="2E5F8A"/>
                 </a:solidFill>
                 <a:latin typeface="Calibri" pitchFamily="34" charset="0"/>
                 <a:ea typeface="Calibri" pitchFamily="34" charset="-122"/>
                 <a:cs typeface="Calibri" pitchFamily="34" charset="-120"/>
               </a:rPr>
-              <a:t>EVERY API IS SOMEBODY'S DESIGN</a:t>
+              <a:t>ROUTE TWO, LIVE</a:t>
             </a:r>
             <a:endParaRPr lang="en-US" sz="1300" dirty="0"/>
           </a:p>
@@ -9527,7 +9616,7 @@
                 <a:ea typeface="Cambria" pitchFamily="34" charset="-122"/>
                 <a:cs typeface="Cambria" pitchFamily="34" charset="-120"/>
               </a:rPr>
-              <a:t>Two museums, two shapes</a:t>
+              <a:t>A URL, some JSON, and then a table</a:t>
             </a:r>
             <a:endParaRPr lang="en-US" sz="3400" dirty="0"/>
           </a:p>
@@ -9535,7 +9624,7 @@
       </p:sp>
       <p:pic>
         <p:nvPicPr>
-          <p:cNvPr id="4" name="Image 0" descr="/tmp/figs/w4_api_shapes.png">    </p:cNvPr>
+          <p:cNvPr id="4" name="Image 0" descr="/tmp/figs/w4_api.png">    </p:cNvPr>
           <p:cNvPicPr>
             <a:picLocks noChangeAspect="1"/>
           </p:cNvPicPr>
@@ -9548,8 +9637,8 @@
         </p:blipFill>
         <p:spPr>
           <a:xfrm>
-            <a:off x="1005840" y="1828800"/>
-            <a:ext cx="10149840" cy="3840480"/>
+            <a:off x="1097280" y="1920240"/>
+            <a:ext cx="9966960" cy="3749040"/>
           </a:xfrm>
           <a:prstGeom prst="rect">
             <a:avLst/>
@@ -9589,7 +9678,7 @@
                 <a:ea typeface="Cambria" pitchFamily="34" charset="-122"/>
                 <a:cs typeface="Cambria" pitchFamily="34" charset="-120"/>
               </a:rPr>
-              <a:t>One returns rows. The other returns ID numbers, and every row after that is another request.</a:t>
+              <a:t>An endpoint is a URL that answers with data. A key is a name badge. Pagination hands you a page at a time.</a:t>
             </a:r>
             <a:endParaRPr lang="en-US" sz="1600" dirty="0"/>
           </a:p>
@@ -9628,7 +9717,7 @@
                 <a:ea typeface="Calibri" pitchFamily="34" charset="-122"/>
                 <a:cs typeface="Calibri" pitchFamily="34" charset="-120"/>
               </a:rPr>
-              <a:t>Both queried live for this slide. Work out which kind you have before you estimate how long it takes.</a:t>
+              <a:t>Left panel: a real response, live from api.artic.edu. The AI writes the three lines that make the table.</a:t>
             </a:r>
             <a:endParaRPr lang="en-US" sz="1000" dirty="0"/>
           </a:p>
@@ -9693,13 +9782,13 @@
             <a:r>
               <a:rPr lang="en-US" sz="1300" b="1" spc="300" kern="0" dirty="0">
                 <a:solidFill>
-                  <a:srgbClr val="7A3B2E"/>
+                  <a:srgbClr val="B9852F"/>
                 </a:solidFill>
                 <a:latin typeface="Calibri" pitchFamily="34" charset="0"/>
                 <a:ea typeface="Calibri" pitchFamily="34" charset="-122"/>
                 <a:cs typeface="Calibri" pitchFamily="34" charset="-120"/>
               </a:rPr>
-              <a:t>ROUTE THREE</a:t>
+              <a:t>EVERY API IS SOMEBODY'S DESIGN</a:t>
             </a:r>
             <a:endParaRPr lang="en-US" sz="1300" dirty="0"/>
           </a:p>
@@ -9738,448 +9827,110 @@
                 <a:ea typeface="Cambria" pitchFamily="34" charset="-122"/>
                 <a:cs typeface="Cambria" pitchFamily="34" charset="-120"/>
               </a:rPr>
-              <a:t>Scraping, and the four things that come with it</a:t>
+              <a:t>Two museums, two shapes</a:t>
             </a:r>
             <a:endParaRPr lang="en-US" sz="3400" dirty="0"/>
           </a:p>
         </p:txBody>
       </p:sp>
-      <p:sp>
-        <p:nvSpPr>
-          <p:cNvPr id="4" name="Shape 2"/>
-          <p:cNvSpPr/>
-          <p:nvPr/>
-        </p:nvSpPr>
-        <p:spPr>
-          <a:xfrm>
-            <a:off x="640080" y="2011680"/>
-            <a:ext cx="10881360" cy="914400"/>
-          </a:xfrm>
-          <a:prstGeom prst="roundRect">
-            <a:avLst>
-              <a:gd name="adj" fmla="val 10000"/>
-            </a:avLst>
-          </a:prstGeom>
-          <a:solidFill>
-            <a:srgbClr val="F4EEE8"/>
-          </a:solidFill>
-          <a:ln/>
-        </p:spPr>
-      </p:sp>
-      <p:sp>
-        <p:nvSpPr>
-          <p:cNvPr id="5" name="Text 3"/>
-          <p:cNvSpPr/>
-          <p:nvPr/>
-        </p:nvSpPr>
-        <p:spPr>
-          <a:xfrm>
-            <a:off x="960120" y="2103120"/>
-            <a:ext cx="4023360" cy="731520"/>
-          </a:xfrm>
-          <a:prstGeom prst="rect">
-            <a:avLst/>
-          </a:prstGeom>
-          <a:noFill/>
-          <a:ln/>
-        </p:spPr>
-        <p:txBody>
-          <a:bodyPr wrap="square" lIns="0" tIns="0" rIns="0" bIns="0" rtlCol="0" anchor="ctr"/>
-          <a:lstStyle/>
-          <a:p>
-            <a:pPr indent="0" marL="0">
-              <a:buNone/>
-            </a:pPr>
-            <a:r>
-              <a:rPr lang="en-US" sz="1700" b="1" dirty="0">
-                <a:solidFill>
-                  <a:srgbClr val="7A3B2E"/>
+      <p:pic>
+        <p:nvPicPr>
+          <p:cNvPr id="4" name="Image 0" descr="/tmp/figs/w4_api_shapes.png">    </p:cNvPr>
+          <p:cNvPicPr>
+            <a:picLocks noChangeAspect="1"/>
+          </p:cNvPicPr>
+          <p:nvPr/>
+        </p:nvPicPr>
+        <p:blipFill>
+          <a:blip r:embed="rId1"/>
+          <a:srcRect l="0" r="0" t="0" b="0"/>
+          <a:stretch/>
+        </p:blipFill>
+        <p:spPr>
+          <a:xfrm>
+            <a:off x="1005840" y="1828800"/>
+            <a:ext cx="10149840" cy="3840480"/>
+          </a:xfrm>
+          <a:prstGeom prst="rect">
+            <a:avLst/>
+          </a:prstGeom>
+        </p:spPr>
+      </p:pic>
+      <p:sp>
+        <p:nvSpPr>
+          <p:cNvPr id="5" name="Text 2"/>
+          <p:cNvSpPr/>
+          <p:nvPr/>
+        </p:nvSpPr>
+        <p:spPr>
+          <a:xfrm>
+            <a:off x="640080" y="5897880"/>
+            <a:ext cx="10881360" cy="411480"/>
+          </a:xfrm>
+          <a:prstGeom prst="rect">
+            <a:avLst/>
+          </a:prstGeom>
+          <a:noFill/>
+          <a:ln/>
+        </p:spPr>
+        <p:txBody>
+          <a:bodyPr wrap="square" rtlCol="0" anchor="ctr"/>
+          <a:lstStyle/>
+          <a:p>
+            <a:pPr indent="0" marL="0">
+              <a:buNone/>
+            </a:pPr>
+            <a:r>
+              <a:rPr lang="en-US" sz="1600" i="1" dirty="0">
+                <a:solidFill>
+                  <a:srgbClr val="1A1A1A"/>
                 </a:solidFill>
                 <a:latin typeface="Cambria" pitchFamily="34" charset="0"/>
                 <a:ea typeface="Cambria" pitchFamily="34" charset="-122"/>
                 <a:cs typeface="Cambria" pitchFamily="34" charset="-120"/>
               </a:rPr>
-              <a:t>Read robots.txt and the terms</a:t>
-            </a:r>
-            <a:endParaRPr lang="en-US" sz="1700" dirty="0"/>
-          </a:p>
-        </p:txBody>
-      </p:sp>
-      <p:sp>
-        <p:nvSpPr>
-          <p:cNvPr id="6" name="Text 4"/>
-          <p:cNvSpPr/>
-          <p:nvPr/>
-        </p:nvSpPr>
-        <p:spPr>
-          <a:xfrm>
-            <a:off x="5120640" y="2103120"/>
-            <a:ext cx="6126480" cy="731520"/>
-          </a:xfrm>
-          <a:prstGeom prst="rect">
-            <a:avLst/>
-          </a:prstGeom>
-          <a:noFill/>
-          <a:ln/>
-        </p:spPr>
-        <p:txBody>
-          <a:bodyPr wrap="square" lIns="0" tIns="0" rIns="0" bIns="0" rtlCol="0" anchor="ctr"/>
-          <a:lstStyle/>
-          <a:p>
-            <a:pPr indent="0" marL="0">
-              <a:buNone/>
-            </a:pPr>
-            <a:r>
-              <a:rPr lang="en-US" sz="1350" dirty="0">
-                <a:solidFill>
-                  <a:srgbClr val="1A1A1A"/>
+              <a:t>One returns rows. The other returns ID numbers, and every row after that is another request.</a:t>
+            </a:r>
+            <a:endParaRPr lang="en-US" sz="1600" dirty="0"/>
+          </a:p>
+        </p:txBody>
+      </p:sp>
+      <p:sp>
+        <p:nvSpPr>
+          <p:cNvPr id="6" name="Text 3"/>
+          <p:cNvSpPr/>
+          <p:nvPr/>
+        </p:nvSpPr>
+        <p:spPr>
+          <a:xfrm>
+            <a:off x="640080" y="6355080"/>
+            <a:ext cx="10881360" cy="320040"/>
+          </a:xfrm>
+          <a:prstGeom prst="rect">
+            <a:avLst/>
+          </a:prstGeom>
+          <a:noFill/>
+          <a:ln/>
+        </p:spPr>
+        <p:txBody>
+          <a:bodyPr wrap="square" rtlCol="0" anchor="ctr"/>
+          <a:lstStyle/>
+          <a:p>
+            <a:pPr indent="0" marL="0">
+              <a:buNone/>
+            </a:pPr>
+            <a:r>
+              <a:rPr lang="en-US" sz="1000" dirty="0">
+                <a:solidFill>
+                  <a:srgbClr val="6B6B63"/>
                 </a:solidFill>
                 <a:latin typeface="Calibri" pitchFamily="34" charset="0"/>
                 <a:ea typeface="Calibri" pitchFamily="34" charset="-122"/>
                 <a:cs typeface="Calibri" pitchFamily="34" charset="-120"/>
               </a:rPr>
-              <a:t>before the first request, not after the complaint.</a:t>
-            </a:r>
-            <a:endParaRPr lang="en-US" sz="1350" dirty="0"/>
-          </a:p>
-        </p:txBody>
-      </p:sp>
-      <p:sp>
-        <p:nvSpPr>
-          <p:cNvPr id="7" name="Shape 5"/>
-          <p:cNvSpPr/>
-          <p:nvPr/>
-        </p:nvSpPr>
-        <p:spPr>
-          <a:xfrm>
-            <a:off x="640080" y="3063240"/>
-            <a:ext cx="10881360" cy="914400"/>
-          </a:xfrm>
-          <a:prstGeom prst="roundRect">
-            <a:avLst>
-              <a:gd name="adj" fmla="val 10000"/>
-            </a:avLst>
-          </a:prstGeom>
-          <a:solidFill>
-            <a:srgbClr val="F4EEE8"/>
-          </a:solidFill>
-          <a:ln/>
-        </p:spPr>
-      </p:sp>
-      <p:sp>
-        <p:nvSpPr>
-          <p:cNvPr id="8" name="Text 6"/>
-          <p:cNvSpPr/>
-          <p:nvPr/>
-        </p:nvSpPr>
-        <p:spPr>
-          <a:xfrm>
-            <a:off x="960120" y="3154680"/>
-            <a:ext cx="4023360" cy="731520"/>
-          </a:xfrm>
-          <a:prstGeom prst="rect">
-            <a:avLst/>
-          </a:prstGeom>
-          <a:noFill/>
-          <a:ln/>
-        </p:spPr>
-        <p:txBody>
-          <a:bodyPr wrap="square" lIns="0" tIns="0" rIns="0" bIns="0" rtlCol="0" anchor="ctr"/>
-          <a:lstStyle/>
-          <a:p>
-            <a:pPr indent="0" marL="0">
-              <a:buNone/>
-            </a:pPr>
-            <a:r>
-              <a:rPr lang="en-US" sz="1700" b="1" dirty="0">
-                <a:solidFill>
-                  <a:srgbClr val="B9852F"/>
-                </a:solidFill>
-                <a:latin typeface="Cambria" pitchFamily="34" charset="0"/>
-                <a:ea typeface="Cambria" pitchFamily="34" charset="-122"/>
-                <a:cs typeface="Cambria" pitchFamily="34" charset="-120"/>
-              </a:rPr>
-              <a:t>Request slowly</a:t>
-            </a:r>
-            <a:endParaRPr lang="en-US" sz="1700" dirty="0"/>
-          </a:p>
-        </p:txBody>
-      </p:sp>
-      <p:sp>
-        <p:nvSpPr>
-          <p:cNvPr id="9" name="Text 7"/>
-          <p:cNvSpPr/>
-          <p:nvPr/>
-        </p:nvSpPr>
-        <p:spPr>
-          <a:xfrm>
-            <a:off x="5120640" y="3154680"/>
-            <a:ext cx="6126480" cy="731520"/>
-          </a:xfrm>
-          <a:prstGeom prst="rect">
-            <a:avLst/>
-          </a:prstGeom>
-          <a:noFill/>
-          <a:ln/>
-        </p:spPr>
-        <p:txBody>
-          <a:bodyPr wrap="square" lIns="0" tIns="0" rIns="0" bIns="0" rtlCol="0" anchor="ctr"/>
-          <a:lstStyle/>
-          <a:p>
-            <a:pPr indent="0" marL="0">
-              <a:buNone/>
-            </a:pPr>
-            <a:r>
-              <a:rPr lang="en-US" sz="1350" dirty="0">
-                <a:solidFill>
-                  <a:srgbClr val="1A1A1A"/>
-                </a:solidFill>
-                <a:latin typeface="Calibri" pitchFamily="34" charset="0"/>
-                <a:ea typeface="Calibri" pitchFamily="34" charset="-122"/>
-                <a:cs typeface="Calibri" pitchFamily="34" charset="-120"/>
-              </a:rPr>
-              <a:t>one page every couple of seconds. You are a guest on someone's server.</a:t>
-            </a:r>
-            <a:endParaRPr lang="en-US" sz="1350" dirty="0"/>
-          </a:p>
-        </p:txBody>
-      </p:sp>
-      <p:sp>
-        <p:nvSpPr>
-          <p:cNvPr id="10" name="Shape 8"/>
-          <p:cNvSpPr/>
-          <p:nvPr/>
-        </p:nvSpPr>
-        <p:spPr>
-          <a:xfrm>
-            <a:off x="640080" y="4114800"/>
-            <a:ext cx="10881360" cy="914400"/>
-          </a:xfrm>
-          <a:prstGeom prst="roundRect">
-            <a:avLst>
-              <a:gd name="adj" fmla="val 10000"/>
-            </a:avLst>
-          </a:prstGeom>
-          <a:solidFill>
-            <a:srgbClr val="F4EEE8"/>
-          </a:solidFill>
-          <a:ln/>
-        </p:spPr>
-      </p:sp>
-      <p:sp>
-        <p:nvSpPr>
-          <p:cNvPr id="11" name="Text 9"/>
-          <p:cNvSpPr/>
-          <p:nvPr/>
-        </p:nvSpPr>
-        <p:spPr>
-          <a:xfrm>
-            <a:off x="960120" y="4206240"/>
-            <a:ext cx="4023360" cy="731520"/>
-          </a:xfrm>
-          <a:prstGeom prst="rect">
-            <a:avLst/>
-          </a:prstGeom>
-          <a:noFill/>
-          <a:ln/>
-        </p:spPr>
-        <p:txBody>
-          <a:bodyPr wrap="square" lIns="0" tIns="0" rIns="0" bIns="0" rtlCol="0" anchor="ctr"/>
-          <a:lstStyle/>
-          <a:p>
-            <a:pPr indent="0" marL="0">
-              <a:buNone/>
-            </a:pPr>
-            <a:r>
-              <a:rPr lang="en-US" sz="1700" b="1" dirty="0">
-                <a:solidFill>
-                  <a:srgbClr val="3F6F5F"/>
-                </a:solidFill>
-                <a:latin typeface="Cambria" pitchFamily="34" charset="0"/>
-                <a:ea typeface="Cambria" pitchFamily="34" charset="-122"/>
-                <a:cs typeface="Cambria" pitchFamily="34" charset="-120"/>
-              </a:rPr>
-              <a:t>Take only what you need</a:t>
-            </a:r>
-            <a:endParaRPr lang="en-US" sz="1700" dirty="0"/>
-          </a:p>
-        </p:txBody>
-      </p:sp>
-      <p:sp>
-        <p:nvSpPr>
-          <p:cNvPr id="12" name="Text 10"/>
-          <p:cNvSpPr/>
-          <p:nvPr/>
-        </p:nvSpPr>
-        <p:spPr>
-          <a:xfrm>
-            <a:off x="5120640" y="4206240"/>
-            <a:ext cx="6126480" cy="731520"/>
-          </a:xfrm>
-          <a:prstGeom prst="rect">
-            <a:avLst/>
-          </a:prstGeom>
-          <a:noFill/>
-          <a:ln/>
-        </p:spPr>
-        <p:txBody>
-          <a:bodyPr wrap="square" lIns="0" tIns="0" rIns="0" bIns="0" rtlCol="0" anchor="ctr"/>
-          <a:lstStyle/>
-          <a:p>
-            <a:pPr indent="0" marL="0">
-              <a:buNone/>
-            </a:pPr>
-            <a:r>
-              <a:rPr lang="en-US" sz="1350" dirty="0">
-                <a:solidFill>
-                  <a:srgbClr val="1A1A1A"/>
-                </a:solidFill>
-                <a:latin typeface="Calibri" pitchFamily="34" charset="0"/>
-                <a:ea typeface="Calibri" pitchFamily="34" charset="-122"/>
-                <a:cs typeface="Calibri" pitchFamily="34" charset="-120"/>
-              </a:rPr>
-              <a:t>the fields your question uses, not the whole site.</a:t>
-            </a:r>
-            <a:endParaRPr lang="en-US" sz="1350" dirty="0"/>
-          </a:p>
-        </p:txBody>
-      </p:sp>
-      <p:sp>
-        <p:nvSpPr>
-          <p:cNvPr id="13" name="Shape 11"/>
-          <p:cNvSpPr/>
-          <p:nvPr/>
-        </p:nvSpPr>
-        <p:spPr>
-          <a:xfrm>
-            <a:off x="640080" y="5166360"/>
-            <a:ext cx="10881360" cy="914400"/>
-          </a:xfrm>
-          <a:prstGeom prst="roundRect">
-            <a:avLst>
-              <a:gd name="adj" fmla="val 10000"/>
-            </a:avLst>
-          </a:prstGeom>
-          <a:solidFill>
-            <a:srgbClr val="F4EEE8"/>
-          </a:solidFill>
-          <a:ln/>
-        </p:spPr>
-      </p:sp>
-      <p:sp>
-        <p:nvSpPr>
-          <p:cNvPr id="14" name="Text 12"/>
-          <p:cNvSpPr/>
-          <p:nvPr/>
-        </p:nvSpPr>
-        <p:spPr>
-          <a:xfrm>
-            <a:off x="960120" y="5257800"/>
-            <a:ext cx="4023360" cy="731520"/>
-          </a:xfrm>
-          <a:prstGeom prst="rect">
-            <a:avLst/>
-          </a:prstGeom>
-          <a:noFill/>
-          <a:ln/>
-        </p:spPr>
-        <p:txBody>
-          <a:bodyPr wrap="square" lIns="0" tIns="0" rIns="0" bIns="0" rtlCol="0" anchor="ctr"/>
-          <a:lstStyle/>
-          <a:p>
-            <a:pPr indent="0" marL="0">
-              <a:buNone/>
-            </a:pPr>
-            <a:r>
-              <a:rPr lang="en-US" sz="1700" b="1" dirty="0">
-                <a:solidFill>
-                  <a:srgbClr val="2E5F8A"/>
-                </a:solidFill>
-                <a:latin typeface="Cambria" pitchFamily="34" charset="0"/>
-                <a:ea typeface="Cambria" pitchFamily="34" charset="-122"/>
-                <a:cs typeface="Cambria" pitchFamily="34" charset="-120"/>
-              </a:rPr>
-              <a:t>Never republish the text</a:t>
-            </a:r>
-            <a:endParaRPr lang="en-US" sz="1700" dirty="0"/>
-          </a:p>
-        </p:txBody>
-      </p:sp>
-      <p:sp>
-        <p:nvSpPr>
-          <p:cNvPr id="15" name="Text 13"/>
-          <p:cNvSpPr/>
-          <p:nvPr/>
-        </p:nvSpPr>
-        <p:spPr>
-          <a:xfrm>
-            <a:off x="5120640" y="5257800"/>
-            <a:ext cx="6126480" cy="731520"/>
-          </a:xfrm>
-          <a:prstGeom prst="rect">
-            <a:avLst/>
-          </a:prstGeom>
-          <a:noFill/>
-          <a:ln/>
-        </p:spPr>
-        <p:txBody>
-          <a:bodyPr wrap="square" lIns="0" tIns="0" rIns="0" bIns="0" rtlCol="0" anchor="ctr"/>
-          <a:lstStyle/>
-          <a:p>
-            <a:pPr indent="0" marL="0">
-              <a:buNone/>
-            </a:pPr>
-            <a:r>
-              <a:rPr lang="en-US" sz="1350" dirty="0">
-                <a:solidFill>
-                  <a:srgbClr val="1A1A1A"/>
-                </a:solidFill>
-                <a:latin typeface="Calibri" pitchFamily="34" charset="0"/>
-                <a:ea typeface="Calibri" pitchFamily="34" charset="-122"/>
-                <a:cs typeface="Calibri" pitchFamily="34" charset="-120"/>
-              </a:rPr>
-              <a:t>analyse it, quote it, count it. Do not hand it on.</a:t>
-            </a:r>
-            <a:endParaRPr lang="en-US" sz="1350" dirty="0"/>
-          </a:p>
-        </p:txBody>
-      </p:sp>
-      <p:sp>
-        <p:nvSpPr>
-          <p:cNvPr id="16" name="Text 14"/>
-          <p:cNvSpPr/>
-          <p:nvPr/>
-        </p:nvSpPr>
-        <p:spPr>
-          <a:xfrm>
-            <a:off x="640080" y="6309360"/>
-            <a:ext cx="10881360" cy="365760"/>
-          </a:xfrm>
-          <a:prstGeom prst="rect">
-            <a:avLst/>
-          </a:prstGeom>
-          <a:noFill/>
-          <a:ln/>
-        </p:spPr>
-        <p:txBody>
-          <a:bodyPr wrap="square" rtlCol="0" anchor="ctr"/>
-          <a:lstStyle/>
-          <a:p>
-            <a:pPr indent="0" marL="0">
-              <a:buNone/>
-            </a:pPr>
-            <a:r>
-              <a:rPr lang="en-US" sz="1250" i="1" dirty="0">
-                <a:solidFill>
-                  <a:srgbClr val="6B6B63"/>
-                </a:solidFill>
-                <a:latin typeface="Calibri" pitchFamily="34" charset="0"/>
-                <a:ea typeface="Calibri" pitchFamily="34" charset="-122"/>
-                <a:cs typeface="Calibri" pitchFamily="34" charset="-120"/>
-              </a:rPr>
-              <a:t>CC0 and public domain: go anywhere.   Academic sets and community text: analyse, don't redistribute.   Shadow libraries: never.</a:t>
-            </a:r>
-            <a:endParaRPr lang="en-US" sz="1250" dirty="0"/>
+              <a:t>Both queried live for this slide. Work out which kind you have before you estimate how long it takes.</a:t>
+            </a:r>
+            <a:endParaRPr lang="en-US" sz="1000" dirty="0"/>
           </a:p>
         </p:txBody>
       </p:sp>
@@ -10459,7 +10210,7 @@
                 <a:ea typeface="Calibri" pitchFamily="34" charset="-122"/>
                 <a:cs typeface="Calibri" pitchFamily="34" charset="-120"/>
               </a:rPr>
-              <a:t>ROUTE THREE, IN PRACTICE</a:t>
+              <a:t>ROUTE THREE</a:t>
             </a:r>
             <a:endParaRPr lang="en-US" sz="1300" dirty="0"/>
           </a:p>
@@ -10498,110 +10249,448 @@
                 <a:ea typeface="Cambria" pitchFamily="34" charset="-122"/>
                 <a:cs typeface="Cambria" pitchFamily="34" charset="-120"/>
               </a:rPr>
-              <a:t>Find the data inside the markup</a:t>
+              <a:t>Scraping, and the four things that come with it</a:t>
             </a:r>
             <a:endParaRPr lang="en-US" sz="3400" dirty="0"/>
           </a:p>
         </p:txBody>
       </p:sp>
-      <p:pic>
-        <p:nvPicPr>
-          <p:cNvPr id="4" name="Image 0" descr="/tmp/figs/w4_scrape_anatomy.png">    </p:cNvPr>
-          <p:cNvPicPr>
-            <a:picLocks noChangeAspect="1"/>
-          </p:cNvPicPr>
-          <p:nvPr/>
-        </p:nvPicPr>
-        <p:blipFill>
-          <a:blip r:embed="rId1"/>
-          <a:srcRect l="0" r="0" t="0" b="0"/>
-          <a:stretch/>
-        </p:blipFill>
-        <p:spPr>
-          <a:xfrm>
-            <a:off x="640080" y="1874520"/>
-            <a:ext cx="10881360" cy="3566160"/>
-          </a:xfrm>
-          <a:prstGeom prst="rect">
-            <a:avLst/>
-          </a:prstGeom>
-        </p:spPr>
-      </p:pic>
-      <p:sp>
-        <p:nvSpPr>
-          <p:cNvPr id="5" name="Text 2"/>
-          <p:cNvSpPr/>
-          <p:nvPr/>
-        </p:nvSpPr>
-        <p:spPr>
-          <a:xfrm>
-            <a:off x="640080" y="5897880"/>
-            <a:ext cx="10881360" cy="411480"/>
-          </a:xfrm>
-          <a:prstGeom prst="rect">
-            <a:avLst/>
-          </a:prstGeom>
-          <a:noFill/>
-          <a:ln/>
-        </p:spPr>
-        <p:txBody>
-          <a:bodyPr wrap="square" rtlCol="0" anchor="ctr"/>
-          <a:lstStyle/>
-          <a:p>
-            <a:pPr indent="0" marL="0">
-              <a:buNone/>
-            </a:pPr>
-            <a:r>
-              <a:rPr lang="en-US" sz="1600" i="1" dirty="0">
-                <a:solidFill>
-                  <a:srgbClr val="1A1A1A"/>
+      <p:sp>
+        <p:nvSpPr>
+          <p:cNvPr id="4" name="Shape 2"/>
+          <p:cNvSpPr/>
+          <p:nvPr/>
+        </p:nvSpPr>
+        <p:spPr>
+          <a:xfrm>
+            <a:off x="640080" y="2011680"/>
+            <a:ext cx="10881360" cy="914400"/>
+          </a:xfrm>
+          <a:prstGeom prst="roundRect">
+            <a:avLst>
+              <a:gd name="adj" fmla="val 10000"/>
+            </a:avLst>
+          </a:prstGeom>
+          <a:solidFill>
+            <a:srgbClr val="F4EEE8"/>
+          </a:solidFill>
+          <a:ln/>
+        </p:spPr>
+      </p:sp>
+      <p:sp>
+        <p:nvSpPr>
+          <p:cNvPr id="5" name="Text 3"/>
+          <p:cNvSpPr/>
+          <p:nvPr/>
+        </p:nvSpPr>
+        <p:spPr>
+          <a:xfrm>
+            <a:off x="960120" y="2103120"/>
+            <a:ext cx="4023360" cy="731520"/>
+          </a:xfrm>
+          <a:prstGeom prst="rect">
+            <a:avLst/>
+          </a:prstGeom>
+          <a:noFill/>
+          <a:ln/>
+        </p:spPr>
+        <p:txBody>
+          <a:bodyPr wrap="square" lIns="0" tIns="0" rIns="0" bIns="0" rtlCol="0" anchor="ctr"/>
+          <a:lstStyle/>
+          <a:p>
+            <a:pPr indent="0" marL="0">
+              <a:buNone/>
+            </a:pPr>
+            <a:r>
+              <a:rPr lang="en-US" sz="1700" b="1" dirty="0">
+                <a:solidFill>
+                  <a:srgbClr val="7A3B2E"/>
                 </a:solidFill>
                 <a:latin typeface="Cambria" pitchFamily="34" charset="0"/>
                 <a:ea typeface="Cambria" pitchFamily="34" charset="-122"/>
                 <a:cs typeface="Cambria" pitchFamily="34" charset="-120"/>
               </a:rPr>
-              <a:t>Fetch one page, look at one block, and read the selectors off it. In a browser: right-click, Inspect, and the tag names are there.</a:t>
-            </a:r>
-            <a:endParaRPr lang="en-US" sz="1600" dirty="0"/>
-          </a:p>
-        </p:txBody>
-      </p:sp>
-      <p:sp>
-        <p:nvSpPr>
-          <p:cNvPr id="6" name="Text 3"/>
-          <p:cNvSpPr/>
-          <p:nvPr/>
-        </p:nvSpPr>
-        <p:spPr>
-          <a:xfrm>
-            <a:off x="640080" y="6355080"/>
-            <a:ext cx="10881360" cy="320040"/>
-          </a:xfrm>
-          <a:prstGeom prst="rect">
-            <a:avLst/>
-          </a:prstGeom>
-          <a:noFill/>
-          <a:ln/>
-        </p:spPr>
-        <p:txBody>
-          <a:bodyPr wrap="square" rtlCol="0" anchor="ctr"/>
-          <a:lstStyle/>
-          <a:p>
-            <a:pPr indent="0" marL="0">
-              <a:buNone/>
-            </a:pPr>
-            <a:r>
-              <a:rPr lang="en-US" sz="1000" dirty="0">
-                <a:solidFill>
-                  <a:srgbClr val="6B6B63"/>
+              <a:t>Read robots.txt and the terms</a:t>
+            </a:r>
+            <a:endParaRPr lang="en-US" sz="1700" dirty="0"/>
+          </a:p>
+        </p:txBody>
+      </p:sp>
+      <p:sp>
+        <p:nvSpPr>
+          <p:cNvPr id="6" name="Text 4"/>
+          <p:cNvSpPr/>
+          <p:nvPr/>
+        </p:nvSpPr>
+        <p:spPr>
+          <a:xfrm>
+            <a:off x="5120640" y="2103120"/>
+            <a:ext cx="6126480" cy="731520"/>
+          </a:xfrm>
+          <a:prstGeom prst="rect">
+            <a:avLst/>
+          </a:prstGeom>
+          <a:noFill/>
+          <a:ln/>
+        </p:spPr>
+        <p:txBody>
+          <a:bodyPr wrap="square" lIns="0" tIns="0" rIns="0" bIns="0" rtlCol="0" anchor="ctr"/>
+          <a:lstStyle/>
+          <a:p>
+            <a:pPr indent="0" marL="0">
+              <a:buNone/>
+            </a:pPr>
+            <a:r>
+              <a:rPr lang="en-US" sz="1350" dirty="0">
+                <a:solidFill>
+                  <a:srgbClr val="1A1A1A"/>
                 </a:solidFill>
                 <a:latin typeface="Calibri" pitchFamily="34" charset="0"/>
                 <a:ea typeface="Calibri" pitchFamily="34" charset="-122"/>
                 <a:cs typeface="Calibri" pitchFamily="34" charset="-120"/>
               </a:rPr>
-              <a:t>Real HTML from quotes.toscrape.com. A selector that matches nothing returns None and raises no error. That is the bug you will hit.</a:t>
-            </a:r>
-            <a:endParaRPr lang="en-US" sz="1000" dirty="0"/>
+              <a:t>before the first request, not after the complaint.</a:t>
+            </a:r>
+            <a:endParaRPr lang="en-US" sz="1350" dirty="0"/>
+          </a:p>
+        </p:txBody>
+      </p:sp>
+      <p:sp>
+        <p:nvSpPr>
+          <p:cNvPr id="7" name="Shape 5"/>
+          <p:cNvSpPr/>
+          <p:nvPr/>
+        </p:nvSpPr>
+        <p:spPr>
+          <a:xfrm>
+            <a:off x="640080" y="3063240"/>
+            <a:ext cx="10881360" cy="914400"/>
+          </a:xfrm>
+          <a:prstGeom prst="roundRect">
+            <a:avLst>
+              <a:gd name="adj" fmla="val 10000"/>
+            </a:avLst>
+          </a:prstGeom>
+          <a:solidFill>
+            <a:srgbClr val="F4EEE8"/>
+          </a:solidFill>
+          <a:ln/>
+        </p:spPr>
+      </p:sp>
+      <p:sp>
+        <p:nvSpPr>
+          <p:cNvPr id="8" name="Text 6"/>
+          <p:cNvSpPr/>
+          <p:nvPr/>
+        </p:nvSpPr>
+        <p:spPr>
+          <a:xfrm>
+            <a:off x="960120" y="3154680"/>
+            <a:ext cx="4023360" cy="731520"/>
+          </a:xfrm>
+          <a:prstGeom prst="rect">
+            <a:avLst/>
+          </a:prstGeom>
+          <a:noFill/>
+          <a:ln/>
+        </p:spPr>
+        <p:txBody>
+          <a:bodyPr wrap="square" lIns="0" tIns="0" rIns="0" bIns="0" rtlCol="0" anchor="ctr"/>
+          <a:lstStyle/>
+          <a:p>
+            <a:pPr indent="0" marL="0">
+              <a:buNone/>
+            </a:pPr>
+            <a:r>
+              <a:rPr lang="en-US" sz="1700" b="1" dirty="0">
+                <a:solidFill>
+                  <a:srgbClr val="B9852F"/>
+                </a:solidFill>
+                <a:latin typeface="Cambria" pitchFamily="34" charset="0"/>
+                <a:ea typeface="Cambria" pitchFamily="34" charset="-122"/>
+                <a:cs typeface="Cambria" pitchFamily="34" charset="-120"/>
+              </a:rPr>
+              <a:t>Request slowly</a:t>
+            </a:r>
+            <a:endParaRPr lang="en-US" sz="1700" dirty="0"/>
+          </a:p>
+        </p:txBody>
+      </p:sp>
+      <p:sp>
+        <p:nvSpPr>
+          <p:cNvPr id="9" name="Text 7"/>
+          <p:cNvSpPr/>
+          <p:nvPr/>
+        </p:nvSpPr>
+        <p:spPr>
+          <a:xfrm>
+            <a:off x="5120640" y="3154680"/>
+            <a:ext cx="6126480" cy="731520"/>
+          </a:xfrm>
+          <a:prstGeom prst="rect">
+            <a:avLst/>
+          </a:prstGeom>
+          <a:noFill/>
+          <a:ln/>
+        </p:spPr>
+        <p:txBody>
+          <a:bodyPr wrap="square" lIns="0" tIns="0" rIns="0" bIns="0" rtlCol="0" anchor="ctr"/>
+          <a:lstStyle/>
+          <a:p>
+            <a:pPr indent="0" marL="0">
+              <a:buNone/>
+            </a:pPr>
+            <a:r>
+              <a:rPr lang="en-US" sz="1350" dirty="0">
+                <a:solidFill>
+                  <a:srgbClr val="1A1A1A"/>
+                </a:solidFill>
+                <a:latin typeface="Calibri" pitchFamily="34" charset="0"/>
+                <a:ea typeface="Calibri" pitchFamily="34" charset="-122"/>
+                <a:cs typeface="Calibri" pitchFamily="34" charset="-120"/>
+              </a:rPr>
+              <a:t>one page every couple of seconds. You are a guest on someone's server.</a:t>
+            </a:r>
+            <a:endParaRPr lang="en-US" sz="1350" dirty="0"/>
+          </a:p>
+        </p:txBody>
+      </p:sp>
+      <p:sp>
+        <p:nvSpPr>
+          <p:cNvPr id="10" name="Shape 8"/>
+          <p:cNvSpPr/>
+          <p:nvPr/>
+        </p:nvSpPr>
+        <p:spPr>
+          <a:xfrm>
+            <a:off x="640080" y="4114800"/>
+            <a:ext cx="10881360" cy="914400"/>
+          </a:xfrm>
+          <a:prstGeom prst="roundRect">
+            <a:avLst>
+              <a:gd name="adj" fmla="val 10000"/>
+            </a:avLst>
+          </a:prstGeom>
+          <a:solidFill>
+            <a:srgbClr val="F4EEE8"/>
+          </a:solidFill>
+          <a:ln/>
+        </p:spPr>
+      </p:sp>
+      <p:sp>
+        <p:nvSpPr>
+          <p:cNvPr id="11" name="Text 9"/>
+          <p:cNvSpPr/>
+          <p:nvPr/>
+        </p:nvSpPr>
+        <p:spPr>
+          <a:xfrm>
+            <a:off x="960120" y="4206240"/>
+            <a:ext cx="4023360" cy="731520"/>
+          </a:xfrm>
+          <a:prstGeom prst="rect">
+            <a:avLst/>
+          </a:prstGeom>
+          <a:noFill/>
+          <a:ln/>
+        </p:spPr>
+        <p:txBody>
+          <a:bodyPr wrap="square" lIns="0" tIns="0" rIns="0" bIns="0" rtlCol="0" anchor="ctr"/>
+          <a:lstStyle/>
+          <a:p>
+            <a:pPr indent="0" marL="0">
+              <a:buNone/>
+            </a:pPr>
+            <a:r>
+              <a:rPr lang="en-US" sz="1700" b="1" dirty="0">
+                <a:solidFill>
+                  <a:srgbClr val="3F6F5F"/>
+                </a:solidFill>
+                <a:latin typeface="Cambria" pitchFamily="34" charset="0"/>
+                <a:ea typeface="Cambria" pitchFamily="34" charset="-122"/>
+                <a:cs typeface="Cambria" pitchFamily="34" charset="-120"/>
+              </a:rPr>
+              <a:t>Take only what you need</a:t>
+            </a:r>
+            <a:endParaRPr lang="en-US" sz="1700" dirty="0"/>
+          </a:p>
+        </p:txBody>
+      </p:sp>
+      <p:sp>
+        <p:nvSpPr>
+          <p:cNvPr id="12" name="Text 10"/>
+          <p:cNvSpPr/>
+          <p:nvPr/>
+        </p:nvSpPr>
+        <p:spPr>
+          <a:xfrm>
+            <a:off x="5120640" y="4206240"/>
+            <a:ext cx="6126480" cy="731520"/>
+          </a:xfrm>
+          <a:prstGeom prst="rect">
+            <a:avLst/>
+          </a:prstGeom>
+          <a:noFill/>
+          <a:ln/>
+        </p:spPr>
+        <p:txBody>
+          <a:bodyPr wrap="square" lIns="0" tIns="0" rIns="0" bIns="0" rtlCol="0" anchor="ctr"/>
+          <a:lstStyle/>
+          <a:p>
+            <a:pPr indent="0" marL="0">
+              <a:buNone/>
+            </a:pPr>
+            <a:r>
+              <a:rPr lang="en-US" sz="1350" dirty="0">
+                <a:solidFill>
+                  <a:srgbClr val="1A1A1A"/>
+                </a:solidFill>
+                <a:latin typeface="Calibri" pitchFamily="34" charset="0"/>
+                <a:ea typeface="Calibri" pitchFamily="34" charset="-122"/>
+                <a:cs typeface="Calibri" pitchFamily="34" charset="-120"/>
+              </a:rPr>
+              <a:t>the fields your question uses, not the whole site.</a:t>
+            </a:r>
+            <a:endParaRPr lang="en-US" sz="1350" dirty="0"/>
+          </a:p>
+        </p:txBody>
+      </p:sp>
+      <p:sp>
+        <p:nvSpPr>
+          <p:cNvPr id="13" name="Shape 11"/>
+          <p:cNvSpPr/>
+          <p:nvPr/>
+        </p:nvSpPr>
+        <p:spPr>
+          <a:xfrm>
+            <a:off x="640080" y="5166360"/>
+            <a:ext cx="10881360" cy="914400"/>
+          </a:xfrm>
+          <a:prstGeom prst="roundRect">
+            <a:avLst>
+              <a:gd name="adj" fmla="val 10000"/>
+            </a:avLst>
+          </a:prstGeom>
+          <a:solidFill>
+            <a:srgbClr val="F4EEE8"/>
+          </a:solidFill>
+          <a:ln/>
+        </p:spPr>
+      </p:sp>
+      <p:sp>
+        <p:nvSpPr>
+          <p:cNvPr id="14" name="Text 12"/>
+          <p:cNvSpPr/>
+          <p:nvPr/>
+        </p:nvSpPr>
+        <p:spPr>
+          <a:xfrm>
+            <a:off x="960120" y="5257800"/>
+            <a:ext cx="4023360" cy="731520"/>
+          </a:xfrm>
+          <a:prstGeom prst="rect">
+            <a:avLst/>
+          </a:prstGeom>
+          <a:noFill/>
+          <a:ln/>
+        </p:spPr>
+        <p:txBody>
+          <a:bodyPr wrap="square" lIns="0" tIns="0" rIns="0" bIns="0" rtlCol="0" anchor="ctr"/>
+          <a:lstStyle/>
+          <a:p>
+            <a:pPr indent="0" marL="0">
+              <a:buNone/>
+            </a:pPr>
+            <a:r>
+              <a:rPr lang="en-US" sz="1700" b="1" dirty="0">
+                <a:solidFill>
+                  <a:srgbClr val="2E5F8A"/>
+                </a:solidFill>
+                <a:latin typeface="Cambria" pitchFamily="34" charset="0"/>
+                <a:ea typeface="Cambria" pitchFamily="34" charset="-122"/>
+                <a:cs typeface="Cambria" pitchFamily="34" charset="-120"/>
+              </a:rPr>
+              <a:t>Never republish the text</a:t>
+            </a:r>
+            <a:endParaRPr lang="en-US" sz="1700" dirty="0"/>
+          </a:p>
+        </p:txBody>
+      </p:sp>
+      <p:sp>
+        <p:nvSpPr>
+          <p:cNvPr id="15" name="Text 13"/>
+          <p:cNvSpPr/>
+          <p:nvPr/>
+        </p:nvSpPr>
+        <p:spPr>
+          <a:xfrm>
+            <a:off x="5120640" y="5257800"/>
+            <a:ext cx="6126480" cy="731520"/>
+          </a:xfrm>
+          <a:prstGeom prst="rect">
+            <a:avLst/>
+          </a:prstGeom>
+          <a:noFill/>
+          <a:ln/>
+        </p:spPr>
+        <p:txBody>
+          <a:bodyPr wrap="square" lIns="0" tIns="0" rIns="0" bIns="0" rtlCol="0" anchor="ctr"/>
+          <a:lstStyle/>
+          <a:p>
+            <a:pPr indent="0" marL="0">
+              <a:buNone/>
+            </a:pPr>
+            <a:r>
+              <a:rPr lang="en-US" sz="1350" dirty="0">
+                <a:solidFill>
+                  <a:srgbClr val="1A1A1A"/>
+                </a:solidFill>
+                <a:latin typeface="Calibri" pitchFamily="34" charset="0"/>
+                <a:ea typeface="Calibri" pitchFamily="34" charset="-122"/>
+                <a:cs typeface="Calibri" pitchFamily="34" charset="-120"/>
+              </a:rPr>
+              <a:t>analyse it, quote it, count it. Do not hand it on.</a:t>
+            </a:r>
+            <a:endParaRPr lang="en-US" sz="1350" dirty="0"/>
+          </a:p>
+        </p:txBody>
+      </p:sp>
+      <p:sp>
+        <p:nvSpPr>
+          <p:cNvPr id="16" name="Text 14"/>
+          <p:cNvSpPr/>
+          <p:nvPr/>
+        </p:nvSpPr>
+        <p:spPr>
+          <a:xfrm>
+            <a:off x="640080" y="6309360"/>
+            <a:ext cx="10881360" cy="365760"/>
+          </a:xfrm>
+          <a:prstGeom prst="rect">
+            <a:avLst/>
+          </a:prstGeom>
+          <a:noFill/>
+          <a:ln/>
+        </p:spPr>
+        <p:txBody>
+          <a:bodyPr wrap="square" rtlCol="0" anchor="ctr"/>
+          <a:lstStyle/>
+          <a:p>
+            <a:pPr indent="0" marL="0">
+              <a:buNone/>
+            </a:pPr>
+            <a:r>
+              <a:rPr lang="en-US" sz="1250" i="1" dirty="0">
+                <a:solidFill>
+                  <a:srgbClr val="6B6B63"/>
+                </a:solidFill>
+                <a:latin typeface="Calibri" pitchFamily="34" charset="0"/>
+                <a:ea typeface="Calibri" pitchFamily="34" charset="-122"/>
+                <a:cs typeface="Calibri" pitchFamily="34" charset="-120"/>
+              </a:rPr>
+              <a:t>CC0 and public domain: go anywhere.   Academic sets and community text: analyse, don't redistribute.   Shadow libraries: never.</a:t>
+            </a:r>
+            <a:endParaRPr lang="en-US" sz="1250" dirty="0"/>
           </a:p>
         </p:txBody>
       </p:sp>
@@ -10664,13 +10753,13 @@
             <a:r>
               <a:rPr lang="en-US" sz="1300" b="1" spc="300" kern="0" dirty="0">
                 <a:solidFill>
-                  <a:srgbClr val="B9852F"/>
+                  <a:srgbClr val="7A3B2E"/>
                 </a:solidFill>
                 <a:latin typeface="Calibri" pitchFamily="34" charset="0"/>
                 <a:ea typeface="Calibri" pitchFamily="34" charset="-122"/>
                 <a:cs typeface="Calibri" pitchFamily="34" charset="-120"/>
               </a:rPr>
-              <a:t>BEFORE YOU START IT RUNNING</a:t>
+              <a:t>ROUTE THREE, IN PRACTICE</a:t>
             </a:r>
             <a:endParaRPr lang="en-US" sz="1300" dirty="0"/>
           </a:p>
@@ -10709,7 +10798,7 @@
                 <a:ea typeface="Cambria" pitchFamily="34" charset="-122"/>
                 <a:cs typeface="Cambria" pitchFamily="34" charset="-120"/>
               </a:rPr>
-              <a:t>How long will this take?</a:t>
+              <a:t>Find the data inside the markup</a:t>
             </a:r>
             <a:endParaRPr lang="en-US" sz="3400" dirty="0"/>
           </a:p>
@@ -10717,7 +10806,7 @@
       </p:sp>
       <p:pic>
         <p:nvPicPr>
-          <p:cNvPr id="4" name="Image 0" descr="/tmp/figs/w4_scrape_cost.png">    </p:cNvPr>
+          <p:cNvPr id="4" name="Image 0" descr="/tmp/figs/w4_scrape_anatomy.png">    </p:cNvPr>
           <p:cNvPicPr>
             <a:picLocks noChangeAspect="1"/>
           </p:cNvPicPr>
@@ -10730,8 +10819,8 @@
         </p:blipFill>
         <p:spPr>
           <a:xfrm>
-            <a:off x="2103120" y="1783080"/>
-            <a:ext cx="7955280" cy="3931920"/>
+            <a:off x="640080" y="1874520"/>
+            <a:ext cx="10881360" cy="3566160"/>
           </a:xfrm>
           <a:prstGeom prst="rect">
             <a:avLst/>
@@ -10771,7 +10860,7 @@
                 <a:ea typeface="Cambria" pitchFamily="34" charset="-122"/>
                 <a:cs typeface="Cambria" pitchFamily="34" charset="-120"/>
               </a:rPr>
-              <a:t>A one-second pause on 5,000 pages is an hour and a half. That number decides your sample size, so work it out first.</a:t>
+              <a:t>Fetch one page, look at one block, and read the selectors off it. In a browser: right-click, Inspect, and the tag names are there.</a:t>
             </a:r>
             <a:endParaRPr lang="en-US" sz="1600" dirty="0"/>
           </a:p>
@@ -10810,7 +10899,7 @@
                 <a:ea typeface="Calibri" pitchFamily="34" charset="-122"/>
                 <a:cs typeface="Calibri" pitchFamily="34" charset="-120"/>
               </a:rPr>
-              <a:t>One page a second is a reader. Fifty a second is an outage.</a:t>
+              <a:t>Real HTML from quotes.toscrape.com. A selector that matches nothing returns None and raises no error. That is the bug you will hit.</a:t>
             </a:r>
             <a:endParaRPr lang="en-US" sz="1000" dirty="0"/>
           </a:p>
@@ -10875,13 +10964,13 @@
             <a:r>
               <a:rPr lang="en-US" sz="1300" b="1" spc="300" kern="0" dirty="0">
                 <a:solidFill>
-                  <a:srgbClr val="3F6F5F"/>
+                  <a:srgbClr val="B9852F"/>
                 </a:solidFill>
                 <a:latin typeface="Calibri" pitchFamily="34" charset="0"/>
                 <a:ea typeface="Calibri" pitchFamily="34" charset="-122"/>
                 <a:cs typeface="Calibri" pitchFamily="34" charset="-120"/>
               </a:rPr>
-              <a:t>YOUR TURN · 20 MINUTES</a:t>
+              <a:t>BEFORE YOU START IT RUNNING</a:t>
             </a:r>
             <a:endParaRPr lang="en-US" sz="1300" dirty="0"/>
           </a:p>
@@ -10920,348 +11009,110 @@
                 <a:ea typeface="Cambria" pitchFamily="34" charset="-122"/>
                 <a:cs typeface="Cambria" pitchFamily="34" charset="-120"/>
               </a:rPr>
-              <a:t>Collect it, save it, start the repo</a:t>
+              <a:t>How long will this take?</a:t>
             </a:r>
             <a:endParaRPr lang="en-US" sz="3400" dirty="0"/>
           </a:p>
         </p:txBody>
       </p:sp>
-      <p:sp>
-        <p:nvSpPr>
-          <p:cNvPr id="4" name="Shape 2"/>
-          <p:cNvSpPr/>
-          <p:nvPr/>
-        </p:nvSpPr>
-        <p:spPr>
-          <a:xfrm>
-            <a:off x="640080" y="2103120"/>
-            <a:ext cx="10881360" cy="1097280"/>
-          </a:xfrm>
-          <a:prstGeom prst="roundRect">
-            <a:avLst>
-              <a:gd name="adj" fmla="val 8333"/>
-            </a:avLst>
-          </a:prstGeom>
-          <a:solidFill>
-            <a:srgbClr val="F4EEE8"/>
-          </a:solidFill>
-          <a:ln/>
-        </p:spPr>
-      </p:sp>
-      <p:sp>
-        <p:nvSpPr>
-          <p:cNvPr id="5" name="Text 3"/>
-          <p:cNvSpPr/>
-          <p:nvPr/>
-        </p:nvSpPr>
-        <p:spPr>
-          <a:xfrm>
-            <a:off x="1005840" y="2240280"/>
-            <a:ext cx="4206240" cy="822960"/>
-          </a:xfrm>
-          <a:prstGeom prst="rect">
-            <a:avLst/>
-          </a:prstGeom>
-          <a:noFill/>
-          <a:ln/>
-        </p:spPr>
-        <p:txBody>
-          <a:bodyPr wrap="square" lIns="0" tIns="0" rIns="0" bIns="0" rtlCol="0" anchor="ctr"/>
-          <a:lstStyle/>
-          <a:p>
-            <a:pPr indent="0" marL="0">
-              <a:buNone/>
-            </a:pPr>
-            <a:r>
-              <a:rPr lang="en-US" sz="1900" b="1" dirty="0">
-                <a:solidFill>
-                  <a:srgbClr val="3F6F5F"/>
+      <p:pic>
+        <p:nvPicPr>
+          <p:cNvPr id="4" name="Image 0" descr="/tmp/figs/w4_scrape_cost.png">    </p:cNvPr>
+          <p:cNvPicPr>
+            <a:picLocks noChangeAspect="1"/>
+          </p:cNvPicPr>
+          <p:nvPr/>
+        </p:nvPicPr>
+        <p:blipFill>
+          <a:blip r:embed="rId1"/>
+          <a:srcRect l="0" r="0" t="0" b="0"/>
+          <a:stretch/>
+        </p:blipFill>
+        <p:spPr>
+          <a:xfrm>
+            <a:off x="2103120" y="1783080"/>
+            <a:ext cx="7955280" cy="3931920"/>
+          </a:xfrm>
+          <a:prstGeom prst="rect">
+            <a:avLst/>
+          </a:prstGeom>
+        </p:spPr>
+      </p:pic>
+      <p:sp>
+        <p:nvSpPr>
+          <p:cNvPr id="5" name="Text 2"/>
+          <p:cNvSpPr/>
+          <p:nvPr/>
+        </p:nvSpPr>
+        <p:spPr>
+          <a:xfrm>
+            <a:off x="640080" y="5897880"/>
+            <a:ext cx="10881360" cy="411480"/>
+          </a:xfrm>
+          <a:prstGeom prst="rect">
+            <a:avLst/>
+          </a:prstGeom>
+          <a:noFill/>
+          <a:ln/>
+        </p:spPr>
+        <p:txBody>
+          <a:bodyPr wrap="square" rtlCol="0" anchor="ctr"/>
+          <a:lstStyle/>
+          <a:p>
+            <a:pPr indent="0" marL="0">
+              <a:buNone/>
+            </a:pPr>
+            <a:r>
+              <a:rPr lang="en-US" sz="1600" i="1" dirty="0">
+                <a:solidFill>
+                  <a:srgbClr val="1A1A1A"/>
                 </a:solidFill>
                 <a:latin typeface="Cambria" pitchFamily="34" charset="0"/>
                 <a:ea typeface="Cambria" pitchFamily="34" charset="-122"/>
                 <a:cs typeface="Cambria" pitchFamily="34" charset="-120"/>
               </a:rPr>
-              <a:t>a file in your Drive folder</a:t>
-            </a:r>
-            <a:endParaRPr lang="en-US" sz="1900" dirty="0"/>
-          </a:p>
-        </p:txBody>
-      </p:sp>
-      <p:sp>
-        <p:nvSpPr>
-          <p:cNvPr id="6" name="Text 4"/>
-          <p:cNvSpPr/>
-          <p:nvPr/>
-        </p:nvSpPr>
-        <p:spPr>
-          <a:xfrm>
-            <a:off x="5394960" y="2240280"/>
-            <a:ext cx="5760720" cy="822960"/>
-          </a:xfrm>
-          <a:prstGeom prst="rect">
-            <a:avLst/>
-          </a:prstGeom>
-          <a:noFill/>
-          <a:ln/>
-        </p:spPr>
-        <p:txBody>
-          <a:bodyPr wrap="square" lIns="0" tIns="0" rIns="0" bIns="0" rtlCol="0" anchor="ctr"/>
-          <a:lstStyle/>
-          <a:p>
-            <a:pPr indent="0" marL="0">
-              <a:buNone/>
-            </a:pPr>
-            <a:r>
-              <a:rPr lang="en-US" sz="1400" dirty="0">
-                <a:solidFill>
-                  <a:srgbClr val="1A1A1A"/>
+              <a:t>A one-second pause on 5,000 pages is an hour and a half. That number decides your sample size, so work it out first.</a:t>
+            </a:r>
+            <a:endParaRPr lang="en-US" sz="1600" dirty="0"/>
+          </a:p>
+        </p:txBody>
+      </p:sp>
+      <p:sp>
+        <p:nvSpPr>
+          <p:cNvPr id="6" name="Text 3"/>
+          <p:cNvSpPr/>
+          <p:nvPr/>
+        </p:nvSpPr>
+        <p:spPr>
+          <a:xfrm>
+            <a:off x="640080" y="6355080"/>
+            <a:ext cx="10881360" cy="320040"/>
+          </a:xfrm>
+          <a:prstGeom prst="rect">
+            <a:avLst/>
+          </a:prstGeom>
+          <a:noFill/>
+          <a:ln/>
+        </p:spPr>
+        <p:txBody>
+          <a:bodyPr wrap="square" rtlCol="0" anchor="ctr"/>
+          <a:lstStyle/>
+          <a:p>
+            <a:pPr indent="0" marL="0">
+              <a:buNone/>
+            </a:pPr>
+            <a:r>
+              <a:rPr lang="en-US" sz="1000" dirty="0">
+                <a:solidFill>
+                  <a:srgbClr val="6B6B63"/>
                 </a:solidFill>
                 <a:latin typeface="Calibri" pitchFamily="34" charset="0"/>
                 <a:ea typeface="Calibri" pitchFamily="34" charset="-122"/>
                 <a:cs typeface="Calibri" pitchFamily="34" charset="-120"/>
               </a:rPr>
-              <a:t>Week 5 starts from it. Colab forgets everything else.</a:t>
-            </a:r>
-            <a:endParaRPr lang="en-US" sz="1400" dirty="0"/>
-          </a:p>
-        </p:txBody>
-      </p:sp>
-      <p:sp>
-        <p:nvSpPr>
-          <p:cNvPr id="7" name="Shape 5"/>
-          <p:cNvSpPr/>
-          <p:nvPr/>
-        </p:nvSpPr>
-        <p:spPr>
-          <a:xfrm>
-            <a:off x="640080" y="3383280"/>
-            <a:ext cx="10881360" cy="1097280"/>
-          </a:xfrm>
-          <a:prstGeom prst="roundRect">
-            <a:avLst>
-              <a:gd name="adj" fmla="val 8333"/>
-            </a:avLst>
-          </a:prstGeom>
-          <a:solidFill>
-            <a:srgbClr val="F4EEE8"/>
-          </a:solidFill>
-          <a:ln/>
-        </p:spPr>
-      </p:sp>
-      <p:sp>
-        <p:nvSpPr>
-          <p:cNvPr id="8" name="Text 6"/>
-          <p:cNvSpPr/>
-          <p:nvPr/>
-        </p:nvSpPr>
-        <p:spPr>
-          <a:xfrm>
-            <a:off x="1005840" y="3520440"/>
-            <a:ext cx="4206240" cy="822960"/>
-          </a:xfrm>
-          <a:prstGeom prst="rect">
-            <a:avLst/>
-          </a:prstGeom>
-          <a:noFill/>
-          <a:ln/>
-        </p:spPr>
-        <p:txBody>
-          <a:bodyPr wrap="square" lIns="0" tIns="0" rIns="0" bIns="0" rtlCol="0" anchor="ctr"/>
-          <a:lstStyle/>
-          <a:p>
-            <a:pPr indent="0" marL="0">
-              <a:buNone/>
-            </a:pPr>
-            <a:r>
-              <a:rPr lang="en-US" sz="1900" b="1" dirty="0">
-                <a:solidFill>
-                  <a:srgbClr val="2E5F8A"/>
-                </a:solidFill>
-                <a:latin typeface="Cambria" pitchFamily="34" charset="0"/>
-                <a:ea typeface="Cambria" pitchFamily="34" charset="-122"/>
-                <a:cs typeface="Cambria" pitchFamily="34" charset="-120"/>
-              </a:rPr>
-              <a:t>a repo with Pages switched on</a:t>
-            </a:r>
-            <a:endParaRPr lang="en-US" sz="1900" dirty="0"/>
-          </a:p>
-        </p:txBody>
-      </p:sp>
-      <p:sp>
-        <p:nvSpPr>
-          <p:cNvPr id="9" name="Text 7"/>
-          <p:cNvSpPr/>
-          <p:nvPr/>
-        </p:nvSpPr>
-        <p:spPr>
-          <a:xfrm>
-            <a:off x="5394960" y="3520440"/>
-            <a:ext cx="5760720" cy="822960"/>
-          </a:xfrm>
-          <a:prstGeom prst="rect">
-            <a:avLst/>
-          </a:prstGeom>
-          <a:noFill/>
-          <a:ln/>
-        </p:spPr>
-        <p:txBody>
-          <a:bodyPr wrap="square" lIns="0" tIns="0" rIns="0" bIns="0" rtlCol="0" anchor="ctr"/>
-          <a:lstStyle/>
-          <a:p>
-            <a:pPr indent="0" marL="0">
-              <a:buNone/>
-            </a:pPr>
-            <a:r>
-              <a:rPr lang="en-US" sz="1400" dirty="0">
-                <a:solidFill>
-                  <a:srgbClr val="1A1A1A"/>
-                </a:solidFill>
-                <a:latin typeface="Calibri" pitchFamily="34" charset="0"/>
-                <a:ea typeface="Calibri" pitchFamily="34" charset="-122"/>
-                <a:cs typeface="Calibri" pitchFamily="34" charset="-120"/>
-              </a:rPr>
-              <a:t>so a live URL exists today, not in Week 9 under deadline.</a:t>
-            </a:r>
-            <a:endParaRPr lang="en-US" sz="1400" dirty="0"/>
-          </a:p>
-        </p:txBody>
-      </p:sp>
-      <p:sp>
-        <p:nvSpPr>
-          <p:cNvPr id="10" name="Shape 8"/>
-          <p:cNvSpPr/>
-          <p:nvPr/>
-        </p:nvSpPr>
-        <p:spPr>
-          <a:xfrm>
-            <a:off x="640080" y="4663440"/>
-            <a:ext cx="10881360" cy="1097280"/>
-          </a:xfrm>
-          <a:prstGeom prst="roundRect">
-            <a:avLst>
-              <a:gd name="adj" fmla="val 8333"/>
-            </a:avLst>
-          </a:prstGeom>
-          <a:solidFill>
-            <a:srgbClr val="F4EEE8"/>
-          </a:solidFill>
-          <a:ln/>
-        </p:spPr>
-      </p:sp>
-      <p:sp>
-        <p:nvSpPr>
-          <p:cNvPr id="11" name="Text 9"/>
-          <p:cNvSpPr/>
-          <p:nvPr/>
-        </p:nvSpPr>
-        <p:spPr>
-          <a:xfrm>
-            <a:off x="1005840" y="4800600"/>
-            <a:ext cx="4206240" cy="822960"/>
-          </a:xfrm>
-          <a:prstGeom prst="rect">
-            <a:avLst/>
-          </a:prstGeom>
-          <a:noFill/>
-          <a:ln/>
-        </p:spPr>
-        <p:txBody>
-          <a:bodyPr wrap="square" lIns="0" tIns="0" rIns="0" bIns="0" rtlCol="0" anchor="ctr"/>
-          <a:lstStyle/>
-          <a:p>
-            <a:pPr indent="0" marL="0">
-              <a:buNone/>
-            </a:pPr>
-            <a:r>
-              <a:rPr lang="en-US" sz="1900" b="1" dirty="0">
-                <a:solidFill>
-                  <a:srgbClr val="7A3B2E"/>
-                </a:solidFill>
-                <a:latin typeface="Cambria" pitchFamily="34" charset="0"/>
-                <a:ea typeface="Cambria" pitchFamily="34" charset="-122"/>
-                <a:cs typeface="Cambria" pitchFamily="34" charset="-120"/>
-              </a:rPr>
-              <a:t>two minutes of pitch, to a partner</a:t>
-            </a:r>
-            <a:endParaRPr lang="en-US" sz="1900" dirty="0"/>
-          </a:p>
-        </p:txBody>
-      </p:sp>
-      <p:sp>
-        <p:nvSpPr>
-          <p:cNvPr id="12" name="Text 10"/>
-          <p:cNvSpPr/>
-          <p:nvPr/>
-        </p:nvSpPr>
-        <p:spPr>
-          <a:xfrm>
-            <a:off x="5394960" y="4800600"/>
-            <a:ext cx="5760720" cy="822960"/>
-          </a:xfrm>
-          <a:prstGeom prst="rect">
-            <a:avLst/>
-          </a:prstGeom>
-          <a:noFill/>
-          <a:ln/>
-        </p:spPr>
-        <p:txBody>
-          <a:bodyPr wrap="square" lIns="0" tIns="0" rIns="0" bIns="0" rtlCol="0" anchor="ctr"/>
-          <a:lstStyle/>
-          <a:p>
-            <a:pPr indent="0" marL="0">
-              <a:buNone/>
-            </a:pPr>
-            <a:r>
-              <a:rPr lang="en-US" sz="1400" dirty="0">
-                <a:solidFill>
-                  <a:srgbClr val="1A1A1A"/>
-                </a:solidFill>
-                <a:latin typeface="Calibri" pitchFamily="34" charset="0"/>
-                <a:ea typeface="Calibri" pitchFamily="34" charset="-122"/>
-                <a:cs typeface="Calibri" pitchFamily="34" charset="-120"/>
-              </a:rPr>
-              <a:t>corpus, two methods, what would count as a finding.</a:t>
-            </a:r>
-            <a:endParaRPr lang="en-US" sz="1400" dirty="0"/>
-          </a:p>
-        </p:txBody>
-      </p:sp>
-      <p:sp>
-        <p:nvSpPr>
-          <p:cNvPr id="13" name="Text 11"/>
-          <p:cNvSpPr/>
-          <p:nvPr/>
-        </p:nvSpPr>
-        <p:spPr>
-          <a:xfrm>
-            <a:off x="640080" y="6263640"/>
-            <a:ext cx="10881360" cy="365760"/>
-          </a:xfrm>
-          <a:prstGeom prst="rect">
-            <a:avLst/>
-          </a:prstGeom>
-          <a:noFill/>
-          <a:ln/>
-        </p:spPr>
-        <p:txBody>
-          <a:bodyPr wrap="square" rtlCol="0" anchor="ctr"/>
-          <a:lstStyle/>
-          <a:p>
-            <a:pPr indent="0" marL="0">
-              <a:buNone/>
-            </a:pPr>
-            <a:r>
-              <a:rPr lang="en-US" sz="1100" i="1" dirty="0">
-                <a:solidFill>
-                  <a:srgbClr val="6B6B63"/>
-                </a:solidFill>
-                <a:latin typeface="Calibri" pitchFamily="34" charset="0"/>
-                <a:ea typeface="Calibri" pitchFamily="34" charset="-122"/>
-                <a:cs typeface="Calibri" pitchFamily="34" charset="-120"/>
-              </a:rPr>
-              <a:t>A null result, honestly shown, is a complete project. The pivot kit is insurance, not a demotion.</a:t>
-            </a:r>
-            <a:endParaRPr lang="en-US" sz="1100" dirty="0"/>
+              <a:t>One page a second is a reader. Fifty a second is an outage.</a:t>
+            </a:r>
+            <a:endParaRPr lang="en-US" sz="1000" dirty="0"/>
           </a:p>
         </p:txBody>
       </p:sp>
@@ -11276,6 +11127,455 @@
 <file path=ppt/slides/slide33.xml><?xml version="1.0" encoding="utf-8"?>
 <p:sld xmlns:a="http://schemas.openxmlformats.org/drawingml/2006/main" xmlns:r="http://schemas.openxmlformats.org/officeDocument/2006/relationships" xmlns:p="http://schemas.openxmlformats.org/presentationml/2006/main">
   <p:cSld name="Slide 33">
+    <p:bg>
+      <p:bgPr>
+        <a:solidFill>
+          <a:srgbClr val="FFFFFF"/>
+        </a:solidFill>
+      </p:bgPr>
+    </p:bg>
+    <p:spTree>
+      <p:nvGrpSpPr>
+        <p:cNvPr id="1" name=""/>
+        <p:cNvGrpSpPr/>
+        <p:nvPr/>
+      </p:nvGrpSpPr>
+      <p:grpSpPr>
+        <a:xfrm>
+          <a:off x="0" y="0"/>
+          <a:ext cx="0" cy="0"/>
+          <a:chOff x="0" y="0"/>
+          <a:chExt cx="0" cy="0"/>
+        </a:xfrm>
+      </p:grpSpPr>
+      <p:sp>
+        <p:nvSpPr>
+          <p:cNvPr id="2" name="Text 0"/>
+          <p:cNvSpPr/>
+          <p:nvPr/>
+        </p:nvSpPr>
+        <p:spPr>
+          <a:xfrm>
+            <a:off x="640080" y="502920"/>
+            <a:ext cx="10515600" cy="320040"/>
+          </a:xfrm>
+          <a:prstGeom prst="rect">
+            <a:avLst/>
+          </a:prstGeom>
+          <a:noFill/>
+          <a:ln/>
+        </p:spPr>
+        <p:txBody>
+          <a:bodyPr wrap="square" rtlCol="0" anchor="ctr"/>
+          <a:lstStyle/>
+          <a:p>
+            <a:pPr indent="0" marL="0">
+              <a:buNone/>
+            </a:pPr>
+            <a:r>
+              <a:rPr lang="en-US" sz="1300" b="1" spc="300" kern="0" dirty="0">
+                <a:solidFill>
+                  <a:srgbClr val="3F6F5F"/>
+                </a:solidFill>
+                <a:latin typeface="Calibri" pitchFamily="34" charset="0"/>
+                <a:ea typeface="Calibri" pitchFamily="34" charset="-122"/>
+                <a:cs typeface="Calibri" pitchFamily="34" charset="-120"/>
+              </a:rPr>
+              <a:t>YOUR TURN · 20 MINUTES</a:t>
+            </a:r>
+            <a:endParaRPr lang="en-US" sz="1300" dirty="0"/>
+          </a:p>
+        </p:txBody>
+      </p:sp>
+      <p:sp>
+        <p:nvSpPr>
+          <p:cNvPr id="3" name="Text 1"/>
+          <p:cNvSpPr/>
+          <p:nvPr/>
+        </p:nvSpPr>
+        <p:spPr>
+          <a:xfrm>
+            <a:off x="640080" y="868680"/>
+            <a:ext cx="10972800" cy="777240"/>
+          </a:xfrm>
+          <a:prstGeom prst="rect">
+            <a:avLst/>
+          </a:prstGeom>
+          <a:noFill/>
+          <a:ln/>
+        </p:spPr>
+        <p:txBody>
+          <a:bodyPr wrap="square" rtlCol="0" anchor="t"/>
+          <a:lstStyle/>
+          <a:p>
+            <a:pPr indent="0" marL="0">
+              <a:buNone/>
+            </a:pPr>
+            <a:r>
+              <a:rPr lang="en-US" sz="3400" b="1" dirty="0">
+                <a:solidFill>
+                  <a:srgbClr val="1A1A1A"/>
+                </a:solidFill>
+                <a:latin typeface="Cambria" pitchFamily="34" charset="0"/>
+                <a:ea typeface="Cambria" pitchFamily="34" charset="-122"/>
+                <a:cs typeface="Cambria" pitchFamily="34" charset="-120"/>
+              </a:rPr>
+              <a:t>Collect it, save it, start the repo</a:t>
+            </a:r>
+            <a:endParaRPr lang="en-US" sz="3400" dirty="0"/>
+          </a:p>
+        </p:txBody>
+      </p:sp>
+      <p:sp>
+        <p:nvSpPr>
+          <p:cNvPr id="4" name="Shape 2"/>
+          <p:cNvSpPr/>
+          <p:nvPr/>
+        </p:nvSpPr>
+        <p:spPr>
+          <a:xfrm>
+            <a:off x="640080" y="2103120"/>
+            <a:ext cx="10881360" cy="1097280"/>
+          </a:xfrm>
+          <a:prstGeom prst="roundRect">
+            <a:avLst>
+              <a:gd name="adj" fmla="val 8333"/>
+            </a:avLst>
+          </a:prstGeom>
+          <a:solidFill>
+            <a:srgbClr val="F4EEE8"/>
+          </a:solidFill>
+          <a:ln/>
+        </p:spPr>
+      </p:sp>
+      <p:sp>
+        <p:nvSpPr>
+          <p:cNvPr id="5" name="Text 3"/>
+          <p:cNvSpPr/>
+          <p:nvPr/>
+        </p:nvSpPr>
+        <p:spPr>
+          <a:xfrm>
+            <a:off x="1005840" y="2240280"/>
+            <a:ext cx="4206240" cy="822960"/>
+          </a:xfrm>
+          <a:prstGeom prst="rect">
+            <a:avLst/>
+          </a:prstGeom>
+          <a:noFill/>
+          <a:ln/>
+        </p:spPr>
+        <p:txBody>
+          <a:bodyPr wrap="square" lIns="0" tIns="0" rIns="0" bIns="0" rtlCol="0" anchor="ctr"/>
+          <a:lstStyle/>
+          <a:p>
+            <a:pPr indent="0" marL="0">
+              <a:buNone/>
+            </a:pPr>
+            <a:r>
+              <a:rPr lang="en-US" sz="1900" b="1" dirty="0">
+                <a:solidFill>
+                  <a:srgbClr val="3F6F5F"/>
+                </a:solidFill>
+                <a:latin typeface="Cambria" pitchFamily="34" charset="0"/>
+                <a:ea typeface="Cambria" pitchFamily="34" charset="-122"/>
+                <a:cs typeface="Cambria" pitchFamily="34" charset="-120"/>
+              </a:rPr>
+              <a:t>a file in your Drive folder</a:t>
+            </a:r>
+            <a:endParaRPr lang="en-US" sz="1900" dirty="0"/>
+          </a:p>
+        </p:txBody>
+      </p:sp>
+      <p:sp>
+        <p:nvSpPr>
+          <p:cNvPr id="6" name="Text 4"/>
+          <p:cNvSpPr/>
+          <p:nvPr/>
+        </p:nvSpPr>
+        <p:spPr>
+          <a:xfrm>
+            <a:off x="5394960" y="2240280"/>
+            <a:ext cx="5760720" cy="822960"/>
+          </a:xfrm>
+          <a:prstGeom prst="rect">
+            <a:avLst/>
+          </a:prstGeom>
+          <a:noFill/>
+          <a:ln/>
+        </p:spPr>
+        <p:txBody>
+          <a:bodyPr wrap="square" lIns="0" tIns="0" rIns="0" bIns="0" rtlCol="0" anchor="ctr"/>
+          <a:lstStyle/>
+          <a:p>
+            <a:pPr indent="0" marL="0">
+              <a:buNone/>
+            </a:pPr>
+            <a:r>
+              <a:rPr lang="en-US" sz="1400" dirty="0">
+                <a:solidFill>
+                  <a:srgbClr val="1A1A1A"/>
+                </a:solidFill>
+                <a:latin typeface="Calibri" pitchFamily="34" charset="0"/>
+                <a:ea typeface="Calibri" pitchFamily="34" charset="-122"/>
+                <a:cs typeface="Calibri" pitchFamily="34" charset="-120"/>
+              </a:rPr>
+              <a:t>Week 5 starts from it. Colab forgets everything else.</a:t>
+            </a:r>
+            <a:endParaRPr lang="en-US" sz="1400" dirty="0"/>
+          </a:p>
+        </p:txBody>
+      </p:sp>
+      <p:sp>
+        <p:nvSpPr>
+          <p:cNvPr id="7" name="Shape 5"/>
+          <p:cNvSpPr/>
+          <p:nvPr/>
+        </p:nvSpPr>
+        <p:spPr>
+          <a:xfrm>
+            <a:off x="640080" y="3383280"/>
+            <a:ext cx="10881360" cy="1097280"/>
+          </a:xfrm>
+          <a:prstGeom prst="roundRect">
+            <a:avLst>
+              <a:gd name="adj" fmla="val 8333"/>
+            </a:avLst>
+          </a:prstGeom>
+          <a:solidFill>
+            <a:srgbClr val="F4EEE8"/>
+          </a:solidFill>
+          <a:ln/>
+        </p:spPr>
+      </p:sp>
+      <p:sp>
+        <p:nvSpPr>
+          <p:cNvPr id="8" name="Text 6"/>
+          <p:cNvSpPr/>
+          <p:nvPr/>
+        </p:nvSpPr>
+        <p:spPr>
+          <a:xfrm>
+            <a:off x="1005840" y="3520440"/>
+            <a:ext cx="4206240" cy="822960"/>
+          </a:xfrm>
+          <a:prstGeom prst="rect">
+            <a:avLst/>
+          </a:prstGeom>
+          <a:noFill/>
+          <a:ln/>
+        </p:spPr>
+        <p:txBody>
+          <a:bodyPr wrap="square" lIns="0" tIns="0" rIns="0" bIns="0" rtlCol="0" anchor="ctr"/>
+          <a:lstStyle/>
+          <a:p>
+            <a:pPr indent="0" marL="0">
+              <a:buNone/>
+            </a:pPr>
+            <a:r>
+              <a:rPr lang="en-US" sz="1900" b="1" dirty="0">
+                <a:solidFill>
+                  <a:srgbClr val="2E5F8A"/>
+                </a:solidFill>
+                <a:latin typeface="Cambria" pitchFamily="34" charset="0"/>
+                <a:ea typeface="Cambria" pitchFamily="34" charset="-122"/>
+                <a:cs typeface="Cambria" pitchFamily="34" charset="-120"/>
+              </a:rPr>
+              <a:t>a repo with Pages switched on</a:t>
+            </a:r>
+            <a:endParaRPr lang="en-US" sz="1900" dirty="0"/>
+          </a:p>
+        </p:txBody>
+      </p:sp>
+      <p:sp>
+        <p:nvSpPr>
+          <p:cNvPr id="9" name="Text 7"/>
+          <p:cNvSpPr/>
+          <p:nvPr/>
+        </p:nvSpPr>
+        <p:spPr>
+          <a:xfrm>
+            <a:off x="5394960" y="3520440"/>
+            <a:ext cx="5760720" cy="822960"/>
+          </a:xfrm>
+          <a:prstGeom prst="rect">
+            <a:avLst/>
+          </a:prstGeom>
+          <a:noFill/>
+          <a:ln/>
+        </p:spPr>
+        <p:txBody>
+          <a:bodyPr wrap="square" lIns="0" tIns="0" rIns="0" bIns="0" rtlCol="0" anchor="ctr"/>
+          <a:lstStyle/>
+          <a:p>
+            <a:pPr indent="0" marL="0">
+              <a:buNone/>
+            </a:pPr>
+            <a:r>
+              <a:rPr lang="en-US" sz="1400" dirty="0">
+                <a:solidFill>
+                  <a:srgbClr val="1A1A1A"/>
+                </a:solidFill>
+                <a:latin typeface="Calibri" pitchFamily="34" charset="0"/>
+                <a:ea typeface="Calibri" pitchFamily="34" charset="-122"/>
+                <a:cs typeface="Calibri" pitchFamily="34" charset="-120"/>
+              </a:rPr>
+              <a:t>so a live URL exists today, not in Week 9 under deadline.</a:t>
+            </a:r>
+            <a:endParaRPr lang="en-US" sz="1400" dirty="0"/>
+          </a:p>
+        </p:txBody>
+      </p:sp>
+      <p:sp>
+        <p:nvSpPr>
+          <p:cNvPr id="10" name="Shape 8"/>
+          <p:cNvSpPr/>
+          <p:nvPr/>
+        </p:nvSpPr>
+        <p:spPr>
+          <a:xfrm>
+            <a:off x="640080" y="4663440"/>
+            <a:ext cx="10881360" cy="1097280"/>
+          </a:xfrm>
+          <a:prstGeom prst="roundRect">
+            <a:avLst>
+              <a:gd name="adj" fmla="val 8333"/>
+            </a:avLst>
+          </a:prstGeom>
+          <a:solidFill>
+            <a:srgbClr val="F4EEE8"/>
+          </a:solidFill>
+          <a:ln/>
+        </p:spPr>
+      </p:sp>
+      <p:sp>
+        <p:nvSpPr>
+          <p:cNvPr id="11" name="Text 9"/>
+          <p:cNvSpPr/>
+          <p:nvPr/>
+        </p:nvSpPr>
+        <p:spPr>
+          <a:xfrm>
+            <a:off x="1005840" y="4800600"/>
+            <a:ext cx="4206240" cy="822960"/>
+          </a:xfrm>
+          <a:prstGeom prst="rect">
+            <a:avLst/>
+          </a:prstGeom>
+          <a:noFill/>
+          <a:ln/>
+        </p:spPr>
+        <p:txBody>
+          <a:bodyPr wrap="square" lIns="0" tIns="0" rIns="0" bIns="0" rtlCol="0" anchor="ctr"/>
+          <a:lstStyle/>
+          <a:p>
+            <a:pPr indent="0" marL="0">
+              <a:buNone/>
+            </a:pPr>
+            <a:r>
+              <a:rPr lang="en-US" sz="1900" b="1" dirty="0">
+                <a:solidFill>
+                  <a:srgbClr val="7A3B2E"/>
+                </a:solidFill>
+                <a:latin typeface="Cambria" pitchFamily="34" charset="0"/>
+                <a:ea typeface="Cambria" pitchFamily="34" charset="-122"/>
+                <a:cs typeface="Cambria" pitchFamily="34" charset="-120"/>
+              </a:rPr>
+              <a:t>two minutes of pitch, to a partner</a:t>
+            </a:r>
+            <a:endParaRPr lang="en-US" sz="1900" dirty="0"/>
+          </a:p>
+        </p:txBody>
+      </p:sp>
+      <p:sp>
+        <p:nvSpPr>
+          <p:cNvPr id="12" name="Text 10"/>
+          <p:cNvSpPr/>
+          <p:nvPr/>
+        </p:nvSpPr>
+        <p:spPr>
+          <a:xfrm>
+            <a:off x="5394960" y="4800600"/>
+            <a:ext cx="5760720" cy="822960"/>
+          </a:xfrm>
+          <a:prstGeom prst="rect">
+            <a:avLst/>
+          </a:prstGeom>
+          <a:noFill/>
+          <a:ln/>
+        </p:spPr>
+        <p:txBody>
+          <a:bodyPr wrap="square" lIns="0" tIns="0" rIns="0" bIns="0" rtlCol="0" anchor="ctr"/>
+          <a:lstStyle/>
+          <a:p>
+            <a:pPr indent="0" marL="0">
+              <a:buNone/>
+            </a:pPr>
+            <a:r>
+              <a:rPr lang="en-US" sz="1400" dirty="0">
+                <a:solidFill>
+                  <a:srgbClr val="1A1A1A"/>
+                </a:solidFill>
+                <a:latin typeface="Calibri" pitchFamily="34" charset="0"/>
+                <a:ea typeface="Calibri" pitchFamily="34" charset="-122"/>
+                <a:cs typeface="Calibri" pitchFamily="34" charset="-120"/>
+              </a:rPr>
+              <a:t>corpus, two methods, what would count as a finding.</a:t>
+            </a:r>
+            <a:endParaRPr lang="en-US" sz="1400" dirty="0"/>
+          </a:p>
+        </p:txBody>
+      </p:sp>
+      <p:sp>
+        <p:nvSpPr>
+          <p:cNvPr id="13" name="Text 11"/>
+          <p:cNvSpPr/>
+          <p:nvPr/>
+        </p:nvSpPr>
+        <p:spPr>
+          <a:xfrm>
+            <a:off x="640080" y="6263640"/>
+            <a:ext cx="10881360" cy="365760"/>
+          </a:xfrm>
+          <a:prstGeom prst="rect">
+            <a:avLst/>
+          </a:prstGeom>
+          <a:noFill/>
+          <a:ln/>
+        </p:spPr>
+        <p:txBody>
+          <a:bodyPr wrap="square" rtlCol="0" anchor="ctr"/>
+          <a:lstStyle/>
+          <a:p>
+            <a:pPr indent="0" marL="0">
+              <a:buNone/>
+            </a:pPr>
+            <a:r>
+              <a:rPr lang="en-US" sz="1100" i="1" dirty="0">
+                <a:solidFill>
+                  <a:srgbClr val="6B6B63"/>
+                </a:solidFill>
+                <a:latin typeface="Calibri" pitchFamily="34" charset="0"/>
+                <a:ea typeface="Calibri" pitchFamily="34" charset="-122"/>
+                <a:cs typeface="Calibri" pitchFamily="34" charset="-120"/>
+              </a:rPr>
+              <a:t>A null result, honestly shown, is a complete project. The pivot kit is insurance, not a demotion.</a:t>
+            </a:r>
+            <a:endParaRPr lang="en-US" sz="1100" dirty="0"/>
+          </a:p>
+        </p:txBody>
+      </p:sp>
+    </p:spTree>
+  </p:cSld>
+  <p:clrMapOvr>
+    <a:masterClrMapping/>
+  </p:clrMapOvr>
+</p:sld>
+</file>
+
+<file path=ppt/slides/slide34.xml><?xml version="1.0" encoding="utf-8"?>
+<p:sld xmlns:a="http://schemas.openxmlformats.org/drawingml/2006/main" xmlns:r="http://schemas.openxmlformats.org/officeDocument/2006/relationships" xmlns:p="http://schemas.openxmlformats.org/presentationml/2006/main">
+  <p:cSld name="Slide 34">
     <p:bg>
       <p:bgPr>
         <a:solidFill>
